--- a/downloads/presentations/modules/exe-400.pptx
+++ b/downloads/presentations/modules/exe-400.pptx
@@ -614,7 +614,8 @@
               <a:t>Technical and Governance Deep Dive
 Decision rights should be defined across the full AI lifecycle. During ideation, leadership may decide whether a use case aligns with agency priorities. During review, governance may decide whether the use case is low, moderate, or high risk. During procurement, authorized officials decide whether vendor claims, contract language, and technical requirements are sufficient. During implementation, program and technical owners decide whether acceptance criteria have been met. During operations, defined owners decide whether monitoring results require adjustment, escalation, or retirement.
 A public health accountability model should separate approval authority from operational ownership. An executive may approve a use case, but the program owner remains accountable for how the workflow functions. A privacy officer may advise on data safeguards, but the program cannot treat that consultation as a substitute for ongoing compliance. A vendor may provide model documentation, but the agency must decide whether the documentation is sufficient for its context and authorities.
-Decision rights should also include stop authority. Agencies often define who can approve a tool but fail to define who can pause it. Stop authority is essential for AI because model performance, data flows, user behavior, and public conditions can change over time. A clear pause process helps staff report concerns early rather than waiting for a serious incident.</a:t>
+Decision rights should also include stop authority. Agencies often define who can approve a tool but fail to define who can pause it. Stop authority is essential for AI because model performance, data flows, user behavior, and public conditions can change over time. A clear pause process helps staff report concerns early rather than waiting for a serious incident.
+Application guidance: Translate this concept into clear decision rights, review steps, documentation expectations, and escalation paths before an AI-supported workflow is approved.</a:t>
             </a:r>
             <a:endParaRPr lang="en-US" dirty="0"/>
           </a:p>
@@ -704,7 +705,8 @@
               <a:rPr lang="en-US" dirty="0"/>
               <a:t>Risks, Failure Modes, and Guardrails
 One risk is accountability diffusion. When everyone is involved but no one is accountable, important concerns may go unresolved. A guardrail is to assign a named program owner and governance owner for every AI use case.
-Another risk is inappropriate risk acceptance by staff who lack authority. A frontline supervisor may feel pressure to continue a tool despite known concerns. A guardrail is to define which risks can be accepted at the program level and which require executive or governance approval.</a:t>
+Another risk is inappropriate risk acceptance by staff who lack authority. A frontline supervisor may feel pressure to continue a tool despite known concerns. A guardrail is to define which risks can be accepted at the program level and which require executive or governance approval.
+Application guidance: Identify what could go wrong, who could be affected, what safeguards are needed, and what evidence should be reviewed before use expands.</a:t>
             </a:r>
             <a:endParaRPr lang="en-US" dirty="0"/>
           </a:p>
@@ -793,7 +795,8 @@
             <a:r>
               <a:rPr lang="en-US" dirty="0"/>
               <a:t>Application to AI-Supported Workflows
-For generative AI, decision rights should clarify who approves public release of AI-assisted content. For predictive analytics, leaders should decide whether the score may inform resource allocation or only support review. For agentic AI, decision rights should define who authorizes system actions, rollback procedures, and changes to permissions. Accountability should remain tied to public health roles and legal authority.</a:t>
+For generative AI, decision rights should clarify who approves public release of AI-assisted content. For predictive analytics, leaders should decide whether the score may inform resource allocation or only support review. For agentic AI, decision rights should define who authorizes system actions, rollback procedures, and changes to permissions. Accountability should remain tied to public health roles and legal authority.
+Application guidance: Use the concept to clarify workflow changes, dependencies, staffing, procurement requirements, training needs, and implementation checkpoints.</a:t>
             </a:r>
             <a:endParaRPr lang="en-US" dirty="0"/>
           </a:p>
@@ -884,7 +887,8 @@
               <a:t>Reflection Questions
 Which current or proposed AI use case in your agency raises this leadership or governance issue most clearly?
 Who currently has authority to make decisions about this issue, and is that authority documented?
-What evidence would governance or leadership need before approving the use case?</a:t>
+What evidence would governance or leadership need before approving the use case?
+Application guidance: Connect the concept to public health purpose, responsible use, required safeguards, documentation, and the next action a department should take.</a:t>
             </a:r>
             <a:endParaRPr lang="en-US" dirty="0"/>
           </a:p>
@@ -974,7 +978,8 @@
               <a:rPr lang="en-US" dirty="0"/>
               <a:t>Reflection Questions
 Which staff, partners, or communities would be affected if this issue were handled poorly?
-What policy, process, or artifact should be created or updated after this module?</a:t>
+What policy, process, or artifact should be created or updated after this module?
+Application guidance: Connect the concept to public health purpose, responsible use, required safeguards, documentation, and the next action a department should take.</a:t>
             </a:r>
             <a:endParaRPr lang="en-US" dirty="0"/>
           </a:p>
@@ -1063,7 +1068,8 @@
             <a:r>
               <a:rPr lang="en-US" dirty="0"/>
               <a:t>Practical Exercise
-Create a decision-rights matrix for one AI use case. Include approval, data access, validation, launch, monitoring, incident escalation, risk acceptance, public communication, and retirement.</a:t>
+Create a decision-rights matrix for one AI use case. Include approval, data access, validation, launch, monitoring, incident escalation, risk acceptance, public communication, and retirement.
+Application guidance: Use the assignment to test whether you can explain the concept, apply it to a realistic public health situation, and identify what would need review before the work moves forward.</a:t>
             </a:r>
             <a:endParaRPr lang="en-US" dirty="0"/>
           </a:p>
@@ -1152,7 +1158,8 @@
             <a:r>
               <a:rPr lang="en-US" dirty="0"/>
               <a:t>Before You Begin
-Choose a real or realistic public health AI use case. Document assumptions, unresolved questions, and which agency roles would need to review the artifact before it is adopted. The exercise should produce a work product that could support governance review, leadership discussion, implementation planning, or policy development.</a:t>
+Choose a real or realistic public health AI use case. Document assumptions, unresolved questions, and which agency roles would need to review the artifact before it is adopted. The exercise should produce a work product that could support governance review, leadership discussion, implementation planning, or policy development.
+Application guidance: Connect the concept to public health purpose, responsible use, required safeguards, documentation, and the next action a department should take.</a:t>
             </a:r>
             <a:endParaRPr lang="en-US" dirty="0"/>
           </a:p>
@@ -1241,7 +1248,8 @@
             <a:r>
               <a:rPr lang="en-US" dirty="0"/>
               <a:t>Expected Artifact or Evidence
-Decision-rights matrix; RACI table; risk acceptance thresholds; escalation authority list.</a:t>
+Decision-rights matrix; RACI table; risk acceptance thresholds; escalation authority list.
+Application guidance: Connect the concept to public health purpose, responsible use, required safeguards, documentation, and the next action a department should take.</a:t>
             </a:r>
             <a:endParaRPr lang="en-US" dirty="0"/>
           </a:p>
@@ -1330,7 +1338,8 @@
             <a:r>
               <a:rPr lang="en-US" dirty="0"/>
               <a:t>Expected Assignment
-Decision-rights matrix; RACI table; risk acceptance thresholds; escalation authority list.</a:t>
+Decision-rights matrix; RACI table; risk acceptance thresholds; escalation authority list.
+Application guidance: Use the assignment to test whether you can explain the concept, apply it to a realistic public health situation, and identify what would need review before the work moves forward.</a:t>
             </a:r>
             <a:endParaRPr lang="en-US" dirty="0"/>
           </a:p>
@@ -1423,7 +1432,8 @@
 2. Which practice best supports accountable public health AI governance?
 3. When should an AI use case be escalated for leadership or governance review?
 4. What is weak evidence of completion for a leadership and governance module?
-5. What should leaders do when an AI use case has meaningful benefits but unresolved risks?</a:t>
+5. What should leaders do when an AI use case has meaningful benefits but unresolved risks?
+Application guidance: Use the assignment to test whether you can explain the concept, apply it to a realistic public health situation, and identify what would need review before the work moves forward.</a:t>
             </a:r>
             <a:endParaRPr lang="en-US" dirty="0"/>
           </a:p>
@@ -1608,7 +1618,8 @@
 NIST Generative AI Profile: https://www.nist.gov/publications/artificial-intelligence-risk-management-framework-generative-artificial-intelligence
 NIST Privacy Framework
 CDC Public Health Data Strategy and Data Modernization resources: https://www.cdc.gov/public-health-data-strategy/php/about/index.html
-WHO Ethics and Governance of Artificial Intelligence for Health: https://www.who.int/publications/i/item/9789240029200</a:t>
+WHO Ethics and Governance of Artificial Intelligence for Health: https://www.who.int/publications/i/item/9789240029200
+Application guidance: Connect the concept to public health purpose, responsible use, required safeguards, documentation, and the next action a department should take.</a:t>
             </a:r>
             <a:endParaRPr lang="en-US" dirty="0"/>
           </a:p>
@@ -1698,7 +1709,8 @@
               <a:rPr lang="en-US" dirty="0"/>
               <a:t>References and Resources
 OMB Memorandum M-24-10 on federal AI governance, risk management, and innovation, where relevant to public-sector governance models
-Agency strategic plans, procurement policies, privacy policies, cybersecurity policies, records policies, and equity plans</a:t>
+Agency strategic plans, procurement policies, privacy policies, cybersecurity policies, records policies, and equity plans
+Application guidance: Connect the concept to public health purpose, responsible use, required safeguards, documentation, and the next action a department should take.</a:t>
             </a:r>
             <a:endParaRPr lang="en-US" dirty="0"/>
           </a:p>
@@ -1977,7 +1989,8 @@
 Identify executive, program, technical, privacy, legal, security, and governance responsibilities for AI decisions.
 Create a decision-rights matrix for AI use case approval, risk acceptance, monitoring, escalation, and retirement.
 Distinguish between consultative input, approval authority, and operational ownership.
-Define accountability expectations for vendor-supported AI tools and internally developed tools.</a:t>
+Define accountability expectations for vendor-supported AI tools and internally developed tools.
+Application guidance: Use the assignment to test whether you can explain the concept, apply it to a realistic public health situation, and identify what would need review before the work moves forward.</a:t>
             </a:r>
             <a:endParaRPr lang="en-US" dirty="0"/>
           </a:p>
@@ -2067,7 +2080,8 @@
               <a:rPr lang="en-US" dirty="0"/>
               <a:t>Module Overview
 AI governance can only work when decision rights are clear. Leaders need to know who can approve a pilot, who can accept residual risk, who can authorize use of sensitive data, who can pause a tool, and who is accountable when an AI-supported workflow affects public health action. Ambiguous accountability is especially risky in public health because AI outputs may influence investigations, communications, referrals, resource allocation, and community trust.
-This module focuses on executive decision rights and accountability structures. Learners examine how to assign ownership across strategy, risk, technical implementation, program operations, privacy, legal, cybersecurity, procurement, communications, and community accountability. The module emphasizes that accountability cannot be delegated to a vendor or to the AI system itself. Public health agencies remain accountable for how AI is selected, used, monitored, and explained.</a:t>
+This module focuses on executive decision rights and accountability structures. Learners examine how to assign ownership across strategy, risk, technical implementation, program operations, privacy, legal, cybersecurity, procurement, communications, and community accountability. The module emphasizes that accountability cannot be delegated to a vendor or to the AI system itself. Public health agencies remain accountable for how AI is selected, used, monitored, and explained.
+Application guidance: Connect the concept to public health purpose, responsible use, required safeguards, documentation, and the next action a department should take.</a:t>
             </a:r>
             <a:endParaRPr lang="en-US" dirty="0"/>
           </a:p>
@@ -2156,7 +2170,8 @@
             <a:r>
               <a:rPr lang="en-US" dirty="0"/>
               <a:t>Jurisdiction and Agency Policy Note
-This module provides national-level training guidance for public health agencies and partners. It is not legal advice and does not replace review by agency legal counsel, privacy officers, procurement officials, civil rights staff, records officers, or other authorized decision-makers. Requirements may vary by state, locality, territory, Tribe, agency, funding source, data-sharing agreement, emergency authority, and organizational policy. Learners should use this module to identify the issues that require review and should confirm applicable requirements before approving, procuring, deploying, or publicly communicating about AI-supported work.</a:t>
+This module provides national-level training guidance for public health agencies and partners. It is not legal advice and does not replace review by agency legal counsel, privacy officers, procurement officials, civil rights staff, records officers, or other authorized decision-makers. Requirements may vary by state, locality, territory, Tribe, agency, funding source, data-sharing agreement, emergency authority, and organizational policy. Learners should use this module to identify the issues that require review and should confirm applicable requirements before approving, procuring, deploying, or publicly communicating about AI-supported work.
+Application guidance: Translate this concept into clear decision rights, review steps, documentation expectations, and escalation paths before an AI-supported workflow is approved.</a:t>
             </a:r>
             <a:endParaRPr lang="en-US" dirty="0"/>
           </a:p>
@@ -2246,7 +2261,8 @@
               <a:rPr lang="en-US" dirty="0"/>
               <a:t>Why This Topic Matters for Public Health AI
 AI systems can distribute responsibility across many actors. A vendor may provide the model, IT may manage access, a program may define the workflow, an epidemiologist may review the output, and leadership may approve implementation. Without a formal accountability model, each actor may assume that another party is responsible for validation, monitoring, public explanation, or incident response.
-Clear decision rights support trust and speed. When leaders know which decisions they own, they can act quickly when a tool performs poorly, when a privacy concern emerges, or when a public-facing communication needs review. Decision rights also prevent informal escalation patterns in which difficult decisions are delayed because no one is clearly authorized to accept, modify, or reject a proposed use.</a:t>
+Clear decision rights support trust and speed. When leaders know which decisions they own, they can act quickly when a tool performs poorly, when a privacy concern emerges, or when a public-facing communication needs review. Decision rights also prevent informal escalation patterns in which difficult decisions are delayed because no one is clearly authorized to accept, modify, or reject a proposed use.
+Application guidance: Connect the concept to public health purpose, responsible use, required safeguards, documentation, and the next action a department should take.</a:t>
             </a:r>
             <a:endParaRPr lang="en-US" dirty="0"/>
           </a:p>
@@ -2336,7 +2352,8 @@
               <a:rPr lang="en-US" dirty="0"/>
               <a:t>Public Health Example
 A local health department implements an AI-assisted tool to classify incoming environmental health complaints by topic and urgency. The vendor configured the model, IT manages access, environmental health staff review the queue, and the program director owns the workflow. A complaint is misclassified and a serious housing-related concern is not routed for timely follow-up.
-A decision-rights matrix helps the agency respond. The program owner is accountable for workflow performance, the vendor must provide technical support and documentation, IT reviews logging and access, governance reviews whether use should continue, and an executive sponsor decides whether the risk requires pausing the tool. Because responsibilities are defined in advance, the agency can respond without confusion or blame shifting.</a:t>
+A decision-rights matrix helps the agency respond. The program owner is accountable for workflow performance, the vendor must provide technical support and documentation, IT reviews logging and access, governance reviews whether use should continue, and an executive sponsor decides whether the risk requires pausing the tool. Because responsibilities are defined in advance, the agency can respond without confusion or blame shifting.
+Application guidance: Connect the concept to public health purpose, responsible use, required safeguards, documentation, and the next action a department should take.</a:t>
             </a:r>
             <a:endParaRPr lang="en-US" dirty="0"/>
           </a:p>
@@ -3107,8 +3124,8 @@
         </p:nvSpPr>
         <p:spPr>
           <a:xfrm>
-            <a:off x="9966960" y="6537960"/>
-            <a:ext cx="1645920" cy="201168"/>
+            <a:off x="9646920" y="6537960"/>
+            <a:ext cx="1965960" cy="201168"/>
           </a:xfrm>
           <a:prstGeom prst="rect">
             <a:avLst/>
@@ -3132,7 +3149,7 @@
                 <a:ea typeface="Aptos" pitchFamily="34" charset="-122"/>
                 <a:cs typeface="Aptos" pitchFamily="34" charset="-120"/>
               </a:rPr>
-              <a:t>Â© Paula Soper</a:t>
+              <a:t>Copyright Paula Soper</a:t>
             </a:r>
             <a:endParaRPr lang="en-US" sz="800" dirty="0"/>
           </a:p>
@@ -3179,14 +3196,257 @@
       </p:sp>
       <p:sp>
         <p:nvSpPr>
-          <p:cNvPr id="8" name="Shape 6"/>
+          <p:cNvPr id="8" name="Text 6"/>
           <p:cNvSpPr/>
           <p:nvPr/>
         </p:nvSpPr>
         <p:spPr>
           <a:xfrm>
             <a:off x="640080" y="658368"/>
-            <a:ext cx="420624" cy="420624"/>
+            <a:ext cx="10881360" cy="713232"/>
+          </a:xfrm>
+          <a:prstGeom prst="rect">
+            <a:avLst/>
+          </a:prstGeom>
+          <a:noFill/>
+          <a:ln/>
+        </p:spPr>
+        <p:txBody>
+          <a:bodyPr wrap="square" lIns="0" tIns="0" rIns="0" bIns="0" rtlCol="0" anchor="ctr">
+            <a:normAutofit/>
+          </a:bodyPr>
+          <a:lstStyle/>
+          <a:p>
+            <a:pPr indent="0" marL="0">
+              <a:buNone/>
+            </a:pPr>
+            <a:r>
+              <a:rPr lang="en-US" sz="3400" b="1" dirty="0">
+                <a:solidFill>
+                  <a:srgbClr val="003A63"/>
+                </a:solidFill>
+                <a:latin typeface="Aptos Display" pitchFamily="34" charset="0"/>
+                <a:ea typeface="Aptos Display" pitchFamily="34" charset="-122"/>
+                <a:cs typeface="Aptos Display" pitchFamily="34" charset="-120"/>
+              </a:rPr>
+              <a:t>Technical and Governance Deep Dive</a:t>
+            </a:r>
+            <a:endParaRPr lang="en-US" sz="3400" dirty="0"/>
+          </a:p>
+        </p:txBody>
+      </p:sp>
+      <p:sp>
+        <p:nvSpPr>
+          <p:cNvPr id="9" name="Text 7"/>
+          <p:cNvSpPr/>
+          <p:nvPr/>
+        </p:nvSpPr>
+        <p:spPr>
+          <a:xfrm>
+            <a:off x="868680" y="1508760"/>
+            <a:ext cx="6309360" cy="4160520"/>
+          </a:xfrm>
+          <a:prstGeom prst="rect">
+            <a:avLst/>
+          </a:prstGeom>
+          <a:noFill/>
+          <a:ln/>
+        </p:spPr>
+        <p:txBody>
+          <a:bodyPr wrap="square" lIns="635" tIns="635" rIns="635" bIns="635" rtlCol="0" anchor="t">
+            <a:normAutofit/>
+          </a:bodyPr>
+          <a:lstStyle/>
+          <a:p>
+            <a:r>
+              <a:rPr lang="en-US" sz="2100" dirty="0">
+                <a:solidFill>
+                  <a:srgbClr val="17364A"/>
+                </a:solidFill>
+                <a:latin typeface="Aptos" pitchFamily="34" charset="0"/>
+                <a:ea typeface="Aptos" pitchFamily="34" charset="-122"/>
+                <a:cs typeface="Aptos" pitchFamily="34" charset="-120"/>
+              </a:rPr>
+              <a:t>Decision rights should be defined across the full AI lifecycle.</a:t>
+            </a:r>
+            <a:endParaRPr lang="en-US" sz="2100" dirty="0"/>
+          </a:p>
+          <a:p>
+            <a:r>
+              <a:rPr lang="en-US" sz="2100" dirty="0">
+                <a:solidFill>
+                  <a:srgbClr val="17364A"/>
+                </a:solidFill>
+                <a:latin typeface="Aptos" pitchFamily="34" charset="0"/>
+                <a:ea typeface="Aptos" pitchFamily="34" charset="-122"/>
+                <a:cs typeface="Aptos" pitchFamily="34" charset="-120"/>
+              </a:rPr>
+              <a:t>During ideation, leadership may decide whether a use case aligns with agency priorities.</a:t>
+            </a:r>
+            <a:endParaRPr lang="en-US" sz="2100" dirty="0"/>
+          </a:p>
+          <a:p>
+            <a:r>
+              <a:rPr lang="en-US" sz="2100" dirty="0">
+                <a:solidFill>
+                  <a:srgbClr val="17364A"/>
+                </a:solidFill>
+                <a:latin typeface="Aptos" pitchFamily="34" charset="0"/>
+                <a:ea typeface="Aptos" pitchFamily="34" charset="-122"/>
+                <a:cs typeface="Aptos" pitchFamily="34" charset="-120"/>
+              </a:rPr>
+              <a:t>During review, governance may decide whether the use case is low, moderate, or high risk.</a:t>
+            </a:r>
+            <a:endParaRPr lang="en-US" sz="2100" dirty="0"/>
+          </a:p>
+        </p:txBody>
+      </p:sp>
+      <p:sp>
+        <p:nvSpPr>
+          <p:cNvPr id="10" name="Shape 8"/>
+          <p:cNvSpPr/>
+          <p:nvPr/>
+        </p:nvSpPr>
+        <p:spPr>
+          <a:xfrm>
+            <a:off x="7635240" y="1325880"/>
+            <a:ext cx="3474720" cy="1325880"/>
+          </a:xfrm>
+          <a:prstGeom prst="roundRect">
+            <a:avLst>
+              <a:gd name="adj" fmla="val 8276"/>
+            </a:avLst>
+          </a:prstGeom>
+          <a:solidFill>
+            <a:srgbClr val="EEF8ED"/>
+          </a:solidFill>
+          <a:ln w="12700">
+            <a:solidFill>
+              <a:srgbClr val="B9D7E6"/>
+            </a:solidFill>
+            <a:prstDash val="solid"/>
+          </a:ln>
+        </p:spPr>
+      </p:sp>
+      <p:sp>
+        <p:nvSpPr>
+          <p:cNvPr id="11" name="Text 9"/>
+          <p:cNvSpPr/>
+          <p:nvPr/>
+        </p:nvSpPr>
+        <p:spPr>
+          <a:xfrm>
+            <a:off x="7799832" y="1472184"/>
+            <a:ext cx="3145536" cy="256032"/>
+          </a:xfrm>
+          <a:prstGeom prst="rect">
+            <a:avLst/>
+          </a:prstGeom>
+          <a:noFill/>
+          <a:ln/>
+        </p:spPr>
+        <p:txBody>
+          <a:bodyPr wrap="square" lIns="0" tIns="0" rIns="0" bIns="0" rtlCol="0" anchor="ctr"/>
+          <a:lstStyle/>
+          <a:p>
+            <a:pPr indent="0" marL="0">
+              <a:buNone/>
+            </a:pPr>
+            <a:r>
+              <a:rPr lang="en-US" sz="1300" b="1" dirty="0">
+                <a:solidFill>
+                  <a:srgbClr val="0068B7"/>
+                </a:solidFill>
+                <a:latin typeface="Aptos" pitchFamily="34" charset="0"/>
+                <a:ea typeface="Aptos" pitchFamily="34" charset="-122"/>
+                <a:cs typeface="Aptos" pitchFamily="34" charset="-120"/>
+              </a:rPr>
+              <a:t>Governance lens</a:t>
+            </a:r>
+            <a:endParaRPr lang="en-US" sz="1300" dirty="0"/>
+          </a:p>
+        </p:txBody>
+      </p:sp>
+      <p:sp>
+        <p:nvSpPr>
+          <p:cNvPr id="12" name="Text 10"/>
+          <p:cNvSpPr/>
+          <p:nvPr/>
+        </p:nvSpPr>
+        <p:spPr>
+          <a:xfrm>
+            <a:off x="7799832" y="1828800"/>
+            <a:ext cx="3145536" cy="685800"/>
+          </a:xfrm>
+          <a:prstGeom prst="rect">
+            <a:avLst/>
+          </a:prstGeom>
+          <a:noFill/>
+          <a:ln/>
+        </p:spPr>
+        <p:txBody>
+          <a:bodyPr wrap="square" lIns="0" tIns="0" rIns="0" bIns="0" rtlCol="0" anchor="t">
+            <a:normAutofit/>
+          </a:bodyPr>
+          <a:lstStyle/>
+          <a:p>
+            <a:pPr indent="0" marL="0">
+              <a:buNone/>
+            </a:pPr>
+            <a:r>
+              <a:rPr lang="en-US" sz="1550" dirty="0">
+                <a:solidFill>
+                  <a:srgbClr val="17364A"/>
+                </a:solidFill>
+                <a:latin typeface="Aptos" pitchFamily="34" charset="0"/>
+                <a:ea typeface="Aptos" pitchFamily="34" charset="-122"/>
+                <a:cs typeface="Aptos" pitchFamily="34" charset="-120"/>
+              </a:rPr>
+              <a:t>Decision rights should be defined across the full AI lifecycle.</a:t>
+            </a:r>
+            <a:endParaRPr lang="en-US" sz="1550" dirty="0"/>
+          </a:p>
+        </p:txBody>
+      </p:sp>
+      <p:sp>
+        <p:nvSpPr>
+          <p:cNvPr id="13" name="Shape 11"/>
+          <p:cNvSpPr/>
+          <p:nvPr/>
+        </p:nvSpPr>
+        <p:spPr>
+          <a:xfrm>
+            <a:off x="7635240" y="2788920"/>
+            <a:ext cx="3474720" cy="1536192"/>
+          </a:xfrm>
+          <a:prstGeom prst="roundRect">
+            <a:avLst>
+              <a:gd name="adj" fmla="val 7143"/>
+            </a:avLst>
+          </a:prstGeom>
+          <a:solidFill>
+            <a:srgbClr val="FFFFFF">
+              <a:alpha val="88000"/>
+            </a:srgbClr>
+          </a:solidFill>
+          <a:ln w="12700">
+            <a:solidFill>
+              <a:srgbClr val="D6E8F2"/>
+            </a:solidFill>
+            <a:prstDash val="solid"/>
+          </a:ln>
+        </p:spPr>
+      </p:sp>
+      <p:sp>
+        <p:nvSpPr>
+          <p:cNvPr id="14" name="Shape 12"/>
+          <p:cNvSpPr/>
+          <p:nvPr/>
+        </p:nvSpPr>
+        <p:spPr>
+          <a:xfrm>
+            <a:off x="7891272" y="3108960"/>
+            <a:ext cx="566928" cy="566928"/>
           </a:xfrm>
           <a:prstGeom prst="ellipse">
             <a:avLst/>
@@ -3204,172 +3464,24 @@
       </p:sp>
       <p:sp>
         <p:nvSpPr>
-          <p:cNvPr id="9" name="Text 7"/>
-          <p:cNvSpPr/>
-          <p:nvPr/>
-        </p:nvSpPr>
-        <p:spPr>
-          <a:xfrm>
-            <a:off x="640080" y="731520"/>
-            <a:ext cx="420624" cy="164592"/>
-          </a:xfrm>
-          <a:prstGeom prst="rect">
-            <a:avLst/>
-          </a:prstGeom>
-          <a:noFill/>
-          <a:ln/>
-        </p:spPr>
-        <p:txBody>
-          <a:bodyPr wrap="square" lIns="0" tIns="0" rIns="0" bIns="0" rtlCol="0" anchor="ctr"/>
-          <a:lstStyle/>
-          <a:p>
-            <a:pPr algn="ctr" indent="0" marL="0">
-              <a:buNone/>
-            </a:pPr>
-            <a:r>
-              <a:rPr lang="en-US" sz="1100" b="1" dirty="0">
-                <a:solidFill>
-                  <a:srgbClr val="FFFFFF"/>
-                </a:solidFill>
-                <a:latin typeface="Aptos" pitchFamily="34" charset="0"/>
-                <a:ea typeface="Aptos" pitchFamily="34" charset="-122"/>
-                <a:cs typeface="Aptos" pitchFamily="34" charset="-120"/>
-              </a:rPr>
-              <a:t>6</a:t>
-            </a:r>
-            <a:endParaRPr lang="en-US" sz="1100" dirty="0"/>
-          </a:p>
-        </p:txBody>
-      </p:sp>
-      <p:sp>
-        <p:nvSpPr>
-          <p:cNvPr id="10" name="Text 8"/>
-          <p:cNvSpPr/>
-          <p:nvPr/>
-        </p:nvSpPr>
-        <p:spPr>
-          <a:xfrm>
-            <a:off x="640080" y="621792"/>
-            <a:ext cx="10881360" cy="713232"/>
-          </a:xfrm>
-          <a:prstGeom prst="rect">
-            <a:avLst/>
-          </a:prstGeom>
-          <a:noFill/>
-          <a:ln/>
-        </p:spPr>
-        <p:txBody>
-          <a:bodyPr wrap="square" lIns="0" tIns="0" rIns="0" bIns="0" rtlCol="0" anchor="ctr">
-            <a:normAutofit/>
-          </a:bodyPr>
-          <a:lstStyle/>
-          <a:p>
-            <a:pPr indent="0" marL="0">
-              <a:buNone/>
-            </a:pPr>
-            <a:r>
-              <a:rPr lang="en-US" sz="3400" b="1" dirty="0">
-                <a:solidFill>
-                  <a:srgbClr val="003A63"/>
-                </a:solidFill>
-                <a:latin typeface="Aptos Display" pitchFamily="34" charset="0"/>
-                <a:ea typeface="Aptos Display" pitchFamily="34" charset="-122"/>
-                <a:cs typeface="Aptos Display" pitchFamily="34" charset="-120"/>
-              </a:rPr>
-              <a:t>Technical and Governance Deep Dive</a:t>
-            </a:r>
-            <a:endParaRPr lang="en-US" sz="3400" dirty="0"/>
-          </a:p>
-        </p:txBody>
-      </p:sp>
-      <p:sp>
-        <p:nvSpPr>
-          <p:cNvPr id="11" name="Text 9"/>
-          <p:cNvSpPr/>
-          <p:nvPr/>
-        </p:nvSpPr>
-        <p:spPr>
-          <a:xfrm>
-            <a:off x="868680" y="1508760"/>
-            <a:ext cx="6537960" cy="4160520"/>
-          </a:xfrm>
-          <a:prstGeom prst="rect">
-            <a:avLst/>
-          </a:prstGeom>
-          <a:noFill/>
-          <a:ln/>
-        </p:spPr>
-        <p:txBody>
-          <a:bodyPr wrap="square" lIns="635" tIns="635" rIns="635" bIns="635" rtlCol="0" anchor="t">
-            <a:normAutofit/>
-          </a:bodyPr>
-          <a:lstStyle/>
-          <a:p>
-            <a:r>
-              <a:rPr lang="en-US" sz="2100" dirty="0">
-                <a:solidFill>
-                  <a:srgbClr val="17364A"/>
-                </a:solidFill>
-                <a:latin typeface="Aptos" pitchFamily="34" charset="0"/>
-                <a:ea typeface="Aptos" pitchFamily="34" charset="-122"/>
-                <a:cs typeface="Aptos" pitchFamily="34" charset="-120"/>
-              </a:rPr>
-              <a:t>Decision rights should be defined across the full AI lifecycle.</a:t>
-            </a:r>
-            <a:endParaRPr lang="en-US" sz="2100" dirty="0"/>
-          </a:p>
-          <a:p>
-            <a:r>
-              <a:rPr lang="en-US" sz="2100" dirty="0">
-                <a:solidFill>
-                  <a:srgbClr val="17364A"/>
-                </a:solidFill>
-                <a:latin typeface="Aptos" pitchFamily="34" charset="0"/>
-                <a:ea typeface="Aptos" pitchFamily="34" charset="-122"/>
-                <a:cs typeface="Aptos" pitchFamily="34" charset="-120"/>
-              </a:rPr>
-              <a:t>During ideation, leadership may decide whether a use case aligns with agency priorities.</a:t>
-            </a:r>
-            <a:endParaRPr lang="en-US" sz="2100" dirty="0"/>
-          </a:p>
-          <a:p>
-            <a:r>
-              <a:rPr lang="en-US" sz="2100" dirty="0">
-                <a:solidFill>
-                  <a:srgbClr val="17364A"/>
-                </a:solidFill>
-                <a:latin typeface="Aptos" pitchFamily="34" charset="0"/>
-                <a:ea typeface="Aptos" pitchFamily="34" charset="-122"/>
-                <a:cs typeface="Aptos" pitchFamily="34" charset="-120"/>
-              </a:rPr>
-              <a:t>During review, governance may decide whether the use case is low, moderate, or high risk.</a:t>
-            </a:r>
-            <a:endParaRPr lang="en-US" sz="2100" dirty="0"/>
-          </a:p>
-        </p:txBody>
-      </p:sp>
-      <p:sp>
-        <p:nvSpPr>
-          <p:cNvPr id="12" name="Shape 10"/>
-          <p:cNvSpPr/>
-          <p:nvPr/>
-        </p:nvSpPr>
-        <p:spPr>
-          <a:xfrm>
-            <a:off x="7909560" y="1417320"/>
-            <a:ext cx="3154680" cy="1828800"/>
-          </a:xfrm>
-          <a:prstGeom prst="roundRect">
-            <a:avLst>
-              <a:gd name="adj" fmla="val 6000"/>
-            </a:avLst>
+          <p:cNvPr id="15" name="Shape 13"/>
+          <p:cNvSpPr/>
+          <p:nvPr/>
+        </p:nvSpPr>
+        <p:spPr>
+          <a:xfrm>
+            <a:off x="10287000" y="3108960"/>
+            <a:ext cx="566928" cy="566928"/>
+          </a:xfrm>
+          <a:prstGeom prst="ellipse">
+            <a:avLst/>
           </a:prstGeom>
           <a:solidFill>
-            <a:srgbClr val="EEF8ED"/>
+            <a:srgbClr val="2F8A28"/>
           </a:solidFill>
           <a:ln w="12700">
             <a:solidFill>
-              <a:srgbClr val="B9D7E6"/>
+              <a:srgbClr val="2F8A28"/>
             </a:solidFill>
             <a:prstDash val="solid"/>
           </a:ln>
@@ -3377,14 +3489,108 @@
       </p:sp>
       <p:sp>
         <p:nvSpPr>
-          <p:cNvPr id="13" name="Text 11"/>
-          <p:cNvSpPr/>
-          <p:nvPr/>
-        </p:nvSpPr>
-        <p:spPr>
-          <a:xfrm>
-            <a:off x="8074152" y="1563624"/>
-            <a:ext cx="2825496" cy="256032"/>
+          <p:cNvPr id="16" name="Shape 14"/>
+          <p:cNvSpPr/>
+          <p:nvPr/>
+        </p:nvSpPr>
+        <p:spPr>
+          <a:xfrm>
+            <a:off x="9089136" y="3456432"/>
+            <a:ext cx="566928" cy="566928"/>
+          </a:xfrm>
+          <a:prstGeom prst="ellipse">
+            <a:avLst/>
+          </a:prstGeom>
+          <a:solidFill>
+            <a:srgbClr val="6A4CA3"/>
+          </a:solidFill>
+          <a:ln w="12700">
+            <a:solidFill>
+              <a:srgbClr val="6A4CA3"/>
+            </a:solidFill>
+            <a:prstDash val="solid"/>
+          </a:ln>
+        </p:spPr>
+      </p:sp>
+      <p:sp>
+        <p:nvSpPr>
+          <p:cNvPr id="17" name="Shape 15"/>
+          <p:cNvSpPr/>
+          <p:nvPr/>
+        </p:nvSpPr>
+        <p:spPr>
+          <a:xfrm>
+            <a:off x="8385048" y="3419856"/>
+            <a:ext cx="1975104" cy="0"/>
+          </a:xfrm>
+          <a:prstGeom prst="line">
+            <a:avLst/>
+          </a:prstGeom>
+          <a:noFill/>
+          <a:ln w="25400">
+            <a:solidFill>
+              <a:srgbClr val="8ABBD8"/>
+            </a:solidFill>
+            <a:prstDash val="solid"/>
+          </a:ln>
+        </p:spPr>
+      </p:sp>
+      <p:sp>
+        <p:nvSpPr>
+          <p:cNvPr id="18" name="Shape 16"/>
+          <p:cNvSpPr/>
+          <p:nvPr/>
+        </p:nvSpPr>
+        <p:spPr>
+          <a:xfrm>
+            <a:off x="8202168" y="3630168"/>
+            <a:ext cx="1170432" cy="118872"/>
+          </a:xfrm>
+          <a:prstGeom prst="line">
+            <a:avLst/>
+          </a:prstGeom>
+          <a:noFill/>
+          <a:ln w="25400">
+            <a:solidFill>
+              <a:srgbClr val="8ABBD8"/>
+            </a:solidFill>
+            <a:prstDash val="solid"/>
+          </a:ln>
+        </p:spPr>
+      </p:sp>
+      <p:sp>
+        <p:nvSpPr>
+          <p:cNvPr id="19" name="Shape 17"/>
+          <p:cNvSpPr/>
+          <p:nvPr/>
+        </p:nvSpPr>
+        <p:spPr>
+          <a:xfrm>
+            <a:off x="10543032" y="3630168"/>
+            <a:ext cx="-1170432" cy="118872"/>
+          </a:xfrm>
+          <a:prstGeom prst="line">
+            <a:avLst/>
+          </a:prstGeom>
+          <a:noFill/>
+          <a:ln w="25400">
+            <a:solidFill>
+              <a:srgbClr val="8ABBD8"/>
+            </a:solidFill>
+            <a:prstDash val="solid"/>
+          </a:ln>
+        </p:spPr>
+      </p:sp>
+      <p:sp>
+        <p:nvSpPr>
+          <p:cNvPr id="20" name="Text 18"/>
+          <p:cNvSpPr/>
+          <p:nvPr/>
+        </p:nvSpPr>
+        <p:spPr>
+          <a:xfrm>
+            <a:off x="7863840" y="4069080"/>
+            <a:ext cx="3017520" cy="164592"/>
           </a:xfrm>
           <a:prstGeom prst="rect">
             <a:avLst/>
@@ -3396,79 +3602,38 @@
           <a:bodyPr wrap="square" lIns="0" tIns="0" rIns="0" bIns="0" rtlCol="0" anchor="ctr"/>
           <a:lstStyle/>
           <a:p>
-            <a:pPr indent="0" marL="0">
-              <a:buNone/>
-            </a:pPr>
-            <a:r>
-              <a:rPr lang="en-US" sz="1300" b="1" dirty="0">
-                <a:solidFill>
-                  <a:srgbClr val="0068B7"/>
-                </a:solidFill>
-                <a:latin typeface="Aptos" pitchFamily="34" charset="0"/>
-                <a:ea typeface="Aptos" pitchFamily="34" charset="-122"/>
-                <a:cs typeface="Aptos" pitchFamily="34" charset="-120"/>
-              </a:rPr>
-              <a:t>Key idea</a:t>
-            </a:r>
-            <a:endParaRPr lang="en-US" sz="1300" dirty="0"/>
-          </a:p>
-        </p:txBody>
-      </p:sp>
-      <p:sp>
-        <p:nvSpPr>
-          <p:cNvPr id="14" name="Text 12"/>
-          <p:cNvSpPr/>
-          <p:nvPr/>
-        </p:nvSpPr>
-        <p:spPr>
-          <a:xfrm>
-            <a:off x="8074152" y="1920240"/>
-            <a:ext cx="2825496" cy="1188720"/>
-          </a:xfrm>
-          <a:prstGeom prst="rect">
-            <a:avLst/>
-          </a:prstGeom>
-          <a:noFill/>
-          <a:ln/>
-        </p:spPr>
-        <p:txBody>
-          <a:bodyPr wrap="square" lIns="0" tIns="0" rIns="0" bIns="0" rtlCol="0" anchor="t">
-            <a:normAutofit/>
-          </a:bodyPr>
-          <a:lstStyle/>
-          <a:p>
-            <a:pPr indent="0" marL="0">
-              <a:buNone/>
-            </a:pPr>
-            <a:r>
-              <a:rPr lang="en-US" sz="1550" dirty="0">
-                <a:solidFill>
-                  <a:srgbClr val="17364A"/>
-                </a:solidFill>
-                <a:latin typeface="Aptos" pitchFamily="34" charset="0"/>
-                <a:ea typeface="Aptos" pitchFamily="34" charset="-122"/>
-                <a:cs typeface="Aptos" pitchFamily="34" charset="-120"/>
-              </a:rPr>
-              <a:t>Decision rights should be defined across the full AI lifecycle.</a:t>
-            </a:r>
-            <a:endParaRPr lang="en-US" sz="1550" dirty="0"/>
-          </a:p>
-        </p:txBody>
-      </p:sp>
-      <p:sp>
-        <p:nvSpPr>
-          <p:cNvPr id="15" name="Shape 13"/>
-          <p:cNvSpPr/>
-          <p:nvPr/>
-        </p:nvSpPr>
-        <p:spPr>
-          <a:xfrm>
-            <a:off x="7909560" y="3520440"/>
-            <a:ext cx="3154680" cy="1737360"/>
+            <a:pPr algn="ctr" indent="0" marL="0">
+              <a:buNone/>
+            </a:pPr>
+            <a:r>
+              <a:rPr lang="en-US" sz="900" b="1" dirty="0">
+                <a:solidFill>
+                  <a:srgbClr val="003A63"/>
+                </a:solidFill>
+                <a:latin typeface="Aptos" pitchFamily="34" charset="0"/>
+                <a:ea typeface="Aptos" pitchFamily="34" charset="-122"/>
+                <a:cs typeface="Aptos" pitchFamily="34" charset="-120"/>
+              </a:rPr>
+              <a:t>Decision rights</a:t>
+            </a:r>
+            <a:endParaRPr lang="en-US" sz="900" dirty="0"/>
+          </a:p>
+        </p:txBody>
+      </p:sp>
+      <p:sp>
+        <p:nvSpPr>
+          <p:cNvPr id="21" name="Shape 19"/>
+          <p:cNvSpPr/>
+          <p:nvPr/>
+        </p:nvSpPr>
+        <p:spPr>
+          <a:xfrm>
+            <a:off x="7635240" y="4498848"/>
+            <a:ext cx="3474720" cy="1143000"/>
           </a:xfrm>
           <a:prstGeom prst="roundRect">
             <a:avLst>
-              <a:gd name="adj" fmla="val 6316"/>
+              <a:gd name="adj" fmla="val 9600"/>
             </a:avLst>
           </a:prstGeom>
           <a:solidFill>
@@ -3484,14 +3649,14 @@
       </p:sp>
       <p:sp>
         <p:nvSpPr>
-          <p:cNvPr id="16" name="Text 14"/>
-          <p:cNvSpPr/>
-          <p:nvPr/>
-        </p:nvSpPr>
-        <p:spPr>
-          <a:xfrm>
-            <a:off x="8074152" y="3666744"/>
-            <a:ext cx="2825496" cy="256032"/>
+          <p:cNvPr id="22" name="Text 20"/>
+          <p:cNvSpPr/>
+          <p:nvPr/>
+        </p:nvSpPr>
+        <p:spPr>
+          <a:xfrm>
+            <a:off x="7799832" y="4645152"/>
+            <a:ext cx="3145536" cy="256032"/>
           </a:xfrm>
           <a:prstGeom prst="rect">
             <a:avLst/>
@@ -3515,7 +3680,7 @@
                 <a:ea typeface="Aptos" pitchFamily="34" charset="-122"/>
                 <a:cs typeface="Aptos" pitchFamily="34" charset="-120"/>
               </a:rPr>
-              <a:t>Use this for</a:t>
+              <a:t>What to document</a:t>
             </a:r>
             <a:endParaRPr lang="en-US" sz="1300" dirty="0"/>
           </a:p>
@@ -3523,14 +3688,14 @@
       </p:sp>
       <p:sp>
         <p:nvSpPr>
-          <p:cNvPr id="17" name="Text 15"/>
-          <p:cNvSpPr/>
-          <p:nvPr/>
-        </p:nvSpPr>
-        <p:spPr>
-          <a:xfrm>
-            <a:off x="8074152" y="4023360"/>
-            <a:ext cx="2825496" cy="1097280"/>
+          <p:cNvPr id="23" name="Text 21"/>
+          <p:cNvSpPr/>
+          <p:nvPr/>
+        </p:nvSpPr>
+        <p:spPr>
+          <a:xfrm>
+            <a:off x="7799832" y="5001768"/>
+            <a:ext cx="3145536" cy="502920"/>
           </a:xfrm>
           <a:prstGeom prst="rect">
             <a:avLst/>
@@ -3556,7 +3721,7 @@
                 <a:ea typeface="Aptos" pitchFamily="34" charset="-122"/>
                 <a:cs typeface="Aptos" pitchFamily="34" charset="-120"/>
               </a:rPr>
-              <a:t>Connect the concept to public health decisions, safeguards, documentation, or implementation work.</a:t>
+              <a:t>Translate this concept into clear decision rights, review steps, documentation expectations, and escalation paths before an AI-supported workflow is approved.</a:t>
             </a:r>
             <a:endParaRPr lang="en-US" sz="1550" dirty="0"/>
           </a:p>
@@ -3730,8 +3895,8 @@
         </p:nvSpPr>
         <p:spPr>
           <a:xfrm>
-            <a:off x="9966960" y="6537960"/>
-            <a:ext cx="1645920" cy="201168"/>
+            <a:off x="9646920" y="6537960"/>
+            <a:ext cx="1965960" cy="201168"/>
           </a:xfrm>
           <a:prstGeom prst="rect">
             <a:avLst/>
@@ -3755,7 +3920,7 @@
                 <a:ea typeface="Aptos" pitchFamily="34" charset="-122"/>
                 <a:cs typeface="Aptos" pitchFamily="34" charset="-120"/>
               </a:rPr>
-              <a:t>Â© Paula Soper</a:t>
+              <a:t>Copyright Paula Soper</a:t>
             </a:r>
             <a:endParaRPr lang="en-US" sz="800" dirty="0"/>
           </a:p>
@@ -3802,77 +3967,13 @@
       </p:sp>
       <p:sp>
         <p:nvSpPr>
-          <p:cNvPr id="8" name="Shape 6"/>
+          <p:cNvPr id="8" name="Text 6"/>
           <p:cNvSpPr/>
           <p:nvPr/>
         </p:nvSpPr>
         <p:spPr>
           <a:xfrm>
             <a:off x="640080" y="658368"/>
-            <a:ext cx="420624" cy="420624"/>
-          </a:xfrm>
-          <a:prstGeom prst="ellipse">
-            <a:avLst/>
-          </a:prstGeom>
-          <a:solidFill>
-            <a:srgbClr val="0068B7"/>
-          </a:solidFill>
-          <a:ln w="12700">
-            <a:solidFill>
-              <a:srgbClr val="0068B7"/>
-            </a:solidFill>
-            <a:prstDash val="solid"/>
-          </a:ln>
-        </p:spPr>
-      </p:sp>
-      <p:sp>
-        <p:nvSpPr>
-          <p:cNvPr id="9" name="Text 7"/>
-          <p:cNvSpPr/>
-          <p:nvPr/>
-        </p:nvSpPr>
-        <p:spPr>
-          <a:xfrm>
-            <a:off x="640080" y="731520"/>
-            <a:ext cx="420624" cy="164592"/>
-          </a:xfrm>
-          <a:prstGeom prst="rect">
-            <a:avLst/>
-          </a:prstGeom>
-          <a:noFill/>
-          <a:ln/>
-        </p:spPr>
-        <p:txBody>
-          <a:bodyPr wrap="square" lIns="0" tIns="0" rIns="0" bIns="0" rtlCol="0" anchor="ctr"/>
-          <a:lstStyle/>
-          <a:p>
-            <a:pPr algn="ctr" indent="0" marL="0">
-              <a:buNone/>
-            </a:pPr>
-            <a:r>
-              <a:rPr lang="en-US" sz="1100" b="1" dirty="0">
-                <a:solidFill>
-                  <a:srgbClr val="FFFFFF"/>
-                </a:solidFill>
-                <a:latin typeface="Aptos" pitchFamily="34" charset="0"/>
-                <a:ea typeface="Aptos" pitchFamily="34" charset="-122"/>
-                <a:cs typeface="Aptos" pitchFamily="34" charset="-120"/>
-              </a:rPr>
-              <a:t>7</a:t>
-            </a:r>
-            <a:endParaRPr lang="en-US" sz="1100" dirty="0"/>
-          </a:p>
-        </p:txBody>
-      </p:sp>
-      <p:sp>
-        <p:nvSpPr>
-          <p:cNvPr id="10" name="Text 8"/>
-          <p:cNvSpPr/>
-          <p:nvPr/>
-        </p:nvSpPr>
-        <p:spPr>
-          <a:xfrm>
-            <a:off x="640080" y="621792"/>
             <a:ext cx="10881360" cy="713232"/>
           </a:xfrm>
           <a:prstGeom prst="rect">
@@ -3907,14 +4008,14 @@
       </p:sp>
       <p:sp>
         <p:nvSpPr>
-          <p:cNvPr id="11" name="Text 9"/>
+          <p:cNvPr id="9" name="Text 7"/>
           <p:cNvSpPr/>
           <p:nvPr/>
         </p:nvSpPr>
         <p:spPr>
           <a:xfrm>
             <a:off x="868680" y="1508760"/>
-            <a:ext cx="6537960" cy="4160520"/>
+            <a:ext cx="6309360" cy="4160520"/>
           </a:xfrm>
           <a:prstGeom prst="rect">
             <a:avLst/>
@@ -3973,18 +4074,18 @@
       </p:sp>
       <p:sp>
         <p:nvSpPr>
-          <p:cNvPr id="12" name="Shape 10"/>
-          <p:cNvSpPr/>
-          <p:nvPr/>
-        </p:nvSpPr>
-        <p:spPr>
-          <a:xfrm>
-            <a:off x="7909560" y="1417320"/>
-            <a:ext cx="3154680" cy="1828800"/>
+          <p:cNvPr id="10" name="Shape 8"/>
+          <p:cNvSpPr/>
+          <p:nvPr/>
+        </p:nvSpPr>
+        <p:spPr>
+          <a:xfrm>
+            <a:off x="7635240" y="1325880"/>
+            <a:ext cx="3474720" cy="1325880"/>
           </a:xfrm>
           <a:prstGeom prst="roundRect">
             <a:avLst>
-              <a:gd name="adj" fmla="val 6000"/>
+              <a:gd name="adj" fmla="val 8276"/>
             </a:avLst>
           </a:prstGeom>
           <a:solidFill>
@@ -4000,14 +4101,14 @@
       </p:sp>
       <p:sp>
         <p:nvSpPr>
-          <p:cNvPr id="13" name="Text 11"/>
-          <p:cNvSpPr/>
-          <p:nvPr/>
-        </p:nvSpPr>
-        <p:spPr>
-          <a:xfrm>
-            <a:off x="8074152" y="1563624"/>
-            <a:ext cx="2825496" cy="256032"/>
+          <p:cNvPr id="11" name="Text 9"/>
+          <p:cNvSpPr/>
+          <p:nvPr/>
+        </p:nvSpPr>
+        <p:spPr>
+          <a:xfrm>
+            <a:off x="7799832" y="1472184"/>
+            <a:ext cx="3145536" cy="256032"/>
           </a:xfrm>
           <a:prstGeom prst="rect">
             <a:avLst/>
@@ -4031,7 +4132,7 @@
                 <a:ea typeface="Aptos" pitchFamily="34" charset="-122"/>
                 <a:cs typeface="Aptos" pitchFamily="34" charset="-120"/>
               </a:rPr>
-              <a:t>Key idea</a:t>
+              <a:t>Governance lens</a:t>
             </a:r>
             <a:endParaRPr lang="en-US" sz="1300" dirty="0"/>
           </a:p>
@@ -4039,14 +4140,14 @@
       </p:sp>
       <p:sp>
         <p:nvSpPr>
-          <p:cNvPr id="14" name="Text 12"/>
-          <p:cNvSpPr/>
-          <p:nvPr/>
-        </p:nvSpPr>
-        <p:spPr>
-          <a:xfrm>
-            <a:off x="8074152" y="1920240"/>
-            <a:ext cx="2825496" cy="1188720"/>
+          <p:cNvPr id="12" name="Text 10"/>
+          <p:cNvSpPr/>
+          <p:nvPr/>
+        </p:nvSpPr>
+        <p:spPr>
+          <a:xfrm>
+            <a:off x="7799832" y="1828800"/>
+            <a:ext cx="3145536" cy="685800"/>
           </a:xfrm>
           <a:prstGeom prst="rect">
             <a:avLst/>
@@ -4080,18 +4181,171 @@
       </p:sp>
       <p:sp>
         <p:nvSpPr>
-          <p:cNvPr id="15" name="Shape 13"/>
-          <p:cNvSpPr/>
-          <p:nvPr/>
-        </p:nvSpPr>
-        <p:spPr>
-          <a:xfrm>
-            <a:off x="7909560" y="3520440"/>
-            <a:ext cx="3154680" cy="1737360"/>
+          <p:cNvPr id="13" name="Shape 11"/>
+          <p:cNvSpPr/>
+          <p:nvPr/>
+        </p:nvSpPr>
+        <p:spPr>
+          <a:xfrm>
+            <a:off x="7635240" y="2788920"/>
+            <a:ext cx="3474720" cy="1536192"/>
           </a:xfrm>
           <a:prstGeom prst="roundRect">
             <a:avLst>
-              <a:gd name="adj" fmla="val 6316"/>
+              <a:gd name="adj" fmla="val 7143"/>
+            </a:avLst>
+          </a:prstGeom>
+          <a:solidFill>
+            <a:srgbClr val="FFFFFF">
+              <a:alpha val="88000"/>
+            </a:srgbClr>
+          </a:solidFill>
+          <a:ln w="12700">
+            <a:solidFill>
+              <a:srgbClr val="D6E8F2"/>
+            </a:solidFill>
+            <a:prstDash val="solid"/>
+          </a:ln>
+        </p:spPr>
+      </p:sp>
+      <p:sp>
+        <p:nvSpPr>
+          <p:cNvPr id="14" name="Shape 12"/>
+          <p:cNvSpPr/>
+          <p:nvPr/>
+        </p:nvSpPr>
+        <p:spPr>
+          <a:xfrm>
+            <a:off x="8046720" y="3108960"/>
+            <a:ext cx="2651760" cy="896112"/>
+          </a:xfrm>
+          <a:prstGeom prst="arc">
+            <a:avLst/>
+          </a:prstGeom>
+          <a:noFill/>
+          <a:ln w="25400">
+            <a:solidFill>
+              <a:srgbClr val="0068B7"/>
+            </a:solidFill>
+            <a:prstDash val="solid"/>
+          </a:ln>
+        </p:spPr>
+      </p:sp>
+      <p:sp>
+        <p:nvSpPr>
+          <p:cNvPr id="15" name="Text 13"/>
+          <p:cNvSpPr/>
+          <p:nvPr/>
+        </p:nvSpPr>
+        <p:spPr>
+          <a:xfrm>
+            <a:off x="7909560" y="3099816"/>
+            <a:ext cx="2926080" cy="256032"/>
+          </a:xfrm>
+          <a:prstGeom prst="rect">
+            <a:avLst/>
+          </a:prstGeom>
+          <a:noFill/>
+          <a:ln/>
+        </p:spPr>
+        <p:txBody>
+          <a:bodyPr wrap="square" lIns="0" tIns="0" rIns="0" bIns="0" rtlCol="0" anchor="ctr"/>
+          <a:lstStyle/>
+          <a:p>
+            <a:pPr algn="ctr" indent="0" marL="0">
+              <a:buNone/>
+            </a:pPr>
+            <a:r>
+              <a:rPr lang="en-US" sz="1500" b="1" dirty="0">
+                <a:solidFill>
+                  <a:srgbClr val="003A63"/>
+                </a:solidFill>
+                <a:latin typeface="Aptos" pitchFamily="34" charset="0"/>
+                <a:ea typeface="Aptos" pitchFamily="34" charset="-122"/>
+                <a:cs typeface="Aptos" pitchFamily="34" charset="-120"/>
+              </a:rPr>
+              <a:t>Risk</a:t>
+            </a:r>
+            <a:endParaRPr lang="en-US" sz="1500" dirty="0"/>
+          </a:p>
+        </p:txBody>
+      </p:sp>
+      <p:sp>
+        <p:nvSpPr>
+          <p:cNvPr id="16" name="Shape 14"/>
+          <p:cNvSpPr/>
+          <p:nvPr/>
+        </p:nvSpPr>
+        <p:spPr>
+          <a:xfrm>
+            <a:off x="8366760" y="3639312"/>
+            <a:ext cx="2011680" cy="0"/>
+          </a:xfrm>
+          <a:prstGeom prst="line">
+            <a:avLst/>
+          </a:prstGeom>
+          <a:noFill/>
+          <a:ln w="63500">
+            <a:solidFill>
+              <a:srgbClr val="2F8A28"/>
+            </a:solidFill>
+            <a:prstDash val="solid"/>
+          </a:ln>
+        </p:spPr>
+      </p:sp>
+      <p:sp>
+        <p:nvSpPr>
+          <p:cNvPr id="17" name="Text 15"/>
+          <p:cNvSpPr/>
+          <p:nvPr/>
+        </p:nvSpPr>
+        <p:spPr>
+          <a:xfrm>
+            <a:off x="7909560" y="3849624"/>
+            <a:ext cx="2926080" cy="164592"/>
+          </a:xfrm>
+          <a:prstGeom prst="rect">
+            <a:avLst/>
+          </a:prstGeom>
+          <a:noFill/>
+          <a:ln/>
+        </p:spPr>
+        <p:txBody>
+          <a:bodyPr wrap="square" lIns="0" tIns="0" rIns="0" bIns="0" rtlCol="0" anchor="ctr"/>
+          <a:lstStyle/>
+          <a:p>
+            <a:pPr algn="ctr" indent="0" marL="0">
+              <a:buNone/>
+            </a:pPr>
+            <a:r>
+              <a:rPr lang="en-US" sz="900" dirty="0">
+                <a:solidFill>
+                  <a:srgbClr val="003A63"/>
+                </a:solidFill>
+                <a:latin typeface="Aptos" pitchFamily="34" charset="0"/>
+                <a:ea typeface="Aptos" pitchFamily="34" charset="-122"/>
+                <a:cs typeface="Aptos" pitchFamily="34" charset="-120"/>
+              </a:rPr>
+              <a:t>Human review</a:t>
+            </a:r>
+            <a:endParaRPr lang="en-US" sz="900" dirty="0"/>
+          </a:p>
+        </p:txBody>
+      </p:sp>
+      <p:sp>
+        <p:nvSpPr>
+          <p:cNvPr id="18" name="Shape 16"/>
+          <p:cNvSpPr/>
+          <p:nvPr/>
+        </p:nvSpPr>
+        <p:spPr>
+          <a:xfrm>
+            <a:off x="7635240" y="4498848"/>
+            <a:ext cx="3474720" cy="1143000"/>
+          </a:xfrm>
+          <a:prstGeom prst="roundRect">
+            <a:avLst>
+              <a:gd name="adj" fmla="val 9600"/>
             </a:avLst>
           </a:prstGeom>
           <a:solidFill>
@@ -4107,14 +4361,14 @@
       </p:sp>
       <p:sp>
         <p:nvSpPr>
-          <p:cNvPr id="16" name="Text 14"/>
-          <p:cNvSpPr/>
-          <p:nvPr/>
-        </p:nvSpPr>
-        <p:spPr>
-          <a:xfrm>
-            <a:off x="8074152" y="3666744"/>
-            <a:ext cx="2825496" cy="256032"/>
+          <p:cNvPr id="19" name="Text 17"/>
+          <p:cNvSpPr/>
+          <p:nvPr/>
+        </p:nvSpPr>
+        <p:spPr>
+          <a:xfrm>
+            <a:off x="7799832" y="4645152"/>
+            <a:ext cx="3145536" cy="256032"/>
           </a:xfrm>
           <a:prstGeom prst="rect">
             <a:avLst/>
@@ -4138,7 +4392,7 @@
                 <a:ea typeface="Aptos" pitchFamily="34" charset="-122"/>
                 <a:cs typeface="Aptos" pitchFamily="34" charset="-120"/>
               </a:rPr>
-              <a:t>Use this for</a:t>
+              <a:t>What to document</a:t>
             </a:r>
             <a:endParaRPr lang="en-US" sz="1300" dirty="0"/>
           </a:p>
@@ -4146,14 +4400,14 @@
       </p:sp>
       <p:sp>
         <p:nvSpPr>
-          <p:cNvPr id="17" name="Text 15"/>
-          <p:cNvSpPr/>
-          <p:nvPr/>
-        </p:nvSpPr>
-        <p:spPr>
-          <a:xfrm>
-            <a:off x="8074152" y="4023360"/>
-            <a:ext cx="2825496" cy="1097280"/>
+          <p:cNvPr id="20" name="Text 18"/>
+          <p:cNvSpPr/>
+          <p:nvPr/>
+        </p:nvSpPr>
+        <p:spPr>
+          <a:xfrm>
+            <a:off x="7799832" y="5001768"/>
+            <a:ext cx="3145536" cy="502920"/>
           </a:xfrm>
           <a:prstGeom prst="rect">
             <a:avLst/>
@@ -4179,7 +4433,7 @@
                 <a:ea typeface="Aptos" pitchFamily="34" charset="-122"/>
                 <a:cs typeface="Aptos" pitchFamily="34" charset="-120"/>
               </a:rPr>
-              <a:t>Connect the concept to public health decisions, safeguards, documentation, or implementation work.</a:t>
+              <a:t>Identify what could go wrong, who could be affected, what safeguards are needed, and what evidence should be reviewed before use expands.</a:t>
             </a:r>
             <a:endParaRPr lang="en-US" sz="1550" dirty="0"/>
           </a:p>
@@ -4353,8 +4607,8 @@
         </p:nvSpPr>
         <p:spPr>
           <a:xfrm>
-            <a:off x="9966960" y="6537960"/>
-            <a:ext cx="1645920" cy="201168"/>
+            <a:off x="9646920" y="6537960"/>
+            <a:ext cx="1965960" cy="201168"/>
           </a:xfrm>
           <a:prstGeom prst="rect">
             <a:avLst/>
@@ -4378,7 +4632,7 @@
                 <a:ea typeface="Aptos" pitchFamily="34" charset="-122"/>
                 <a:cs typeface="Aptos" pitchFamily="34" charset="-120"/>
               </a:rPr>
-              <a:t>Â© Paula Soper</a:t>
+              <a:t>Copyright Paula Soper</a:t>
             </a:r>
             <a:endParaRPr lang="en-US" sz="800" dirty="0"/>
           </a:p>
@@ -4425,17 +4679,262 @@
       </p:sp>
       <p:sp>
         <p:nvSpPr>
-          <p:cNvPr id="8" name="Shape 6"/>
+          <p:cNvPr id="8" name="Text 6"/>
           <p:cNvSpPr/>
           <p:nvPr/>
         </p:nvSpPr>
         <p:spPr>
           <a:xfrm>
             <a:off x="640080" y="658368"/>
-            <a:ext cx="420624" cy="420624"/>
-          </a:xfrm>
-          <a:prstGeom prst="ellipse">
-            <a:avLst/>
+            <a:ext cx="10881360" cy="713232"/>
+          </a:xfrm>
+          <a:prstGeom prst="rect">
+            <a:avLst/>
+          </a:prstGeom>
+          <a:noFill/>
+          <a:ln/>
+        </p:spPr>
+        <p:txBody>
+          <a:bodyPr wrap="square" lIns="0" tIns="0" rIns="0" bIns="0" rtlCol="0" anchor="ctr">
+            <a:normAutofit/>
+          </a:bodyPr>
+          <a:lstStyle/>
+          <a:p>
+            <a:pPr indent="0" marL="0">
+              <a:buNone/>
+            </a:pPr>
+            <a:r>
+              <a:rPr lang="en-US" sz="3400" b="1" dirty="0">
+                <a:solidFill>
+                  <a:srgbClr val="003A63"/>
+                </a:solidFill>
+                <a:latin typeface="Aptos Display" pitchFamily="34" charset="0"/>
+                <a:ea typeface="Aptos Display" pitchFamily="34" charset="-122"/>
+                <a:cs typeface="Aptos Display" pitchFamily="34" charset="-120"/>
+              </a:rPr>
+              <a:t>Application to AI-Supported Workflows</a:t>
+            </a:r>
+            <a:endParaRPr lang="en-US" sz="3400" dirty="0"/>
+          </a:p>
+        </p:txBody>
+      </p:sp>
+      <p:sp>
+        <p:nvSpPr>
+          <p:cNvPr id="9" name="Text 7"/>
+          <p:cNvSpPr/>
+          <p:nvPr/>
+        </p:nvSpPr>
+        <p:spPr>
+          <a:xfrm>
+            <a:off x="868680" y="1508760"/>
+            <a:ext cx="6309360" cy="4160520"/>
+          </a:xfrm>
+          <a:prstGeom prst="rect">
+            <a:avLst/>
+          </a:prstGeom>
+          <a:noFill/>
+          <a:ln/>
+        </p:spPr>
+        <p:txBody>
+          <a:bodyPr wrap="square" lIns="635" tIns="635" rIns="635" bIns="635" rtlCol="0" anchor="t">
+            <a:normAutofit/>
+          </a:bodyPr>
+          <a:lstStyle/>
+          <a:p>
+            <a:r>
+              <a:rPr lang="en-US" sz="2100" dirty="0">
+                <a:solidFill>
+                  <a:srgbClr val="17364A"/>
+                </a:solidFill>
+                <a:latin typeface="Aptos" pitchFamily="34" charset="0"/>
+                <a:ea typeface="Aptos" pitchFamily="34" charset="-122"/>
+                <a:cs typeface="Aptos" pitchFamily="34" charset="-120"/>
+              </a:rPr>
+              <a:t>For generative AI, decision rights should clarify who approves public release of AI-assisted content.</a:t>
+            </a:r>
+            <a:endParaRPr lang="en-US" sz="2100" dirty="0"/>
+          </a:p>
+          <a:p>
+            <a:r>
+              <a:rPr lang="en-US" sz="2100" dirty="0">
+                <a:solidFill>
+                  <a:srgbClr val="17364A"/>
+                </a:solidFill>
+                <a:latin typeface="Aptos" pitchFamily="34" charset="0"/>
+                <a:ea typeface="Aptos" pitchFamily="34" charset="-122"/>
+                <a:cs typeface="Aptos" pitchFamily="34" charset="-120"/>
+              </a:rPr>
+              <a:t>For predictive analytics, leaders should decide whether the score may inform resource allocation or.</a:t>
+            </a:r>
+            <a:endParaRPr lang="en-US" sz="2100" dirty="0"/>
+          </a:p>
+          <a:p>
+            <a:r>
+              <a:rPr lang="en-US" sz="2100" dirty="0">
+                <a:solidFill>
+                  <a:srgbClr val="17364A"/>
+                </a:solidFill>
+                <a:latin typeface="Aptos" pitchFamily="34" charset="0"/>
+                <a:ea typeface="Aptos" pitchFamily="34" charset="-122"/>
+                <a:cs typeface="Aptos" pitchFamily="34" charset="-120"/>
+              </a:rPr>
+              <a:t>For agentic AI, decision rights should define who authorizes system actions, rollback procedures, and.</a:t>
+            </a:r>
+            <a:endParaRPr lang="en-US" sz="2100" dirty="0"/>
+          </a:p>
+        </p:txBody>
+      </p:sp>
+      <p:sp>
+        <p:nvSpPr>
+          <p:cNvPr id="10" name="Shape 8"/>
+          <p:cNvSpPr/>
+          <p:nvPr/>
+        </p:nvSpPr>
+        <p:spPr>
+          <a:xfrm>
+            <a:off x="7635240" y="1325880"/>
+            <a:ext cx="3474720" cy="1325880"/>
+          </a:xfrm>
+          <a:prstGeom prst="roundRect">
+            <a:avLst>
+              <a:gd name="adj" fmla="val 8276"/>
+            </a:avLst>
+          </a:prstGeom>
+          <a:solidFill>
+            <a:srgbClr val="EEF8ED"/>
+          </a:solidFill>
+          <a:ln w="12700">
+            <a:solidFill>
+              <a:srgbClr val="B9D7E6"/>
+            </a:solidFill>
+            <a:prstDash val="solid"/>
+          </a:ln>
+        </p:spPr>
+      </p:sp>
+      <p:sp>
+        <p:nvSpPr>
+          <p:cNvPr id="11" name="Text 9"/>
+          <p:cNvSpPr/>
+          <p:nvPr/>
+        </p:nvSpPr>
+        <p:spPr>
+          <a:xfrm>
+            <a:off x="7799832" y="1472184"/>
+            <a:ext cx="3145536" cy="256032"/>
+          </a:xfrm>
+          <a:prstGeom prst="rect">
+            <a:avLst/>
+          </a:prstGeom>
+          <a:noFill/>
+          <a:ln/>
+        </p:spPr>
+        <p:txBody>
+          <a:bodyPr wrap="square" lIns="0" tIns="0" rIns="0" bIns="0" rtlCol="0" anchor="ctr"/>
+          <a:lstStyle/>
+          <a:p>
+            <a:pPr indent="0" marL="0">
+              <a:buNone/>
+            </a:pPr>
+            <a:r>
+              <a:rPr lang="en-US" sz="1300" b="1" dirty="0">
+                <a:solidFill>
+                  <a:srgbClr val="0068B7"/>
+                </a:solidFill>
+                <a:latin typeface="Aptos" pitchFamily="34" charset="0"/>
+                <a:ea typeface="Aptos" pitchFamily="34" charset="-122"/>
+                <a:cs typeface="Aptos" pitchFamily="34" charset="-120"/>
+              </a:rPr>
+              <a:t>Governance lens</a:t>
+            </a:r>
+            <a:endParaRPr lang="en-US" sz="1300" dirty="0"/>
+          </a:p>
+        </p:txBody>
+      </p:sp>
+      <p:sp>
+        <p:nvSpPr>
+          <p:cNvPr id="12" name="Text 10"/>
+          <p:cNvSpPr/>
+          <p:nvPr/>
+        </p:nvSpPr>
+        <p:spPr>
+          <a:xfrm>
+            <a:off x="7799832" y="1828800"/>
+            <a:ext cx="3145536" cy="685800"/>
+          </a:xfrm>
+          <a:prstGeom prst="rect">
+            <a:avLst/>
+          </a:prstGeom>
+          <a:noFill/>
+          <a:ln/>
+        </p:spPr>
+        <p:txBody>
+          <a:bodyPr wrap="square" lIns="0" tIns="0" rIns="0" bIns="0" rtlCol="0" anchor="t">
+            <a:normAutofit/>
+          </a:bodyPr>
+          <a:lstStyle/>
+          <a:p>
+            <a:pPr indent="0" marL="0">
+              <a:buNone/>
+            </a:pPr>
+            <a:r>
+              <a:rPr lang="en-US" sz="1550" dirty="0">
+                <a:solidFill>
+                  <a:srgbClr val="17364A"/>
+                </a:solidFill>
+                <a:latin typeface="Aptos" pitchFamily="34" charset="0"/>
+                <a:ea typeface="Aptos" pitchFamily="34" charset="-122"/>
+                <a:cs typeface="Aptos" pitchFamily="34" charset="-120"/>
+              </a:rPr>
+              <a:t>For generative AI, decision rights should clarify who approves public release of AI-assisted content.</a:t>
+            </a:r>
+            <a:endParaRPr lang="en-US" sz="1550" dirty="0"/>
+          </a:p>
+        </p:txBody>
+      </p:sp>
+      <p:sp>
+        <p:nvSpPr>
+          <p:cNvPr id="13" name="Shape 11"/>
+          <p:cNvSpPr/>
+          <p:nvPr/>
+        </p:nvSpPr>
+        <p:spPr>
+          <a:xfrm>
+            <a:off x="7635240" y="2788920"/>
+            <a:ext cx="3474720" cy="1536192"/>
+          </a:xfrm>
+          <a:prstGeom prst="roundRect">
+            <a:avLst>
+              <a:gd name="adj" fmla="val 7143"/>
+            </a:avLst>
+          </a:prstGeom>
+          <a:solidFill>
+            <a:srgbClr val="FFFFFF">
+              <a:alpha val="88000"/>
+            </a:srgbClr>
+          </a:solidFill>
+          <a:ln w="12700">
+            <a:solidFill>
+              <a:srgbClr val="D6E8F2"/>
+            </a:solidFill>
+            <a:prstDash val="solid"/>
+          </a:ln>
+        </p:spPr>
+      </p:sp>
+      <p:sp>
+        <p:nvSpPr>
+          <p:cNvPr id="14" name="Shape 12"/>
+          <p:cNvSpPr/>
+          <p:nvPr/>
+        </p:nvSpPr>
+        <p:spPr>
+          <a:xfrm>
+            <a:off x="7927848" y="3319272"/>
+            <a:ext cx="792480" cy="749808"/>
+          </a:xfrm>
+          <a:prstGeom prst="roundRect">
+            <a:avLst>
+              <a:gd name="adj" fmla="val 14634"/>
+            </a:avLst>
           </a:prstGeom>
           <a:solidFill>
             <a:srgbClr val="0068B7"/>
@@ -4450,53 +4949,14 @@
       </p:sp>
       <p:sp>
         <p:nvSpPr>
-          <p:cNvPr id="9" name="Text 7"/>
-          <p:cNvSpPr/>
-          <p:nvPr/>
-        </p:nvSpPr>
-        <p:spPr>
-          <a:xfrm>
-            <a:off x="640080" y="731520"/>
-            <a:ext cx="420624" cy="164592"/>
-          </a:xfrm>
-          <a:prstGeom prst="rect">
-            <a:avLst/>
-          </a:prstGeom>
-          <a:noFill/>
-          <a:ln/>
-        </p:spPr>
-        <p:txBody>
-          <a:bodyPr wrap="square" lIns="0" tIns="0" rIns="0" bIns="0" rtlCol="0" anchor="ctr"/>
-          <a:lstStyle/>
-          <a:p>
-            <a:pPr algn="ctr" indent="0" marL="0">
-              <a:buNone/>
-            </a:pPr>
-            <a:r>
-              <a:rPr lang="en-US" sz="1100" b="1" dirty="0">
-                <a:solidFill>
-                  <a:srgbClr val="FFFFFF"/>
-                </a:solidFill>
-                <a:latin typeface="Aptos" pitchFamily="34" charset="0"/>
-                <a:ea typeface="Aptos" pitchFamily="34" charset="-122"/>
-                <a:cs typeface="Aptos" pitchFamily="34" charset="-120"/>
-              </a:rPr>
-              <a:t>8</a:t>
-            </a:r>
-            <a:endParaRPr lang="en-US" sz="1100" dirty="0"/>
-          </a:p>
-        </p:txBody>
-      </p:sp>
-      <p:sp>
-        <p:nvSpPr>
-          <p:cNvPr id="10" name="Text 8"/>
-          <p:cNvSpPr/>
-          <p:nvPr/>
-        </p:nvSpPr>
-        <p:spPr>
-          <a:xfrm>
-            <a:off x="640080" y="621792"/>
-            <a:ext cx="10881360" cy="713232"/>
+          <p:cNvPr id="15" name="Text 13"/>
+          <p:cNvSpPr/>
+          <p:nvPr/>
+        </p:nvSpPr>
+        <p:spPr>
+          <a:xfrm>
+            <a:off x="8001000" y="3511296"/>
+            <a:ext cx="646176" cy="310896"/>
           </a:xfrm>
           <a:prstGeom prst="rect">
             <a:avLst/>
@@ -4510,112 +4970,46 @@
           </a:bodyPr>
           <a:lstStyle/>
           <a:p>
-            <a:pPr indent="0" marL="0">
-              <a:buNone/>
-            </a:pPr>
-            <a:r>
-              <a:rPr lang="en-US" sz="3400" b="1" dirty="0">
-                <a:solidFill>
-                  <a:srgbClr val="003A63"/>
-                </a:solidFill>
-                <a:latin typeface="Aptos Display" pitchFamily="34" charset="0"/>
-                <a:ea typeface="Aptos Display" pitchFamily="34" charset="-122"/>
-                <a:cs typeface="Aptos Display" pitchFamily="34" charset="-120"/>
-              </a:rPr>
-              <a:t>Application to AI-Supported Workflows</a:t>
-            </a:r>
-            <a:endParaRPr lang="en-US" sz="3400" dirty="0"/>
-          </a:p>
-        </p:txBody>
-      </p:sp>
-      <p:sp>
-        <p:nvSpPr>
-          <p:cNvPr id="11" name="Text 9"/>
-          <p:cNvSpPr/>
-          <p:nvPr/>
-        </p:nvSpPr>
-        <p:spPr>
-          <a:xfrm>
-            <a:off x="868680" y="1508760"/>
-            <a:ext cx="6537960" cy="4160520"/>
-          </a:xfrm>
-          <a:prstGeom prst="rect">
-            <a:avLst/>
-          </a:prstGeom>
-          <a:noFill/>
-          <a:ln/>
-        </p:spPr>
-        <p:txBody>
-          <a:bodyPr wrap="square" lIns="635" tIns="635" rIns="635" bIns="635" rtlCol="0" anchor="t">
-            <a:normAutofit/>
-          </a:bodyPr>
-          <a:lstStyle/>
-          <a:p>
-            <a:r>
-              <a:rPr lang="en-US" sz="2100" dirty="0">
-                <a:solidFill>
-                  <a:srgbClr val="17364A"/>
-                </a:solidFill>
-                <a:latin typeface="Aptos" pitchFamily="34" charset="0"/>
-                <a:ea typeface="Aptos" pitchFamily="34" charset="-122"/>
-                <a:cs typeface="Aptos" pitchFamily="34" charset="-120"/>
-              </a:rPr>
-              <a:t>For generative AI, decision rights should clarify who approves public release of AI-assisted content.</a:t>
-            </a:r>
-            <a:endParaRPr lang="en-US" sz="2100" dirty="0"/>
-          </a:p>
-          <a:p>
-            <a:r>
-              <a:rPr lang="en-US" sz="2100" dirty="0">
-                <a:solidFill>
-                  <a:srgbClr val="17364A"/>
-                </a:solidFill>
-                <a:latin typeface="Aptos" pitchFamily="34" charset="0"/>
-                <a:ea typeface="Aptos" pitchFamily="34" charset="-122"/>
-                <a:cs typeface="Aptos" pitchFamily="34" charset="-120"/>
-              </a:rPr>
-              <a:t>For predictive analytics, leaders should decide whether the score may inform resource allocation or.</a:t>
-            </a:r>
-            <a:endParaRPr lang="en-US" sz="2100" dirty="0"/>
-          </a:p>
-          <a:p>
-            <a:r>
-              <a:rPr lang="en-US" sz="2100" dirty="0">
-                <a:solidFill>
-                  <a:srgbClr val="17364A"/>
-                </a:solidFill>
-                <a:latin typeface="Aptos" pitchFamily="34" charset="0"/>
-                <a:ea typeface="Aptos" pitchFamily="34" charset="-122"/>
-                <a:cs typeface="Aptos" pitchFamily="34" charset="-120"/>
-              </a:rPr>
-              <a:t>For agentic AI, decision rights should define who authorizes system actions, rollback procedures, and.</a:t>
-            </a:r>
-            <a:endParaRPr lang="en-US" sz="2100" dirty="0"/>
-          </a:p>
-        </p:txBody>
-      </p:sp>
-      <p:sp>
-        <p:nvSpPr>
-          <p:cNvPr id="12" name="Shape 10"/>
-          <p:cNvSpPr/>
-          <p:nvPr/>
-        </p:nvSpPr>
-        <p:spPr>
-          <a:xfrm>
-            <a:off x="7909560" y="1417320"/>
-            <a:ext cx="3154680" cy="1828800"/>
+            <a:pPr algn="ctr" indent="0" marL="0">
+              <a:buNone/>
+            </a:pPr>
+            <a:r>
+              <a:rPr lang="en-US" sz="1500" b="1" dirty="0">
+                <a:solidFill>
+                  <a:srgbClr val="FFFFFF"/>
+                </a:solidFill>
+                <a:latin typeface="Aptos" pitchFamily="34" charset="0"/>
+                <a:ea typeface="Aptos" pitchFamily="34" charset="-122"/>
+                <a:cs typeface="Aptos" pitchFamily="34" charset="-120"/>
+              </a:rPr>
+              <a:t>Plan</a:t>
+            </a:r>
+            <a:endParaRPr lang="en-US" sz="1500" dirty="0"/>
+          </a:p>
+        </p:txBody>
+      </p:sp>
+      <p:sp>
+        <p:nvSpPr>
+          <p:cNvPr id="16" name="Shape 14"/>
+          <p:cNvSpPr/>
+          <p:nvPr/>
+        </p:nvSpPr>
+        <p:spPr>
+          <a:xfrm>
+            <a:off x="8976360" y="3319272"/>
+            <a:ext cx="792480" cy="749808"/>
           </a:xfrm>
           <a:prstGeom prst="roundRect">
             <a:avLst>
-              <a:gd name="adj" fmla="val 6000"/>
+              <a:gd name="adj" fmla="val 14634"/>
             </a:avLst>
           </a:prstGeom>
           <a:solidFill>
-            <a:srgbClr val="EEF8ED"/>
+            <a:srgbClr val="2F8A28"/>
           </a:solidFill>
           <a:ln w="12700">
             <a:solidFill>
-              <a:srgbClr val="B9D7E6"/>
+              <a:srgbClr val="2F8A28"/>
             </a:solidFill>
             <a:prstDash val="solid"/>
           </a:ln>
@@ -4623,98 +5017,189 @@
       </p:sp>
       <p:sp>
         <p:nvSpPr>
-          <p:cNvPr id="13" name="Text 11"/>
-          <p:cNvSpPr/>
-          <p:nvPr/>
-        </p:nvSpPr>
-        <p:spPr>
-          <a:xfrm>
-            <a:off x="8074152" y="1563624"/>
-            <a:ext cx="2825496" cy="256032"/>
-          </a:xfrm>
-          <a:prstGeom prst="rect">
-            <a:avLst/>
-          </a:prstGeom>
-          <a:noFill/>
-          <a:ln/>
-        </p:spPr>
-        <p:txBody>
-          <a:bodyPr wrap="square" lIns="0" tIns="0" rIns="0" bIns="0" rtlCol="0" anchor="ctr"/>
-          <a:lstStyle/>
-          <a:p>
-            <a:pPr indent="0" marL="0">
-              <a:buNone/>
-            </a:pPr>
-            <a:r>
-              <a:rPr lang="en-US" sz="1300" b="1" dirty="0">
-                <a:solidFill>
-                  <a:srgbClr val="0068B7"/>
-                </a:solidFill>
-                <a:latin typeface="Aptos" pitchFamily="34" charset="0"/>
-                <a:ea typeface="Aptos" pitchFamily="34" charset="-122"/>
-                <a:cs typeface="Aptos" pitchFamily="34" charset="-120"/>
-              </a:rPr>
-              <a:t>Key idea</a:t>
-            </a:r>
-            <a:endParaRPr lang="en-US" sz="1300" dirty="0"/>
-          </a:p>
-        </p:txBody>
-      </p:sp>
-      <p:sp>
-        <p:nvSpPr>
-          <p:cNvPr id="14" name="Text 12"/>
-          <p:cNvSpPr/>
-          <p:nvPr/>
-        </p:nvSpPr>
-        <p:spPr>
-          <a:xfrm>
-            <a:off x="8074152" y="1920240"/>
-            <a:ext cx="2825496" cy="1188720"/>
-          </a:xfrm>
-          <a:prstGeom prst="rect">
-            <a:avLst/>
-          </a:prstGeom>
-          <a:noFill/>
-          <a:ln/>
-        </p:spPr>
-        <p:txBody>
-          <a:bodyPr wrap="square" lIns="0" tIns="0" rIns="0" bIns="0" rtlCol="0" anchor="t">
+          <p:cNvPr id="17" name="Text 15"/>
+          <p:cNvSpPr/>
+          <p:nvPr/>
+        </p:nvSpPr>
+        <p:spPr>
+          <a:xfrm>
+            <a:off x="9049512" y="3511296"/>
+            <a:ext cx="646176" cy="310896"/>
+          </a:xfrm>
+          <a:prstGeom prst="rect">
+            <a:avLst/>
+          </a:prstGeom>
+          <a:noFill/>
+          <a:ln/>
+        </p:spPr>
+        <p:txBody>
+          <a:bodyPr wrap="square" lIns="0" tIns="0" rIns="0" bIns="0" rtlCol="0" anchor="ctr">
             <a:normAutofit/>
           </a:bodyPr>
           <a:lstStyle/>
           <a:p>
-            <a:pPr indent="0" marL="0">
-              <a:buNone/>
-            </a:pPr>
-            <a:r>
-              <a:rPr lang="en-US" sz="1550" dirty="0">
-                <a:solidFill>
-                  <a:srgbClr val="17364A"/>
-                </a:solidFill>
-                <a:latin typeface="Aptos" pitchFamily="34" charset="0"/>
-                <a:ea typeface="Aptos" pitchFamily="34" charset="-122"/>
-                <a:cs typeface="Aptos" pitchFamily="34" charset="-120"/>
-              </a:rPr>
-              <a:t>For generative AI, decision rights should clarify who approves public release of AI-assisted content.</a:t>
-            </a:r>
-            <a:endParaRPr lang="en-US" sz="1550" dirty="0"/>
-          </a:p>
-        </p:txBody>
-      </p:sp>
-      <p:sp>
-        <p:nvSpPr>
-          <p:cNvPr id="15" name="Shape 13"/>
-          <p:cNvSpPr/>
-          <p:nvPr/>
-        </p:nvSpPr>
-        <p:spPr>
-          <a:xfrm>
-            <a:off x="7909560" y="3520440"/>
-            <a:ext cx="3154680" cy="1737360"/>
+            <a:pPr algn="ctr" indent="0" marL="0">
+              <a:buNone/>
+            </a:pPr>
+            <a:r>
+              <a:rPr lang="en-US" sz="1500" b="1" dirty="0">
+                <a:solidFill>
+                  <a:srgbClr val="FFFFFF"/>
+                </a:solidFill>
+                <a:latin typeface="Aptos" pitchFamily="34" charset="0"/>
+                <a:ea typeface="Aptos" pitchFamily="34" charset="-122"/>
+                <a:cs typeface="Aptos" pitchFamily="34" charset="-120"/>
+              </a:rPr>
+              <a:t>Do</a:t>
+            </a:r>
+            <a:endParaRPr lang="en-US" sz="1500" dirty="0"/>
+          </a:p>
+        </p:txBody>
+      </p:sp>
+      <p:sp>
+        <p:nvSpPr>
+          <p:cNvPr id="18" name="Shape 16"/>
+          <p:cNvSpPr/>
+          <p:nvPr/>
+        </p:nvSpPr>
+        <p:spPr>
+          <a:xfrm>
+            <a:off x="10024872" y="3319272"/>
+            <a:ext cx="792480" cy="749808"/>
           </a:xfrm>
           <a:prstGeom prst="roundRect">
             <a:avLst>
-              <a:gd name="adj" fmla="val 6316"/>
+              <a:gd name="adj" fmla="val 14634"/>
+            </a:avLst>
+          </a:prstGeom>
+          <a:solidFill>
+            <a:srgbClr val="D69A2D"/>
+          </a:solidFill>
+          <a:ln w="12700">
+            <a:solidFill>
+              <a:srgbClr val="D69A2D"/>
+            </a:solidFill>
+            <a:prstDash val="solid"/>
+          </a:ln>
+        </p:spPr>
+      </p:sp>
+      <p:sp>
+        <p:nvSpPr>
+          <p:cNvPr id="19" name="Text 17"/>
+          <p:cNvSpPr/>
+          <p:nvPr/>
+        </p:nvSpPr>
+        <p:spPr>
+          <a:xfrm>
+            <a:off x="10098024" y="3511296"/>
+            <a:ext cx="646176" cy="310896"/>
+          </a:xfrm>
+          <a:prstGeom prst="rect">
+            <a:avLst/>
+          </a:prstGeom>
+          <a:noFill/>
+          <a:ln/>
+        </p:spPr>
+        <p:txBody>
+          <a:bodyPr wrap="square" lIns="0" tIns="0" rIns="0" bIns="0" rtlCol="0" anchor="ctr">
+            <a:normAutofit/>
+          </a:bodyPr>
+          <a:lstStyle/>
+          <a:p>
+            <a:pPr algn="ctr" indent="0" marL="0">
+              <a:buNone/>
+            </a:pPr>
+            <a:r>
+              <a:rPr lang="en-US" sz="1500" b="1" dirty="0">
+                <a:solidFill>
+                  <a:srgbClr val="FFFFFF"/>
+                </a:solidFill>
+                <a:latin typeface="Aptos" pitchFamily="34" charset="0"/>
+                <a:ea typeface="Aptos" pitchFamily="34" charset="-122"/>
+                <a:cs typeface="Aptos" pitchFamily="34" charset="-120"/>
+              </a:rPr>
+              <a:t>Review</a:t>
+            </a:r>
+            <a:endParaRPr lang="en-US" sz="1500" dirty="0"/>
+          </a:p>
+        </p:txBody>
+      </p:sp>
+      <p:sp>
+        <p:nvSpPr>
+          <p:cNvPr id="20" name="Shape 18"/>
+          <p:cNvSpPr/>
+          <p:nvPr/>
+        </p:nvSpPr>
+        <p:spPr>
+          <a:xfrm>
+            <a:off x="8293608" y="4389120"/>
+            <a:ext cx="2157984" cy="0"/>
+          </a:xfrm>
+          <a:prstGeom prst="line">
+            <a:avLst/>
+          </a:prstGeom>
+          <a:noFill/>
+          <a:ln w="25400">
+            <a:solidFill>
+              <a:srgbClr val="8ABBD8"/>
+            </a:solidFill>
+            <a:prstDash val="solid"/>
+          </a:ln>
+        </p:spPr>
+      </p:sp>
+      <p:sp>
+        <p:nvSpPr>
+          <p:cNvPr id="21" name="Text 19"/>
+          <p:cNvSpPr/>
+          <p:nvPr/>
+        </p:nvSpPr>
+        <p:spPr>
+          <a:xfrm>
+            <a:off x="7909560" y="3977640"/>
+            <a:ext cx="2926080" cy="182880"/>
+          </a:xfrm>
+          <a:prstGeom prst="rect">
+            <a:avLst/>
+          </a:prstGeom>
+          <a:noFill/>
+          <a:ln/>
+        </p:spPr>
+        <p:txBody>
+          <a:bodyPr wrap="square" lIns="0" tIns="0" rIns="0" bIns="0" rtlCol="0" anchor="ctr"/>
+          <a:lstStyle/>
+          <a:p>
+            <a:pPr algn="ctr" indent="0" marL="0">
+              <a:buNone/>
+            </a:pPr>
+            <a:r>
+              <a:rPr lang="en-US" sz="1000" dirty="0">
+                <a:solidFill>
+                  <a:srgbClr val="003A63"/>
+                </a:solidFill>
+                <a:latin typeface="Aptos" pitchFamily="34" charset="0"/>
+                <a:ea typeface="Aptos" pitchFamily="34" charset="-122"/>
+                <a:cs typeface="Aptos" pitchFamily="34" charset="-120"/>
+              </a:rPr>
+              <a:t>Dependencies visible</a:t>
+            </a:r>
+            <a:endParaRPr lang="en-US" sz="1000" dirty="0"/>
+          </a:p>
+        </p:txBody>
+      </p:sp>
+      <p:sp>
+        <p:nvSpPr>
+          <p:cNvPr id="22" name="Shape 20"/>
+          <p:cNvSpPr/>
+          <p:nvPr/>
+        </p:nvSpPr>
+        <p:spPr>
+          <a:xfrm>
+            <a:off x="7635240" y="4498848"/>
+            <a:ext cx="3474720" cy="1143000"/>
+          </a:xfrm>
+          <a:prstGeom prst="roundRect">
+            <a:avLst>
+              <a:gd name="adj" fmla="val 9600"/>
             </a:avLst>
           </a:prstGeom>
           <a:solidFill>
@@ -4730,14 +5215,14 @@
       </p:sp>
       <p:sp>
         <p:nvSpPr>
-          <p:cNvPr id="16" name="Text 14"/>
-          <p:cNvSpPr/>
-          <p:nvPr/>
-        </p:nvSpPr>
-        <p:spPr>
-          <a:xfrm>
-            <a:off x="8074152" y="3666744"/>
-            <a:ext cx="2825496" cy="256032"/>
+          <p:cNvPr id="23" name="Text 21"/>
+          <p:cNvSpPr/>
+          <p:nvPr/>
+        </p:nvSpPr>
+        <p:spPr>
+          <a:xfrm>
+            <a:off x="7799832" y="4645152"/>
+            <a:ext cx="3145536" cy="256032"/>
           </a:xfrm>
           <a:prstGeom prst="rect">
             <a:avLst/>
@@ -4761,7 +5246,7 @@
                 <a:ea typeface="Aptos" pitchFamily="34" charset="-122"/>
                 <a:cs typeface="Aptos" pitchFamily="34" charset="-120"/>
               </a:rPr>
-              <a:t>Use this for</a:t>
+              <a:t>What to document</a:t>
             </a:r>
             <a:endParaRPr lang="en-US" sz="1300" dirty="0"/>
           </a:p>
@@ -4769,14 +5254,14 @@
       </p:sp>
       <p:sp>
         <p:nvSpPr>
-          <p:cNvPr id="17" name="Text 15"/>
-          <p:cNvSpPr/>
-          <p:nvPr/>
-        </p:nvSpPr>
-        <p:spPr>
-          <a:xfrm>
-            <a:off x="8074152" y="4023360"/>
-            <a:ext cx="2825496" cy="1097280"/>
+          <p:cNvPr id="24" name="Text 22"/>
+          <p:cNvSpPr/>
+          <p:nvPr/>
+        </p:nvSpPr>
+        <p:spPr>
+          <a:xfrm>
+            <a:off x="7799832" y="5001768"/>
+            <a:ext cx="3145536" cy="502920"/>
           </a:xfrm>
           <a:prstGeom prst="rect">
             <a:avLst/>
@@ -4802,7 +5287,7 @@
                 <a:ea typeface="Aptos" pitchFamily="34" charset="-122"/>
                 <a:cs typeface="Aptos" pitchFamily="34" charset="-120"/>
               </a:rPr>
-              <a:t>Connect the concept to public health decisions, safeguards, documentation, or implementation work.</a:t>
+              <a:t>Use the concept to clarify workflow changes, dependencies, staffing, procurement requirements, training needs, and implementation checkpoints.</a:t>
             </a:r>
             <a:endParaRPr lang="en-US" sz="1550" dirty="0"/>
           </a:p>
@@ -4976,8 +5461,8 @@
         </p:nvSpPr>
         <p:spPr>
           <a:xfrm>
-            <a:off x="9966960" y="6537960"/>
-            <a:ext cx="1645920" cy="201168"/>
+            <a:off x="9646920" y="6537960"/>
+            <a:ext cx="1965960" cy="201168"/>
           </a:xfrm>
           <a:prstGeom prst="rect">
             <a:avLst/>
@@ -5001,7 +5486,7 @@
                 <a:ea typeface="Aptos" pitchFamily="34" charset="-122"/>
                 <a:cs typeface="Aptos" pitchFamily="34" charset="-120"/>
               </a:rPr>
-              <a:t>Â© Paula Soper</a:t>
+              <a:t>Copyright Paula Soper</a:t>
             </a:r>
             <a:endParaRPr lang="en-US" sz="800" dirty="0"/>
           </a:p>
@@ -5048,77 +5533,13 @@
       </p:sp>
       <p:sp>
         <p:nvSpPr>
-          <p:cNvPr id="8" name="Shape 6"/>
+          <p:cNvPr id="8" name="Text 6"/>
           <p:cNvSpPr/>
           <p:nvPr/>
         </p:nvSpPr>
         <p:spPr>
           <a:xfrm>
             <a:off x="640080" y="658368"/>
-            <a:ext cx="420624" cy="420624"/>
-          </a:xfrm>
-          <a:prstGeom prst="ellipse">
-            <a:avLst/>
-          </a:prstGeom>
-          <a:solidFill>
-            <a:srgbClr val="0068B7"/>
-          </a:solidFill>
-          <a:ln w="12700">
-            <a:solidFill>
-              <a:srgbClr val="0068B7"/>
-            </a:solidFill>
-            <a:prstDash val="solid"/>
-          </a:ln>
-        </p:spPr>
-      </p:sp>
-      <p:sp>
-        <p:nvSpPr>
-          <p:cNvPr id="9" name="Text 7"/>
-          <p:cNvSpPr/>
-          <p:nvPr/>
-        </p:nvSpPr>
-        <p:spPr>
-          <a:xfrm>
-            <a:off x="640080" y="731520"/>
-            <a:ext cx="420624" cy="164592"/>
-          </a:xfrm>
-          <a:prstGeom prst="rect">
-            <a:avLst/>
-          </a:prstGeom>
-          <a:noFill/>
-          <a:ln/>
-        </p:spPr>
-        <p:txBody>
-          <a:bodyPr wrap="square" lIns="0" tIns="0" rIns="0" bIns="0" rtlCol="0" anchor="ctr"/>
-          <a:lstStyle/>
-          <a:p>
-            <a:pPr algn="ctr" indent="0" marL="0">
-              <a:buNone/>
-            </a:pPr>
-            <a:r>
-              <a:rPr lang="en-US" sz="1100" b="1" dirty="0">
-                <a:solidFill>
-                  <a:srgbClr val="FFFFFF"/>
-                </a:solidFill>
-                <a:latin typeface="Aptos" pitchFamily="34" charset="0"/>
-                <a:ea typeface="Aptos" pitchFamily="34" charset="-122"/>
-                <a:cs typeface="Aptos" pitchFamily="34" charset="-120"/>
-              </a:rPr>
-              <a:t>9</a:t>
-            </a:r>
-            <a:endParaRPr lang="en-US" sz="1100" dirty="0"/>
-          </a:p>
-        </p:txBody>
-      </p:sp>
-      <p:sp>
-        <p:nvSpPr>
-          <p:cNvPr id="10" name="Text 8"/>
-          <p:cNvSpPr/>
-          <p:nvPr/>
-        </p:nvSpPr>
-        <p:spPr>
-          <a:xfrm>
-            <a:off x="640080" y="621792"/>
             <a:ext cx="10881360" cy="713232"/>
           </a:xfrm>
           <a:prstGeom prst="rect">
@@ -5153,14 +5574,14 @@
       </p:sp>
       <p:sp>
         <p:nvSpPr>
-          <p:cNvPr id="11" name="Text 9"/>
+          <p:cNvPr id="9" name="Text 7"/>
           <p:cNvSpPr/>
           <p:nvPr/>
         </p:nvSpPr>
         <p:spPr>
           <a:xfrm>
             <a:off x="868680" y="1508760"/>
-            <a:ext cx="6537960" cy="4160520"/>
+            <a:ext cx="6309360" cy="4160520"/>
           </a:xfrm>
           <a:prstGeom prst="rect">
             <a:avLst/>
@@ -5219,18 +5640,18 @@
       </p:sp>
       <p:sp>
         <p:nvSpPr>
-          <p:cNvPr id="12" name="Shape 10"/>
-          <p:cNvSpPr/>
-          <p:nvPr/>
-        </p:nvSpPr>
-        <p:spPr>
-          <a:xfrm>
-            <a:off x="7909560" y="1417320"/>
-            <a:ext cx="3154680" cy="1828800"/>
+          <p:cNvPr id="10" name="Shape 8"/>
+          <p:cNvSpPr/>
+          <p:nvPr/>
+        </p:nvSpPr>
+        <p:spPr>
+          <a:xfrm>
+            <a:off x="7635240" y="1325880"/>
+            <a:ext cx="3474720" cy="1325880"/>
           </a:xfrm>
           <a:prstGeom prst="roundRect">
             <a:avLst>
-              <a:gd name="adj" fmla="val 6000"/>
+              <a:gd name="adj" fmla="val 8276"/>
             </a:avLst>
           </a:prstGeom>
           <a:solidFill>
@@ -5246,14 +5667,14 @@
       </p:sp>
       <p:sp>
         <p:nvSpPr>
-          <p:cNvPr id="13" name="Text 11"/>
-          <p:cNvSpPr/>
-          <p:nvPr/>
-        </p:nvSpPr>
-        <p:spPr>
-          <a:xfrm>
-            <a:off x="8074152" y="1563624"/>
-            <a:ext cx="2825496" cy="256032"/>
+          <p:cNvPr id="11" name="Text 9"/>
+          <p:cNvSpPr/>
+          <p:nvPr/>
+        </p:nvSpPr>
+        <p:spPr>
+          <a:xfrm>
+            <a:off x="7799832" y="1472184"/>
+            <a:ext cx="3145536" cy="256032"/>
           </a:xfrm>
           <a:prstGeom prst="rect">
             <a:avLst/>
@@ -5277,7 +5698,7 @@
                 <a:ea typeface="Aptos" pitchFamily="34" charset="-122"/>
                 <a:cs typeface="Aptos" pitchFamily="34" charset="-120"/>
               </a:rPr>
-              <a:t>Key idea</a:t>
+              <a:t>Governance lens</a:t>
             </a:r>
             <a:endParaRPr lang="en-US" sz="1300" dirty="0"/>
           </a:p>
@@ -5285,14 +5706,14 @@
       </p:sp>
       <p:sp>
         <p:nvSpPr>
-          <p:cNvPr id="14" name="Text 12"/>
-          <p:cNvSpPr/>
-          <p:nvPr/>
-        </p:nvSpPr>
-        <p:spPr>
-          <a:xfrm>
-            <a:off x="8074152" y="1920240"/>
-            <a:ext cx="2825496" cy="1188720"/>
+          <p:cNvPr id="12" name="Text 10"/>
+          <p:cNvSpPr/>
+          <p:nvPr/>
+        </p:nvSpPr>
+        <p:spPr>
+          <a:xfrm>
+            <a:off x="7799832" y="1828800"/>
+            <a:ext cx="3145536" cy="685800"/>
           </a:xfrm>
           <a:prstGeom prst="rect">
             <a:avLst/>
@@ -5326,18 +5747,159 @@
       </p:sp>
       <p:sp>
         <p:nvSpPr>
-          <p:cNvPr id="15" name="Shape 13"/>
-          <p:cNvSpPr/>
-          <p:nvPr/>
-        </p:nvSpPr>
-        <p:spPr>
-          <a:xfrm>
-            <a:off x="7909560" y="3520440"/>
-            <a:ext cx="3154680" cy="1737360"/>
+          <p:cNvPr id="13" name="Shape 11"/>
+          <p:cNvSpPr/>
+          <p:nvPr/>
+        </p:nvSpPr>
+        <p:spPr>
+          <a:xfrm>
+            <a:off x="7635240" y="2788920"/>
+            <a:ext cx="3474720" cy="1536192"/>
           </a:xfrm>
           <a:prstGeom prst="roundRect">
             <a:avLst>
-              <a:gd name="adj" fmla="val 6316"/>
+              <a:gd name="adj" fmla="val 7143"/>
+            </a:avLst>
+          </a:prstGeom>
+          <a:solidFill>
+            <a:srgbClr val="FFFFFF">
+              <a:alpha val="88000"/>
+            </a:srgbClr>
+          </a:solidFill>
+          <a:ln w="12700">
+            <a:solidFill>
+              <a:srgbClr val="D6E8F2"/>
+            </a:solidFill>
+            <a:prstDash val="solid"/>
+          </a:ln>
+        </p:spPr>
+      </p:sp>
+      <p:sp>
+        <p:nvSpPr>
+          <p:cNvPr id="14" name="Shape 12"/>
+          <p:cNvSpPr/>
+          <p:nvPr/>
+        </p:nvSpPr>
+        <p:spPr>
+          <a:xfrm>
+            <a:off x="8074152" y="3291840"/>
+            <a:ext cx="2596896" cy="749808"/>
+          </a:xfrm>
+          <a:prstGeom prst="rect">
+            <a:avLst/>
+          </a:prstGeom>
+          <a:solidFill>
+            <a:srgbClr val="EAF6F8"/>
+          </a:solidFill>
+          <a:ln w="12700">
+            <a:solidFill>
+              <a:srgbClr val="8ABBD8"/>
+            </a:solidFill>
+            <a:prstDash val="solid"/>
+          </a:ln>
+        </p:spPr>
+      </p:sp>
+      <p:sp>
+        <p:nvSpPr>
+          <p:cNvPr id="15" name="Shape 13"/>
+          <p:cNvSpPr/>
+          <p:nvPr/>
+        </p:nvSpPr>
+        <p:spPr>
+          <a:xfrm>
+            <a:off x="8202168" y="3721608"/>
+            <a:ext cx="2340864" cy="0"/>
+          </a:xfrm>
+          <a:prstGeom prst="line">
+            <a:avLst/>
+          </a:prstGeom>
+          <a:noFill/>
+          <a:ln w="19050">
+            <a:solidFill>
+              <a:srgbClr val="0068B7"/>
+            </a:solidFill>
+            <a:prstDash val="solid"/>
+          </a:ln>
+        </p:spPr>
+      </p:sp>
+      <p:sp>
+        <p:nvSpPr>
+          <p:cNvPr id="16" name="Shape 14"/>
+          <p:cNvSpPr/>
+          <p:nvPr/>
+        </p:nvSpPr>
+        <p:spPr>
+          <a:xfrm>
+            <a:off x="9198864" y="4206240"/>
+            <a:ext cx="347472" cy="347472"/>
+          </a:xfrm>
+          <a:prstGeom prst="ellipse">
+            <a:avLst/>
+          </a:prstGeom>
+          <a:solidFill>
+            <a:srgbClr val="2F8A28"/>
+          </a:solidFill>
+          <a:ln w="12700">
+            <a:solidFill>
+              <a:srgbClr val="2F8A28"/>
+            </a:solidFill>
+            <a:prstDash val="solid"/>
+          </a:ln>
+        </p:spPr>
+      </p:sp>
+      <p:sp>
+        <p:nvSpPr>
+          <p:cNvPr id="17" name="Text 15"/>
+          <p:cNvSpPr/>
+          <p:nvPr/>
+        </p:nvSpPr>
+        <p:spPr>
+          <a:xfrm>
+            <a:off x="7909560" y="3977640"/>
+            <a:ext cx="2926080" cy="182880"/>
+          </a:xfrm>
+          <a:prstGeom prst="rect">
+            <a:avLst/>
+          </a:prstGeom>
+          <a:noFill/>
+          <a:ln/>
+        </p:spPr>
+        <p:txBody>
+          <a:bodyPr wrap="square" lIns="0" tIns="0" rIns="0" bIns="0" rtlCol="0" anchor="ctr"/>
+          <a:lstStyle/>
+          <a:p>
+            <a:pPr algn="ctr" indent="0" marL="0">
+              <a:buNone/>
+            </a:pPr>
+            <a:r>
+              <a:rPr lang="en-US" sz="1000" dirty="0">
+                <a:solidFill>
+                  <a:srgbClr val="003A63"/>
+                </a:solidFill>
+                <a:latin typeface="Aptos" pitchFamily="34" charset="0"/>
+                <a:ea typeface="Aptos" pitchFamily="34" charset="-122"/>
+                <a:cs typeface="Aptos" pitchFamily="34" charset="-120"/>
+              </a:rPr>
+              <a:t>Concept to action</a:t>
+            </a:r>
+            <a:endParaRPr lang="en-US" sz="1000" dirty="0"/>
+          </a:p>
+        </p:txBody>
+      </p:sp>
+      <p:sp>
+        <p:nvSpPr>
+          <p:cNvPr id="18" name="Shape 16"/>
+          <p:cNvSpPr/>
+          <p:nvPr/>
+        </p:nvSpPr>
+        <p:spPr>
+          <a:xfrm>
+            <a:off x="7635240" y="4498848"/>
+            <a:ext cx="3474720" cy="1143000"/>
+          </a:xfrm>
+          <a:prstGeom prst="roundRect">
+            <a:avLst>
+              <a:gd name="adj" fmla="val 9600"/>
             </a:avLst>
           </a:prstGeom>
           <a:solidFill>
@@ -5353,14 +5915,14 @@
       </p:sp>
       <p:sp>
         <p:nvSpPr>
-          <p:cNvPr id="16" name="Text 14"/>
-          <p:cNvSpPr/>
-          <p:nvPr/>
-        </p:nvSpPr>
-        <p:spPr>
-          <a:xfrm>
-            <a:off x="8074152" y="3666744"/>
-            <a:ext cx="2825496" cy="256032"/>
+          <p:cNvPr id="19" name="Text 17"/>
+          <p:cNvSpPr/>
+          <p:nvPr/>
+        </p:nvSpPr>
+        <p:spPr>
+          <a:xfrm>
+            <a:off x="7799832" y="4645152"/>
+            <a:ext cx="3145536" cy="256032"/>
           </a:xfrm>
           <a:prstGeom prst="rect">
             <a:avLst/>
@@ -5384,7 +5946,7 @@
                 <a:ea typeface="Aptos" pitchFamily="34" charset="-122"/>
                 <a:cs typeface="Aptos" pitchFamily="34" charset="-120"/>
               </a:rPr>
-              <a:t>Use this for</a:t>
+              <a:t>What to document</a:t>
             </a:r>
             <a:endParaRPr lang="en-US" sz="1300" dirty="0"/>
           </a:p>
@@ -5392,14 +5954,14 @@
       </p:sp>
       <p:sp>
         <p:nvSpPr>
-          <p:cNvPr id="17" name="Text 15"/>
-          <p:cNvSpPr/>
-          <p:nvPr/>
-        </p:nvSpPr>
-        <p:spPr>
-          <a:xfrm>
-            <a:off x="8074152" y="4023360"/>
-            <a:ext cx="2825496" cy="1097280"/>
+          <p:cNvPr id="20" name="Text 18"/>
+          <p:cNvSpPr/>
+          <p:nvPr/>
+        </p:nvSpPr>
+        <p:spPr>
+          <a:xfrm>
+            <a:off x="7799832" y="5001768"/>
+            <a:ext cx="3145536" cy="502920"/>
           </a:xfrm>
           <a:prstGeom prst="rect">
             <a:avLst/>
@@ -5425,7 +5987,7 @@
                 <a:ea typeface="Aptos" pitchFamily="34" charset="-122"/>
                 <a:cs typeface="Aptos" pitchFamily="34" charset="-120"/>
               </a:rPr>
-              <a:t>Connect the concept to public health decisions, safeguards, documentation, or implementation work.</a:t>
+              <a:t>Connect the concept to public health purpose, responsible use, required safeguards, documentation, and the next action a department should take.</a:t>
             </a:r>
             <a:endParaRPr lang="en-US" sz="1550" dirty="0"/>
           </a:p>
@@ -5599,8 +6161,8 @@
         </p:nvSpPr>
         <p:spPr>
           <a:xfrm>
-            <a:off x="9966960" y="6537960"/>
-            <a:ext cx="1645920" cy="201168"/>
+            <a:off x="9646920" y="6537960"/>
+            <a:ext cx="1965960" cy="201168"/>
           </a:xfrm>
           <a:prstGeom prst="rect">
             <a:avLst/>
@@ -5624,7 +6186,7 @@
                 <a:ea typeface="Aptos" pitchFamily="34" charset="-122"/>
                 <a:cs typeface="Aptos" pitchFamily="34" charset="-120"/>
               </a:rPr>
-              <a:t>Â© Paula Soper</a:t>
+              <a:t>Copyright Paula Soper</a:t>
             </a:r>
             <a:endParaRPr lang="en-US" sz="800" dirty="0"/>
           </a:p>
@@ -5719,7 +6281,7 @@
         <p:spPr>
           <a:xfrm>
             <a:off x="868680" y="1508760"/>
-            <a:ext cx="6537960" cy="4160520"/>
+            <a:ext cx="6309360" cy="4160520"/>
           </a:xfrm>
           <a:prstGeom prst="rect">
             <a:avLst/>
@@ -5770,12 +6332,12 @@
         </p:nvSpPr>
         <p:spPr>
           <a:xfrm>
-            <a:off x="7909560" y="1417320"/>
-            <a:ext cx="3154680" cy="1828800"/>
+            <a:off x="7635240" y="1325880"/>
+            <a:ext cx="3474720" cy="1325880"/>
           </a:xfrm>
           <a:prstGeom prst="roundRect">
             <a:avLst>
-              <a:gd name="adj" fmla="val 6000"/>
+              <a:gd name="adj" fmla="val 8276"/>
             </a:avLst>
           </a:prstGeom>
           <a:solidFill>
@@ -5797,8 +6359,8 @@
         </p:nvSpPr>
         <p:spPr>
           <a:xfrm>
-            <a:off x="8074152" y="1563624"/>
-            <a:ext cx="2825496" cy="256032"/>
+            <a:off x="7799832" y="1472184"/>
+            <a:ext cx="3145536" cy="256032"/>
           </a:xfrm>
           <a:prstGeom prst="rect">
             <a:avLst/>
@@ -5822,7 +6384,7 @@
                 <a:ea typeface="Aptos" pitchFamily="34" charset="-122"/>
                 <a:cs typeface="Aptos" pitchFamily="34" charset="-120"/>
               </a:rPr>
-              <a:t>Key idea</a:t>
+              <a:t>Governance lens</a:t>
             </a:r>
             <a:endParaRPr lang="en-US" sz="1300" dirty="0"/>
           </a:p>
@@ -5836,8 +6398,8 @@
         </p:nvSpPr>
         <p:spPr>
           <a:xfrm>
-            <a:off x="8074152" y="1920240"/>
-            <a:ext cx="2825496" cy="1188720"/>
+            <a:off x="7799832" y="1828800"/>
+            <a:ext cx="3145536" cy="685800"/>
           </a:xfrm>
           <a:prstGeom prst="rect">
             <a:avLst/>
@@ -5877,12 +6439,153 @@
         </p:nvSpPr>
         <p:spPr>
           <a:xfrm>
-            <a:off x="7909560" y="3520440"/>
-            <a:ext cx="3154680" cy="1737360"/>
+            <a:off x="7635240" y="2788920"/>
+            <a:ext cx="3474720" cy="1536192"/>
           </a:xfrm>
           <a:prstGeom prst="roundRect">
             <a:avLst>
-              <a:gd name="adj" fmla="val 6316"/>
+              <a:gd name="adj" fmla="val 7143"/>
+            </a:avLst>
+          </a:prstGeom>
+          <a:solidFill>
+            <a:srgbClr val="FFFFFF">
+              <a:alpha val="88000"/>
+            </a:srgbClr>
+          </a:solidFill>
+          <a:ln w="12700">
+            <a:solidFill>
+              <a:srgbClr val="D6E8F2"/>
+            </a:solidFill>
+            <a:prstDash val="solid"/>
+          </a:ln>
+        </p:spPr>
+      </p:sp>
+      <p:sp>
+        <p:nvSpPr>
+          <p:cNvPr id="14" name="Shape 12"/>
+          <p:cNvSpPr/>
+          <p:nvPr/>
+        </p:nvSpPr>
+        <p:spPr>
+          <a:xfrm>
+            <a:off x="8074152" y="3291840"/>
+            <a:ext cx="2596896" cy="749808"/>
+          </a:xfrm>
+          <a:prstGeom prst="rect">
+            <a:avLst/>
+          </a:prstGeom>
+          <a:solidFill>
+            <a:srgbClr val="EAF6F8"/>
+          </a:solidFill>
+          <a:ln w="12700">
+            <a:solidFill>
+              <a:srgbClr val="8ABBD8"/>
+            </a:solidFill>
+            <a:prstDash val="solid"/>
+          </a:ln>
+        </p:spPr>
+      </p:sp>
+      <p:sp>
+        <p:nvSpPr>
+          <p:cNvPr id="15" name="Shape 13"/>
+          <p:cNvSpPr/>
+          <p:nvPr/>
+        </p:nvSpPr>
+        <p:spPr>
+          <a:xfrm>
+            <a:off x="8202168" y="3721608"/>
+            <a:ext cx="2340864" cy="0"/>
+          </a:xfrm>
+          <a:prstGeom prst="line">
+            <a:avLst/>
+          </a:prstGeom>
+          <a:noFill/>
+          <a:ln w="19050">
+            <a:solidFill>
+              <a:srgbClr val="0068B7"/>
+            </a:solidFill>
+            <a:prstDash val="solid"/>
+          </a:ln>
+        </p:spPr>
+      </p:sp>
+      <p:sp>
+        <p:nvSpPr>
+          <p:cNvPr id="16" name="Shape 14"/>
+          <p:cNvSpPr/>
+          <p:nvPr/>
+        </p:nvSpPr>
+        <p:spPr>
+          <a:xfrm>
+            <a:off x="9198864" y="4206240"/>
+            <a:ext cx="347472" cy="347472"/>
+          </a:xfrm>
+          <a:prstGeom prst="ellipse">
+            <a:avLst/>
+          </a:prstGeom>
+          <a:solidFill>
+            <a:srgbClr val="2F8A28"/>
+          </a:solidFill>
+          <a:ln w="12700">
+            <a:solidFill>
+              <a:srgbClr val="2F8A28"/>
+            </a:solidFill>
+            <a:prstDash val="solid"/>
+          </a:ln>
+        </p:spPr>
+      </p:sp>
+      <p:sp>
+        <p:nvSpPr>
+          <p:cNvPr id="17" name="Text 15"/>
+          <p:cNvSpPr/>
+          <p:nvPr/>
+        </p:nvSpPr>
+        <p:spPr>
+          <a:xfrm>
+            <a:off x="7909560" y="3977640"/>
+            <a:ext cx="2926080" cy="182880"/>
+          </a:xfrm>
+          <a:prstGeom prst="rect">
+            <a:avLst/>
+          </a:prstGeom>
+          <a:noFill/>
+          <a:ln/>
+        </p:spPr>
+        <p:txBody>
+          <a:bodyPr wrap="square" lIns="0" tIns="0" rIns="0" bIns="0" rtlCol="0" anchor="ctr"/>
+          <a:lstStyle/>
+          <a:p>
+            <a:pPr algn="ctr" indent="0" marL="0">
+              <a:buNone/>
+            </a:pPr>
+            <a:r>
+              <a:rPr lang="en-US" sz="1000" dirty="0">
+                <a:solidFill>
+                  <a:srgbClr val="003A63"/>
+                </a:solidFill>
+                <a:latin typeface="Aptos" pitchFamily="34" charset="0"/>
+                <a:ea typeface="Aptos" pitchFamily="34" charset="-122"/>
+                <a:cs typeface="Aptos" pitchFamily="34" charset="-120"/>
+              </a:rPr>
+              <a:t>Concept to action</a:t>
+            </a:r>
+            <a:endParaRPr lang="en-US" sz="1000" dirty="0"/>
+          </a:p>
+        </p:txBody>
+      </p:sp>
+      <p:sp>
+        <p:nvSpPr>
+          <p:cNvPr id="18" name="Shape 16"/>
+          <p:cNvSpPr/>
+          <p:nvPr/>
+        </p:nvSpPr>
+        <p:spPr>
+          <a:xfrm>
+            <a:off x="7635240" y="4498848"/>
+            <a:ext cx="3474720" cy="1143000"/>
+          </a:xfrm>
+          <a:prstGeom prst="roundRect">
+            <a:avLst>
+              <a:gd name="adj" fmla="val 9600"/>
             </a:avLst>
           </a:prstGeom>
           <a:solidFill>
@@ -5898,14 +6601,14 @@
       </p:sp>
       <p:sp>
         <p:nvSpPr>
-          <p:cNvPr id="14" name="Text 12"/>
-          <p:cNvSpPr/>
-          <p:nvPr/>
-        </p:nvSpPr>
-        <p:spPr>
-          <a:xfrm>
-            <a:off x="8074152" y="3666744"/>
-            <a:ext cx="2825496" cy="256032"/>
+          <p:cNvPr id="19" name="Text 17"/>
+          <p:cNvSpPr/>
+          <p:nvPr/>
+        </p:nvSpPr>
+        <p:spPr>
+          <a:xfrm>
+            <a:off x="7799832" y="4645152"/>
+            <a:ext cx="3145536" cy="256032"/>
           </a:xfrm>
           <a:prstGeom prst="rect">
             <a:avLst/>
@@ -5929,7 +6632,7 @@
                 <a:ea typeface="Aptos" pitchFamily="34" charset="-122"/>
                 <a:cs typeface="Aptos" pitchFamily="34" charset="-120"/>
               </a:rPr>
-              <a:t>Use this for</a:t>
+              <a:t>What to document</a:t>
             </a:r>
             <a:endParaRPr lang="en-US" sz="1300" dirty="0"/>
           </a:p>
@@ -5937,14 +6640,14 @@
       </p:sp>
       <p:sp>
         <p:nvSpPr>
-          <p:cNvPr id="15" name="Text 13"/>
-          <p:cNvSpPr/>
-          <p:nvPr/>
-        </p:nvSpPr>
-        <p:spPr>
-          <a:xfrm>
-            <a:off x="8074152" y="4023360"/>
-            <a:ext cx="2825496" cy="1097280"/>
+          <p:cNvPr id="20" name="Text 18"/>
+          <p:cNvSpPr/>
+          <p:nvPr/>
+        </p:nvSpPr>
+        <p:spPr>
+          <a:xfrm>
+            <a:off x="7799832" y="5001768"/>
+            <a:ext cx="3145536" cy="502920"/>
           </a:xfrm>
           <a:prstGeom prst="rect">
             <a:avLst/>
@@ -5970,7 +6673,7 @@
                 <a:ea typeface="Aptos" pitchFamily="34" charset="-122"/>
                 <a:cs typeface="Aptos" pitchFamily="34" charset="-120"/>
               </a:rPr>
-              <a:t>Connect the concept to public health decisions, safeguards, documentation, or implementation work.</a:t>
+              <a:t>Connect the concept to public health purpose, responsible use, required safeguards, documentation, and the next action a department should take.</a:t>
             </a:r>
             <a:endParaRPr lang="en-US" sz="1550" dirty="0"/>
           </a:p>
@@ -6144,8 +6847,8 @@
         </p:nvSpPr>
         <p:spPr>
           <a:xfrm>
-            <a:off x="9966960" y="6537960"/>
-            <a:ext cx="1645920" cy="201168"/>
+            <a:off x="9646920" y="6537960"/>
+            <a:ext cx="1965960" cy="201168"/>
           </a:xfrm>
           <a:prstGeom prst="rect">
             <a:avLst/>
@@ -6169,7 +6872,7 @@
                 <a:ea typeface="Aptos" pitchFamily="34" charset="-122"/>
                 <a:cs typeface="Aptos" pitchFamily="34" charset="-120"/>
               </a:rPr>
-              <a:t>Â© Paula Soper</a:t>
+              <a:t>Copyright Paula Soper</a:t>
             </a:r>
             <a:endParaRPr lang="en-US" sz="800" dirty="0"/>
           </a:p>
@@ -6216,77 +6919,13 @@
       </p:sp>
       <p:sp>
         <p:nvSpPr>
-          <p:cNvPr id="8" name="Shape 6"/>
+          <p:cNvPr id="8" name="Text 6"/>
           <p:cNvSpPr/>
           <p:nvPr/>
         </p:nvSpPr>
         <p:spPr>
           <a:xfrm>
             <a:off x="640080" y="658368"/>
-            <a:ext cx="420624" cy="420624"/>
-          </a:xfrm>
-          <a:prstGeom prst="ellipse">
-            <a:avLst/>
-          </a:prstGeom>
-          <a:solidFill>
-            <a:srgbClr val="0068B7"/>
-          </a:solidFill>
-          <a:ln w="12700">
-            <a:solidFill>
-              <a:srgbClr val="0068B7"/>
-            </a:solidFill>
-            <a:prstDash val="solid"/>
-          </a:ln>
-        </p:spPr>
-      </p:sp>
-      <p:sp>
-        <p:nvSpPr>
-          <p:cNvPr id="9" name="Text 7"/>
-          <p:cNvSpPr/>
-          <p:nvPr/>
-        </p:nvSpPr>
-        <p:spPr>
-          <a:xfrm>
-            <a:off x="640080" y="731520"/>
-            <a:ext cx="420624" cy="164592"/>
-          </a:xfrm>
-          <a:prstGeom prst="rect">
-            <a:avLst/>
-          </a:prstGeom>
-          <a:noFill/>
-          <a:ln/>
-        </p:spPr>
-        <p:txBody>
-          <a:bodyPr wrap="square" lIns="0" tIns="0" rIns="0" bIns="0" rtlCol="0" anchor="ctr"/>
-          <a:lstStyle/>
-          <a:p>
-            <a:pPr algn="ctr" indent="0" marL="0">
-              <a:buNone/>
-            </a:pPr>
-            <a:r>
-              <a:rPr lang="en-US" sz="1100" b="1" dirty="0">
-                <a:solidFill>
-                  <a:srgbClr val="FFFFFF"/>
-                </a:solidFill>
-                <a:latin typeface="Aptos" pitchFamily="34" charset="0"/>
-                <a:ea typeface="Aptos" pitchFamily="34" charset="-122"/>
-                <a:cs typeface="Aptos" pitchFamily="34" charset="-120"/>
-              </a:rPr>
-              <a:t>10</a:t>
-            </a:r>
-            <a:endParaRPr lang="en-US" sz="1100" dirty="0"/>
-          </a:p>
-        </p:txBody>
-      </p:sp>
-      <p:sp>
-        <p:nvSpPr>
-          <p:cNvPr id="10" name="Text 8"/>
-          <p:cNvSpPr/>
-          <p:nvPr/>
-        </p:nvSpPr>
-        <p:spPr>
-          <a:xfrm>
-            <a:off x="640080" y="621792"/>
             <a:ext cx="10881360" cy="713232"/>
           </a:xfrm>
           <a:prstGeom prst="rect">
@@ -6321,14 +6960,14 @@
       </p:sp>
       <p:sp>
         <p:nvSpPr>
-          <p:cNvPr id="11" name="Text 9"/>
+          <p:cNvPr id="9" name="Text 7"/>
           <p:cNvSpPr/>
           <p:nvPr/>
         </p:nvSpPr>
         <p:spPr>
           <a:xfrm>
             <a:off x="868680" y="1508760"/>
-            <a:ext cx="6537960" cy="4160520"/>
+            <a:ext cx="6309360" cy="4160520"/>
           </a:xfrm>
           <a:prstGeom prst="rect">
             <a:avLst/>
@@ -6373,18 +7012,18 @@
       </p:sp>
       <p:sp>
         <p:nvSpPr>
-          <p:cNvPr id="12" name="Shape 10"/>
-          <p:cNvSpPr/>
-          <p:nvPr/>
-        </p:nvSpPr>
-        <p:spPr>
-          <a:xfrm>
-            <a:off x="7909560" y="1417320"/>
-            <a:ext cx="3154680" cy="1828800"/>
+          <p:cNvPr id="10" name="Shape 8"/>
+          <p:cNvSpPr/>
+          <p:nvPr/>
+        </p:nvSpPr>
+        <p:spPr>
+          <a:xfrm>
+            <a:off x="7635240" y="1325880"/>
+            <a:ext cx="3474720" cy="1325880"/>
           </a:xfrm>
           <a:prstGeom prst="roundRect">
             <a:avLst>
-              <a:gd name="adj" fmla="val 6000"/>
+              <a:gd name="adj" fmla="val 8276"/>
             </a:avLst>
           </a:prstGeom>
           <a:solidFill>
@@ -6400,14 +7039,14 @@
       </p:sp>
       <p:sp>
         <p:nvSpPr>
-          <p:cNvPr id="13" name="Text 11"/>
-          <p:cNvSpPr/>
-          <p:nvPr/>
-        </p:nvSpPr>
-        <p:spPr>
-          <a:xfrm>
-            <a:off x="8074152" y="1563624"/>
-            <a:ext cx="2825496" cy="256032"/>
+          <p:cNvPr id="11" name="Text 9"/>
+          <p:cNvSpPr/>
+          <p:nvPr/>
+        </p:nvSpPr>
+        <p:spPr>
+          <a:xfrm>
+            <a:off x="7799832" y="1472184"/>
+            <a:ext cx="3145536" cy="256032"/>
           </a:xfrm>
           <a:prstGeom prst="rect">
             <a:avLst/>
@@ -6431,7 +7070,7 @@
                 <a:ea typeface="Aptos" pitchFamily="34" charset="-122"/>
                 <a:cs typeface="Aptos" pitchFamily="34" charset="-120"/>
               </a:rPr>
-              <a:t>Key idea</a:t>
+              <a:t>Governance lens</a:t>
             </a:r>
             <a:endParaRPr lang="en-US" sz="1300" dirty="0"/>
           </a:p>
@@ -6439,14 +7078,14 @@
       </p:sp>
       <p:sp>
         <p:nvSpPr>
-          <p:cNvPr id="14" name="Text 12"/>
-          <p:cNvSpPr/>
-          <p:nvPr/>
-        </p:nvSpPr>
-        <p:spPr>
-          <a:xfrm>
-            <a:off x="8074152" y="1920240"/>
-            <a:ext cx="2825496" cy="1188720"/>
+          <p:cNvPr id="12" name="Text 10"/>
+          <p:cNvSpPr/>
+          <p:nvPr/>
+        </p:nvSpPr>
+        <p:spPr>
+          <a:xfrm>
+            <a:off x="7799832" y="1828800"/>
+            <a:ext cx="3145536" cy="685800"/>
           </a:xfrm>
           <a:prstGeom prst="rect">
             <a:avLst/>
@@ -6480,18 +7119,159 @@
       </p:sp>
       <p:sp>
         <p:nvSpPr>
-          <p:cNvPr id="15" name="Shape 13"/>
-          <p:cNvSpPr/>
-          <p:nvPr/>
-        </p:nvSpPr>
-        <p:spPr>
-          <a:xfrm>
-            <a:off x="7909560" y="3520440"/>
-            <a:ext cx="3154680" cy="1737360"/>
+          <p:cNvPr id="13" name="Shape 11"/>
+          <p:cNvSpPr/>
+          <p:nvPr/>
+        </p:nvSpPr>
+        <p:spPr>
+          <a:xfrm>
+            <a:off x="7635240" y="2788920"/>
+            <a:ext cx="3474720" cy="1536192"/>
           </a:xfrm>
           <a:prstGeom prst="roundRect">
             <a:avLst>
-              <a:gd name="adj" fmla="val 6316"/>
+              <a:gd name="adj" fmla="val 7143"/>
+            </a:avLst>
+          </a:prstGeom>
+          <a:solidFill>
+            <a:srgbClr val="FFFFFF">
+              <a:alpha val="88000"/>
+            </a:srgbClr>
+          </a:solidFill>
+          <a:ln w="12700">
+            <a:solidFill>
+              <a:srgbClr val="D6E8F2"/>
+            </a:solidFill>
+            <a:prstDash val="solid"/>
+          </a:ln>
+        </p:spPr>
+      </p:sp>
+      <p:sp>
+        <p:nvSpPr>
+          <p:cNvPr id="14" name="Shape 12"/>
+          <p:cNvSpPr/>
+          <p:nvPr/>
+        </p:nvSpPr>
+        <p:spPr>
+          <a:xfrm>
+            <a:off x="8074152" y="3291840"/>
+            <a:ext cx="2596896" cy="749808"/>
+          </a:xfrm>
+          <a:prstGeom prst="rect">
+            <a:avLst/>
+          </a:prstGeom>
+          <a:solidFill>
+            <a:srgbClr val="EAF6F8"/>
+          </a:solidFill>
+          <a:ln w="12700">
+            <a:solidFill>
+              <a:srgbClr val="8ABBD8"/>
+            </a:solidFill>
+            <a:prstDash val="solid"/>
+          </a:ln>
+        </p:spPr>
+      </p:sp>
+      <p:sp>
+        <p:nvSpPr>
+          <p:cNvPr id="15" name="Shape 13"/>
+          <p:cNvSpPr/>
+          <p:nvPr/>
+        </p:nvSpPr>
+        <p:spPr>
+          <a:xfrm>
+            <a:off x="8202168" y="3721608"/>
+            <a:ext cx="2340864" cy="0"/>
+          </a:xfrm>
+          <a:prstGeom prst="line">
+            <a:avLst/>
+          </a:prstGeom>
+          <a:noFill/>
+          <a:ln w="19050">
+            <a:solidFill>
+              <a:srgbClr val="0068B7"/>
+            </a:solidFill>
+            <a:prstDash val="solid"/>
+          </a:ln>
+        </p:spPr>
+      </p:sp>
+      <p:sp>
+        <p:nvSpPr>
+          <p:cNvPr id="16" name="Shape 14"/>
+          <p:cNvSpPr/>
+          <p:nvPr/>
+        </p:nvSpPr>
+        <p:spPr>
+          <a:xfrm>
+            <a:off x="9198864" y="4206240"/>
+            <a:ext cx="347472" cy="347472"/>
+          </a:xfrm>
+          <a:prstGeom prst="ellipse">
+            <a:avLst/>
+          </a:prstGeom>
+          <a:solidFill>
+            <a:srgbClr val="2F8A28"/>
+          </a:solidFill>
+          <a:ln w="12700">
+            <a:solidFill>
+              <a:srgbClr val="2F8A28"/>
+            </a:solidFill>
+            <a:prstDash val="solid"/>
+          </a:ln>
+        </p:spPr>
+      </p:sp>
+      <p:sp>
+        <p:nvSpPr>
+          <p:cNvPr id="17" name="Text 15"/>
+          <p:cNvSpPr/>
+          <p:nvPr/>
+        </p:nvSpPr>
+        <p:spPr>
+          <a:xfrm>
+            <a:off x="7909560" y="3977640"/>
+            <a:ext cx="2926080" cy="182880"/>
+          </a:xfrm>
+          <a:prstGeom prst="rect">
+            <a:avLst/>
+          </a:prstGeom>
+          <a:noFill/>
+          <a:ln/>
+        </p:spPr>
+        <p:txBody>
+          <a:bodyPr wrap="square" lIns="0" tIns="0" rIns="0" bIns="0" rtlCol="0" anchor="ctr"/>
+          <a:lstStyle/>
+          <a:p>
+            <a:pPr algn="ctr" indent="0" marL="0">
+              <a:buNone/>
+            </a:pPr>
+            <a:r>
+              <a:rPr lang="en-US" sz="1000" dirty="0">
+                <a:solidFill>
+                  <a:srgbClr val="003A63"/>
+                </a:solidFill>
+                <a:latin typeface="Aptos" pitchFamily="34" charset="0"/>
+                <a:ea typeface="Aptos" pitchFamily="34" charset="-122"/>
+                <a:cs typeface="Aptos" pitchFamily="34" charset="-120"/>
+              </a:rPr>
+              <a:t>Concept to action</a:t>
+            </a:r>
+            <a:endParaRPr lang="en-US" sz="1000" dirty="0"/>
+          </a:p>
+        </p:txBody>
+      </p:sp>
+      <p:sp>
+        <p:nvSpPr>
+          <p:cNvPr id="18" name="Shape 16"/>
+          <p:cNvSpPr/>
+          <p:nvPr/>
+        </p:nvSpPr>
+        <p:spPr>
+          <a:xfrm>
+            <a:off x="7635240" y="4498848"/>
+            <a:ext cx="3474720" cy="1143000"/>
+          </a:xfrm>
+          <a:prstGeom prst="roundRect">
+            <a:avLst>
+              <a:gd name="adj" fmla="val 9600"/>
             </a:avLst>
           </a:prstGeom>
           <a:solidFill>
@@ -6507,14 +7287,14 @@
       </p:sp>
       <p:sp>
         <p:nvSpPr>
-          <p:cNvPr id="16" name="Text 14"/>
-          <p:cNvSpPr/>
-          <p:nvPr/>
-        </p:nvSpPr>
-        <p:spPr>
-          <a:xfrm>
-            <a:off x="8074152" y="3666744"/>
-            <a:ext cx="2825496" cy="256032"/>
+          <p:cNvPr id="19" name="Text 17"/>
+          <p:cNvSpPr/>
+          <p:nvPr/>
+        </p:nvSpPr>
+        <p:spPr>
+          <a:xfrm>
+            <a:off x="7799832" y="4645152"/>
+            <a:ext cx="3145536" cy="256032"/>
           </a:xfrm>
           <a:prstGeom prst="rect">
             <a:avLst/>
@@ -6538,7 +7318,7 @@
                 <a:ea typeface="Aptos" pitchFamily="34" charset="-122"/>
                 <a:cs typeface="Aptos" pitchFamily="34" charset="-120"/>
               </a:rPr>
-              <a:t>Use this for</a:t>
+              <a:t>What to document</a:t>
             </a:r>
             <a:endParaRPr lang="en-US" sz="1300" dirty="0"/>
           </a:p>
@@ -6546,14 +7326,14 @@
       </p:sp>
       <p:sp>
         <p:nvSpPr>
-          <p:cNvPr id="17" name="Text 15"/>
-          <p:cNvSpPr/>
-          <p:nvPr/>
-        </p:nvSpPr>
-        <p:spPr>
-          <a:xfrm>
-            <a:off x="8074152" y="4023360"/>
-            <a:ext cx="2825496" cy="1097280"/>
+          <p:cNvPr id="20" name="Text 18"/>
+          <p:cNvSpPr/>
+          <p:nvPr/>
+        </p:nvSpPr>
+        <p:spPr>
+          <a:xfrm>
+            <a:off x="7799832" y="5001768"/>
+            <a:ext cx="3145536" cy="502920"/>
           </a:xfrm>
           <a:prstGeom prst="rect">
             <a:avLst/>
@@ -6579,7 +7359,7 @@
                 <a:ea typeface="Aptos" pitchFamily="34" charset="-122"/>
                 <a:cs typeface="Aptos" pitchFamily="34" charset="-120"/>
               </a:rPr>
-              <a:t>Connect the concept to public health decisions, safeguards, documentation, or implementation work.</a:t>
+              <a:t>Use the assignment to test whether you can explain the concept, apply it to a realistic public health situation, and identify what would need review before the work moves forward.</a:t>
             </a:r>
             <a:endParaRPr lang="en-US" sz="1550" dirty="0"/>
           </a:p>
@@ -6753,8 +7533,8 @@
         </p:nvSpPr>
         <p:spPr>
           <a:xfrm>
-            <a:off x="9966960" y="6537960"/>
-            <a:ext cx="1645920" cy="201168"/>
+            <a:off x="9646920" y="6537960"/>
+            <a:ext cx="1965960" cy="201168"/>
           </a:xfrm>
           <a:prstGeom prst="rect">
             <a:avLst/>
@@ -6778,7 +7558,7 @@
                 <a:ea typeface="Aptos" pitchFamily="34" charset="-122"/>
                 <a:cs typeface="Aptos" pitchFamily="34" charset="-120"/>
               </a:rPr>
-              <a:t>Â© Paula Soper</a:t>
+              <a:t>Copyright Paula Soper</a:t>
             </a:r>
             <a:endParaRPr lang="en-US" sz="800" dirty="0"/>
           </a:p>
@@ -6825,77 +7605,13 @@
       </p:sp>
       <p:sp>
         <p:nvSpPr>
-          <p:cNvPr id="8" name="Shape 6"/>
+          <p:cNvPr id="8" name="Text 6"/>
           <p:cNvSpPr/>
           <p:nvPr/>
         </p:nvSpPr>
         <p:spPr>
           <a:xfrm>
             <a:off x="640080" y="658368"/>
-            <a:ext cx="420624" cy="420624"/>
-          </a:xfrm>
-          <a:prstGeom prst="ellipse">
-            <a:avLst/>
-          </a:prstGeom>
-          <a:solidFill>
-            <a:srgbClr val="0068B7"/>
-          </a:solidFill>
-          <a:ln w="12700">
-            <a:solidFill>
-              <a:srgbClr val="0068B7"/>
-            </a:solidFill>
-            <a:prstDash val="solid"/>
-          </a:ln>
-        </p:spPr>
-      </p:sp>
-      <p:sp>
-        <p:nvSpPr>
-          <p:cNvPr id="9" name="Text 7"/>
-          <p:cNvSpPr/>
-          <p:nvPr/>
-        </p:nvSpPr>
-        <p:spPr>
-          <a:xfrm>
-            <a:off x="640080" y="731520"/>
-            <a:ext cx="420624" cy="164592"/>
-          </a:xfrm>
-          <a:prstGeom prst="rect">
-            <a:avLst/>
-          </a:prstGeom>
-          <a:noFill/>
-          <a:ln/>
-        </p:spPr>
-        <p:txBody>
-          <a:bodyPr wrap="square" lIns="0" tIns="0" rIns="0" bIns="0" rtlCol="0" anchor="ctr"/>
-          <a:lstStyle/>
-          <a:p>
-            <a:pPr algn="ctr" indent="0" marL="0">
-              <a:buNone/>
-            </a:pPr>
-            <a:r>
-              <a:rPr lang="en-US" sz="1100" b="1" dirty="0">
-                <a:solidFill>
-                  <a:srgbClr val="FFFFFF"/>
-                </a:solidFill>
-                <a:latin typeface="Aptos" pitchFamily="34" charset="0"/>
-                <a:ea typeface="Aptos" pitchFamily="34" charset="-122"/>
-                <a:cs typeface="Aptos" pitchFamily="34" charset="-120"/>
-              </a:rPr>
-              <a:t>11</a:t>
-            </a:r>
-            <a:endParaRPr lang="en-US" sz="1100" dirty="0"/>
-          </a:p>
-        </p:txBody>
-      </p:sp>
-      <p:sp>
-        <p:nvSpPr>
-          <p:cNvPr id="10" name="Text 8"/>
-          <p:cNvSpPr/>
-          <p:nvPr/>
-        </p:nvSpPr>
-        <p:spPr>
-          <a:xfrm>
-            <a:off x="640080" y="621792"/>
             <a:ext cx="10881360" cy="713232"/>
           </a:xfrm>
           <a:prstGeom prst="rect">
@@ -6930,14 +7646,14 @@
       </p:sp>
       <p:sp>
         <p:nvSpPr>
-          <p:cNvPr id="11" name="Text 9"/>
+          <p:cNvPr id="9" name="Text 7"/>
           <p:cNvSpPr/>
           <p:nvPr/>
         </p:nvSpPr>
         <p:spPr>
           <a:xfrm>
             <a:off x="868680" y="1508760"/>
-            <a:ext cx="6537960" cy="4160520"/>
+            <a:ext cx="6309360" cy="4160520"/>
           </a:xfrm>
           <a:prstGeom prst="rect">
             <a:avLst/>
@@ -6996,18 +7712,18 @@
       </p:sp>
       <p:sp>
         <p:nvSpPr>
-          <p:cNvPr id="12" name="Shape 10"/>
-          <p:cNvSpPr/>
-          <p:nvPr/>
-        </p:nvSpPr>
-        <p:spPr>
-          <a:xfrm>
-            <a:off x="7909560" y="1417320"/>
-            <a:ext cx="3154680" cy="1828800"/>
+          <p:cNvPr id="10" name="Shape 8"/>
+          <p:cNvSpPr/>
+          <p:nvPr/>
+        </p:nvSpPr>
+        <p:spPr>
+          <a:xfrm>
+            <a:off x="7635240" y="1325880"/>
+            <a:ext cx="3474720" cy="1325880"/>
           </a:xfrm>
           <a:prstGeom prst="roundRect">
             <a:avLst>
-              <a:gd name="adj" fmla="val 6000"/>
+              <a:gd name="adj" fmla="val 8276"/>
             </a:avLst>
           </a:prstGeom>
           <a:solidFill>
@@ -7023,14 +7739,14 @@
       </p:sp>
       <p:sp>
         <p:nvSpPr>
-          <p:cNvPr id="13" name="Text 11"/>
-          <p:cNvSpPr/>
-          <p:nvPr/>
-        </p:nvSpPr>
-        <p:spPr>
-          <a:xfrm>
-            <a:off x="8074152" y="1563624"/>
-            <a:ext cx="2825496" cy="256032"/>
+          <p:cNvPr id="11" name="Text 9"/>
+          <p:cNvSpPr/>
+          <p:nvPr/>
+        </p:nvSpPr>
+        <p:spPr>
+          <a:xfrm>
+            <a:off x="7799832" y="1472184"/>
+            <a:ext cx="3145536" cy="256032"/>
           </a:xfrm>
           <a:prstGeom prst="rect">
             <a:avLst/>
@@ -7054,7 +7770,7 @@
                 <a:ea typeface="Aptos" pitchFamily="34" charset="-122"/>
                 <a:cs typeface="Aptos" pitchFamily="34" charset="-120"/>
               </a:rPr>
-              <a:t>Key idea</a:t>
+              <a:t>Governance lens</a:t>
             </a:r>
             <a:endParaRPr lang="en-US" sz="1300" dirty="0"/>
           </a:p>
@@ -7062,14 +7778,14 @@
       </p:sp>
       <p:sp>
         <p:nvSpPr>
-          <p:cNvPr id="14" name="Text 12"/>
-          <p:cNvSpPr/>
-          <p:nvPr/>
-        </p:nvSpPr>
-        <p:spPr>
-          <a:xfrm>
-            <a:off x="8074152" y="1920240"/>
-            <a:ext cx="2825496" cy="1188720"/>
+          <p:cNvPr id="12" name="Text 10"/>
+          <p:cNvSpPr/>
+          <p:nvPr/>
+        </p:nvSpPr>
+        <p:spPr>
+          <a:xfrm>
+            <a:off x="7799832" y="1828800"/>
+            <a:ext cx="3145536" cy="685800"/>
           </a:xfrm>
           <a:prstGeom prst="rect">
             <a:avLst/>
@@ -7103,18 +7819,159 @@
       </p:sp>
       <p:sp>
         <p:nvSpPr>
-          <p:cNvPr id="15" name="Shape 13"/>
-          <p:cNvSpPr/>
-          <p:nvPr/>
-        </p:nvSpPr>
-        <p:spPr>
-          <a:xfrm>
-            <a:off x="7909560" y="3520440"/>
-            <a:ext cx="3154680" cy="1737360"/>
+          <p:cNvPr id="13" name="Shape 11"/>
+          <p:cNvSpPr/>
+          <p:nvPr/>
+        </p:nvSpPr>
+        <p:spPr>
+          <a:xfrm>
+            <a:off x="7635240" y="2788920"/>
+            <a:ext cx="3474720" cy="1536192"/>
           </a:xfrm>
           <a:prstGeom prst="roundRect">
             <a:avLst>
-              <a:gd name="adj" fmla="val 6316"/>
+              <a:gd name="adj" fmla="val 7143"/>
+            </a:avLst>
+          </a:prstGeom>
+          <a:solidFill>
+            <a:srgbClr val="FFFFFF">
+              <a:alpha val="88000"/>
+            </a:srgbClr>
+          </a:solidFill>
+          <a:ln w="12700">
+            <a:solidFill>
+              <a:srgbClr val="D6E8F2"/>
+            </a:solidFill>
+            <a:prstDash val="solid"/>
+          </a:ln>
+        </p:spPr>
+      </p:sp>
+      <p:sp>
+        <p:nvSpPr>
+          <p:cNvPr id="14" name="Shape 12"/>
+          <p:cNvSpPr/>
+          <p:nvPr/>
+        </p:nvSpPr>
+        <p:spPr>
+          <a:xfrm>
+            <a:off x="8074152" y="3291840"/>
+            <a:ext cx="2596896" cy="749808"/>
+          </a:xfrm>
+          <a:prstGeom prst="rect">
+            <a:avLst/>
+          </a:prstGeom>
+          <a:solidFill>
+            <a:srgbClr val="EAF6F8"/>
+          </a:solidFill>
+          <a:ln w="12700">
+            <a:solidFill>
+              <a:srgbClr val="8ABBD8"/>
+            </a:solidFill>
+            <a:prstDash val="solid"/>
+          </a:ln>
+        </p:spPr>
+      </p:sp>
+      <p:sp>
+        <p:nvSpPr>
+          <p:cNvPr id="15" name="Shape 13"/>
+          <p:cNvSpPr/>
+          <p:nvPr/>
+        </p:nvSpPr>
+        <p:spPr>
+          <a:xfrm>
+            <a:off x="8202168" y="3721608"/>
+            <a:ext cx="2340864" cy="0"/>
+          </a:xfrm>
+          <a:prstGeom prst="line">
+            <a:avLst/>
+          </a:prstGeom>
+          <a:noFill/>
+          <a:ln w="19050">
+            <a:solidFill>
+              <a:srgbClr val="0068B7"/>
+            </a:solidFill>
+            <a:prstDash val="solid"/>
+          </a:ln>
+        </p:spPr>
+      </p:sp>
+      <p:sp>
+        <p:nvSpPr>
+          <p:cNvPr id="16" name="Shape 14"/>
+          <p:cNvSpPr/>
+          <p:nvPr/>
+        </p:nvSpPr>
+        <p:spPr>
+          <a:xfrm>
+            <a:off x="9198864" y="4206240"/>
+            <a:ext cx="347472" cy="347472"/>
+          </a:xfrm>
+          <a:prstGeom prst="ellipse">
+            <a:avLst/>
+          </a:prstGeom>
+          <a:solidFill>
+            <a:srgbClr val="2F8A28"/>
+          </a:solidFill>
+          <a:ln w="12700">
+            <a:solidFill>
+              <a:srgbClr val="2F8A28"/>
+            </a:solidFill>
+            <a:prstDash val="solid"/>
+          </a:ln>
+        </p:spPr>
+      </p:sp>
+      <p:sp>
+        <p:nvSpPr>
+          <p:cNvPr id="17" name="Text 15"/>
+          <p:cNvSpPr/>
+          <p:nvPr/>
+        </p:nvSpPr>
+        <p:spPr>
+          <a:xfrm>
+            <a:off x="7909560" y="3977640"/>
+            <a:ext cx="2926080" cy="182880"/>
+          </a:xfrm>
+          <a:prstGeom prst="rect">
+            <a:avLst/>
+          </a:prstGeom>
+          <a:noFill/>
+          <a:ln/>
+        </p:spPr>
+        <p:txBody>
+          <a:bodyPr wrap="square" lIns="0" tIns="0" rIns="0" bIns="0" rtlCol="0" anchor="ctr"/>
+          <a:lstStyle/>
+          <a:p>
+            <a:pPr algn="ctr" indent="0" marL="0">
+              <a:buNone/>
+            </a:pPr>
+            <a:r>
+              <a:rPr lang="en-US" sz="1000" dirty="0">
+                <a:solidFill>
+                  <a:srgbClr val="003A63"/>
+                </a:solidFill>
+                <a:latin typeface="Aptos" pitchFamily="34" charset="0"/>
+                <a:ea typeface="Aptos" pitchFamily="34" charset="-122"/>
+                <a:cs typeface="Aptos" pitchFamily="34" charset="-120"/>
+              </a:rPr>
+              <a:t>Concept to action</a:t>
+            </a:r>
+            <a:endParaRPr lang="en-US" sz="1000" dirty="0"/>
+          </a:p>
+        </p:txBody>
+      </p:sp>
+      <p:sp>
+        <p:nvSpPr>
+          <p:cNvPr id="18" name="Shape 16"/>
+          <p:cNvSpPr/>
+          <p:nvPr/>
+        </p:nvSpPr>
+        <p:spPr>
+          <a:xfrm>
+            <a:off x="7635240" y="4498848"/>
+            <a:ext cx="3474720" cy="1143000"/>
+          </a:xfrm>
+          <a:prstGeom prst="roundRect">
+            <a:avLst>
+              <a:gd name="adj" fmla="val 9600"/>
             </a:avLst>
           </a:prstGeom>
           <a:solidFill>
@@ -7130,14 +7987,14 @@
       </p:sp>
       <p:sp>
         <p:nvSpPr>
-          <p:cNvPr id="16" name="Text 14"/>
-          <p:cNvSpPr/>
-          <p:nvPr/>
-        </p:nvSpPr>
-        <p:spPr>
-          <a:xfrm>
-            <a:off x="8074152" y="3666744"/>
-            <a:ext cx="2825496" cy="256032"/>
+          <p:cNvPr id="19" name="Text 17"/>
+          <p:cNvSpPr/>
+          <p:nvPr/>
+        </p:nvSpPr>
+        <p:spPr>
+          <a:xfrm>
+            <a:off x="7799832" y="4645152"/>
+            <a:ext cx="3145536" cy="256032"/>
           </a:xfrm>
           <a:prstGeom prst="rect">
             <a:avLst/>
@@ -7161,7 +8018,7 @@
                 <a:ea typeface="Aptos" pitchFamily="34" charset="-122"/>
                 <a:cs typeface="Aptos" pitchFamily="34" charset="-120"/>
               </a:rPr>
-              <a:t>Use this for</a:t>
+              <a:t>What to document</a:t>
             </a:r>
             <a:endParaRPr lang="en-US" sz="1300" dirty="0"/>
           </a:p>
@@ -7169,14 +8026,14 @@
       </p:sp>
       <p:sp>
         <p:nvSpPr>
-          <p:cNvPr id="17" name="Text 15"/>
-          <p:cNvSpPr/>
-          <p:nvPr/>
-        </p:nvSpPr>
-        <p:spPr>
-          <a:xfrm>
-            <a:off x="8074152" y="4023360"/>
-            <a:ext cx="2825496" cy="1097280"/>
+          <p:cNvPr id="20" name="Text 18"/>
+          <p:cNvSpPr/>
+          <p:nvPr/>
+        </p:nvSpPr>
+        <p:spPr>
+          <a:xfrm>
+            <a:off x="7799832" y="5001768"/>
+            <a:ext cx="3145536" cy="502920"/>
           </a:xfrm>
           <a:prstGeom prst="rect">
             <a:avLst/>
@@ -7202,7 +8059,7 @@
                 <a:ea typeface="Aptos" pitchFamily="34" charset="-122"/>
                 <a:cs typeface="Aptos" pitchFamily="34" charset="-120"/>
               </a:rPr>
-              <a:t>Connect the concept to public health decisions, safeguards, documentation, or implementation work.</a:t>
+              <a:t>Connect the concept to public health purpose, responsible use, required safeguards, documentation, and the next action a department should take.</a:t>
             </a:r>
             <a:endParaRPr lang="en-US" sz="1550" dirty="0"/>
           </a:p>
@@ -7376,8 +8233,8 @@
         </p:nvSpPr>
         <p:spPr>
           <a:xfrm>
-            <a:off x="9966960" y="6537960"/>
-            <a:ext cx="1645920" cy="201168"/>
+            <a:off x="9646920" y="6537960"/>
+            <a:ext cx="1965960" cy="201168"/>
           </a:xfrm>
           <a:prstGeom prst="rect">
             <a:avLst/>
@@ -7401,7 +8258,7 @@
                 <a:ea typeface="Aptos" pitchFamily="34" charset="-122"/>
                 <a:cs typeface="Aptos" pitchFamily="34" charset="-120"/>
               </a:rPr>
-              <a:t>Â© Paula Soper</a:t>
+              <a:t>Copyright Paula Soper</a:t>
             </a:r>
             <a:endParaRPr lang="en-US" sz="800" dirty="0"/>
           </a:p>
@@ -7448,77 +8305,13 @@
       </p:sp>
       <p:sp>
         <p:nvSpPr>
-          <p:cNvPr id="8" name="Shape 6"/>
+          <p:cNvPr id="8" name="Text 6"/>
           <p:cNvSpPr/>
           <p:nvPr/>
         </p:nvSpPr>
         <p:spPr>
           <a:xfrm>
             <a:off x="640080" y="658368"/>
-            <a:ext cx="420624" cy="420624"/>
-          </a:xfrm>
-          <a:prstGeom prst="ellipse">
-            <a:avLst/>
-          </a:prstGeom>
-          <a:solidFill>
-            <a:srgbClr val="0068B7"/>
-          </a:solidFill>
-          <a:ln w="12700">
-            <a:solidFill>
-              <a:srgbClr val="0068B7"/>
-            </a:solidFill>
-            <a:prstDash val="solid"/>
-          </a:ln>
-        </p:spPr>
-      </p:sp>
-      <p:sp>
-        <p:nvSpPr>
-          <p:cNvPr id="9" name="Text 7"/>
-          <p:cNvSpPr/>
-          <p:nvPr/>
-        </p:nvSpPr>
-        <p:spPr>
-          <a:xfrm>
-            <a:off x="640080" y="731520"/>
-            <a:ext cx="420624" cy="164592"/>
-          </a:xfrm>
-          <a:prstGeom prst="rect">
-            <a:avLst/>
-          </a:prstGeom>
-          <a:noFill/>
-          <a:ln/>
-        </p:spPr>
-        <p:txBody>
-          <a:bodyPr wrap="square" lIns="0" tIns="0" rIns="0" bIns="0" rtlCol="0" anchor="ctr"/>
-          <a:lstStyle/>
-          <a:p>
-            <a:pPr algn="ctr" indent="0" marL="0">
-              <a:buNone/>
-            </a:pPr>
-            <a:r>
-              <a:rPr lang="en-US" sz="1100" b="1" dirty="0">
-                <a:solidFill>
-                  <a:srgbClr val="FFFFFF"/>
-                </a:solidFill>
-                <a:latin typeface="Aptos" pitchFamily="34" charset="0"/>
-                <a:ea typeface="Aptos" pitchFamily="34" charset="-122"/>
-                <a:cs typeface="Aptos" pitchFamily="34" charset="-120"/>
-              </a:rPr>
-              <a:t>12</a:t>
-            </a:r>
-            <a:endParaRPr lang="en-US" sz="1100" dirty="0"/>
-          </a:p>
-        </p:txBody>
-      </p:sp>
-      <p:sp>
-        <p:nvSpPr>
-          <p:cNvPr id="10" name="Text 8"/>
-          <p:cNvSpPr/>
-          <p:nvPr/>
-        </p:nvSpPr>
-        <p:spPr>
-          <a:xfrm>
-            <a:off x="640080" y="621792"/>
             <a:ext cx="10881360" cy="713232"/>
           </a:xfrm>
           <a:prstGeom prst="rect">
@@ -7553,14 +8346,14 @@
       </p:sp>
       <p:sp>
         <p:nvSpPr>
-          <p:cNvPr id="11" name="Text 9"/>
+          <p:cNvPr id="9" name="Text 7"/>
           <p:cNvSpPr/>
           <p:nvPr/>
         </p:nvSpPr>
         <p:spPr>
           <a:xfrm>
             <a:off x="868680" y="1508760"/>
-            <a:ext cx="6537960" cy="4160520"/>
+            <a:ext cx="6309360" cy="4160520"/>
           </a:xfrm>
           <a:prstGeom prst="rect">
             <a:avLst/>
@@ -7591,18 +8384,18 @@
       </p:sp>
       <p:sp>
         <p:nvSpPr>
-          <p:cNvPr id="12" name="Shape 10"/>
-          <p:cNvSpPr/>
-          <p:nvPr/>
-        </p:nvSpPr>
-        <p:spPr>
-          <a:xfrm>
-            <a:off x="7909560" y="1417320"/>
-            <a:ext cx="3154680" cy="1828800"/>
+          <p:cNvPr id="10" name="Shape 8"/>
+          <p:cNvSpPr/>
+          <p:nvPr/>
+        </p:nvSpPr>
+        <p:spPr>
+          <a:xfrm>
+            <a:off x="7635240" y="1325880"/>
+            <a:ext cx="3474720" cy="1325880"/>
           </a:xfrm>
           <a:prstGeom prst="roundRect">
             <a:avLst>
-              <a:gd name="adj" fmla="val 6000"/>
+              <a:gd name="adj" fmla="val 8276"/>
             </a:avLst>
           </a:prstGeom>
           <a:solidFill>
@@ -7618,14 +8411,14 @@
       </p:sp>
       <p:sp>
         <p:nvSpPr>
-          <p:cNvPr id="13" name="Text 11"/>
-          <p:cNvSpPr/>
-          <p:nvPr/>
-        </p:nvSpPr>
-        <p:spPr>
-          <a:xfrm>
-            <a:off x="8074152" y="1563624"/>
-            <a:ext cx="2825496" cy="256032"/>
+          <p:cNvPr id="11" name="Text 9"/>
+          <p:cNvSpPr/>
+          <p:nvPr/>
+        </p:nvSpPr>
+        <p:spPr>
+          <a:xfrm>
+            <a:off x="7799832" y="1472184"/>
+            <a:ext cx="3145536" cy="256032"/>
           </a:xfrm>
           <a:prstGeom prst="rect">
             <a:avLst/>
@@ -7649,7 +8442,7 @@
                 <a:ea typeface="Aptos" pitchFamily="34" charset="-122"/>
                 <a:cs typeface="Aptos" pitchFamily="34" charset="-120"/>
               </a:rPr>
-              <a:t>Key idea</a:t>
+              <a:t>Governance lens</a:t>
             </a:r>
             <a:endParaRPr lang="en-US" sz="1300" dirty="0"/>
           </a:p>
@@ -7657,14 +8450,14 @@
       </p:sp>
       <p:sp>
         <p:nvSpPr>
-          <p:cNvPr id="14" name="Text 12"/>
-          <p:cNvSpPr/>
-          <p:nvPr/>
-        </p:nvSpPr>
-        <p:spPr>
-          <a:xfrm>
-            <a:off x="8074152" y="1920240"/>
-            <a:ext cx="2825496" cy="1188720"/>
+          <p:cNvPr id="12" name="Text 10"/>
+          <p:cNvSpPr/>
+          <p:nvPr/>
+        </p:nvSpPr>
+        <p:spPr>
+          <a:xfrm>
+            <a:off x="7799832" y="1828800"/>
+            <a:ext cx="3145536" cy="685800"/>
           </a:xfrm>
           <a:prstGeom prst="rect">
             <a:avLst/>
@@ -7698,18 +8491,159 @@
       </p:sp>
       <p:sp>
         <p:nvSpPr>
-          <p:cNvPr id="15" name="Shape 13"/>
-          <p:cNvSpPr/>
-          <p:nvPr/>
-        </p:nvSpPr>
-        <p:spPr>
-          <a:xfrm>
-            <a:off x="7909560" y="3520440"/>
-            <a:ext cx="3154680" cy="1737360"/>
+          <p:cNvPr id="13" name="Shape 11"/>
+          <p:cNvSpPr/>
+          <p:nvPr/>
+        </p:nvSpPr>
+        <p:spPr>
+          <a:xfrm>
+            <a:off x="7635240" y="2788920"/>
+            <a:ext cx="3474720" cy="1536192"/>
           </a:xfrm>
           <a:prstGeom prst="roundRect">
             <a:avLst>
-              <a:gd name="adj" fmla="val 6316"/>
+              <a:gd name="adj" fmla="val 7143"/>
+            </a:avLst>
+          </a:prstGeom>
+          <a:solidFill>
+            <a:srgbClr val="FFFFFF">
+              <a:alpha val="88000"/>
+            </a:srgbClr>
+          </a:solidFill>
+          <a:ln w="12700">
+            <a:solidFill>
+              <a:srgbClr val="D6E8F2"/>
+            </a:solidFill>
+            <a:prstDash val="solid"/>
+          </a:ln>
+        </p:spPr>
+      </p:sp>
+      <p:sp>
+        <p:nvSpPr>
+          <p:cNvPr id="14" name="Shape 12"/>
+          <p:cNvSpPr/>
+          <p:nvPr/>
+        </p:nvSpPr>
+        <p:spPr>
+          <a:xfrm>
+            <a:off x="8074152" y="3291840"/>
+            <a:ext cx="2596896" cy="749808"/>
+          </a:xfrm>
+          <a:prstGeom prst="rect">
+            <a:avLst/>
+          </a:prstGeom>
+          <a:solidFill>
+            <a:srgbClr val="EAF6F8"/>
+          </a:solidFill>
+          <a:ln w="12700">
+            <a:solidFill>
+              <a:srgbClr val="8ABBD8"/>
+            </a:solidFill>
+            <a:prstDash val="solid"/>
+          </a:ln>
+        </p:spPr>
+      </p:sp>
+      <p:sp>
+        <p:nvSpPr>
+          <p:cNvPr id="15" name="Shape 13"/>
+          <p:cNvSpPr/>
+          <p:nvPr/>
+        </p:nvSpPr>
+        <p:spPr>
+          <a:xfrm>
+            <a:off x="8202168" y="3721608"/>
+            <a:ext cx="2340864" cy="0"/>
+          </a:xfrm>
+          <a:prstGeom prst="line">
+            <a:avLst/>
+          </a:prstGeom>
+          <a:noFill/>
+          <a:ln w="19050">
+            <a:solidFill>
+              <a:srgbClr val="0068B7"/>
+            </a:solidFill>
+            <a:prstDash val="solid"/>
+          </a:ln>
+        </p:spPr>
+      </p:sp>
+      <p:sp>
+        <p:nvSpPr>
+          <p:cNvPr id="16" name="Shape 14"/>
+          <p:cNvSpPr/>
+          <p:nvPr/>
+        </p:nvSpPr>
+        <p:spPr>
+          <a:xfrm>
+            <a:off x="9198864" y="4206240"/>
+            <a:ext cx="347472" cy="347472"/>
+          </a:xfrm>
+          <a:prstGeom prst="ellipse">
+            <a:avLst/>
+          </a:prstGeom>
+          <a:solidFill>
+            <a:srgbClr val="2F8A28"/>
+          </a:solidFill>
+          <a:ln w="12700">
+            <a:solidFill>
+              <a:srgbClr val="2F8A28"/>
+            </a:solidFill>
+            <a:prstDash val="solid"/>
+          </a:ln>
+        </p:spPr>
+      </p:sp>
+      <p:sp>
+        <p:nvSpPr>
+          <p:cNvPr id="17" name="Text 15"/>
+          <p:cNvSpPr/>
+          <p:nvPr/>
+        </p:nvSpPr>
+        <p:spPr>
+          <a:xfrm>
+            <a:off x="7909560" y="3977640"/>
+            <a:ext cx="2926080" cy="182880"/>
+          </a:xfrm>
+          <a:prstGeom prst="rect">
+            <a:avLst/>
+          </a:prstGeom>
+          <a:noFill/>
+          <a:ln/>
+        </p:spPr>
+        <p:txBody>
+          <a:bodyPr wrap="square" lIns="0" tIns="0" rIns="0" bIns="0" rtlCol="0" anchor="ctr"/>
+          <a:lstStyle/>
+          <a:p>
+            <a:pPr algn="ctr" indent="0" marL="0">
+              <a:buNone/>
+            </a:pPr>
+            <a:r>
+              <a:rPr lang="en-US" sz="1000" dirty="0">
+                <a:solidFill>
+                  <a:srgbClr val="003A63"/>
+                </a:solidFill>
+                <a:latin typeface="Aptos" pitchFamily="34" charset="0"/>
+                <a:ea typeface="Aptos" pitchFamily="34" charset="-122"/>
+                <a:cs typeface="Aptos" pitchFamily="34" charset="-120"/>
+              </a:rPr>
+              <a:t>Concept to action</a:t>
+            </a:r>
+            <a:endParaRPr lang="en-US" sz="1000" dirty="0"/>
+          </a:p>
+        </p:txBody>
+      </p:sp>
+      <p:sp>
+        <p:nvSpPr>
+          <p:cNvPr id="18" name="Shape 16"/>
+          <p:cNvSpPr/>
+          <p:nvPr/>
+        </p:nvSpPr>
+        <p:spPr>
+          <a:xfrm>
+            <a:off x="7635240" y="4498848"/>
+            <a:ext cx="3474720" cy="1143000"/>
+          </a:xfrm>
+          <a:prstGeom prst="roundRect">
+            <a:avLst>
+              <a:gd name="adj" fmla="val 9600"/>
             </a:avLst>
           </a:prstGeom>
           <a:solidFill>
@@ -7725,14 +8659,14 @@
       </p:sp>
       <p:sp>
         <p:nvSpPr>
-          <p:cNvPr id="16" name="Text 14"/>
-          <p:cNvSpPr/>
-          <p:nvPr/>
-        </p:nvSpPr>
-        <p:spPr>
-          <a:xfrm>
-            <a:off x="8074152" y="3666744"/>
-            <a:ext cx="2825496" cy="256032"/>
+          <p:cNvPr id="19" name="Text 17"/>
+          <p:cNvSpPr/>
+          <p:nvPr/>
+        </p:nvSpPr>
+        <p:spPr>
+          <a:xfrm>
+            <a:off x="7799832" y="4645152"/>
+            <a:ext cx="3145536" cy="256032"/>
           </a:xfrm>
           <a:prstGeom prst="rect">
             <a:avLst/>
@@ -7756,7 +8690,7 @@
                 <a:ea typeface="Aptos" pitchFamily="34" charset="-122"/>
                 <a:cs typeface="Aptos" pitchFamily="34" charset="-120"/>
               </a:rPr>
-              <a:t>Use this for</a:t>
+              <a:t>What to document</a:t>
             </a:r>
             <a:endParaRPr lang="en-US" sz="1300" dirty="0"/>
           </a:p>
@@ -7764,14 +8698,14 @@
       </p:sp>
       <p:sp>
         <p:nvSpPr>
-          <p:cNvPr id="17" name="Text 15"/>
-          <p:cNvSpPr/>
-          <p:nvPr/>
-        </p:nvSpPr>
-        <p:spPr>
-          <a:xfrm>
-            <a:off x="8074152" y="4023360"/>
-            <a:ext cx="2825496" cy="1097280"/>
+          <p:cNvPr id="20" name="Text 18"/>
+          <p:cNvSpPr/>
+          <p:nvPr/>
+        </p:nvSpPr>
+        <p:spPr>
+          <a:xfrm>
+            <a:off x="7799832" y="5001768"/>
+            <a:ext cx="3145536" cy="502920"/>
           </a:xfrm>
           <a:prstGeom prst="rect">
             <a:avLst/>
@@ -7797,7 +8731,7 @@
                 <a:ea typeface="Aptos" pitchFamily="34" charset="-122"/>
                 <a:cs typeface="Aptos" pitchFamily="34" charset="-120"/>
               </a:rPr>
-              <a:t>Connect the concept to public health decisions, safeguards, documentation, or implementation work.</a:t>
+              <a:t>Connect the concept to public health purpose, responsible use, required safeguards, documentation, and the next action a department should take.</a:t>
             </a:r>
             <a:endParaRPr lang="en-US" sz="1550" dirty="0"/>
           </a:p>
@@ -7971,8 +8905,8 @@
         </p:nvSpPr>
         <p:spPr>
           <a:xfrm>
-            <a:off x="9966960" y="6537960"/>
-            <a:ext cx="1645920" cy="201168"/>
+            <a:off x="9646920" y="6537960"/>
+            <a:ext cx="1965960" cy="201168"/>
           </a:xfrm>
           <a:prstGeom prst="rect">
             <a:avLst/>
@@ -7996,7 +8930,7 @@
                 <a:ea typeface="Aptos" pitchFamily="34" charset="-122"/>
                 <a:cs typeface="Aptos" pitchFamily="34" charset="-120"/>
               </a:rPr>
-              <a:t>Â© Paula Soper</a:t>
+              <a:t>Copyright Paula Soper</a:t>
             </a:r>
             <a:endParaRPr lang="en-US" sz="800" dirty="0"/>
           </a:p>
@@ -8043,77 +8977,13 @@
       </p:sp>
       <p:sp>
         <p:nvSpPr>
-          <p:cNvPr id="8" name="Shape 6"/>
+          <p:cNvPr id="8" name="Text 6"/>
           <p:cNvSpPr/>
           <p:nvPr/>
         </p:nvSpPr>
         <p:spPr>
           <a:xfrm>
             <a:off x="640080" y="658368"/>
-            <a:ext cx="420624" cy="420624"/>
-          </a:xfrm>
-          <a:prstGeom prst="ellipse">
-            <a:avLst/>
-          </a:prstGeom>
-          <a:solidFill>
-            <a:srgbClr val="0068B7"/>
-          </a:solidFill>
-          <a:ln w="12700">
-            <a:solidFill>
-              <a:srgbClr val="0068B7"/>
-            </a:solidFill>
-            <a:prstDash val="solid"/>
-          </a:ln>
-        </p:spPr>
-      </p:sp>
-      <p:sp>
-        <p:nvSpPr>
-          <p:cNvPr id="9" name="Text 7"/>
-          <p:cNvSpPr/>
-          <p:nvPr/>
-        </p:nvSpPr>
-        <p:spPr>
-          <a:xfrm>
-            <a:off x="640080" y="731520"/>
-            <a:ext cx="420624" cy="164592"/>
-          </a:xfrm>
-          <a:prstGeom prst="rect">
-            <a:avLst/>
-          </a:prstGeom>
-          <a:noFill/>
-          <a:ln/>
-        </p:spPr>
-        <p:txBody>
-          <a:bodyPr wrap="square" lIns="0" tIns="0" rIns="0" bIns="0" rtlCol="0" anchor="ctr"/>
-          <a:lstStyle/>
-          <a:p>
-            <a:pPr algn="ctr" indent="0" marL="0">
-              <a:buNone/>
-            </a:pPr>
-            <a:r>
-              <a:rPr lang="en-US" sz="1100" b="1" dirty="0">
-                <a:solidFill>
-                  <a:srgbClr val="FFFFFF"/>
-                </a:solidFill>
-                <a:latin typeface="Aptos" pitchFamily="34" charset="0"/>
-                <a:ea typeface="Aptos" pitchFamily="34" charset="-122"/>
-                <a:cs typeface="Aptos" pitchFamily="34" charset="-120"/>
-              </a:rPr>
-              <a:t>13</a:t>
-            </a:r>
-            <a:endParaRPr lang="en-US" sz="1100" dirty="0"/>
-          </a:p>
-        </p:txBody>
-      </p:sp>
-      <p:sp>
-        <p:nvSpPr>
-          <p:cNvPr id="10" name="Text 8"/>
-          <p:cNvSpPr/>
-          <p:nvPr/>
-        </p:nvSpPr>
-        <p:spPr>
-          <a:xfrm>
-            <a:off x="640080" y="621792"/>
             <a:ext cx="10881360" cy="713232"/>
           </a:xfrm>
           <a:prstGeom prst="rect">
@@ -8148,14 +9018,14 @@
       </p:sp>
       <p:sp>
         <p:nvSpPr>
-          <p:cNvPr id="11" name="Text 9"/>
+          <p:cNvPr id="9" name="Text 7"/>
           <p:cNvSpPr/>
           <p:nvPr/>
         </p:nvSpPr>
         <p:spPr>
           <a:xfrm>
             <a:off x="868680" y="1508760"/>
-            <a:ext cx="6537960" cy="4160520"/>
+            <a:ext cx="6309360" cy="4160520"/>
           </a:xfrm>
           <a:prstGeom prst="rect">
             <a:avLst/>
@@ -8186,18 +9056,18 @@
       </p:sp>
       <p:sp>
         <p:nvSpPr>
-          <p:cNvPr id="12" name="Shape 10"/>
-          <p:cNvSpPr/>
-          <p:nvPr/>
-        </p:nvSpPr>
-        <p:spPr>
-          <a:xfrm>
-            <a:off x="7909560" y="1417320"/>
-            <a:ext cx="3154680" cy="1828800"/>
+          <p:cNvPr id="10" name="Shape 8"/>
+          <p:cNvSpPr/>
+          <p:nvPr/>
+        </p:nvSpPr>
+        <p:spPr>
+          <a:xfrm>
+            <a:off x="7635240" y="1325880"/>
+            <a:ext cx="3474720" cy="1325880"/>
           </a:xfrm>
           <a:prstGeom prst="roundRect">
             <a:avLst>
-              <a:gd name="adj" fmla="val 6000"/>
+              <a:gd name="adj" fmla="val 8276"/>
             </a:avLst>
           </a:prstGeom>
           <a:solidFill>
@@ -8213,14 +9083,14 @@
       </p:sp>
       <p:sp>
         <p:nvSpPr>
-          <p:cNvPr id="13" name="Text 11"/>
-          <p:cNvSpPr/>
-          <p:nvPr/>
-        </p:nvSpPr>
-        <p:spPr>
-          <a:xfrm>
-            <a:off x="8074152" y="1563624"/>
-            <a:ext cx="2825496" cy="256032"/>
+          <p:cNvPr id="11" name="Text 9"/>
+          <p:cNvSpPr/>
+          <p:nvPr/>
+        </p:nvSpPr>
+        <p:spPr>
+          <a:xfrm>
+            <a:off x="7799832" y="1472184"/>
+            <a:ext cx="3145536" cy="256032"/>
           </a:xfrm>
           <a:prstGeom prst="rect">
             <a:avLst/>
@@ -8244,7 +9114,7 @@
                 <a:ea typeface="Aptos" pitchFamily="34" charset="-122"/>
                 <a:cs typeface="Aptos" pitchFamily="34" charset="-120"/>
               </a:rPr>
-              <a:t>Key idea</a:t>
+              <a:t>Governance lens</a:t>
             </a:r>
             <a:endParaRPr lang="en-US" sz="1300" dirty="0"/>
           </a:p>
@@ -8252,14 +9122,14 @@
       </p:sp>
       <p:sp>
         <p:nvSpPr>
-          <p:cNvPr id="14" name="Text 12"/>
-          <p:cNvSpPr/>
-          <p:nvPr/>
-        </p:nvSpPr>
-        <p:spPr>
-          <a:xfrm>
-            <a:off x="8074152" y="1920240"/>
-            <a:ext cx="2825496" cy="1188720"/>
+          <p:cNvPr id="12" name="Text 10"/>
+          <p:cNvSpPr/>
+          <p:nvPr/>
+        </p:nvSpPr>
+        <p:spPr>
+          <a:xfrm>
+            <a:off x="7799832" y="1828800"/>
+            <a:ext cx="3145536" cy="685800"/>
           </a:xfrm>
           <a:prstGeom prst="rect">
             <a:avLst/>
@@ -8293,18 +9163,159 @@
       </p:sp>
       <p:sp>
         <p:nvSpPr>
-          <p:cNvPr id="15" name="Shape 13"/>
-          <p:cNvSpPr/>
-          <p:nvPr/>
-        </p:nvSpPr>
-        <p:spPr>
-          <a:xfrm>
-            <a:off x="7909560" y="3520440"/>
-            <a:ext cx="3154680" cy="1737360"/>
+          <p:cNvPr id="13" name="Shape 11"/>
+          <p:cNvSpPr/>
+          <p:nvPr/>
+        </p:nvSpPr>
+        <p:spPr>
+          <a:xfrm>
+            <a:off x="7635240" y="2788920"/>
+            <a:ext cx="3474720" cy="1536192"/>
           </a:xfrm>
           <a:prstGeom prst="roundRect">
             <a:avLst>
-              <a:gd name="adj" fmla="val 6316"/>
+              <a:gd name="adj" fmla="val 7143"/>
+            </a:avLst>
+          </a:prstGeom>
+          <a:solidFill>
+            <a:srgbClr val="FFFFFF">
+              <a:alpha val="88000"/>
+            </a:srgbClr>
+          </a:solidFill>
+          <a:ln w="12700">
+            <a:solidFill>
+              <a:srgbClr val="D6E8F2"/>
+            </a:solidFill>
+            <a:prstDash val="solid"/>
+          </a:ln>
+        </p:spPr>
+      </p:sp>
+      <p:sp>
+        <p:nvSpPr>
+          <p:cNvPr id="14" name="Shape 12"/>
+          <p:cNvSpPr/>
+          <p:nvPr/>
+        </p:nvSpPr>
+        <p:spPr>
+          <a:xfrm>
+            <a:off x="8074152" y="3291840"/>
+            <a:ext cx="2596896" cy="749808"/>
+          </a:xfrm>
+          <a:prstGeom prst="rect">
+            <a:avLst/>
+          </a:prstGeom>
+          <a:solidFill>
+            <a:srgbClr val="EAF6F8"/>
+          </a:solidFill>
+          <a:ln w="12700">
+            <a:solidFill>
+              <a:srgbClr val="8ABBD8"/>
+            </a:solidFill>
+            <a:prstDash val="solid"/>
+          </a:ln>
+        </p:spPr>
+      </p:sp>
+      <p:sp>
+        <p:nvSpPr>
+          <p:cNvPr id="15" name="Shape 13"/>
+          <p:cNvSpPr/>
+          <p:nvPr/>
+        </p:nvSpPr>
+        <p:spPr>
+          <a:xfrm>
+            <a:off x="8202168" y="3721608"/>
+            <a:ext cx="2340864" cy="0"/>
+          </a:xfrm>
+          <a:prstGeom prst="line">
+            <a:avLst/>
+          </a:prstGeom>
+          <a:noFill/>
+          <a:ln w="19050">
+            <a:solidFill>
+              <a:srgbClr val="0068B7"/>
+            </a:solidFill>
+            <a:prstDash val="solid"/>
+          </a:ln>
+        </p:spPr>
+      </p:sp>
+      <p:sp>
+        <p:nvSpPr>
+          <p:cNvPr id="16" name="Shape 14"/>
+          <p:cNvSpPr/>
+          <p:nvPr/>
+        </p:nvSpPr>
+        <p:spPr>
+          <a:xfrm>
+            <a:off x="9198864" y="4206240"/>
+            <a:ext cx="347472" cy="347472"/>
+          </a:xfrm>
+          <a:prstGeom prst="ellipse">
+            <a:avLst/>
+          </a:prstGeom>
+          <a:solidFill>
+            <a:srgbClr val="2F8A28"/>
+          </a:solidFill>
+          <a:ln w="12700">
+            <a:solidFill>
+              <a:srgbClr val="2F8A28"/>
+            </a:solidFill>
+            <a:prstDash val="solid"/>
+          </a:ln>
+        </p:spPr>
+      </p:sp>
+      <p:sp>
+        <p:nvSpPr>
+          <p:cNvPr id="17" name="Text 15"/>
+          <p:cNvSpPr/>
+          <p:nvPr/>
+        </p:nvSpPr>
+        <p:spPr>
+          <a:xfrm>
+            <a:off x="7909560" y="3977640"/>
+            <a:ext cx="2926080" cy="182880"/>
+          </a:xfrm>
+          <a:prstGeom prst="rect">
+            <a:avLst/>
+          </a:prstGeom>
+          <a:noFill/>
+          <a:ln/>
+        </p:spPr>
+        <p:txBody>
+          <a:bodyPr wrap="square" lIns="0" tIns="0" rIns="0" bIns="0" rtlCol="0" anchor="ctr"/>
+          <a:lstStyle/>
+          <a:p>
+            <a:pPr algn="ctr" indent="0" marL="0">
+              <a:buNone/>
+            </a:pPr>
+            <a:r>
+              <a:rPr lang="en-US" sz="1000" dirty="0">
+                <a:solidFill>
+                  <a:srgbClr val="003A63"/>
+                </a:solidFill>
+                <a:latin typeface="Aptos" pitchFamily="34" charset="0"/>
+                <a:ea typeface="Aptos" pitchFamily="34" charset="-122"/>
+                <a:cs typeface="Aptos" pitchFamily="34" charset="-120"/>
+              </a:rPr>
+              <a:t>Concept to action</a:t>
+            </a:r>
+            <a:endParaRPr lang="en-US" sz="1000" dirty="0"/>
+          </a:p>
+        </p:txBody>
+      </p:sp>
+      <p:sp>
+        <p:nvSpPr>
+          <p:cNvPr id="18" name="Shape 16"/>
+          <p:cNvSpPr/>
+          <p:nvPr/>
+        </p:nvSpPr>
+        <p:spPr>
+          <a:xfrm>
+            <a:off x="7635240" y="4498848"/>
+            <a:ext cx="3474720" cy="1143000"/>
+          </a:xfrm>
+          <a:prstGeom prst="roundRect">
+            <a:avLst>
+              <a:gd name="adj" fmla="val 9600"/>
             </a:avLst>
           </a:prstGeom>
           <a:solidFill>
@@ -8320,14 +9331,14 @@
       </p:sp>
       <p:sp>
         <p:nvSpPr>
-          <p:cNvPr id="16" name="Text 14"/>
-          <p:cNvSpPr/>
-          <p:nvPr/>
-        </p:nvSpPr>
-        <p:spPr>
-          <a:xfrm>
-            <a:off x="8074152" y="3666744"/>
-            <a:ext cx="2825496" cy="256032"/>
+          <p:cNvPr id="19" name="Text 17"/>
+          <p:cNvSpPr/>
+          <p:nvPr/>
+        </p:nvSpPr>
+        <p:spPr>
+          <a:xfrm>
+            <a:off x="7799832" y="4645152"/>
+            <a:ext cx="3145536" cy="256032"/>
           </a:xfrm>
           <a:prstGeom prst="rect">
             <a:avLst/>
@@ -8351,7 +9362,7 @@
                 <a:ea typeface="Aptos" pitchFamily="34" charset="-122"/>
                 <a:cs typeface="Aptos" pitchFamily="34" charset="-120"/>
               </a:rPr>
-              <a:t>Use this for</a:t>
+              <a:t>What to document</a:t>
             </a:r>
             <a:endParaRPr lang="en-US" sz="1300" dirty="0"/>
           </a:p>
@@ -8359,14 +9370,14 @@
       </p:sp>
       <p:sp>
         <p:nvSpPr>
-          <p:cNvPr id="17" name="Text 15"/>
-          <p:cNvSpPr/>
-          <p:nvPr/>
-        </p:nvSpPr>
-        <p:spPr>
-          <a:xfrm>
-            <a:off x="8074152" y="4023360"/>
-            <a:ext cx="2825496" cy="1097280"/>
+          <p:cNvPr id="20" name="Text 18"/>
+          <p:cNvSpPr/>
+          <p:nvPr/>
+        </p:nvSpPr>
+        <p:spPr>
+          <a:xfrm>
+            <a:off x="7799832" y="5001768"/>
+            <a:ext cx="3145536" cy="502920"/>
           </a:xfrm>
           <a:prstGeom prst="rect">
             <a:avLst/>
@@ -8392,7 +9403,7 @@
                 <a:ea typeface="Aptos" pitchFamily="34" charset="-122"/>
                 <a:cs typeface="Aptos" pitchFamily="34" charset="-120"/>
               </a:rPr>
-              <a:t>Connect the concept to public health decisions, safeguards, documentation, or implementation work.</a:t>
+              <a:t>Use the assignment to test whether you can explain the concept, apply it to a realistic public health situation, and identify what would need review before the work moves forward.</a:t>
             </a:r>
             <a:endParaRPr lang="en-US" sz="1550" dirty="0"/>
           </a:p>
@@ -8566,8 +9577,8 @@
         </p:nvSpPr>
         <p:spPr>
           <a:xfrm>
-            <a:off x="9966960" y="6537960"/>
-            <a:ext cx="1645920" cy="201168"/>
+            <a:off x="9646920" y="6537960"/>
+            <a:ext cx="1965960" cy="201168"/>
           </a:xfrm>
           <a:prstGeom prst="rect">
             <a:avLst/>
@@ -8591,7 +9602,7 @@
                 <a:ea typeface="Aptos" pitchFamily="34" charset="-122"/>
                 <a:cs typeface="Aptos" pitchFamily="34" charset="-120"/>
               </a:rPr>
-              <a:t>Â© Paula Soper</a:t>
+              <a:t>Copyright Paula Soper</a:t>
             </a:r>
             <a:endParaRPr lang="en-US" sz="800" dirty="0"/>
           </a:p>
@@ -8638,77 +9649,13 @@
       </p:sp>
       <p:sp>
         <p:nvSpPr>
-          <p:cNvPr id="8" name="Shape 6"/>
+          <p:cNvPr id="8" name="Text 6"/>
           <p:cNvSpPr/>
           <p:nvPr/>
         </p:nvSpPr>
         <p:spPr>
           <a:xfrm>
             <a:off x="640080" y="658368"/>
-            <a:ext cx="420624" cy="420624"/>
-          </a:xfrm>
-          <a:prstGeom prst="ellipse">
-            <a:avLst/>
-          </a:prstGeom>
-          <a:solidFill>
-            <a:srgbClr val="0068B7"/>
-          </a:solidFill>
-          <a:ln w="12700">
-            <a:solidFill>
-              <a:srgbClr val="0068B7"/>
-            </a:solidFill>
-            <a:prstDash val="solid"/>
-          </a:ln>
-        </p:spPr>
-      </p:sp>
-      <p:sp>
-        <p:nvSpPr>
-          <p:cNvPr id="9" name="Text 7"/>
-          <p:cNvSpPr/>
-          <p:nvPr/>
-        </p:nvSpPr>
-        <p:spPr>
-          <a:xfrm>
-            <a:off x="640080" y="731520"/>
-            <a:ext cx="420624" cy="164592"/>
-          </a:xfrm>
-          <a:prstGeom prst="rect">
-            <a:avLst/>
-          </a:prstGeom>
-          <a:noFill/>
-          <a:ln/>
-        </p:spPr>
-        <p:txBody>
-          <a:bodyPr wrap="square" lIns="0" tIns="0" rIns="0" bIns="0" rtlCol="0" anchor="ctr"/>
-          <a:lstStyle/>
-          <a:p>
-            <a:pPr algn="ctr" indent="0" marL="0">
-              <a:buNone/>
-            </a:pPr>
-            <a:r>
-              <a:rPr lang="en-US" sz="1100" b="1" dirty="0">
-                <a:solidFill>
-                  <a:srgbClr val="FFFFFF"/>
-                </a:solidFill>
-                <a:latin typeface="Aptos" pitchFamily="34" charset="0"/>
-                <a:ea typeface="Aptos" pitchFamily="34" charset="-122"/>
-                <a:cs typeface="Aptos" pitchFamily="34" charset="-120"/>
-              </a:rPr>
-              <a:t>14</a:t>
-            </a:r>
-            <a:endParaRPr lang="en-US" sz="1100" dirty="0"/>
-          </a:p>
-        </p:txBody>
-      </p:sp>
-      <p:sp>
-        <p:nvSpPr>
-          <p:cNvPr id="10" name="Text 8"/>
-          <p:cNvSpPr/>
-          <p:nvPr/>
-        </p:nvSpPr>
-        <p:spPr>
-          <a:xfrm>
-            <a:off x="640080" y="621792"/>
             <a:ext cx="10881360" cy="713232"/>
           </a:xfrm>
           <a:prstGeom prst="rect">
@@ -8743,14 +9690,14 @@
       </p:sp>
       <p:sp>
         <p:nvSpPr>
-          <p:cNvPr id="11" name="Text 9"/>
+          <p:cNvPr id="9" name="Text 7"/>
           <p:cNvSpPr/>
           <p:nvPr/>
         </p:nvSpPr>
         <p:spPr>
           <a:xfrm>
             <a:off x="868680" y="1508760"/>
-            <a:ext cx="6537960" cy="4160520"/>
+            <a:ext cx="6309360" cy="4160520"/>
           </a:xfrm>
           <a:prstGeom prst="rect">
             <a:avLst/>
@@ -8809,18 +9756,18 @@
       </p:sp>
       <p:sp>
         <p:nvSpPr>
-          <p:cNvPr id="12" name="Shape 10"/>
-          <p:cNvSpPr/>
-          <p:nvPr/>
-        </p:nvSpPr>
-        <p:spPr>
-          <a:xfrm>
-            <a:off x="7909560" y="1417320"/>
-            <a:ext cx="3154680" cy="1828800"/>
+          <p:cNvPr id="10" name="Shape 8"/>
+          <p:cNvSpPr/>
+          <p:nvPr/>
+        </p:nvSpPr>
+        <p:spPr>
+          <a:xfrm>
+            <a:off x="7635240" y="1325880"/>
+            <a:ext cx="3474720" cy="1325880"/>
           </a:xfrm>
           <a:prstGeom prst="roundRect">
             <a:avLst>
-              <a:gd name="adj" fmla="val 6000"/>
+              <a:gd name="adj" fmla="val 8276"/>
             </a:avLst>
           </a:prstGeom>
           <a:solidFill>
@@ -8836,14 +9783,14 @@
       </p:sp>
       <p:sp>
         <p:nvSpPr>
-          <p:cNvPr id="13" name="Text 11"/>
-          <p:cNvSpPr/>
-          <p:nvPr/>
-        </p:nvSpPr>
-        <p:spPr>
-          <a:xfrm>
-            <a:off x="8074152" y="1563624"/>
-            <a:ext cx="2825496" cy="256032"/>
+          <p:cNvPr id="11" name="Text 9"/>
+          <p:cNvSpPr/>
+          <p:nvPr/>
+        </p:nvSpPr>
+        <p:spPr>
+          <a:xfrm>
+            <a:off x="7799832" y="1472184"/>
+            <a:ext cx="3145536" cy="256032"/>
           </a:xfrm>
           <a:prstGeom prst="rect">
             <a:avLst/>
@@ -8867,7 +9814,7 @@
                 <a:ea typeface="Aptos" pitchFamily="34" charset="-122"/>
                 <a:cs typeface="Aptos" pitchFamily="34" charset="-120"/>
               </a:rPr>
-              <a:t>Key idea</a:t>
+              <a:t>Governance lens</a:t>
             </a:r>
             <a:endParaRPr lang="en-US" sz="1300" dirty="0"/>
           </a:p>
@@ -8875,14 +9822,14 @@
       </p:sp>
       <p:sp>
         <p:nvSpPr>
-          <p:cNvPr id="14" name="Text 12"/>
-          <p:cNvSpPr/>
-          <p:nvPr/>
-        </p:nvSpPr>
-        <p:spPr>
-          <a:xfrm>
-            <a:off x="8074152" y="1920240"/>
-            <a:ext cx="2825496" cy="1188720"/>
+          <p:cNvPr id="12" name="Text 10"/>
+          <p:cNvSpPr/>
+          <p:nvPr/>
+        </p:nvSpPr>
+        <p:spPr>
+          <a:xfrm>
+            <a:off x="7799832" y="1828800"/>
+            <a:ext cx="3145536" cy="685800"/>
           </a:xfrm>
           <a:prstGeom prst="rect">
             <a:avLst/>
@@ -8916,18 +9863,159 @@
       </p:sp>
       <p:sp>
         <p:nvSpPr>
-          <p:cNvPr id="15" name="Shape 13"/>
-          <p:cNvSpPr/>
-          <p:nvPr/>
-        </p:nvSpPr>
-        <p:spPr>
-          <a:xfrm>
-            <a:off x="7909560" y="3520440"/>
-            <a:ext cx="3154680" cy="1737360"/>
+          <p:cNvPr id="13" name="Shape 11"/>
+          <p:cNvSpPr/>
+          <p:nvPr/>
+        </p:nvSpPr>
+        <p:spPr>
+          <a:xfrm>
+            <a:off x="7635240" y="2788920"/>
+            <a:ext cx="3474720" cy="1536192"/>
           </a:xfrm>
           <a:prstGeom prst="roundRect">
             <a:avLst>
-              <a:gd name="adj" fmla="val 6316"/>
+              <a:gd name="adj" fmla="val 7143"/>
+            </a:avLst>
+          </a:prstGeom>
+          <a:solidFill>
+            <a:srgbClr val="FFFFFF">
+              <a:alpha val="88000"/>
+            </a:srgbClr>
+          </a:solidFill>
+          <a:ln w="12700">
+            <a:solidFill>
+              <a:srgbClr val="D6E8F2"/>
+            </a:solidFill>
+            <a:prstDash val="solid"/>
+          </a:ln>
+        </p:spPr>
+      </p:sp>
+      <p:sp>
+        <p:nvSpPr>
+          <p:cNvPr id="14" name="Shape 12"/>
+          <p:cNvSpPr/>
+          <p:nvPr/>
+        </p:nvSpPr>
+        <p:spPr>
+          <a:xfrm>
+            <a:off x="8074152" y="3291840"/>
+            <a:ext cx="2596896" cy="749808"/>
+          </a:xfrm>
+          <a:prstGeom prst="rect">
+            <a:avLst/>
+          </a:prstGeom>
+          <a:solidFill>
+            <a:srgbClr val="EAF6F8"/>
+          </a:solidFill>
+          <a:ln w="12700">
+            <a:solidFill>
+              <a:srgbClr val="8ABBD8"/>
+            </a:solidFill>
+            <a:prstDash val="solid"/>
+          </a:ln>
+        </p:spPr>
+      </p:sp>
+      <p:sp>
+        <p:nvSpPr>
+          <p:cNvPr id="15" name="Shape 13"/>
+          <p:cNvSpPr/>
+          <p:nvPr/>
+        </p:nvSpPr>
+        <p:spPr>
+          <a:xfrm>
+            <a:off x="8202168" y="3721608"/>
+            <a:ext cx="2340864" cy="0"/>
+          </a:xfrm>
+          <a:prstGeom prst="line">
+            <a:avLst/>
+          </a:prstGeom>
+          <a:noFill/>
+          <a:ln w="19050">
+            <a:solidFill>
+              <a:srgbClr val="0068B7"/>
+            </a:solidFill>
+            <a:prstDash val="solid"/>
+          </a:ln>
+        </p:spPr>
+      </p:sp>
+      <p:sp>
+        <p:nvSpPr>
+          <p:cNvPr id="16" name="Shape 14"/>
+          <p:cNvSpPr/>
+          <p:nvPr/>
+        </p:nvSpPr>
+        <p:spPr>
+          <a:xfrm>
+            <a:off x="9198864" y="4206240"/>
+            <a:ext cx="347472" cy="347472"/>
+          </a:xfrm>
+          <a:prstGeom prst="ellipse">
+            <a:avLst/>
+          </a:prstGeom>
+          <a:solidFill>
+            <a:srgbClr val="2F8A28"/>
+          </a:solidFill>
+          <a:ln w="12700">
+            <a:solidFill>
+              <a:srgbClr val="2F8A28"/>
+            </a:solidFill>
+            <a:prstDash val="solid"/>
+          </a:ln>
+        </p:spPr>
+      </p:sp>
+      <p:sp>
+        <p:nvSpPr>
+          <p:cNvPr id="17" name="Text 15"/>
+          <p:cNvSpPr/>
+          <p:nvPr/>
+        </p:nvSpPr>
+        <p:spPr>
+          <a:xfrm>
+            <a:off x="7909560" y="3977640"/>
+            <a:ext cx="2926080" cy="182880"/>
+          </a:xfrm>
+          <a:prstGeom prst="rect">
+            <a:avLst/>
+          </a:prstGeom>
+          <a:noFill/>
+          <a:ln/>
+        </p:spPr>
+        <p:txBody>
+          <a:bodyPr wrap="square" lIns="0" tIns="0" rIns="0" bIns="0" rtlCol="0" anchor="ctr"/>
+          <a:lstStyle/>
+          <a:p>
+            <a:pPr algn="ctr" indent="0" marL="0">
+              <a:buNone/>
+            </a:pPr>
+            <a:r>
+              <a:rPr lang="en-US" sz="1000" dirty="0">
+                <a:solidFill>
+                  <a:srgbClr val="003A63"/>
+                </a:solidFill>
+                <a:latin typeface="Aptos" pitchFamily="34" charset="0"/>
+                <a:ea typeface="Aptos" pitchFamily="34" charset="-122"/>
+                <a:cs typeface="Aptos" pitchFamily="34" charset="-120"/>
+              </a:rPr>
+              <a:t>Concept to action</a:t>
+            </a:r>
+            <a:endParaRPr lang="en-US" sz="1000" dirty="0"/>
+          </a:p>
+        </p:txBody>
+      </p:sp>
+      <p:sp>
+        <p:nvSpPr>
+          <p:cNvPr id="18" name="Shape 16"/>
+          <p:cNvSpPr/>
+          <p:nvPr/>
+        </p:nvSpPr>
+        <p:spPr>
+          <a:xfrm>
+            <a:off x="7635240" y="4498848"/>
+            <a:ext cx="3474720" cy="1143000"/>
+          </a:xfrm>
+          <a:prstGeom prst="roundRect">
+            <a:avLst>
+              <a:gd name="adj" fmla="val 9600"/>
             </a:avLst>
           </a:prstGeom>
           <a:solidFill>
@@ -8943,14 +10031,14 @@
       </p:sp>
       <p:sp>
         <p:nvSpPr>
-          <p:cNvPr id="16" name="Text 14"/>
-          <p:cNvSpPr/>
-          <p:nvPr/>
-        </p:nvSpPr>
-        <p:spPr>
-          <a:xfrm>
-            <a:off x="8074152" y="3666744"/>
-            <a:ext cx="2825496" cy="256032"/>
+          <p:cNvPr id="19" name="Text 17"/>
+          <p:cNvSpPr/>
+          <p:nvPr/>
+        </p:nvSpPr>
+        <p:spPr>
+          <a:xfrm>
+            <a:off x="7799832" y="4645152"/>
+            <a:ext cx="3145536" cy="256032"/>
           </a:xfrm>
           <a:prstGeom prst="rect">
             <a:avLst/>
@@ -8974,7 +10062,7 @@
                 <a:ea typeface="Aptos" pitchFamily="34" charset="-122"/>
                 <a:cs typeface="Aptos" pitchFamily="34" charset="-120"/>
               </a:rPr>
-              <a:t>Use this for</a:t>
+              <a:t>What to document</a:t>
             </a:r>
             <a:endParaRPr lang="en-US" sz="1300" dirty="0"/>
           </a:p>
@@ -8982,14 +10070,14 @@
       </p:sp>
       <p:sp>
         <p:nvSpPr>
-          <p:cNvPr id="17" name="Text 15"/>
-          <p:cNvSpPr/>
-          <p:nvPr/>
-        </p:nvSpPr>
-        <p:spPr>
-          <a:xfrm>
-            <a:off x="8074152" y="4023360"/>
-            <a:ext cx="2825496" cy="1097280"/>
+          <p:cNvPr id="20" name="Text 18"/>
+          <p:cNvSpPr/>
+          <p:nvPr/>
+        </p:nvSpPr>
+        <p:spPr>
+          <a:xfrm>
+            <a:off x="7799832" y="5001768"/>
+            <a:ext cx="3145536" cy="502920"/>
           </a:xfrm>
           <a:prstGeom prst="rect">
             <a:avLst/>
@@ -9015,7 +10103,7 @@
                 <a:ea typeface="Aptos" pitchFamily="34" charset="-122"/>
                 <a:cs typeface="Aptos" pitchFamily="34" charset="-120"/>
               </a:rPr>
-              <a:t>Connect the concept to public health decisions, safeguards, documentation, or implementation work.</a:t>
+              <a:t>Use the assignment to test whether you can explain the concept, apply it to a realistic public health situation, and identify what would need review before the work moves forward.</a:t>
             </a:r>
             <a:endParaRPr lang="en-US" sz="1550" dirty="0"/>
           </a:p>
@@ -9189,8 +10277,8 @@
         </p:nvSpPr>
         <p:spPr>
           <a:xfrm>
-            <a:off x="9966960" y="6537960"/>
-            <a:ext cx="1645920" cy="201168"/>
+            <a:off x="9646920" y="6537960"/>
+            <a:ext cx="1965960" cy="201168"/>
           </a:xfrm>
           <a:prstGeom prst="rect">
             <a:avLst/>
@@ -9214,7 +10302,7 @@
                 <a:ea typeface="Aptos" pitchFamily="34" charset="-122"/>
                 <a:cs typeface="Aptos" pitchFamily="34" charset="-120"/>
               </a:rPr>
-              <a:t>Â© Paula Soper</a:t>
+              <a:t>Copyright Paula Soper</a:t>
             </a:r>
             <a:endParaRPr lang="en-US" sz="800" dirty="0"/>
           </a:p>
@@ -9577,46 +10665,7 @@
       </p:sp>
       <p:sp>
         <p:nvSpPr>
-          <p:cNvPr id="15" name="Text 13"/>
-          <p:cNvSpPr/>
-          <p:nvPr/>
-        </p:nvSpPr>
-        <p:spPr>
-          <a:xfrm>
-            <a:off x="8695944" y="3941064"/>
-            <a:ext cx="201168" cy="256032"/>
-          </a:xfrm>
-          <a:prstGeom prst="rect">
-            <a:avLst/>
-          </a:prstGeom>
-          <a:noFill/>
-          <a:ln/>
-        </p:spPr>
-        <p:txBody>
-          <a:bodyPr wrap="square" lIns="0" tIns="0" rIns="0" bIns="0" rtlCol="0" anchor="ctr"/>
-          <a:lstStyle/>
-          <a:p>
-            <a:pPr algn="ctr" indent="0" marL="0">
-              <a:buNone/>
-            </a:pPr>
-            <a:r>
-              <a:rPr lang="en-US" sz="1800" b="1" dirty="0">
-                <a:solidFill>
-                  <a:srgbClr val="0068B7"/>
-                </a:solidFill>
-                <a:latin typeface="Aptos" pitchFamily="34" charset="0"/>
-                <a:ea typeface="Aptos" pitchFamily="34" charset="-122"/>
-                <a:cs typeface="Aptos" pitchFamily="34" charset="-120"/>
-              </a:rPr>
-              <a:t>â†’</a:t>
-            </a:r>
-            <a:endParaRPr lang="en-US" sz="1800" dirty="0"/>
-          </a:p>
-        </p:txBody>
-      </p:sp>
-      <p:sp>
-        <p:nvSpPr>
-          <p:cNvPr id="16" name="Shape 14"/>
+          <p:cNvPr id="15" name="Shape 13"/>
           <p:cNvSpPr/>
           <p:nvPr/>
         </p:nvSpPr>
@@ -9643,7 +10692,7 @@
       </p:sp>
       <p:sp>
         <p:nvSpPr>
-          <p:cNvPr id="17" name="Text 15"/>
+          <p:cNvPr id="16" name="Text 14"/>
           <p:cNvSpPr/>
           <p:nvPr/>
         </p:nvSpPr>
@@ -9684,46 +10733,7 @@
       </p:sp>
       <p:sp>
         <p:nvSpPr>
-          <p:cNvPr id="18" name="Text 16"/>
-          <p:cNvSpPr/>
-          <p:nvPr/>
-        </p:nvSpPr>
-        <p:spPr>
-          <a:xfrm>
-            <a:off x="9985248" y="3941064"/>
-            <a:ext cx="201168" cy="256032"/>
-          </a:xfrm>
-          <a:prstGeom prst="rect">
-            <a:avLst/>
-          </a:prstGeom>
-          <a:noFill/>
-          <a:ln/>
-        </p:spPr>
-        <p:txBody>
-          <a:bodyPr wrap="square" lIns="0" tIns="0" rIns="0" bIns="0" rtlCol="0" anchor="ctr"/>
-          <a:lstStyle/>
-          <a:p>
-            <a:pPr algn="ctr" indent="0" marL="0">
-              <a:buNone/>
-            </a:pPr>
-            <a:r>
-              <a:rPr lang="en-US" sz="1800" b="1" dirty="0">
-                <a:solidFill>
-                  <a:srgbClr val="0068B7"/>
-                </a:solidFill>
-                <a:latin typeface="Aptos" pitchFamily="34" charset="0"/>
-                <a:ea typeface="Aptos" pitchFamily="34" charset="-122"/>
-                <a:cs typeface="Aptos" pitchFamily="34" charset="-120"/>
-              </a:rPr>
-              <a:t>â†’</a:t>
-            </a:r>
-            <a:endParaRPr lang="en-US" sz="1800" dirty="0"/>
-          </a:p>
-        </p:txBody>
-      </p:sp>
-      <p:sp>
-        <p:nvSpPr>
-          <p:cNvPr id="19" name="Shape 17"/>
+          <p:cNvPr id="17" name="Shape 15"/>
           <p:cNvSpPr/>
           <p:nvPr/>
         </p:nvSpPr>
@@ -9750,7 +10760,7 @@
       </p:sp>
       <p:sp>
         <p:nvSpPr>
-          <p:cNvPr id="20" name="Text 18"/>
+          <p:cNvPr id="18" name="Text 16"/>
           <p:cNvSpPr/>
           <p:nvPr/>
         </p:nvSpPr>
@@ -9957,8 +10967,8 @@
         </p:nvSpPr>
         <p:spPr>
           <a:xfrm>
-            <a:off x="9966960" y="6537960"/>
-            <a:ext cx="1645920" cy="201168"/>
+            <a:off x="9646920" y="6537960"/>
+            <a:ext cx="1965960" cy="201168"/>
           </a:xfrm>
           <a:prstGeom prst="rect">
             <a:avLst/>
@@ -9982,7 +10992,7 @@
                 <a:ea typeface="Aptos" pitchFamily="34" charset="-122"/>
                 <a:cs typeface="Aptos" pitchFamily="34" charset="-120"/>
               </a:rPr>
-              <a:t>Â© Paula Soper</a:t>
+              <a:t>Copyright Paula Soper</a:t>
             </a:r>
             <a:endParaRPr lang="en-US" sz="800" dirty="0"/>
           </a:p>
@@ -10029,77 +11039,13 @@
       </p:sp>
       <p:sp>
         <p:nvSpPr>
-          <p:cNvPr id="8" name="Shape 6"/>
+          <p:cNvPr id="8" name="Text 6"/>
           <p:cNvSpPr/>
           <p:nvPr/>
         </p:nvSpPr>
         <p:spPr>
           <a:xfrm>
             <a:off x="640080" y="658368"/>
-            <a:ext cx="420624" cy="420624"/>
-          </a:xfrm>
-          <a:prstGeom prst="ellipse">
-            <a:avLst/>
-          </a:prstGeom>
-          <a:solidFill>
-            <a:srgbClr val="0068B7"/>
-          </a:solidFill>
-          <a:ln w="12700">
-            <a:solidFill>
-              <a:srgbClr val="0068B7"/>
-            </a:solidFill>
-            <a:prstDash val="solid"/>
-          </a:ln>
-        </p:spPr>
-      </p:sp>
-      <p:sp>
-        <p:nvSpPr>
-          <p:cNvPr id="9" name="Text 7"/>
-          <p:cNvSpPr/>
-          <p:nvPr/>
-        </p:nvSpPr>
-        <p:spPr>
-          <a:xfrm>
-            <a:off x="640080" y="731520"/>
-            <a:ext cx="420624" cy="164592"/>
-          </a:xfrm>
-          <a:prstGeom prst="rect">
-            <a:avLst/>
-          </a:prstGeom>
-          <a:noFill/>
-          <a:ln/>
-        </p:spPr>
-        <p:txBody>
-          <a:bodyPr wrap="square" lIns="0" tIns="0" rIns="0" bIns="0" rtlCol="0" anchor="ctr"/>
-          <a:lstStyle/>
-          <a:p>
-            <a:pPr algn="ctr" indent="0" marL="0">
-              <a:buNone/>
-            </a:pPr>
-            <a:r>
-              <a:rPr lang="en-US" sz="1100" b="1" dirty="0">
-                <a:solidFill>
-                  <a:srgbClr val="FFFFFF"/>
-                </a:solidFill>
-                <a:latin typeface="Aptos" pitchFamily="34" charset="0"/>
-                <a:ea typeface="Aptos" pitchFamily="34" charset="-122"/>
-                <a:cs typeface="Aptos" pitchFamily="34" charset="-120"/>
-              </a:rPr>
-              <a:t>15</a:t>
-            </a:r>
-            <a:endParaRPr lang="en-US" sz="1100" dirty="0"/>
-          </a:p>
-        </p:txBody>
-      </p:sp>
-      <p:sp>
-        <p:nvSpPr>
-          <p:cNvPr id="10" name="Text 8"/>
-          <p:cNvSpPr/>
-          <p:nvPr/>
-        </p:nvSpPr>
-        <p:spPr>
-          <a:xfrm>
-            <a:off x="640080" y="621792"/>
             <a:ext cx="10881360" cy="713232"/>
           </a:xfrm>
           <a:prstGeom prst="rect">
@@ -10134,14 +11080,14 @@
       </p:sp>
       <p:sp>
         <p:nvSpPr>
-          <p:cNvPr id="11" name="Text 9"/>
+          <p:cNvPr id="9" name="Text 7"/>
           <p:cNvSpPr/>
           <p:nvPr/>
         </p:nvSpPr>
         <p:spPr>
           <a:xfrm>
             <a:off x="868680" y="1508760"/>
-            <a:ext cx="6537960" cy="4160520"/>
+            <a:ext cx="6309360" cy="4160520"/>
           </a:xfrm>
           <a:prstGeom prst="rect">
             <a:avLst/>
@@ -10200,18 +11146,18 @@
       </p:sp>
       <p:sp>
         <p:nvSpPr>
-          <p:cNvPr id="12" name="Shape 10"/>
-          <p:cNvSpPr/>
-          <p:nvPr/>
-        </p:nvSpPr>
-        <p:spPr>
-          <a:xfrm>
-            <a:off x="7909560" y="1417320"/>
-            <a:ext cx="3154680" cy="1828800"/>
+          <p:cNvPr id="10" name="Shape 8"/>
+          <p:cNvSpPr/>
+          <p:nvPr/>
+        </p:nvSpPr>
+        <p:spPr>
+          <a:xfrm>
+            <a:off x="7635240" y="1325880"/>
+            <a:ext cx="3474720" cy="1325880"/>
           </a:xfrm>
           <a:prstGeom prst="roundRect">
             <a:avLst>
-              <a:gd name="adj" fmla="val 6000"/>
+              <a:gd name="adj" fmla="val 8276"/>
             </a:avLst>
           </a:prstGeom>
           <a:solidFill>
@@ -10227,14 +11173,14 @@
       </p:sp>
       <p:sp>
         <p:nvSpPr>
-          <p:cNvPr id="13" name="Text 11"/>
-          <p:cNvSpPr/>
-          <p:nvPr/>
-        </p:nvSpPr>
-        <p:spPr>
-          <a:xfrm>
-            <a:off x="8074152" y="1563624"/>
-            <a:ext cx="2825496" cy="256032"/>
+          <p:cNvPr id="11" name="Text 9"/>
+          <p:cNvSpPr/>
+          <p:nvPr/>
+        </p:nvSpPr>
+        <p:spPr>
+          <a:xfrm>
+            <a:off x="7799832" y="1472184"/>
+            <a:ext cx="3145536" cy="256032"/>
           </a:xfrm>
           <a:prstGeom prst="rect">
             <a:avLst/>
@@ -10258,7 +11204,7 @@
                 <a:ea typeface="Aptos" pitchFamily="34" charset="-122"/>
                 <a:cs typeface="Aptos" pitchFamily="34" charset="-120"/>
               </a:rPr>
-              <a:t>Key idea</a:t>
+              <a:t>Governance lens</a:t>
             </a:r>
             <a:endParaRPr lang="en-US" sz="1300" dirty="0"/>
           </a:p>
@@ -10266,14 +11212,14 @@
       </p:sp>
       <p:sp>
         <p:nvSpPr>
-          <p:cNvPr id="14" name="Text 12"/>
-          <p:cNvSpPr/>
-          <p:nvPr/>
-        </p:nvSpPr>
-        <p:spPr>
-          <a:xfrm>
-            <a:off x="8074152" y="1920240"/>
-            <a:ext cx="2825496" cy="1188720"/>
+          <p:cNvPr id="12" name="Text 10"/>
+          <p:cNvSpPr/>
+          <p:nvPr/>
+        </p:nvSpPr>
+        <p:spPr>
+          <a:xfrm>
+            <a:off x="7799832" y="1828800"/>
+            <a:ext cx="3145536" cy="685800"/>
           </a:xfrm>
           <a:prstGeom prst="rect">
             <a:avLst/>
@@ -10307,18 +11253,159 @@
       </p:sp>
       <p:sp>
         <p:nvSpPr>
-          <p:cNvPr id="15" name="Shape 13"/>
-          <p:cNvSpPr/>
-          <p:nvPr/>
-        </p:nvSpPr>
-        <p:spPr>
-          <a:xfrm>
-            <a:off x="7909560" y="3520440"/>
-            <a:ext cx="3154680" cy="1737360"/>
+          <p:cNvPr id="13" name="Shape 11"/>
+          <p:cNvSpPr/>
+          <p:nvPr/>
+        </p:nvSpPr>
+        <p:spPr>
+          <a:xfrm>
+            <a:off x="7635240" y="2788920"/>
+            <a:ext cx="3474720" cy="1536192"/>
           </a:xfrm>
           <a:prstGeom prst="roundRect">
             <a:avLst>
-              <a:gd name="adj" fmla="val 6316"/>
+              <a:gd name="adj" fmla="val 7143"/>
+            </a:avLst>
+          </a:prstGeom>
+          <a:solidFill>
+            <a:srgbClr val="FFFFFF">
+              <a:alpha val="88000"/>
+            </a:srgbClr>
+          </a:solidFill>
+          <a:ln w="12700">
+            <a:solidFill>
+              <a:srgbClr val="D6E8F2"/>
+            </a:solidFill>
+            <a:prstDash val="solid"/>
+          </a:ln>
+        </p:spPr>
+      </p:sp>
+      <p:sp>
+        <p:nvSpPr>
+          <p:cNvPr id="14" name="Shape 12"/>
+          <p:cNvSpPr/>
+          <p:nvPr/>
+        </p:nvSpPr>
+        <p:spPr>
+          <a:xfrm>
+            <a:off x="8074152" y="3291840"/>
+            <a:ext cx="2596896" cy="749808"/>
+          </a:xfrm>
+          <a:prstGeom prst="rect">
+            <a:avLst/>
+          </a:prstGeom>
+          <a:solidFill>
+            <a:srgbClr val="EAF6F8"/>
+          </a:solidFill>
+          <a:ln w="12700">
+            <a:solidFill>
+              <a:srgbClr val="8ABBD8"/>
+            </a:solidFill>
+            <a:prstDash val="solid"/>
+          </a:ln>
+        </p:spPr>
+      </p:sp>
+      <p:sp>
+        <p:nvSpPr>
+          <p:cNvPr id="15" name="Shape 13"/>
+          <p:cNvSpPr/>
+          <p:nvPr/>
+        </p:nvSpPr>
+        <p:spPr>
+          <a:xfrm>
+            <a:off x="8202168" y="3721608"/>
+            <a:ext cx="2340864" cy="0"/>
+          </a:xfrm>
+          <a:prstGeom prst="line">
+            <a:avLst/>
+          </a:prstGeom>
+          <a:noFill/>
+          <a:ln w="19050">
+            <a:solidFill>
+              <a:srgbClr val="0068B7"/>
+            </a:solidFill>
+            <a:prstDash val="solid"/>
+          </a:ln>
+        </p:spPr>
+      </p:sp>
+      <p:sp>
+        <p:nvSpPr>
+          <p:cNvPr id="16" name="Shape 14"/>
+          <p:cNvSpPr/>
+          <p:nvPr/>
+        </p:nvSpPr>
+        <p:spPr>
+          <a:xfrm>
+            <a:off x="9198864" y="4206240"/>
+            <a:ext cx="347472" cy="347472"/>
+          </a:xfrm>
+          <a:prstGeom prst="ellipse">
+            <a:avLst/>
+          </a:prstGeom>
+          <a:solidFill>
+            <a:srgbClr val="2F8A28"/>
+          </a:solidFill>
+          <a:ln w="12700">
+            <a:solidFill>
+              <a:srgbClr val="2F8A28"/>
+            </a:solidFill>
+            <a:prstDash val="solid"/>
+          </a:ln>
+        </p:spPr>
+      </p:sp>
+      <p:sp>
+        <p:nvSpPr>
+          <p:cNvPr id="17" name="Text 15"/>
+          <p:cNvSpPr/>
+          <p:nvPr/>
+        </p:nvSpPr>
+        <p:spPr>
+          <a:xfrm>
+            <a:off x="7909560" y="3977640"/>
+            <a:ext cx="2926080" cy="182880"/>
+          </a:xfrm>
+          <a:prstGeom prst="rect">
+            <a:avLst/>
+          </a:prstGeom>
+          <a:noFill/>
+          <a:ln/>
+        </p:spPr>
+        <p:txBody>
+          <a:bodyPr wrap="square" lIns="0" tIns="0" rIns="0" bIns="0" rtlCol="0" anchor="ctr"/>
+          <a:lstStyle/>
+          <a:p>
+            <a:pPr algn="ctr" indent="0" marL="0">
+              <a:buNone/>
+            </a:pPr>
+            <a:r>
+              <a:rPr lang="en-US" sz="1000" dirty="0">
+                <a:solidFill>
+                  <a:srgbClr val="003A63"/>
+                </a:solidFill>
+                <a:latin typeface="Aptos" pitchFamily="34" charset="0"/>
+                <a:ea typeface="Aptos" pitchFamily="34" charset="-122"/>
+                <a:cs typeface="Aptos" pitchFamily="34" charset="-120"/>
+              </a:rPr>
+              <a:t>Concept to action</a:t>
+            </a:r>
+            <a:endParaRPr lang="en-US" sz="1000" dirty="0"/>
+          </a:p>
+        </p:txBody>
+      </p:sp>
+      <p:sp>
+        <p:nvSpPr>
+          <p:cNvPr id="18" name="Shape 16"/>
+          <p:cNvSpPr/>
+          <p:nvPr/>
+        </p:nvSpPr>
+        <p:spPr>
+          <a:xfrm>
+            <a:off x="7635240" y="4498848"/>
+            <a:ext cx="3474720" cy="1143000"/>
+          </a:xfrm>
+          <a:prstGeom prst="roundRect">
+            <a:avLst>
+              <a:gd name="adj" fmla="val 9600"/>
             </a:avLst>
           </a:prstGeom>
           <a:solidFill>
@@ -10334,14 +11421,14 @@
       </p:sp>
       <p:sp>
         <p:nvSpPr>
-          <p:cNvPr id="16" name="Text 14"/>
-          <p:cNvSpPr/>
-          <p:nvPr/>
-        </p:nvSpPr>
-        <p:spPr>
-          <a:xfrm>
-            <a:off x="8074152" y="3666744"/>
-            <a:ext cx="2825496" cy="256032"/>
+          <p:cNvPr id="19" name="Text 17"/>
+          <p:cNvSpPr/>
+          <p:nvPr/>
+        </p:nvSpPr>
+        <p:spPr>
+          <a:xfrm>
+            <a:off x="7799832" y="4645152"/>
+            <a:ext cx="3145536" cy="256032"/>
           </a:xfrm>
           <a:prstGeom prst="rect">
             <a:avLst/>
@@ -10365,7 +11452,7 @@
                 <a:ea typeface="Aptos" pitchFamily="34" charset="-122"/>
                 <a:cs typeface="Aptos" pitchFamily="34" charset="-120"/>
               </a:rPr>
-              <a:t>Use this for</a:t>
+              <a:t>What to document</a:t>
             </a:r>
             <a:endParaRPr lang="en-US" sz="1300" dirty="0"/>
           </a:p>
@@ -10373,14 +11460,14 @@
       </p:sp>
       <p:sp>
         <p:nvSpPr>
-          <p:cNvPr id="17" name="Text 15"/>
-          <p:cNvSpPr/>
-          <p:nvPr/>
-        </p:nvSpPr>
-        <p:spPr>
-          <a:xfrm>
-            <a:off x="8074152" y="4023360"/>
-            <a:ext cx="2825496" cy="1097280"/>
+          <p:cNvPr id="20" name="Text 18"/>
+          <p:cNvSpPr/>
+          <p:nvPr/>
+        </p:nvSpPr>
+        <p:spPr>
+          <a:xfrm>
+            <a:off x="7799832" y="5001768"/>
+            <a:ext cx="3145536" cy="502920"/>
           </a:xfrm>
           <a:prstGeom prst="rect">
             <a:avLst/>
@@ -10406,7 +11493,7 @@
                 <a:ea typeface="Aptos" pitchFamily="34" charset="-122"/>
                 <a:cs typeface="Aptos" pitchFamily="34" charset="-120"/>
               </a:rPr>
-              <a:t>Connect the concept to public health decisions, safeguards, documentation, or implementation work.</a:t>
+              <a:t>Connect the concept to public health purpose, responsible use, required safeguards, documentation, and the next action a department should take.</a:t>
             </a:r>
             <a:endParaRPr lang="en-US" sz="1550" dirty="0"/>
           </a:p>
@@ -10580,8 +11667,8 @@
         </p:nvSpPr>
         <p:spPr>
           <a:xfrm>
-            <a:off x="9966960" y="6537960"/>
-            <a:ext cx="1645920" cy="201168"/>
+            <a:off x="9646920" y="6537960"/>
+            <a:ext cx="1965960" cy="201168"/>
           </a:xfrm>
           <a:prstGeom prst="rect">
             <a:avLst/>
@@ -10605,7 +11692,7 @@
                 <a:ea typeface="Aptos" pitchFamily="34" charset="-122"/>
                 <a:cs typeface="Aptos" pitchFamily="34" charset="-120"/>
               </a:rPr>
-              <a:t>Â© Paula Soper</a:t>
+              <a:t>Copyright Paula Soper</a:t>
             </a:r>
             <a:endParaRPr lang="en-US" sz="800" dirty="0"/>
           </a:p>
@@ -10700,7 +11787,7 @@
         <p:spPr>
           <a:xfrm>
             <a:off x="868680" y="1508760"/>
-            <a:ext cx="6537960" cy="4160520"/>
+            <a:ext cx="6309360" cy="4160520"/>
           </a:xfrm>
           <a:prstGeom prst="rect">
             <a:avLst/>
@@ -10751,12 +11838,12 @@
         </p:nvSpPr>
         <p:spPr>
           <a:xfrm>
-            <a:off x="7909560" y="1417320"/>
-            <a:ext cx="3154680" cy="1828800"/>
+            <a:off x="7635240" y="1325880"/>
+            <a:ext cx="3474720" cy="1325880"/>
           </a:xfrm>
           <a:prstGeom prst="roundRect">
             <a:avLst>
-              <a:gd name="adj" fmla="val 6000"/>
+              <a:gd name="adj" fmla="val 8276"/>
             </a:avLst>
           </a:prstGeom>
           <a:solidFill>
@@ -10778,8 +11865,8 @@
         </p:nvSpPr>
         <p:spPr>
           <a:xfrm>
-            <a:off x="8074152" y="1563624"/>
-            <a:ext cx="2825496" cy="256032"/>
+            <a:off x="7799832" y="1472184"/>
+            <a:ext cx="3145536" cy="256032"/>
           </a:xfrm>
           <a:prstGeom prst="rect">
             <a:avLst/>
@@ -10803,7 +11890,7 @@
                 <a:ea typeface="Aptos" pitchFamily="34" charset="-122"/>
                 <a:cs typeface="Aptos" pitchFamily="34" charset="-120"/>
               </a:rPr>
-              <a:t>Key idea</a:t>
+              <a:t>Governance lens</a:t>
             </a:r>
             <a:endParaRPr lang="en-US" sz="1300" dirty="0"/>
           </a:p>
@@ -10817,8 +11904,8 @@
         </p:nvSpPr>
         <p:spPr>
           <a:xfrm>
-            <a:off x="8074152" y="1920240"/>
-            <a:ext cx="2825496" cy="1188720"/>
+            <a:off x="7799832" y="1828800"/>
+            <a:ext cx="3145536" cy="685800"/>
           </a:xfrm>
           <a:prstGeom prst="rect">
             <a:avLst/>
@@ -10858,12 +11945,153 @@
         </p:nvSpPr>
         <p:spPr>
           <a:xfrm>
-            <a:off x="7909560" y="3520440"/>
-            <a:ext cx="3154680" cy="1737360"/>
+            <a:off x="7635240" y="2788920"/>
+            <a:ext cx="3474720" cy="1536192"/>
           </a:xfrm>
           <a:prstGeom prst="roundRect">
             <a:avLst>
-              <a:gd name="adj" fmla="val 6316"/>
+              <a:gd name="adj" fmla="val 7143"/>
+            </a:avLst>
+          </a:prstGeom>
+          <a:solidFill>
+            <a:srgbClr val="FFFFFF">
+              <a:alpha val="88000"/>
+            </a:srgbClr>
+          </a:solidFill>
+          <a:ln w="12700">
+            <a:solidFill>
+              <a:srgbClr val="D6E8F2"/>
+            </a:solidFill>
+            <a:prstDash val="solid"/>
+          </a:ln>
+        </p:spPr>
+      </p:sp>
+      <p:sp>
+        <p:nvSpPr>
+          <p:cNvPr id="14" name="Shape 12"/>
+          <p:cNvSpPr/>
+          <p:nvPr/>
+        </p:nvSpPr>
+        <p:spPr>
+          <a:xfrm>
+            <a:off x="8074152" y="3291840"/>
+            <a:ext cx="2596896" cy="749808"/>
+          </a:xfrm>
+          <a:prstGeom prst="rect">
+            <a:avLst/>
+          </a:prstGeom>
+          <a:solidFill>
+            <a:srgbClr val="EAF6F8"/>
+          </a:solidFill>
+          <a:ln w="12700">
+            <a:solidFill>
+              <a:srgbClr val="8ABBD8"/>
+            </a:solidFill>
+            <a:prstDash val="solid"/>
+          </a:ln>
+        </p:spPr>
+      </p:sp>
+      <p:sp>
+        <p:nvSpPr>
+          <p:cNvPr id="15" name="Shape 13"/>
+          <p:cNvSpPr/>
+          <p:nvPr/>
+        </p:nvSpPr>
+        <p:spPr>
+          <a:xfrm>
+            <a:off x="8202168" y="3721608"/>
+            <a:ext cx="2340864" cy="0"/>
+          </a:xfrm>
+          <a:prstGeom prst="line">
+            <a:avLst/>
+          </a:prstGeom>
+          <a:noFill/>
+          <a:ln w="19050">
+            <a:solidFill>
+              <a:srgbClr val="0068B7"/>
+            </a:solidFill>
+            <a:prstDash val="solid"/>
+          </a:ln>
+        </p:spPr>
+      </p:sp>
+      <p:sp>
+        <p:nvSpPr>
+          <p:cNvPr id="16" name="Shape 14"/>
+          <p:cNvSpPr/>
+          <p:nvPr/>
+        </p:nvSpPr>
+        <p:spPr>
+          <a:xfrm>
+            <a:off x="9198864" y="4206240"/>
+            <a:ext cx="347472" cy="347472"/>
+          </a:xfrm>
+          <a:prstGeom prst="ellipse">
+            <a:avLst/>
+          </a:prstGeom>
+          <a:solidFill>
+            <a:srgbClr val="2F8A28"/>
+          </a:solidFill>
+          <a:ln w="12700">
+            <a:solidFill>
+              <a:srgbClr val="2F8A28"/>
+            </a:solidFill>
+            <a:prstDash val="solid"/>
+          </a:ln>
+        </p:spPr>
+      </p:sp>
+      <p:sp>
+        <p:nvSpPr>
+          <p:cNvPr id="17" name="Text 15"/>
+          <p:cNvSpPr/>
+          <p:nvPr/>
+        </p:nvSpPr>
+        <p:spPr>
+          <a:xfrm>
+            <a:off x="7909560" y="3977640"/>
+            <a:ext cx="2926080" cy="182880"/>
+          </a:xfrm>
+          <a:prstGeom prst="rect">
+            <a:avLst/>
+          </a:prstGeom>
+          <a:noFill/>
+          <a:ln/>
+        </p:spPr>
+        <p:txBody>
+          <a:bodyPr wrap="square" lIns="0" tIns="0" rIns="0" bIns="0" rtlCol="0" anchor="ctr"/>
+          <a:lstStyle/>
+          <a:p>
+            <a:pPr algn="ctr" indent="0" marL="0">
+              <a:buNone/>
+            </a:pPr>
+            <a:r>
+              <a:rPr lang="en-US" sz="1000" dirty="0">
+                <a:solidFill>
+                  <a:srgbClr val="003A63"/>
+                </a:solidFill>
+                <a:latin typeface="Aptos" pitchFamily="34" charset="0"/>
+                <a:ea typeface="Aptos" pitchFamily="34" charset="-122"/>
+                <a:cs typeface="Aptos" pitchFamily="34" charset="-120"/>
+              </a:rPr>
+              <a:t>Concept to action</a:t>
+            </a:r>
+            <a:endParaRPr lang="en-US" sz="1000" dirty="0"/>
+          </a:p>
+        </p:txBody>
+      </p:sp>
+      <p:sp>
+        <p:nvSpPr>
+          <p:cNvPr id="18" name="Shape 16"/>
+          <p:cNvSpPr/>
+          <p:nvPr/>
+        </p:nvSpPr>
+        <p:spPr>
+          <a:xfrm>
+            <a:off x="7635240" y="4498848"/>
+            <a:ext cx="3474720" cy="1143000"/>
+          </a:xfrm>
+          <a:prstGeom prst="roundRect">
+            <a:avLst>
+              <a:gd name="adj" fmla="val 9600"/>
             </a:avLst>
           </a:prstGeom>
           <a:solidFill>
@@ -10879,14 +12107,14 @@
       </p:sp>
       <p:sp>
         <p:nvSpPr>
-          <p:cNvPr id="14" name="Text 12"/>
-          <p:cNvSpPr/>
-          <p:nvPr/>
-        </p:nvSpPr>
-        <p:spPr>
-          <a:xfrm>
-            <a:off x="8074152" y="3666744"/>
-            <a:ext cx="2825496" cy="256032"/>
+          <p:cNvPr id="19" name="Text 17"/>
+          <p:cNvSpPr/>
+          <p:nvPr/>
+        </p:nvSpPr>
+        <p:spPr>
+          <a:xfrm>
+            <a:off x="7799832" y="4645152"/>
+            <a:ext cx="3145536" cy="256032"/>
           </a:xfrm>
           <a:prstGeom prst="rect">
             <a:avLst/>
@@ -10910,7 +12138,7 @@
                 <a:ea typeface="Aptos" pitchFamily="34" charset="-122"/>
                 <a:cs typeface="Aptos" pitchFamily="34" charset="-120"/>
               </a:rPr>
-              <a:t>Use this for</a:t>
+              <a:t>What to document</a:t>
             </a:r>
             <a:endParaRPr lang="en-US" sz="1300" dirty="0"/>
           </a:p>
@@ -10918,14 +12146,14 @@
       </p:sp>
       <p:sp>
         <p:nvSpPr>
-          <p:cNvPr id="15" name="Text 13"/>
-          <p:cNvSpPr/>
-          <p:nvPr/>
-        </p:nvSpPr>
-        <p:spPr>
-          <a:xfrm>
-            <a:off x="8074152" y="4023360"/>
-            <a:ext cx="2825496" cy="1097280"/>
+          <p:cNvPr id="20" name="Text 18"/>
+          <p:cNvSpPr/>
+          <p:nvPr/>
+        </p:nvSpPr>
+        <p:spPr>
+          <a:xfrm>
+            <a:off x="7799832" y="5001768"/>
+            <a:ext cx="3145536" cy="502920"/>
           </a:xfrm>
           <a:prstGeom prst="rect">
             <a:avLst/>
@@ -10951,7 +12179,7 @@
                 <a:ea typeface="Aptos" pitchFamily="34" charset="-122"/>
                 <a:cs typeface="Aptos" pitchFamily="34" charset="-120"/>
               </a:rPr>
-              <a:t>Connect the concept to public health decisions, safeguards, documentation, or implementation work.</a:t>
+              <a:t>Connect the concept to public health purpose, responsible use, required safeguards, documentation, and the next action a department should take.</a:t>
             </a:r>
             <a:endParaRPr lang="en-US" sz="1550" dirty="0"/>
           </a:p>
@@ -11125,8 +12353,8 @@
         </p:nvSpPr>
         <p:spPr>
           <a:xfrm>
-            <a:off x="9966960" y="6537960"/>
-            <a:ext cx="1645920" cy="201168"/>
+            <a:off x="9646920" y="6537960"/>
+            <a:ext cx="1965960" cy="201168"/>
           </a:xfrm>
           <a:prstGeom prst="rect">
             <a:avLst/>
@@ -11150,7 +12378,7 @@
                 <a:ea typeface="Aptos" pitchFamily="34" charset="-122"/>
                 <a:cs typeface="Aptos" pitchFamily="34" charset="-120"/>
               </a:rPr>
-              <a:t>Â© Paula Soper</a:t>
+              <a:t>Copyright Paula Soper</a:t>
             </a:r>
             <a:endParaRPr lang="en-US" sz="800" dirty="0"/>
           </a:p>
@@ -11493,46 +12721,7 @@
       </p:sp>
       <p:sp>
         <p:nvSpPr>
-          <p:cNvPr id="15" name="Text 13"/>
-          <p:cNvSpPr/>
-          <p:nvPr/>
-        </p:nvSpPr>
-        <p:spPr>
-          <a:xfrm>
-            <a:off x="8817864" y="4187952"/>
-            <a:ext cx="201168" cy="256032"/>
-          </a:xfrm>
-          <a:prstGeom prst="rect">
-            <a:avLst/>
-          </a:prstGeom>
-          <a:noFill/>
-          <a:ln/>
-        </p:spPr>
-        <p:txBody>
-          <a:bodyPr wrap="square" lIns="0" tIns="0" rIns="0" bIns="0" rtlCol="0" anchor="ctr"/>
-          <a:lstStyle/>
-          <a:p>
-            <a:pPr algn="ctr" indent="0" marL="0">
-              <a:buNone/>
-            </a:pPr>
-            <a:r>
-              <a:rPr lang="en-US" sz="1800" b="1" dirty="0">
-                <a:solidFill>
-                  <a:srgbClr val="0068B7"/>
-                </a:solidFill>
-                <a:latin typeface="Aptos" pitchFamily="34" charset="0"/>
-                <a:ea typeface="Aptos" pitchFamily="34" charset="-122"/>
-                <a:cs typeface="Aptos" pitchFamily="34" charset="-120"/>
-              </a:rPr>
-              <a:t>â†’</a:t>
-            </a:r>
-            <a:endParaRPr lang="en-US" sz="1800" dirty="0"/>
-          </a:p>
-        </p:txBody>
-      </p:sp>
-      <p:sp>
-        <p:nvSpPr>
-          <p:cNvPr id="16" name="Shape 14"/>
+          <p:cNvPr id="15" name="Shape 13"/>
           <p:cNvSpPr/>
           <p:nvPr/>
         </p:nvSpPr>
@@ -11559,7 +12748,7 @@
       </p:sp>
       <p:sp>
         <p:nvSpPr>
-          <p:cNvPr id="17" name="Text 15"/>
+          <p:cNvPr id="16" name="Text 14"/>
           <p:cNvSpPr/>
           <p:nvPr/>
         </p:nvSpPr>
@@ -11600,46 +12789,7 @@
       </p:sp>
       <p:sp>
         <p:nvSpPr>
-          <p:cNvPr id="18" name="Text 16"/>
-          <p:cNvSpPr/>
-          <p:nvPr/>
-        </p:nvSpPr>
-        <p:spPr>
-          <a:xfrm>
-            <a:off x="10046208" y="4187952"/>
-            <a:ext cx="201168" cy="256032"/>
-          </a:xfrm>
-          <a:prstGeom prst="rect">
-            <a:avLst/>
-          </a:prstGeom>
-          <a:noFill/>
-          <a:ln/>
-        </p:spPr>
-        <p:txBody>
-          <a:bodyPr wrap="square" lIns="0" tIns="0" rIns="0" bIns="0" rtlCol="0" anchor="ctr"/>
-          <a:lstStyle/>
-          <a:p>
-            <a:pPr algn="ctr" indent="0" marL="0">
-              <a:buNone/>
-            </a:pPr>
-            <a:r>
-              <a:rPr lang="en-US" sz="1800" b="1" dirty="0">
-                <a:solidFill>
-                  <a:srgbClr val="0068B7"/>
-                </a:solidFill>
-                <a:latin typeface="Aptos" pitchFamily="34" charset="0"/>
-                <a:ea typeface="Aptos" pitchFamily="34" charset="-122"/>
-                <a:cs typeface="Aptos" pitchFamily="34" charset="-120"/>
-              </a:rPr>
-              <a:t>â†’</a:t>
-            </a:r>
-            <a:endParaRPr lang="en-US" sz="1800" dirty="0"/>
-          </a:p>
-        </p:txBody>
-      </p:sp>
-      <p:sp>
-        <p:nvSpPr>
-          <p:cNvPr id="19" name="Shape 17"/>
+          <p:cNvPr id="17" name="Shape 15"/>
           <p:cNvSpPr/>
           <p:nvPr/>
         </p:nvSpPr>
@@ -11666,7 +12816,7 @@
       </p:sp>
       <p:sp>
         <p:nvSpPr>
-          <p:cNvPr id="20" name="Text 18"/>
+          <p:cNvPr id="18" name="Text 16"/>
           <p:cNvSpPr/>
           <p:nvPr/>
         </p:nvSpPr>
@@ -11873,8 +13023,8 @@
         </p:nvSpPr>
         <p:spPr>
           <a:xfrm>
-            <a:off x="9966960" y="6537960"/>
-            <a:ext cx="1645920" cy="201168"/>
+            <a:off x="9646920" y="6537960"/>
+            <a:ext cx="1965960" cy="201168"/>
           </a:xfrm>
           <a:prstGeom prst="rect">
             <a:avLst/>
@@ -11898,7 +13048,7 @@
                 <a:ea typeface="Aptos" pitchFamily="34" charset="-122"/>
                 <a:cs typeface="Aptos" pitchFamily="34" charset="-120"/>
               </a:rPr>
-              <a:t>Â© Paula Soper</a:t>
+              <a:t>Copyright Paula Soper</a:t>
             </a:r>
             <a:endParaRPr lang="en-US" sz="800" dirty="0"/>
           </a:p>
@@ -12241,46 +13391,7 @@
       </p:sp>
       <p:sp>
         <p:nvSpPr>
-          <p:cNvPr id="15" name="Text 13"/>
-          <p:cNvSpPr/>
-          <p:nvPr/>
-        </p:nvSpPr>
-        <p:spPr>
-          <a:xfrm>
-            <a:off x="8817864" y="4187952"/>
-            <a:ext cx="201168" cy="256032"/>
-          </a:xfrm>
-          <a:prstGeom prst="rect">
-            <a:avLst/>
-          </a:prstGeom>
-          <a:noFill/>
-          <a:ln/>
-        </p:spPr>
-        <p:txBody>
-          <a:bodyPr wrap="square" lIns="0" tIns="0" rIns="0" bIns="0" rtlCol="0" anchor="ctr"/>
-          <a:lstStyle/>
-          <a:p>
-            <a:pPr algn="ctr" indent="0" marL="0">
-              <a:buNone/>
-            </a:pPr>
-            <a:r>
-              <a:rPr lang="en-US" sz="1800" b="1" dirty="0">
-                <a:solidFill>
-                  <a:srgbClr val="0068B7"/>
-                </a:solidFill>
-                <a:latin typeface="Aptos" pitchFamily="34" charset="0"/>
-                <a:ea typeface="Aptos" pitchFamily="34" charset="-122"/>
-                <a:cs typeface="Aptos" pitchFamily="34" charset="-120"/>
-              </a:rPr>
-              <a:t>â†’</a:t>
-            </a:r>
-            <a:endParaRPr lang="en-US" sz="1800" dirty="0"/>
-          </a:p>
-        </p:txBody>
-      </p:sp>
-      <p:sp>
-        <p:nvSpPr>
-          <p:cNvPr id="16" name="Shape 14"/>
+          <p:cNvPr id="15" name="Shape 13"/>
           <p:cNvSpPr/>
           <p:nvPr/>
         </p:nvSpPr>
@@ -12307,7 +13418,7 @@
       </p:sp>
       <p:sp>
         <p:nvSpPr>
-          <p:cNvPr id="17" name="Text 15"/>
+          <p:cNvPr id="16" name="Text 14"/>
           <p:cNvSpPr/>
           <p:nvPr/>
         </p:nvSpPr>
@@ -12348,46 +13459,7 @@
       </p:sp>
       <p:sp>
         <p:nvSpPr>
-          <p:cNvPr id="18" name="Text 16"/>
-          <p:cNvSpPr/>
-          <p:nvPr/>
-        </p:nvSpPr>
-        <p:spPr>
-          <a:xfrm>
-            <a:off x="10046208" y="4187952"/>
-            <a:ext cx="201168" cy="256032"/>
-          </a:xfrm>
-          <a:prstGeom prst="rect">
-            <a:avLst/>
-          </a:prstGeom>
-          <a:noFill/>
-          <a:ln/>
-        </p:spPr>
-        <p:txBody>
-          <a:bodyPr wrap="square" lIns="0" tIns="0" rIns="0" bIns="0" rtlCol="0" anchor="ctr"/>
-          <a:lstStyle/>
-          <a:p>
-            <a:pPr algn="ctr" indent="0" marL="0">
-              <a:buNone/>
-            </a:pPr>
-            <a:r>
-              <a:rPr lang="en-US" sz="1800" b="1" dirty="0">
-                <a:solidFill>
-                  <a:srgbClr val="0068B7"/>
-                </a:solidFill>
-                <a:latin typeface="Aptos" pitchFamily="34" charset="0"/>
-                <a:ea typeface="Aptos" pitchFamily="34" charset="-122"/>
-                <a:cs typeface="Aptos" pitchFamily="34" charset="-120"/>
-              </a:rPr>
-              <a:t>â†’</a:t>
-            </a:r>
-            <a:endParaRPr lang="en-US" sz="1800" dirty="0"/>
-          </a:p>
-        </p:txBody>
-      </p:sp>
-      <p:sp>
-        <p:nvSpPr>
-          <p:cNvPr id="19" name="Shape 17"/>
+          <p:cNvPr id="17" name="Shape 15"/>
           <p:cNvSpPr/>
           <p:nvPr/>
         </p:nvSpPr>
@@ -12414,7 +13486,7 @@
       </p:sp>
       <p:sp>
         <p:nvSpPr>
-          <p:cNvPr id="20" name="Text 18"/>
+          <p:cNvPr id="18" name="Text 16"/>
           <p:cNvSpPr/>
           <p:nvPr/>
         </p:nvSpPr>
@@ -12621,8 +13693,8 @@
         </p:nvSpPr>
         <p:spPr>
           <a:xfrm>
-            <a:off x="9966960" y="6537960"/>
-            <a:ext cx="1645920" cy="201168"/>
+            <a:off x="9646920" y="6537960"/>
+            <a:ext cx="1965960" cy="201168"/>
           </a:xfrm>
           <a:prstGeom prst="rect">
             <a:avLst/>
@@ -12646,7 +13718,7 @@
                 <a:ea typeface="Aptos" pitchFamily="34" charset="-122"/>
                 <a:cs typeface="Aptos" pitchFamily="34" charset="-120"/>
               </a:rPr>
-              <a:t>Â© Paula Soper</a:t>
+              <a:t>Copyright Paula Soper</a:t>
             </a:r>
             <a:endParaRPr lang="en-US" sz="800" dirty="0"/>
           </a:p>
@@ -12693,77 +13765,13 @@
       </p:sp>
       <p:sp>
         <p:nvSpPr>
-          <p:cNvPr id="8" name="Shape 6"/>
+          <p:cNvPr id="8" name="Text 6"/>
           <p:cNvSpPr/>
           <p:nvPr/>
         </p:nvSpPr>
         <p:spPr>
           <a:xfrm>
             <a:off x="640080" y="658368"/>
-            <a:ext cx="420624" cy="420624"/>
-          </a:xfrm>
-          <a:prstGeom prst="ellipse">
-            <a:avLst/>
-          </a:prstGeom>
-          <a:solidFill>
-            <a:srgbClr val="0068B7"/>
-          </a:solidFill>
-          <a:ln w="12700">
-            <a:solidFill>
-              <a:srgbClr val="0068B7"/>
-            </a:solidFill>
-            <a:prstDash val="solid"/>
-          </a:ln>
-        </p:spPr>
-      </p:sp>
-      <p:sp>
-        <p:nvSpPr>
-          <p:cNvPr id="9" name="Text 7"/>
-          <p:cNvSpPr/>
-          <p:nvPr/>
-        </p:nvSpPr>
-        <p:spPr>
-          <a:xfrm>
-            <a:off x="640080" y="731520"/>
-            <a:ext cx="420624" cy="164592"/>
-          </a:xfrm>
-          <a:prstGeom prst="rect">
-            <a:avLst/>
-          </a:prstGeom>
-          <a:noFill/>
-          <a:ln/>
-        </p:spPr>
-        <p:txBody>
-          <a:bodyPr wrap="square" lIns="0" tIns="0" rIns="0" bIns="0" rtlCol="0" anchor="ctr"/>
-          <a:lstStyle/>
-          <a:p>
-            <a:pPr algn="ctr" indent="0" marL="0">
-              <a:buNone/>
-            </a:pPr>
-            <a:r>
-              <a:rPr lang="en-US" sz="1100" b="1" dirty="0">
-                <a:solidFill>
-                  <a:srgbClr val="FFFFFF"/>
-                </a:solidFill>
-                <a:latin typeface="Aptos" pitchFamily="34" charset="0"/>
-                <a:ea typeface="Aptos" pitchFamily="34" charset="-122"/>
-                <a:cs typeface="Aptos" pitchFamily="34" charset="-120"/>
-              </a:rPr>
-              <a:t>1</a:t>
-            </a:r>
-            <a:endParaRPr lang="en-US" sz="1100" dirty="0"/>
-          </a:p>
-        </p:txBody>
-      </p:sp>
-      <p:sp>
-        <p:nvSpPr>
-          <p:cNvPr id="10" name="Text 8"/>
-          <p:cNvSpPr/>
-          <p:nvPr/>
-        </p:nvSpPr>
-        <p:spPr>
-          <a:xfrm>
-            <a:off x="640080" y="621792"/>
             <a:ext cx="10881360" cy="713232"/>
           </a:xfrm>
           <a:prstGeom prst="rect">
@@ -12798,14 +13806,14 @@
       </p:sp>
       <p:sp>
         <p:nvSpPr>
-          <p:cNvPr id="11" name="Text 9"/>
+          <p:cNvPr id="9" name="Text 7"/>
           <p:cNvSpPr/>
           <p:nvPr/>
         </p:nvSpPr>
         <p:spPr>
           <a:xfrm>
             <a:off x="868680" y="1508760"/>
-            <a:ext cx="6537960" cy="4160520"/>
+            <a:ext cx="6309360" cy="4160520"/>
           </a:xfrm>
           <a:prstGeom prst="rect">
             <a:avLst/>
@@ -12864,18 +13872,18 @@
       </p:sp>
       <p:sp>
         <p:nvSpPr>
-          <p:cNvPr id="12" name="Shape 10"/>
-          <p:cNvSpPr/>
-          <p:nvPr/>
-        </p:nvSpPr>
-        <p:spPr>
-          <a:xfrm>
-            <a:off x="7909560" y="1417320"/>
-            <a:ext cx="3154680" cy="1828800"/>
+          <p:cNvPr id="10" name="Shape 8"/>
+          <p:cNvSpPr/>
+          <p:nvPr/>
+        </p:nvSpPr>
+        <p:spPr>
+          <a:xfrm>
+            <a:off x="7635240" y="1325880"/>
+            <a:ext cx="3474720" cy="1325880"/>
           </a:xfrm>
           <a:prstGeom prst="roundRect">
             <a:avLst>
-              <a:gd name="adj" fmla="val 6000"/>
+              <a:gd name="adj" fmla="val 8276"/>
             </a:avLst>
           </a:prstGeom>
           <a:solidFill>
@@ -12891,14 +13899,14 @@
       </p:sp>
       <p:sp>
         <p:nvSpPr>
-          <p:cNvPr id="13" name="Text 11"/>
-          <p:cNvSpPr/>
-          <p:nvPr/>
-        </p:nvSpPr>
-        <p:spPr>
-          <a:xfrm>
-            <a:off x="8074152" y="1563624"/>
-            <a:ext cx="2825496" cy="256032"/>
+          <p:cNvPr id="11" name="Text 9"/>
+          <p:cNvSpPr/>
+          <p:nvPr/>
+        </p:nvSpPr>
+        <p:spPr>
+          <a:xfrm>
+            <a:off x="7799832" y="1472184"/>
+            <a:ext cx="3145536" cy="256032"/>
           </a:xfrm>
           <a:prstGeom prst="rect">
             <a:avLst/>
@@ -12922,7 +13930,7 @@
                 <a:ea typeface="Aptos" pitchFamily="34" charset="-122"/>
                 <a:cs typeface="Aptos" pitchFamily="34" charset="-120"/>
               </a:rPr>
-              <a:t>Key idea</a:t>
+              <a:t>Governance lens</a:t>
             </a:r>
             <a:endParaRPr lang="en-US" sz="1300" dirty="0"/>
           </a:p>
@@ -12930,14 +13938,14 @@
       </p:sp>
       <p:sp>
         <p:nvSpPr>
-          <p:cNvPr id="14" name="Text 12"/>
-          <p:cNvSpPr/>
-          <p:nvPr/>
-        </p:nvSpPr>
-        <p:spPr>
-          <a:xfrm>
-            <a:off x="8074152" y="1920240"/>
-            <a:ext cx="2825496" cy="1188720"/>
+          <p:cNvPr id="12" name="Text 10"/>
+          <p:cNvSpPr/>
+          <p:nvPr/>
+        </p:nvSpPr>
+        <p:spPr>
+          <a:xfrm>
+            <a:off x="7799832" y="1828800"/>
+            <a:ext cx="3145536" cy="685800"/>
           </a:xfrm>
           <a:prstGeom prst="rect">
             <a:avLst/>
@@ -12971,18 +13979,159 @@
       </p:sp>
       <p:sp>
         <p:nvSpPr>
-          <p:cNvPr id="15" name="Shape 13"/>
-          <p:cNvSpPr/>
-          <p:nvPr/>
-        </p:nvSpPr>
-        <p:spPr>
-          <a:xfrm>
-            <a:off x="7909560" y="3520440"/>
-            <a:ext cx="3154680" cy="1737360"/>
+          <p:cNvPr id="13" name="Shape 11"/>
+          <p:cNvSpPr/>
+          <p:nvPr/>
+        </p:nvSpPr>
+        <p:spPr>
+          <a:xfrm>
+            <a:off x="7635240" y="2788920"/>
+            <a:ext cx="3474720" cy="1536192"/>
           </a:xfrm>
           <a:prstGeom prst="roundRect">
             <a:avLst>
-              <a:gd name="adj" fmla="val 6316"/>
+              <a:gd name="adj" fmla="val 7143"/>
+            </a:avLst>
+          </a:prstGeom>
+          <a:solidFill>
+            <a:srgbClr val="FFFFFF">
+              <a:alpha val="88000"/>
+            </a:srgbClr>
+          </a:solidFill>
+          <a:ln w="12700">
+            <a:solidFill>
+              <a:srgbClr val="D6E8F2"/>
+            </a:solidFill>
+            <a:prstDash val="solid"/>
+          </a:ln>
+        </p:spPr>
+      </p:sp>
+      <p:sp>
+        <p:nvSpPr>
+          <p:cNvPr id="14" name="Shape 12"/>
+          <p:cNvSpPr/>
+          <p:nvPr/>
+        </p:nvSpPr>
+        <p:spPr>
+          <a:xfrm>
+            <a:off x="8074152" y="3291840"/>
+            <a:ext cx="2596896" cy="749808"/>
+          </a:xfrm>
+          <a:prstGeom prst="rect">
+            <a:avLst/>
+          </a:prstGeom>
+          <a:solidFill>
+            <a:srgbClr val="EAF6F8"/>
+          </a:solidFill>
+          <a:ln w="12700">
+            <a:solidFill>
+              <a:srgbClr val="8ABBD8"/>
+            </a:solidFill>
+            <a:prstDash val="solid"/>
+          </a:ln>
+        </p:spPr>
+      </p:sp>
+      <p:sp>
+        <p:nvSpPr>
+          <p:cNvPr id="15" name="Shape 13"/>
+          <p:cNvSpPr/>
+          <p:nvPr/>
+        </p:nvSpPr>
+        <p:spPr>
+          <a:xfrm>
+            <a:off x="8202168" y="3721608"/>
+            <a:ext cx="2340864" cy="0"/>
+          </a:xfrm>
+          <a:prstGeom prst="line">
+            <a:avLst/>
+          </a:prstGeom>
+          <a:noFill/>
+          <a:ln w="19050">
+            <a:solidFill>
+              <a:srgbClr val="0068B7"/>
+            </a:solidFill>
+            <a:prstDash val="solid"/>
+          </a:ln>
+        </p:spPr>
+      </p:sp>
+      <p:sp>
+        <p:nvSpPr>
+          <p:cNvPr id="16" name="Shape 14"/>
+          <p:cNvSpPr/>
+          <p:nvPr/>
+        </p:nvSpPr>
+        <p:spPr>
+          <a:xfrm>
+            <a:off x="9198864" y="4206240"/>
+            <a:ext cx="347472" cy="347472"/>
+          </a:xfrm>
+          <a:prstGeom prst="ellipse">
+            <a:avLst/>
+          </a:prstGeom>
+          <a:solidFill>
+            <a:srgbClr val="2F8A28"/>
+          </a:solidFill>
+          <a:ln w="12700">
+            <a:solidFill>
+              <a:srgbClr val="2F8A28"/>
+            </a:solidFill>
+            <a:prstDash val="solid"/>
+          </a:ln>
+        </p:spPr>
+      </p:sp>
+      <p:sp>
+        <p:nvSpPr>
+          <p:cNvPr id="17" name="Text 15"/>
+          <p:cNvSpPr/>
+          <p:nvPr/>
+        </p:nvSpPr>
+        <p:spPr>
+          <a:xfrm>
+            <a:off x="7909560" y="3977640"/>
+            <a:ext cx="2926080" cy="182880"/>
+          </a:xfrm>
+          <a:prstGeom prst="rect">
+            <a:avLst/>
+          </a:prstGeom>
+          <a:noFill/>
+          <a:ln/>
+        </p:spPr>
+        <p:txBody>
+          <a:bodyPr wrap="square" lIns="0" tIns="0" rIns="0" bIns="0" rtlCol="0" anchor="ctr"/>
+          <a:lstStyle/>
+          <a:p>
+            <a:pPr algn="ctr" indent="0" marL="0">
+              <a:buNone/>
+            </a:pPr>
+            <a:r>
+              <a:rPr lang="en-US" sz="1000" dirty="0">
+                <a:solidFill>
+                  <a:srgbClr val="003A63"/>
+                </a:solidFill>
+                <a:latin typeface="Aptos" pitchFamily="34" charset="0"/>
+                <a:ea typeface="Aptos" pitchFamily="34" charset="-122"/>
+                <a:cs typeface="Aptos" pitchFamily="34" charset="-120"/>
+              </a:rPr>
+              <a:t>Concept to action</a:t>
+            </a:r>
+            <a:endParaRPr lang="en-US" sz="1000" dirty="0"/>
+          </a:p>
+        </p:txBody>
+      </p:sp>
+      <p:sp>
+        <p:nvSpPr>
+          <p:cNvPr id="18" name="Shape 16"/>
+          <p:cNvSpPr/>
+          <p:nvPr/>
+        </p:nvSpPr>
+        <p:spPr>
+          <a:xfrm>
+            <a:off x="7635240" y="4498848"/>
+            <a:ext cx="3474720" cy="1143000"/>
+          </a:xfrm>
+          <a:prstGeom prst="roundRect">
+            <a:avLst>
+              <a:gd name="adj" fmla="val 9600"/>
             </a:avLst>
           </a:prstGeom>
           <a:solidFill>
@@ -12998,14 +14147,14 @@
       </p:sp>
       <p:sp>
         <p:nvSpPr>
-          <p:cNvPr id="16" name="Text 14"/>
-          <p:cNvSpPr/>
-          <p:nvPr/>
-        </p:nvSpPr>
-        <p:spPr>
-          <a:xfrm>
-            <a:off x="8074152" y="3666744"/>
-            <a:ext cx="2825496" cy="256032"/>
+          <p:cNvPr id="19" name="Text 17"/>
+          <p:cNvSpPr/>
+          <p:nvPr/>
+        </p:nvSpPr>
+        <p:spPr>
+          <a:xfrm>
+            <a:off x="7799832" y="4645152"/>
+            <a:ext cx="3145536" cy="256032"/>
           </a:xfrm>
           <a:prstGeom prst="rect">
             <a:avLst/>
@@ -13029,7 +14178,7 @@
                 <a:ea typeface="Aptos" pitchFamily="34" charset="-122"/>
                 <a:cs typeface="Aptos" pitchFamily="34" charset="-120"/>
               </a:rPr>
-              <a:t>Use this for</a:t>
+              <a:t>What to document</a:t>
             </a:r>
             <a:endParaRPr lang="en-US" sz="1300" dirty="0"/>
           </a:p>
@@ -13037,14 +14186,14 @@
       </p:sp>
       <p:sp>
         <p:nvSpPr>
-          <p:cNvPr id="17" name="Text 15"/>
-          <p:cNvSpPr/>
-          <p:nvPr/>
-        </p:nvSpPr>
-        <p:spPr>
-          <a:xfrm>
-            <a:off x="8074152" y="4023360"/>
-            <a:ext cx="2825496" cy="1097280"/>
+          <p:cNvPr id="20" name="Text 18"/>
+          <p:cNvSpPr/>
+          <p:nvPr/>
+        </p:nvSpPr>
+        <p:spPr>
+          <a:xfrm>
+            <a:off x="7799832" y="5001768"/>
+            <a:ext cx="3145536" cy="502920"/>
           </a:xfrm>
           <a:prstGeom prst="rect">
             <a:avLst/>
@@ -13070,7 +14219,7 @@
                 <a:ea typeface="Aptos" pitchFamily="34" charset="-122"/>
                 <a:cs typeface="Aptos" pitchFamily="34" charset="-120"/>
               </a:rPr>
-              <a:t>Connect the concept to public health decisions, safeguards, documentation, or implementation work.</a:t>
+              <a:t>Use the assignment to test whether you can explain the concept, apply it to a realistic public health situation, and identify what would need review before the work moves forward.</a:t>
             </a:r>
             <a:endParaRPr lang="en-US" sz="1550" dirty="0"/>
           </a:p>
@@ -13244,8 +14393,8 @@
         </p:nvSpPr>
         <p:spPr>
           <a:xfrm>
-            <a:off x="9966960" y="6537960"/>
-            <a:ext cx="1645920" cy="201168"/>
+            <a:off x="9646920" y="6537960"/>
+            <a:ext cx="1965960" cy="201168"/>
           </a:xfrm>
           <a:prstGeom prst="rect">
             <a:avLst/>
@@ -13269,7 +14418,7 @@
                 <a:ea typeface="Aptos" pitchFamily="34" charset="-122"/>
                 <a:cs typeface="Aptos" pitchFamily="34" charset="-120"/>
               </a:rPr>
-              <a:t>Â© Paula Soper</a:t>
+              <a:t>Copyright Paula Soper</a:t>
             </a:r>
             <a:endParaRPr lang="en-US" sz="800" dirty="0"/>
           </a:p>
@@ -13316,77 +14465,13 @@
       </p:sp>
       <p:sp>
         <p:nvSpPr>
-          <p:cNvPr id="8" name="Shape 6"/>
+          <p:cNvPr id="8" name="Text 6"/>
           <p:cNvSpPr/>
           <p:nvPr/>
         </p:nvSpPr>
         <p:spPr>
           <a:xfrm>
             <a:off x="640080" y="658368"/>
-            <a:ext cx="420624" cy="420624"/>
-          </a:xfrm>
-          <a:prstGeom prst="ellipse">
-            <a:avLst/>
-          </a:prstGeom>
-          <a:solidFill>
-            <a:srgbClr val="0068B7"/>
-          </a:solidFill>
-          <a:ln w="12700">
-            <a:solidFill>
-              <a:srgbClr val="0068B7"/>
-            </a:solidFill>
-            <a:prstDash val="solid"/>
-          </a:ln>
-        </p:spPr>
-      </p:sp>
-      <p:sp>
-        <p:nvSpPr>
-          <p:cNvPr id="9" name="Text 7"/>
-          <p:cNvSpPr/>
-          <p:nvPr/>
-        </p:nvSpPr>
-        <p:spPr>
-          <a:xfrm>
-            <a:off x="640080" y="731520"/>
-            <a:ext cx="420624" cy="164592"/>
-          </a:xfrm>
-          <a:prstGeom prst="rect">
-            <a:avLst/>
-          </a:prstGeom>
-          <a:noFill/>
-          <a:ln/>
-        </p:spPr>
-        <p:txBody>
-          <a:bodyPr wrap="square" lIns="0" tIns="0" rIns="0" bIns="0" rtlCol="0" anchor="ctr"/>
-          <a:lstStyle/>
-          <a:p>
-            <a:pPr algn="ctr" indent="0" marL="0">
-              <a:buNone/>
-            </a:pPr>
-            <a:r>
-              <a:rPr lang="en-US" sz="1100" b="1" dirty="0">
-                <a:solidFill>
-                  <a:srgbClr val="FFFFFF"/>
-                </a:solidFill>
-                <a:latin typeface="Aptos" pitchFamily="34" charset="0"/>
-                <a:ea typeface="Aptos" pitchFamily="34" charset="-122"/>
-                <a:cs typeface="Aptos" pitchFamily="34" charset="-120"/>
-              </a:rPr>
-              <a:t>2</a:t>
-            </a:r>
-            <a:endParaRPr lang="en-US" sz="1100" dirty="0"/>
-          </a:p>
-        </p:txBody>
-      </p:sp>
-      <p:sp>
-        <p:nvSpPr>
-          <p:cNvPr id="10" name="Text 8"/>
-          <p:cNvSpPr/>
-          <p:nvPr/>
-        </p:nvSpPr>
-        <p:spPr>
-          <a:xfrm>
-            <a:off x="640080" y="621792"/>
             <a:ext cx="10881360" cy="713232"/>
           </a:xfrm>
           <a:prstGeom prst="rect">
@@ -13421,14 +14506,14 @@
       </p:sp>
       <p:sp>
         <p:nvSpPr>
-          <p:cNvPr id="11" name="Text 9"/>
+          <p:cNvPr id="9" name="Text 7"/>
           <p:cNvSpPr/>
           <p:nvPr/>
         </p:nvSpPr>
         <p:spPr>
           <a:xfrm>
             <a:off x="868680" y="1508760"/>
-            <a:ext cx="6537960" cy="4160520"/>
+            <a:ext cx="6309360" cy="4160520"/>
           </a:xfrm>
           <a:prstGeom prst="rect">
             <a:avLst/>
@@ -13487,18 +14572,18 @@
       </p:sp>
       <p:sp>
         <p:nvSpPr>
-          <p:cNvPr id="12" name="Shape 10"/>
-          <p:cNvSpPr/>
-          <p:nvPr/>
-        </p:nvSpPr>
-        <p:spPr>
-          <a:xfrm>
-            <a:off x="7909560" y="1417320"/>
-            <a:ext cx="3154680" cy="1828800"/>
+          <p:cNvPr id="10" name="Shape 8"/>
+          <p:cNvSpPr/>
+          <p:nvPr/>
+        </p:nvSpPr>
+        <p:spPr>
+          <a:xfrm>
+            <a:off x="7635240" y="1325880"/>
+            <a:ext cx="3474720" cy="1325880"/>
           </a:xfrm>
           <a:prstGeom prst="roundRect">
             <a:avLst>
-              <a:gd name="adj" fmla="val 6000"/>
+              <a:gd name="adj" fmla="val 8276"/>
             </a:avLst>
           </a:prstGeom>
           <a:solidFill>
@@ -13514,14 +14599,14 @@
       </p:sp>
       <p:sp>
         <p:nvSpPr>
-          <p:cNvPr id="13" name="Text 11"/>
-          <p:cNvSpPr/>
-          <p:nvPr/>
-        </p:nvSpPr>
-        <p:spPr>
-          <a:xfrm>
-            <a:off x="8074152" y="1563624"/>
-            <a:ext cx="2825496" cy="256032"/>
+          <p:cNvPr id="11" name="Text 9"/>
+          <p:cNvSpPr/>
+          <p:nvPr/>
+        </p:nvSpPr>
+        <p:spPr>
+          <a:xfrm>
+            <a:off x="7799832" y="1472184"/>
+            <a:ext cx="3145536" cy="256032"/>
           </a:xfrm>
           <a:prstGeom prst="rect">
             <a:avLst/>
@@ -13545,7 +14630,7 @@
                 <a:ea typeface="Aptos" pitchFamily="34" charset="-122"/>
                 <a:cs typeface="Aptos" pitchFamily="34" charset="-120"/>
               </a:rPr>
-              <a:t>Key idea</a:t>
+              <a:t>Governance lens</a:t>
             </a:r>
             <a:endParaRPr lang="en-US" sz="1300" dirty="0"/>
           </a:p>
@@ -13553,14 +14638,14 @@
       </p:sp>
       <p:sp>
         <p:nvSpPr>
-          <p:cNvPr id="14" name="Text 12"/>
-          <p:cNvSpPr/>
-          <p:nvPr/>
-        </p:nvSpPr>
-        <p:spPr>
-          <a:xfrm>
-            <a:off x="8074152" y="1920240"/>
-            <a:ext cx="2825496" cy="1188720"/>
+          <p:cNvPr id="12" name="Text 10"/>
+          <p:cNvSpPr/>
+          <p:nvPr/>
+        </p:nvSpPr>
+        <p:spPr>
+          <a:xfrm>
+            <a:off x="7799832" y="1828800"/>
+            <a:ext cx="3145536" cy="685800"/>
           </a:xfrm>
           <a:prstGeom prst="rect">
             <a:avLst/>
@@ -13594,18 +14679,159 @@
       </p:sp>
       <p:sp>
         <p:nvSpPr>
-          <p:cNvPr id="15" name="Shape 13"/>
-          <p:cNvSpPr/>
-          <p:nvPr/>
-        </p:nvSpPr>
-        <p:spPr>
-          <a:xfrm>
-            <a:off x="7909560" y="3520440"/>
-            <a:ext cx="3154680" cy="1737360"/>
+          <p:cNvPr id="13" name="Shape 11"/>
+          <p:cNvSpPr/>
+          <p:nvPr/>
+        </p:nvSpPr>
+        <p:spPr>
+          <a:xfrm>
+            <a:off x="7635240" y="2788920"/>
+            <a:ext cx="3474720" cy="1536192"/>
           </a:xfrm>
           <a:prstGeom prst="roundRect">
             <a:avLst>
-              <a:gd name="adj" fmla="val 6316"/>
+              <a:gd name="adj" fmla="val 7143"/>
+            </a:avLst>
+          </a:prstGeom>
+          <a:solidFill>
+            <a:srgbClr val="FFFFFF">
+              <a:alpha val="88000"/>
+            </a:srgbClr>
+          </a:solidFill>
+          <a:ln w="12700">
+            <a:solidFill>
+              <a:srgbClr val="D6E8F2"/>
+            </a:solidFill>
+            <a:prstDash val="solid"/>
+          </a:ln>
+        </p:spPr>
+      </p:sp>
+      <p:sp>
+        <p:nvSpPr>
+          <p:cNvPr id="14" name="Shape 12"/>
+          <p:cNvSpPr/>
+          <p:nvPr/>
+        </p:nvSpPr>
+        <p:spPr>
+          <a:xfrm>
+            <a:off x="8074152" y="3291840"/>
+            <a:ext cx="2596896" cy="749808"/>
+          </a:xfrm>
+          <a:prstGeom prst="rect">
+            <a:avLst/>
+          </a:prstGeom>
+          <a:solidFill>
+            <a:srgbClr val="EAF6F8"/>
+          </a:solidFill>
+          <a:ln w="12700">
+            <a:solidFill>
+              <a:srgbClr val="8ABBD8"/>
+            </a:solidFill>
+            <a:prstDash val="solid"/>
+          </a:ln>
+        </p:spPr>
+      </p:sp>
+      <p:sp>
+        <p:nvSpPr>
+          <p:cNvPr id="15" name="Shape 13"/>
+          <p:cNvSpPr/>
+          <p:nvPr/>
+        </p:nvSpPr>
+        <p:spPr>
+          <a:xfrm>
+            <a:off x="8202168" y="3721608"/>
+            <a:ext cx="2340864" cy="0"/>
+          </a:xfrm>
+          <a:prstGeom prst="line">
+            <a:avLst/>
+          </a:prstGeom>
+          <a:noFill/>
+          <a:ln w="19050">
+            <a:solidFill>
+              <a:srgbClr val="0068B7"/>
+            </a:solidFill>
+            <a:prstDash val="solid"/>
+          </a:ln>
+        </p:spPr>
+      </p:sp>
+      <p:sp>
+        <p:nvSpPr>
+          <p:cNvPr id="16" name="Shape 14"/>
+          <p:cNvSpPr/>
+          <p:nvPr/>
+        </p:nvSpPr>
+        <p:spPr>
+          <a:xfrm>
+            <a:off x="9198864" y="4206240"/>
+            <a:ext cx="347472" cy="347472"/>
+          </a:xfrm>
+          <a:prstGeom prst="ellipse">
+            <a:avLst/>
+          </a:prstGeom>
+          <a:solidFill>
+            <a:srgbClr val="2F8A28"/>
+          </a:solidFill>
+          <a:ln w="12700">
+            <a:solidFill>
+              <a:srgbClr val="2F8A28"/>
+            </a:solidFill>
+            <a:prstDash val="solid"/>
+          </a:ln>
+        </p:spPr>
+      </p:sp>
+      <p:sp>
+        <p:nvSpPr>
+          <p:cNvPr id="17" name="Text 15"/>
+          <p:cNvSpPr/>
+          <p:nvPr/>
+        </p:nvSpPr>
+        <p:spPr>
+          <a:xfrm>
+            <a:off x="7909560" y="3977640"/>
+            <a:ext cx="2926080" cy="182880"/>
+          </a:xfrm>
+          <a:prstGeom prst="rect">
+            <a:avLst/>
+          </a:prstGeom>
+          <a:noFill/>
+          <a:ln/>
+        </p:spPr>
+        <p:txBody>
+          <a:bodyPr wrap="square" lIns="0" tIns="0" rIns="0" bIns="0" rtlCol="0" anchor="ctr"/>
+          <a:lstStyle/>
+          <a:p>
+            <a:pPr algn="ctr" indent="0" marL="0">
+              <a:buNone/>
+            </a:pPr>
+            <a:r>
+              <a:rPr lang="en-US" sz="1000" dirty="0">
+                <a:solidFill>
+                  <a:srgbClr val="003A63"/>
+                </a:solidFill>
+                <a:latin typeface="Aptos" pitchFamily="34" charset="0"/>
+                <a:ea typeface="Aptos" pitchFamily="34" charset="-122"/>
+                <a:cs typeface="Aptos" pitchFamily="34" charset="-120"/>
+              </a:rPr>
+              <a:t>Concept to action</a:t>
+            </a:r>
+            <a:endParaRPr lang="en-US" sz="1000" dirty="0"/>
+          </a:p>
+        </p:txBody>
+      </p:sp>
+      <p:sp>
+        <p:nvSpPr>
+          <p:cNvPr id="18" name="Shape 16"/>
+          <p:cNvSpPr/>
+          <p:nvPr/>
+        </p:nvSpPr>
+        <p:spPr>
+          <a:xfrm>
+            <a:off x="7635240" y="4498848"/>
+            <a:ext cx="3474720" cy="1143000"/>
+          </a:xfrm>
+          <a:prstGeom prst="roundRect">
+            <a:avLst>
+              <a:gd name="adj" fmla="val 9600"/>
             </a:avLst>
           </a:prstGeom>
           <a:solidFill>
@@ -13621,14 +14847,14 @@
       </p:sp>
       <p:sp>
         <p:nvSpPr>
-          <p:cNvPr id="16" name="Text 14"/>
-          <p:cNvSpPr/>
-          <p:nvPr/>
-        </p:nvSpPr>
-        <p:spPr>
-          <a:xfrm>
-            <a:off x="8074152" y="3666744"/>
-            <a:ext cx="2825496" cy="256032"/>
+          <p:cNvPr id="19" name="Text 17"/>
+          <p:cNvSpPr/>
+          <p:nvPr/>
+        </p:nvSpPr>
+        <p:spPr>
+          <a:xfrm>
+            <a:off x="7799832" y="4645152"/>
+            <a:ext cx="3145536" cy="256032"/>
           </a:xfrm>
           <a:prstGeom prst="rect">
             <a:avLst/>
@@ -13652,7 +14878,7 @@
                 <a:ea typeface="Aptos" pitchFamily="34" charset="-122"/>
                 <a:cs typeface="Aptos" pitchFamily="34" charset="-120"/>
               </a:rPr>
-              <a:t>Use this for</a:t>
+              <a:t>What to document</a:t>
             </a:r>
             <a:endParaRPr lang="en-US" sz="1300" dirty="0"/>
           </a:p>
@@ -13660,14 +14886,14 @@
       </p:sp>
       <p:sp>
         <p:nvSpPr>
-          <p:cNvPr id="17" name="Text 15"/>
-          <p:cNvSpPr/>
-          <p:nvPr/>
-        </p:nvSpPr>
-        <p:spPr>
-          <a:xfrm>
-            <a:off x="8074152" y="4023360"/>
-            <a:ext cx="2825496" cy="1097280"/>
+          <p:cNvPr id="20" name="Text 18"/>
+          <p:cNvSpPr/>
+          <p:nvPr/>
+        </p:nvSpPr>
+        <p:spPr>
+          <a:xfrm>
+            <a:off x="7799832" y="5001768"/>
+            <a:ext cx="3145536" cy="502920"/>
           </a:xfrm>
           <a:prstGeom prst="rect">
             <a:avLst/>
@@ -13693,7 +14919,7 @@
                 <a:ea typeface="Aptos" pitchFamily="34" charset="-122"/>
                 <a:cs typeface="Aptos" pitchFamily="34" charset="-120"/>
               </a:rPr>
-              <a:t>Connect the concept to public health decisions, safeguards, documentation, or implementation work.</a:t>
+              <a:t>Connect the concept to public health purpose, responsible use, required safeguards, documentation, and the next action a department should take.</a:t>
             </a:r>
             <a:endParaRPr lang="en-US" sz="1550" dirty="0"/>
           </a:p>
@@ -13867,8 +15093,8 @@
         </p:nvSpPr>
         <p:spPr>
           <a:xfrm>
-            <a:off x="9966960" y="6537960"/>
-            <a:ext cx="1645920" cy="201168"/>
+            <a:off x="9646920" y="6537960"/>
+            <a:ext cx="1965960" cy="201168"/>
           </a:xfrm>
           <a:prstGeom prst="rect">
             <a:avLst/>
@@ -13892,7 +15118,7 @@
                 <a:ea typeface="Aptos" pitchFamily="34" charset="-122"/>
                 <a:cs typeface="Aptos" pitchFamily="34" charset="-120"/>
               </a:rPr>
-              <a:t>Â© Paula Soper</a:t>
+              <a:t>Copyright Paula Soper</a:t>
             </a:r>
             <a:endParaRPr lang="en-US" sz="800" dirty="0"/>
           </a:p>
@@ -13939,14 +15165,257 @@
       </p:sp>
       <p:sp>
         <p:nvSpPr>
-          <p:cNvPr id="8" name="Shape 6"/>
+          <p:cNvPr id="8" name="Text 6"/>
           <p:cNvSpPr/>
           <p:nvPr/>
         </p:nvSpPr>
         <p:spPr>
           <a:xfrm>
             <a:off x="640080" y="658368"/>
-            <a:ext cx="420624" cy="420624"/>
+            <a:ext cx="10881360" cy="713232"/>
+          </a:xfrm>
+          <a:prstGeom prst="rect">
+            <a:avLst/>
+          </a:prstGeom>
+          <a:noFill/>
+          <a:ln/>
+        </p:spPr>
+        <p:txBody>
+          <a:bodyPr wrap="square" lIns="0" tIns="0" rIns="0" bIns="0" rtlCol="0" anchor="ctr">
+            <a:normAutofit/>
+          </a:bodyPr>
+          <a:lstStyle/>
+          <a:p>
+            <a:pPr indent="0" marL="0">
+              <a:buNone/>
+            </a:pPr>
+            <a:r>
+              <a:rPr lang="en-US" sz="3400" b="1" dirty="0">
+                <a:solidFill>
+                  <a:srgbClr val="003A63"/>
+                </a:solidFill>
+                <a:latin typeface="Aptos Display" pitchFamily="34" charset="0"/>
+                <a:ea typeface="Aptos Display" pitchFamily="34" charset="-122"/>
+                <a:cs typeface="Aptos Display" pitchFamily="34" charset="-120"/>
+              </a:rPr>
+              <a:t>Jurisdiction and Agency Policy Note</a:t>
+            </a:r>
+            <a:endParaRPr lang="en-US" sz="3400" dirty="0"/>
+          </a:p>
+        </p:txBody>
+      </p:sp>
+      <p:sp>
+        <p:nvSpPr>
+          <p:cNvPr id="9" name="Text 7"/>
+          <p:cNvSpPr/>
+          <p:nvPr/>
+        </p:nvSpPr>
+        <p:spPr>
+          <a:xfrm>
+            <a:off x="868680" y="1508760"/>
+            <a:ext cx="6309360" cy="4160520"/>
+          </a:xfrm>
+          <a:prstGeom prst="rect">
+            <a:avLst/>
+          </a:prstGeom>
+          <a:noFill/>
+          <a:ln/>
+        </p:spPr>
+        <p:txBody>
+          <a:bodyPr wrap="square" lIns="635" tIns="635" rIns="635" bIns="635" rtlCol="0" anchor="t">
+            <a:normAutofit/>
+          </a:bodyPr>
+          <a:lstStyle/>
+          <a:p>
+            <a:r>
+              <a:rPr lang="en-US" sz="2100" dirty="0">
+                <a:solidFill>
+                  <a:srgbClr val="17364A"/>
+                </a:solidFill>
+                <a:latin typeface="Aptos" pitchFamily="34" charset="0"/>
+                <a:ea typeface="Aptos" pitchFamily="34" charset="-122"/>
+                <a:cs typeface="Aptos" pitchFamily="34" charset="-120"/>
+              </a:rPr>
+              <a:t>This module provides national-level training guidance for public health agencies and partners.</a:t>
+            </a:r>
+            <a:endParaRPr lang="en-US" sz="2100" dirty="0"/>
+          </a:p>
+          <a:p>
+            <a:r>
+              <a:rPr lang="en-US" sz="2100" dirty="0">
+                <a:solidFill>
+                  <a:srgbClr val="17364A"/>
+                </a:solidFill>
+                <a:latin typeface="Aptos" pitchFamily="34" charset="0"/>
+                <a:ea typeface="Aptos" pitchFamily="34" charset="-122"/>
+                <a:cs typeface="Aptos" pitchFamily="34" charset="-120"/>
+              </a:rPr>
+              <a:t>It is not legal advice and does not replace review by agency legal counsel, privacy officers,.</a:t>
+            </a:r>
+            <a:endParaRPr lang="en-US" sz="2100" dirty="0"/>
+          </a:p>
+          <a:p>
+            <a:r>
+              <a:rPr lang="en-US" sz="2100" dirty="0">
+                <a:solidFill>
+                  <a:srgbClr val="17364A"/>
+                </a:solidFill>
+                <a:latin typeface="Aptos" pitchFamily="34" charset="0"/>
+                <a:ea typeface="Aptos" pitchFamily="34" charset="-122"/>
+                <a:cs typeface="Aptos" pitchFamily="34" charset="-120"/>
+              </a:rPr>
+              <a:t>Requirements may vary by state, locality, territory, Tribe, agency, funding source, data-sharing.</a:t>
+            </a:r>
+            <a:endParaRPr lang="en-US" sz="2100" dirty="0"/>
+          </a:p>
+        </p:txBody>
+      </p:sp>
+      <p:sp>
+        <p:nvSpPr>
+          <p:cNvPr id="10" name="Shape 8"/>
+          <p:cNvSpPr/>
+          <p:nvPr/>
+        </p:nvSpPr>
+        <p:spPr>
+          <a:xfrm>
+            <a:off x="7635240" y="1325880"/>
+            <a:ext cx="3474720" cy="1325880"/>
+          </a:xfrm>
+          <a:prstGeom prst="roundRect">
+            <a:avLst>
+              <a:gd name="adj" fmla="val 8276"/>
+            </a:avLst>
+          </a:prstGeom>
+          <a:solidFill>
+            <a:srgbClr val="EEF8ED"/>
+          </a:solidFill>
+          <a:ln w="12700">
+            <a:solidFill>
+              <a:srgbClr val="B9D7E6"/>
+            </a:solidFill>
+            <a:prstDash val="solid"/>
+          </a:ln>
+        </p:spPr>
+      </p:sp>
+      <p:sp>
+        <p:nvSpPr>
+          <p:cNvPr id="11" name="Text 9"/>
+          <p:cNvSpPr/>
+          <p:nvPr/>
+        </p:nvSpPr>
+        <p:spPr>
+          <a:xfrm>
+            <a:off x="7799832" y="1472184"/>
+            <a:ext cx="3145536" cy="256032"/>
+          </a:xfrm>
+          <a:prstGeom prst="rect">
+            <a:avLst/>
+          </a:prstGeom>
+          <a:noFill/>
+          <a:ln/>
+        </p:spPr>
+        <p:txBody>
+          <a:bodyPr wrap="square" lIns="0" tIns="0" rIns="0" bIns="0" rtlCol="0" anchor="ctr"/>
+          <a:lstStyle/>
+          <a:p>
+            <a:pPr indent="0" marL="0">
+              <a:buNone/>
+            </a:pPr>
+            <a:r>
+              <a:rPr lang="en-US" sz="1300" b="1" dirty="0">
+                <a:solidFill>
+                  <a:srgbClr val="0068B7"/>
+                </a:solidFill>
+                <a:latin typeface="Aptos" pitchFamily="34" charset="0"/>
+                <a:ea typeface="Aptos" pitchFamily="34" charset="-122"/>
+                <a:cs typeface="Aptos" pitchFamily="34" charset="-120"/>
+              </a:rPr>
+              <a:t>Governance lens</a:t>
+            </a:r>
+            <a:endParaRPr lang="en-US" sz="1300" dirty="0"/>
+          </a:p>
+        </p:txBody>
+      </p:sp>
+      <p:sp>
+        <p:nvSpPr>
+          <p:cNvPr id="12" name="Text 10"/>
+          <p:cNvSpPr/>
+          <p:nvPr/>
+        </p:nvSpPr>
+        <p:spPr>
+          <a:xfrm>
+            <a:off x="7799832" y="1828800"/>
+            <a:ext cx="3145536" cy="685800"/>
+          </a:xfrm>
+          <a:prstGeom prst="rect">
+            <a:avLst/>
+          </a:prstGeom>
+          <a:noFill/>
+          <a:ln/>
+        </p:spPr>
+        <p:txBody>
+          <a:bodyPr wrap="square" lIns="0" tIns="0" rIns="0" bIns="0" rtlCol="0" anchor="t">
+            <a:normAutofit/>
+          </a:bodyPr>
+          <a:lstStyle/>
+          <a:p>
+            <a:pPr indent="0" marL="0">
+              <a:buNone/>
+            </a:pPr>
+            <a:r>
+              <a:rPr lang="en-US" sz="1550" dirty="0">
+                <a:solidFill>
+                  <a:srgbClr val="17364A"/>
+                </a:solidFill>
+                <a:latin typeface="Aptos" pitchFamily="34" charset="0"/>
+                <a:ea typeface="Aptos" pitchFamily="34" charset="-122"/>
+                <a:cs typeface="Aptos" pitchFamily="34" charset="-120"/>
+              </a:rPr>
+              <a:t>This module provides national-level training guidance for public health agencies and partners.</a:t>
+            </a:r>
+            <a:endParaRPr lang="en-US" sz="1550" dirty="0"/>
+          </a:p>
+        </p:txBody>
+      </p:sp>
+      <p:sp>
+        <p:nvSpPr>
+          <p:cNvPr id="13" name="Shape 11"/>
+          <p:cNvSpPr/>
+          <p:nvPr/>
+        </p:nvSpPr>
+        <p:spPr>
+          <a:xfrm>
+            <a:off x="7635240" y="2788920"/>
+            <a:ext cx="3474720" cy="1536192"/>
+          </a:xfrm>
+          <a:prstGeom prst="roundRect">
+            <a:avLst>
+              <a:gd name="adj" fmla="val 7143"/>
+            </a:avLst>
+          </a:prstGeom>
+          <a:solidFill>
+            <a:srgbClr val="FFFFFF">
+              <a:alpha val="88000"/>
+            </a:srgbClr>
+          </a:solidFill>
+          <a:ln w="12700">
+            <a:solidFill>
+              <a:srgbClr val="D6E8F2"/>
+            </a:solidFill>
+            <a:prstDash val="solid"/>
+          </a:ln>
+        </p:spPr>
+      </p:sp>
+      <p:sp>
+        <p:nvSpPr>
+          <p:cNvPr id="14" name="Shape 12"/>
+          <p:cNvSpPr/>
+          <p:nvPr/>
+        </p:nvSpPr>
+        <p:spPr>
+          <a:xfrm>
+            <a:off x="7891272" y="3108960"/>
+            <a:ext cx="566928" cy="566928"/>
           </a:xfrm>
           <a:prstGeom prst="ellipse">
             <a:avLst/>
@@ -13964,172 +15433,24 @@
       </p:sp>
       <p:sp>
         <p:nvSpPr>
-          <p:cNvPr id="9" name="Text 7"/>
-          <p:cNvSpPr/>
-          <p:nvPr/>
-        </p:nvSpPr>
-        <p:spPr>
-          <a:xfrm>
-            <a:off x="640080" y="731520"/>
-            <a:ext cx="420624" cy="164592"/>
-          </a:xfrm>
-          <a:prstGeom prst="rect">
-            <a:avLst/>
-          </a:prstGeom>
-          <a:noFill/>
-          <a:ln/>
-        </p:spPr>
-        <p:txBody>
-          <a:bodyPr wrap="square" lIns="0" tIns="0" rIns="0" bIns="0" rtlCol="0" anchor="ctr"/>
-          <a:lstStyle/>
-          <a:p>
-            <a:pPr algn="ctr" indent="0" marL="0">
-              <a:buNone/>
-            </a:pPr>
-            <a:r>
-              <a:rPr lang="en-US" sz="1100" b="1" dirty="0">
-                <a:solidFill>
-                  <a:srgbClr val="FFFFFF"/>
-                </a:solidFill>
-                <a:latin typeface="Aptos" pitchFamily="34" charset="0"/>
-                <a:ea typeface="Aptos" pitchFamily="34" charset="-122"/>
-                <a:cs typeface="Aptos" pitchFamily="34" charset="-120"/>
-              </a:rPr>
-              <a:t>3</a:t>
-            </a:r>
-            <a:endParaRPr lang="en-US" sz="1100" dirty="0"/>
-          </a:p>
-        </p:txBody>
-      </p:sp>
-      <p:sp>
-        <p:nvSpPr>
-          <p:cNvPr id="10" name="Text 8"/>
-          <p:cNvSpPr/>
-          <p:nvPr/>
-        </p:nvSpPr>
-        <p:spPr>
-          <a:xfrm>
-            <a:off x="640080" y="621792"/>
-            <a:ext cx="10881360" cy="713232"/>
-          </a:xfrm>
-          <a:prstGeom prst="rect">
-            <a:avLst/>
-          </a:prstGeom>
-          <a:noFill/>
-          <a:ln/>
-        </p:spPr>
-        <p:txBody>
-          <a:bodyPr wrap="square" lIns="0" tIns="0" rIns="0" bIns="0" rtlCol="0" anchor="ctr">
-            <a:normAutofit/>
-          </a:bodyPr>
-          <a:lstStyle/>
-          <a:p>
-            <a:pPr indent="0" marL="0">
-              <a:buNone/>
-            </a:pPr>
-            <a:r>
-              <a:rPr lang="en-US" sz="3400" b="1" dirty="0">
-                <a:solidFill>
-                  <a:srgbClr val="003A63"/>
-                </a:solidFill>
-                <a:latin typeface="Aptos Display" pitchFamily="34" charset="0"/>
-                <a:ea typeface="Aptos Display" pitchFamily="34" charset="-122"/>
-                <a:cs typeface="Aptos Display" pitchFamily="34" charset="-120"/>
-              </a:rPr>
-              <a:t>Jurisdiction and Agency Policy Note</a:t>
-            </a:r>
-            <a:endParaRPr lang="en-US" sz="3400" dirty="0"/>
-          </a:p>
-        </p:txBody>
-      </p:sp>
-      <p:sp>
-        <p:nvSpPr>
-          <p:cNvPr id="11" name="Text 9"/>
-          <p:cNvSpPr/>
-          <p:nvPr/>
-        </p:nvSpPr>
-        <p:spPr>
-          <a:xfrm>
-            <a:off x="868680" y="1508760"/>
-            <a:ext cx="6537960" cy="4160520"/>
-          </a:xfrm>
-          <a:prstGeom prst="rect">
-            <a:avLst/>
-          </a:prstGeom>
-          <a:noFill/>
-          <a:ln/>
-        </p:spPr>
-        <p:txBody>
-          <a:bodyPr wrap="square" lIns="635" tIns="635" rIns="635" bIns="635" rtlCol="0" anchor="t">
-            <a:normAutofit/>
-          </a:bodyPr>
-          <a:lstStyle/>
-          <a:p>
-            <a:r>
-              <a:rPr lang="en-US" sz="2100" dirty="0">
-                <a:solidFill>
-                  <a:srgbClr val="17364A"/>
-                </a:solidFill>
-                <a:latin typeface="Aptos" pitchFamily="34" charset="0"/>
-                <a:ea typeface="Aptos" pitchFamily="34" charset="-122"/>
-                <a:cs typeface="Aptos" pitchFamily="34" charset="-120"/>
-              </a:rPr>
-              <a:t>This module provides national-level training guidance for public health agencies and partners.</a:t>
-            </a:r>
-            <a:endParaRPr lang="en-US" sz="2100" dirty="0"/>
-          </a:p>
-          <a:p>
-            <a:r>
-              <a:rPr lang="en-US" sz="2100" dirty="0">
-                <a:solidFill>
-                  <a:srgbClr val="17364A"/>
-                </a:solidFill>
-                <a:latin typeface="Aptos" pitchFamily="34" charset="0"/>
-                <a:ea typeface="Aptos" pitchFamily="34" charset="-122"/>
-                <a:cs typeface="Aptos" pitchFamily="34" charset="-120"/>
-              </a:rPr>
-              <a:t>It is not legal advice and does not replace review by agency legal counsel, privacy officers,.</a:t>
-            </a:r>
-            <a:endParaRPr lang="en-US" sz="2100" dirty="0"/>
-          </a:p>
-          <a:p>
-            <a:r>
-              <a:rPr lang="en-US" sz="2100" dirty="0">
-                <a:solidFill>
-                  <a:srgbClr val="17364A"/>
-                </a:solidFill>
-                <a:latin typeface="Aptos" pitchFamily="34" charset="0"/>
-                <a:ea typeface="Aptos" pitchFamily="34" charset="-122"/>
-                <a:cs typeface="Aptos" pitchFamily="34" charset="-120"/>
-              </a:rPr>
-              <a:t>Requirements may vary by state, locality, territory, Tribe, agency, funding source, data-sharing.</a:t>
-            </a:r>
-            <a:endParaRPr lang="en-US" sz="2100" dirty="0"/>
-          </a:p>
-        </p:txBody>
-      </p:sp>
-      <p:sp>
-        <p:nvSpPr>
-          <p:cNvPr id="12" name="Shape 10"/>
-          <p:cNvSpPr/>
-          <p:nvPr/>
-        </p:nvSpPr>
-        <p:spPr>
-          <a:xfrm>
-            <a:off x="7909560" y="1417320"/>
-            <a:ext cx="3154680" cy="1828800"/>
-          </a:xfrm>
-          <a:prstGeom prst="roundRect">
-            <a:avLst>
-              <a:gd name="adj" fmla="val 6000"/>
-            </a:avLst>
+          <p:cNvPr id="15" name="Shape 13"/>
+          <p:cNvSpPr/>
+          <p:nvPr/>
+        </p:nvSpPr>
+        <p:spPr>
+          <a:xfrm>
+            <a:off x="10287000" y="3108960"/>
+            <a:ext cx="566928" cy="566928"/>
+          </a:xfrm>
+          <a:prstGeom prst="ellipse">
+            <a:avLst/>
           </a:prstGeom>
           <a:solidFill>
-            <a:srgbClr val="EEF8ED"/>
+            <a:srgbClr val="2F8A28"/>
           </a:solidFill>
           <a:ln w="12700">
             <a:solidFill>
-              <a:srgbClr val="B9D7E6"/>
+              <a:srgbClr val="2F8A28"/>
             </a:solidFill>
             <a:prstDash val="solid"/>
           </a:ln>
@@ -14137,14 +15458,108 @@
       </p:sp>
       <p:sp>
         <p:nvSpPr>
-          <p:cNvPr id="13" name="Text 11"/>
-          <p:cNvSpPr/>
-          <p:nvPr/>
-        </p:nvSpPr>
-        <p:spPr>
-          <a:xfrm>
-            <a:off x="8074152" y="1563624"/>
-            <a:ext cx="2825496" cy="256032"/>
+          <p:cNvPr id="16" name="Shape 14"/>
+          <p:cNvSpPr/>
+          <p:nvPr/>
+        </p:nvSpPr>
+        <p:spPr>
+          <a:xfrm>
+            <a:off x="9089136" y="3456432"/>
+            <a:ext cx="566928" cy="566928"/>
+          </a:xfrm>
+          <a:prstGeom prst="ellipse">
+            <a:avLst/>
+          </a:prstGeom>
+          <a:solidFill>
+            <a:srgbClr val="6A4CA3"/>
+          </a:solidFill>
+          <a:ln w="12700">
+            <a:solidFill>
+              <a:srgbClr val="6A4CA3"/>
+            </a:solidFill>
+            <a:prstDash val="solid"/>
+          </a:ln>
+        </p:spPr>
+      </p:sp>
+      <p:sp>
+        <p:nvSpPr>
+          <p:cNvPr id="17" name="Shape 15"/>
+          <p:cNvSpPr/>
+          <p:nvPr/>
+        </p:nvSpPr>
+        <p:spPr>
+          <a:xfrm>
+            <a:off x="8385048" y="3419856"/>
+            <a:ext cx="1975104" cy="0"/>
+          </a:xfrm>
+          <a:prstGeom prst="line">
+            <a:avLst/>
+          </a:prstGeom>
+          <a:noFill/>
+          <a:ln w="25400">
+            <a:solidFill>
+              <a:srgbClr val="8ABBD8"/>
+            </a:solidFill>
+            <a:prstDash val="solid"/>
+          </a:ln>
+        </p:spPr>
+      </p:sp>
+      <p:sp>
+        <p:nvSpPr>
+          <p:cNvPr id="18" name="Shape 16"/>
+          <p:cNvSpPr/>
+          <p:nvPr/>
+        </p:nvSpPr>
+        <p:spPr>
+          <a:xfrm>
+            <a:off x="8202168" y="3630168"/>
+            <a:ext cx="1170432" cy="118872"/>
+          </a:xfrm>
+          <a:prstGeom prst="line">
+            <a:avLst/>
+          </a:prstGeom>
+          <a:noFill/>
+          <a:ln w="25400">
+            <a:solidFill>
+              <a:srgbClr val="8ABBD8"/>
+            </a:solidFill>
+            <a:prstDash val="solid"/>
+          </a:ln>
+        </p:spPr>
+      </p:sp>
+      <p:sp>
+        <p:nvSpPr>
+          <p:cNvPr id="19" name="Shape 17"/>
+          <p:cNvSpPr/>
+          <p:nvPr/>
+        </p:nvSpPr>
+        <p:spPr>
+          <a:xfrm>
+            <a:off x="10543032" y="3630168"/>
+            <a:ext cx="-1170432" cy="118872"/>
+          </a:xfrm>
+          <a:prstGeom prst="line">
+            <a:avLst/>
+          </a:prstGeom>
+          <a:noFill/>
+          <a:ln w="25400">
+            <a:solidFill>
+              <a:srgbClr val="8ABBD8"/>
+            </a:solidFill>
+            <a:prstDash val="solid"/>
+          </a:ln>
+        </p:spPr>
+      </p:sp>
+      <p:sp>
+        <p:nvSpPr>
+          <p:cNvPr id="20" name="Text 18"/>
+          <p:cNvSpPr/>
+          <p:nvPr/>
+        </p:nvSpPr>
+        <p:spPr>
+          <a:xfrm>
+            <a:off x="7863840" y="4069080"/>
+            <a:ext cx="3017520" cy="164592"/>
           </a:xfrm>
           <a:prstGeom prst="rect">
             <a:avLst/>
@@ -14156,79 +15571,38 @@
           <a:bodyPr wrap="square" lIns="0" tIns="0" rIns="0" bIns="0" rtlCol="0" anchor="ctr"/>
           <a:lstStyle/>
           <a:p>
-            <a:pPr indent="0" marL="0">
-              <a:buNone/>
-            </a:pPr>
-            <a:r>
-              <a:rPr lang="en-US" sz="1300" b="1" dirty="0">
-                <a:solidFill>
-                  <a:srgbClr val="0068B7"/>
-                </a:solidFill>
-                <a:latin typeface="Aptos" pitchFamily="34" charset="0"/>
-                <a:ea typeface="Aptos" pitchFamily="34" charset="-122"/>
-                <a:cs typeface="Aptos" pitchFamily="34" charset="-120"/>
-              </a:rPr>
-              <a:t>Key idea</a:t>
-            </a:r>
-            <a:endParaRPr lang="en-US" sz="1300" dirty="0"/>
-          </a:p>
-        </p:txBody>
-      </p:sp>
-      <p:sp>
-        <p:nvSpPr>
-          <p:cNvPr id="14" name="Text 12"/>
-          <p:cNvSpPr/>
-          <p:nvPr/>
-        </p:nvSpPr>
-        <p:spPr>
-          <a:xfrm>
-            <a:off x="8074152" y="1920240"/>
-            <a:ext cx="2825496" cy="1188720"/>
-          </a:xfrm>
-          <a:prstGeom prst="rect">
-            <a:avLst/>
-          </a:prstGeom>
-          <a:noFill/>
-          <a:ln/>
-        </p:spPr>
-        <p:txBody>
-          <a:bodyPr wrap="square" lIns="0" tIns="0" rIns="0" bIns="0" rtlCol="0" anchor="t">
-            <a:normAutofit/>
-          </a:bodyPr>
-          <a:lstStyle/>
-          <a:p>
-            <a:pPr indent="0" marL="0">
-              <a:buNone/>
-            </a:pPr>
-            <a:r>
-              <a:rPr lang="en-US" sz="1550" dirty="0">
-                <a:solidFill>
-                  <a:srgbClr val="17364A"/>
-                </a:solidFill>
-                <a:latin typeface="Aptos" pitchFamily="34" charset="0"/>
-                <a:ea typeface="Aptos" pitchFamily="34" charset="-122"/>
-                <a:cs typeface="Aptos" pitchFamily="34" charset="-120"/>
-              </a:rPr>
-              <a:t>This module provides national-level training guidance for public health agencies and partners.</a:t>
-            </a:r>
-            <a:endParaRPr lang="en-US" sz="1550" dirty="0"/>
-          </a:p>
-        </p:txBody>
-      </p:sp>
-      <p:sp>
-        <p:nvSpPr>
-          <p:cNvPr id="15" name="Shape 13"/>
-          <p:cNvSpPr/>
-          <p:nvPr/>
-        </p:nvSpPr>
-        <p:spPr>
-          <a:xfrm>
-            <a:off x="7909560" y="3520440"/>
-            <a:ext cx="3154680" cy="1737360"/>
+            <a:pPr algn="ctr" indent="0" marL="0">
+              <a:buNone/>
+            </a:pPr>
+            <a:r>
+              <a:rPr lang="en-US" sz="900" b="1" dirty="0">
+                <a:solidFill>
+                  <a:srgbClr val="003A63"/>
+                </a:solidFill>
+                <a:latin typeface="Aptos" pitchFamily="34" charset="0"/>
+                <a:ea typeface="Aptos" pitchFamily="34" charset="-122"/>
+                <a:cs typeface="Aptos" pitchFamily="34" charset="-120"/>
+              </a:rPr>
+              <a:t>Decision rights</a:t>
+            </a:r>
+            <a:endParaRPr lang="en-US" sz="900" dirty="0"/>
+          </a:p>
+        </p:txBody>
+      </p:sp>
+      <p:sp>
+        <p:nvSpPr>
+          <p:cNvPr id="21" name="Shape 19"/>
+          <p:cNvSpPr/>
+          <p:nvPr/>
+        </p:nvSpPr>
+        <p:spPr>
+          <a:xfrm>
+            <a:off x="7635240" y="4498848"/>
+            <a:ext cx="3474720" cy="1143000"/>
           </a:xfrm>
           <a:prstGeom prst="roundRect">
             <a:avLst>
-              <a:gd name="adj" fmla="val 6316"/>
+              <a:gd name="adj" fmla="val 9600"/>
             </a:avLst>
           </a:prstGeom>
           <a:solidFill>
@@ -14244,14 +15618,14 @@
       </p:sp>
       <p:sp>
         <p:nvSpPr>
-          <p:cNvPr id="16" name="Text 14"/>
-          <p:cNvSpPr/>
-          <p:nvPr/>
-        </p:nvSpPr>
-        <p:spPr>
-          <a:xfrm>
-            <a:off x="8074152" y="3666744"/>
-            <a:ext cx="2825496" cy="256032"/>
+          <p:cNvPr id="22" name="Text 20"/>
+          <p:cNvSpPr/>
+          <p:nvPr/>
+        </p:nvSpPr>
+        <p:spPr>
+          <a:xfrm>
+            <a:off x="7799832" y="4645152"/>
+            <a:ext cx="3145536" cy="256032"/>
           </a:xfrm>
           <a:prstGeom prst="rect">
             <a:avLst/>
@@ -14275,7 +15649,7 @@
                 <a:ea typeface="Aptos" pitchFamily="34" charset="-122"/>
                 <a:cs typeface="Aptos" pitchFamily="34" charset="-120"/>
               </a:rPr>
-              <a:t>Use this for</a:t>
+              <a:t>What to document</a:t>
             </a:r>
             <a:endParaRPr lang="en-US" sz="1300" dirty="0"/>
           </a:p>
@@ -14283,14 +15657,14 @@
       </p:sp>
       <p:sp>
         <p:nvSpPr>
-          <p:cNvPr id="17" name="Text 15"/>
-          <p:cNvSpPr/>
-          <p:nvPr/>
-        </p:nvSpPr>
-        <p:spPr>
-          <a:xfrm>
-            <a:off x="8074152" y="4023360"/>
-            <a:ext cx="2825496" cy="1097280"/>
+          <p:cNvPr id="23" name="Text 21"/>
+          <p:cNvSpPr/>
+          <p:nvPr/>
+        </p:nvSpPr>
+        <p:spPr>
+          <a:xfrm>
+            <a:off x="7799832" y="5001768"/>
+            <a:ext cx="3145536" cy="502920"/>
           </a:xfrm>
           <a:prstGeom prst="rect">
             <a:avLst/>
@@ -14316,7 +15690,7 @@
                 <a:ea typeface="Aptos" pitchFamily="34" charset="-122"/>
                 <a:cs typeface="Aptos" pitchFamily="34" charset="-120"/>
               </a:rPr>
-              <a:t>Connect the concept to public health decisions, safeguards, documentation, or implementation work.</a:t>
+              <a:t>Translate this concept into clear decision rights, review steps, documentation expectations, and escalation paths before an AI-supported workflow is approved.</a:t>
             </a:r>
             <a:endParaRPr lang="en-US" sz="1550" dirty="0"/>
           </a:p>
@@ -14490,8 +15864,8 @@
         </p:nvSpPr>
         <p:spPr>
           <a:xfrm>
-            <a:off x="9966960" y="6537960"/>
-            <a:ext cx="1645920" cy="201168"/>
+            <a:off x="9646920" y="6537960"/>
+            <a:ext cx="1965960" cy="201168"/>
           </a:xfrm>
           <a:prstGeom prst="rect">
             <a:avLst/>
@@ -14515,7 +15889,7 @@
                 <a:ea typeface="Aptos" pitchFamily="34" charset="-122"/>
                 <a:cs typeface="Aptos" pitchFamily="34" charset="-120"/>
               </a:rPr>
-              <a:t>Â© Paula Soper</a:t>
+              <a:t>Copyright Paula Soper</a:t>
             </a:r>
             <a:endParaRPr lang="en-US" sz="800" dirty="0"/>
           </a:p>
@@ -14562,77 +15936,13 @@
       </p:sp>
       <p:sp>
         <p:nvSpPr>
-          <p:cNvPr id="8" name="Shape 6"/>
+          <p:cNvPr id="8" name="Text 6"/>
           <p:cNvSpPr/>
           <p:nvPr/>
         </p:nvSpPr>
         <p:spPr>
           <a:xfrm>
             <a:off x="640080" y="658368"/>
-            <a:ext cx="420624" cy="420624"/>
-          </a:xfrm>
-          <a:prstGeom prst="ellipse">
-            <a:avLst/>
-          </a:prstGeom>
-          <a:solidFill>
-            <a:srgbClr val="0068B7"/>
-          </a:solidFill>
-          <a:ln w="12700">
-            <a:solidFill>
-              <a:srgbClr val="0068B7"/>
-            </a:solidFill>
-            <a:prstDash val="solid"/>
-          </a:ln>
-        </p:spPr>
-      </p:sp>
-      <p:sp>
-        <p:nvSpPr>
-          <p:cNvPr id="9" name="Text 7"/>
-          <p:cNvSpPr/>
-          <p:nvPr/>
-        </p:nvSpPr>
-        <p:spPr>
-          <a:xfrm>
-            <a:off x="640080" y="731520"/>
-            <a:ext cx="420624" cy="164592"/>
-          </a:xfrm>
-          <a:prstGeom prst="rect">
-            <a:avLst/>
-          </a:prstGeom>
-          <a:noFill/>
-          <a:ln/>
-        </p:spPr>
-        <p:txBody>
-          <a:bodyPr wrap="square" lIns="0" tIns="0" rIns="0" bIns="0" rtlCol="0" anchor="ctr"/>
-          <a:lstStyle/>
-          <a:p>
-            <a:pPr algn="ctr" indent="0" marL="0">
-              <a:buNone/>
-            </a:pPr>
-            <a:r>
-              <a:rPr lang="en-US" sz="1100" b="1" dirty="0">
-                <a:solidFill>
-                  <a:srgbClr val="FFFFFF"/>
-                </a:solidFill>
-                <a:latin typeface="Aptos" pitchFamily="34" charset="0"/>
-                <a:ea typeface="Aptos" pitchFamily="34" charset="-122"/>
-                <a:cs typeface="Aptos" pitchFamily="34" charset="-120"/>
-              </a:rPr>
-              <a:t>4</a:t>
-            </a:r>
-            <a:endParaRPr lang="en-US" sz="1100" dirty="0"/>
-          </a:p>
-        </p:txBody>
-      </p:sp>
-      <p:sp>
-        <p:nvSpPr>
-          <p:cNvPr id="10" name="Text 8"/>
-          <p:cNvSpPr/>
-          <p:nvPr/>
-        </p:nvSpPr>
-        <p:spPr>
-          <a:xfrm>
-            <a:off x="640080" y="621792"/>
             <a:ext cx="10881360" cy="713232"/>
           </a:xfrm>
           <a:prstGeom prst="rect">
@@ -14667,14 +15977,14 @@
       </p:sp>
       <p:sp>
         <p:nvSpPr>
-          <p:cNvPr id="11" name="Text 9"/>
+          <p:cNvPr id="9" name="Text 7"/>
           <p:cNvSpPr/>
           <p:nvPr/>
         </p:nvSpPr>
         <p:spPr>
           <a:xfrm>
             <a:off x="868680" y="1508760"/>
-            <a:ext cx="6537960" cy="4160520"/>
+            <a:ext cx="6309360" cy="4160520"/>
           </a:xfrm>
           <a:prstGeom prst="rect">
             <a:avLst/>
@@ -14733,18 +16043,18 @@
       </p:sp>
       <p:sp>
         <p:nvSpPr>
-          <p:cNvPr id="12" name="Shape 10"/>
-          <p:cNvSpPr/>
-          <p:nvPr/>
-        </p:nvSpPr>
-        <p:spPr>
-          <a:xfrm>
-            <a:off x="7909560" y="1417320"/>
-            <a:ext cx="3154680" cy="1828800"/>
+          <p:cNvPr id="10" name="Shape 8"/>
+          <p:cNvSpPr/>
+          <p:nvPr/>
+        </p:nvSpPr>
+        <p:spPr>
+          <a:xfrm>
+            <a:off x="7635240" y="1325880"/>
+            <a:ext cx="3474720" cy="1325880"/>
           </a:xfrm>
           <a:prstGeom prst="roundRect">
             <a:avLst>
-              <a:gd name="adj" fmla="val 6000"/>
+              <a:gd name="adj" fmla="val 8276"/>
             </a:avLst>
           </a:prstGeom>
           <a:solidFill>
@@ -14760,14 +16070,14 @@
       </p:sp>
       <p:sp>
         <p:nvSpPr>
-          <p:cNvPr id="13" name="Text 11"/>
-          <p:cNvSpPr/>
-          <p:nvPr/>
-        </p:nvSpPr>
-        <p:spPr>
-          <a:xfrm>
-            <a:off x="8074152" y="1563624"/>
-            <a:ext cx="2825496" cy="256032"/>
+          <p:cNvPr id="11" name="Text 9"/>
+          <p:cNvSpPr/>
+          <p:nvPr/>
+        </p:nvSpPr>
+        <p:spPr>
+          <a:xfrm>
+            <a:off x="7799832" y="1472184"/>
+            <a:ext cx="3145536" cy="256032"/>
           </a:xfrm>
           <a:prstGeom prst="rect">
             <a:avLst/>
@@ -14791,7 +16101,7 @@
                 <a:ea typeface="Aptos" pitchFamily="34" charset="-122"/>
                 <a:cs typeface="Aptos" pitchFamily="34" charset="-120"/>
               </a:rPr>
-              <a:t>Key idea</a:t>
+              <a:t>Governance lens</a:t>
             </a:r>
             <a:endParaRPr lang="en-US" sz="1300" dirty="0"/>
           </a:p>
@@ -14799,14 +16109,14 @@
       </p:sp>
       <p:sp>
         <p:nvSpPr>
-          <p:cNvPr id="14" name="Text 12"/>
-          <p:cNvSpPr/>
-          <p:nvPr/>
-        </p:nvSpPr>
-        <p:spPr>
-          <a:xfrm>
-            <a:off x="8074152" y="1920240"/>
-            <a:ext cx="2825496" cy="1188720"/>
+          <p:cNvPr id="12" name="Text 10"/>
+          <p:cNvSpPr/>
+          <p:nvPr/>
+        </p:nvSpPr>
+        <p:spPr>
+          <a:xfrm>
+            <a:off x="7799832" y="1828800"/>
+            <a:ext cx="3145536" cy="685800"/>
           </a:xfrm>
           <a:prstGeom prst="rect">
             <a:avLst/>
@@ -14840,18 +16150,159 @@
       </p:sp>
       <p:sp>
         <p:nvSpPr>
-          <p:cNvPr id="15" name="Shape 13"/>
-          <p:cNvSpPr/>
-          <p:nvPr/>
-        </p:nvSpPr>
-        <p:spPr>
-          <a:xfrm>
-            <a:off x="7909560" y="3520440"/>
-            <a:ext cx="3154680" cy="1737360"/>
+          <p:cNvPr id="13" name="Shape 11"/>
+          <p:cNvSpPr/>
+          <p:nvPr/>
+        </p:nvSpPr>
+        <p:spPr>
+          <a:xfrm>
+            <a:off x="7635240" y="2788920"/>
+            <a:ext cx="3474720" cy="1536192"/>
           </a:xfrm>
           <a:prstGeom prst="roundRect">
             <a:avLst>
-              <a:gd name="adj" fmla="val 6316"/>
+              <a:gd name="adj" fmla="val 7143"/>
+            </a:avLst>
+          </a:prstGeom>
+          <a:solidFill>
+            <a:srgbClr val="FFFFFF">
+              <a:alpha val="88000"/>
+            </a:srgbClr>
+          </a:solidFill>
+          <a:ln w="12700">
+            <a:solidFill>
+              <a:srgbClr val="D6E8F2"/>
+            </a:solidFill>
+            <a:prstDash val="solid"/>
+          </a:ln>
+        </p:spPr>
+      </p:sp>
+      <p:sp>
+        <p:nvSpPr>
+          <p:cNvPr id="14" name="Shape 12"/>
+          <p:cNvSpPr/>
+          <p:nvPr/>
+        </p:nvSpPr>
+        <p:spPr>
+          <a:xfrm>
+            <a:off x="8074152" y="3291840"/>
+            <a:ext cx="2596896" cy="749808"/>
+          </a:xfrm>
+          <a:prstGeom prst="rect">
+            <a:avLst/>
+          </a:prstGeom>
+          <a:solidFill>
+            <a:srgbClr val="EAF6F8"/>
+          </a:solidFill>
+          <a:ln w="12700">
+            <a:solidFill>
+              <a:srgbClr val="8ABBD8"/>
+            </a:solidFill>
+            <a:prstDash val="solid"/>
+          </a:ln>
+        </p:spPr>
+      </p:sp>
+      <p:sp>
+        <p:nvSpPr>
+          <p:cNvPr id="15" name="Shape 13"/>
+          <p:cNvSpPr/>
+          <p:nvPr/>
+        </p:nvSpPr>
+        <p:spPr>
+          <a:xfrm>
+            <a:off x="8202168" y="3721608"/>
+            <a:ext cx="2340864" cy="0"/>
+          </a:xfrm>
+          <a:prstGeom prst="line">
+            <a:avLst/>
+          </a:prstGeom>
+          <a:noFill/>
+          <a:ln w="19050">
+            <a:solidFill>
+              <a:srgbClr val="0068B7"/>
+            </a:solidFill>
+            <a:prstDash val="solid"/>
+          </a:ln>
+        </p:spPr>
+      </p:sp>
+      <p:sp>
+        <p:nvSpPr>
+          <p:cNvPr id="16" name="Shape 14"/>
+          <p:cNvSpPr/>
+          <p:nvPr/>
+        </p:nvSpPr>
+        <p:spPr>
+          <a:xfrm>
+            <a:off x="9198864" y="4206240"/>
+            <a:ext cx="347472" cy="347472"/>
+          </a:xfrm>
+          <a:prstGeom prst="ellipse">
+            <a:avLst/>
+          </a:prstGeom>
+          <a:solidFill>
+            <a:srgbClr val="2F8A28"/>
+          </a:solidFill>
+          <a:ln w="12700">
+            <a:solidFill>
+              <a:srgbClr val="2F8A28"/>
+            </a:solidFill>
+            <a:prstDash val="solid"/>
+          </a:ln>
+        </p:spPr>
+      </p:sp>
+      <p:sp>
+        <p:nvSpPr>
+          <p:cNvPr id="17" name="Text 15"/>
+          <p:cNvSpPr/>
+          <p:nvPr/>
+        </p:nvSpPr>
+        <p:spPr>
+          <a:xfrm>
+            <a:off x="7909560" y="3977640"/>
+            <a:ext cx="2926080" cy="182880"/>
+          </a:xfrm>
+          <a:prstGeom prst="rect">
+            <a:avLst/>
+          </a:prstGeom>
+          <a:noFill/>
+          <a:ln/>
+        </p:spPr>
+        <p:txBody>
+          <a:bodyPr wrap="square" lIns="0" tIns="0" rIns="0" bIns="0" rtlCol="0" anchor="ctr"/>
+          <a:lstStyle/>
+          <a:p>
+            <a:pPr algn="ctr" indent="0" marL="0">
+              <a:buNone/>
+            </a:pPr>
+            <a:r>
+              <a:rPr lang="en-US" sz="1000" dirty="0">
+                <a:solidFill>
+                  <a:srgbClr val="003A63"/>
+                </a:solidFill>
+                <a:latin typeface="Aptos" pitchFamily="34" charset="0"/>
+                <a:ea typeface="Aptos" pitchFamily="34" charset="-122"/>
+                <a:cs typeface="Aptos" pitchFamily="34" charset="-120"/>
+              </a:rPr>
+              <a:t>Concept to action</a:t>
+            </a:r>
+            <a:endParaRPr lang="en-US" sz="1000" dirty="0"/>
+          </a:p>
+        </p:txBody>
+      </p:sp>
+      <p:sp>
+        <p:nvSpPr>
+          <p:cNvPr id="18" name="Shape 16"/>
+          <p:cNvSpPr/>
+          <p:nvPr/>
+        </p:nvSpPr>
+        <p:spPr>
+          <a:xfrm>
+            <a:off x="7635240" y="4498848"/>
+            <a:ext cx="3474720" cy="1143000"/>
+          </a:xfrm>
+          <a:prstGeom prst="roundRect">
+            <a:avLst>
+              <a:gd name="adj" fmla="val 9600"/>
             </a:avLst>
           </a:prstGeom>
           <a:solidFill>
@@ -14867,14 +16318,14 @@
       </p:sp>
       <p:sp>
         <p:nvSpPr>
-          <p:cNvPr id="16" name="Text 14"/>
-          <p:cNvSpPr/>
-          <p:nvPr/>
-        </p:nvSpPr>
-        <p:spPr>
-          <a:xfrm>
-            <a:off x="8074152" y="3666744"/>
-            <a:ext cx="2825496" cy="256032"/>
+          <p:cNvPr id="19" name="Text 17"/>
+          <p:cNvSpPr/>
+          <p:nvPr/>
+        </p:nvSpPr>
+        <p:spPr>
+          <a:xfrm>
+            <a:off x="7799832" y="4645152"/>
+            <a:ext cx="3145536" cy="256032"/>
           </a:xfrm>
           <a:prstGeom prst="rect">
             <a:avLst/>
@@ -14898,7 +16349,7 @@
                 <a:ea typeface="Aptos" pitchFamily="34" charset="-122"/>
                 <a:cs typeface="Aptos" pitchFamily="34" charset="-120"/>
               </a:rPr>
-              <a:t>Use this for</a:t>
+              <a:t>What to document</a:t>
             </a:r>
             <a:endParaRPr lang="en-US" sz="1300" dirty="0"/>
           </a:p>
@@ -14906,14 +16357,14 @@
       </p:sp>
       <p:sp>
         <p:nvSpPr>
-          <p:cNvPr id="17" name="Text 15"/>
-          <p:cNvSpPr/>
-          <p:nvPr/>
-        </p:nvSpPr>
-        <p:spPr>
-          <a:xfrm>
-            <a:off x="8074152" y="4023360"/>
-            <a:ext cx="2825496" cy="1097280"/>
+          <p:cNvPr id="20" name="Text 18"/>
+          <p:cNvSpPr/>
+          <p:nvPr/>
+        </p:nvSpPr>
+        <p:spPr>
+          <a:xfrm>
+            <a:off x="7799832" y="5001768"/>
+            <a:ext cx="3145536" cy="502920"/>
           </a:xfrm>
           <a:prstGeom prst="rect">
             <a:avLst/>
@@ -14939,7 +16390,7 @@
                 <a:ea typeface="Aptos" pitchFamily="34" charset="-122"/>
                 <a:cs typeface="Aptos" pitchFamily="34" charset="-120"/>
               </a:rPr>
-              <a:t>Connect the concept to public health decisions, safeguards, documentation, or implementation work.</a:t>
+              <a:t>Connect the concept to public health purpose, responsible use, required safeguards, documentation, and the next action a department should take.</a:t>
             </a:r>
             <a:endParaRPr lang="en-US" sz="1550" dirty="0"/>
           </a:p>
@@ -15113,8 +16564,8 @@
         </p:nvSpPr>
         <p:spPr>
           <a:xfrm>
-            <a:off x="9966960" y="6537960"/>
-            <a:ext cx="1645920" cy="201168"/>
+            <a:off x="9646920" y="6537960"/>
+            <a:ext cx="1965960" cy="201168"/>
           </a:xfrm>
           <a:prstGeom prst="rect">
             <a:avLst/>
@@ -15138,7 +16589,7 @@
                 <a:ea typeface="Aptos" pitchFamily="34" charset="-122"/>
                 <a:cs typeface="Aptos" pitchFamily="34" charset="-120"/>
               </a:rPr>
-              <a:t>Â© Paula Soper</a:t>
+              <a:t>Copyright Paula Soper</a:t>
             </a:r>
             <a:endParaRPr lang="en-US" sz="800" dirty="0"/>
           </a:p>
@@ -15185,77 +16636,13 @@
       </p:sp>
       <p:sp>
         <p:nvSpPr>
-          <p:cNvPr id="8" name="Shape 6"/>
+          <p:cNvPr id="8" name="Text 6"/>
           <p:cNvSpPr/>
           <p:nvPr/>
         </p:nvSpPr>
         <p:spPr>
           <a:xfrm>
             <a:off x="640080" y="658368"/>
-            <a:ext cx="420624" cy="420624"/>
-          </a:xfrm>
-          <a:prstGeom prst="ellipse">
-            <a:avLst/>
-          </a:prstGeom>
-          <a:solidFill>
-            <a:srgbClr val="0068B7"/>
-          </a:solidFill>
-          <a:ln w="12700">
-            <a:solidFill>
-              <a:srgbClr val="0068B7"/>
-            </a:solidFill>
-            <a:prstDash val="solid"/>
-          </a:ln>
-        </p:spPr>
-      </p:sp>
-      <p:sp>
-        <p:nvSpPr>
-          <p:cNvPr id="9" name="Text 7"/>
-          <p:cNvSpPr/>
-          <p:nvPr/>
-        </p:nvSpPr>
-        <p:spPr>
-          <a:xfrm>
-            <a:off x="640080" y="731520"/>
-            <a:ext cx="420624" cy="164592"/>
-          </a:xfrm>
-          <a:prstGeom prst="rect">
-            <a:avLst/>
-          </a:prstGeom>
-          <a:noFill/>
-          <a:ln/>
-        </p:spPr>
-        <p:txBody>
-          <a:bodyPr wrap="square" lIns="0" tIns="0" rIns="0" bIns="0" rtlCol="0" anchor="ctr"/>
-          <a:lstStyle/>
-          <a:p>
-            <a:pPr algn="ctr" indent="0" marL="0">
-              <a:buNone/>
-            </a:pPr>
-            <a:r>
-              <a:rPr lang="en-US" sz="1100" b="1" dirty="0">
-                <a:solidFill>
-                  <a:srgbClr val="FFFFFF"/>
-                </a:solidFill>
-                <a:latin typeface="Aptos" pitchFamily="34" charset="0"/>
-                <a:ea typeface="Aptos" pitchFamily="34" charset="-122"/>
-                <a:cs typeface="Aptos" pitchFamily="34" charset="-120"/>
-              </a:rPr>
-              <a:t>5</a:t>
-            </a:r>
-            <a:endParaRPr lang="en-US" sz="1100" dirty="0"/>
-          </a:p>
-        </p:txBody>
-      </p:sp>
-      <p:sp>
-        <p:nvSpPr>
-          <p:cNvPr id="10" name="Text 8"/>
-          <p:cNvSpPr/>
-          <p:nvPr/>
-        </p:nvSpPr>
-        <p:spPr>
-          <a:xfrm>
-            <a:off x="640080" y="621792"/>
             <a:ext cx="10881360" cy="713232"/>
           </a:xfrm>
           <a:prstGeom prst="rect">
@@ -15290,14 +16677,14 @@
       </p:sp>
       <p:sp>
         <p:nvSpPr>
-          <p:cNvPr id="11" name="Text 9"/>
+          <p:cNvPr id="9" name="Text 7"/>
           <p:cNvSpPr/>
           <p:nvPr/>
         </p:nvSpPr>
         <p:spPr>
           <a:xfrm>
             <a:off x="868680" y="1508760"/>
-            <a:ext cx="6537960" cy="4160520"/>
+            <a:ext cx="6309360" cy="4160520"/>
           </a:xfrm>
           <a:prstGeom prst="rect">
             <a:avLst/>
@@ -15356,18 +16743,18 @@
       </p:sp>
       <p:sp>
         <p:nvSpPr>
-          <p:cNvPr id="12" name="Shape 10"/>
-          <p:cNvSpPr/>
-          <p:nvPr/>
-        </p:nvSpPr>
-        <p:spPr>
-          <a:xfrm>
-            <a:off x="7909560" y="1417320"/>
-            <a:ext cx="3154680" cy="1828800"/>
+          <p:cNvPr id="10" name="Shape 8"/>
+          <p:cNvSpPr/>
+          <p:nvPr/>
+        </p:nvSpPr>
+        <p:spPr>
+          <a:xfrm>
+            <a:off x="7635240" y="1325880"/>
+            <a:ext cx="3474720" cy="1325880"/>
           </a:xfrm>
           <a:prstGeom prst="roundRect">
             <a:avLst>
-              <a:gd name="adj" fmla="val 6000"/>
+              <a:gd name="adj" fmla="val 8276"/>
             </a:avLst>
           </a:prstGeom>
           <a:solidFill>
@@ -15383,14 +16770,14 @@
       </p:sp>
       <p:sp>
         <p:nvSpPr>
-          <p:cNvPr id="13" name="Text 11"/>
-          <p:cNvSpPr/>
-          <p:nvPr/>
-        </p:nvSpPr>
-        <p:spPr>
-          <a:xfrm>
-            <a:off x="8074152" y="1563624"/>
-            <a:ext cx="2825496" cy="256032"/>
+          <p:cNvPr id="11" name="Text 9"/>
+          <p:cNvSpPr/>
+          <p:nvPr/>
+        </p:nvSpPr>
+        <p:spPr>
+          <a:xfrm>
+            <a:off x="7799832" y="1472184"/>
+            <a:ext cx="3145536" cy="256032"/>
           </a:xfrm>
           <a:prstGeom prst="rect">
             <a:avLst/>
@@ -15414,7 +16801,7 @@
                 <a:ea typeface="Aptos" pitchFamily="34" charset="-122"/>
                 <a:cs typeface="Aptos" pitchFamily="34" charset="-120"/>
               </a:rPr>
-              <a:t>Key idea</a:t>
+              <a:t>Governance lens</a:t>
             </a:r>
             <a:endParaRPr lang="en-US" sz="1300" dirty="0"/>
           </a:p>
@@ -15422,14 +16809,14 @@
       </p:sp>
       <p:sp>
         <p:nvSpPr>
-          <p:cNvPr id="14" name="Text 12"/>
-          <p:cNvSpPr/>
-          <p:nvPr/>
-        </p:nvSpPr>
-        <p:spPr>
-          <a:xfrm>
-            <a:off x="8074152" y="1920240"/>
-            <a:ext cx="2825496" cy="1188720"/>
+          <p:cNvPr id="12" name="Text 10"/>
+          <p:cNvSpPr/>
+          <p:nvPr/>
+        </p:nvSpPr>
+        <p:spPr>
+          <a:xfrm>
+            <a:off x="7799832" y="1828800"/>
+            <a:ext cx="3145536" cy="685800"/>
           </a:xfrm>
           <a:prstGeom prst="rect">
             <a:avLst/>
@@ -15463,18 +16850,159 @@
       </p:sp>
       <p:sp>
         <p:nvSpPr>
-          <p:cNvPr id="15" name="Shape 13"/>
-          <p:cNvSpPr/>
-          <p:nvPr/>
-        </p:nvSpPr>
-        <p:spPr>
-          <a:xfrm>
-            <a:off x="7909560" y="3520440"/>
-            <a:ext cx="3154680" cy="1737360"/>
+          <p:cNvPr id="13" name="Shape 11"/>
+          <p:cNvSpPr/>
+          <p:nvPr/>
+        </p:nvSpPr>
+        <p:spPr>
+          <a:xfrm>
+            <a:off x="7635240" y="2788920"/>
+            <a:ext cx="3474720" cy="1536192"/>
           </a:xfrm>
           <a:prstGeom prst="roundRect">
             <a:avLst>
-              <a:gd name="adj" fmla="val 6316"/>
+              <a:gd name="adj" fmla="val 7143"/>
+            </a:avLst>
+          </a:prstGeom>
+          <a:solidFill>
+            <a:srgbClr val="FFFFFF">
+              <a:alpha val="88000"/>
+            </a:srgbClr>
+          </a:solidFill>
+          <a:ln w="12700">
+            <a:solidFill>
+              <a:srgbClr val="D6E8F2"/>
+            </a:solidFill>
+            <a:prstDash val="solid"/>
+          </a:ln>
+        </p:spPr>
+      </p:sp>
+      <p:sp>
+        <p:nvSpPr>
+          <p:cNvPr id="14" name="Shape 12"/>
+          <p:cNvSpPr/>
+          <p:nvPr/>
+        </p:nvSpPr>
+        <p:spPr>
+          <a:xfrm>
+            <a:off x="8074152" y="3291840"/>
+            <a:ext cx="2596896" cy="749808"/>
+          </a:xfrm>
+          <a:prstGeom prst="rect">
+            <a:avLst/>
+          </a:prstGeom>
+          <a:solidFill>
+            <a:srgbClr val="EAF6F8"/>
+          </a:solidFill>
+          <a:ln w="12700">
+            <a:solidFill>
+              <a:srgbClr val="8ABBD8"/>
+            </a:solidFill>
+            <a:prstDash val="solid"/>
+          </a:ln>
+        </p:spPr>
+      </p:sp>
+      <p:sp>
+        <p:nvSpPr>
+          <p:cNvPr id="15" name="Shape 13"/>
+          <p:cNvSpPr/>
+          <p:nvPr/>
+        </p:nvSpPr>
+        <p:spPr>
+          <a:xfrm>
+            <a:off x="8202168" y="3721608"/>
+            <a:ext cx="2340864" cy="0"/>
+          </a:xfrm>
+          <a:prstGeom prst="line">
+            <a:avLst/>
+          </a:prstGeom>
+          <a:noFill/>
+          <a:ln w="19050">
+            <a:solidFill>
+              <a:srgbClr val="0068B7"/>
+            </a:solidFill>
+            <a:prstDash val="solid"/>
+          </a:ln>
+        </p:spPr>
+      </p:sp>
+      <p:sp>
+        <p:nvSpPr>
+          <p:cNvPr id="16" name="Shape 14"/>
+          <p:cNvSpPr/>
+          <p:nvPr/>
+        </p:nvSpPr>
+        <p:spPr>
+          <a:xfrm>
+            <a:off x="9198864" y="4206240"/>
+            <a:ext cx="347472" cy="347472"/>
+          </a:xfrm>
+          <a:prstGeom prst="ellipse">
+            <a:avLst/>
+          </a:prstGeom>
+          <a:solidFill>
+            <a:srgbClr val="2F8A28"/>
+          </a:solidFill>
+          <a:ln w="12700">
+            <a:solidFill>
+              <a:srgbClr val="2F8A28"/>
+            </a:solidFill>
+            <a:prstDash val="solid"/>
+          </a:ln>
+        </p:spPr>
+      </p:sp>
+      <p:sp>
+        <p:nvSpPr>
+          <p:cNvPr id="17" name="Text 15"/>
+          <p:cNvSpPr/>
+          <p:nvPr/>
+        </p:nvSpPr>
+        <p:spPr>
+          <a:xfrm>
+            <a:off x="7909560" y="3977640"/>
+            <a:ext cx="2926080" cy="182880"/>
+          </a:xfrm>
+          <a:prstGeom prst="rect">
+            <a:avLst/>
+          </a:prstGeom>
+          <a:noFill/>
+          <a:ln/>
+        </p:spPr>
+        <p:txBody>
+          <a:bodyPr wrap="square" lIns="0" tIns="0" rIns="0" bIns="0" rtlCol="0" anchor="ctr"/>
+          <a:lstStyle/>
+          <a:p>
+            <a:pPr algn="ctr" indent="0" marL="0">
+              <a:buNone/>
+            </a:pPr>
+            <a:r>
+              <a:rPr lang="en-US" sz="1000" dirty="0">
+                <a:solidFill>
+                  <a:srgbClr val="003A63"/>
+                </a:solidFill>
+                <a:latin typeface="Aptos" pitchFamily="34" charset="0"/>
+                <a:ea typeface="Aptos" pitchFamily="34" charset="-122"/>
+                <a:cs typeface="Aptos" pitchFamily="34" charset="-120"/>
+              </a:rPr>
+              <a:t>Concept to action</a:t>
+            </a:r>
+            <a:endParaRPr lang="en-US" sz="1000" dirty="0"/>
+          </a:p>
+        </p:txBody>
+      </p:sp>
+      <p:sp>
+        <p:nvSpPr>
+          <p:cNvPr id="18" name="Shape 16"/>
+          <p:cNvSpPr/>
+          <p:nvPr/>
+        </p:nvSpPr>
+        <p:spPr>
+          <a:xfrm>
+            <a:off x="7635240" y="4498848"/>
+            <a:ext cx="3474720" cy="1143000"/>
+          </a:xfrm>
+          <a:prstGeom prst="roundRect">
+            <a:avLst>
+              <a:gd name="adj" fmla="val 9600"/>
             </a:avLst>
           </a:prstGeom>
           <a:solidFill>
@@ -15490,14 +17018,14 @@
       </p:sp>
       <p:sp>
         <p:nvSpPr>
-          <p:cNvPr id="16" name="Text 14"/>
-          <p:cNvSpPr/>
-          <p:nvPr/>
-        </p:nvSpPr>
-        <p:spPr>
-          <a:xfrm>
-            <a:off x="8074152" y="3666744"/>
-            <a:ext cx="2825496" cy="256032"/>
+          <p:cNvPr id="19" name="Text 17"/>
+          <p:cNvSpPr/>
+          <p:nvPr/>
+        </p:nvSpPr>
+        <p:spPr>
+          <a:xfrm>
+            <a:off x="7799832" y="4645152"/>
+            <a:ext cx="3145536" cy="256032"/>
           </a:xfrm>
           <a:prstGeom prst="rect">
             <a:avLst/>
@@ -15521,7 +17049,7 @@
                 <a:ea typeface="Aptos" pitchFamily="34" charset="-122"/>
                 <a:cs typeface="Aptos" pitchFamily="34" charset="-120"/>
               </a:rPr>
-              <a:t>Use this for</a:t>
+              <a:t>What to document</a:t>
             </a:r>
             <a:endParaRPr lang="en-US" sz="1300" dirty="0"/>
           </a:p>
@@ -15529,14 +17057,14 @@
       </p:sp>
       <p:sp>
         <p:nvSpPr>
-          <p:cNvPr id="17" name="Text 15"/>
-          <p:cNvSpPr/>
-          <p:nvPr/>
-        </p:nvSpPr>
-        <p:spPr>
-          <a:xfrm>
-            <a:off x="8074152" y="4023360"/>
-            <a:ext cx="2825496" cy="1097280"/>
+          <p:cNvPr id="20" name="Text 18"/>
+          <p:cNvSpPr/>
+          <p:nvPr/>
+        </p:nvSpPr>
+        <p:spPr>
+          <a:xfrm>
+            <a:off x="7799832" y="5001768"/>
+            <a:ext cx="3145536" cy="502920"/>
           </a:xfrm>
           <a:prstGeom prst="rect">
             <a:avLst/>
@@ -15562,7 +17090,7 @@
                 <a:ea typeface="Aptos" pitchFamily="34" charset="-122"/>
                 <a:cs typeface="Aptos" pitchFamily="34" charset="-120"/>
               </a:rPr>
-              <a:t>Connect the concept to public health decisions, safeguards, documentation, or implementation work.</a:t>
+              <a:t>Connect the concept to public health purpose, responsible use, required safeguards, documentation, and the next action a department should take.</a:t>
             </a:r>
             <a:endParaRPr lang="en-US" sz="1550" dirty="0"/>
           </a:p>

--- a/downloads/presentations/modules/exe-400.pptx
+++ b/downloads/presentations/modules/exe-400.pptx
@@ -3425,13 +3425,11 @@
             </a:avLst>
           </a:prstGeom>
           <a:solidFill>
-            <a:srgbClr val="FFFFFF">
-              <a:alpha val="88000"/>
-            </a:srgbClr>
+            <a:srgbClr val="FFFFFF"/>
           </a:solidFill>
           <a:ln w="12700">
             <a:solidFill>
-              <a:srgbClr val="D6E8F2"/>
+              <a:srgbClr val="B9D7E6"/>
             </a:solidFill>
             <a:prstDash val="solid"/>
           </a:ln>
@@ -3439,190 +3437,112 @@
       </p:sp>
       <p:sp>
         <p:nvSpPr>
-          <p:cNvPr id="14" name="Shape 12"/>
-          <p:cNvSpPr/>
-          <p:nvPr/>
-        </p:nvSpPr>
-        <p:spPr>
-          <a:xfrm>
-            <a:off x="7891272" y="3108960"/>
-            <a:ext cx="566928" cy="566928"/>
-          </a:xfrm>
-          <a:prstGeom prst="ellipse">
-            <a:avLst/>
-          </a:prstGeom>
-          <a:solidFill>
-            <a:srgbClr val="0068B7"/>
-          </a:solidFill>
-          <a:ln w="12700">
-            <a:solidFill>
-              <a:srgbClr val="0068B7"/>
-            </a:solidFill>
-            <a:prstDash val="solid"/>
-          </a:ln>
-        </p:spPr>
-      </p:sp>
-      <p:sp>
-        <p:nvSpPr>
-          <p:cNvPr id="15" name="Shape 13"/>
-          <p:cNvSpPr/>
-          <p:nvPr/>
-        </p:nvSpPr>
-        <p:spPr>
-          <a:xfrm>
-            <a:off x="10287000" y="3108960"/>
-            <a:ext cx="566928" cy="566928"/>
-          </a:xfrm>
-          <a:prstGeom prst="ellipse">
-            <a:avLst/>
-          </a:prstGeom>
-          <a:solidFill>
-            <a:srgbClr val="2F8A28"/>
-          </a:solidFill>
-          <a:ln w="12700">
-            <a:solidFill>
-              <a:srgbClr val="2F8A28"/>
-            </a:solidFill>
-            <a:prstDash val="solid"/>
-          </a:ln>
-        </p:spPr>
+          <p:cNvPr id="14" name="Text 12"/>
+          <p:cNvSpPr/>
+          <p:nvPr/>
+        </p:nvSpPr>
+        <p:spPr>
+          <a:xfrm>
+            <a:off x="7799832" y="2935224"/>
+            <a:ext cx="3145536" cy="256032"/>
+          </a:xfrm>
+          <a:prstGeom prst="rect">
+            <a:avLst/>
+          </a:prstGeom>
+          <a:noFill/>
+          <a:ln/>
+        </p:spPr>
+        <p:txBody>
+          <a:bodyPr wrap="square" lIns="0" tIns="0" rIns="0" bIns="0" rtlCol="0" anchor="ctr"/>
+          <a:lstStyle/>
+          <a:p>
+            <a:pPr indent="0" marL="0">
+              <a:buNone/>
+            </a:pPr>
+            <a:r>
+              <a:rPr lang="en-US" sz="1300" b="1" dirty="0">
+                <a:solidFill>
+                  <a:srgbClr val="0068B7"/>
+                </a:solidFill>
+                <a:latin typeface="Aptos" pitchFamily="34" charset="0"/>
+                <a:ea typeface="Aptos" pitchFamily="34" charset="-122"/>
+                <a:cs typeface="Aptos" pitchFamily="34" charset="-120"/>
+              </a:rPr>
+              <a:t>Concept checkpoints</a:t>
+            </a:r>
+            <a:endParaRPr lang="en-US" sz="1300" dirty="0"/>
+          </a:p>
+        </p:txBody>
+      </p:sp>
+      <p:sp>
+        <p:nvSpPr>
+          <p:cNvPr id="15" name="Text 13"/>
+          <p:cNvSpPr/>
+          <p:nvPr/>
+        </p:nvSpPr>
+        <p:spPr>
+          <a:xfrm>
+            <a:off x="7818120" y="3300984"/>
+            <a:ext cx="3090672" cy="877824"/>
+          </a:xfrm>
+          <a:prstGeom prst="rect">
+            <a:avLst/>
+          </a:prstGeom>
+          <a:noFill/>
+          <a:ln/>
+        </p:spPr>
+        <p:txBody>
+          <a:bodyPr wrap="square" lIns="254" tIns="254" rIns="254" bIns="254" rtlCol="0" anchor="t">
+            <a:normAutofit/>
+          </a:bodyPr>
+          <a:lstStyle/>
+          <a:p>
+            <a:r>
+              <a:rPr lang="en-US" sz="1380" dirty="0">
+                <a:solidFill>
+                  <a:srgbClr val="17364A"/>
+                </a:solidFill>
+                <a:latin typeface="Aptos" pitchFamily="34" charset="0"/>
+                <a:ea typeface="Aptos" pitchFamily="34" charset="-122"/>
+                <a:cs typeface="Aptos" pitchFamily="34" charset="-120"/>
+              </a:rPr>
+              <a:t>During procurement, authorized officials decide whether vendor claims, contract language,.</a:t>
+            </a:r>
+            <a:endParaRPr lang="en-US" sz="1380" dirty="0"/>
+          </a:p>
+          <a:p>
+            <a:r>
+              <a:rPr lang="en-US" sz="1380" dirty="0">
+                <a:solidFill>
+                  <a:srgbClr val="17364A"/>
+                </a:solidFill>
+                <a:latin typeface="Aptos" pitchFamily="34" charset="0"/>
+                <a:ea typeface="Aptos" pitchFamily="34" charset="-122"/>
+                <a:cs typeface="Aptos" pitchFamily="34" charset="-120"/>
+              </a:rPr>
+              <a:t>During implementation, program and technical owners decide whether acceptance criteria.</a:t>
+            </a:r>
+            <a:endParaRPr lang="en-US" sz="1380" dirty="0"/>
+          </a:p>
+          <a:p>
+            <a:r>
+              <a:rPr lang="en-US" sz="1380" dirty="0">
+                <a:solidFill>
+                  <a:srgbClr val="17364A"/>
+                </a:solidFill>
+                <a:latin typeface="Aptos" pitchFamily="34" charset="0"/>
+                <a:ea typeface="Aptos" pitchFamily="34" charset="-122"/>
+                <a:cs typeface="Aptos" pitchFamily="34" charset="-120"/>
+              </a:rPr>
+              <a:t>During operations, defined owners decide whether monitoring results require adjustment,.</a:t>
+            </a:r>
+            <a:endParaRPr lang="en-US" sz="1380" dirty="0"/>
+          </a:p>
+        </p:txBody>
       </p:sp>
       <p:sp>
         <p:nvSpPr>
           <p:cNvPr id="16" name="Shape 14"/>
-          <p:cNvSpPr/>
-          <p:nvPr/>
-        </p:nvSpPr>
-        <p:spPr>
-          <a:xfrm>
-            <a:off x="9089136" y="3456432"/>
-            <a:ext cx="566928" cy="566928"/>
-          </a:xfrm>
-          <a:prstGeom prst="ellipse">
-            <a:avLst/>
-          </a:prstGeom>
-          <a:solidFill>
-            <a:srgbClr val="6A4CA3"/>
-          </a:solidFill>
-          <a:ln w="12700">
-            <a:solidFill>
-              <a:srgbClr val="6A4CA3"/>
-            </a:solidFill>
-            <a:prstDash val="solid"/>
-          </a:ln>
-        </p:spPr>
-      </p:sp>
-      <p:sp>
-        <p:nvSpPr>
-          <p:cNvPr id="17" name="Shape 15"/>
-          <p:cNvSpPr/>
-          <p:nvPr/>
-        </p:nvSpPr>
-        <p:spPr>
-          <a:xfrm>
-            <a:off x="8385048" y="3419856"/>
-            <a:ext cx="1975104" cy="0"/>
-          </a:xfrm>
-          <a:prstGeom prst="line">
-            <a:avLst/>
-          </a:prstGeom>
-          <a:noFill/>
-          <a:ln w="25400">
-            <a:solidFill>
-              <a:srgbClr val="8ABBD8"/>
-            </a:solidFill>
-            <a:prstDash val="solid"/>
-          </a:ln>
-        </p:spPr>
-      </p:sp>
-      <p:sp>
-        <p:nvSpPr>
-          <p:cNvPr id="18" name="Shape 16"/>
-          <p:cNvSpPr/>
-          <p:nvPr/>
-        </p:nvSpPr>
-        <p:spPr>
-          <a:xfrm>
-            <a:off x="8202168" y="3630168"/>
-            <a:ext cx="1170432" cy="118872"/>
-          </a:xfrm>
-          <a:prstGeom prst="line">
-            <a:avLst/>
-          </a:prstGeom>
-          <a:noFill/>
-          <a:ln w="25400">
-            <a:solidFill>
-              <a:srgbClr val="8ABBD8"/>
-            </a:solidFill>
-            <a:prstDash val="solid"/>
-          </a:ln>
-        </p:spPr>
-      </p:sp>
-      <p:sp>
-        <p:nvSpPr>
-          <p:cNvPr id="19" name="Shape 17"/>
-          <p:cNvSpPr/>
-          <p:nvPr/>
-        </p:nvSpPr>
-        <p:spPr>
-          <a:xfrm>
-            <a:off x="10543032" y="3630168"/>
-            <a:ext cx="-1170432" cy="118872"/>
-          </a:xfrm>
-          <a:prstGeom prst="line">
-            <a:avLst/>
-          </a:prstGeom>
-          <a:noFill/>
-          <a:ln w="25400">
-            <a:solidFill>
-              <a:srgbClr val="8ABBD8"/>
-            </a:solidFill>
-            <a:prstDash val="solid"/>
-          </a:ln>
-        </p:spPr>
-      </p:sp>
-      <p:sp>
-        <p:nvSpPr>
-          <p:cNvPr id="20" name="Text 18"/>
-          <p:cNvSpPr/>
-          <p:nvPr/>
-        </p:nvSpPr>
-        <p:spPr>
-          <a:xfrm>
-            <a:off x="7863840" y="4069080"/>
-            <a:ext cx="3017520" cy="164592"/>
-          </a:xfrm>
-          <a:prstGeom prst="rect">
-            <a:avLst/>
-          </a:prstGeom>
-          <a:noFill/>
-          <a:ln/>
-        </p:spPr>
-        <p:txBody>
-          <a:bodyPr wrap="square" lIns="0" tIns="0" rIns="0" bIns="0" rtlCol="0" anchor="ctr"/>
-          <a:lstStyle/>
-          <a:p>
-            <a:pPr algn="ctr" indent="0" marL="0">
-              <a:buNone/>
-            </a:pPr>
-            <a:r>
-              <a:rPr lang="en-US" sz="900" b="1" dirty="0">
-                <a:solidFill>
-                  <a:srgbClr val="003A63"/>
-                </a:solidFill>
-                <a:latin typeface="Aptos" pitchFamily="34" charset="0"/>
-                <a:ea typeface="Aptos" pitchFamily="34" charset="-122"/>
-                <a:cs typeface="Aptos" pitchFamily="34" charset="-120"/>
-              </a:rPr>
-              <a:t>Decision rights</a:t>
-            </a:r>
-            <a:endParaRPr lang="en-US" sz="900" dirty="0"/>
-          </a:p>
-        </p:txBody>
-      </p:sp>
-      <p:sp>
-        <p:nvSpPr>
-          <p:cNvPr id="21" name="Shape 19"/>
           <p:cNvSpPr/>
           <p:nvPr/>
         </p:nvSpPr>
@@ -3649,7 +3569,7 @@
       </p:sp>
       <p:sp>
         <p:nvSpPr>
-          <p:cNvPr id="22" name="Text 20"/>
+          <p:cNvPr id="17" name="Text 15"/>
           <p:cNvSpPr/>
           <p:nvPr/>
         </p:nvSpPr>
@@ -3688,7 +3608,7 @@
       </p:sp>
       <p:sp>
         <p:nvSpPr>
-          <p:cNvPr id="23" name="Text 21"/>
+          <p:cNvPr id="18" name="Text 16"/>
           <p:cNvSpPr/>
           <p:nvPr/>
         </p:nvSpPr>
@@ -4196,13 +4116,11 @@
             </a:avLst>
           </a:prstGeom>
           <a:solidFill>
-            <a:srgbClr val="FFFFFF">
-              <a:alpha val="88000"/>
-            </a:srgbClr>
+            <a:srgbClr val="FFFFFF"/>
           </a:solidFill>
           <a:ln w="12700">
             <a:solidFill>
-              <a:srgbClr val="D6E8F2"/>
+              <a:srgbClr val="B9D7E6"/>
             </a:solidFill>
             <a:prstDash val="solid"/>
           </a:ln>
@@ -4210,26 +4128,42 @@
       </p:sp>
       <p:sp>
         <p:nvSpPr>
-          <p:cNvPr id="14" name="Shape 12"/>
-          <p:cNvSpPr/>
-          <p:nvPr/>
-        </p:nvSpPr>
-        <p:spPr>
-          <a:xfrm>
-            <a:off x="8046720" y="3108960"/>
-            <a:ext cx="2651760" cy="896112"/>
-          </a:xfrm>
-          <a:prstGeom prst="arc">
-            <a:avLst/>
-          </a:prstGeom>
-          <a:noFill/>
-          <a:ln w="25400">
-            <a:solidFill>
-              <a:srgbClr val="0068B7"/>
-            </a:solidFill>
-            <a:prstDash val="solid"/>
-          </a:ln>
-        </p:spPr>
+          <p:cNvPr id="14" name="Text 12"/>
+          <p:cNvSpPr/>
+          <p:nvPr/>
+        </p:nvSpPr>
+        <p:spPr>
+          <a:xfrm>
+            <a:off x="7799832" y="2935224"/>
+            <a:ext cx="3145536" cy="256032"/>
+          </a:xfrm>
+          <a:prstGeom prst="rect">
+            <a:avLst/>
+          </a:prstGeom>
+          <a:noFill/>
+          <a:ln/>
+        </p:spPr>
+        <p:txBody>
+          <a:bodyPr wrap="square" lIns="0" tIns="0" rIns="0" bIns="0" rtlCol="0" anchor="ctr"/>
+          <a:lstStyle/>
+          <a:p>
+            <a:pPr indent="0" marL="0">
+              <a:buNone/>
+            </a:pPr>
+            <a:r>
+              <a:rPr lang="en-US" sz="1300" b="1" dirty="0">
+                <a:solidFill>
+                  <a:srgbClr val="0068B7"/>
+                </a:solidFill>
+                <a:latin typeface="Aptos" pitchFamily="34" charset="0"/>
+                <a:ea typeface="Aptos" pitchFamily="34" charset="-122"/>
+                <a:cs typeface="Aptos" pitchFamily="34" charset="-120"/>
+              </a:rPr>
+              <a:t>Concept checkpoints</a:t>
+            </a:r>
+            <a:endParaRPr lang="en-US" sz="1300" dirty="0"/>
+          </a:p>
+        </p:txBody>
       </p:sp>
       <p:sp>
         <p:nvSpPr>
@@ -4239,102 +4173,67 @@
         </p:nvSpPr>
         <p:spPr>
           <a:xfrm>
-            <a:off x="7909560" y="3099816"/>
-            <a:ext cx="2926080" cy="256032"/>
-          </a:xfrm>
-          <a:prstGeom prst="rect">
-            <a:avLst/>
-          </a:prstGeom>
-          <a:noFill/>
-          <a:ln/>
-        </p:spPr>
-        <p:txBody>
-          <a:bodyPr wrap="square" lIns="0" tIns="0" rIns="0" bIns="0" rtlCol="0" anchor="ctr"/>
-          <a:lstStyle/>
-          <a:p>
-            <a:pPr algn="ctr" indent="0" marL="0">
-              <a:buNone/>
-            </a:pPr>
-            <a:r>
-              <a:rPr lang="en-US" sz="1500" b="1" dirty="0">
-                <a:solidFill>
-                  <a:srgbClr val="003A63"/>
-                </a:solidFill>
-                <a:latin typeface="Aptos" pitchFamily="34" charset="0"/>
-                <a:ea typeface="Aptos" pitchFamily="34" charset="-122"/>
-                <a:cs typeface="Aptos" pitchFamily="34" charset="-120"/>
-              </a:rPr>
-              <a:t>Risk</a:t>
-            </a:r>
-            <a:endParaRPr lang="en-US" sz="1500" dirty="0"/>
+            <a:off x="7818120" y="3300984"/>
+            <a:ext cx="3090672" cy="877824"/>
+          </a:xfrm>
+          <a:prstGeom prst="rect">
+            <a:avLst/>
+          </a:prstGeom>
+          <a:noFill/>
+          <a:ln/>
+        </p:spPr>
+        <p:txBody>
+          <a:bodyPr wrap="square" lIns="254" tIns="254" rIns="254" bIns="254" rtlCol="0" anchor="t">
+            <a:normAutofit/>
+          </a:bodyPr>
+          <a:lstStyle/>
+          <a:p>
+            <a:r>
+              <a:rPr lang="en-US" sz="1380" dirty="0">
+                <a:solidFill>
+                  <a:srgbClr val="17364A"/>
+                </a:solidFill>
+                <a:latin typeface="Aptos" pitchFamily="34" charset="0"/>
+                <a:ea typeface="Aptos" pitchFamily="34" charset="-122"/>
+                <a:cs typeface="Aptos" pitchFamily="34" charset="-120"/>
+              </a:rPr>
+              <a:t>Another risk is inappropriate risk acceptance by staff who lack authority.</a:t>
+            </a:r>
+            <a:endParaRPr lang="en-US" sz="1380" dirty="0"/>
+          </a:p>
+          <a:p>
+            <a:r>
+              <a:rPr lang="en-US" sz="1380" dirty="0">
+                <a:solidFill>
+                  <a:srgbClr val="17364A"/>
+                </a:solidFill>
+                <a:latin typeface="Aptos" pitchFamily="34" charset="0"/>
+                <a:ea typeface="Aptos" pitchFamily="34" charset="-122"/>
+                <a:cs typeface="Aptos" pitchFamily="34" charset="-120"/>
+              </a:rPr>
+              <a:t>A frontline supervisor may feel pressure to continue a tool despite known concerns.</a:t>
+            </a:r>
+            <a:endParaRPr lang="en-US" sz="1380" dirty="0"/>
+          </a:p>
+          <a:p>
+            <a:r>
+              <a:rPr lang="en-US" sz="1380" dirty="0">
+                <a:solidFill>
+                  <a:srgbClr val="17364A"/>
+                </a:solidFill>
+                <a:latin typeface="Aptos" pitchFamily="34" charset="0"/>
+                <a:ea typeface="Aptos" pitchFamily="34" charset="-122"/>
+                <a:cs typeface="Aptos" pitchFamily="34" charset="-120"/>
+              </a:rPr>
+              <a:t>A guardrail is to define which risks can be accepted at the program level and which.</a:t>
+            </a:r>
+            <a:endParaRPr lang="en-US" sz="1380" dirty="0"/>
           </a:p>
         </p:txBody>
       </p:sp>
       <p:sp>
         <p:nvSpPr>
           <p:cNvPr id="16" name="Shape 14"/>
-          <p:cNvSpPr/>
-          <p:nvPr/>
-        </p:nvSpPr>
-        <p:spPr>
-          <a:xfrm>
-            <a:off x="8366760" y="3639312"/>
-            <a:ext cx="2011680" cy="0"/>
-          </a:xfrm>
-          <a:prstGeom prst="line">
-            <a:avLst/>
-          </a:prstGeom>
-          <a:noFill/>
-          <a:ln w="63500">
-            <a:solidFill>
-              <a:srgbClr val="2F8A28"/>
-            </a:solidFill>
-            <a:prstDash val="solid"/>
-          </a:ln>
-        </p:spPr>
-      </p:sp>
-      <p:sp>
-        <p:nvSpPr>
-          <p:cNvPr id="17" name="Text 15"/>
-          <p:cNvSpPr/>
-          <p:nvPr/>
-        </p:nvSpPr>
-        <p:spPr>
-          <a:xfrm>
-            <a:off x="7909560" y="3849624"/>
-            <a:ext cx="2926080" cy="164592"/>
-          </a:xfrm>
-          <a:prstGeom prst="rect">
-            <a:avLst/>
-          </a:prstGeom>
-          <a:noFill/>
-          <a:ln/>
-        </p:spPr>
-        <p:txBody>
-          <a:bodyPr wrap="square" lIns="0" tIns="0" rIns="0" bIns="0" rtlCol="0" anchor="ctr"/>
-          <a:lstStyle/>
-          <a:p>
-            <a:pPr algn="ctr" indent="0" marL="0">
-              <a:buNone/>
-            </a:pPr>
-            <a:r>
-              <a:rPr lang="en-US" sz="900" dirty="0">
-                <a:solidFill>
-                  <a:srgbClr val="003A63"/>
-                </a:solidFill>
-                <a:latin typeface="Aptos" pitchFamily="34" charset="0"/>
-                <a:ea typeface="Aptos" pitchFamily="34" charset="-122"/>
-                <a:cs typeface="Aptos" pitchFamily="34" charset="-120"/>
-              </a:rPr>
-              <a:t>Human review</a:t>
-            </a:r>
-            <a:endParaRPr lang="en-US" sz="900" dirty="0"/>
-          </a:p>
-        </p:txBody>
-      </p:sp>
-      <p:sp>
-        <p:nvSpPr>
-          <p:cNvPr id="18" name="Shape 16"/>
           <p:cNvSpPr/>
           <p:nvPr/>
         </p:nvSpPr>
@@ -4361,7 +4260,7 @@
       </p:sp>
       <p:sp>
         <p:nvSpPr>
-          <p:cNvPr id="19" name="Text 17"/>
+          <p:cNvPr id="17" name="Text 15"/>
           <p:cNvSpPr/>
           <p:nvPr/>
         </p:nvSpPr>
@@ -4400,7 +4299,7 @@
       </p:sp>
       <p:sp>
         <p:nvSpPr>
-          <p:cNvPr id="20" name="Text 18"/>
+          <p:cNvPr id="18" name="Text 16"/>
           <p:cNvSpPr/>
           <p:nvPr/>
         </p:nvSpPr>
@@ -4908,13 +4807,11 @@
             </a:avLst>
           </a:prstGeom>
           <a:solidFill>
-            <a:srgbClr val="FFFFFF">
-              <a:alpha val="88000"/>
-            </a:srgbClr>
+            <a:srgbClr val="FFFFFF"/>
           </a:solidFill>
           <a:ln w="12700">
             <a:solidFill>
-              <a:srgbClr val="D6E8F2"/>
+              <a:srgbClr val="B9D7E6"/>
             </a:solidFill>
             <a:prstDash val="solid"/>
           </a:ln>
@@ -4922,30 +4819,42 @@
       </p:sp>
       <p:sp>
         <p:nvSpPr>
-          <p:cNvPr id="14" name="Shape 12"/>
-          <p:cNvSpPr/>
-          <p:nvPr/>
-        </p:nvSpPr>
-        <p:spPr>
-          <a:xfrm>
-            <a:off x="7927848" y="3319272"/>
-            <a:ext cx="792480" cy="749808"/>
-          </a:xfrm>
-          <a:prstGeom prst="roundRect">
-            <a:avLst>
-              <a:gd name="adj" fmla="val 14634"/>
-            </a:avLst>
-          </a:prstGeom>
-          <a:solidFill>
-            <a:srgbClr val="0068B7"/>
-          </a:solidFill>
-          <a:ln w="12700">
-            <a:solidFill>
-              <a:srgbClr val="0068B7"/>
-            </a:solidFill>
-            <a:prstDash val="solid"/>
-          </a:ln>
-        </p:spPr>
+          <p:cNvPr id="14" name="Text 12"/>
+          <p:cNvSpPr/>
+          <p:nvPr/>
+        </p:nvSpPr>
+        <p:spPr>
+          <a:xfrm>
+            <a:off x="7799832" y="2935224"/>
+            <a:ext cx="3145536" cy="256032"/>
+          </a:xfrm>
+          <a:prstGeom prst="rect">
+            <a:avLst/>
+          </a:prstGeom>
+          <a:noFill/>
+          <a:ln/>
+        </p:spPr>
+        <p:txBody>
+          <a:bodyPr wrap="square" lIns="0" tIns="0" rIns="0" bIns="0" rtlCol="0" anchor="ctr"/>
+          <a:lstStyle/>
+          <a:p>
+            <a:pPr indent="0" marL="0">
+              <a:buNone/>
+            </a:pPr>
+            <a:r>
+              <a:rPr lang="en-US" sz="1300" b="1" dirty="0">
+                <a:solidFill>
+                  <a:srgbClr val="0068B7"/>
+                </a:solidFill>
+                <a:latin typeface="Aptos" pitchFamily="34" charset="0"/>
+                <a:ea typeface="Aptos" pitchFamily="34" charset="-122"/>
+                <a:cs typeface="Aptos" pitchFamily="34" charset="-120"/>
+              </a:rPr>
+              <a:t>Concept checkpoints</a:t>
+            </a:r>
+            <a:endParaRPr lang="en-US" sz="1300" dirty="0"/>
+          </a:p>
+        </p:txBody>
       </p:sp>
       <p:sp>
         <p:nvSpPr>
@@ -4955,240 +4864,67 @@
         </p:nvSpPr>
         <p:spPr>
           <a:xfrm>
-            <a:off x="8001000" y="3511296"/>
-            <a:ext cx="646176" cy="310896"/>
-          </a:xfrm>
-          <a:prstGeom prst="rect">
-            <a:avLst/>
-          </a:prstGeom>
-          <a:noFill/>
-          <a:ln/>
-        </p:spPr>
-        <p:txBody>
-          <a:bodyPr wrap="square" lIns="0" tIns="0" rIns="0" bIns="0" rtlCol="0" anchor="ctr">
+            <a:off x="7818120" y="3300984"/>
+            <a:ext cx="3090672" cy="877824"/>
+          </a:xfrm>
+          <a:prstGeom prst="rect">
+            <a:avLst/>
+          </a:prstGeom>
+          <a:noFill/>
+          <a:ln/>
+        </p:spPr>
+        <p:txBody>
+          <a:bodyPr wrap="square" lIns="254" tIns="254" rIns="254" bIns="254" rtlCol="0" anchor="t">
             <a:normAutofit/>
           </a:bodyPr>
           <a:lstStyle/>
           <a:p>
-            <a:pPr algn="ctr" indent="0" marL="0">
-              <a:buNone/>
-            </a:pPr>
-            <a:r>
-              <a:rPr lang="en-US" sz="1500" b="1" dirty="0">
-                <a:solidFill>
-                  <a:srgbClr val="FFFFFF"/>
-                </a:solidFill>
-                <a:latin typeface="Aptos" pitchFamily="34" charset="0"/>
-                <a:ea typeface="Aptos" pitchFamily="34" charset="-122"/>
-                <a:cs typeface="Aptos" pitchFamily="34" charset="-120"/>
-              </a:rPr>
-              <a:t>Plan</a:t>
-            </a:r>
-            <a:endParaRPr lang="en-US" sz="1500" dirty="0"/>
+            <a:r>
+              <a:rPr lang="en-US" sz="1380" dirty="0">
+                <a:solidFill>
+                  <a:srgbClr val="17364A"/>
+                </a:solidFill>
+                <a:latin typeface="Aptos" pitchFamily="34" charset="0"/>
+                <a:ea typeface="Aptos" pitchFamily="34" charset="-122"/>
+                <a:cs typeface="Aptos" pitchFamily="34" charset="-120"/>
+              </a:rPr>
+              <a:t>For predictive analytics, leaders should decide whether the score may inform resource.</a:t>
+            </a:r>
+            <a:endParaRPr lang="en-US" sz="1380" dirty="0"/>
+          </a:p>
+          <a:p>
+            <a:r>
+              <a:rPr lang="en-US" sz="1380" dirty="0">
+                <a:solidFill>
+                  <a:srgbClr val="17364A"/>
+                </a:solidFill>
+                <a:latin typeface="Aptos" pitchFamily="34" charset="0"/>
+                <a:ea typeface="Aptos" pitchFamily="34" charset="-122"/>
+                <a:cs typeface="Aptos" pitchFamily="34" charset="-120"/>
+              </a:rPr>
+              <a:t>For agentic AI, decision rights should define who authorizes system actions, rollback.</a:t>
+            </a:r>
+            <a:endParaRPr lang="en-US" sz="1380" dirty="0"/>
+          </a:p>
+          <a:p>
+            <a:r>
+              <a:rPr lang="en-US" sz="1380" dirty="0">
+                <a:solidFill>
+                  <a:srgbClr val="17364A"/>
+                </a:solidFill>
+                <a:latin typeface="Aptos" pitchFamily="34" charset="0"/>
+                <a:ea typeface="Aptos" pitchFamily="34" charset="-122"/>
+                <a:cs typeface="Aptos" pitchFamily="34" charset="-120"/>
+              </a:rPr>
+              <a:t>Accountability should remain tied to public health roles and legal authority.</a:t>
+            </a:r>
+            <a:endParaRPr lang="en-US" sz="1380" dirty="0"/>
           </a:p>
         </p:txBody>
       </p:sp>
       <p:sp>
         <p:nvSpPr>
           <p:cNvPr id="16" name="Shape 14"/>
-          <p:cNvSpPr/>
-          <p:nvPr/>
-        </p:nvSpPr>
-        <p:spPr>
-          <a:xfrm>
-            <a:off x="8976360" y="3319272"/>
-            <a:ext cx="792480" cy="749808"/>
-          </a:xfrm>
-          <a:prstGeom prst="roundRect">
-            <a:avLst>
-              <a:gd name="adj" fmla="val 14634"/>
-            </a:avLst>
-          </a:prstGeom>
-          <a:solidFill>
-            <a:srgbClr val="2F8A28"/>
-          </a:solidFill>
-          <a:ln w="12700">
-            <a:solidFill>
-              <a:srgbClr val="2F8A28"/>
-            </a:solidFill>
-            <a:prstDash val="solid"/>
-          </a:ln>
-        </p:spPr>
-      </p:sp>
-      <p:sp>
-        <p:nvSpPr>
-          <p:cNvPr id="17" name="Text 15"/>
-          <p:cNvSpPr/>
-          <p:nvPr/>
-        </p:nvSpPr>
-        <p:spPr>
-          <a:xfrm>
-            <a:off x="9049512" y="3511296"/>
-            <a:ext cx="646176" cy="310896"/>
-          </a:xfrm>
-          <a:prstGeom prst="rect">
-            <a:avLst/>
-          </a:prstGeom>
-          <a:noFill/>
-          <a:ln/>
-        </p:spPr>
-        <p:txBody>
-          <a:bodyPr wrap="square" lIns="0" tIns="0" rIns="0" bIns="0" rtlCol="0" anchor="ctr">
-            <a:normAutofit/>
-          </a:bodyPr>
-          <a:lstStyle/>
-          <a:p>
-            <a:pPr algn="ctr" indent="0" marL="0">
-              <a:buNone/>
-            </a:pPr>
-            <a:r>
-              <a:rPr lang="en-US" sz="1500" b="1" dirty="0">
-                <a:solidFill>
-                  <a:srgbClr val="FFFFFF"/>
-                </a:solidFill>
-                <a:latin typeface="Aptos" pitchFamily="34" charset="0"/>
-                <a:ea typeface="Aptos" pitchFamily="34" charset="-122"/>
-                <a:cs typeface="Aptos" pitchFamily="34" charset="-120"/>
-              </a:rPr>
-              <a:t>Do</a:t>
-            </a:r>
-            <a:endParaRPr lang="en-US" sz="1500" dirty="0"/>
-          </a:p>
-        </p:txBody>
-      </p:sp>
-      <p:sp>
-        <p:nvSpPr>
-          <p:cNvPr id="18" name="Shape 16"/>
-          <p:cNvSpPr/>
-          <p:nvPr/>
-        </p:nvSpPr>
-        <p:spPr>
-          <a:xfrm>
-            <a:off x="10024872" y="3319272"/>
-            <a:ext cx="792480" cy="749808"/>
-          </a:xfrm>
-          <a:prstGeom prst="roundRect">
-            <a:avLst>
-              <a:gd name="adj" fmla="val 14634"/>
-            </a:avLst>
-          </a:prstGeom>
-          <a:solidFill>
-            <a:srgbClr val="D69A2D"/>
-          </a:solidFill>
-          <a:ln w="12700">
-            <a:solidFill>
-              <a:srgbClr val="D69A2D"/>
-            </a:solidFill>
-            <a:prstDash val="solid"/>
-          </a:ln>
-        </p:spPr>
-      </p:sp>
-      <p:sp>
-        <p:nvSpPr>
-          <p:cNvPr id="19" name="Text 17"/>
-          <p:cNvSpPr/>
-          <p:nvPr/>
-        </p:nvSpPr>
-        <p:spPr>
-          <a:xfrm>
-            <a:off x="10098024" y="3511296"/>
-            <a:ext cx="646176" cy="310896"/>
-          </a:xfrm>
-          <a:prstGeom prst="rect">
-            <a:avLst/>
-          </a:prstGeom>
-          <a:noFill/>
-          <a:ln/>
-        </p:spPr>
-        <p:txBody>
-          <a:bodyPr wrap="square" lIns="0" tIns="0" rIns="0" bIns="0" rtlCol="0" anchor="ctr">
-            <a:normAutofit/>
-          </a:bodyPr>
-          <a:lstStyle/>
-          <a:p>
-            <a:pPr algn="ctr" indent="0" marL="0">
-              <a:buNone/>
-            </a:pPr>
-            <a:r>
-              <a:rPr lang="en-US" sz="1500" b="1" dirty="0">
-                <a:solidFill>
-                  <a:srgbClr val="FFFFFF"/>
-                </a:solidFill>
-                <a:latin typeface="Aptos" pitchFamily="34" charset="0"/>
-                <a:ea typeface="Aptos" pitchFamily="34" charset="-122"/>
-                <a:cs typeface="Aptos" pitchFamily="34" charset="-120"/>
-              </a:rPr>
-              <a:t>Review</a:t>
-            </a:r>
-            <a:endParaRPr lang="en-US" sz="1500" dirty="0"/>
-          </a:p>
-        </p:txBody>
-      </p:sp>
-      <p:sp>
-        <p:nvSpPr>
-          <p:cNvPr id="20" name="Shape 18"/>
-          <p:cNvSpPr/>
-          <p:nvPr/>
-        </p:nvSpPr>
-        <p:spPr>
-          <a:xfrm>
-            <a:off x="8293608" y="4389120"/>
-            <a:ext cx="2157984" cy="0"/>
-          </a:xfrm>
-          <a:prstGeom prst="line">
-            <a:avLst/>
-          </a:prstGeom>
-          <a:noFill/>
-          <a:ln w="25400">
-            <a:solidFill>
-              <a:srgbClr val="8ABBD8"/>
-            </a:solidFill>
-            <a:prstDash val="solid"/>
-          </a:ln>
-        </p:spPr>
-      </p:sp>
-      <p:sp>
-        <p:nvSpPr>
-          <p:cNvPr id="21" name="Text 19"/>
-          <p:cNvSpPr/>
-          <p:nvPr/>
-        </p:nvSpPr>
-        <p:spPr>
-          <a:xfrm>
-            <a:off x="7909560" y="3977640"/>
-            <a:ext cx="2926080" cy="182880"/>
-          </a:xfrm>
-          <a:prstGeom prst="rect">
-            <a:avLst/>
-          </a:prstGeom>
-          <a:noFill/>
-          <a:ln/>
-        </p:spPr>
-        <p:txBody>
-          <a:bodyPr wrap="square" lIns="0" tIns="0" rIns="0" bIns="0" rtlCol="0" anchor="ctr"/>
-          <a:lstStyle/>
-          <a:p>
-            <a:pPr algn="ctr" indent="0" marL="0">
-              <a:buNone/>
-            </a:pPr>
-            <a:r>
-              <a:rPr lang="en-US" sz="1000" dirty="0">
-                <a:solidFill>
-                  <a:srgbClr val="003A63"/>
-                </a:solidFill>
-                <a:latin typeface="Aptos" pitchFamily="34" charset="0"/>
-                <a:ea typeface="Aptos" pitchFamily="34" charset="-122"/>
-                <a:cs typeface="Aptos" pitchFamily="34" charset="-120"/>
-              </a:rPr>
-              <a:t>Dependencies visible</a:t>
-            </a:r>
-            <a:endParaRPr lang="en-US" sz="1000" dirty="0"/>
-          </a:p>
-        </p:txBody>
-      </p:sp>
-      <p:sp>
-        <p:nvSpPr>
-          <p:cNvPr id="22" name="Shape 20"/>
           <p:cNvSpPr/>
           <p:nvPr/>
         </p:nvSpPr>
@@ -5215,7 +4951,7 @@
       </p:sp>
       <p:sp>
         <p:nvSpPr>
-          <p:cNvPr id="23" name="Text 21"/>
+          <p:cNvPr id="17" name="Text 15"/>
           <p:cNvSpPr/>
           <p:nvPr/>
         </p:nvSpPr>
@@ -5254,7 +4990,7 @@
       </p:sp>
       <p:sp>
         <p:nvSpPr>
-          <p:cNvPr id="24" name="Text 22"/>
+          <p:cNvPr id="18" name="Text 16"/>
           <p:cNvSpPr/>
           <p:nvPr/>
         </p:nvSpPr>
@@ -5762,13 +5498,11 @@
             </a:avLst>
           </a:prstGeom>
           <a:solidFill>
-            <a:srgbClr val="FFFFFF">
-              <a:alpha val="88000"/>
-            </a:srgbClr>
+            <a:srgbClr val="FFFFFF"/>
           </a:solidFill>
           <a:ln w="12700">
             <a:solidFill>
-              <a:srgbClr val="D6E8F2"/>
+              <a:srgbClr val="B9D7E6"/>
             </a:solidFill>
             <a:prstDash val="solid"/>
           </a:ln>
@@ -5776,119 +5510,112 @@
       </p:sp>
       <p:sp>
         <p:nvSpPr>
-          <p:cNvPr id="14" name="Shape 12"/>
-          <p:cNvSpPr/>
-          <p:nvPr/>
-        </p:nvSpPr>
-        <p:spPr>
-          <a:xfrm>
-            <a:off x="8074152" y="3291840"/>
-            <a:ext cx="2596896" cy="749808"/>
-          </a:xfrm>
-          <a:prstGeom prst="rect">
-            <a:avLst/>
-          </a:prstGeom>
-          <a:solidFill>
-            <a:srgbClr val="EAF6F8"/>
-          </a:solidFill>
-          <a:ln w="12700">
-            <a:solidFill>
-              <a:srgbClr val="8ABBD8"/>
-            </a:solidFill>
-            <a:prstDash val="solid"/>
-          </a:ln>
-        </p:spPr>
-      </p:sp>
-      <p:sp>
-        <p:nvSpPr>
-          <p:cNvPr id="15" name="Shape 13"/>
-          <p:cNvSpPr/>
-          <p:nvPr/>
-        </p:nvSpPr>
-        <p:spPr>
-          <a:xfrm>
-            <a:off x="8202168" y="3721608"/>
-            <a:ext cx="2340864" cy="0"/>
-          </a:xfrm>
-          <a:prstGeom prst="line">
-            <a:avLst/>
-          </a:prstGeom>
-          <a:noFill/>
-          <a:ln w="19050">
-            <a:solidFill>
-              <a:srgbClr val="0068B7"/>
-            </a:solidFill>
-            <a:prstDash val="solid"/>
-          </a:ln>
-        </p:spPr>
+          <p:cNvPr id="14" name="Text 12"/>
+          <p:cNvSpPr/>
+          <p:nvPr/>
+        </p:nvSpPr>
+        <p:spPr>
+          <a:xfrm>
+            <a:off x="7799832" y="2935224"/>
+            <a:ext cx="3145536" cy="256032"/>
+          </a:xfrm>
+          <a:prstGeom prst="rect">
+            <a:avLst/>
+          </a:prstGeom>
+          <a:noFill/>
+          <a:ln/>
+        </p:spPr>
+        <p:txBody>
+          <a:bodyPr wrap="square" lIns="0" tIns="0" rIns="0" bIns="0" rtlCol="0" anchor="ctr"/>
+          <a:lstStyle/>
+          <a:p>
+            <a:pPr indent="0" marL="0">
+              <a:buNone/>
+            </a:pPr>
+            <a:r>
+              <a:rPr lang="en-US" sz="1300" b="1" dirty="0">
+                <a:solidFill>
+                  <a:srgbClr val="0068B7"/>
+                </a:solidFill>
+                <a:latin typeface="Aptos" pitchFamily="34" charset="0"/>
+                <a:ea typeface="Aptos" pitchFamily="34" charset="-122"/>
+                <a:cs typeface="Aptos" pitchFamily="34" charset="-120"/>
+              </a:rPr>
+              <a:t>Concept checkpoints</a:t>
+            </a:r>
+            <a:endParaRPr lang="en-US" sz="1300" dirty="0"/>
+          </a:p>
+        </p:txBody>
+      </p:sp>
+      <p:sp>
+        <p:nvSpPr>
+          <p:cNvPr id="15" name="Text 13"/>
+          <p:cNvSpPr/>
+          <p:nvPr/>
+        </p:nvSpPr>
+        <p:spPr>
+          <a:xfrm>
+            <a:off x="7818120" y="3300984"/>
+            <a:ext cx="3090672" cy="877824"/>
+          </a:xfrm>
+          <a:prstGeom prst="rect">
+            <a:avLst/>
+          </a:prstGeom>
+          <a:noFill/>
+          <a:ln/>
+        </p:spPr>
+        <p:txBody>
+          <a:bodyPr wrap="square" lIns="254" tIns="254" rIns="254" bIns="254" rtlCol="0" anchor="t">
+            <a:normAutofit/>
+          </a:bodyPr>
+          <a:lstStyle/>
+          <a:p>
+            <a:r>
+              <a:rPr lang="en-US" sz="1380" dirty="0">
+                <a:solidFill>
+                  <a:srgbClr val="17364A"/>
+                </a:solidFill>
+                <a:latin typeface="Aptos" pitchFamily="34" charset="0"/>
+                <a:ea typeface="Aptos" pitchFamily="34" charset="-122"/>
+                <a:cs typeface="Aptos" pitchFamily="34" charset="-120"/>
+              </a:rPr>
+              <a:t>Which current or proposed AI use case in your agency raises this leadership or governance.</a:t>
+            </a:r>
+            <a:endParaRPr lang="en-US" sz="1380" dirty="0"/>
+          </a:p>
+          <a:p>
+            <a:r>
+              <a:rPr lang="en-US" sz="1380" dirty="0">
+                <a:solidFill>
+                  <a:srgbClr val="17364A"/>
+                </a:solidFill>
+                <a:latin typeface="Aptos" pitchFamily="34" charset="0"/>
+                <a:ea typeface="Aptos" pitchFamily="34" charset="-122"/>
+                <a:cs typeface="Aptos" pitchFamily="34" charset="-120"/>
+              </a:rPr>
+              <a:t>Who currently has authority to make decisions about this issue, and is that authority.</a:t>
+            </a:r>
+            <a:endParaRPr lang="en-US" sz="1380" dirty="0"/>
+          </a:p>
+          <a:p>
+            <a:r>
+              <a:rPr lang="en-US" sz="1380" dirty="0">
+                <a:solidFill>
+                  <a:srgbClr val="17364A"/>
+                </a:solidFill>
+                <a:latin typeface="Aptos" pitchFamily="34" charset="0"/>
+                <a:ea typeface="Aptos" pitchFamily="34" charset="-122"/>
+                <a:cs typeface="Aptos" pitchFamily="34" charset="-120"/>
+              </a:rPr>
+              <a:t>What evidence would governance or leadership need before approving the use case?</a:t>
+            </a:r>
+            <a:endParaRPr lang="en-US" sz="1380" dirty="0"/>
+          </a:p>
+        </p:txBody>
       </p:sp>
       <p:sp>
         <p:nvSpPr>
           <p:cNvPr id="16" name="Shape 14"/>
-          <p:cNvSpPr/>
-          <p:nvPr/>
-        </p:nvSpPr>
-        <p:spPr>
-          <a:xfrm>
-            <a:off x="9198864" y="4206240"/>
-            <a:ext cx="347472" cy="347472"/>
-          </a:xfrm>
-          <a:prstGeom prst="ellipse">
-            <a:avLst/>
-          </a:prstGeom>
-          <a:solidFill>
-            <a:srgbClr val="2F8A28"/>
-          </a:solidFill>
-          <a:ln w="12700">
-            <a:solidFill>
-              <a:srgbClr val="2F8A28"/>
-            </a:solidFill>
-            <a:prstDash val="solid"/>
-          </a:ln>
-        </p:spPr>
-      </p:sp>
-      <p:sp>
-        <p:nvSpPr>
-          <p:cNvPr id="17" name="Text 15"/>
-          <p:cNvSpPr/>
-          <p:nvPr/>
-        </p:nvSpPr>
-        <p:spPr>
-          <a:xfrm>
-            <a:off x="7909560" y="3977640"/>
-            <a:ext cx="2926080" cy="182880"/>
-          </a:xfrm>
-          <a:prstGeom prst="rect">
-            <a:avLst/>
-          </a:prstGeom>
-          <a:noFill/>
-          <a:ln/>
-        </p:spPr>
-        <p:txBody>
-          <a:bodyPr wrap="square" lIns="0" tIns="0" rIns="0" bIns="0" rtlCol="0" anchor="ctr"/>
-          <a:lstStyle/>
-          <a:p>
-            <a:pPr algn="ctr" indent="0" marL="0">
-              <a:buNone/>
-            </a:pPr>
-            <a:r>
-              <a:rPr lang="en-US" sz="1000" dirty="0">
-                <a:solidFill>
-                  <a:srgbClr val="003A63"/>
-                </a:solidFill>
-                <a:latin typeface="Aptos" pitchFamily="34" charset="0"/>
-                <a:ea typeface="Aptos" pitchFamily="34" charset="-122"/>
-                <a:cs typeface="Aptos" pitchFamily="34" charset="-120"/>
-              </a:rPr>
-              <a:t>Concept to action</a:t>
-            </a:r>
-            <a:endParaRPr lang="en-US" sz="1000" dirty="0"/>
-          </a:p>
-        </p:txBody>
-      </p:sp>
-      <p:sp>
-        <p:nvSpPr>
-          <p:cNvPr id="18" name="Shape 16"/>
           <p:cNvSpPr/>
           <p:nvPr/>
         </p:nvSpPr>
@@ -5915,7 +5642,7 @@
       </p:sp>
       <p:sp>
         <p:nvSpPr>
-          <p:cNvPr id="19" name="Text 17"/>
+          <p:cNvPr id="17" name="Text 15"/>
           <p:cNvSpPr/>
           <p:nvPr/>
         </p:nvSpPr>
@@ -5954,7 +5681,7 @@
       </p:sp>
       <p:sp>
         <p:nvSpPr>
-          <p:cNvPr id="20" name="Text 18"/>
+          <p:cNvPr id="18" name="Text 16"/>
           <p:cNvSpPr/>
           <p:nvPr/>
         </p:nvSpPr>
@@ -6448,13 +6175,11 @@
             </a:avLst>
           </a:prstGeom>
           <a:solidFill>
-            <a:srgbClr val="FFFFFF">
-              <a:alpha val="88000"/>
-            </a:srgbClr>
+            <a:srgbClr val="FFFFFF"/>
           </a:solidFill>
           <a:ln w="12700">
             <a:solidFill>
-              <a:srgbClr val="D6E8F2"/>
+              <a:srgbClr val="B9D7E6"/>
             </a:solidFill>
             <a:prstDash val="solid"/>
           </a:ln>
@@ -6462,119 +6187,98 @@
       </p:sp>
       <p:sp>
         <p:nvSpPr>
-          <p:cNvPr id="14" name="Shape 12"/>
-          <p:cNvSpPr/>
-          <p:nvPr/>
-        </p:nvSpPr>
-        <p:spPr>
-          <a:xfrm>
-            <a:off x="8074152" y="3291840"/>
-            <a:ext cx="2596896" cy="749808"/>
-          </a:xfrm>
-          <a:prstGeom prst="rect">
-            <a:avLst/>
-          </a:prstGeom>
-          <a:solidFill>
-            <a:srgbClr val="EAF6F8"/>
-          </a:solidFill>
-          <a:ln w="12700">
-            <a:solidFill>
-              <a:srgbClr val="8ABBD8"/>
-            </a:solidFill>
-            <a:prstDash val="solid"/>
-          </a:ln>
-        </p:spPr>
-      </p:sp>
-      <p:sp>
-        <p:nvSpPr>
-          <p:cNvPr id="15" name="Shape 13"/>
-          <p:cNvSpPr/>
-          <p:nvPr/>
-        </p:nvSpPr>
-        <p:spPr>
-          <a:xfrm>
-            <a:off x="8202168" y="3721608"/>
-            <a:ext cx="2340864" cy="0"/>
-          </a:xfrm>
-          <a:prstGeom prst="line">
-            <a:avLst/>
-          </a:prstGeom>
-          <a:noFill/>
-          <a:ln w="19050">
-            <a:solidFill>
-              <a:srgbClr val="0068B7"/>
-            </a:solidFill>
-            <a:prstDash val="solid"/>
-          </a:ln>
-        </p:spPr>
+          <p:cNvPr id="14" name="Text 12"/>
+          <p:cNvSpPr/>
+          <p:nvPr/>
+        </p:nvSpPr>
+        <p:spPr>
+          <a:xfrm>
+            <a:off x="7799832" y="2935224"/>
+            <a:ext cx="3145536" cy="256032"/>
+          </a:xfrm>
+          <a:prstGeom prst="rect">
+            <a:avLst/>
+          </a:prstGeom>
+          <a:noFill/>
+          <a:ln/>
+        </p:spPr>
+        <p:txBody>
+          <a:bodyPr wrap="square" lIns="0" tIns="0" rIns="0" bIns="0" rtlCol="0" anchor="ctr"/>
+          <a:lstStyle/>
+          <a:p>
+            <a:pPr indent="0" marL="0">
+              <a:buNone/>
+            </a:pPr>
+            <a:r>
+              <a:rPr lang="en-US" sz="1300" b="1" dirty="0">
+                <a:solidFill>
+                  <a:srgbClr val="0068B7"/>
+                </a:solidFill>
+                <a:latin typeface="Aptos" pitchFamily="34" charset="0"/>
+                <a:ea typeface="Aptos" pitchFamily="34" charset="-122"/>
+                <a:cs typeface="Aptos" pitchFamily="34" charset="-120"/>
+              </a:rPr>
+              <a:t>Concept checkpoints</a:t>
+            </a:r>
+            <a:endParaRPr lang="en-US" sz="1300" dirty="0"/>
+          </a:p>
+        </p:txBody>
+      </p:sp>
+      <p:sp>
+        <p:nvSpPr>
+          <p:cNvPr id="15" name="Text 13"/>
+          <p:cNvSpPr/>
+          <p:nvPr/>
+        </p:nvSpPr>
+        <p:spPr>
+          <a:xfrm>
+            <a:off x="7818120" y="3300984"/>
+            <a:ext cx="3090672" cy="877824"/>
+          </a:xfrm>
+          <a:prstGeom prst="rect">
+            <a:avLst/>
+          </a:prstGeom>
+          <a:noFill/>
+          <a:ln/>
+        </p:spPr>
+        <p:txBody>
+          <a:bodyPr wrap="square" lIns="254" tIns="254" rIns="254" bIns="254" rtlCol="0" anchor="t">
+            <a:normAutofit/>
+          </a:bodyPr>
+          <a:lstStyle/>
+          <a:p>
+            <a:r>
+              <a:rPr lang="en-US" sz="1380" dirty="0">
+                <a:solidFill>
+                  <a:srgbClr val="17364A"/>
+                </a:solidFill>
+                <a:latin typeface="Aptos" pitchFamily="34" charset="0"/>
+                <a:ea typeface="Aptos" pitchFamily="34" charset="-122"/>
+                <a:cs typeface="Aptos" pitchFamily="34" charset="-120"/>
+              </a:rPr>
+              <a:t>Which staff, partners, or communities would be affected if this issue were handled poorly?</a:t>
+            </a:r>
+            <a:endParaRPr lang="en-US" sz="1380" dirty="0"/>
+          </a:p>
+          <a:p>
+            <a:r>
+              <a:rPr lang="en-US" sz="1380" dirty="0">
+                <a:solidFill>
+                  <a:srgbClr val="17364A"/>
+                </a:solidFill>
+                <a:latin typeface="Aptos" pitchFamily="34" charset="0"/>
+                <a:ea typeface="Aptos" pitchFamily="34" charset="-122"/>
+                <a:cs typeface="Aptos" pitchFamily="34" charset="-120"/>
+              </a:rPr>
+              <a:t>What policy, process, or artifact should be created or updated after this module?</a:t>
+            </a:r>
+            <a:endParaRPr lang="en-US" sz="1380" dirty="0"/>
+          </a:p>
+        </p:txBody>
       </p:sp>
       <p:sp>
         <p:nvSpPr>
           <p:cNvPr id="16" name="Shape 14"/>
-          <p:cNvSpPr/>
-          <p:nvPr/>
-        </p:nvSpPr>
-        <p:spPr>
-          <a:xfrm>
-            <a:off x="9198864" y="4206240"/>
-            <a:ext cx="347472" cy="347472"/>
-          </a:xfrm>
-          <a:prstGeom prst="ellipse">
-            <a:avLst/>
-          </a:prstGeom>
-          <a:solidFill>
-            <a:srgbClr val="2F8A28"/>
-          </a:solidFill>
-          <a:ln w="12700">
-            <a:solidFill>
-              <a:srgbClr val="2F8A28"/>
-            </a:solidFill>
-            <a:prstDash val="solid"/>
-          </a:ln>
-        </p:spPr>
-      </p:sp>
-      <p:sp>
-        <p:nvSpPr>
-          <p:cNvPr id="17" name="Text 15"/>
-          <p:cNvSpPr/>
-          <p:nvPr/>
-        </p:nvSpPr>
-        <p:spPr>
-          <a:xfrm>
-            <a:off x="7909560" y="3977640"/>
-            <a:ext cx="2926080" cy="182880"/>
-          </a:xfrm>
-          <a:prstGeom prst="rect">
-            <a:avLst/>
-          </a:prstGeom>
-          <a:noFill/>
-          <a:ln/>
-        </p:spPr>
-        <p:txBody>
-          <a:bodyPr wrap="square" lIns="0" tIns="0" rIns="0" bIns="0" rtlCol="0" anchor="ctr"/>
-          <a:lstStyle/>
-          <a:p>
-            <a:pPr algn="ctr" indent="0" marL="0">
-              <a:buNone/>
-            </a:pPr>
-            <a:r>
-              <a:rPr lang="en-US" sz="1000" dirty="0">
-                <a:solidFill>
-                  <a:srgbClr val="003A63"/>
-                </a:solidFill>
-                <a:latin typeface="Aptos" pitchFamily="34" charset="0"/>
-                <a:ea typeface="Aptos" pitchFamily="34" charset="-122"/>
-                <a:cs typeface="Aptos" pitchFamily="34" charset="-120"/>
-              </a:rPr>
-              <a:t>Concept to action</a:t>
-            </a:r>
-            <a:endParaRPr lang="en-US" sz="1000" dirty="0"/>
-          </a:p>
-        </p:txBody>
-      </p:sp>
-      <p:sp>
-        <p:nvSpPr>
-          <p:cNvPr id="18" name="Shape 16"/>
           <p:cNvSpPr/>
           <p:nvPr/>
         </p:nvSpPr>
@@ -6601,7 +6305,7 @@
       </p:sp>
       <p:sp>
         <p:nvSpPr>
-          <p:cNvPr id="19" name="Text 17"/>
+          <p:cNvPr id="17" name="Text 15"/>
           <p:cNvSpPr/>
           <p:nvPr/>
         </p:nvSpPr>
@@ -6640,7 +6344,7 @@
       </p:sp>
       <p:sp>
         <p:nvSpPr>
-          <p:cNvPr id="20" name="Text 18"/>
+          <p:cNvPr id="18" name="Text 16"/>
           <p:cNvSpPr/>
           <p:nvPr/>
         </p:nvSpPr>
@@ -7134,13 +6838,11 @@
             </a:avLst>
           </a:prstGeom>
           <a:solidFill>
-            <a:srgbClr val="FFFFFF">
-              <a:alpha val="88000"/>
-            </a:srgbClr>
+            <a:srgbClr val="FFFFFF"/>
           </a:solidFill>
           <a:ln w="12700">
             <a:solidFill>
-              <a:srgbClr val="D6E8F2"/>
+              <a:srgbClr val="B9D7E6"/>
             </a:solidFill>
             <a:prstDash val="solid"/>
           </a:ln>
@@ -7148,119 +6850,98 @@
       </p:sp>
       <p:sp>
         <p:nvSpPr>
-          <p:cNvPr id="14" name="Shape 12"/>
-          <p:cNvSpPr/>
-          <p:nvPr/>
-        </p:nvSpPr>
-        <p:spPr>
-          <a:xfrm>
-            <a:off x="8074152" y="3291840"/>
-            <a:ext cx="2596896" cy="749808"/>
-          </a:xfrm>
-          <a:prstGeom prst="rect">
-            <a:avLst/>
-          </a:prstGeom>
-          <a:solidFill>
-            <a:srgbClr val="EAF6F8"/>
-          </a:solidFill>
-          <a:ln w="12700">
-            <a:solidFill>
-              <a:srgbClr val="8ABBD8"/>
-            </a:solidFill>
-            <a:prstDash val="solid"/>
-          </a:ln>
-        </p:spPr>
-      </p:sp>
-      <p:sp>
-        <p:nvSpPr>
-          <p:cNvPr id="15" name="Shape 13"/>
-          <p:cNvSpPr/>
-          <p:nvPr/>
-        </p:nvSpPr>
-        <p:spPr>
-          <a:xfrm>
-            <a:off x="8202168" y="3721608"/>
-            <a:ext cx="2340864" cy="0"/>
-          </a:xfrm>
-          <a:prstGeom prst="line">
-            <a:avLst/>
-          </a:prstGeom>
-          <a:noFill/>
-          <a:ln w="19050">
-            <a:solidFill>
-              <a:srgbClr val="0068B7"/>
-            </a:solidFill>
-            <a:prstDash val="solid"/>
-          </a:ln>
-        </p:spPr>
+          <p:cNvPr id="14" name="Text 12"/>
+          <p:cNvSpPr/>
+          <p:nvPr/>
+        </p:nvSpPr>
+        <p:spPr>
+          <a:xfrm>
+            <a:off x="7799832" y="2935224"/>
+            <a:ext cx="3145536" cy="256032"/>
+          </a:xfrm>
+          <a:prstGeom prst="rect">
+            <a:avLst/>
+          </a:prstGeom>
+          <a:noFill/>
+          <a:ln/>
+        </p:spPr>
+        <p:txBody>
+          <a:bodyPr wrap="square" lIns="0" tIns="0" rIns="0" bIns="0" rtlCol="0" anchor="ctr"/>
+          <a:lstStyle/>
+          <a:p>
+            <a:pPr indent="0" marL="0">
+              <a:buNone/>
+            </a:pPr>
+            <a:r>
+              <a:rPr lang="en-US" sz="1300" b="1" dirty="0">
+                <a:solidFill>
+                  <a:srgbClr val="0068B7"/>
+                </a:solidFill>
+                <a:latin typeface="Aptos" pitchFamily="34" charset="0"/>
+                <a:ea typeface="Aptos" pitchFamily="34" charset="-122"/>
+                <a:cs typeface="Aptos" pitchFamily="34" charset="-120"/>
+              </a:rPr>
+              <a:t>Concept checkpoints</a:t>
+            </a:r>
+            <a:endParaRPr lang="en-US" sz="1300" dirty="0"/>
+          </a:p>
+        </p:txBody>
+      </p:sp>
+      <p:sp>
+        <p:nvSpPr>
+          <p:cNvPr id="15" name="Text 13"/>
+          <p:cNvSpPr/>
+          <p:nvPr/>
+        </p:nvSpPr>
+        <p:spPr>
+          <a:xfrm>
+            <a:off x="7818120" y="3300984"/>
+            <a:ext cx="3090672" cy="877824"/>
+          </a:xfrm>
+          <a:prstGeom prst="rect">
+            <a:avLst/>
+          </a:prstGeom>
+          <a:noFill/>
+          <a:ln/>
+        </p:spPr>
+        <p:txBody>
+          <a:bodyPr wrap="square" lIns="254" tIns="254" rIns="254" bIns="254" rtlCol="0" anchor="t">
+            <a:normAutofit/>
+          </a:bodyPr>
+          <a:lstStyle/>
+          <a:p>
+            <a:r>
+              <a:rPr lang="en-US" sz="1380" dirty="0">
+                <a:solidFill>
+                  <a:srgbClr val="17364A"/>
+                </a:solidFill>
+                <a:latin typeface="Aptos" pitchFamily="34" charset="0"/>
+                <a:ea typeface="Aptos" pitchFamily="34" charset="-122"/>
+                <a:cs typeface="Aptos" pitchFamily="34" charset="-120"/>
+              </a:rPr>
+              <a:t>Create a decision-rights matrix for one AI use case.</a:t>
+            </a:r>
+            <a:endParaRPr lang="en-US" sz="1380" dirty="0"/>
+          </a:p>
+          <a:p>
+            <a:r>
+              <a:rPr lang="en-US" sz="1380" dirty="0">
+                <a:solidFill>
+                  <a:srgbClr val="17364A"/>
+                </a:solidFill>
+                <a:latin typeface="Aptos" pitchFamily="34" charset="0"/>
+                <a:ea typeface="Aptos" pitchFamily="34" charset="-122"/>
+                <a:cs typeface="Aptos" pitchFamily="34" charset="-120"/>
+              </a:rPr>
+              <a:t>Include approval, data access, validation, launch, monitoring, incident escalation, risk.</a:t>
+            </a:r>
+            <a:endParaRPr lang="en-US" sz="1380" dirty="0"/>
+          </a:p>
+        </p:txBody>
       </p:sp>
       <p:sp>
         <p:nvSpPr>
           <p:cNvPr id="16" name="Shape 14"/>
-          <p:cNvSpPr/>
-          <p:nvPr/>
-        </p:nvSpPr>
-        <p:spPr>
-          <a:xfrm>
-            <a:off x="9198864" y="4206240"/>
-            <a:ext cx="347472" cy="347472"/>
-          </a:xfrm>
-          <a:prstGeom prst="ellipse">
-            <a:avLst/>
-          </a:prstGeom>
-          <a:solidFill>
-            <a:srgbClr val="2F8A28"/>
-          </a:solidFill>
-          <a:ln w="12700">
-            <a:solidFill>
-              <a:srgbClr val="2F8A28"/>
-            </a:solidFill>
-            <a:prstDash val="solid"/>
-          </a:ln>
-        </p:spPr>
-      </p:sp>
-      <p:sp>
-        <p:nvSpPr>
-          <p:cNvPr id="17" name="Text 15"/>
-          <p:cNvSpPr/>
-          <p:nvPr/>
-        </p:nvSpPr>
-        <p:spPr>
-          <a:xfrm>
-            <a:off x="7909560" y="3977640"/>
-            <a:ext cx="2926080" cy="182880"/>
-          </a:xfrm>
-          <a:prstGeom prst="rect">
-            <a:avLst/>
-          </a:prstGeom>
-          <a:noFill/>
-          <a:ln/>
-        </p:spPr>
-        <p:txBody>
-          <a:bodyPr wrap="square" lIns="0" tIns="0" rIns="0" bIns="0" rtlCol="0" anchor="ctr"/>
-          <a:lstStyle/>
-          <a:p>
-            <a:pPr algn="ctr" indent="0" marL="0">
-              <a:buNone/>
-            </a:pPr>
-            <a:r>
-              <a:rPr lang="en-US" sz="1000" dirty="0">
-                <a:solidFill>
-                  <a:srgbClr val="003A63"/>
-                </a:solidFill>
-                <a:latin typeface="Aptos" pitchFamily="34" charset="0"/>
-                <a:ea typeface="Aptos" pitchFamily="34" charset="-122"/>
-                <a:cs typeface="Aptos" pitchFamily="34" charset="-120"/>
-              </a:rPr>
-              <a:t>Concept to action</a:t>
-            </a:r>
-            <a:endParaRPr lang="en-US" sz="1000" dirty="0"/>
-          </a:p>
-        </p:txBody>
-      </p:sp>
-      <p:sp>
-        <p:nvSpPr>
-          <p:cNvPr id="18" name="Shape 16"/>
           <p:cNvSpPr/>
           <p:nvPr/>
         </p:nvSpPr>
@@ -7287,7 +6968,7 @@
       </p:sp>
       <p:sp>
         <p:nvSpPr>
-          <p:cNvPr id="19" name="Text 17"/>
+          <p:cNvPr id="17" name="Text 15"/>
           <p:cNvSpPr/>
           <p:nvPr/>
         </p:nvSpPr>
@@ -7326,7 +7007,7 @@
       </p:sp>
       <p:sp>
         <p:nvSpPr>
-          <p:cNvPr id="20" name="Text 18"/>
+          <p:cNvPr id="18" name="Text 16"/>
           <p:cNvSpPr/>
           <p:nvPr/>
         </p:nvSpPr>
@@ -7834,13 +7515,11 @@
             </a:avLst>
           </a:prstGeom>
           <a:solidFill>
-            <a:srgbClr val="FFFFFF">
-              <a:alpha val="88000"/>
-            </a:srgbClr>
+            <a:srgbClr val="FFFFFF"/>
           </a:solidFill>
           <a:ln w="12700">
             <a:solidFill>
-              <a:srgbClr val="D6E8F2"/>
+              <a:srgbClr val="B9D7E6"/>
             </a:solidFill>
             <a:prstDash val="solid"/>
           </a:ln>
@@ -7848,119 +7527,98 @@
       </p:sp>
       <p:sp>
         <p:nvSpPr>
-          <p:cNvPr id="14" name="Shape 12"/>
-          <p:cNvSpPr/>
-          <p:nvPr/>
-        </p:nvSpPr>
-        <p:spPr>
-          <a:xfrm>
-            <a:off x="8074152" y="3291840"/>
-            <a:ext cx="2596896" cy="749808"/>
-          </a:xfrm>
-          <a:prstGeom prst="rect">
-            <a:avLst/>
-          </a:prstGeom>
-          <a:solidFill>
-            <a:srgbClr val="EAF6F8"/>
-          </a:solidFill>
-          <a:ln w="12700">
-            <a:solidFill>
-              <a:srgbClr val="8ABBD8"/>
-            </a:solidFill>
-            <a:prstDash val="solid"/>
-          </a:ln>
-        </p:spPr>
-      </p:sp>
-      <p:sp>
-        <p:nvSpPr>
-          <p:cNvPr id="15" name="Shape 13"/>
-          <p:cNvSpPr/>
-          <p:nvPr/>
-        </p:nvSpPr>
-        <p:spPr>
-          <a:xfrm>
-            <a:off x="8202168" y="3721608"/>
-            <a:ext cx="2340864" cy="0"/>
-          </a:xfrm>
-          <a:prstGeom prst="line">
-            <a:avLst/>
-          </a:prstGeom>
-          <a:noFill/>
-          <a:ln w="19050">
-            <a:solidFill>
-              <a:srgbClr val="0068B7"/>
-            </a:solidFill>
-            <a:prstDash val="solid"/>
-          </a:ln>
-        </p:spPr>
+          <p:cNvPr id="14" name="Text 12"/>
+          <p:cNvSpPr/>
+          <p:nvPr/>
+        </p:nvSpPr>
+        <p:spPr>
+          <a:xfrm>
+            <a:off x="7799832" y="2935224"/>
+            <a:ext cx="3145536" cy="256032"/>
+          </a:xfrm>
+          <a:prstGeom prst="rect">
+            <a:avLst/>
+          </a:prstGeom>
+          <a:noFill/>
+          <a:ln/>
+        </p:spPr>
+        <p:txBody>
+          <a:bodyPr wrap="square" lIns="0" tIns="0" rIns="0" bIns="0" rtlCol="0" anchor="ctr"/>
+          <a:lstStyle/>
+          <a:p>
+            <a:pPr indent="0" marL="0">
+              <a:buNone/>
+            </a:pPr>
+            <a:r>
+              <a:rPr lang="en-US" sz="1300" b="1" dirty="0">
+                <a:solidFill>
+                  <a:srgbClr val="0068B7"/>
+                </a:solidFill>
+                <a:latin typeface="Aptos" pitchFamily="34" charset="0"/>
+                <a:ea typeface="Aptos" pitchFamily="34" charset="-122"/>
+                <a:cs typeface="Aptos" pitchFamily="34" charset="-120"/>
+              </a:rPr>
+              <a:t>Concept checkpoints</a:t>
+            </a:r>
+            <a:endParaRPr lang="en-US" sz="1300" dirty="0"/>
+          </a:p>
+        </p:txBody>
+      </p:sp>
+      <p:sp>
+        <p:nvSpPr>
+          <p:cNvPr id="15" name="Text 13"/>
+          <p:cNvSpPr/>
+          <p:nvPr/>
+        </p:nvSpPr>
+        <p:spPr>
+          <a:xfrm>
+            <a:off x="7818120" y="3300984"/>
+            <a:ext cx="3090672" cy="877824"/>
+          </a:xfrm>
+          <a:prstGeom prst="rect">
+            <a:avLst/>
+          </a:prstGeom>
+          <a:noFill/>
+          <a:ln/>
+        </p:spPr>
+        <p:txBody>
+          <a:bodyPr wrap="square" lIns="254" tIns="254" rIns="254" bIns="254" rtlCol="0" anchor="t">
+            <a:normAutofit/>
+          </a:bodyPr>
+          <a:lstStyle/>
+          <a:p>
+            <a:r>
+              <a:rPr lang="en-US" sz="1380" dirty="0">
+                <a:solidFill>
+                  <a:srgbClr val="17364A"/>
+                </a:solidFill>
+                <a:latin typeface="Aptos" pitchFamily="34" charset="0"/>
+                <a:ea typeface="Aptos" pitchFamily="34" charset="-122"/>
+                <a:cs typeface="Aptos" pitchFamily="34" charset="-120"/>
+              </a:rPr>
+              <a:t>Document assumptions, unresolved questions, and which agency roles would need to review.</a:t>
+            </a:r>
+            <a:endParaRPr lang="en-US" sz="1380" dirty="0"/>
+          </a:p>
+          <a:p>
+            <a:r>
+              <a:rPr lang="en-US" sz="1380" dirty="0">
+                <a:solidFill>
+                  <a:srgbClr val="17364A"/>
+                </a:solidFill>
+                <a:latin typeface="Aptos" pitchFamily="34" charset="0"/>
+                <a:ea typeface="Aptos" pitchFamily="34" charset="-122"/>
+                <a:cs typeface="Aptos" pitchFamily="34" charset="-120"/>
+              </a:rPr>
+              <a:t>The exercise should produce a work product that could support governance review,.</a:t>
+            </a:r>
+            <a:endParaRPr lang="en-US" sz="1380" dirty="0"/>
+          </a:p>
+        </p:txBody>
       </p:sp>
       <p:sp>
         <p:nvSpPr>
           <p:cNvPr id="16" name="Shape 14"/>
-          <p:cNvSpPr/>
-          <p:nvPr/>
-        </p:nvSpPr>
-        <p:spPr>
-          <a:xfrm>
-            <a:off x="9198864" y="4206240"/>
-            <a:ext cx="347472" cy="347472"/>
-          </a:xfrm>
-          <a:prstGeom prst="ellipse">
-            <a:avLst/>
-          </a:prstGeom>
-          <a:solidFill>
-            <a:srgbClr val="2F8A28"/>
-          </a:solidFill>
-          <a:ln w="12700">
-            <a:solidFill>
-              <a:srgbClr val="2F8A28"/>
-            </a:solidFill>
-            <a:prstDash val="solid"/>
-          </a:ln>
-        </p:spPr>
-      </p:sp>
-      <p:sp>
-        <p:nvSpPr>
-          <p:cNvPr id="17" name="Text 15"/>
-          <p:cNvSpPr/>
-          <p:nvPr/>
-        </p:nvSpPr>
-        <p:spPr>
-          <a:xfrm>
-            <a:off x="7909560" y="3977640"/>
-            <a:ext cx="2926080" cy="182880"/>
-          </a:xfrm>
-          <a:prstGeom prst="rect">
-            <a:avLst/>
-          </a:prstGeom>
-          <a:noFill/>
-          <a:ln/>
-        </p:spPr>
-        <p:txBody>
-          <a:bodyPr wrap="square" lIns="0" tIns="0" rIns="0" bIns="0" rtlCol="0" anchor="ctr"/>
-          <a:lstStyle/>
-          <a:p>
-            <a:pPr algn="ctr" indent="0" marL="0">
-              <a:buNone/>
-            </a:pPr>
-            <a:r>
-              <a:rPr lang="en-US" sz="1000" dirty="0">
-                <a:solidFill>
-                  <a:srgbClr val="003A63"/>
-                </a:solidFill>
-                <a:latin typeface="Aptos" pitchFamily="34" charset="0"/>
-                <a:ea typeface="Aptos" pitchFamily="34" charset="-122"/>
-                <a:cs typeface="Aptos" pitchFamily="34" charset="-120"/>
-              </a:rPr>
-              <a:t>Concept to action</a:t>
-            </a:r>
-            <a:endParaRPr lang="en-US" sz="1000" dirty="0"/>
-          </a:p>
-        </p:txBody>
-      </p:sp>
-      <p:sp>
-        <p:nvSpPr>
-          <p:cNvPr id="18" name="Shape 16"/>
           <p:cNvSpPr/>
           <p:nvPr/>
         </p:nvSpPr>
@@ -7987,7 +7645,7 @@
       </p:sp>
       <p:sp>
         <p:nvSpPr>
-          <p:cNvPr id="19" name="Text 17"/>
+          <p:cNvPr id="17" name="Text 15"/>
           <p:cNvSpPr/>
           <p:nvPr/>
         </p:nvSpPr>
@@ -8026,7 +7684,7 @@
       </p:sp>
       <p:sp>
         <p:nvSpPr>
-          <p:cNvPr id="20" name="Text 18"/>
+          <p:cNvPr id="18" name="Text 16"/>
           <p:cNvSpPr/>
           <p:nvPr/>
         </p:nvSpPr>
@@ -8506,13 +8164,11 @@
             </a:avLst>
           </a:prstGeom>
           <a:solidFill>
-            <a:srgbClr val="FFFFFF">
-              <a:alpha val="88000"/>
-            </a:srgbClr>
+            <a:srgbClr val="FFFFFF"/>
           </a:solidFill>
           <a:ln w="12700">
             <a:solidFill>
-              <a:srgbClr val="D6E8F2"/>
+              <a:srgbClr val="B9D7E6"/>
             </a:solidFill>
             <a:prstDash val="solid"/>
           </a:ln>
@@ -8520,119 +8176,84 @@
       </p:sp>
       <p:sp>
         <p:nvSpPr>
-          <p:cNvPr id="14" name="Shape 12"/>
-          <p:cNvSpPr/>
-          <p:nvPr/>
-        </p:nvSpPr>
-        <p:spPr>
-          <a:xfrm>
-            <a:off x="8074152" y="3291840"/>
-            <a:ext cx="2596896" cy="749808"/>
-          </a:xfrm>
-          <a:prstGeom prst="rect">
-            <a:avLst/>
-          </a:prstGeom>
-          <a:solidFill>
-            <a:srgbClr val="EAF6F8"/>
-          </a:solidFill>
-          <a:ln w="12700">
-            <a:solidFill>
-              <a:srgbClr val="8ABBD8"/>
-            </a:solidFill>
-            <a:prstDash val="solid"/>
-          </a:ln>
-        </p:spPr>
-      </p:sp>
-      <p:sp>
-        <p:nvSpPr>
-          <p:cNvPr id="15" name="Shape 13"/>
-          <p:cNvSpPr/>
-          <p:nvPr/>
-        </p:nvSpPr>
-        <p:spPr>
-          <a:xfrm>
-            <a:off x="8202168" y="3721608"/>
-            <a:ext cx="2340864" cy="0"/>
-          </a:xfrm>
-          <a:prstGeom prst="line">
-            <a:avLst/>
-          </a:prstGeom>
-          <a:noFill/>
-          <a:ln w="19050">
-            <a:solidFill>
-              <a:srgbClr val="0068B7"/>
-            </a:solidFill>
-            <a:prstDash val="solid"/>
-          </a:ln>
-        </p:spPr>
+          <p:cNvPr id="14" name="Text 12"/>
+          <p:cNvSpPr/>
+          <p:nvPr/>
+        </p:nvSpPr>
+        <p:spPr>
+          <a:xfrm>
+            <a:off x="7799832" y="2935224"/>
+            <a:ext cx="3145536" cy="256032"/>
+          </a:xfrm>
+          <a:prstGeom prst="rect">
+            <a:avLst/>
+          </a:prstGeom>
+          <a:noFill/>
+          <a:ln/>
+        </p:spPr>
+        <p:txBody>
+          <a:bodyPr wrap="square" lIns="0" tIns="0" rIns="0" bIns="0" rtlCol="0" anchor="ctr"/>
+          <a:lstStyle/>
+          <a:p>
+            <a:pPr indent="0" marL="0">
+              <a:buNone/>
+            </a:pPr>
+            <a:r>
+              <a:rPr lang="en-US" sz="1300" b="1" dirty="0">
+                <a:solidFill>
+                  <a:srgbClr val="0068B7"/>
+                </a:solidFill>
+                <a:latin typeface="Aptos" pitchFamily="34" charset="0"/>
+                <a:ea typeface="Aptos" pitchFamily="34" charset="-122"/>
+                <a:cs typeface="Aptos" pitchFamily="34" charset="-120"/>
+              </a:rPr>
+              <a:t>Concept checkpoints</a:t>
+            </a:r>
+            <a:endParaRPr lang="en-US" sz="1300" dirty="0"/>
+          </a:p>
+        </p:txBody>
+      </p:sp>
+      <p:sp>
+        <p:nvSpPr>
+          <p:cNvPr id="15" name="Text 13"/>
+          <p:cNvSpPr/>
+          <p:nvPr/>
+        </p:nvSpPr>
+        <p:spPr>
+          <a:xfrm>
+            <a:off x="7818120" y="3300984"/>
+            <a:ext cx="3090672" cy="877824"/>
+          </a:xfrm>
+          <a:prstGeom prst="rect">
+            <a:avLst/>
+          </a:prstGeom>
+          <a:noFill/>
+          <a:ln/>
+        </p:spPr>
+        <p:txBody>
+          <a:bodyPr wrap="square" lIns="254" tIns="254" rIns="254" bIns="254" rtlCol="0" anchor="t">
+            <a:normAutofit/>
+          </a:bodyPr>
+          <a:lstStyle/>
+          <a:p>
+            <a:r>
+              <a:rPr lang="en-US" sz="1380" dirty="0">
+                <a:solidFill>
+                  <a:srgbClr val="17364A"/>
+                </a:solidFill>
+                <a:latin typeface="Aptos" pitchFamily="34" charset="0"/>
+                <a:ea typeface="Aptos" pitchFamily="34" charset="-122"/>
+                <a:cs typeface="Aptos" pitchFamily="34" charset="-120"/>
+              </a:rPr>
+              <a:t>Decision-rights matrix; RACI table; risk acceptance thresholds; escalation authority list.</a:t>
+            </a:r>
+            <a:endParaRPr lang="en-US" sz="1380" dirty="0"/>
+          </a:p>
+        </p:txBody>
       </p:sp>
       <p:sp>
         <p:nvSpPr>
           <p:cNvPr id="16" name="Shape 14"/>
-          <p:cNvSpPr/>
-          <p:nvPr/>
-        </p:nvSpPr>
-        <p:spPr>
-          <a:xfrm>
-            <a:off x="9198864" y="4206240"/>
-            <a:ext cx="347472" cy="347472"/>
-          </a:xfrm>
-          <a:prstGeom prst="ellipse">
-            <a:avLst/>
-          </a:prstGeom>
-          <a:solidFill>
-            <a:srgbClr val="2F8A28"/>
-          </a:solidFill>
-          <a:ln w="12700">
-            <a:solidFill>
-              <a:srgbClr val="2F8A28"/>
-            </a:solidFill>
-            <a:prstDash val="solid"/>
-          </a:ln>
-        </p:spPr>
-      </p:sp>
-      <p:sp>
-        <p:nvSpPr>
-          <p:cNvPr id="17" name="Text 15"/>
-          <p:cNvSpPr/>
-          <p:nvPr/>
-        </p:nvSpPr>
-        <p:spPr>
-          <a:xfrm>
-            <a:off x="7909560" y="3977640"/>
-            <a:ext cx="2926080" cy="182880"/>
-          </a:xfrm>
-          <a:prstGeom prst="rect">
-            <a:avLst/>
-          </a:prstGeom>
-          <a:noFill/>
-          <a:ln/>
-        </p:spPr>
-        <p:txBody>
-          <a:bodyPr wrap="square" lIns="0" tIns="0" rIns="0" bIns="0" rtlCol="0" anchor="ctr"/>
-          <a:lstStyle/>
-          <a:p>
-            <a:pPr algn="ctr" indent="0" marL="0">
-              <a:buNone/>
-            </a:pPr>
-            <a:r>
-              <a:rPr lang="en-US" sz="1000" dirty="0">
-                <a:solidFill>
-                  <a:srgbClr val="003A63"/>
-                </a:solidFill>
-                <a:latin typeface="Aptos" pitchFamily="34" charset="0"/>
-                <a:ea typeface="Aptos" pitchFamily="34" charset="-122"/>
-                <a:cs typeface="Aptos" pitchFamily="34" charset="-120"/>
-              </a:rPr>
-              <a:t>Concept to action</a:t>
-            </a:r>
-            <a:endParaRPr lang="en-US" sz="1000" dirty="0"/>
-          </a:p>
-        </p:txBody>
-      </p:sp>
-      <p:sp>
-        <p:nvSpPr>
-          <p:cNvPr id="18" name="Shape 16"/>
           <p:cNvSpPr/>
           <p:nvPr/>
         </p:nvSpPr>
@@ -8659,7 +8280,7 @@
       </p:sp>
       <p:sp>
         <p:nvSpPr>
-          <p:cNvPr id="19" name="Text 17"/>
+          <p:cNvPr id="17" name="Text 15"/>
           <p:cNvSpPr/>
           <p:nvPr/>
         </p:nvSpPr>
@@ -8698,7 +8319,7 @@
       </p:sp>
       <p:sp>
         <p:nvSpPr>
-          <p:cNvPr id="20" name="Text 18"/>
+          <p:cNvPr id="18" name="Text 16"/>
           <p:cNvSpPr/>
           <p:nvPr/>
         </p:nvSpPr>
@@ -9178,13 +8799,11 @@
             </a:avLst>
           </a:prstGeom>
           <a:solidFill>
-            <a:srgbClr val="FFFFFF">
-              <a:alpha val="88000"/>
-            </a:srgbClr>
+            <a:srgbClr val="FFFFFF"/>
           </a:solidFill>
           <a:ln w="12700">
             <a:solidFill>
-              <a:srgbClr val="D6E8F2"/>
+              <a:srgbClr val="B9D7E6"/>
             </a:solidFill>
             <a:prstDash val="solid"/>
           </a:ln>
@@ -9192,119 +8811,84 @@
       </p:sp>
       <p:sp>
         <p:nvSpPr>
-          <p:cNvPr id="14" name="Shape 12"/>
-          <p:cNvSpPr/>
-          <p:nvPr/>
-        </p:nvSpPr>
-        <p:spPr>
-          <a:xfrm>
-            <a:off x="8074152" y="3291840"/>
-            <a:ext cx="2596896" cy="749808"/>
-          </a:xfrm>
-          <a:prstGeom prst="rect">
-            <a:avLst/>
-          </a:prstGeom>
-          <a:solidFill>
-            <a:srgbClr val="EAF6F8"/>
-          </a:solidFill>
-          <a:ln w="12700">
-            <a:solidFill>
-              <a:srgbClr val="8ABBD8"/>
-            </a:solidFill>
-            <a:prstDash val="solid"/>
-          </a:ln>
-        </p:spPr>
-      </p:sp>
-      <p:sp>
-        <p:nvSpPr>
-          <p:cNvPr id="15" name="Shape 13"/>
-          <p:cNvSpPr/>
-          <p:nvPr/>
-        </p:nvSpPr>
-        <p:spPr>
-          <a:xfrm>
-            <a:off x="8202168" y="3721608"/>
-            <a:ext cx="2340864" cy="0"/>
-          </a:xfrm>
-          <a:prstGeom prst="line">
-            <a:avLst/>
-          </a:prstGeom>
-          <a:noFill/>
-          <a:ln w="19050">
-            <a:solidFill>
-              <a:srgbClr val="0068B7"/>
-            </a:solidFill>
-            <a:prstDash val="solid"/>
-          </a:ln>
-        </p:spPr>
+          <p:cNvPr id="14" name="Text 12"/>
+          <p:cNvSpPr/>
+          <p:nvPr/>
+        </p:nvSpPr>
+        <p:spPr>
+          <a:xfrm>
+            <a:off x="7799832" y="2935224"/>
+            <a:ext cx="3145536" cy="256032"/>
+          </a:xfrm>
+          <a:prstGeom prst="rect">
+            <a:avLst/>
+          </a:prstGeom>
+          <a:noFill/>
+          <a:ln/>
+        </p:spPr>
+        <p:txBody>
+          <a:bodyPr wrap="square" lIns="0" tIns="0" rIns="0" bIns="0" rtlCol="0" anchor="ctr"/>
+          <a:lstStyle/>
+          <a:p>
+            <a:pPr indent="0" marL="0">
+              <a:buNone/>
+            </a:pPr>
+            <a:r>
+              <a:rPr lang="en-US" sz="1300" b="1" dirty="0">
+                <a:solidFill>
+                  <a:srgbClr val="0068B7"/>
+                </a:solidFill>
+                <a:latin typeface="Aptos" pitchFamily="34" charset="0"/>
+                <a:ea typeface="Aptos" pitchFamily="34" charset="-122"/>
+                <a:cs typeface="Aptos" pitchFamily="34" charset="-120"/>
+              </a:rPr>
+              <a:t>Concept checkpoints</a:t>
+            </a:r>
+            <a:endParaRPr lang="en-US" sz="1300" dirty="0"/>
+          </a:p>
+        </p:txBody>
+      </p:sp>
+      <p:sp>
+        <p:nvSpPr>
+          <p:cNvPr id="15" name="Text 13"/>
+          <p:cNvSpPr/>
+          <p:nvPr/>
+        </p:nvSpPr>
+        <p:spPr>
+          <a:xfrm>
+            <a:off x="7818120" y="3300984"/>
+            <a:ext cx="3090672" cy="877824"/>
+          </a:xfrm>
+          <a:prstGeom prst="rect">
+            <a:avLst/>
+          </a:prstGeom>
+          <a:noFill/>
+          <a:ln/>
+        </p:spPr>
+        <p:txBody>
+          <a:bodyPr wrap="square" lIns="254" tIns="254" rIns="254" bIns="254" rtlCol="0" anchor="t">
+            <a:normAutofit/>
+          </a:bodyPr>
+          <a:lstStyle/>
+          <a:p>
+            <a:r>
+              <a:rPr lang="en-US" sz="1380" dirty="0">
+                <a:solidFill>
+                  <a:srgbClr val="17364A"/>
+                </a:solidFill>
+                <a:latin typeface="Aptos" pitchFamily="34" charset="0"/>
+                <a:ea typeface="Aptos" pitchFamily="34" charset="-122"/>
+                <a:cs typeface="Aptos" pitchFamily="34" charset="-120"/>
+              </a:rPr>
+              <a:t>Decision-rights matrix; RACI table; risk acceptance thresholds; escalation authority list.</a:t>
+            </a:r>
+            <a:endParaRPr lang="en-US" sz="1380" dirty="0"/>
+          </a:p>
+        </p:txBody>
       </p:sp>
       <p:sp>
         <p:nvSpPr>
           <p:cNvPr id="16" name="Shape 14"/>
-          <p:cNvSpPr/>
-          <p:nvPr/>
-        </p:nvSpPr>
-        <p:spPr>
-          <a:xfrm>
-            <a:off x="9198864" y="4206240"/>
-            <a:ext cx="347472" cy="347472"/>
-          </a:xfrm>
-          <a:prstGeom prst="ellipse">
-            <a:avLst/>
-          </a:prstGeom>
-          <a:solidFill>
-            <a:srgbClr val="2F8A28"/>
-          </a:solidFill>
-          <a:ln w="12700">
-            <a:solidFill>
-              <a:srgbClr val="2F8A28"/>
-            </a:solidFill>
-            <a:prstDash val="solid"/>
-          </a:ln>
-        </p:spPr>
-      </p:sp>
-      <p:sp>
-        <p:nvSpPr>
-          <p:cNvPr id="17" name="Text 15"/>
-          <p:cNvSpPr/>
-          <p:nvPr/>
-        </p:nvSpPr>
-        <p:spPr>
-          <a:xfrm>
-            <a:off x="7909560" y="3977640"/>
-            <a:ext cx="2926080" cy="182880"/>
-          </a:xfrm>
-          <a:prstGeom prst="rect">
-            <a:avLst/>
-          </a:prstGeom>
-          <a:noFill/>
-          <a:ln/>
-        </p:spPr>
-        <p:txBody>
-          <a:bodyPr wrap="square" lIns="0" tIns="0" rIns="0" bIns="0" rtlCol="0" anchor="ctr"/>
-          <a:lstStyle/>
-          <a:p>
-            <a:pPr algn="ctr" indent="0" marL="0">
-              <a:buNone/>
-            </a:pPr>
-            <a:r>
-              <a:rPr lang="en-US" sz="1000" dirty="0">
-                <a:solidFill>
-                  <a:srgbClr val="003A63"/>
-                </a:solidFill>
-                <a:latin typeface="Aptos" pitchFamily="34" charset="0"/>
-                <a:ea typeface="Aptos" pitchFamily="34" charset="-122"/>
-                <a:cs typeface="Aptos" pitchFamily="34" charset="-120"/>
-              </a:rPr>
-              <a:t>Concept to action</a:t>
-            </a:r>
-            <a:endParaRPr lang="en-US" sz="1000" dirty="0"/>
-          </a:p>
-        </p:txBody>
-      </p:sp>
-      <p:sp>
-        <p:nvSpPr>
-          <p:cNvPr id="18" name="Shape 16"/>
           <p:cNvSpPr/>
           <p:nvPr/>
         </p:nvSpPr>
@@ -9331,7 +8915,7 @@
       </p:sp>
       <p:sp>
         <p:nvSpPr>
-          <p:cNvPr id="19" name="Text 17"/>
+          <p:cNvPr id="17" name="Text 15"/>
           <p:cNvSpPr/>
           <p:nvPr/>
         </p:nvSpPr>
@@ -9370,7 +8954,7 @@
       </p:sp>
       <p:sp>
         <p:nvSpPr>
-          <p:cNvPr id="20" name="Text 18"/>
+          <p:cNvPr id="18" name="Text 16"/>
           <p:cNvSpPr/>
           <p:nvPr/>
         </p:nvSpPr>
@@ -9878,13 +9462,11 @@
             </a:avLst>
           </a:prstGeom>
           <a:solidFill>
-            <a:srgbClr val="FFFFFF">
-              <a:alpha val="88000"/>
-            </a:srgbClr>
+            <a:srgbClr val="FFFFFF"/>
           </a:solidFill>
           <a:ln w="12700">
             <a:solidFill>
-              <a:srgbClr val="D6E8F2"/>
+              <a:srgbClr val="B9D7E6"/>
             </a:solidFill>
             <a:prstDash val="solid"/>
           </a:ln>
@@ -9892,119 +9474,112 @@
       </p:sp>
       <p:sp>
         <p:nvSpPr>
-          <p:cNvPr id="14" name="Shape 12"/>
-          <p:cNvSpPr/>
-          <p:nvPr/>
-        </p:nvSpPr>
-        <p:spPr>
-          <a:xfrm>
-            <a:off x="8074152" y="3291840"/>
-            <a:ext cx="2596896" cy="749808"/>
-          </a:xfrm>
-          <a:prstGeom prst="rect">
-            <a:avLst/>
-          </a:prstGeom>
-          <a:solidFill>
-            <a:srgbClr val="EAF6F8"/>
-          </a:solidFill>
-          <a:ln w="12700">
-            <a:solidFill>
-              <a:srgbClr val="8ABBD8"/>
-            </a:solidFill>
-            <a:prstDash val="solid"/>
-          </a:ln>
-        </p:spPr>
-      </p:sp>
-      <p:sp>
-        <p:nvSpPr>
-          <p:cNvPr id="15" name="Shape 13"/>
-          <p:cNvSpPr/>
-          <p:nvPr/>
-        </p:nvSpPr>
-        <p:spPr>
-          <a:xfrm>
-            <a:off x="8202168" y="3721608"/>
-            <a:ext cx="2340864" cy="0"/>
-          </a:xfrm>
-          <a:prstGeom prst="line">
-            <a:avLst/>
-          </a:prstGeom>
-          <a:noFill/>
-          <a:ln w="19050">
-            <a:solidFill>
-              <a:srgbClr val="0068B7"/>
-            </a:solidFill>
-            <a:prstDash val="solid"/>
-          </a:ln>
-        </p:spPr>
+          <p:cNvPr id="14" name="Text 12"/>
+          <p:cNvSpPr/>
+          <p:nvPr/>
+        </p:nvSpPr>
+        <p:spPr>
+          <a:xfrm>
+            <a:off x="7799832" y="2935224"/>
+            <a:ext cx="3145536" cy="256032"/>
+          </a:xfrm>
+          <a:prstGeom prst="rect">
+            <a:avLst/>
+          </a:prstGeom>
+          <a:noFill/>
+          <a:ln/>
+        </p:spPr>
+        <p:txBody>
+          <a:bodyPr wrap="square" lIns="0" tIns="0" rIns="0" bIns="0" rtlCol="0" anchor="ctr"/>
+          <a:lstStyle/>
+          <a:p>
+            <a:pPr indent="0" marL="0">
+              <a:buNone/>
+            </a:pPr>
+            <a:r>
+              <a:rPr lang="en-US" sz="1300" b="1" dirty="0">
+                <a:solidFill>
+                  <a:srgbClr val="0068B7"/>
+                </a:solidFill>
+                <a:latin typeface="Aptos" pitchFamily="34" charset="0"/>
+                <a:ea typeface="Aptos" pitchFamily="34" charset="-122"/>
+                <a:cs typeface="Aptos" pitchFamily="34" charset="-120"/>
+              </a:rPr>
+              <a:t>Concept checkpoints</a:t>
+            </a:r>
+            <a:endParaRPr lang="en-US" sz="1300" dirty="0"/>
+          </a:p>
+        </p:txBody>
+      </p:sp>
+      <p:sp>
+        <p:nvSpPr>
+          <p:cNvPr id="15" name="Text 13"/>
+          <p:cNvSpPr/>
+          <p:nvPr/>
+        </p:nvSpPr>
+        <p:spPr>
+          <a:xfrm>
+            <a:off x="7818120" y="3300984"/>
+            <a:ext cx="3090672" cy="877824"/>
+          </a:xfrm>
+          <a:prstGeom prst="rect">
+            <a:avLst/>
+          </a:prstGeom>
+          <a:noFill/>
+          <a:ln/>
+        </p:spPr>
+        <p:txBody>
+          <a:bodyPr wrap="square" lIns="254" tIns="254" rIns="254" bIns="254" rtlCol="0" anchor="t">
+            <a:normAutofit/>
+          </a:bodyPr>
+          <a:lstStyle/>
+          <a:p>
+            <a:r>
+              <a:rPr lang="en-US" sz="1380" dirty="0">
+                <a:solidFill>
+                  <a:srgbClr val="17364A"/>
+                </a:solidFill>
+                <a:latin typeface="Aptos" pitchFamily="34" charset="0"/>
+                <a:ea typeface="Aptos" pitchFamily="34" charset="-122"/>
+                <a:cs typeface="Aptos" pitchFamily="34" charset="-120"/>
+              </a:rPr>
+              <a:t>1.</a:t>
+            </a:r>
+            <a:endParaRPr lang="en-US" sz="1380" dirty="0"/>
+          </a:p>
+          <a:p>
+            <a:r>
+              <a:rPr lang="en-US" sz="1380" dirty="0">
+                <a:solidFill>
+                  <a:srgbClr val="17364A"/>
+                </a:solidFill>
+                <a:latin typeface="Aptos" pitchFamily="34" charset="0"/>
+                <a:ea typeface="Aptos" pitchFamily="34" charset="-122"/>
+                <a:cs typeface="Aptos" pitchFamily="34" charset="-120"/>
+              </a:rPr>
+              <a:t>What is the strongest reason this module topic belongs in AI leadership and governance.</a:t>
+            </a:r>
+            <a:endParaRPr lang="en-US" sz="1380" dirty="0"/>
+          </a:p>
+          <a:p>
+            <a:r>
+              <a:rPr lang="en-US" sz="1380" dirty="0">
+                <a:solidFill>
+                  <a:srgbClr val="17364A"/>
+                </a:solidFill>
+                <a:latin typeface="Aptos" pitchFamily="34" charset="0"/>
+                <a:ea typeface="Aptos" pitchFamily="34" charset="-122"/>
+                <a:cs typeface="Aptos" pitchFamily="34" charset="-120"/>
+              </a:rPr>
+              <a:t>2.</a:t>
+            </a:r>
+            <a:endParaRPr lang="en-US" sz="1380" dirty="0"/>
+          </a:p>
+        </p:txBody>
       </p:sp>
       <p:sp>
         <p:nvSpPr>
           <p:cNvPr id="16" name="Shape 14"/>
-          <p:cNvSpPr/>
-          <p:nvPr/>
-        </p:nvSpPr>
-        <p:spPr>
-          <a:xfrm>
-            <a:off x="9198864" y="4206240"/>
-            <a:ext cx="347472" cy="347472"/>
-          </a:xfrm>
-          <a:prstGeom prst="ellipse">
-            <a:avLst/>
-          </a:prstGeom>
-          <a:solidFill>
-            <a:srgbClr val="2F8A28"/>
-          </a:solidFill>
-          <a:ln w="12700">
-            <a:solidFill>
-              <a:srgbClr val="2F8A28"/>
-            </a:solidFill>
-            <a:prstDash val="solid"/>
-          </a:ln>
-        </p:spPr>
-      </p:sp>
-      <p:sp>
-        <p:nvSpPr>
-          <p:cNvPr id="17" name="Text 15"/>
-          <p:cNvSpPr/>
-          <p:nvPr/>
-        </p:nvSpPr>
-        <p:spPr>
-          <a:xfrm>
-            <a:off x="7909560" y="3977640"/>
-            <a:ext cx="2926080" cy="182880"/>
-          </a:xfrm>
-          <a:prstGeom prst="rect">
-            <a:avLst/>
-          </a:prstGeom>
-          <a:noFill/>
-          <a:ln/>
-        </p:spPr>
-        <p:txBody>
-          <a:bodyPr wrap="square" lIns="0" tIns="0" rIns="0" bIns="0" rtlCol="0" anchor="ctr"/>
-          <a:lstStyle/>
-          <a:p>
-            <a:pPr algn="ctr" indent="0" marL="0">
-              <a:buNone/>
-            </a:pPr>
-            <a:r>
-              <a:rPr lang="en-US" sz="1000" dirty="0">
-                <a:solidFill>
-                  <a:srgbClr val="003A63"/>
-                </a:solidFill>
-                <a:latin typeface="Aptos" pitchFamily="34" charset="0"/>
-                <a:ea typeface="Aptos" pitchFamily="34" charset="-122"/>
-                <a:cs typeface="Aptos" pitchFamily="34" charset="-120"/>
-              </a:rPr>
-              <a:t>Concept to action</a:t>
-            </a:r>
-            <a:endParaRPr lang="en-US" sz="1000" dirty="0"/>
-          </a:p>
-        </p:txBody>
-      </p:sp>
-      <p:sp>
-        <p:nvSpPr>
-          <p:cNvPr id="18" name="Shape 16"/>
           <p:cNvSpPr/>
           <p:nvPr/>
         </p:nvSpPr>
@@ -10031,7 +9606,7 @@
       </p:sp>
       <p:sp>
         <p:nvSpPr>
-          <p:cNvPr id="19" name="Text 17"/>
+          <p:cNvPr id="17" name="Text 15"/>
           <p:cNvSpPr/>
           <p:nvPr/>
         </p:nvSpPr>
@@ -10070,7 +9645,7 @@
       </p:sp>
       <p:sp>
         <p:nvSpPr>
-          <p:cNvPr id="20" name="Text 18"/>
+          <p:cNvPr id="18" name="Text 16"/>
           <p:cNvSpPr/>
           <p:nvPr/>
         </p:nvSpPr>
@@ -10603,20 +10178,20 @@
         </p:nvSpPr>
         <p:spPr>
           <a:xfrm>
-            <a:off x="7635240" y="3730752"/>
-            <a:ext cx="1033272" cy="749808"/>
+            <a:off x="7909560" y="3675888"/>
+            <a:ext cx="3154680" cy="1691640"/>
           </a:xfrm>
           <a:prstGeom prst="roundRect">
             <a:avLst>
-              <a:gd name="adj" fmla="val 14634"/>
+              <a:gd name="adj" fmla="val 6486"/>
             </a:avLst>
           </a:prstGeom>
           <a:solidFill>
-            <a:srgbClr val="0068B7"/>
+            <a:srgbClr val="FFFFFF"/>
           </a:solidFill>
           <a:ln w="12700">
             <a:solidFill>
-              <a:srgbClr val="0068B7"/>
+              <a:srgbClr val="B9D7E6"/>
             </a:solidFill>
             <a:prstDash val="solid"/>
           </a:ln>
@@ -10630,172 +10205,100 @@
         </p:nvSpPr>
         <p:spPr>
           <a:xfrm>
-            <a:off x="7708392" y="3922776"/>
-            <a:ext cx="886968" cy="310896"/>
-          </a:xfrm>
-          <a:prstGeom prst="rect">
-            <a:avLst/>
-          </a:prstGeom>
-          <a:noFill/>
-          <a:ln/>
-        </p:spPr>
-        <p:txBody>
-          <a:bodyPr wrap="square" lIns="0" tIns="0" rIns="0" bIns="0" rtlCol="0" anchor="ctr">
+            <a:off x="8074152" y="3822192"/>
+            <a:ext cx="2825496" cy="256032"/>
+          </a:xfrm>
+          <a:prstGeom prst="rect">
+            <a:avLst/>
+          </a:prstGeom>
+          <a:noFill/>
+          <a:ln/>
+        </p:spPr>
+        <p:txBody>
+          <a:bodyPr wrap="square" lIns="0" tIns="0" rIns="0" bIns="0" rtlCol="0" anchor="ctr"/>
+          <a:lstStyle/>
+          <a:p>
+            <a:pPr indent="0" marL="0">
+              <a:buNone/>
+            </a:pPr>
+            <a:r>
+              <a:rPr lang="en-US" sz="1300" b="1" dirty="0">
+                <a:solidFill>
+                  <a:srgbClr val="0068B7"/>
+                </a:solidFill>
+                <a:latin typeface="Aptos" pitchFamily="34" charset="0"/>
+                <a:ea typeface="Aptos" pitchFamily="34" charset="-122"/>
+                <a:cs typeface="Aptos" pitchFamily="34" charset="-120"/>
+              </a:rPr>
+              <a:t>Learning sequence</a:t>
+            </a:r>
+            <a:endParaRPr lang="en-US" sz="1300" dirty="0"/>
+          </a:p>
+        </p:txBody>
+      </p:sp>
+      <p:sp>
+        <p:nvSpPr>
+          <p:cNvPr id="15" name="Text 13"/>
+          <p:cNvSpPr/>
+          <p:nvPr/>
+        </p:nvSpPr>
+        <p:spPr>
+          <a:xfrm>
+            <a:off x="8092440" y="4187952"/>
+            <a:ext cx="2770632" cy="1033272"/>
+          </a:xfrm>
+          <a:prstGeom prst="rect">
+            <a:avLst/>
+          </a:prstGeom>
+          <a:noFill/>
+          <a:ln/>
+        </p:spPr>
+        <p:txBody>
+          <a:bodyPr wrap="square" lIns="254" tIns="254" rIns="254" bIns="254" rtlCol="0" anchor="t">
             <a:normAutofit/>
           </a:bodyPr>
           <a:lstStyle/>
           <a:p>
-            <a:pPr algn="ctr" indent="0" marL="0">
-              <a:buNone/>
-            </a:pPr>
-            <a:r>
-              <a:rPr lang="en-US" sz="1500" b="1" dirty="0">
-                <a:solidFill>
-                  <a:srgbClr val="FFFFFF"/>
-                </a:solidFill>
-                <a:latin typeface="Aptos" pitchFamily="34" charset="0"/>
-                <a:ea typeface="Aptos" pitchFamily="34" charset="-122"/>
-                <a:cs typeface="Aptos" pitchFamily="34" charset="-120"/>
-              </a:rPr>
-              <a:t>Learn</a:t>
-            </a:r>
-            <a:endParaRPr lang="en-US" sz="1500" dirty="0"/>
-          </a:p>
-        </p:txBody>
-      </p:sp>
-      <p:sp>
-        <p:nvSpPr>
-          <p:cNvPr id="15" name="Shape 13"/>
-          <p:cNvSpPr/>
-          <p:nvPr/>
-        </p:nvSpPr>
-        <p:spPr>
-          <a:xfrm>
-            <a:off x="8924544" y="3730752"/>
-            <a:ext cx="1033272" cy="749808"/>
-          </a:xfrm>
-          <a:prstGeom prst="roundRect">
-            <a:avLst>
-              <a:gd name="adj" fmla="val 14634"/>
-            </a:avLst>
-          </a:prstGeom>
-          <a:solidFill>
-            <a:srgbClr val="2F8A28"/>
-          </a:solidFill>
-          <a:ln w="12700">
-            <a:solidFill>
-              <a:srgbClr val="2F8A28"/>
-            </a:solidFill>
-            <a:prstDash val="solid"/>
-          </a:ln>
-        </p:spPr>
-      </p:sp>
-      <p:sp>
-        <p:nvSpPr>
-          <p:cNvPr id="16" name="Text 14"/>
-          <p:cNvSpPr/>
-          <p:nvPr/>
-        </p:nvSpPr>
-        <p:spPr>
-          <a:xfrm>
-            <a:off x="8997696" y="3922776"/>
-            <a:ext cx="886968" cy="310896"/>
-          </a:xfrm>
-          <a:prstGeom prst="rect">
-            <a:avLst/>
-          </a:prstGeom>
-          <a:noFill/>
-          <a:ln/>
-        </p:spPr>
-        <p:txBody>
-          <a:bodyPr wrap="square" lIns="0" tIns="0" rIns="0" bIns="0" rtlCol="0" anchor="ctr">
-            <a:normAutofit/>
-          </a:bodyPr>
-          <a:lstStyle/>
-          <a:p>
-            <a:pPr algn="ctr" indent="0" marL="0">
-              <a:buNone/>
-            </a:pPr>
-            <a:r>
-              <a:rPr lang="en-US" sz="1500" b="1" dirty="0">
-                <a:solidFill>
-                  <a:srgbClr val="FFFFFF"/>
-                </a:solidFill>
-                <a:latin typeface="Aptos" pitchFamily="34" charset="0"/>
-                <a:ea typeface="Aptos" pitchFamily="34" charset="-122"/>
-                <a:cs typeface="Aptos" pitchFamily="34" charset="-120"/>
-              </a:rPr>
-              <a:t>Apply</a:t>
-            </a:r>
-            <a:endParaRPr lang="en-US" sz="1500" dirty="0"/>
-          </a:p>
-        </p:txBody>
-      </p:sp>
-      <p:sp>
-        <p:nvSpPr>
-          <p:cNvPr id="17" name="Shape 15"/>
-          <p:cNvSpPr/>
-          <p:nvPr/>
-        </p:nvSpPr>
-        <p:spPr>
-          <a:xfrm>
-            <a:off x="10213848" y="3730752"/>
-            <a:ext cx="1033272" cy="749808"/>
-          </a:xfrm>
-          <a:prstGeom prst="roundRect">
-            <a:avLst>
-              <a:gd name="adj" fmla="val 14634"/>
-            </a:avLst>
-          </a:prstGeom>
-          <a:solidFill>
-            <a:srgbClr val="6A4CA3"/>
-          </a:solidFill>
-          <a:ln w="12700">
-            <a:solidFill>
-              <a:srgbClr val="6A4CA3"/>
-            </a:solidFill>
-            <a:prstDash val="solid"/>
-          </a:ln>
-        </p:spPr>
-      </p:sp>
-      <p:sp>
-        <p:nvSpPr>
-          <p:cNvPr id="18" name="Text 16"/>
-          <p:cNvSpPr/>
-          <p:nvPr/>
-        </p:nvSpPr>
-        <p:spPr>
-          <a:xfrm>
-            <a:off x="10287000" y="3922776"/>
-            <a:ext cx="886968" cy="310896"/>
-          </a:xfrm>
-          <a:prstGeom prst="rect">
-            <a:avLst/>
-          </a:prstGeom>
-          <a:noFill/>
-          <a:ln/>
-        </p:spPr>
-        <p:txBody>
-          <a:bodyPr wrap="square" lIns="0" tIns="0" rIns="0" bIns="0" rtlCol="0" anchor="ctr">
-            <a:normAutofit/>
-          </a:bodyPr>
-          <a:lstStyle/>
-          <a:p>
-            <a:pPr algn="ctr" indent="0" marL="0">
-              <a:buNone/>
-            </a:pPr>
-            <a:r>
-              <a:rPr lang="en-US" sz="1500" b="1" dirty="0">
-                <a:solidFill>
-                  <a:srgbClr val="FFFFFF"/>
-                </a:solidFill>
-                <a:latin typeface="Aptos" pitchFamily="34" charset="0"/>
-                <a:ea typeface="Aptos" pitchFamily="34" charset="-122"/>
-                <a:cs typeface="Aptos" pitchFamily="34" charset="-120"/>
-              </a:rPr>
-              <a:t>Document</a:t>
-            </a:r>
-            <a:endParaRPr lang="en-US" sz="1500" dirty="0"/>
+            <a:r>
+              <a:rPr lang="en-US" sz="1380" dirty="0">
+                <a:solidFill>
+                  <a:srgbClr val="17364A"/>
+                </a:solidFill>
+                <a:latin typeface="Aptos" pitchFamily="34" charset="0"/>
+                <a:ea typeface="Aptos" pitchFamily="34" charset="-122"/>
+                <a:cs typeface="Aptos" pitchFamily="34" charset="-120"/>
+              </a:rPr>
+              <a:t>Read the module for shared vocabulary and context.</a:t>
+            </a:r>
+            <a:endParaRPr lang="en-US" sz="1380" dirty="0"/>
+          </a:p>
+          <a:p>
+            <a:r>
+              <a:rPr lang="en-US" sz="1380" dirty="0">
+                <a:solidFill>
+                  <a:srgbClr val="17364A"/>
+                </a:solidFill>
+                <a:latin typeface="Aptos" pitchFamily="34" charset="0"/>
+                <a:ea typeface="Aptos" pitchFamily="34" charset="-122"/>
+                <a:cs typeface="Aptos" pitchFamily="34" charset="-120"/>
+              </a:rPr>
+              <a:t>Complete the practical exercise to apply the concept.</a:t>
+            </a:r>
+            <a:endParaRPr lang="en-US" sz="1380" dirty="0"/>
+          </a:p>
+          <a:p>
+            <a:r>
+              <a:rPr lang="en-US" sz="1380" dirty="0">
+                <a:solidFill>
+                  <a:srgbClr val="17364A"/>
+                </a:solidFill>
+                <a:latin typeface="Aptos" pitchFamily="34" charset="0"/>
+                <a:ea typeface="Aptos" pitchFamily="34" charset="-122"/>
+                <a:cs typeface="Aptos" pitchFamily="34" charset="-120"/>
+              </a:rPr>
+              <a:t>Use the notes and references for deeper review.</a:t>
+            </a:r>
+            <a:endParaRPr lang="en-US" sz="1380" dirty="0"/>
           </a:p>
         </p:txBody>
       </p:sp>
@@ -11268,13 +10771,11 @@
             </a:avLst>
           </a:prstGeom>
           <a:solidFill>
-            <a:srgbClr val="FFFFFF">
-              <a:alpha val="88000"/>
-            </a:srgbClr>
+            <a:srgbClr val="FFFFFF"/>
           </a:solidFill>
           <a:ln w="12700">
             <a:solidFill>
-              <a:srgbClr val="D6E8F2"/>
+              <a:srgbClr val="B9D7E6"/>
             </a:solidFill>
             <a:prstDash val="solid"/>
           </a:ln>
@@ -11282,119 +10783,112 @@
       </p:sp>
       <p:sp>
         <p:nvSpPr>
-          <p:cNvPr id="14" name="Shape 12"/>
-          <p:cNvSpPr/>
-          <p:nvPr/>
-        </p:nvSpPr>
-        <p:spPr>
-          <a:xfrm>
-            <a:off x="8074152" y="3291840"/>
-            <a:ext cx="2596896" cy="749808"/>
-          </a:xfrm>
-          <a:prstGeom prst="rect">
-            <a:avLst/>
-          </a:prstGeom>
-          <a:solidFill>
-            <a:srgbClr val="EAF6F8"/>
-          </a:solidFill>
-          <a:ln w="12700">
-            <a:solidFill>
-              <a:srgbClr val="8ABBD8"/>
-            </a:solidFill>
-            <a:prstDash val="solid"/>
-          </a:ln>
-        </p:spPr>
-      </p:sp>
-      <p:sp>
-        <p:nvSpPr>
-          <p:cNvPr id="15" name="Shape 13"/>
-          <p:cNvSpPr/>
-          <p:nvPr/>
-        </p:nvSpPr>
-        <p:spPr>
-          <a:xfrm>
-            <a:off x="8202168" y="3721608"/>
-            <a:ext cx="2340864" cy="0"/>
-          </a:xfrm>
-          <a:prstGeom prst="line">
-            <a:avLst/>
-          </a:prstGeom>
-          <a:noFill/>
-          <a:ln w="19050">
-            <a:solidFill>
-              <a:srgbClr val="0068B7"/>
-            </a:solidFill>
-            <a:prstDash val="solid"/>
-          </a:ln>
-        </p:spPr>
+          <p:cNvPr id="14" name="Text 12"/>
+          <p:cNvSpPr/>
+          <p:nvPr/>
+        </p:nvSpPr>
+        <p:spPr>
+          <a:xfrm>
+            <a:off x="7799832" y="2935224"/>
+            <a:ext cx="3145536" cy="256032"/>
+          </a:xfrm>
+          <a:prstGeom prst="rect">
+            <a:avLst/>
+          </a:prstGeom>
+          <a:noFill/>
+          <a:ln/>
+        </p:spPr>
+        <p:txBody>
+          <a:bodyPr wrap="square" lIns="0" tIns="0" rIns="0" bIns="0" rtlCol="0" anchor="ctr"/>
+          <a:lstStyle/>
+          <a:p>
+            <a:pPr indent="0" marL="0">
+              <a:buNone/>
+            </a:pPr>
+            <a:r>
+              <a:rPr lang="en-US" sz="1300" b="1" dirty="0">
+                <a:solidFill>
+                  <a:srgbClr val="0068B7"/>
+                </a:solidFill>
+                <a:latin typeface="Aptos" pitchFamily="34" charset="0"/>
+                <a:ea typeface="Aptos" pitchFamily="34" charset="-122"/>
+                <a:cs typeface="Aptos" pitchFamily="34" charset="-120"/>
+              </a:rPr>
+              <a:t>Concept checkpoints</a:t>
+            </a:r>
+            <a:endParaRPr lang="en-US" sz="1300" dirty="0"/>
+          </a:p>
+        </p:txBody>
+      </p:sp>
+      <p:sp>
+        <p:nvSpPr>
+          <p:cNvPr id="15" name="Text 13"/>
+          <p:cNvSpPr/>
+          <p:nvPr/>
+        </p:nvSpPr>
+        <p:spPr>
+          <a:xfrm>
+            <a:off x="7818120" y="3300984"/>
+            <a:ext cx="3090672" cy="877824"/>
+          </a:xfrm>
+          <a:prstGeom prst="rect">
+            <a:avLst/>
+          </a:prstGeom>
+          <a:noFill/>
+          <a:ln/>
+        </p:spPr>
+        <p:txBody>
+          <a:bodyPr wrap="square" lIns="254" tIns="254" rIns="254" bIns="254" rtlCol="0" anchor="t">
+            <a:normAutofit/>
+          </a:bodyPr>
+          <a:lstStyle/>
+          <a:p>
+            <a:r>
+              <a:rPr lang="en-US" sz="1380" dirty="0">
+                <a:solidFill>
+                  <a:srgbClr val="17364A"/>
+                </a:solidFill>
+                <a:latin typeface="Aptos" pitchFamily="34" charset="0"/>
+                <a:ea typeface="Aptos" pitchFamily="34" charset="-122"/>
+                <a:cs typeface="Aptos" pitchFamily="34" charset="-120"/>
+              </a:rPr>
+              <a:t>NIST Artificial Intelligence Risk Management Framework (AI RMF 1.0):.</a:t>
+            </a:r>
+            <a:endParaRPr lang="en-US" sz="1380" dirty="0"/>
+          </a:p>
+          <a:p>
+            <a:r>
+              <a:rPr lang="en-US" sz="1380" dirty="0">
+                <a:solidFill>
+                  <a:srgbClr val="17364A"/>
+                </a:solidFill>
+                <a:latin typeface="Aptos" pitchFamily="34" charset="0"/>
+                <a:ea typeface="Aptos" pitchFamily="34" charset="-122"/>
+                <a:cs typeface="Aptos" pitchFamily="34" charset="-120"/>
+              </a:rPr>
+              <a:t>CDC Public Health Data Strategy and Data Modernization resources:.</a:t>
+            </a:r>
+            <a:endParaRPr lang="en-US" sz="1380" dirty="0"/>
+          </a:p>
+          <a:p>
+            <a:r>
+              <a:rPr lang="en-US" sz="1380" dirty="0">
+                <a:solidFill>
+                  <a:srgbClr val="17364A"/>
+                </a:solidFill>
+                <a:latin typeface="Aptos" pitchFamily="34" charset="0"/>
+                <a:ea typeface="Aptos" pitchFamily="34" charset="-122"/>
+                <a:cs typeface="Aptos" pitchFamily="34" charset="-120"/>
+              </a:rPr>
+              <a:t>WHO Ethics and Governance of Artificial Intelligence for Health:.</a:t>
+            </a:r>
+            <a:endParaRPr lang="en-US" sz="1380" dirty="0"/>
+          </a:p>
+        </p:txBody>
       </p:sp>
       <p:sp>
         <p:nvSpPr>
           <p:cNvPr id="16" name="Shape 14"/>
-          <p:cNvSpPr/>
-          <p:nvPr/>
-        </p:nvSpPr>
-        <p:spPr>
-          <a:xfrm>
-            <a:off x="9198864" y="4206240"/>
-            <a:ext cx="347472" cy="347472"/>
-          </a:xfrm>
-          <a:prstGeom prst="ellipse">
-            <a:avLst/>
-          </a:prstGeom>
-          <a:solidFill>
-            <a:srgbClr val="2F8A28"/>
-          </a:solidFill>
-          <a:ln w="12700">
-            <a:solidFill>
-              <a:srgbClr val="2F8A28"/>
-            </a:solidFill>
-            <a:prstDash val="solid"/>
-          </a:ln>
-        </p:spPr>
-      </p:sp>
-      <p:sp>
-        <p:nvSpPr>
-          <p:cNvPr id="17" name="Text 15"/>
-          <p:cNvSpPr/>
-          <p:nvPr/>
-        </p:nvSpPr>
-        <p:spPr>
-          <a:xfrm>
-            <a:off x="7909560" y="3977640"/>
-            <a:ext cx="2926080" cy="182880"/>
-          </a:xfrm>
-          <a:prstGeom prst="rect">
-            <a:avLst/>
-          </a:prstGeom>
-          <a:noFill/>
-          <a:ln/>
-        </p:spPr>
-        <p:txBody>
-          <a:bodyPr wrap="square" lIns="0" tIns="0" rIns="0" bIns="0" rtlCol="0" anchor="ctr"/>
-          <a:lstStyle/>
-          <a:p>
-            <a:pPr algn="ctr" indent="0" marL="0">
-              <a:buNone/>
-            </a:pPr>
-            <a:r>
-              <a:rPr lang="en-US" sz="1000" dirty="0">
-                <a:solidFill>
-                  <a:srgbClr val="003A63"/>
-                </a:solidFill>
-                <a:latin typeface="Aptos" pitchFamily="34" charset="0"/>
-                <a:ea typeface="Aptos" pitchFamily="34" charset="-122"/>
-                <a:cs typeface="Aptos" pitchFamily="34" charset="-120"/>
-              </a:rPr>
-              <a:t>Concept to action</a:t>
-            </a:r>
-            <a:endParaRPr lang="en-US" sz="1000" dirty="0"/>
-          </a:p>
-        </p:txBody>
-      </p:sp>
-      <p:sp>
-        <p:nvSpPr>
-          <p:cNvPr id="18" name="Shape 16"/>
           <p:cNvSpPr/>
           <p:nvPr/>
         </p:nvSpPr>
@@ -11421,7 +10915,7 @@
       </p:sp>
       <p:sp>
         <p:nvSpPr>
-          <p:cNvPr id="19" name="Text 17"/>
+          <p:cNvPr id="17" name="Text 15"/>
           <p:cNvSpPr/>
           <p:nvPr/>
         </p:nvSpPr>
@@ -11460,7 +10954,7 @@
       </p:sp>
       <p:sp>
         <p:nvSpPr>
-          <p:cNvPr id="20" name="Text 18"/>
+          <p:cNvPr id="18" name="Text 16"/>
           <p:cNvSpPr/>
           <p:nvPr/>
         </p:nvSpPr>
@@ -11954,13 +11448,11 @@
             </a:avLst>
           </a:prstGeom>
           <a:solidFill>
-            <a:srgbClr val="FFFFFF">
-              <a:alpha val="88000"/>
-            </a:srgbClr>
+            <a:srgbClr val="FFFFFF"/>
           </a:solidFill>
           <a:ln w="12700">
             <a:solidFill>
-              <a:srgbClr val="D6E8F2"/>
+              <a:srgbClr val="B9D7E6"/>
             </a:solidFill>
             <a:prstDash val="solid"/>
           </a:ln>
@@ -11968,119 +11460,98 @@
       </p:sp>
       <p:sp>
         <p:nvSpPr>
-          <p:cNvPr id="14" name="Shape 12"/>
-          <p:cNvSpPr/>
-          <p:nvPr/>
-        </p:nvSpPr>
-        <p:spPr>
-          <a:xfrm>
-            <a:off x="8074152" y="3291840"/>
-            <a:ext cx="2596896" cy="749808"/>
-          </a:xfrm>
-          <a:prstGeom prst="rect">
-            <a:avLst/>
-          </a:prstGeom>
-          <a:solidFill>
-            <a:srgbClr val="EAF6F8"/>
-          </a:solidFill>
-          <a:ln w="12700">
-            <a:solidFill>
-              <a:srgbClr val="8ABBD8"/>
-            </a:solidFill>
-            <a:prstDash val="solid"/>
-          </a:ln>
-        </p:spPr>
-      </p:sp>
-      <p:sp>
-        <p:nvSpPr>
-          <p:cNvPr id="15" name="Shape 13"/>
-          <p:cNvSpPr/>
-          <p:nvPr/>
-        </p:nvSpPr>
-        <p:spPr>
-          <a:xfrm>
-            <a:off x="8202168" y="3721608"/>
-            <a:ext cx="2340864" cy="0"/>
-          </a:xfrm>
-          <a:prstGeom prst="line">
-            <a:avLst/>
-          </a:prstGeom>
-          <a:noFill/>
-          <a:ln w="19050">
-            <a:solidFill>
-              <a:srgbClr val="0068B7"/>
-            </a:solidFill>
-            <a:prstDash val="solid"/>
-          </a:ln>
-        </p:spPr>
+          <p:cNvPr id="14" name="Text 12"/>
+          <p:cNvSpPr/>
+          <p:nvPr/>
+        </p:nvSpPr>
+        <p:spPr>
+          <a:xfrm>
+            <a:off x="7799832" y="2935224"/>
+            <a:ext cx="3145536" cy="256032"/>
+          </a:xfrm>
+          <a:prstGeom prst="rect">
+            <a:avLst/>
+          </a:prstGeom>
+          <a:noFill/>
+          <a:ln/>
+        </p:spPr>
+        <p:txBody>
+          <a:bodyPr wrap="square" lIns="0" tIns="0" rIns="0" bIns="0" rtlCol="0" anchor="ctr"/>
+          <a:lstStyle/>
+          <a:p>
+            <a:pPr indent="0" marL="0">
+              <a:buNone/>
+            </a:pPr>
+            <a:r>
+              <a:rPr lang="en-US" sz="1300" b="1" dirty="0">
+                <a:solidFill>
+                  <a:srgbClr val="0068B7"/>
+                </a:solidFill>
+                <a:latin typeface="Aptos" pitchFamily="34" charset="0"/>
+                <a:ea typeface="Aptos" pitchFamily="34" charset="-122"/>
+                <a:cs typeface="Aptos" pitchFamily="34" charset="-120"/>
+              </a:rPr>
+              <a:t>Concept checkpoints</a:t>
+            </a:r>
+            <a:endParaRPr lang="en-US" sz="1300" dirty="0"/>
+          </a:p>
+        </p:txBody>
+      </p:sp>
+      <p:sp>
+        <p:nvSpPr>
+          <p:cNvPr id="15" name="Text 13"/>
+          <p:cNvSpPr/>
+          <p:nvPr/>
+        </p:nvSpPr>
+        <p:spPr>
+          <a:xfrm>
+            <a:off x="7818120" y="3300984"/>
+            <a:ext cx="3090672" cy="877824"/>
+          </a:xfrm>
+          <a:prstGeom prst="rect">
+            <a:avLst/>
+          </a:prstGeom>
+          <a:noFill/>
+          <a:ln/>
+        </p:spPr>
+        <p:txBody>
+          <a:bodyPr wrap="square" lIns="254" tIns="254" rIns="254" bIns="254" rtlCol="0" anchor="t">
+            <a:normAutofit/>
+          </a:bodyPr>
+          <a:lstStyle/>
+          <a:p>
+            <a:r>
+              <a:rPr lang="en-US" sz="1380" dirty="0">
+                <a:solidFill>
+                  <a:srgbClr val="17364A"/>
+                </a:solidFill>
+                <a:latin typeface="Aptos" pitchFamily="34" charset="0"/>
+                <a:ea typeface="Aptos" pitchFamily="34" charset="-122"/>
+                <a:cs typeface="Aptos" pitchFamily="34" charset="-120"/>
+              </a:rPr>
+              <a:t>OMB Memorandum M-24-10 on federal AI governance, risk management, and innovation, where.</a:t>
+            </a:r>
+            <a:endParaRPr lang="en-US" sz="1380" dirty="0"/>
+          </a:p>
+          <a:p>
+            <a:r>
+              <a:rPr lang="en-US" sz="1380" dirty="0">
+                <a:solidFill>
+                  <a:srgbClr val="17364A"/>
+                </a:solidFill>
+                <a:latin typeface="Aptos" pitchFamily="34" charset="0"/>
+                <a:ea typeface="Aptos" pitchFamily="34" charset="-122"/>
+                <a:cs typeface="Aptos" pitchFamily="34" charset="-120"/>
+              </a:rPr>
+              <a:t>Agency strategic plans, procurement policies, privacy policies, cybersecurity policies,.</a:t>
+            </a:r>
+            <a:endParaRPr lang="en-US" sz="1380" dirty="0"/>
+          </a:p>
+        </p:txBody>
       </p:sp>
       <p:sp>
         <p:nvSpPr>
           <p:cNvPr id="16" name="Shape 14"/>
-          <p:cNvSpPr/>
-          <p:nvPr/>
-        </p:nvSpPr>
-        <p:spPr>
-          <a:xfrm>
-            <a:off x="9198864" y="4206240"/>
-            <a:ext cx="347472" cy="347472"/>
-          </a:xfrm>
-          <a:prstGeom prst="ellipse">
-            <a:avLst/>
-          </a:prstGeom>
-          <a:solidFill>
-            <a:srgbClr val="2F8A28"/>
-          </a:solidFill>
-          <a:ln w="12700">
-            <a:solidFill>
-              <a:srgbClr val="2F8A28"/>
-            </a:solidFill>
-            <a:prstDash val="solid"/>
-          </a:ln>
-        </p:spPr>
-      </p:sp>
-      <p:sp>
-        <p:nvSpPr>
-          <p:cNvPr id="17" name="Text 15"/>
-          <p:cNvSpPr/>
-          <p:nvPr/>
-        </p:nvSpPr>
-        <p:spPr>
-          <a:xfrm>
-            <a:off x="7909560" y="3977640"/>
-            <a:ext cx="2926080" cy="182880"/>
-          </a:xfrm>
-          <a:prstGeom prst="rect">
-            <a:avLst/>
-          </a:prstGeom>
-          <a:noFill/>
-          <a:ln/>
-        </p:spPr>
-        <p:txBody>
-          <a:bodyPr wrap="square" lIns="0" tIns="0" rIns="0" bIns="0" rtlCol="0" anchor="ctr"/>
-          <a:lstStyle/>
-          <a:p>
-            <a:pPr algn="ctr" indent="0" marL="0">
-              <a:buNone/>
-            </a:pPr>
-            <a:r>
-              <a:rPr lang="en-US" sz="1000" dirty="0">
-                <a:solidFill>
-                  <a:srgbClr val="003A63"/>
-                </a:solidFill>
-                <a:latin typeface="Aptos" pitchFamily="34" charset="0"/>
-                <a:ea typeface="Aptos" pitchFamily="34" charset="-122"/>
-                <a:cs typeface="Aptos" pitchFamily="34" charset="-120"/>
-              </a:rPr>
-              <a:t>Concept to action</a:t>
-            </a:r>
-            <a:endParaRPr lang="en-US" sz="1000" dirty="0"/>
-          </a:p>
-        </p:txBody>
-      </p:sp>
-      <p:sp>
-        <p:nvSpPr>
-          <p:cNvPr id="18" name="Shape 16"/>
           <p:cNvSpPr/>
           <p:nvPr/>
         </p:nvSpPr>
@@ -12107,7 +11578,7 @@
       </p:sp>
       <p:sp>
         <p:nvSpPr>
-          <p:cNvPr id="19" name="Text 17"/>
+          <p:cNvPr id="17" name="Text 15"/>
           <p:cNvSpPr/>
           <p:nvPr/>
         </p:nvSpPr>
@@ -12146,7 +11617,7 @@
       </p:sp>
       <p:sp>
         <p:nvSpPr>
-          <p:cNvPr id="20" name="Text 18"/>
+          <p:cNvPr id="18" name="Text 16"/>
           <p:cNvSpPr/>
           <p:nvPr/>
         </p:nvSpPr>
@@ -12659,20 +12130,20 @@
         </p:nvSpPr>
         <p:spPr>
           <a:xfrm>
-            <a:off x="7818120" y="3977640"/>
-            <a:ext cx="972312" cy="749808"/>
+            <a:off x="8046720" y="3794760"/>
+            <a:ext cx="3063240" cy="1600200"/>
           </a:xfrm>
           <a:prstGeom prst="roundRect">
             <a:avLst>
-              <a:gd name="adj" fmla="val 14634"/>
+              <a:gd name="adj" fmla="val 6857"/>
             </a:avLst>
           </a:prstGeom>
           <a:solidFill>
-            <a:srgbClr val="0068B7"/>
+            <a:srgbClr val="FFFFFF"/>
           </a:solidFill>
           <a:ln w="12700">
             <a:solidFill>
-              <a:srgbClr val="0068B7"/>
+              <a:srgbClr val="B9D7E6"/>
             </a:solidFill>
             <a:prstDash val="solid"/>
           </a:ln>
@@ -12686,172 +12157,100 @@
         </p:nvSpPr>
         <p:spPr>
           <a:xfrm>
-            <a:off x="7891272" y="4169664"/>
-            <a:ext cx="826008" cy="310896"/>
-          </a:xfrm>
-          <a:prstGeom prst="rect">
-            <a:avLst/>
-          </a:prstGeom>
-          <a:noFill/>
-          <a:ln/>
-        </p:spPr>
-        <p:txBody>
-          <a:bodyPr wrap="square" lIns="0" tIns="0" rIns="0" bIns="0" rtlCol="0" anchor="ctr">
+            <a:off x="8211312" y="3941064"/>
+            <a:ext cx="2734056" cy="256032"/>
+          </a:xfrm>
+          <a:prstGeom prst="rect">
+            <a:avLst/>
+          </a:prstGeom>
+          <a:noFill/>
+          <a:ln/>
+        </p:spPr>
+        <p:txBody>
+          <a:bodyPr wrap="square" lIns="0" tIns="0" rIns="0" bIns="0" rtlCol="0" anchor="ctr"/>
+          <a:lstStyle/>
+          <a:p>
+            <a:pPr indent="0" marL="0">
+              <a:buNone/>
+            </a:pPr>
+            <a:r>
+              <a:rPr lang="en-US" sz="1300" b="1" dirty="0">
+                <a:solidFill>
+                  <a:srgbClr val="0068B7"/>
+                </a:solidFill>
+                <a:latin typeface="Aptos" pitchFamily="34" charset="0"/>
+                <a:ea typeface="Aptos" pitchFamily="34" charset="-122"/>
+                <a:cs typeface="Aptos" pitchFamily="34" charset="-120"/>
+              </a:rPr>
+              <a:t>Use the play links to</a:t>
+            </a:r>
+            <a:endParaRPr lang="en-US" sz="1300" dirty="0"/>
+          </a:p>
+        </p:txBody>
+      </p:sp>
+      <p:sp>
+        <p:nvSpPr>
+          <p:cNvPr id="15" name="Text 13"/>
+          <p:cNvSpPr/>
+          <p:nvPr/>
+        </p:nvSpPr>
+        <p:spPr>
+          <a:xfrm>
+            <a:off x="8229600" y="4306824"/>
+            <a:ext cx="2679192" cy="941832"/>
+          </a:xfrm>
+          <a:prstGeom prst="rect">
+            <a:avLst/>
+          </a:prstGeom>
+          <a:noFill/>
+          <a:ln/>
+        </p:spPr>
+        <p:txBody>
+          <a:bodyPr wrap="square" lIns="254" tIns="254" rIns="254" bIns="254" rtlCol="0" anchor="t">
             <a:normAutofit/>
           </a:bodyPr>
           <a:lstStyle/>
           <a:p>
-            <a:pPr algn="ctr" indent="0" marL="0">
-              <a:buNone/>
-            </a:pPr>
-            <a:r>
-              <a:rPr lang="en-US" sz="1500" b="1" dirty="0">
-                <a:solidFill>
-                  <a:srgbClr val="FFFFFF"/>
-                </a:solidFill>
-                <a:latin typeface="Aptos" pitchFamily="34" charset="0"/>
-                <a:ea typeface="Aptos" pitchFamily="34" charset="-122"/>
-                <a:cs typeface="Aptos" pitchFamily="34" charset="-120"/>
-              </a:rPr>
-              <a:t>Lesson</a:t>
-            </a:r>
-            <a:endParaRPr lang="en-US" sz="1500" dirty="0"/>
-          </a:p>
-        </p:txBody>
-      </p:sp>
-      <p:sp>
-        <p:nvSpPr>
-          <p:cNvPr id="15" name="Shape 13"/>
-          <p:cNvSpPr/>
-          <p:nvPr/>
-        </p:nvSpPr>
-        <p:spPr>
-          <a:xfrm>
-            <a:off x="9046464" y="3977640"/>
-            <a:ext cx="972312" cy="749808"/>
-          </a:xfrm>
-          <a:prstGeom prst="roundRect">
-            <a:avLst>
-              <a:gd name="adj" fmla="val 14634"/>
-            </a:avLst>
-          </a:prstGeom>
-          <a:solidFill>
-            <a:srgbClr val="2F8A28"/>
-          </a:solidFill>
-          <a:ln w="12700">
-            <a:solidFill>
-              <a:srgbClr val="2F8A28"/>
-            </a:solidFill>
-            <a:prstDash val="solid"/>
-          </a:ln>
-        </p:spPr>
-      </p:sp>
-      <p:sp>
-        <p:nvSpPr>
-          <p:cNvPr id="16" name="Text 14"/>
-          <p:cNvSpPr/>
-          <p:nvPr/>
-        </p:nvSpPr>
-        <p:spPr>
-          <a:xfrm>
-            <a:off x="9119616" y="4169664"/>
-            <a:ext cx="826008" cy="310896"/>
-          </a:xfrm>
-          <a:prstGeom prst="rect">
-            <a:avLst/>
-          </a:prstGeom>
-          <a:noFill/>
-          <a:ln/>
-        </p:spPr>
-        <p:txBody>
-          <a:bodyPr wrap="square" lIns="0" tIns="0" rIns="0" bIns="0" rtlCol="0" anchor="ctr">
-            <a:normAutofit/>
-          </a:bodyPr>
-          <a:lstStyle/>
-          <a:p>
-            <a:pPr algn="ctr" indent="0" marL="0">
-              <a:buNone/>
-            </a:pPr>
-            <a:r>
-              <a:rPr lang="en-US" sz="1500" b="1" dirty="0">
-                <a:solidFill>
-                  <a:srgbClr val="FFFFFF"/>
-                </a:solidFill>
-                <a:latin typeface="Aptos" pitchFamily="34" charset="0"/>
-                <a:ea typeface="Aptos" pitchFamily="34" charset="-122"/>
-                <a:cs typeface="Aptos" pitchFamily="34" charset="-120"/>
-              </a:rPr>
-              <a:t>Plays</a:t>
-            </a:r>
-            <a:endParaRPr lang="en-US" sz="1500" dirty="0"/>
-          </a:p>
-        </p:txBody>
-      </p:sp>
-      <p:sp>
-        <p:nvSpPr>
-          <p:cNvPr id="17" name="Shape 15"/>
-          <p:cNvSpPr/>
-          <p:nvPr/>
-        </p:nvSpPr>
-        <p:spPr>
-          <a:xfrm>
-            <a:off x="10274808" y="3977640"/>
-            <a:ext cx="972312" cy="749808"/>
-          </a:xfrm>
-          <a:prstGeom prst="roundRect">
-            <a:avLst>
-              <a:gd name="adj" fmla="val 14634"/>
-            </a:avLst>
-          </a:prstGeom>
-          <a:solidFill>
-            <a:srgbClr val="6A4CA3"/>
-          </a:solidFill>
-          <a:ln w="12700">
-            <a:solidFill>
-              <a:srgbClr val="6A4CA3"/>
-            </a:solidFill>
-            <a:prstDash val="solid"/>
-          </a:ln>
-        </p:spPr>
-      </p:sp>
-      <p:sp>
-        <p:nvSpPr>
-          <p:cNvPr id="18" name="Text 16"/>
-          <p:cNvSpPr/>
-          <p:nvPr/>
-        </p:nvSpPr>
-        <p:spPr>
-          <a:xfrm>
-            <a:off x="10347960" y="4169664"/>
-            <a:ext cx="826008" cy="310896"/>
-          </a:xfrm>
-          <a:prstGeom prst="rect">
-            <a:avLst/>
-          </a:prstGeom>
-          <a:noFill/>
-          <a:ln/>
-        </p:spPr>
-        <p:txBody>
-          <a:bodyPr wrap="square" lIns="0" tIns="0" rIns="0" bIns="0" rtlCol="0" anchor="ctr">
-            <a:normAutofit/>
-          </a:bodyPr>
-          <a:lstStyle/>
-          <a:p>
-            <a:pPr algn="ctr" indent="0" marL="0">
-              <a:buNone/>
-            </a:pPr>
-            <a:r>
-              <a:rPr lang="en-US" sz="1500" b="1" dirty="0">
-                <a:solidFill>
-                  <a:srgbClr val="FFFFFF"/>
-                </a:solidFill>
-                <a:latin typeface="Aptos" pitchFamily="34" charset="0"/>
-                <a:ea typeface="Aptos" pitchFamily="34" charset="-122"/>
-                <a:cs typeface="Aptos" pitchFamily="34" charset="-120"/>
-              </a:rPr>
-              <a:t>Action</a:t>
-            </a:r>
-            <a:endParaRPr lang="en-US" sz="1500" dirty="0"/>
+            <a:r>
+              <a:rPr lang="en-US" sz="1380" dirty="0">
+                <a:solidFill>
+                  <a:srgbClr val="17364A"/>
+                </a:solidFill>
+                <a:latin typeface="Aptos" pitchFamily="34" charset="0"/>
+                <a:ea typeface="Aptos" pitchFamily="34" charset="-122"/>
+                <a:cs typeface="Aptos" pitchFamily="34" charset="-120"/>
+              </a:rPr>
+              <a:t>Locate the decision point in the playbook sequence.</a:t>
+            </a:r>
+            <a:endParaRPr lang="en-US" sz="1380" dirty="0"/>
+          </a:p>
+          <a:p>
+            <a:r>
+              <a:rPr lang="en-US" sz="1380" dirty="0">
+                <a:solidFill>
+                  <a:srgbClr val="17364A"/>
+                </a:solidFill>
+                <a:latin typeface="Aptos" pitchFamily="34" charset="0"/>
+                <a:ea typeface="Aptos" pitchFamily="34" charset="-122"/>
+                <a:cs typeface="Aptos" pitchFamily="34" charset="-120"/>
+              </a:rPr>
+              <a:t>Identify who should participate in the work.</a:t>
+            </a:r>
+            <a:endParaRPr lang="en-US" sz="1380" dirty="0"/>
+          </a:p>
+          <a:p>
+            <a:r>
+              <a:rPr lang="en-US" sz="1380" dirty="0">
+                <a:solidFill>
+                  <a:srgbClr val="17364A"/>
+                </a:solidFill>
+                <a:latin typeface="Aptos" pitchFamily="34" charset="0"/>
+                <a:ea typeface="Aptos" pitchFamily="34" charset="-122"/>
+                <a:cs typeface="Aptos" pitchFamily="34" charset="-120"/>
+              </a:rPr>
+              <a:t>Document the review, approval, or implementation step.</a:t>
+            </a:r>
+            <a:endParaRPr lang="en-US" sz="1380" dirty="0"/>
           </a:p>
         </p:txBody>
       </p:sp>
@@ -13329,20 +12728,20 @@
         </p:nvSpPr>
         <p:spPr>
           <a:xfrm>
-            <a:off x="7818120" y="3977640"/>
-            <a:ext cx="972312" cy="749808"/>
+            <a:off x="8046720" y="3794760"/>
+            <a:ext cx="3063240" cy="1600200"/>
           </a:xfrm>
           <a:prstGeom prst="roundRect">
             <a:avLst>
-              <a:gd name="adj" fmla="val 14634"/>
+              <a:gd name="adj" fmla="val 6857"/>
             </a:avLst>
           </a:prstGeom>
           <a:solidFill>
-            <a:srgbClr val="0068B7"/>
+            <a:srgbClr val="FFFFFF"/>
           </a:solidFill>
           <a:ln w="12700">
             <a:solidFill>
-              <a:srgbClr val="0068B7"/>
+              <a:srgbClr val="B9D7E6"/>
             </a:solidFill>
             <a:prstDash val="solid"/>
           </a:ln>
@@ -13356,172 +12755,100 @@
         </p:nvSpPr>
         <p:spPr>
           <a:xfrm>
-            <a:off x="7891272" y="4169664"/>
-            <a:ext cx="826008" cy="310896"/>
-          </a:xfrm>
-          <a:prstGeom prst="rect">
-            <a:avLst/>
-          </a:prstGeom>
-          <a:noFill/>
-          <a:ln/>
-        </p:spPr>
-        <p:txBody>
-          <a:bodyPr wrap="square" lIns="0" tIns="0" rIns="0" bIns="0" rtlCol="0" anchor="ctr">
+            <a:off x="8211312" y="3941064"/>
+            <a:ext cx="2734056" cy="256032"/>
+          </a:xfrm>
+          <a:prstGeom prst="rect">
+            <a:avLst/>
+          </a:prstGeom>
+          <a:noFill/>
+          <a:ln/>
+        </p:spPr>
+        <p:txBody>
+          <a:bodyPr wrap="square" lIns="0" tIns="0" rIns="0" bIns="0" rtlCol="0" anchor="ctr"/>
+          <a:lstStyle/>
+          <a:p>
+            <a:pPr indent="0" marL="0">
+              <a:buNone/>
+            </a:pPr>
+            <a:r>
+              <a:rPr lang="en-US" sz="1300" b="1" dirty="0">
+                <a:solidFill>
+                  <a:srgbClr val="0068B7"/>
+                </a:solidFill>
+                <a:latin typeface="Aptos" pitchFamily="34" charset="0"/>
+                <a:ea typeface="Aptos" pitchFamily="34" charset="-122"/>
+                <a:cs typeface="Aptos" pitchFamily="34" charset="-120"/>
+              </a:rPr>
+              <a:t>Tool selection cues</a:t>
+            </a:r>
+            <a:endParaRPr lang="en-US" sz="1300" dirty="0"/>
+          </a:p>
+        </p:txBody>
+      </p:sp>
+      <p:sp>
+        <p:nvSpPr>
+          <p:cNvPr id="15" name="Text 13"/>
+          <p:cNvSpPr/>
+          <p:nvPr/>
+        </p:nvSpPr>
+        <p:spPr>
+          <a:xfrm>
+            <a:off x="8229600" y="4306824"/>
+            <a:ext cx="2679192" cy="941832"/>
+          </a:xfrm>
+          <a:prstGeom prst="rect">
+            <a:avLst/>
+          </a:prstGeom>
+          <a:noFill/>
+          <a:ln/>
+        </p:spPr>
+        <p:txBody>
+          <a:bodyPr wrap="square" lIns="254" tIns="254" rIns="254" bIns="254" rtlCol="0" anchor="t">
             <a:normAutofit/>
           </a:bodyPr>
           <a:lstStyle/>
           <a:p>
-            <a:pPr algn="ctr" indent="0" marL="0">
-              <a:buNone/>
-            </a:pPr>
-            <a:r>
-              <a:rPr lang="en-US" sz="1500" b="1" dirty="0">
-                <a:solidFill>
-                  <a:srgbClr val="FFFFFF"/>
-                </a:solidFill>
-                <a:latin typeface="Aptos" pitchFamily="34" charset="0"/>
-                <a:ea typeface="Aptos" pitchFamily="34" charset="-122"/>
-                <a:cs typeface="Aptos" pitchFamily="34" charset="-120"/>
-              </a:rPr>
-              <a:t>Concept</a:t>
-            </a:r>
-            <a:endParaRPr lang="en-US" sz="1500" dirty="0"/>
-          </a:p>
-        </p:txBody>
-      </p:sp>
-      <p:sp>
-        <p:nvSpPr>
-          <p:cNvPr id="15" name="Shape 13"/>
-          <p:cNvSpPr/>
-          <p:nvPr/>
-        </p:nvSpPr>
-        <p:spPr>
-          <a:xfrm>
-            <a:off x="9046464" y="3977640"/>
-            <a:ext cx="972312" cy="749808"/>
-          </a:xfrm>
-          <a:prstGeom prst="roundRect">
-            <a:avLst>
-              <a:gd name="adj" fmla="val 14634"/>
-            </a:avLst>
-          </a:prstGeom>
-          <a:solidFill>
-            <a:srgbClr val="2F8A28"/>
-          </a:solidFill>
-          <a:ln w="12700">
-            <a:solidFill>
-              <a:srgbClr val="2F8A28"/>
-            </a:solidFill>
-            <a:prstDash val="solid"/>
-          </a:ln>
-        </p:spPr>
-      </p:sp>
-      <p:sp>
-        <p:nvSpPr>
-          <p:cNvPr id="16" name="Text 14"/>
-          <p:cNvSpPr/>
-          <p:nvPr/>
-        </p:nvSpPr>
-        <p:spPr>
-          <a:xfrm>
-            <a:off x="9119616" y="4169664"/>
-            <a:ext cx="826008" cy="310896"/>
-          </a:xfrm>
-          <a:prstGeom prst="rect">
-            <a:avLst/>
-          </a:prstGeom>
-          <a:noFill/>
-          <a:ln/>
-        </p:spPr>
-        <p:txBody>
-          <a:bodyPr wrap="square" lIns="0" tIns="0" rIns="0" bIns="0" rtlCol="0" anchor="ctr">
-            <a:normAutofit/>
-          </a:bodyPr>
-          <a:lstStyle/>
-          <a:p>
-            <a:pPr algn="ctr" indent="0" marL="0">
-              <a:buNone/>
-            </a:pPr>
-            <a:r>
-              <a:rPr lang="en-US" sz="1500" b="1" dirty="0">
-                <a:solidFill>
-                  <a:srgbClr val="FFFFFF"/>
-                </a:solidFill>
-                <a:latin typeface="Aptos" pitchFamily="34" charset="0"/>
-                <a:ea typeface="Aptos" pitchFamily="34" charset="-122"/>
-                <a:cs typeface="Aptos" pitchFamily="34" charset="-120"/>
-              </a:rPr>
-              <a:t>Tool</a:t>
-            </a:r>
-            <a:endParaRPr lang="en-US" sz="1500" dirty="0"/>
-          </a:p>
-        </p:txBody>
-      </p:sp>
-      <p:sp>
-        <p:nvSpPr>
-          <p:cNvPr id="17" name="Shape 15"/>
-          <p:cNvSpPr/>
-          <p:nvPr/>
-        </p:nvSpPr>
-        <p:spPr>
-          <a:xfrm>
-            <a:off x="10274808" y="3977640"/>
-            <a:ext cx="972312" cy="749808"/>
-          </a:xfrm>
-          <a:prstGeom prst="roundRect">
-            <a:avLst>
-              <a:gd name="adj" fmla="val 14634"/>
-            </a:avLst>
-          </a:prstGeom>
-          <a:solidFill>
-            <a:srgbClr val="D69A2D"/>
-          </a:solidFill>
-          <a:ln w="12700">
-            <a:solidFill>
-              <a:srgbClr val="D69A2D"/>
-            </a:solidFill>
-            <a:prstDash val="solid"/>
-          </a:ln>
-        </p:spPr>
-      </p:sp>
-      <p:sp>
-        <p:nvSpPr>
-          <p:cNvPr id="18" name="Text 16"/>
-          <p:cNvSpPr/>
-          <p:nvPr/>
-        </p:nvSpPr>
-        <p:spPr>
-          <a:xfrm>
-            <a:off x="10347960" y="4169664"/>
-            <a:ext cx="826008" cy="310896"/>
-          </a:xfrm>
-          <a:prstGeom prst="rect">
-            <a:avLst/>
-          </a:prstGeom>
-          <a:noFill/>
-          <a:ln/>
-        </p:spPr>
-        <p:txBody>
-          <a:bodyPr wrap="square" lIns="0" tIns="0" rIns="0" bIns="0" rtlCol="0" anchor="ctr">
-            <a:normAutofit/>
-          </a:bodyPr>
-          <a:lstStyle/>
-          <a:p>
-            <a:pPr algn="ctr" indent="0" marL="0">
-              <a:buNone/>
-            </a:pPr>
-            <a:r>
-              <a:rPr lang="en-US" sz="1500" b="1" dirty="0">
-                <a:solidFill>
-                  <a:srgbClr val="FFFFFF"/>
-                </a:solidFill>
-                <a:latin typeface="Aptos" pitchFamily="34" charset="0"/>
-                <a:ea typeface="Aptos" pitchFamily="34" charset="-122"/>
-                <a:cs typeface="Aptos" pitchFamily="34" charset="-120"/>
-              </a:rPr>
-              <a:t>Artifact</a:t>
-            </a:r>
-            <a:endParaRPr lang="en-US" sz="1500" dirty="0"/>
+            <a:r>
+              <a:rPr lang="en-US" sz="1380" dirty="0">
+                <a:solidFill>
+                  <a:srgbClr val="17364A"/>
+                </a:solidFill>
+                <a:latin typeface="Aptos" pitchFamily="34" charset="0"/>
+                <a:ea typeface="Aptos" pitchFamily="34" charset="-122"/>
+                <a:cs typeface="Aptos" pitchFamily="34" charset="-120"/>
+              </a:rPr>
+              <a:t>Use a tool when no comparable local process exists.</a:t>
+            </a:r>
+            <a:endParaRPr lang="en-US" sz="1380" dirty="0"/>
+          </a:p>
+          <a:p>
+            <a:r>
+              <a:rPr lang="en-US" sz="1380" dirty="0">
+                <a:solidFill>
+                  <a:srgbClr val="17364A"/>
+                </a:solidFill>
+                <a:latin typeface="Aptos" pitchFamily="34" charset="0"/>
+                <a:ea typeface="Aptos" pitchFamily="34" charset="-122"/>
+                <a:cs typeface="Aptos" pitchFamily="34" charset="-120"/>
+              </a:rPr>
+              <a:t>Adapt existing department templates when they already fit the purpose.</a:t>
+            </a:r>
+            <a:endParaRPr lang="en-US" sz="1380" dirty="0"/>
+          </a:p>
+          <a:p>
+            <a:r>
+              <a:rPr lang="en-US" sz="1380" dirty="0">
+                <a:solidFill>
+                  <a:srgbClr val="17364A"/>
+                </a:solidFill>
+                <a:latin typeface="Aptos" pitchFamily="34" charset="0"/>
+                <a:ea typeface="Aptos" pitchFamily="34" charset="-122"/>
+                <a:cs typeface="Aptos" pitchFamily="34" charset="-120"/>
+              </a:rPr>
+              <a:t>Save the completed artifact as evidence of the decision.</a:t>
+            </a:r>
+            <a:endParaRPr lang="en-US" sz="1380" dirty="0"/>
           </a:p>
         </p:txBody>
       </p:sp>
@@ -13994,13 +13321,11 @@
             </a:avLst>
           </a:prstGeom>
           <a:solidFill>
-            <a:srgbClr val="FFFFFF">
-              <a:alpha val="88000"/>
-            </a:srgbClr>
+            <a:srgbClr val="FFFFFF"/>
           </a:solidFill>
           <a:ln w="12700">
             <a:solidFill>
-              <a:srgbClr val="D6E8F2"/>
+              <a:srgbClr val="B9D7E6"/>
             </a:solidFill>
             <a:prstDash val="solid"/>
           </a:ln>
@@ -14008,119 +13333,112 @@
       </p:sp>
       <p:sp>
         <p:nvSpPr>
-          <p:cNvPr id="14" name="Shape 12"/>
-          <p:cNvSpPr/>
-          <p:nvPr/>
-        </p:nvSpPr>
-        <p:spPr>
-          <a:xfrm>
-            <a:off x="8074152" y="3291840"/>
-            <a:ext cx="2596896" cy="749808"/>
-          </a:xfrm>
-          <a:prstGeom prst="rect">
-            <a:avLst/>
-          </a:prstGeom>
-          <a:solidFill>
-            <a:srgbClr val="EAF6F8"/>
-          </a:solidFill>
-          <a:ln w="12700">
-            <a:solidFill>
-              <a:srgbClr val="8ABBD8"/>
-            </a:solidFill>
-            <a:prstDash val="solid"/>
-          </a:ln>
-        </p:spPr>
-      </p:sp>
-      <p:sp>
-        <p:nvSpPr>
-          <p:cNvPr id="15" name="Shape 13"/>
-          <p:cNvSpPr/>
-          <p:nvPr/>
-        </p:nvSpPr>
-        <p:spPr>
-          <a:xfrm>
-            <a:off x="8202168" y="3721608"/>
-            <a:ext cx="2340864" cy="0"/>
-          </a:xfrm>
-          <a:prstGeom prst="line">
-            <a:avLst/>
-          </a:prstGeom>
-          <a:noFill/>
-          <a:ln w="19050">
-            <a:solidFill>
-              <a:srgbClr val="0068B7"/>
-            </a:solidFill>
-            <a:prstDash val="solid"/>
-          </a:ln>
-        </p:spPr>
+          <p:cNvPr id="14" name="Text 12"/>
+          <p:cNvSpPr/>
+          <p:nvPr/>
+        </p:nvSpPr>
+        <p:spPr>
+          <a:xfrm>
+            <a:off x="7799832" y="2935224"/>
+            <a:ext cx="3145536" cy="256032"/>
+          </a:xfrm>
+          <a:prstGeom prst="rect">
+            <a:avLst/>
+          </a:prstGeom>
+          <a:noFill/>
+          <a:ln/>
+        </p:spPr>
+        <p:txBody>
+          <a:bodyPr wrap="square" lIns="0" tIns="0" rIns="0" bIns="0" rtlCol="0" anchor="ctr"/>
+          <a:lstStyle/>
+          <a:p>
+            <a:pPr indent="0" marL="0">
+              <a:buNone/>
+            </a:pPr>
+            <a:r>
+              <a:rPr lang="en-US" sz="1300" b="1" dirty="0">
+                <a:solidFill>
+                  <a:srgbClr val="0068B7"/>
+                </a:solidFill>
+                <a:latin typeface="Aptos" pitchFamily="34" charset="0"/>
+                <a:ea typeface="Aptos" pitchFamily="34" charset="-122"/>
+                <a:cs typeface="Aptos" pitchFamily="34" charset="-120"/>
+              </a:rPr>
+              <a:t>Concept checkpoints</a:t>
+            </a:r>
+            <a:endParaRPr lang="en-US" sz="1300" dirty="0"/>
+          </a:p>
+        </p:txBody>
+      </p:sp>
+      <p:sp>
+        <p:nvSpPr>
+          <p:cNvPr id="15" name="Text 13"/>
+          <p:cNvSpPr/>
+          <p:nvPr/>
+        </p:nvSpPr>
+        <p:spPr>
+          <a:xfrm>
+            <a:off x="7818120" y="3300984"/>
+            <a:ext cx="3090672" cy="877824"/>
+          </a:xfrm>
+          <a:prstGeom prst="rect">
+            <a:avLst/>
+          </a:prstGeom>
+          <a:noFill/>
+          <a:ln/>
+        </p:spPr>
+        <p:txBody>
+          <a:bodyPr wrap="square" lIns="254" tIns="254" rIns="254" bIns="254" rtlCol="0" anchor="t">
+            <a:normAutofit/>
+          </a:bodyPr>
+          <a:lstStyle/>
+          <a:p>
+            <a:r>
+              <a:rPr lang="en-US" sz="1380" dirty="0">
+                <a:solidFill>
+                  <a:srgbClr val="17364A"/>
+                </a:solidFill>
+                <a:latin typeface="Aptos" pitchFamily="34" charset="0"/>
+                <a:ea typeface="Aptos" pitchFamily="34" charset="-122"/>
+                <a:cs typeface="Aptos" pitchFamily="34" charset="-120"/>
+              </a:rPr>
+              <a:t>Identify executive, program, technical, privacy, legal, security, and governance.</a:t>
+            </a:r>
+            <a:endParaRPr lang="en-US" sz="1380" dirty="0"/>
+          </a:p>
+          <a:p>
+            <a:r>
+              <a:rPr lang="en-US" sz="1380" dirty="0">
+                <a:solidFill>
+                  <a:srgbClr val="17364A"/>
+                </a:solidFill>
+                <a:latin typeface="Aptos" pitchFamily="34" charset="0"/>
+                <a:ea typeface="Aptos" pitchFamily="34" charset="-122"/>
+                <a:cs typeface="Aptos" pitchFamily="34" charset="-120"/>
+              </a:rPr>
+              <a:t>Create a decision-rights matrix for AI use case approval, risk acceptance, monitoring,.</a:t>
+            </a:r>
+            <a:endParaRPr lang="en-US" sz="1380" dirty="0"/>
+          </a:p>
+          <a:p>
+            <a:r>
+              <a:rPr lang="en-US" sz="1380" dirty="0">
+                <a:solidFill>
+                  <a:srgbClr val="17364A"/>
+                </a:solidFill>
+                <a:latin typeface="Aptos" pitchFamily="34" charset="0"/>
+                <a:ea typeface="Aptos" pitchFamily="34" charset="-122"/>
+                <a:cs typeface="Aptos" pitchFamily="34" charset="-120"/>
+              </a:rPr>
+              <a:t>Distinguish between consultative input, approval authority, and operational ownership.</a:t>
+            </a:r>
+            <a:endParaRPr lang="en-US" sz="1380" dirty="0"/>
+          </a:p>
+        </p:txBody>
       </p:sp>
       <p:sp>
         <p:nvSpPr>
           <p:cNvPr id="16" name="Shape 14"/>
-          <p:cNvSpPr/>
-          <p:nvPr/>
-        </p:nvSpPr>
-        <p:spPr>
-          <a:xfrm>
-            <a:off x="9198864" y="4206240"/>
-            <a:ext cx="347472" cy="347472"/>
-          </a:xfrm>
-          <a:prstGeom prst="ellipse">
-            <a:avLst/>
-          </a:prstGeom>
-          <a:solidFill>
-            <a:srgbClr val="2F8A28"/>
-          </a:solidFill>
-          <a:ln w="12700">
-            <a:solidFill>
-              <a:srgbClr val="2F8A28"/>
-            </a:solidFill>
-            <a:prstDash val="solid"/>
-          </a:ln>
-        </p:spPr>
-      </p:sp>
-      <p:sp>
-        <p:nvSpPr>
-          <p:cNvPr id="17" name="Text 15"/>
-          <p:cNvSpPr/>
-          <p:nvPr/>
-        </p:nvSpPr>
-        <p:spPr>
-          <a:xfrm>
-            <a:off x="7909560" y="3977640"/>
-            <a:ext cx="2926080" cy="182880"/>
-          </a:xfrm>
-          <a:prstGeom prst="rect">
-            <a:avLst/>
-          </a:prstGeom>
-          <a:noFill/>
-          <a:ln/>
-        </p:spPr>
-        <p:txBody>
-          <a:bodyPr wrap="square" lIns="0" tIns="0" rIns="0" bIns="0" rtlCol="0" anchor="ctr"/>
-          <a:lstStyle/>
-          <a:p>
-            <a:pPr algn="ctr" indent="0" marL="0">
-              <a:buNone/>
-            </a:pPr>
-            <a:r>
-              <a:rPr lang="en-US" sz="1000" dirty="0">
-                <a:solidFill>
-                  <a:srgbClr val="003A63"/>
-                </a:solidFill>
-                <a:latin typeface="Aptos" pitchFamily="34" charset="0"/>
-                <a:ea typeface="Aptos" pitchFamily="34" charset="-122"/>
-                <a:cs typeface="Aptos" pitchFamily="34" charset="-120"/>
-              </a:rPr>
-              <a:t>Concept to action</a:t>
-            </a:r>
-            <a:endParaRPr lang="en-US" sz="1000" dirty="0"/>
-          </a:p>
-        </p:txBody>
-      </p:sp>
-      <p:sp>
-        <p:nvSpPr>
-          <p:cNvPr id="18" name="Shape 16"/>
           <p:cNvSpPr/>
           <p:nvPr/>
         </p:nvSpPr>
@@ -14147,7 +13465,7 @@
       </p:sp>
       <p:sp>
         <p:nvSpPr>
-          <p:cNvPr id="19" name="Text 17"/>
+          <p:cNvPr id="17" name="Text 15"/>
           <p:cNvSpPr/>
           <p:nvPr/>
         </p:nvSpPr>
@@ -14186,7 +13504,7 @@
       </p:sp>
       <p:sp>
         <p:nvSpPr>
-          <p:cNvPr id="20" name="Text 18"/>
+          <p:cNvPr id="18" name="Text 16"/>
           <p:cNvSpPr/>
           <p:nvPr/>
         </p:nvSpPr>
@@ -14694,13 +14012,11 @@
             </a:avLst>
           </a:prstGeom>
           <a:solidFill>
-            <a:srgbClr val="FFFFFF">
-              <a:alpha val="88000"/>
-            </a:srgbClr>
+            <a:srgbClr val="FFFFFF"/>
           </a:solidFill>
           <a:ln w="12700">
             <a:solidFill>
-              <a:srgbClr val="D6E8F2"/>
+              <a:srgbClr val="B9D7E6"/>
             </a:solidFill>
             <a:prstDash val="solid"/>
           </a:ln>
@@ -14708,119 +14024,112 @@
       </p:sp>
       <p:sp>
         <p:nvSpPr>
-          <p:cNvPr id="14" name="Shape 12"/>
-          <p:cNvSpPr/>
-          <p:nvPr/>
-        </p:nvSpPr>
-        <p:spPr>
-          <a:xfrm>
-            <a:off x="8074152" y="3291840"/>
-            <a:ext cx="2596896" cy="749808"/>
-          </a:xfrm>
-          <a:prstGeom prst="rect">
-            <a:avLst/>
-          </a:prstGeom>
-          <a:solidFill>
-            <a:srgbClr val="EAF6F8"/>
-          </a:solidFill>
-          <a:ln w="12700">
-            <a:solidFill>
-              <a:srgbClr val="8ABBD8"/>
-            </a:solidFill>
-            <a:prstDash val="solid"/>
-          </a:ln>
-        </p:spPr>
-      </p:sp>
-      <p:sp>
-        <p:nvSpPr>
-          <p:cNvPr id="15" name="Shape 13"/>
-          <p:cNvSpPr/>
-          <p:nvPr/>
-        </p:nvSpPr>
-        <p:spPr>
-          <a:xfrm>
-            <a:off x="8202168" y="3721608"/>
-            <a:ext cx="2340864" cy="0"/>
-          </a:xfrm>
-          <a:prstGeom prst="line">
-            <a:avLst/>
-          </a:prstGeom>
-          <a:noFill/>
-          <a:ln w="19050">
-            <a:solidFill>
-              <a:srgbClr val="0068B7"/>
-            </a:solidFill>
-            <a:prstDash val="solid"/>
-          </a:ln>
-        </p:spPr>
+          <p:cNvPr id="14" name="Text 12"/>
+          <p:cNvSpPr/>
+          <p:nvPr/>
+        </p:nvSpPr>
+        <p:spPr>
+          <a:xfrm>
+            <a:off x="7799832" y="2935224"/>
+            <a:ext cx="3145536" cy="256032"/>
+          </a:xfrm>
+          <a:prstGeom prst="rect">
+            <a:avLst/>
+          </a:prstGeom>
+          <a:noFill/>
+          <a:ln/>
+        </p:spPr>
+        <p:txBody>
+          <a:bodyPr wrap="square" lIns="0" tIns="0" rIns="0" bIns="0" rtlCol="0" anchor="ctr"/>
+          <a:lstStyle/>
+          <a:p>
+            <a:pPr indent="0" marL="0">
+              <a:buNone/>
+            </a:pPr>
+            <a:r>
+              <a:rPr lang="en-US" sz="1300" b="1" dirty="0">
+                <a:solidFill>
+                  <a:srgbClr val="0068B7"/>
+                </a:solidFill>
+                <a:latin typeface="Aptos" pitchFamily="34" charset="0"/>
+                <a:ea typeface="Aptos" pitchFamily="34" charset="-122"/>
+                <a:cs typeface="Aptos" pitchFamily="34" charset="-120"/>
+              </a:rPr>
+              <a:t>Concept checkpoints</a:t>
+            </a:r>
+            <a:endParaRPr lang="en-US" sz="1300" dirty="0"/>
+          </a:p>
+        </p:txBody>
+      </p:sp>
+      <p:sp>
+        <p:nvSpPr>
+          <p:cNvPr id="15" name="Text 13"/>
+          <p:cNvSpPr/>
+          <p:nvPr/>
+        </p:nvSpPr>
+        <p:spPr>
+          <a:xfrm>
+            <a:off x="7818120" y="3300984"/>
+            <a:ext cx="3090672" cy="877824"/>
+          </a:xfrm>
+          <a:prstGeom prst="rect">
+            <a:avLst/>
+          </a:prstGeom>
+          <a:noFill/>
+          <a:ln/>
+        </p:spPr>
+        <p:txBody>
+          <a:bodyPr wrap="square" lIns="254" tIns="254" rIns="254" bIns="254" rtlCol="0" anchor="t">
+            <a:normAutofit/>
+          </a:bodyPr>
+          <a:lstStyle/>
+          <a:p>
+            <a:r>
+              <a:rPr lang="en-US" sz="1380" dirty="0">
+                <a:solidFill>
+                  <a:srgbClr val="17364A"/>
+                </a:solidFill>
+                <a:latin typeface="Aptos" pitchFamily="34" charset="0"/>
+                <a:ea typeface="Aptos" pitchFamily="34" charset="-122"/>
+                <a:cs typeface="Aptos" pitchFamily="34" charset="-120"/>
+              </a:rPr>
+              <a:t>Leaders need to know who can approve a pilot, who can accept residual risk, who can.</a:t>
+            </a:r>
+            <a:endParaRPr lang="en-US" sz="1380" dirty="0"/>
+          </a:p>
+          <a:p>
+            <a:r>
+              <a:rPr lang="en-US" sz="1380" dirty="0">
+                <a:solidFill>
+                  <a:srgbClr val="17364A"/>
+                </a:solidFill>
+                <a:latin typeface="Aptos" pitchFamily="34" charset="0"/>
+                <a:ea typeface="Aptos" pitchFamily="34" charset="-122"/>
+                <a:cs typeface="Aptos" pitchFamily="34" charset="-120"/>
+              </a:rPr>
+              <a:t>Ambiguous accountability is especially risky in public health because AI outputs may.</a:t>
+            </a:r>
+            <a:endParaRPr lang="en-US" sz="1380" dirty="0"/>
+          </a:p>
+          <a:p>
+            <a:r>
+              <a:rPr lang="en-US" sz="1380" dirty="0">
+                <a:solidFill>
+                  <a:srgbClr val="17364A"/>
+                </a:solidFill>
+                <a:latin typeface="Aptos" pitchFamily="34" charset="0"/>
+                <a:ea typeface="Aptos" pitchFamily="34" charset="-122"/>
+                <a:cs typeface="Aptos" pitchFamily="34" charset="-120"/>
+              </a:rPr>
+              <a:t>This module focuses on executive decision rights and accountability structures.</a:t>
+            </a:r>
+            <a:endParaRPr lang="en-US" sz="1380" dirty="0"/>
+          </a:p>
+        </p:txBody>
       </p:sp>
       <p:sp>
         <p:nvSpPr>
           <p:cNvPr id="16" name="Shape 14"/>
-          <p:cNvSpPr/>
-          <p:nvPr/>
-        </p:nvSpPr>
-        <p:spPr>
-          <a:xfrm>
-            <a:off x="9198864" y="4206240"/>
-            <a:ext cx="347472" cy="347472"/>
-          </a:xfrm>
-          <a:prstGeom prst="ellipse">
-            <a:avLst/>
-          </a:prstGeom>
-          <a:solidFill>
-            <a:srgbClr val="2F8A28"/>
-          </a:solidFill>
-          <a:ln w="12700">
-            <a:solidFill>
-              <a:srgbClr val="2F8A28"/>
-            </a:solidFill>
-            <a:prstDash val="solid"/>
-          </a:ln>
-        </p:spPr>
-      </p:sp>
-      <p:sp>
-        <p:nvSpPr>
-          <p:cNvPr id="17" name="Text 15"/>
-          <p:cNvSpPr/>
-          <p:nvPr/>
-        </p:nvSpPr>
-        <p:spPr>
-          <a:xfrm>
-            <a:off x="7909560" y="3977640"/>
-            <a:ext cx="2926080" cy="182880"/>
-          </a:xfrm>
-          <a:prstGeom prst="rect">
-            <a:avLst/>
-          </a:prstGeom>
-          <a:noFill/>
-          <a:ln/>
-        </p:spPr>
-        <p:txBody>
-          <a:bodyPr wrap="square" lIns="0" tIns="0" rIns="0" bIns="0" rtlCol="0" anchor="ctr"/>
-          <a:lstStyle/>
-          <a:p>
-            <a:pPr algn="ctr" indent="0" marL="0">
-              <a:buNone/>
-            </a:pPr>
-            <a:r>
-              <a:rPr lang="en-US" sz="1000" dirty="0">
-                <a:solidFill>
-                  <a:srgbClr val="003A63"/>
-                </a:solidFill>
-                <a:latin typeface="Aptos" pitchFamily="34" charset="0"/>
-                <a:ea typeface="Aptos" pitchFamily="34" charset="-122"/>
-                <a:cs typeface="Aptos" pitchFamily="34" charset="-120"/>
-              </a:rPr>
-              <a:t>Concept to action</a:t>
-            </a:r>
-            <a:endParaRPr lang="en-US" sz="1000" dirty="0"/>
-          </a:p>
-        </p:txBody>
-      </p:sp>
-      <p:sp>
-        <p:nvSpPr>
-          <p:cNvPr id="18" name="Shape 16"/>
           <p:cNvSpPr/>
           <p:nvPr/>
         </p:nvSpPr>
@@ -14847,7 +14156,7 @@
       </p:sp>
       <p:sp>
         <p:nvSpPr>
-          <p:cNvPr id="19" name="Text 17"/>
+          <p:cNvPr id="17" name="Text 15"/>
           <p:cNvSpPr/>
           <p:nvPr/>
         </p:nvSpPr>
@@ -14886,7 +14195,7 @@
       </p:sp>
       <p:sp>
         <p:nvSpPr>
-          <p:cNvPr id="20" name="Text 18"/>
+          <p:cNvPr id="18" name="Text 16"/>
           <p:cNvSpPr/>
           <p:nvPr/>
         </p:nvSpPr>
@@ -15394,13 +14703,11 @@
             </a:avLst>
           </a:prstGeom>
           <a:solidFill>
-            <a:srgbClr val="FFFFFF">
-              <a:alpha val="88000"/>
-            </a:srgbClr>
+            <a:srgbClr val="FFFFFF"/>
           </a:solidFill>
           <a:ln w="12700">
             <a:solidFill>
-              <a:srgbClr val="D6E8F2"/>
+              <a:srgbClr val="B9D7E6"/>
             </a:solidFill>
             <a:prstDash val="solid"/>
           </a:ln>
@@ -15408,190 +14715,112 @@
       </p:sp>
       <p:sp>
         <p:nvSpPr>
-          <p:cNvPr id="14" name="Shape 12"/>
-          <p:cNvSpPr/>
-          <p:nvPr/>
-        </p:nvSpPr>
-        <p:spPr>
-          <a:xfrm>
-            <a:off x="7891272" y="3108960"/>
-            <a:ext cx="566928" cy="566928"/>
-          </a:xfrm>
-          <a:prstGeom prst="ellipse">
-            <a:avLst/>
-          </a:prstGeom>
-          <a:solidFill>
-            <a:srgbClr val="0068B7"/>
-          </a:solidFill>
-          <a:ln w="12700">
-            <a:solidFill>
-              <a:srgbClr val="0068B7"/>
-            </a:solidFill>
-            <a:prstDash val="solid"/>
-          </a:ln>
-        </p:spPr>
-      </p:sp>
-      <p:sp>
-        <p:nvSpPr>
-          <p:cNvPr id="15" name="Shape 13"/>
-          <p:cNvSpPr/>
-          <p:nvPr/>
-        </p:nvSpPr>
-        <p:spPr>
-          <a:xfrm>
-            <a:off x="10287000" y="3108960"/>
-            <a:ext cx="566928" cy="566928"/>
-          </a:xfrm>
-          <a:prstGeom prst="ellipse">
-            <a:avLst/>
-          </a:prstGeom>
-          <a:solidFill>
-            <a:srgbClr val="2F8A28"/>
-          </a:solidFill>
-          <a:ln w="12700">
-            <a:solidFill>
-              <a:srgbClr val="2F8A28"/>
-            </a:solidFill>
-            <a:prstDash val="solid"/>
-          </a:ln>
-        </p:spPr>
+          <p:cNvPr id="14" name="Text 12"/>
+          <p:cNvSpPr/>
+          <p:nvPr/>
+        </p:nvSpPr>
+        <p:spPr>
+          <a:xfrm>
+            <a:off x="7799832" y="2935224"/>
+            <a:ext cx="3145536" cy="256032"/>
+          </a:xfrm>
+          <a:prstGeom prst="rect">
+            <a:avLst/>
+          </a:prstGeom>
+          <a:noFill/>
+          <a:ln/>
+        </p:spPr>
+        <p:txBody>
+          <a:bodyPr wrap="square" lIns="0" tIns="0" rIns="0" bIns="0" rtlCol="0" anchor="ctr"/>
+          <a:lstStyle/>
+          <a:p>
+            <a:pPr indent="0" marL="0">
+              <a:buNone/>
+            </a:pPr>
+            <a:r>
+              <a:rPr lang="en-US" sz="1300" b="1" dirty="0">
+                <a:solidFill>
+                  <a:srgbClr val="0068B7"/>
+                </a:solidFill>
+                <a:latin typeface="Aptos" pitchFamily="34" charset="0"/>
+                <a:ea typeface="Aptos" pitchFamily="34" charset="-122"/>
+                <a:cs typeface="Aptos" pitchFamily="34" charset="-120"/>
+              </a:rPr>
+              <a:t>Concept checkpoints</a:t>
+            </a:r>
+            <a:endParaRPr lang="en-US" sz="1300" dirty="0"/>
+          </a:p>
+        </p:txBody>
+      </p:sp>
+      <p:sp>
+        <p:nvSpPr>
+          <p:cNvPr id="15" name="Text 13"/>
+          <p:cNvSpPr/>
+          <p:nvPr/>
+        </p:nvSpPr>
+        <p:spPr>
+          <a:xfrm>
+            <a:off x="7818120" y="3300984"/>
+            <a:ext cx="3090672" cy="877824"/>
+          </a:xfrm>
+          <a:prstGeom prst="rect">
+            <a:avLst/>
+          </a:prstGeom>
+          <a:noFill/>
+          <a:ln/>
+        </p:spPr>
+        <p:txBody>
+          <a:bodyPr wrap="square" lIns="254" tIns="254" rIns="254" bIns="254" rtlCol="0" anchor="t">
+            <a:normAutofit/>
+          </a:bodyPr>
+          <a:lstStyle/>
+          <a:p>
+            <a:r>
+              <a:rPr lang="en-US" sz="1380" dirty="0">
+                <a:solidFill>
+                  <a:srgbClr val="17364A"/>
+                </a:solidFill>
+                <a:latin typeface="Aptos" pitchFamily="34" charset="0"/>
+                <a:ea typeface="Aptos" pitchFamily="34" charset="-122"/>
+                <a:cs typeface="Aptos" pitchFamily="34" charset="-120"/>
+              </a:rPr>
+              <a:t>It is not legal advice and does not replace review by agency legal counsel, privacy.</a:t>
+            </a:r>
+            <a:endParaRPr lang="en-US" sz="1380" dirty="0"/>
+          </a:p>
+          <a:p>
+            <a:r>
+              <a:rPr lang="en-US" sz="1380" dirty="0">
+                <a:solidFill>
+                  <a:srgbClr val="17364A"/>
+                </a:solidFill>
+                <a:latin typeface="Aptos" pitchFamily="34" charset="0"/>
+                <a:ea typeface="Aptos" pitchFamily="34" charset="-122"/>
+                <a:cs typeface="Aptos" pitchFamily="34" charset="-120"/>
+              </a:rPr>
+              <a:t>Requirements may vary by state, locality, territory, Tribe, agency, funding source,.</a:t>
+            </a:r>
+            <a:endParaRPr lang="en-US" sz="1380" dirty="0"/>
+          </a:p>
+          <a:p>
+            <a:r>
+              <a:rPr lang="en-US" sz="1380" dirty="0">
+                <a:solidFill>
+                  <a:srgbClr val="17364A"/>
+                </a:solidFill>
+                <a:latin typeface="Aptos" pitchFamily="34" charset="0"/>
+                <a:ea typeface="Aptos" pitchFamily="34" charset="-122"/>
+                <a:cs typeface="Aptos" pitchFamily="34" charset="-120"/>
+              </a:rPr>
+              <a:t>Learners should use this module to identify the issues that require review and should.</a:t>
+            </a:r>
+            <a:endParaRPr lang="en-US" sz="1380" dirty="0"/>
+          </a:p>
+        </p:txBody>
       </p:sp>
       <p:sp>
         <p:nvSpPr>
           <p:cNvPr id="16" name="Shape 14"/>
-          <p:cNvSpPr/>
-          <p:nvPr/>
-        </p:nvSpPr>
-        <p:spPr>
-          <a:xfrm>
-            <a:off x="9089136" y="3456432"/>
-            <a:ext cx="566928" cy="566928"/>
-          </a:xfrm>
-          <a:prstGeom prst="ellipse">
-            <a:avLst/>
-          </a:prstGeom>
-          <a:solidFill>
-            <a:srgbClr val="6A4CA3"/>
-          </a:solidFill>
-          <a:ln w="12700">
-            <a:solidFill>
-              <a:srgbClr val="6A4CA3"/>
-            </a:solidFill>
-            <a:prstDash val="solid"/>
-          </a:ln>
-        </p:spPr>
-      </p:sp>
-      <p:sp>
-        <p:nvSpPr>
-          <p:cNvPr id="17" name="Shape 15"/>
-          <p:cNvSpPr/>
-          <p:nvPr/>
-        </p:nvSpPr>
-        <p:spPr>
-          <a:xfrm>
-            <a:off x="8385048" y="3419856"/>
-            <a:ext cx="1975104" cy="0"/>
-          </a:xfrm>
-          <a:prstGeom prst="line">
-            <a:avLst/>
-          </a:prstGeom>
-          <a:noFill/>
-          <a:ln w="25400">
-            <a:solidFill>
-              <a:srgbClr val="8ABBD8"/>
-            </a:solidFill>
-            <a:prstDash val="solid"/>
-          </a:ln>
-        </p:spPr>
-      </p:sp>
-      <p:sp>
-        <p:nvSpPr>
-          <p:cNvPr id="18" name="Shape 16"/>
-          <p:cNvSpPr/>
-          <p:nvPr/>
-        </p:nvSpPr>
-        <p:spPr>
-          <a:xfrm>
-            <a:off x="8202168" y="3630168"/>
-            <a:ext cx="1170432" cy="118872"/>
-          </a:xfrm>
-          <a:prstGeom prst="line">
-            <a:avLst/>
-          </a:prstGeom>
-          <a:noFill/>
-          <a:ln w="25400">
-            <a:solidFill>
-              <a:srgbClr val="8ABBD8"/>
-            </a:solidFill>
-            <a:prstDash val="solid"/>
-          </a:ln>
-        </p:spPr>
-      </p:sp>
-      <p:sp>
-        <p:nvSpPr>
-          <p:cNvPr id="19" name="Shape 17"/>
-          <p:cNvSpPr/>
-          <p:nvPr/>
-        </p:nvSpPr>
-        <p:spPr>
-          <a:xfrm>
-            <a:off x="10543032" y="3630168"/>
-            <a:ext cx="-1170432" cy="118872"/>
-          </a:xfrm>
-          <a:prstGeom prst="line">
-            <a:avLst/>
-          </a:prstGeom>
-          <a:noFill/>
-          <a:ln w="25400">
-            <a:solidFill>
-              <a:srgbClr val="8ABBD8"/>
-            </a:solidFill>
-            <a:prstDash val="solid"/>
-          </a:ln>
-        </p:spPr>
-      </p:sp>
-      <p:sp>
-        <p:nvSpPr>
-          <p:cNvPr id="20" name="Text 18"/>
-          <p:cNvSpPr/>
-          <p:nvPr/>
-        </p:nvSpPr>
-        <p:spPr>
-          <a:xfrm>
-            <a:off x="7863840" y="4069080"/>
-            <a:ext cx="3017520" cy="164592"/>
-          </a:xfrm>
-          <a:prstGeom prst="rect">
-            <a:avLst/>
-          </a:prstGeom>
-          <a:noFill/>
-          <a:ln/>
-        </p:spPr>
-        <p:txBody>
-          <a:bodyPr wrap="square" lIns="0" tIns="0" rIns="0" bIns="0" rtlCol="0" anchor="ctr"/>
-          <a:lstStyle/>
-          <a:p>
-            <a:pPr algn="ctr" indent="0" marL="0">
-              <a:buNone/>
-            </a:pPr>
-            <a:r>
-              <a:rPr lang="en-US" sz="900" b="1" dirty="0">
-                <a:solidFill>
-                  <a:srgbClr val="003A63"/>
-                </a:solidFill>
-                <a:latin typeface="Aptos" pitchFamily="34" charset="0"/>
-                <a:ea typeface="Aptos" pitchFamily="34" charset="-122"/>
-                <a:cs typeface="Aptos" pitchFamily="34" charset="-120"/>
-              </a:rPr>
-              <a:t>Decision rights</a:t>
-            </a:r>
-            <a:endParaRPr lang="en-US" sz="900" dirty="0"/>
-          </a:p>
-        </p:txBody>
-      </p:sp>
-      <p:sp>
-        <p:nvSpPr>
-          <p:cNvPr id="21" name="Shape 19"/>
           <p:cNvSpPr/>
           <p:nvPr/>
         </p:nvSpPr>
@@ -15618,7 +14847,7 @@
       </p:sp>
       <p:sp>
         <p:nvSpPr>
-          <p:cNvPr id="22" name="Text 20"/>
+          <p:cNvPr id="17" name="Text 15"/>
           <p:cNvSpPr/>
           <p:nvPr/>
         </p:nvSpPr>
@@ -15657,7 +14886,7 @@
       </p:sp>
       <p:sp>
         <p:nvSpPr>
-          <p:cNvPr id="23" name="Text 21"/>
+          <p:cNvPr id="18" name="Text 16"/>
           <p:cNvSpPr/>
           <p:nvPr/>
         </p:nvSpPr>
@@ -16165,13 +15394,11 @@
             </a:avLst>
           </a:prstGeom>
           <a:solidFill>
-            <a:srgbClr val="FFFFFF">
-              <a:alpha val="88000"/>
-            </a:srgbClr>
+            <a:srgbClr val="FFFFFF"/>
           </a:solidFill>
           <a:ln w="12700">
             <a:solidFill>
-              <a:srgbClr val="D6E8F2"/>
+              <a:srgbClr val="B9D7E6"/>
             </a:solidFill>
             <a:prstDash val="solid"/>
           </a:ln>
@@ -16179,119 +15406,112 @@
       </p:sp>
       <p:sp>
         <p:nvSpPr>
-          <p:cNvPr id="14" name="Shape 12"/>
-          <p:cNvSpPr/>
-          <p:nvPr/>
-        </p:nvSpPr>
-        <p:spPr>
-          <a:xfrm>
-            <a:off x="8074152" y="3291840"/>
-            <a:ext cx="2596896" cy="749808"/>
-          </a:xfrm>
-          <a:prstGeom prst="rect">
-            <a:avLst/>
-          </a:prstGeom>
-          <a:solidFill>
-            <a:srgbClr val="EAF6F8"/>
-          </a:solidFill>
-          <a:ln w="12700">
-            <a:solidFill>
-              <a:srgbClr val="8ABBD8"/>
-            </a:solidFill>
-            <a:prstDash val="solid"/>
-          </a:ln>
-        </p:spPr>
-      </p:sp>
-      <p:sp>
-        <p:nvSpPr>
-          <p:cNvPr id="15" name="Shape 13"/>
-          <p:cNvSpPr/>
-          <p:nvPr/>
-        </p:nvSpPr>
-        <p:spPr>
-          <a:xfrm>
-            <a:off x="8202168" y="3721608"/>
-            <a:ext cx="2340864" cy="0"/>
-          </a:xfrm>
-          <a:prstGeom prst="line">
-            <a:avLst/>
-          </a:prstGeom>
-          <a:noFill/>
-          <a:ln w="19050">
-            <a:solidFill>
-              <a:srgbClr val="0068B7"/>
-            </a:solidFill>
-            <a:prstDash val="solid"/>
-          </a:ln>
-        </p:spPr>
+          <p:cNvPr id="14" name="Text 12"/>
+          <p:cNvSpPr/>
+          <p:nvPr/>
+        </p:nvSpPr>
+        <p:spPr>
+          <a:xfrm>
+            <a:off x="7799832" y="2935224"/>
+            <a:ext cx="3145536" cy="256032"/>
+          </a:xfrm>
+          <a:prstGeom prst="rect">
+            <a:avLst/>
+          </a:prstGeom>
+          <a:noFill/>
+          <a:ln/>
+        </p:spPr>
+        <p:txBody>
+          <a:bodyPr wrap="square" lIns="0" tIns="0" rIns="0" bIns="0" rtlCol="0" anchor="ctr"/>
+          <a:lstStyle/>
+          <a:p>
+            <a:pPr indent="0" marL="0">
+              <a:buNone/>
+            </a:pPr>
+            <a:r>
+              <a:rPr lang="en-US" sz="1300" b="1" dirty="0">
+                <a:solidFill>
+                  <a:srgbClr val="0068B7"/>
+                </a:solidFill>
+                <a:latin typeface="Aptos" pitchFamily="34" charset="0"/>
+                <a:ea typeface="Aptos" pitchFamily="34" charset="-122"/>
+                <a:cs typeface="Aptos" pitchFamily="34" charset="-120"/>
+              </a:rPr>
+              <a:t>Concept checkpoints</a:t>
+            </a:r>
+            <a:endParaRPr lang="en-US" sz="1300" dirty="0"/>
+          </a:p>
+        </p:txBody>
+      </p:sp>
+      <p:sp>
+        <p:nvSpPr>
+          <p:cNvPr id="15" name="Text 13"/>
+          <p:cNvSpPr/>
+          <p:nvPr/>
+        </p:nvSpPr>
+        <p:spPr>
+          <a:xfrm>
+            <a:off x="7818120" y="3300984"/>
+            <a:ext cx="3090672" cy="877824"/>
+          </a:xfrm>
+          <a:prstGeom prst="rect">
+            <a:avLst/>
+          </a:prstGeom>
+          <a:noFill/>
+          <a:ln/>
+        </p:spPr>
+        <p:txBody>
+          <a:bodyPr wrap="square" lIns="254" tIns="254" rIns="254" bIns="254" rtlCol="0" anchor="t">
+            <a:normAutofit/>
+          </a:bodyPr>
+          <a:lstStyle/>
+          <a:p>
+            <a:r>
+              <a:rPr lang="en-US" sz="1380" dirty="0">
+                <a:solidFill>
+                  <a:srgbClr val="17364A"/>
+                </a:solidFill>
+                <a:latin typeface="Aptos" pitchFamily="34" charset="0"/>
+                <a:ea typeface="Aptos" pitchFamily="34" charset="-122"/>
+                <a:cs typeface="Aptos" pitchFamily="34" charset="-120"/>
+              </a:rPr>
+              <a:t>A vendor may provide the model, IT may manage access, a program may define the workflow,.</a:t>
+            </a:r>
+            <a:endParaRPr lang="en-US" sz="1380" dirty="0"/>
+          </a:p>
+          <a:p>
+            <a:r>
+              <a:rPr lang="en-US" sz="1380" dirty="0">
+                <a:solidFill>
+                  <a:srgbClr val="17364A"/>
+                </a:solidFill>
+                <a:latin typeface="Aptos" pitchFamily="34" charset="0"/>
+                <a:ea typeface="Aptos" pitchFamily="34" charset="-122"/>
+                <a:cs typeface="Aptos" pitchFamily="34" charset="-120"/>
+              </a:rPr>
+              <a:t>Without a formal accountability model, each actor may assume that another party is.</a:t>
+            </a:r>
+            <a:endParaRPr lang="en-US" sz="1380" dirty="0"/>
+          </a:p>
+          <a:p>
+            <a:r>
+              <a:rPr lang="en-US" sz="1380" dirty="0">
+                <a:solidFill>
+                  <a:srgbClr val="17364A"/>
+                </a:solidFill>
+                <a:latin typeface="Aptos" pitchFamily="34" charset="0"/>
+                <a:ea typeface="Aptos" pitchFamily="34" charset="-122"/>
+                <a:cs typeface="Aptos" pitchFamily="34" charset="-120"/>
+              </a:rPr>
+              <a:t>Clear decision rights support trust and speed.</a:t>
+            </a:r>
+            <a:endParaRPr lang="en-US" sz="1380" dirty="0"/>
+          </a:p>
+        </p:txBody>
       </p:sp>
       <p:sp>
         <p:nvSpPr>
           <p:cNvPr id="16" name="Shape 14"/>
-          <p:cNvSpPr/>
-          <p:nvPr/>
-        </p:nvSpPr>
-        <p:spPr>
-          <a:xfrm>
-            <a:off x="9198864" y="4206240"/>
-            <a:ext cx="347472" cy="347472"/>
-          </a:xfrm>
-          <a:prstGeom prst="ellipse">
-            <a:avLst/>
-          </a:prstGeom>
-          <a:solidFill>
-            <a:srgbClr val="2F8A28"/>
-          </a:solidFill>
-          <a:ln w="12700">
-            <a:solidFill>
-              <a:srgbClr val="2F8A28"/>
-            </a:solidFill>
-            <a:prstDash val="solid"/>
-          </a:ln>
-        </p:spPr>
-      </p:sp>
-      <p:sp>
-        <p:nvSpPr>
-          <p:cNvPr id="17" name="Text 15"/>
-          <p:cNvSpPr/>
-          <p:nvPr/>
-        </p:nvSpPr>
-        <p:spPr>
-          <a:xfrm>
-            <a:off x="7909560" y="3977640"/>
-            <a:ext cx="2926080" cy="182880"/>
-          </a:xfrm>
-          <a:prstGeom prst="rect">
-            <a:avLst/>
-          </a:prstGeom>
-          <a:noFill/>
-          <a:ln/>
-        </p:spPr>
-        <p:txBody>
-          <a:bodyPr wrap="square" lIns="0" tIns="0" rIns="0" bIns="0" rtlCol="0" anchor="ctr"/>
-          <a:lstStyle/>
-          <a:p>
-            <a:pPr algn="ctr" indent="0" marL="0">
-              <a:buNone/>
-            </a:pPr>
-            <a:r>
-              <a:rPr lang="en-US" sz="1000" dirty="0">
-                <a:solidFill>
-                  <a:srgbClr val="003A63"/>
-                </a:solidFill>
-                <a:latin typeface="Aptos" pitchFamily="34" charset="0"/>
-                <a:ea typeface="Aptos" pitchFamily="34" charset="-122"/>
-                <a:cs typeface="Aptos" pitchFamily="34" charset="-120"/>
-              </a:rPr>
-              <a:t>Concept to action</a:t>
-            </a:r>
-            <a:endParaRPr lang="en-US" sz="1000" dirty="0"/>
-          </a:p>
-        </p:txBody>
-      </p:sp>
-      <p:sp>
-        <p:nvSpPr>
-          <p:cNvPr id="18" name="Shape 16"/>
           <p:cNvSpPr/>
           <p:nvPr/>
         </p:nvSpPr>
@@ -16318,7 +15538,7 @@
       </p:sp>
       <p:sp>
         <p:nvSpPr>
-          <p:cNvPr id="19" name="Text 17"/>
+          <p:cNvPr id="17" name="Text 15"/>
           <p:cNvSpPr/>
           <p:nvPr/>
         </p:nvSpPr>
@@ -16357,7 +15577,7 @@
       </p:sp>
       <p:sp>
         <p:nvSpPr>
-          <p:cNvPr id="20" name="Text 18"/>
+          <p:cNvPr id="18" name="Text 16"/>
           <p:cNvSpPr/>
           <p:nvPr/>
         </p:nvSpPr>
@@ -16865,13 +16085,11 @@
             </a:avLst>
           </a:prstGeom>
           <a:solidFill>
-            <a:srgbClr val="FFFFFF">
-              <a:alpha val="88000"/>
-            </a:srgbClr>
+            <a:srgbClr val="FFFFFF"/>
           </a:solidFill>
           <a:ln w="12700">
             <a:solidFill>
-              <a:srgbClr val="D6E8F2"/>
+              <a:srgbClr val="B9D7E6"/>
             </a:solidFill>
             <a:prstDash val="solid"/>
           </a:ln>
@@ -16879,119 +16097,112 @@
       </p:sp>
       <p:sp>
         <p:nvSpPr>
-          <p:cNvPr id="14" name="Shape 12"/>
-          <p:cNvSpPr/>
-          <p:nvPr/>
-        </p:nvSpPr>
-        <p:spPr>
-          <a:xfrm>
-            <a:off x="8074152" y="3291840"/>
-            <a:ext cx="2596896" cy="749808"/>
-          </a:xfrm>
-          <a:prstGeom prst="rect">
-            <a:avLst/>
-          </a:prstGeom>
-          <a:solidFill>
-            <a:srgbClr val="EAF6F8"/>
-          </a:solidFill>
-          <a:ln w="12700">
-            <a:solidFill>
-              <a:srgbClr val="8ABBD8"/>
-            </a:solidFill>
-            <a:prstDash val="solid"/>
-          </a:ln>
-        </p:spPr>
-      </p:sp>
-      <p:sp>
-        <p:nvSpPr>
-          <p:cNvPr id="15" name="Shape 13"/>
-          <p:cNvSpPr/>
-          <p:nvPr/>
-        </p:nvSpPr>
-        <p:spPr>
-          <a:xfrm>
-            <a:off x="8202168" y="3721608"/>
-            <a:ext cx="2340864" cy="0"/>
-          </a:xfrm>
-          <a:prstGeom prst="line">
-            <a:avLst/>
-          </a:prstGeom>
-          <a:noFill/>
-          <a:ln w="19050">
-            <a:solidFill>
-              <a:srgbClr val="0068B7"/>
-            </a:solidFill>
-            <a:prstDash val="solid"/>
-          </a:ln>
-        </p:spPr>
+          <p:cNvPr id="14" name="Text 12"/>
+          <p:cNvSpPr/>
+          <p:nvPr/>
+        </p:nvSpPr>
+        <p:spPr>
+          <a:xfrm>
+            <a:off x="7799832" y="2935224"/>
+            <a:ext cx="3145536" cy="256032"/>
+          </a:xfrm>
+          <a:prstGeom prst="rect">
+            <a:avLst/>
+          </a:prstGeom>
+          <a:noFill/>
+          <a:ln/>
+        </p:spPr>
+        <p:txBody>
+          <a:bodyPr wrap="square" lIns="0" tIns="0" rIns="0" bIns="0" rtlCol="0" anchor="ctr"/>
+          <a:lstStyle/>
+          <a:p>
+            <a:pPr indent="0" marL="0">
+              <a:buNone/>
+            </a:pPr>
+            <a:r>
+              <a:rPr lang="en-US" sz="1300" b="1" dirty="0">
+                <a:solidFill>
+                  <a:srgbClr val="0068B7"/>
+                </a:solidFill>
+                <a:latin typeface="Aptos" pitchFamily="34" charset="0"/>
+                <a:ea typeface="Aptos" pitchFamily="34" charset="-122"/>
+                <a:cs typeface="Aptos" pitchFamily="34" charset="-120"/>
+              </a:rPr>
+              <a:t>Concept checkpoints</a:t>
+            </a:r>
+            <a:endParaRPr lang="en-US" sz="1300" dirty="0"/>
+          </a:p>
+        </p:txBody>
+      </p:sp>
+      <p:sp>
+        <p:nvSpPr>
+          <p:cNvPr id="15" name="Text 13"/>
+          <p:cNvSpPr/>
+          <p:nvPr/>
+        </p:nvSpPr>
+        <p:spPr>
+          <a:xfrm>
+            <a:off x="7818120" y="3300984"/>
+            <a:ext cx="3090672" cy="877824"/>
+          </a:xfrm>
+          <a:prstGeom prst="rect">
+            <a:avLst/>
+          </a:prstGeom>
+          <a:noFill/>
+          <a:ln/>
+        </p:spPr>
+        <p:txBody>
+          <a:bodyPr wrap="square" lIns="254" tIns="254" rIns="254" bIns="254" rtlCol="0" anchor="t">
+            <a:normAutofit/>
+          </a:bodyPr>
+          <a:lstStyle/>
+          <a:p>
+            <a:r>
+              <a:rPr lang="en-US" sz="1380" dirty="0">
+                <a:solidFill>
+                  <a:srgbClr val="17364A"/>
+                </a:solidFill>
+                <a:latin typeface="Aptos" pitchFamily="34" charset="0"/>
+                <a:ea typeface="Aptos" pitchFamily="34" charset="-122"/>
+                <a:cs typeface="Aptos" pitchFamily="34" charset="-120"/>
+              </a:rPr>
+              <a:t>A local health department implements an AI-assisted tool to classify incoming.</a:t>
+            </a:r>
+            <a:endParaRPr lang="en-US" sz="1380" dirty="0"/>
+          </a:p>
+          <a:p>
+            <a:r>
+              <a:rPr lang="en-US" sz="1380" dirty="0">
+                <a:solidFill>
+                  <a:srgbClr val="17364A"/>
+                </a:solidFill>
+                <a:latin typeface="Aptos" pitchFamily="34" charset="0"/>
+                <a:ea typeface="Aptos" pitchFamily="34" charset="-122"/>
+                <a:cs typeface="Aptos" pitchFamily="34" charset="-120"/>
+              </a:rPr>
+              <a:t>The vendor configured the model, IT manages access, environmental health staff review the.</a:t>
+            </a:r>
+            <a:endParaRPr lang="en-US" sz="1380" dirty="0"/>
+          </a:p>
+          <a:p>
+            <a:r>
+              <a:rPr lang="en-US" sz="1380" dirty="0">
+                <a:solidFill>
+                  <a:srgbClr val="17364A"/>
+                </a:solidFill>
+                <a:latin typeface="Aptos" pitchFamily="34" charset="0"/>
+                <a:ea typeface="Aptos" pitchFamily="34" charset="-122"/>
+                <a:cs typeface="Aptos" pitchFamily="34" charset="-120"/>
+              </a:rPr>
+              <a:t>A decision-rights matrix helps the agency respond.</a:t>
+            </a:r>
+            <a:endParaRPr lang="en-US" sz="1380" dirty="0"/>
+          </a:p>
+        </p:txBody>
       </p:sp>
       <p:sp>
         <p:nvSpPr>
           <p:cNvPr id="16" name="Shape 14"/>
-          <p:cNvSpPr/>
-          <p:nvPr/>
-        </p:nvSpPr>
-        <p:spPr>
-          <a:xfrm>
-            <a:off x="9198864" y="4206240"/>
-            <a:ext cx="347472" cy="347472"/>
-          </a:xfrm>
-          <a:prstGeom prst="ellipse">
-            <a:avLst/>
-          </a:prstGeom>
-          <a:solidFill>
-            <a:srgbClr val="2F8A28"/>
-          </a:solidFill>
-          <a:ln w="12700">
-            <a:solidFill>
-              <a:srgbClr val="2F8A28"/>
-            </a:solidFill>
-            <a:prstDash val="solid"/>
-          </a:ln>
-        </p:spPr>
-      </p:sp>
-      <p:sp>
-        <p:nvSpPr>
-          <p:cNvPr id="17" name="Text 15"/>
-          <p:cNvSpPr/>
-          <p:nvPr/>
-        </p:nvSpPr>
-        <p:spPr>
-          <a:xfrm>
-            <a:off x="7909560" y="3977640"/>
-            <a:ext cx="2926080" cy="182880"/>
-          </a:xfrm>
-          <a:prstGeom prst="rect">
-            <a:avLst/>
-          </a:prstGeom>
-          <a:noFill/>
-          <a:ln/>
-        </p:spPr>
-        <p:txBody>
-          <a:bodyPr wrap="square" lIns="0" tIns="0" rIns="0" bIns="0" rtlCol="0" anchor="ctr"/>
-          <a:lstStyle/>
-          <a:p>
-            <a:pPr algn="ctr" indent="0" marL="0">
-              <a:buNone/>
-            </a:pPr>
-            <a:r>
-              <a:rPr lang="en-US" sz="1000" dirty="0">
-                <a:solidFill>
-                  <a:srgbClr val="003A63"/>
-                </a:solidFill>
-                <a:latin typeface="Aptos" pitchFamily="34" charset="0"/>
-                <a:ea typeface="Aptos" pitchFamily="34" charset="-122"/>
-                <a:cs typeface="Aptos" pitchFamily="34" charset="-120"/>
-              </a:rPr>
-              <a:t>Concept to action</a:t>
-            </a:r>
-            <a:endParaRPr lang="en-US" sz="1000" dirty="0"/>
-          </a:p>
-        </p:txBody>
-      </p:sp>
-      <p:sp>
-        <p:nvSpPr>
-          <p:cNvPr id="18" name="Shape 16"/>
           <p:cNvSpPr/>
           <p:nvPr/>
         </p:nvSpPr>
@@ -17018,7 +16229,7 @@
       </p:sp>
       <p:sp>
         <p:nvSpPr>
-          <p:cNvPr id="19" name="Text 17"/>
+          <p:cNvPr id="17" name="Text 15"/>
           <p:cNvSpPr/>
           <p:nvPr/>
         </p:nvSpPr>
@@ -17057,7 +16268,7 @@
       </p:sp>
       <p:sp>
         <p:nvSpPr>
-          <p:cNvPr id="20" name="Text 18"/>
+          <p:cNvPr id="18" name="Text 16"/>
           <p:cNvSpPr/>
           <p:nvPr/>
         </p:nvSpPr>

--- a/downloads/presentations/modules/exe-400.pptx
+++ b/downloads/presentations/modules/exe-400.pptx
@@ -3253,49 +3253,58 @@
           <a:ln/>
         </p:spPr>
         <p:txBody>
-          <a:bodyPr wrap="square" lIns="635" tIns="635" rIns="635" bIns="635" rtlCol="0" anchor="t">
+          <a:bodyPr wrap="square" lIns="1016" tIns="1016" rIns="1016" bIns="1016" rtlCol="0" anchor="t">
             <a:normAutofit/>
           </a:bodyPr>
           <a:lstStyle/>
           <a:p>
+            <a:pPr indent="0" marL="0">
+              <a:buNone/>
+            </a:pPr>
             <a:r>
               <a:rPr lang="en-US" sz="2100" dirty="0">
                 <a:solidFill>
-                  <a:srgbClr val="17364A"/>
-                </a:solidFill>
-                <a:latin typeface="Aptos" pitchFamily="34" charset="0"/>
-                <a:ea typeface="Aptos" pitchFamily="34" charset="-122"/>
-                <a:cs typeface="Aptos" pitchFamily="34" charset="-120"/>
-              </a:rPr>
-              <a:t>Decision rights should be defined across the full AI lifecycle.</a:t>
+                  <a:srgbClr val="003A63"/>
+                </a:solidFill>
+                <a:latin typeface="Aptos" pitchFamily="34" charset="0"/>
+                <a:ea typeface="Aptos" pitchFamily="34" charset="-122"/>
+                <a:cs typeface="Aptos" pitchFamily="34" charset="-120"/>
+              </a:rPr>
+              <a:t>• Decision rights should be defined across the full AI lifecycle.</a:t>
             </a:r>
             <a:endParaRPr lang="en-US" sz="2100" dirty="0"/>
           </a:p>
           <a:p>
+            <a:pPr indent="0" marL="0">
+              <a:buNone/>
+            </a:pPr>
             <a:r>
               <a:rPr lang="en-US" sz="2100" dirty="0">
                 <a:solidFill>
-                  <a:srgbClr val="17364A"/>
-                </a:solidFill>
-                <a:latin typeface="Aptos" pitchFamily="34" charset="0"/>
-                <a:ea typeface="Aptos" pitchFamily="34" charset="-122"/>
-                <a:cs typeface="Aptos" pitchFamily="34" charset="-120"/>
-              </a:rPr>
-              <a:t>During ideation, leadership may decide whether a use case aligns with agency priorities.</a:t>
+                  <a:srgbClr val="003A63"/>
+                </a:solidFill>
+                <a:latin typeface="Aptos" pitchFamily="34" charset="0"/>
+                <a:ea typeface="Aptos" pitchFamily="34" charset="-122"/>
+                <a:cs typeface="Aptos" pitchFamily="34" charset="-120"/>
+              </a:rPr>
+              <a:t>• During ideation, leadership may decide whether a use case aligns with agency priorities.</a:t>
             </a:r>
             <a:endParaRPr lang="en-US" sz="2100" dirty="0"/>
           </a:p>
           <a:p>
+            <a:pPr indent="0" marL="0">
+              <a:buNone/>
+            </a:pPr>
             <a:r>
               <a:rPr lang="en-US" sz="2100" dirty="0">
                 <a:solidFill>
-                  <a:srgbClr val="17364A"/>
-                </a:solidFill>
-                <a:latin typeface="Aptos" pitchFamily="34" charset="0"/>
-                <a:ea typeface="Aptos" pitchFamily="34" charset="-122"/>
-                <a:cs typeface="Aptos" pitchFamily="34" charset="-120"/>
-              </a:rPr>
-              <a:t>During review, governance may decide whether the use case is low, moderate, or high risk.</a:t>
+                  <a:srgbClr val="003A63"/>
+                </a:solidFill>
+                <a:latin typeface="Aptos" pitchFamily="34" charset="0"/>
+                <a:ea typeface="Aptos" pitchFamily="34" charset="-122"/>
+                <a:cs typeface="Aptos" pitchFamily="34" charset="-120"/>
+              </a:rPr>
+              <a:t>• During review, governance may decide whether the use case is low, moderate, or high risk.</a:t>
             </a:r>
             <a:endParaRPr lang="en-US" sz="2100" dirty="0"/>
           </a:p>
@@ -3375,17 +3384,17 @@
         </p:nvSpPr>
         <p:spPr>
           <a:xfrm>
-            <a:off x="7799832" y="1828800"/>
-            <a:ext cx="3145536" cy="685800"/>
-          </a:xfrm>
-          <a:prstGeom prst="rect">
-            <a:avLst/>
-          </a:prstGeom>
-          <a:noFill/>
-          <a:ln/>
-        </p:spPr>
-        <p:txBody>
-          <a:bodyPr wrap="square" lIns="0" tIns="0" rIns="0" bIns="0" rtlCol="0" anchor="t">
+            <a:off x="7799832" y="1801368"/>
+            <a:ext cx="3145536" cy="758952"/>
+          </a:xfrm>
+          <a:prstGeom prst="rect">
+            <a:avLst/>
+          </a:prstGeom>
+          <a:noFill/>
+          <a:ln/>
+        </p:spPr>
+        <p:txBody>
+          <a:bodyPr wrap="square" lIns="254" tIns="254" rIns="254" bIns="254" rtlCol="0" anchor="t">
             <a:normAutofit/>
           </a:bodyPr>
           <a:lstStyle/>
@@ -3394,7 +3403,7 @@
               <a:buNone/>
             </a:pPr>
             <a:r>
-              <a:rPr lang="en-US" sz="1550" dirty="0">
+              <a:rPr lang="en-US" sz="1320" dirty="0">
                 <a:solidFill>
                   <a:srgbClr val="17364A"/>
                 </a:solidFill>
@@ -3404,7 +3413,7 @@
               </a:rPr>
               <a:t>Decision rights should be defined across the full AI lifecycle.</a:t>
             </a:r>
-            <a:endParaRPr lang="en-US" sz="1550" dirty="0"/>
+            <a:endParaRPr lang="en-US" sz="1320" dirty="0"/>
           </a:p>
         </p:txBody>
       </p:sp>
@@ -3492,13 +3501,16 @@
           <a:ln/>
         </p:spPr>
         <p:txBody>
-          <a:bodyPr wrap="square" lIns="254" tIns="254" rIns="254" bIns="254" rtlCol="0" anchor="t">
+          <a:bodyPr wrap="square" lIns="508" tIns="508" rIns="508" bIns="508" rtlCol="0" anchor="t">
             <a:normAutofit/>
           </a:bodyPr>
           <a:lstStyle/>
           <a:p>
-            <a:r>
-              <a:rPr lang="en-US" sz="1380" dirty="0">
+            <a:pPr indent="0" marL="0">
+              <a:buNone/>
+            </a:pPr>
+            <a:r>
+              <a:rPr lang="en-US" sz="1220" dirty="0">
                 <a:solidFill>
                   <a:srgbClr val="17364A"/>
                 </a:solidFill>
@@ -3506,13 +3518,16 @@
                 <a:ea typeface="Aptos" pitchFamily="34" charset="-122"/>
                 <a:cs typeface="Aptos" pitchFamily="34" charset="-120"/>
               </a:rPr>
-              <a:t>During procurement, authorized officials decide whether vendor claims, contract language,.</a:t>
-            </a:r>
-            <a:endParaRPr lang="en-US" sz="1380" dirty="0"/>
-          </a:p>
-          <a:p>
-            <a:r>
-              <a:rPr lang="en-US" sz="1380" dirty="0">
+              <a:t>During procurement, authorized officials decide whether vendor.</a:t>
+            </a:r>
+            <a:endParaRPr lang="en-US" sz="1220" dirty="0"/>
+          </a:p>
+          <a:p>
+            <a:pPr indent="0" marL="0">
+              <a:buNone/>
+            </a:pPr>
+            <a:r>
+              <a:rPr lang="en-US" sz="1220" dirty="0">
                 <a:solidFill>
                   <a:srgbClr val="17364A"/>
                 </a:solidFill>
@@ -3520,13 +3535,16 @@
                 <a:ea typeface="Aptos" pitchFamily="34" charset="-122"/>
                 <a:cs typeface="Aptos" pitchFamily="34" charset="-120"/>
               </a:rPr>
-              <a:t>During implementation, program and technical owners decide whether acceptance criteria.</a:t>
-            </a:r>
-            <a:endParaRPr lang="en-US" sz="1380" dirty="0"/>
-          </a:p>
-          <a:p>
-            <a:r>
-              <a:rPr lang="en-US" sz="1380" dirty="0">
+              <a:t>During implementation, program and technical owners decide whether.</a:t>
+            </a:r>
+            <a:endParaRPr lang="en-US" sz="1220" dirty="0"/>
+          </a:p>
+          <a:p>
+            <a:pPr indent="0" marL="0">
+              <a:buNone/>
+            </a:pPr>
+            <a:r>
+              <a:rPr lang="en-US" sz="1220" dirty="0">
                 <a:solidFill>
                   <a:srgbClr val="17364A"/>
                 </a:solidFill>
@@ -3534,9 +3552,9 @@
                 <a:ea typeface="Aptos" pitchFamily="34" charset="-122"/>
                 <a:cs typeface="Aptos" pitchFamily="34" charset="-120"/>
               </a:rPr>
-              <a:t>During operations, defined owners decide whether monitoring results require adjustment,.</a:t>
-            </a:r>
-            <a:endParaRPr lang="en-US" sz="1380" dirty="0"/>
+              <a:t>During operations, defined owners decide whether monitoring.</a:t>
+            </a:r>
+            <a:endParaRPr lang="en-US" sz="1220" dirty="0"/>
           </a:p>
         </p:txBody>
       </p:sp>
@@ -3614,17 +3632,17 @@
         </p:nvSpPr>
         <p:spPr>
           <a:xfrm>
-            <a:off x="7799832" y="5001768"/>
-            <a:ext cx="3145536" cy="502920"/>
-          </a:xfrm>
-          <a:prstGeom prst="rect">
-            <a:avLst/>
-          </a:prstGeom>
-          <a:noFill/>
-          <a:ln/>
-        </p:spPr>
-        <p:txBody>
-          <a:bodyPr wrap="square" lIns="0" tIns="0" rIns="0" bIns="0" rtlCol="0" anchor="t">
+            <a:off x="7799832" y="4974336"/>
+            <a:ext cx="3145536" cy="576072"/>
+          </a:xfrm>
+          <a:prstGeom prst="rect">
+            <a:avLst/>
+          </a:prstGeom>
+          <a:noFill/>
+          <a:ln/>
+        </p:spPr>
+        <p:txBody>
+          <a:bodyPr wrap="square" lIns="254" tIns="254" rIns="254" bIns="254" rtlCol="0" anchor="t">
             <a:normAutofit/>
           </a:bodyPr>
           <a:lstStyle/>
@@ -3633,7 +3651,7 @@
               <a:buNone/>
             </a:pPr>
             <a:r>
-              <a:rPr lang="en-US" sz="1550" dirty="0">
+              <a:rPr lang="en-US" sz="1320" dirty="0">
                 <a:solidFill>
                   <a:srgbClr val="17364A"/>
                 </a:solidFill>
@@ -3641,9 +3659,9 @@
                 <a:ea typeface="Aptos" pitchFamily="34" charset="-122"/>
                 <a:cs typeface="Aptos" pitchFamily="34" charset="-120"/>
               </a:rPr>
-              <a:t>Translate this concept into clear decision rights, review steps, documentation expectations, and escalation paths before an AI-supported workflow is approved.</a:t>
-            </a:r>
-            <a:endParaRPr lang="en-US" sz="1550" dirty="0"/>
+              <a:t>Translate this concept into clear decision rights, review steps, documentation expectations, and escalation paths before.</a:t>
+            </a:r>
+            <a:endParaRPr lang="en-US" sz="1320" dirty="0"/>
           </a:p>
         </p:txBody>
       </p:sp>
@@ -3944,49 +3962,58 @@
           <a:ln/>
         </p:spPr>
         <p:txBody>
-          <a:bodyPr wrap="square" lIns="635" tIns="635" rIns="635" bIns="635" rtlCol="0" anchor="t">
+          <a:bodyPr wrap="square" lIns="1016" tIns="1016" rIns="1016" bIns="1016" rtlCol="0" anchor="t">
             <a:normAutofit/>
           </a:bodyPr>
           <a:lstStyle/>
           <a:p>
+            <a:pPr indent="0" marL="0">
+              <a:buNone/>
+            </a:pPr>
             <a:r>
               <a:rPr lang="en-US" sz="2100" dirty="0">
                 <a:solidFill>
-                  <a:srgbClr val="17364A"/>
-                </a:solidFill>
-                <a:latin typeface="Aptos" pitchFamily="34" charset="0"/>
-                <a:ea typeface="Aptos" pitchFamily="34" charset="-122"/>
-                <a:cs typeface="Aptos" pitchFamily="34" charset="-120"/>
-              </a:rPr>
-              <a:t>One risk is accountability diffusion.</a:t>
+                  <a:srgbClr val="003A63"/>
+                </a:solidFill>
+                <a:latin typeface="Aptos" pitchFamily="34" charset="0"/>
+                <a:ea typeface="Aptos" pitchFamily="34" charset="-122"/>
+                <a:cs typeface="Aptos" pitchFamily="34" charset="-120"/>
+              </a:rPr>
+              <a:t>• One risk is accountability diffusion.</a:t>
             </a:r>
             <a:endParaRPr lang="en-US" sz="2100" dirty="0"/>
           </a:p>
           <a:p>
+            <a:pPr indent="0" marL="0">
+              <a:buNone/>
+            </a:pPr>
             <a:r>
               <a:rPr lang="en-US" sz="2100" dirty="0">
                 <a:solidFill>
-                  <a:srgbClr val="17364A"/>
-                </a:solidFill>
-                <a:latin typeface="Aptos" pitchFamily="34" charset="0"/>
-                <a:ea typeface="Aptos" pitchFamily="34" charset="-122"/>
-                <a:cs typeface="Aptos" pitchFamily="34" charset="-120"/>
-              </a:rPr>
-              <a:t>When everyone is involved but no one is accountable, important concerns may go unresolved.</a:t>
+                  <a:srgbClr val="003A63"/>
+                </a:solidFill>
+                <a:latin typeface="Aptos" pitchFamily="34" charset="0"/>
+                <a:ea typeface="Aptos" pitchFamily="34" charset="-122"/>
+                <a:cs typeface="Aptos" pitchFamily="34" charset="-120"/>
+              </a:rPr>
+              <a:t>• When everyone is involved but no one is accountable, important concerns may go unresolved.</a:t>
             </a:r>
             <a:endParaRPr lang="en-US" sz="2100" dirty="0"/>
           </a:p>
           <a:p>
+            <a:pPr indent="0" marL="0">
+              <a:buNone/>
+            </a:pPr>
             <a:r>
               <a:rPr lang="en-US" sz="2100" dirty="0">
                 <a:solidFill>
-                  <a:srgbClr val="17364A"/>
-                </a:solidFill>
-                <a:latin typeface="Aptos" pitchFamily="34" charset="0"/>
-                <a:ea typeface="Aptos" pitchFamily="34" charset="-122"/>
-                <a:cs typeface="Aptos" pitchFamily="34" charset="-120"/>
-              </a:rPr>
-              <a:t>A guardrail is to assign a named program owner and governance owner for every AI use case.</a:t>
+                  <a:srgbClr val="003A63"/>
+                </a:solidFill>
+                <a:latin typeface="Aptos" pitchFamily="34" charset="0"/>
+                <a:ea typeface="Aptos" pitchFamily="34" charset="-122"/>
+                <a:cs typeface="Aptos" pitchFamily="34" charset="-120"/>
+              </a:rPr>
+              <a:t>• A guardrail is to assign a named program owner and governance owner for every AI use case.</a:t>
             </a:r>
             <a:endParaRPr lang="en-US" sz="2100" dirty="0"/>
           </a:p>
@@ -4066,17 +4093,17 @@
         </p:nvSpPr>
         <p:spPr>
           <a:xfrm>
-            <a:off x="7799832" y="1828800"/>
-            <a:ext cx="3145536" cy="685800"/>
-          </a:xfrm>
-          <a:prstGeom prst="rect">
-            <a:avLst/>
-          </a:prstGeom>
-          <a:noFill/>
-          <a:ln/>
-        </p:spPr>
-        <p:txBody>
-          <a:bodyPr wrap="square" lIns="0" tIns="0" rIns="0" bIns="0" rtlCol="0" anchor="t">
+            <a:off x="7799832" y="1801368"/>
+            <a:ext cx="3145536" cy="758952"/>
+          </a:xfrm>
+          <a:prstGeom prst="rect">
+            <a:avLst/>
+          </a:prstGeom>
+          <a:noFill/>
+          <a:ln/>
+        </p:spPr>
+        <p:txBody>
+          <a:bodyPr wrap="square" lIns="254" tIns="254" rIns="254" bIns="254" rtlCol="0" anchor="t">
             <a:normAutofit/>
           </a:bodyPr>
           <a:lstStyle/>
@@ -4085,7 +4112,7 @@
               <a:buNone/>
             </a:pPr>
             <a:r>
-              <a:rPr lang="en-US" sz="1550" dirty="0">
+              <a:rPr lang="en-US" sz="1320" dirty="0">
                 <a:solidFill>
                   <a:srgbClr val="17364A"/>
                 </a:solidFill>
@@ -4095,7 +4122,7 @@
               </a:rPr>
               <a:t>One risk is accountability diffusion.</a:t>
             </a:r>
-            <a:endParaRPr lang="en-US" sz="1550" dirty="0"/>
+            <a:endParaRPr lang="en-US" sz="1320" dirty="0"/>
           </a:p>
         </p:txBody>
       </p:sp>
@@ -4183,13 +4210,16 @@
           <a:ln/>
         </p:spPr>
         <p:txBody>
-          <a:bodyPr wrap="square" lIns="254" tIns="254" rIns="254" bIns="254" rtlCol="0" anchor="t">
+          <a:bodyPr wrap="square" lIns="508" tIns="508" rIns="508" bIns="508" rtlCol="0" anchor="t">
             <a:normAutofit/>
           </a:bodyPr>
           <a:lstStyle/>
           <a:p>
-            <a:r>
-              <a:rPr lang="en-US" sz="1380" dirty="0">
+            <a:pPr indent="0" marL="0">
+              <a:buNone/>
+            </a:pPr>
+            <a:r>
+              <a:rPr lang="en-US" sz="1220" dirty="0">
                 <a:solidFill>
                   <a:srgbClr val="17364A"/>
                 </a:solidFill>
@@ -4197,13 +4227,16 @@
                 <a:ea typeface="Aptos" pitchFamily="34" charset="-122"/>
                 <a:cs typeface="Aptos" pitchFamily="34" charset="-120"/>
               </a:rPr>
-              <a:t>Another risk is inappropriate risk acceptance by staff who lack authority.</a:t>
-            </a:r>
-            <a:endParaRPr lang="en-US" sz="1380" dirty="0"/>
-          </a:p>
-          <a:p>
-            <a:r>
-              <a:rPr lang="en-US" sz="1380" dirty="0">
+              <a:t>Another risk is inappropriate risk acceptance by staff who lack.</a:t>
+            </a:r>
+            <a:endParaRPr lang="en-US" sz="1220" dirty="0"/>
+          </a:p>
+          <a:p>
+            <a:pPr indent="0" marL="0">
+              <a:buNone/>
+            </a:pPr>
+            <a:r>
+              <a:rPr lang="en-US" sz="1220" dirty="0">
                 <a:solidFill>
                   <a:srgbClr val="17364A"/>
                 </a:solidFill>
@@ -4211,13 +4244,16 @@
                 <a:ea typeface="Aptos" pitchFamily="34" charset="-122"/>
                 <a:cs typeface="Aptos" pitchFamily="34" charset="-120"/>
               </a:rPr>
-              <a:t>A frontline supervisor may feel pressure to continue a tool despite known concerns.</a:t>
-            </a:r>
-            <a:endParaRPr lang="en-US" sz="1380" dirty="0"/>
-          </a:p>
-          <a:p>
-            <a:r>
-              <a:rPr lang="en-US" sz="1380" dirty="0">
+              <a:t>A frontline supervisor may feel pressure to continue a tool.</a:t>
+            </a:r>
+            <a:endParaRPr lang="en-US" sz="1220" dirty="0"/>
+          </a:p>
+          <a:p>
+            <a:pPr indent="0" marL="0">
+              <a:buNone/>
+            </a:pPr>
+            <a:r>
+              <a:rPr lang="en-US" sz="1220" dirty="0">
                 <a:solidFill>
                   <a:srgbClr val="17364A"/>
                 </a:solidFill>
@@ -4225,9 +4261,9 @@
                 <a:ea typeface="Aptos" pitchFamily="34" charset="-122"/>
                 <a:cs typeface="Aptos" pitchFamily="34" charset="-120"/>
               </a:rPr>
-              <a:t>A guardrail is to define which risks can be accepted at the program level and which.</a:t>
-            </a:r>
-            <a:endParaRPr lang="en-US" sz="1380" dirty="0"/>
+              <a:t>A guardrail is to define which risks can be accepted at the.</a:t>
+            </a:r>
+            <a:endParaRPr lang="en-US" sz="1220" dirty="0"/>
           </a:p>
         </p:txBody>
       </p:sp>
@@ -4305,17 +4341,17 @@
         </p:nvSpPr>
         <p:spPr>
           <a:xfrm>
-            <a:off x="7799832" y="5001768"/>
-            <a:ext cx="3145536" cy="502920"/>
-          </a:xfrm>
-          <a:prstGeom prst="rect">
-            <a:avLst/>
-          </a:prstGeom>
-          <a:noFill/>
-          <a:ln/>
-        </p:spPr>
-        <p:txBody>
-          <a:bodyPr wrap="square" lIns="0" tIns="0" rIns="0" bIns="0" rtlCol="0" anchor="t">
+            <a:off x="7799832" y="4974336"/>
+            <a:ext cx="3145536" cy="576072"/>
+          </a:xfrm>
+          <a:prstGeom prst="rect">
+            <a:avLst/>
+          </a:prstGeom>
+          <a:noFill/>
+          <a:ln/>
+        </p:spPr>
+        <p:txBody>
+          <a:bodyPr wrap="square" lIns="254" tIns="254" rIns="254" bIns="254" rtlCol="0" anchor="t">
             <a:normAutofit/>
           </a:bodyPr>
           <a:lstStyle/>
@@ -4324,7 +4360,7 @@
               <a:buNone/>
             </a:pPr>
             <a:r>
-              <a:rPr lang="en-US" sz="1550" dirty="0">
+              <a:rPr lang="en-US" sz="1320" dirty="0">
                 <a:solidFill>
                   <a:srgbClr val="17364A"/>
                 </a:solidFill>
@@ -4332,9 +4368,9 @@
                 <a:ea typeface="Aptos" pitchFamily="34" charset="-122"/>
                 <a:cs typeface="Aptos" pitchFamily="34" charset="-120"/>
               </a:rPr>
-              <a:t>Identify what could go wrong, who could be affected, what safeguards are needed, and what evidence should be reviewed before use expands.</a:t>
-            </a:r>
-            <a:endParaRPr lang="en-US" sz="1550" dirty="0"/>
+              <a:t>Identify what could go wrong, who could be affected, what safeguards are needed, and what evidence should be reviewed.</a:t>
+            </a:r>
+            <a:endParaRPr lang="en-US" sz="1320" dirty="0"/>
           </a:p>
         </p:txBody>
       </p:sp>
@@ -4635,49 +4671,58 @@
           <a:ln/>
         </p:spPr>
         <p:txBody>
-          <a:bodyPr wrap="square" lIns="635" tIns="635" rIns="635" bIns="635" rtlCol="0" anchor="t">
+          <a:bodyPr wrap="square" lIns="1016" tIns="1016" rIns="1016" bIns="1016" rtlCol="0" anchor="t">
             <a:normAutofit/>
           </a:bodyPr>
           <a:lstStyle/>
           <a:p>
+            <a:pPr indent="0" marL="0">
+              <a:buNone/>
+            </a:pPr>
             <a:r>
               <a:rPr lang="en-US" sz="2100" dirty="0">
                 <a:solidFill>
-                  <a:srgbClr val="17364A"/>
-                </a:solidFill>
-                <a:latin typeface="Aptos" pitchFamily="34" charset="0"/>
-                <a:ea typeface="Aptos" pitchFamily="34" charset="-122"/>
-                <a:cs typeface="Aptos" pitchFamily="34" charset="-120"/>
-              </a:rPr>
-              <a:t>For generative AI, decision rights should clarify who approves public release of AI-assisted content.</a:t>
+                  <a:srgbClr val="003A63"/>
+                </a:solidFill>
+                <a:latin typeface="Aptos" pitchFamily="34" charset="0"/>
+                <a:ea typeface="Aptos" pitchFamily="34" charset="-122"/>
+                <a:cs typeface="Aptos" pitchFamily="34" charset="-120"/>
+              </a:rPr>
+              <a:t>• For generative AI, decision rights should clarify who approves public release of AI-assisted.</a:t>
             </a:r>
             <a:endParaRPr lang="en-US" sz="2100" dirty="0"/>
           </a:p>
           <a:p>
+            <a:pPr indent="0" marL="0">
+              <a:buNone/>
+            </a:pPr>
             <a:r>
               <a:rPr lang="en-US" sz="2100" dirty="0">
                 <a:solidFill>
-                  <a:srgbClr val="17364A"/>
-                </a:solidFill>
-                <a:latin typeface="Aptos" pitchFamily="34" charset="0"/>
-                <a:ea typeface="Aptos" pitchFamily="34" charset="-122"/>
-                <a:cs typeface="Aptos" pitchFamily="34" charset="-120"/>
-              </a:rPr>
-              <a:t>For predictive analytics, leaders should decide whether the score may inform resource allocation or.</a:t>
+                  <a:srgbClr val="003A63"/>
+                </a:solidFill>
+                <a:latin typeface="Aptos" pitchFamily="34" charset="0"/>
+                <a:ea typeface="Aptos" pitchFamily="34" charset="-122"/>
+                <a:cs typeface="Aptos" pitchFamily="34" charset="-120"/>
+              </a:rPr>
+              <a:t>• For predictive analytics, leaders should decide whether the score may inform resource.</a:t>
             </a:r>
             <a:endParaRPr lang="en-US" sz="2100" dirty="0"/>
           </a:p>
           <a:p>
+            <a:pPr indent="0" marL="0">
+              <a:buNone/>
+            </a:pPr>
             <a:r>
               <a:rPr lang="en-US" sz="2100" dirty="0">
                 <a:solidFill>
-                  <a:srgbClr val="17364A"/>
-                </a:solidFill>
-                <a:latin typeface="Aptos" pitchFamily="34" charset="0"/>
-                <a:ea typeface="Aptos" pitchFamily="34" charset="-122"/>
-                <a:cs typeface="Aptos" pitchFamily="34" charset="-120"/>
-              </a:rPr>
-              <a:t>For agentic AI, decision rights should define who authorizes system actions, rollback procedures, and.</a:t>
+                  <a:srgbClr val="003A63"/>
+                </a:solidFill>
+                <a:latin typeface="Aptos" pitchFamily="34" charset="0"/>
+                <a:ea typeface="Aptos" pitchFamily="34" charset="-122"/>
+                <a:cs typeface="Aptos" pitchFamily="34" charset="-120"/>
+              </a:rPr>
+              <a:t>• For agentic AI, decision rights should define who authorizes system actions, rollback.</a:t>
             </a:r>
             <a:endParaRPr lang="en-US" sz="2100" dirty="0"/>
           </a:p>
@@ -4757,17 +4802,17 @@
         </p:nvSpPr>
         <p:spPr>
           <a:xfrm>
-            <a:off x="7799832" y="1828800"/>
-            <a:ext cx="3145536" cy="685800"/>
-          </a:xfrm>
-          <a:prstGeom prst="rect">
-            <a:avLst/>
-          </a:prstGeom>
-          <a:noFill/>
-          <a:ln/>
-        </p:spPr>
-        <p:txBody>
-          <a:bodyPr wrap="square" lIns="0" tIns="0" rIns="0" bIns="0" rtlCol="0" anchor="t">
+            <a:off x="7799832" y="1801368"/>
+            <a:ext cx="3145536" cy="758952"/>
+          </a:xfrm>
+          <a:prstGeom prst="rect">
+            <a:avLst/>
+          </a:prstGeom>
+          <a:noFill/>
+          <a:ln/>
+        </p:spPr>
+        <p:txBody>
+          <a:bodyPr wrap="square" lIns="254" tIns="254" rIns="254" bIns="254" rtlCol="0" anchor="t">
             <a:normAutofit/>
           </a:bodyPr>
           <a:lstStyle/>
@@ -4776,7 +4821,7 @@
               <a:buNone/>
             </a:pPr>
             <a:r>
-              <a:rPr lang="en-US" sz="1550" dirty="0">
+              <a:rPr lang="en-US" sz="1320" dirty="0">
                 <a:solidFill>
                   <a:srgbClr val="17364A"/>
                 </a:solidFill>
@@ -4786,7 +4831,7 @@
               </a:rPr>
               <a:t>For generative AI, decision rights should clarify who approves public release of AI-assisted content.</a:t>
             </a:r>
-            <a:endParaRPr lang="en-US" sz="1550" dirty="0"/>
+            <a:endParaRPr lang="en-US" sz="1320" dirty="0"/>
           </a:p>
         </p:txBody>
       </p:sp>
@@ -4874,13 +4919,16 @@
           <a:ln/>
         </p:spPr>
         <p:txBody>
-          <a:bodyPr wrap="square" lIns="254" tIns="254" rIns="254" bIns="254" rtlCol="0" anchor="t">
+          <a:bodyPr wrap="square" lIns="508" tIns="508" rIns="508" bIns="508" rtlCol="0" anchor="t">
             <a:normAutofit/>
           </a:bodyPr>
           <a:lstStyle/>
           <a:p>
-            <a:r>
-              <a:rPr lang="en-US" sz="1380" dirty="0">
+            <a:pPr indent="0" marL="0">
+              <a:buNone/>
+            </a:pPr>
+            <a:r>
+              <a:rPr lang="en-US" sz="1220" dirty="0">
                 <a:solidFill>
                   <a:srgbClr val="17364A"/>
                 </a:solidFill>
@@ -4888,13 +4936,16 @@
                 <a:ea typeface="Aptos" pitchFamily="34" charset="-122"/>
                 <a:cs typeface="Aptos" pitchFamily="34" charset="-120"/>
               </a:rPr>
-              <a:t>For predictive analytics, leaders should decide whether the score may inform resource.</a:t>
-            </a:r>
-            <a:endParaRPr lang="en-US" sz="1380" dirty="0"/>
-          </a:p>
-          <a:p>
-            <a:r>
-              <a:rPr lang="en-US" sz="1380" dirty="0">
+              <a:t>For predictive analytics, leaders should decide whether the score.</a:t>
+            </a:r>
+            <a:endParaRPr lang="en-US" sz="1220" dirty="0"/>
+          </a:p>
+          <a:p>
+            <a:pPr indent="0" marL="0">
+              <a:buNone/>
+            </a:pPr>
+            <a:r>
+              <a:rPr lang="en-US" sz="1220" dirty="0">
                 <a:solidFill>
                   <a:srgbClr val="17364A"/>
                 </a:solidFill>
@@ -4902,13 +4953,16 @@
                 <a:ea typeface="Aptos" pitchFamily="34" charset="-122"/>
                 <a:cs typeface="Aptos" pitchFamily="34" charset="-120"/>
               </a:rPr>
-              <a:t>For agentic AI, decision rights should define who authorizes system actions, rollback.</a:t>
-            </a:r>
-            <a:endParaRPr lang="en-US" sz="1380" dirty="0"/>
-          </a:p>
-          <a:p>
-            <a:r>
-              <a:rPr lang="en-US" sz="1380" dirty="0">
+              <a:t>For agentic AI, decision rights should define who authorizes.</a:t>
+            </a:r>
+            <a:endParaRPr lang="en-US" sz="1220" dirty="0"/>
+          </a:p>
+          <a:p>
+            <a:pPr indent="0" marL="0">
+              <a:buNone/>
+            </a:pPr>
+            <a:r>
+              <a:rPr lang="en-US" sz="1220" dirty="0">
                 <a:solidFill>
                   <a:srgbClr val="17364A"/>
                 </a:solidFill>
@@ -4916,9 +4970,9 @@
                 <a:ea typeface="Aptos" pitchFamily="34" charset="-122"/>
                 <a:cs typeface="Aptos" pitchFamily="34" charset="-120"/>
               </a:rPr>
-              <a:t>Accountability should remain tied to public health roles and legal authority.</a:t>
-            </a:r>
-            <a:endParaRPr lang="en-US" sz="1380" dirty="0"/>
+              <a:t>Accountability should remain tied to public health roles and legal.</a:t>
+            </a:r>
+            <a:endParaRPr lang="en-US" sz="1220" dirty="0"/>
           </a:p>
         </p:txBody>
       </p:sp>
@@ -4996,17 +5050,17 @@
         </p:nvSpPr>
         <p:spPr>
           <a:xfrm>
-            <a:off x="7799832" y="5001768"/>
-            <a:ext cx="3145536" cy="502920"/>
-          </a:xfrm>
-          <a:prstGeom prst="rect">
-            <a:avLst/>
-          </a:prstGeom>
-          <a:noFill/>
-          <a:ln/>
-        </p:spPr>
-        <p:txBody>
-          <a:bodyPr wrap="square" lIns="0" tIns="0" rIns="0" bIns="0" rtlCol="0" anchor="t">
+            <a:off x="7799832" y="4974336"/>
+            <a:ext cx="3145536" cy="576072"/>
+          </a:xfrm>
+          <a:prstGeom prst="rect">
+            <a:avLst/>
+          </a:prstGeom>
+          <a:noFill/>
+          <a:ln/>
+        </p:spPr>
+        <p:txBody>
+          <a:bodyPr wrap="square" lIns="254" tIns="254" rIns="254" bIns="254" rtlCol="0" anchor="t">
             <a:normAutofit/>
           </a:bodyPr>
           <a:lstStyle/>
@@ -5015,7 +5069,7 @@
               <a:buNone/>
             </a:pPr>
             <a:r>
-              <a:rPr lang="en-US" sz="1550" dirty="0">
+              <a:rPr lang="en-US" sz="1320" dirty="0">
                 <a:solidFill>
                   <a:srgbClr val="17364A"/>
                 </a:solidFill>
@@ -5023,9 +5077,9 @@
                 <a:ea typeface="Aptos" pitchFamily="34" charset="-122"/>
                 <a:cs typeface="Aptos" pitchFamily="34" charset="-120"/>
               </a:rPr>
-              <a:t>Use the concept to clarify workflow changes, dependencies, staffing, procurement requirements, training needs, and implementation checkpoints.</a:t>
-            </a:r>
-            <a:endParaRPr lang="en-US" sz="1550" dirty="0"/>
+              <a:t>Use the concept to clarify workflow changes, dependencies, staffing, procurement requirements, training needs, and.</a:t>
+            </a:r>
+            <a:endParaRPr lang="en-US" sz="1320" dirty="0"/>
           </a:p>
         </p:txBody>
       </p:sp>
@@ -5326,49 +5380,58 @@
           <a:ln/>
         </p:spPr>
         <p:txBody>
-          <a:bodyPr wrap="square" lIns="635" tIns="635" rIns="635" bIns="635" rtlCol="0" anchor="t">
+          <a:bodyPr wrap="square" lIns="1016" tIns="1016" rIns="1016" bIns="1016" rtlCol="0" anchor="t">
             <a:normAutofit/>
           </a:bodyPr>
           <a:lstStyle/>
           <a:p>
+            <a:pPr indent="0" marL="0">
+              <a:buNone/>
+            </a:pPr>
             <a:r>
               <a:rPr lang="en-US" sz="2100" dirty="0">
                 <a:solidFill>
-                  <a:srgbClr val="17364A"/>
-                </a:solidFill>
-                <a:latin typeface="Aptos" pitchFamily="34" charset="0"/>
-                <a:ea typeface="Aptos" pitchFamily="34" charset="-122"/>
-                <a:cs typeface="Aptos" pitchFamily="34" charset="-120"/>
-              </a:rPr>
-              <a:t>Which current or proposed AI use case in your agency raises this leadership or governance issue most.</a:t>
+                  <a:srgbClr val="003A63"/>
+                </a:solidFill>
+                <a:latin typeface="Aptos" pitchFamily="34" charset="0"/>
+                <a:ea typeface="Aptos" pitchFamily="34" charset="-122"/>
+                <a:cs typeface="Aptos" pitchFamily="34" charset="-120"/>
+              </a:rPr>
+              <a:t>• Which current or proposed AI use case in your agency raises this leadership or governance.</a:t>
             </a:r>
             <a:endParaRPr lang="en-US" sz="2100" dirty="0"/>
           </a:p>
           <a:p>
+            <a:pPr indent="0" marL="0">
+              <a:buNone/>
+            </a:pPr>
             <a:r>
               <a:rPr lang="en-US" sz="2100" dirty="0">
                 <a:solidFill>
-                  <a:srgbClr val="17364A"/>
-                </a:solidFill>
-                <a:latin typeface="Aptos" pitchFamily="34" charset="0"/>
-                <a:ea typeface="Aptos" pitchFamily="34" charset="-122"/>
-                <a:cs typeface="Aptos" pitchFamily="34" charset="-120"/>
-              </a:rPr>
-              <a:t>Who currently has authority to make decisions about this issue, and is that authority documented?</a:t>
+                  <a:srgbClr val="003A63"/>
+                </a:solidFill>
+                <a:latin typeface="Aptos" pitchFamily="34" charset="0"/>
+                <a:ea typeface="Aptos" pitchFamily="34" charset="-122"/>
+                <a:cs typeface="Aptos" pitchFamily="34" charset="-120"/>
+              </a:rPr>
+              <a:t>• Who currently has authority to make decisions about this issue, and is that authority.</a:t>
             </a:r>
             <a:endParaRPr lang="en-US" sz="2100" dirty="0"/>
           </a:p>
           <a:p>
+            <a:pPr indent="0" marL="0">
+              <a:buNone/>
+            </a:pPr>
             <a:r>
               <a:rPr lang="en-US" sz="2100" dirty="0">
                 <a:solidFill>
-                  <a:srgbClr val="17364A"/>
-                </a:solidFill>
-                <a:latin typeface="Aptos" pitchFamily="34" charset="0"/>
-                <a:ea typeface="Aptos" pitchFamily="34" charset="-122"/>
-                <a:cs typeface="Aptos" pitchFamily="34" charset="-120"/>
-              </a:rPr>
-              <a:t>What evidence would governance or leadership need before approving the use case?</a:t>
+                  <a:srgbClr val="003A63"/>
+                </a:solidFill>
+                <a:latin typeface="Aptos" pitchFamily="34" charset="0"/>
+                <a:ea typeface="Aptos" pitchFamily="34" charset="-122"/>
+                <a:cs typeface="Aptos" pitchFamily="34" charset="-120"/>
+              </a:rPr>
+              <a:t>• What evidence would governance or leadership need before approving the use case?</a:t>
             </a:r>
             <a:endParaRPr lang="en-US" sz="2100" dirty="0"/>
           </a:p>
@@ -5448,17 +5511,17 @@
         </p:nvSpPr>
         <p:spPr>
           <a:xfrm>
-            <a:off x="7799832" y="1828800"/>
-            <a:ext cx="3145536" cy="685800"/>
-          </a:xfrm>
-          <a:prstGeom prst="rect">
-            <a:avLst/>
-          </a:prstGeom>
-          <a:noFill/>
-          <a:ln/>
-        </p:spPr>
-        <p:txBody>
-          <a:bodyPr wrap="square" lIns="0" tIns="0" rIns="0" bIns="0" rtlCol="0" anchor="t">
+            <a:off x="7799832" y="1801368"/>
+            <a:ext cx="3145536" cy="758952"/>
+          </a:xfrm>
+          <a:prstGeom prst="rect">
+            <a:avLst/>
+          </a:prstGeom>
+          <a:noFill/>
+          <a:ln/>
+        </p:spPr>
+        <p:txBody>
+          <a:bodyPr wrap="square" lIns="254" tIns="254" rIns="254" bIns="254" rtlCol="0" anchor="t">
             <a:normAutofit/>
           </a:bodyPr>
           <a:lstStyle/>
@@ -5467,7 +5530,7 @@
               <a:buNone/>
             </a:pPr>
             <a:r>
-              <a:rPr lang="en-US" sz="1550" dirty="0">
+              <a:rPr lang="en-US" sz="1320" dirty="0">
                 <a:solidFill>
                   <a:srgbClr val="17364A"/>
                 </a:solidFill>
@@ -5477,7 +5540,7 @@
               </a:rPr>
               <a:t>Which current or proposed AI use case in your agency raises this leadership or governance issue most.</a:t>
             </a:r>
-            <a:endParaRPr lang="en-US" sz="1550" dirty="0"/>
+            <a:endParaRPr lang="en-US" sz="1320" dirty="0"/>
           </a:p>
         </p:txBody>
       </p:sp>
@@ -5565,13 +5628,16 @@
           <a:ln/>
         </p:spPr>
         <p:txBody>
-          <a:bodyPr wrap="square" lIns="254" tIns="254" rIns="254" bIns="254" rtlCol="0" anchor="t">
+          <a:bodyPr wrap="square" lIns="508" tIns="508" rIns="508" bIns="508" rtlCol="0" anchor="t">
             <a:normAutofit/>
           </a:bodyPr>
           <a:lstStyle/>
           <a:p>
-            <a:r>
-              <a:rPr lang="en-US" sz="1380" dirty="0">
+            <a:pPr indent="0" marL="0">
+              <a:buNone/>
+            </a:pPr>
+            <a:r>
+              <a:rPr lang="en-US" sz="1220" dirty="0">
                 <a:solidFill>
                   <a:srgbClr val="17364A"/>
                 </a:solidFill>
@@ -5579,13 +5645,16 @@
                 <a:ea typeface="Aptos" pitchFamily="34" charset="-122"/>
                 <a:cs typeface="Aptos" pitchFamily="34" charset="-120"/>
               </a:rPr>
-              <a:t>Which current or proposed AI use case in your agency raises this leadership or governance.</a:t>
-            </a:r>
-            <a:endParaRPr lang="en-US" sz="1380" dirty="0"/>
-          </a:p>
-          <a:p>
-            <a:r>
-              <a:rPr lang="en-US" sz="1380" dirty="0">
+              <a:t>Which current or proposed AI use case in your agency raises this.</a:t>
+            </a:r>
+            <a:endParaRPr lang="en-US" sz="1220" dirty="0"/>
+          </a:p>
+          <a:p>
+            <a:pPr indent="0" marL="0">
+              <a:buNone/>
+            </a:pPr>
+            <a:r>
+              <a:rPr lang="en-US" sz="1220" dirty="0">
                 <a:solidFill>
                   <a:srgbClr val="17364A"/>
                 </a:solidFill>
@@ -5593,13 +5662,16 @@
                 <a:ea typeface="Aptos" pitchFamily="34" charset="-122"/>
                 <a:cs typeface="Aptos" pitchFamily="34" charset="-120"/>
               </a:rPr>
-              <a:t>Who currently has authority to make decisions about this issue, and is that authority.</a:t>
-            </a:r>
-            <a:endParaRPr lang="en-US" sz="1380" dirty="0"/>
-          </a:p>
-          <a:p>
-            <a:r>
-              <a:rPr lang="en-US" sz="1380" dirty="0">
+              <a:t>Who currently has authority to make decisions about this issue,.</a:t>
+            </a:r>
+            <a:endParaRPr lang="en-US" sz="1220" dirty="0"/>
+          </a:p>
+          <a:p>
+            <a:pPr indent="0" marL="0">
+              <a:buNone/>
+            </a:pPr>
+            <a:r>
+              <a:rPr lang="en-US" sz="1220" dirty="0">
                 <a:solidFill>
                   <a:srgbClr val="17364A"/>
                 </a:solidFill>
@@ -5607,9 +5679,9 @@
                 <a:ea typeface="Aptos" pitchFamily="34" charset="-122"/>
                 <a:cs typeface="Aptos" pitchFamily="34" charset="-120"/>
               </a:rPr>
-              <a:t>What evidence would governance or leadership need before approving the use case?</a:t>
-            </a:r>
-            <a:endParaRPr lang="en-US" sz="1380" dirty="0"/>
+              <a:t>What evidence would governance or leadership need before approving.</a:t>
+            </a:r>
+            <a:endParaRPr lang="en-US" sz="1220" dirty="0"/>
           </a:p>
         </p:txBody>
       </p:sp>
@@ -5687,17 +5759,17 @@
         </p:nvSpPr>
         <p:spPr>
           <a:xfrm>
-            <a:off x="7799832" y="5001768"/>
-            <a:ext cx="3145536" cy="502920"/>
-          </a:xfrm>
-          <a:prstGeom prst="rect">
-            <a:avLst/>
-          </a:prstGeom>
-          <a:noFill/>
-          <a:ln/>
-        </p:spPr>
-        <p:txBody>
-          <a:bodyPr wrap="square" lIns="0" tIns="0" rIns="0" bIns="0" rtlCol="0" anchor="t">
+            <a:off x="7799832" y="4974336"/>
+            <a:ext cx="3145536" cy="576072"/>
+          </a:xfrm>
+          <a:prstGeom prst="rect">
+            <a:avLst/>
+          </a:prstGeom>
+          <a:noFill/>
+          <a:ln/>
+        </p:spPr>
+        <p:txBody>
+          <a:bodyPr wrap="square" lIns="254" tIns="254" rIns="254" bIns="254" rtlCol="0" anchor="t">
             <a:normAutofit/>
           </a:bodyPr>
           <a:lstStyle/>
@@ -5706,7 +5778,7 @@
               <a:buNone/>
             </a:pPr>
             <a:r>
-              <a:rPr lang="en-US" sz="1550" dirty="0">
+              <a:rPr lang="en-US" sz="1320" dirty="0">
                 <a:solidFill>
                   <a:srgbClr val="17364A"/>
                 </a:solidFill>
@@ -5714,9 +5786,9 @@
                 <a:ea typeface="Aptos" pitchFamily="34" charset="-122"/>
                 <a:cs typeface="Aptos" pitchFamily="34" charset="-120"/>
               </a:rPr>
-              <a:t>Connect the concept to public health purpose, responsible use, required safeguards, documentation, and the next action a department should take.</a:t>
-            </a:r>
-            <a:endParaRPr lang="en-US" sz="1550" dirty="0"/>
+              <a:t>Connect the concept to public health purpose, responsible use, required safeguards, documentation, and the next action a.</a:t>
+            </a:r>
+            <a:endParaRPr lang="en-US" sz="1320" dirty="0"/>
           </a:p>
         </p:txBody>
       </p:sp>
@@ -6017,35 +6089,41 @@
           <a:ln/>
         </p:spPr>
         <p:txBody>
-          <a:bodyPr wrap="square" lIns="635" tIns="635" rIns="635" bIns="635" rtlCol="0" anchor="t">
+          <a:bodyPr wrap="square" lIns="1016" tIns="1016" rIns="1016" bIns="1016" rtlCol="0" anchor="t">
             <a:normAutofit/>
           </a:bodyPr>
           <a:lstStyle/>
           <a:p>
+            <a:pPr indent="0" marL="0">
+              <a:buNone/>
+            </a:pPr>
             <a:r>
               <a:rPr lang="en-US" sz="2100" dirty="0">
                 <a:solidFill>
-                  <a:srgbClr val="17364A"/>
-                </a:solidFill>
-                <a:latin typeface="Aptos" pitchFamily="34" charset="0"/>
-                <a:ea typeface="Aptos" pitchFamily="34" charset="-122"/>
-                <a:cs typeface="Aptos" pitchFamily="34" charset="-120"/>
-              </a:rPr>
-              <a:t>Which staff, partners, or communities would be affected if this issue were handled poorly?</a:t>
+                  <a:srgbClr val="003A63"/>
+                </a:solidFill>
+                <a:latin typeface="Aptos" pitchFamily="34" charset="0"/>
+                <a:ea typeface="Aptos" pitchFamily="34" charset="-122"/>
+                <a:cs typeface="Aptos" pitchFamily="34" charset="-120"/>
+              </a:rPr>
+              <a:t>• Which staff, partners, or communities would be affected if this issue were handled poorly?</a:t>
             </a:r>
             <a:endParaRPr lang="en-US" sz="2100" dirty="0"/>
           </a:p>
           <a:p>
+            <a:pPr indent="0" marL="0">
+              <a:buNone/>
+            </a:pPr>
             <a:r>
               <a:rPr lang="en-US" sz="2100" dirty="0">
                 <a:solidFill>
-                  <a:srgbClr val="17364A"/>
-                </a:solidFill>
-                <a:latin typeface="Aptos" pitchFamily="34" charset="0"/>
-                <a:ea typeface="Aptos" pitchFamily="34" charset="-122"/>
-                <a:cs typeface="Aptos" pitchFamily="34" charset="-120"/>
-              </a:rPr>
-              <a:t>What policy, process, or artifact should be created or updated after this module?</a:t>
+                  <a:srgbClr val="003A63"/>
+                </a:solidFill>
+                <a:latin typeface="Aptos" pitchFamily="34" charset="0"/>
+                <a:ea typeface="Aptos" pitchFamily="34" charset="-122"/>
+                <a:cs typeface="Aptos" pitchFamily="34" charset="-120"/>
+              </a:rPr>
+              <a:t>• What policy, process, or artifact should be created or updated after this module?</a:t>
             </a:r>
             <a:endParaRPr lang="en-US" sz="2100" dirty="0"/>
           </a:p>
@@ -6125,17 +6203,17 @@
         </p:nvSpPr>
         <p:spPr>
           <a:xfrm>
-            <a:off x="7799832" y="1828800"/>
-            <a:ext cx="3145536" cy="685800"/>
-          </a:xfrm>
-          <a:prstGeom prst="rect">
-            <a:avLst/>
-          </a:prstGeom>
-          <a:noFill/>
-          <a:ln/>
-        </p:spPr>
-        <p:txBody>
-          <a:bodyPr wrap="square" lIns="0" tIns="0" rIns="0" bIns="0" rtlCol="0" anchor="t">
+            <a:off x="7799832" y="1801368"/>
+            <a:ext cx="3145536" cy="758952"/>
+          </a:xfrm>
+          <a:prstGeom prst="rect">
+            <a:avLst/>
+          </a:prstGeom>
+          <a:noFill/>
+          <a:ln/>
+        </p:spPr>
+        <p:txBody>
+          <a:bodyPr wrap="square" lIns="254" tIns="254" rIns="254" bIns="254" rtlCol="0" anchor="t">
             <a:normAutofit/>
           </a:bodyPr>
           <a:lstStyle/>
@@ -6144,7 +6222,7 @@
               <a:buNone/>
             </a:pPr>
             <a:r>
-              <a:rPr lang="en-US" sz="1550" dirty="0">
+              <a:rPr lang="en-US" sz="1320" dirty="0">
                 <a:solidFill>
                   <a:srgbClr val="17364A"/>
                 </a:solidFill>
@@ -6154,7 +6232,7 @@
               </a:rPr>
               <a:t>Which staff, partners, or communities would be affected if this issue were handled poorly?</a:t>
             </a:r>
-            <a:endParaRPr lang="en-US" sz="1550" dirty="0"/>
+            <a:endParaRPr lang="en-US" sz="1320" dirty="0"/>
           </a:p>
         </p:txBody>
       </p:sp>
@@ -6242,13 +6320,16 @@
           <a:ln/>
         </p:spPr>
         <p:txBody>
-          <a:bodyPr wrap="square" lIns="254" tIns="254" rIns="254" bIns="254" rtlCol="0" anchor="t">
+          <a:bodyPr wrap="square" lIns="508" tIns="508" rIns="508" bIns="508" rtlCol="0" anchor="t">
             <a:normAutofit/>
           </a:bodyPr>
           <a:lstStyle/>
           <a:p>
-            <a:r>
-              <a:rPr lang="en-US" sz="1380" dirty="0">
+            <a:pPr indent="0" marL="0">
+              <a:buNone/>
+            </a:pPr>
+            <a:r>
+              <a:rPr lang="en-US" sz="1220" dirty="0">
                 <a:solidFill>
                   <a:srgbClr val="17364A"/>
                 </a:solidFill>
@@ -6256,13 +6337,16 @@
                 <a:ea typeface="Aptos" pitchFamily="34" charset="-122"/>
                 <a:cs typeface="Aptos" pitchFamily="34" charset="-120"/>
               </a:rPr>
-              <a:t>Which staff, partners, or communities would be affected if this issue were handled poorly?</a:t>
-            </a:r>
-            <a:endParaRPr lang="en-US" sz="1380" dirty="0"/>
-          </a:p>
-          <a:p>
-            <a:r>
-              <a:rPr lang="en-US" sz="1380" dirty="0">
+              <a:t>Which staff, partners, or communities would be affected if this.</a:t>
+            </a:r>
+            <a:endParaRPr lang="en-US" sz="1220" dirty="0"/>
+          </a:p>
+          <a:p>
+            <a:pPr indent="0" marL="0">
+              <a:buNone/>
+            </a:pPr>
+            <a:r>
+              <a:rPr lang="en-US" sz="1220" dirty="0">
                 <a:solidFill>
                   <a:srgbClr val="17364A"/>
                 </a:solidFill>
@@ -6270,9 +6354,9 @@
                 <a:ea typeface="Aptos" pitchFamily="34" charset="-122"/>
                 <a:cs typeface="Aptos" pitchFamily="34" charset="-120"/>
               </a:rPr>
-              <a:t>What policy, process, or artifact should be created or updated after this module?</a:t>
-            </a:r>
-            <a:endParaRPr lang="en-US" sz="1380" dirty="0"/>
+              <a:t>What policy, process, or artifact should be created or updated.</a:t>
+            </a:r>
+            <a:endParaRPr lang="en-US" sz="1220" dirty="0"/>
           </a:p>
         </p:txBody>
       </p:sp>
@@ -6350,17 +6434,17 @@
         </p:nvSpPr>
         <p:spPr>
           <a:xfrm>
-            <a:off x="7799832" y="5001768"/>
-            <a:ext cx="3145536" cy="502920"/>
-          </a:xfrm>
-          <a:prstGeom prst="rect">
-            <a:avLst/>
-          </a:prstGeom>
-          <a:noFill/>
-          <a:ln/>
-        </p:spPr>
-        <p:txBody>
-          <a:bodyPr wrap="square" lIns="0" tIns="0" rIns="0" bIns="0" rtlCol="0" anchor="t">
+            <a:off x="7799832" y="4974336"/>
+            <a:ext cx="3145536" cy="576072"/>
+          </a:xfrm>
+          <a:prstGeom prst="rect">
+            <a:avLst/>
+          </a:prstGeom>
+          <a:noFill/>
+          <a:ln/>
+        </p:spPr>
+        <p:txBody>
+          <a:bodyPr wrap="square" lIns="254" tIns="254" rIns="254" bIns="254" rtlCol="0" anchor="t">
             <a:normAutofit/>
           </a:bodyPr>
           <a:lstStyle/>
@@ -6369,7 +6453,7 @@
               <a:buNone/>
             </a:pPr>
             <a:r>
-              <a:rPr lang="en-US" sz="1550" dirty="0">
+              <a:rPr lang="en-US" sz="1320" dirty="0">
                 <a:solidFill>
                   <a:srgbClr val="17364A"/>
                 </a:solidFill>
@@ -6377,9 +6461,9 @@
                 <a:ea typeface="Aptos" pitchFamily="34" charset="-122"/>
                 <a:cs typeface="Aptos" pitchFamily="34" charset="-120"/>
               </a:rPr>
-              <a:t>Connect the concept to public health purpose, responsible use, required safeguards, documentation, and the next action a department should take.</a:t>
-            </a:r>
-            <a:endParaRPr lang="en-US" sz="1550" dirty="0"/>
+              <a:t>Connect the concept to public health purpose, responsible use, required safeguards, documentation, and the next action a.</a:t>
+            </a:r>
+            <a:endParaRPr lang="en-US" sz="1320" dirty="0"/>
           </a:p>
         </p:txBody>
       </p:sp>
@@ -6680,35 +6764,41 @@
           <a:ln/>
         </p:spPr>
         <p:txBody>
-          <a:bodyPr wrap="square" lIns="635" tIns="635" rIns="635" bIns="635" rtlCol="0" anchor="t">
+          <a:bodyPr wrap="square" lIns="1016" tIns="1016" rIns="1016" bIns="1016" rtlCol="0" anchor="t">
             <a:normAutofit/>
           </a:bodyPr>
           <a:lstStyle/>
           <a:p>
+            <a:pPr indent="0" marL="0">
+              <a:buNone/>
+            </a:pPr>
             <a:r>
               <a:rPr lang="en-US" sz="2100" dirty="0">
                 <a:solidFill>
-                  <a:srgbClr val="17364A"/>
-                </a:solidFill>
-                <a:latin typeface="Aptos" pitchFamily="34" charset="0"/>
-                <a:ea typeface="Aptos" pitchFamily="34" charset="-122"/>
-                <a:cs typeface="Aptos" pitchFamily="34" charset="-120"/>
-              </a:rPr>
-              <a:t>Create a decision-rights matrix for one AI use case.</a:t>
+                  <a:srgbClr val="003A63"/>
+                </a:solidFill>
+                <a:latin typeface="Aptos" pitchFamily="34" charset="0"/>
+                <a:ea typeface="Aptos" pitchFamily="34" charset="-122"/>
+                <a:cs typeface="Aptos" pitchFamily="34" charset="-120"/>
+              </a:rPr>
+              <a:t>• Create a decision-rights matrix for one AI use case.</a:t>
             </a:r>
             <a:endParaRPr lang="en-US" sz="2100" dirty="0"/>
           </a:p>
           <a:p>
+            <a:pPr indent="0" marL="0">
+              <a:buNone/>
+            </a:pPr>
             <a:r>
               <a:rPr lang="en-US" sz="2100" dirty="0">
                 <a:solidFill>
-                  <a:srgbClr val="17364A"/>
-                </a:solidFill>
-                <a:latin typeface="Aptos" pitchFamily="34" charset="0"/>
-                <a:ea typeface="Aptos" pitchFamily="34" charset="-122"/>
-                <a:cs typeface="Aptos" pitchFamily="34" charset="-120"/>
-              </a:rPr>
-              <a:t>Include approval, data access, validation, launch, monitoring, incident escalation, risk acceptance,.</a:t>
+                  <a:srgbClr val="003A63"/>
+                </a:solidFill>
+                <a:latin typeface="Aptos" pitchFamily="34" charset="0"/>
+                <a:ea typeface="Aptos" pitchFamily="34" charset="-122"/>
+                <a:cs typeface="Aptos" pitchFamily="34" charset="-120"/>
+              </a:rPr>
+              <a:t>• Include approval, data access, validation, launch, monitoring, incident escalation, risk.</a:t>
             </a:r>
             <a:endParaRPr lang="en-US" sz="2100" dirty="0"/>
           </a:p>
@@ -6788,17 +6878,17 @@
         </p:nvSpPr>
         <p:spPr>
           <a:xfrm>
-            <a:off x="7799832" y="1828800"/>
-            <a:ext cx="3145536" cy="685800"/>
-          </a:xfrm>
-          <a:prstGeom prst="rect">
-            <a:avLst/>
-          </a:prstGeom>
-          <a:noFill/>
-          <a:ln/>
-        </p:spPr>
-        <p:txBody>
-          <a:bodyPr wrap="square" lIns="0" tIns="0" rIns="0" bIns="0" rtlCol="0" anchor="t">
+            <a:off x="7799832" y="1801368"/>
+            <a:ext cx="3145536" cy="758952"/>
+          </a:xfrm>
+          <a:prstGeom prst="rect">
+            <a:avLst/>
+          </a:prstGeom>
+          <a:noFill/>
+          <a:ln/>
+        </p:spPr>
+        <p:txBody>
+          <a:bodyPr wrap="square" lIns="254" tIns="254" rIns="254" bIns="254" rtlCol="0" anchor="t">
             <a:normAutofit/>
           </a:bodyPr>
           <a:lstStyle/>
@@ -6807,7 +6897,7 @@
               <a:buNone/>
             </a:pPr>
             <a:r>
-              <a:rPr lang="en-US" sz="1550" dirty="0">
+              <a:rPr lang="en-US" sz="1320" dirty="0">
                 <a:solidFill>
                   <a:srgbClr val="17364A"/>
                 </a:solidFill>
@@ -6817,7 +6907,7 @@
               </a:rPr>
               <a:t>Create a decision-rights matrix for one AI use case.</a:t>
             </a:r>
-            <a:endParaRPr lang="en-US" sz="1550" dirty="0"/>
+            <a:endParaRPr lang="en-US" sz="1320" dirty="0"/>
           </a:p>
         </p:txBody>
       </p:sp>
@@ -6905,13 +6995,16 @@
           <a:ln/>
         </p:spPr>
         <p:txBody>
-          <a:bodyPr wrap="square" lIns="254" tIns="254" rIns="254" bIns="254" rtlCol="0" anchor="t">
+          <a:bodyPr wrap="square" lIns="508" tIns="508" rIns="508" bIns="508" rtlCol="0" anchor="t">
             <a:normAutofit/>
           </a:bodyPr>
           <a:lstStyle/>
           <a:p>
-            <a:r>
-              <a:rPr lang="en-US" sz="1380" dirty="0">
+            <a:pPr indent="0" marL="0">
+              <a:buNone/>
+            </a:pPr>
+            <a:r>
+              <a:rPr lang="en-US" sz="1220" dirty="0">
                 <a:solidFill>
                   <a:srgbClr val="17364A"/>
                 </a:solidFill>
@@ -6921,11 +7014,14 @@
               </a:rPr>
               <a:t>Create a decision-rights matrix for one AI use case.</a:t>
             </a:r>
-            <a:endParaRPr lang="en-US" sz="1380" dirty="0"/>
-          </a:p>
-          <a:p>
-            <a:r>
-              <a:rPr lang="en-US" sz="1380" dirty="0">
+            <a:endParaRPr lang="en-US" sz="1220" dirty="0"/>
+          </a:p>
+          <a:p>
+            <a:pPr indent="0" marL="0">
+              <a:buNone/>
+            </a:pPr>
+            <a:r>
+              <a:rPr lang="en-US" sz="1220" dirty="0">
                 <a:solidFill>
                   <a:srgbClr val="17364A"/>
                 </a:solidFill>
@@ -6933,9 +7029,9 @@
                 <a:ea typeface="Aptos" pitchFamily="34" charset="-122"/>
                 <a:cs typeface="Aptos" pitchFamily="34" charset="-120"/>
               </a:rPr>
-              <a:t>Include approval, data access, validation, launch, monitoring, incident escalation, risk.</a:t>
-            </a:r>
-            <a:endParaRPr lang="en-US" sz="1380" dirty="0"/>
+              <a:t>Include approval, data access, validation, launch, monitoring,.</a:t>
+            </a:r>
+            <a:endParaRPr lang="en-US" sz="1220" dirty="0"/>
           </a:p>
         </p:txBody>
       </p:sp>
@@ -7013,17 +7109,17 @@
         </p:nvSpPr>
         <p:spPr>
           <a:xfrm>
-            <a:off x="7799832" y="5001768"/>
-            <a:ext cx="3145536" cy="502920"/>
-          </a:xfrm>
-          <a:prstGeom prst="rect">
-            <a:avLst/>
-          </a:prstGeom>
-          <a:noFill/>
-          <a:ln/>
-        </p:spPr>
-        <p:txBody>
-          <a:bodyPr wrap="square" lIns="0" tIns="0" rIns="0" bIns="0" rtlCol="0" anchor="t">
+            <a:off x="7799832" y="4974336"/>
+            <a:ext cx="3145536" cy="576072"/>
+          </a:xfrm>
+          <a:prstGeom prst="rect">
+            <a:avLst/>
+          </a:prstGeom>
+          <a:noFill/>
+          <a:ln/>
+        </p:spPr>
+        <p:txBody>
+          <a:bodyPr wrap="square" lIns="254" tIns="254" rIns="254" bIns="254" rtlCol="0" anchor="t">
             <a:normAutofit/>
           </a:bodyPr>
           <a:lstStyle/>
@@ -7032,7 +7128,7 @@
               <a:buNone/>
             </a:pPr>
             <a:r>
-              <a:rPr lang="en-US" sz="1550" dirty="0">
+              <a:rPr lang="en-US" sz="1320" dirty="0">
                 <a:solidFill>
                   <a:srgbClr val="17364A"/>
                 </a:solidFill>
@@ -7040,9 +7136,9 @@
                 <a:ea typeface="Aptos" pitchFamily="34" charset="-122"/>
                 <a:cs typeface="Aptos" pitchFamily="34" charset="-120"/>
               </a:rPr>
-              <a:t>Use the assignment to test whether you can explain the concept, apply it to a realistic public health situation, and identify what would need review before the work moves forward.</a:t>
-            </a:r>
-            <a:endParaRPr lang="en-US" sz="1550" dirty="0"/>
+              <a:t>Use the assignment to test whether you can explain the concept, apply it to a realistic public health situation, and.</a:t>
+            </a:r>
+            <a:endParaRPr lang="en-US" sz="1320" dirty="0"/>
           </a:p>
         </p:txBody>
       </p:sp>
@@ -7343,49 +7439,58 @@
           <a:ln/>
         </p:spPr>
         <p:txBody>
-          <a:bodyPr wrap="square" lIns="635" tIns="635" rIns="635" bIns="635" rtlCol="0" anchor="t">
+          <a:bodyPr wrap="square" lIns="1016" tIns="1016" rIns="1016" bIns="1016" rtlCol="0" anchor="t">
             <a:normAutofit/>
           </a:bodyPr>
           <a:lstStyle/>
           <a:p>
+            <a:pPr indent="0" marL="0">
+              <a:buNone/>
+            </a:pPr>
             <a:r>
               <a:rPr lang="en-US" sz="2100" dirty="0">
                 <a:solidFill>
-                  <a:srgbClr val="17364A"/>
-                </a:solidFill>
-                <a:latin typeface="Aptos" pitchFamily="34" charset="0"/>
-                <a:ea typeface="Aptos" pitchFamily="34" charset="-122"/>
-                <a:cs typeface="Aptos" pitchFamily="34" charset="-120"/>
-              </a:rPr>
-              <a:t>Choose a real or realistic public health AI use case.</a:t>
+                  <a:srgbClr val="003A63"/>
+                </a:solidFill>
+                <a:latin typeface="Aptos" pitchFamily="34" charset="0"/>
+                <a:ea typeface="Aptos" pitchFamily="34" charset="-122"/>
+                <a:cs typeface="Aptos" pitchFamily="34" charset="-120"/>
+              </a:rPr>
+              <a:t>• Choose a real or realistic public health AI use case.</a:t>
             </a:r>
             <a:endParaRPr lang="en-US" sz="2100" dirty="0"/>
           </a:p>
           <a:p>
+            <a:pPr indent="0" marL="0">
+              <a:buNone/>
+            </a:pPr>
             <a:r>
               <a:rPr lang="en-US" sz="2100" dirty="0">
                 <a:solidFill>
-                  <a:srgbClr val="17364A"/>
-                </a:solidFill>
-                <a:latin typeface="Aptos" pitchFamily="34" charset="0"/>
-                <a:ea typeface="Aptos" pitchFamily="34" charset="-122"/>
-                <a:cs typeface="Aptos" pitchFamily="34" charset="-120"/>
-              </a:rPr>
-              <a:t>Document assumptions, unresolved questions, and which agency roles would need to review the artifact.</a:t>
+                  <a:srgbClr val="003A63"/>
+                </a:solidFill>
+                <a:latin typeface="Aptos" pitchFamily="34" charset="0"/>
+                <a:ea typeface="Aptos" pitchFamily="34" charset="-122"/>
+                <a:cs typeface="Aptos" pitchFamily="34" charset="-120"/>
+              </a:rPr>
+              <a:t>• Document assumptions, unresolved questions, and which agency roles would need to review the.</a:t>
             </a:r>
             <a:endParaRPr lang="en-US" sz="2100" dirty="0"/>
           </a:p>
           <a:p>
+            <a:pPr indent="0" marL="0">
+              <a:buNone/>
+            </a:pPr>
             <a:r>
               <a:rPr lang="en-US" sz="2100" dirty="0">
                 <a:solidFill>
-                  <a:srgbClr val="17364A"/>
-                </a:solidFill>
-                <a:latin typeface="Aptos" pitchFamily="34" charset="0"/>
-                <a:ea typeface="Aptos" pitchFamily="34" charset="-122"/>
-                <a:cs typeface="Aptos" pitchFamily="34" charset="-120"/>
-              </a:rPr>
-              <a:t>The exercise should produce a work product that could support governance review, leadership discussion,.</a:t>
+                  <a:srgbClr val="003A63"/>
+                </a:solidFill>
+                <a:latin typeface="Aptos" pitchFamily="34" charset="0"/>
+                <a:ea typeface="Aptos" pitchFamily="34" charset="-122"/>
+                <a:cs typeface="Aptos" pitchFamily="34" charset="-120"/>
+              </a:rPr>
+              <a:t>• The exercise should produce a work product that could support governance review, leadership.</a:t>
             </a:r>
             <a:endParaRPr lang="en-US" sz="2100" dirty="0"/>
           </a:p>
@@ -7465,17 +7570,17 @@
         </p:nvSpPr>
         <p:spPr>
           <a:xfrm>
-            <a:off x="7799832" y="1828800"/>
-            <a:ext cx="3145536" cy="685800"/>
-          </a:xfrm>
-          <a:prstGeom prst="rect">
-            <a:avLst/>
-          </a:prstGeom>
-          <a:noFill/>
-          <a:ln/>
-        </p:spPr>
-        <p:txBody>
-          <a:bodyPr wrap="square" lIns="0" tIns="0" rIns="0" bIns="0" rtlCol="0" anchor="t">
+            <a:off x="7799832" y="1801368"/>
+            <a:ext cx="3145536" cy="758952"/>
+          </a:xfrm>
+          <a:prstGeom prst="rect">
+            <a:avLst/>
+          </a:prstGeom>
+          <a:noFill/>
+          <a:ln/>
+        </p:spPr>
+        <p:txBody>
+          <a:bodyPr wrap="square" lIns="254" tIns="254" rIns="254" bIns="254" rtlCol="0" anchor="t">
             <a:normAutofit/>
           </a:bodyPr>
           <a:lstStyle/>
@@ -7484,7 +7589,7 @@
               <a:buNone/>
             </a:pPr>
             <a:r>
-              <a:rPr lang="en-US" sz="1550" dirty="0">
+              <a:rPr lang="en-US" sz="1320" dirty="0">
                 <a:solidFill>
                   <a:srgbClr val="17364A"/>
                 </a:solidFill>
@@ -7494,7 +7599,7 @@
               </a:rPr>
               <a:t>Choose a real or realistic public health AI use case.</a:t>
             </a:r>
-            <a:endParaRPr lang="en-US" sz="1550" dirty="0"/>
+            <a:endParaRPr lang="en-US" sz="1320" dirty="0"/>
           </a:p>
         </p:txBody>
       </p:sp>
@@ -7582,13 +7687,16 @@
           <a:ln/>
         </p:spPr>
         <p:txBody>
-          <a:bodyPr wrap="square" lIns="254" tIns="254" rIns="254" bIns="254" rtlCol="0" anchor="t">
+          <a:bodyPr wrap="square" lIns="508" tIns="508" rIns="508" bIns="508" rtlCol="0" anchor="t">
             <a:normAutofit/>
           </a:bodyPr>
           <a:lstStyle/>
           <a:p>
-            <a:r>
-              <a:rPr lang="en-US" sz="1380" dirty="0">
+            <a:pPr indent="0" marL="0">
+              <a:buNone/>
+            </a:pPr>
+            <a:r>
+              <a:rPr lang="en-US" sz="1220" dirty="0">
                 <a:solidFill>
                   <a:srgbClr val="17364A"/>
                 </a:solidFill>
@@ -7596,13 +7704,16 @@
                 <a:ea typeface="Aptos" pitchFamily="34" charset="-122"/>
                 <a:cs typeface="Aptos" pitchFamily="34" charset="-120"/>
               </a:rPr>
-              <a:t>Document assumptions, unresolved questions, and which agency roles would need to review.</a:t>
-            </a:r>
-            <a:endParaRPr lang="en-US" sz="1380" dirty="0"/>
-          </a:p>
-          <a:p>
-            <a:r>
-              <a:rPr lang="en-US" sz="1380" dirty="0">
+              <a:t>Document assumptions, unresolved questions, and which agency roles.</a:t>
+            </a:r>
+            <a:endParaRPr lang="en-US" sz="1220" dirty="0"/>
+          </a:p>
+          <a:p>
+            <a:pPr indent="0" marL="0">
+              <a:buNone/>
+            </a:pPr>
+            <a:r>
+              <a:rPr lang="en-US" sz="1220" dirty="0">
                 <a:solidFill>
                   <a:srgbClr val="17364A"/>
                 </a:solidFill>
@@ -7610,9 +7721,9 @@
                 <a:ea typeface="Aptos" pitchFamily="34" charset="-122"/>
                 <a:cs typeface="Aptos" pitchFamily="34" charset="-120"/>
               </a:rPr>
-              <a:t>The exercise should produce a work product that could support governance review,.</a:t>
-            </a:r>
-            <a:endParaRPr lang="en-US" sz="1380" dirty="0"/>
+              <a:t>The exercise should produce a work product that could support.</a:t>
+            </a:r>
+            <a:endParaRPr lang="en-US" sz="1220" dirty="0"/>
           </a:p>
         </p:txBody>
       </p:sp>
@@ -7690,17 +7801,17 @@
         </p:nvSpPr>
         <p:spPr>
           <a:xfrm>
-            <a:off x="7799832" y="5001768"/>
-            <a:ext cx="3145536" cy="502920"/>
-          </a:xfrm>
-          <a:prstGeom prst="rect">
-            <a:avLst/>
-          </a:prstGeom>
-          <a:noFill/>
-          <a:ln/>
-        </p:spPr>
-        <p:txBody>
-          <a:bodyPr wrap="square" lIns="0" tIns="0" rIns="0" bIns="0" rtlCol="0" anchor="t">
+            <a:off x="7799832" y="4974336"/>
+            <a:ext cx="3145536" cy="576072"/>
+          </a:xfrm>
+          <a:prstGeom prst="rect">
+            <a:avLst/>
+          </a:prstGeom>
+          <a:noFill/>
+          <a:ln/>
+        </p:spPr>
+        <p:txBody>
+          <a:bodyPr wrap="square" lIns="254" tIns="254" rIns="254" bIns="254" rtlCol="0" anchor="t">
             <a:normAutofit/>
           </a:bodyPr>
           <a:lstStyle/>
@@ -7709,7 +7820,7 @@
               <a:buNone/>
             </a:pPr>
             <a:r>
-              <a:rPr lang="en-US" sz="1550" dirty="0">
+              <a:rPr lang="en-US" sz="1320" dirty="0">
                 <a:solidFill>
                   <a:srgbClr val="17364A"/>
                 </a:solidFill>
@@ -7717,9 +7828,9 @@
                 <a:ea typeface="Aptos" pitchFamily="34" charset="-122"/>
                 <a:cs typeface="Aptos" pitchFamily="34" charset="-120"/>
               </a:rPr>
-              <a:t>Connect the concept to public health purpose, responsible use, required safeguards, documentation, and the next action a department should take.</a:t>
-            </a:r>
-            <a:endParaRPr lang="en-US" sz="1550" dirty="0"/>
+              <a:t>Connect the concept to public health purpose, responsible use, required safeguards, documentation, and the next action a.</a:t>
+            </a:r>
+            <a:endParaRPr lang="en-US" sz="1320" dirty="0"/>
           </a:p>
         </p:txBody>
       </p:sp>
@@ -8020,21 +8131,24 @@
           <a:ln/>
         </p:spPr>
         <p:txBody>
-          <a:bodyPr wrap="square" lIns="635" tIns="635" rIns="635" bIns="635" rtlCol="0" anchor="t">
+          <a:bodyPr wrap="square" lIns="1016" tIns="1016" rIns="1016" bIns="1016" rtlCol="0" anchor="t">
             <a:normAutofit/>
           </a:bodyPr>
           <a:lstStyle/>
           <a:p>
+            <a:pPr indent="0" marL="0">
+              <a:buNone/>
+            </a:pPr>
             <a:r>
               <a:rPr lang="en-US" sz="2100" dirty="0">
                 <a:solidFill>
-                  <a:srgbClr val="17364A"/>
-                </a:solidFill>
-                <a:latin typeface="Aptos" pitchFamily="34" charset="0"/>
-                <a:ea typeface="Aptos" pitchFamily="34" charset="-122"/>
-                <a:cs typeface="Aptos" pitchFamily="34" charset="-120"/>
-              </a:rPr>
-              <a:t>Decision-rights matrix; RACI table; risk acceptance thresholds; escalation authority list.</a:t>
+                  <a:srgbClr val="003A63"/>
+                </a:solidFill>
+                <a:latin typeface="Aptos" pitchFamily="34" charset="0"/>
+                <a:ea typeface="Aptos" pitchFamily="34" charset="-122"/>
+                <a:cs typeface="Aptos" pitchFamily="34" charset="-120"/>
+              </a:rPr>
+              <a:t>• Decision-rights matrix; RACI table; risk acceptance thresholds; escalation authority list.</a:t>
             </a:r>
             <a:endParaRPr lang="en-US" sz="2100" dirty="0"/>
           </a:p>
@@ -8114,17 +8228,17 @@
         </p:nvSpPr>
         <p:spPr>
           <a:xfrm>
-            <a:off x="7799832" y="1828800"/>
-            <a:ext cx="3145536" cy="685800"/>
-          </a:xfrm>
-          <a:prstGeom prst="rect">
-            <a:avLst/>
-          </a:prstGeom>
-          <a:noFill/>
-          <a:ln/>
-        </p:spPr>
-        <p:txBody>
-          <a:bodyPr wrap="square" lIns="0" tIns="0" rIns="0" bIns="0" rtlCol="0" anchor="t">
+            <a:off x="7799832" y="1801368"/>
+            <a:ext cx="3145536" cy="758952"/>
+          </a:xfrm>
+          <a:prstGeom prst="rect">
+            <a:avLst/>
+          </a:prstGeom>
+          <a:noFill/>
+          <a:ln/>
+        </p:spPr>
+        <p:txBody>
+          <a:bodyPr wrap="square" lIns="254" tIns="254" rIns="254" bIns="254" rtlCol="0" anchor="t">
             <a:normAutofit/>
           </a:bodyPr>
           <a:lstStyle/>
@@ -8133,7 +8247,7 @@
               <a:buNone/>
             </a:pPr>
             <a:r>
-              <a:rPr lang="en-US" sz="1550" dirty="0">
+              <a:rPr lang="en-US" sz="1320" dirty="0">
                 <a:solidFill>
                   <a:srgbClr val="17364A"/>
                 </a:solidFill>
@@ -8143,7 +8257,7 @@
               </a:rPr>
               <a:t>Decision-rights matrix; RACI table; risk acceptance thresholds; escalation authority list.</a:t>
             </a:r>
-            <a:endParaRPr lang="en-US" sz="1550" dirty="0"/>
+            <a:endParaRPr lang="en-US" sz="1320" dirty="0"/>
           </a:p>
         </p:txBody>
       </p:sp>
@@ -8231,13 +8345,16 @@
           <a:ln/>
         </p:spPr>
         <p:txBody>
-          <a:bodyPr wrap="square" lIns="254" tIns="254" rIns="254" bIns="254" rtlCol="0" anchor="t">
+          <a:bodyPr wrap="square" lIns="508" tIns="508" rIns="508" bIns="508" rtlCol="0" anchor="t">
             <a:normAutofit/>
           </a:bodyPr>
           <a:lstStyle/>
           <a:p>
-            <a:r>
-              <a:rPr lang="en-US" sz="1380" dirty="0">
+            <a:pPr indent="0" marL="0">
+              <a:buNone/>
+            </a:pPr>
+            <a:r>
+              <a:rPr lang="en-US" sz="1220" dirty="0">
                 <a:solidFill>
                   <a:srgbClr val="17364A"/>
                 </a:solidFill>
@@ -8245,9 +8362,9 @@
                 <a:ea typeface="Aptos" pitchFamily="34" charset="-122"/>
                 <a:cs typeface="Aptos" pitchFamily="34" charset="-120"/>
               </a:rPr>
-              <a:t>Decision-rights matrix; RACI table; risk acceptance thresholds; escalation authority list.</a:t>
-            </a:r>
-            <a:endParaRPr lang="en-US" sz="1380" dirty="0"/>
+              <a:t>Decision-rights matrix; RACI table; risk acceptance thresholds;.</a:t>
+            </a:r>
+            <a:endParaRPr lang="en-US" sz="1220" dirty="0"/>
           </a:p>
         </p:txBody>
       </p:sp>
@@ -8325,17 +8442,17 @@
         </p:nvSpPr>
         <p:spPr>
           <a:xfrm>
-            <a:off x="7799832" y="5001768"/>
-            <a:ext cx="3145536" cy="502920"/>
-          </a:xfrm>
-          <a:prstGeom prst="rect">
-            <a:avLst/>
-          </a:prstGeom>
-          <a:noFill/>
-          <a:ln/>
-        </p:spPr>
-        <p:txBody>
-          <a:bodyPr wrap="square" lIns="0" tIns="0" rIns="0" bIns="0" rtlCol="0" anchor="t">
+            <a:off x="7799832" y="4974336"/>
+            <a:ext cx="3145536" cy="576072"/>
+          </a:xfrm>
+          <a:prstGeom prst="rect">
+            <a:avLst/>
+          </a:prstGeom>
+          <a:noFill/>
+          <a:ln/>
+        </p:spPr>
+        <p:txBody>
+          <a:bodyPr wrap="square" lIns="254" tIns="254" rIns="254" bIns="254" rtlCol="0" anchor="t">
             <a:normAutofit/>
           </a:bodyPr>
           <a:lstStyle/>
@@ -8344,7 +8461,7 @@
               <a:buNone/>
             </a:pPr>
             <a:r>
-              <a:rPr lang="en-US" sz="1550" dirty="0">
+              <a:rPr lang="en-US" sz="1320" dirty="0">
                 <a:solidFill>
                   <a:srgbClr val="17364A"/>
                 </a:solidFill>
@@ -8352,9 +8469,9 @@
                 <a:ea typeface="Aptos" pitchFamily="34" charset="-122"/>
                 <a:cs typeface="Aptos" pitchFamily="34" charset="-120"/>
               </a:rPr>
-              <a:t>Connect the concept to public health purpose, responsible use, required safeguards, documentation, and the next action a department should take.</a:t>
-            </a:r>
-            <a:endParaRPr lang="en-US" sz="1550" dirty="0"/>
+              <a:t>Connect the concept to public health purpose, responsible use, required safeguards, documentation, and the next action a.</a:t>
+            </a:r>
+            <a:endParaRPr lang="en-US" sz="1320" dirty="0"/>
           </a:p>
         </p:txBody>
       </p:sp>
@@ -8655,21 +8772,24 @@
           <a:ln/>
         </p:spPr>
         <p:txBody>
-          <a:bodyPr wrap="square" lIns="635" tIns="635" rIns="635" bIns="635" rtlCol="0" anchor="t">
+          <a:bodyPr wrap="square" lIns="1016" tIns="1016" rIns="1016" bIns="1016" rtlCol="0" anchor="t">
             <a:normAutofit/>
           </a:bodyPr>
           <a:lstStyle/>
           <a:p>
+            <a:pPr indent="0" marL="0">
+              <a:buNone/>
+            </a:pPr>
             <a:r>
               <a:rPr lang="en-US" sz="2100" dirty="0">
                 <a:solidFill>
-                  <a:srgbClr val="17364A"/>
-                </a:solidFill>
-                <a:latin typeface="Aptos" pitchFamily="34" charset="0"/>
-                <a:ea typeface="Aptos" pitchFamily="34" charset="-122"/>
-                <a:cs typeface="Aptos" pitchFamily="34" charset="-120"/>
-              </a:rPr>
-              <a:t>Decision-rights matrix; RACI table; risk acceptance thresholds; escalation authority list.</a:t>
+                  <a:srgbClr val="003A63"/>
+                </a:solidFill>
+                <a:latin typeface="Aptos" pitchFamily="34" charset="0"/>
+                <a:ea typeface="Aptos" pitchFamily="34" charset="-122"/>
+                <a:cs typeface="Aptos" pitchFamily="34" charset="-120"/>
+              </a:rPr>
+              <a:t>• Decision-rights matrix; RACI table; risk acceptance thresholds; escalation authority list.</a:t>
             </a:r>
             <a:endParaRPr lang="en-US" sz="2100" dirty="0"/>
           </a:p>
@@ -8749,17 +8869,17 @@
         </p:nvSpPr>
         <p:spPr>
           <a:xfrm>
-            <a:off x="7799832" y="1828800"/>
-            <a:ext cx="3145536" cy="685800"/>
-          </a:xfrm>
-          <a:prstGeom prst="rect">
-            <a:avLst/>
-          </a:prstGeom>
-          <a:noFill/>
-          <a:ln/>
-        </p:spPr>
-        <p:txBody>
-          <a:bodyPr wrap="square" lIns="0" tIns="0" rIns="0" bIns="0" rtlCol="0" anchor="t">
+            <a:off x="7799832" y="1801368"/>
+            <a:ext cx="3145536" cy="758952"/>
+          </a:xfrm>
+          <a:prstGeom prst="rect">
+            <a:avLst/>
+          </a:prstGeom>
+          <a:noFill/>
+          <a:ln/>
+        </p:spPr>
+        <p:txBody>
+          <a:bodyPr wrap="square" lIns="254" tIns="254" rIns="254" bIns="254" rtlCol="0" anchor="t">
             <a:normAutofit/>
           </a:bodyPr>
           <a:lstStyle/>
@@ -8768,7 +8888,7 @@
               <a:buNone/>
             </a:pPr>
             <a:r>
-              <a:rPr lang="en-US" sz="1550" dirty="0">
+              <a:rPr lang="en-US" sz="1320" dirty="0">
                 <a:solidFill>
                   <a:srgbClr val="17364A"/>
                 </a:solidFill>
@@ -8778,7 +8898,7 @@
               </a:rPr>
               <a:t>Decision-rights matrix; RACI table; risk acceptance thresholds; escalation authority list.</a:t>
             </a:r>
-            <a:endParaRPr lang="en-US" sz="1550" dirty="0"/>
+            <a:endParaRPr lang="en-US" sz="1320" dirty="0"/>
           </a:p>
         </p:txBody>
       </p:sp>
@@ -8866,13 +8986,16 @@
           <a:ln/>
         </p:spPr>
         <p:txBody>
-          <a:bodyPr wrap="square" lIns="254" tIns="254" rIns="254" bIns="254" rtlCol="0" anchor="t">
+          <a:bodyPr wrap="square" lIns="508" tIns="508" rIns="508" bIns="508" rtlCol="0" anchor="t">
             <a:normAutofit/>
           </a:bodyPr>
           <a:lstStyle/>
           <a:p>
-            <a:r>
-              <a:rPr lang="en-US" sz="1380" dirty="0">
+            <a:pPr indent="0" marL="0">
+              <a:buNone/>
+            </a:pPr>
+            <a:r>
+              <a:rPr lang="en-US" sz="1220" dirty="0">
                 <a:solidFill>
                   <a:srgbClr val="17364A"/>
                 </a:solidFill>
@@ -8880,9 +9003,9 @@
                 <a:ea typeface="Aptos" pitchFamily="34" charset="-122"/>
                 <a:cs typeface="Aptos" pitchFamily="34" charset="-120"/>
               </a:rPr>
-              <a:t>Decision-rights matrix; RACI table; risk acceptance thresholds; escalation authority list.</a:t>
-            </a:r>
-            <a:endParaRPr lang="en-US" sz="1380" dirty="0"/>
+              <a:t>Decision-rights matrix; RACI table; risk acceptance thresholds;.</a:t>
+            </a:r>
+            <a:endParaRPr lang="en-US" sz="1220" dirty="0"/>
           </a:p>
         </p:txBody>
       </p:sp>
@@ -8960,17 +9083,17 @@
         </p:nvSpPr>
         <p:spPr>
           <a:xfrm>
-            <a:off x="7799832" y="5001768"/>
-            <a:ext cx="3145536" cy="502920"/>
-          </a:xfrm>
-          <a:prstGeom prst="rect">
-            <a:avLst/>
-          </a:prstGeom>
-          <a:noFill/>
-          <a:ln/>
-        </p:spPr>
-        <p:txBody>
-          <a:bodyPr wrap="square" lIns="0" tIns="0" rIns="0" bIns="0" rtlCol="0" anchor="t">
+            <a:off x="7799832" y="4974336"/>
+            <a:ext cx="3145536" cy="576072"/>
+          </a:xfrm>
+          <a:prstGeom prst="rect">
+            <a:avLst/>
+          </a:prstGeom>
+          <a:noFill/>
+          <a:ln/>
+        </p:spPr>
+        <p:txBody>
+          <a:bodyPr wrap="square" lIns="254" tIns="254" rIns="254" bIns="254" rtlCol="0" anchor="t">
             <a:normAutofit/>
           </a:bodyPr>
           <a:lstStyle/>
@@ -8979,7 +9102,7 @@
               <a:buNone/>
             </a:pPr>
             <a:r>
-              <a:rPr lang="en-US" sz="1550" dirty="0">
+              <a:rPr lang="en-US" sz="1320" dirty="0">
                 <a:solidFill>
                   <a:srgbClr val="17364A"/>
                 </a:solidFill>
@@ -8987,9 +9110,9 @@
                 <a:ea typeface="Aptos" pitchFamily="34" charset="-122"/>
                 <a:cs typeface="Aptos" pitchFamily="34" charset="-120"/>
               </a:rPr>
-              <a:t>Use the assignment to test whether you can explain the concept, apply it to a realistic public health situation, and identify what would need review before the work moves forward.</a:t>
-            </a:r>
-            <a:endParaRPr lang="en-US" sz="1550" dirty="0"/>
+              <a:t>Use the assignment to test whether you can explain the concept, apply it to a realistic public health situation, and.</a:t>
+            </a:r>
+            <a:endParaRPr lang="en-US" sz="1320" dirty="0"/>
           </a:p>
         </p:txBody>
       </p:sp>
@@ -9290,49 +9413,58 @@
           <a:ln/>
         </p:spPr>
         <p:txBody>
-          <a:bodyPr wrap="square" lIns="635" tIns="635" rIns="635" bIns="635" rtlCol="0" anchor="t">
+          <a:bodyPr wrap="square" lIns="1016" tIns="1016" rIns="1016" bIns="1016" rtlCol="0" anchor="t">
             <a:normAutofit/>
           </a:bodyPr>
           <a:lstStyle/>
           <a:p>
+            <a:pPr indent="0" marL="0">
+              <a:buNone/>
+            </a:pPr>
             <a:r>
               <a:rPr lang="en-US" sz="2100" dirty="0">
                 <a:solidFill>
-                  <a:srgbClr val="17364A"/>
-                </a:solidFill>
-                <a:latin typeface="Aptos" pitchFamily="34" charset="0"/>
-                <a:ea typeface="Aptos" pitchFamily="34" charset="-122"/>
-                <a:cs typeface="Aptos" pitchFamily="34" charset="-120"/>
-              </a:rPr>
-              <a:t>1. What is the strongest reason this module topic belongs in AI leadership and governance training?</a:t>
+                  <a:srgbClr val="003A63"/>
+                </a:solidFill>
+                <a:latin typeface="Aptos" pitchFamily="34" charset="0"/>
+                <a:ea typeface="Aptos" pitchFamily="34" charset="-122"/>
+                <a:cs typeface="Aptos" pitchFamily="34" charset="-120"/>
+              </a:rPr>
+              <a:t>• 1. What is the strongest reason this module topic belongs in AI leadership and governance.</a:t>
             </a:r>
             <a:endParaRPr lang="en-US" sz="2100" dirty="0"/>
           </a:p>
           <a:p>
+            <a:pPr indent="0" marL="0">
+              <a:buNone/>
+            </a:pPr>
             <a:r>
               <a:rPr lang="en-US" sz="2100" dirty="0">
                 <a:solidFill>
-                  <a:srgbClr val="17364A"/>
-                </a:solidFill>
-                <a:latin typeface="Aptos" pitchFamily="34" charset="0"/>
-                <a:ea typeface="Aptos" pitchFamily="34" charset="-122"/>
-                <a:cs typeface="Aptos" pitchFamily="34" charset="-120"/>
-              </a:rPr>
-              <a:t>2. Which practice best supports accountable public health AI governance?</a:t>
+                  <a:srgbClr val="003A63"/>
+                </a:solidFill>
+                <a:latin typeface="Aptos" pitchFamily="34" charset="0"/>
+                <a:ea typeface="Aptos" pitchFamily="34" charset="-122"/>
+                <a:cs typeface="Aptos" pitchFamily="34" charset="-120"/>
+              </a:rPr>
+              <a:t>• 2. Which practice best supports accountable public health AI governance?</a:t>
             </a:r>
             <a:endParaRPr lang="en-US" sz="2100" dirty="0"/>
           </a:p>
           <a:p>
+            <a:pPr indent="0" marL="0">
+              <a:buNone/>
+            </a:pPr>
             <a:r>
               <a:rPr lang="en-US" sz="2100" dirty="0">
                 <a:solidFill>
-                  <a:srgbClr val="17364A"/>
-                </a:solidFill>
-                <a:latin typeface="Aptos" pitchFamily="34" charset="0"/>
-                <a:ea typeface="Aptos" pitchFamily="34" charset="-122"/>
-                <a:cs typeface="Aptos" pitchFamily="34" charset="-120"/>
-              </a:rPr>
-              <a:t>3. When should an AI use case be escalated for leadership or governance review?</a:t>
+                  <a:srgbClr val="003A63"/>
+                </a:solidFill>
+                <a:latin typeface="Aptos" pitchFamily="34" charset="0"/>
+                <a:ea typeface="Aptos" pitchFamily="34" charset="-122"/>
+                <a:cs typeface="Aptos" pitchFamily="34" charset="-120"/>
+              </a:rPr>
+              <a:t>• 3. When should an AI use case be escalated for leadership or governance review?</a:t>
             </a:r>
             <a:endParaRPr lang="en-US" sz="2100" dirty="0"/>
           </a:p>
@@ -9412,17 +9544,17 @@
         </p:nvSpPr>
         <p:spPr>
           <a:xfrm>
-            <a:off x="7799832" y="1828800"/>
-            <a:ext cx="3145536" cy="685800"/>
-          </a:xfrm>
-          <a:prstGeom prst="rect">
-            <a:avLst/>
-          </a:prstGeom>
-          <a:noFill/>
-          <a:ln/>
-        </p:spPr>
-        <p:txBody>
-          <a:bodyPr wrap="square" lIns="0" tIns="0" rIns="0" bIns="0" rtlCol="0" anchor="t">
+            <a:off x="7799832" y="1801368"/>
+            <a:ext cx="3145536" cy="758952"/>
+          </a:xfrm>
+          <a:prstGeom prst="rect">
+            <a:avLst/>
+          </a:prstGeom>
+          <a:noFill/>
+          <a:ln/>
+        </p:spPr>
+        <p:txBody>
+          <a:bodyPr wrap="square" lIns="254" tIns="254" rIns="254" bIns="254" rtlCol="0" anchor="t">
             <a:normAutofit/>
           </a:bodyPr>
           <a:lstStyle/>
@@ -9431,7 +9563,7 @@
               <a:buNone/>
             </a:pPr>
             <a:r>
-              <a:rPr lang="en-US" sz="1550" dirty="0">
+              <a:rPr lang="en-US" sz="1320" dirty="0">
                 <a:solidFill>
                   <a:srgbClr val="17364A"/>
                 </a:solidFill>
@@ -9441,7 +9573,7 @@
               </a:rPr>
               <a:t>1. What is the strongest reason this module topic belongs in AI leadership and governance training?</a:t>
             </a:r>
-            <a:endParaRPr lang="en-US" sz="1550" dirty="0"/>
+            <a:endParaRPr lang="en-US" sz="1320" dirty="0"/>
           </a:p>
         </p:txBody>
       </p:sp>
@@ -9529,13 +9661,16 @@
           <a:ln/>
         </p:spPr>
         <p:txBody>
-          <a:bodyPr wrap="square" lIns="254" tIns="254" rIns="254" bIns="254" rtlCol="0" anchor="t">
+          <a:bodyPr wrap="square" lIns="508" tIns="508" rIns="508" bIns="508" rtlCol="0" anchor="t">
             <a:normAutofit/>
           </a:bodyPr>
           <a:lstStyle/>
           <a:p>
-            <a:r>
-              <a:rPr lang="en-US" sz="1380" dirty="0">
+            <a:pPr indent="0" marL="0">
+              <a:buNone/>
+            </a:pPr>
+            <a:r>
+              <a:rPr lang="en-US" sz="1220" dirty="0">
                 <a:solidFill>
                   <a:srgbClr val="17364A"/>
                 </a:solidFill>
@@ -9545,11 +9680,14 @@
               </a:rPr>
               <a:t>1.</a:t>
             </a:r>
-            <a:endParaRPr lang="en-US" sz="1380" dirty="0"/>
-          </a:p>
-          <a:p>
-            <a:r>
-              <a:rPr lang="en-US" sz="1380" dirty="0">
+            <a:endParaRPr lang="en-US" sz="1220" dirty="0"/>
+          </a:p>
+          <a:p>
+            <a:pPr indent="0" marL="0">
+              <a:buNone/>
+            </a:pPr>
+            <a:r>
+              <a:rPr lang="en-US" sz="1220" dirty="0">
                 <a:solidFill>
                   <a:srgbClr val="17364A"/>
                 </a:solidFill>
@@ -9557,13 +9695,16 @@
                 <a:ea typeface="Aptos" pitchFamily="34" charset="-122"/>
                 <a:cs typeface="Aptos" pitchFamily="34" charset="-120"/>
               </a:rPr>
-              <a:t>What is the strongest reason this module topic belongs in AI leadership and governance.</a:t>
-            </a:r>
-            <a:endParaRPr lang="en-US" sz="1380" dirty="0"/>
-          </a:p>
-          <a:p>
-            <a:r>
-              <a:rPr lang="en-US" sz="1380" dirty="0">
+              <a:t>What is the strongest reason this module topic belongs in AI.</a:t>
+            </a:r>
+            <a:endParaRPr lang="en-US" sz="1220" dirty="0"/>
+          </a:p>
+          <a:p>
+            <a:pPr indent="0" marL="0">
+              <a:buNone/>
+            </a:pPr>
+            <a:r>
+              <a:rPr lang="en-US" sz="1220" dirty="0">
                 <a:solidFill>
                   <a:srgbClr val="17364A"/>
                 </a:solidFill>
@@ -9573,7 +9714,7 @@
               </a:rPr>
               <a:t>2.</a:t>
             </a:r>
-            <a:endParaRPr lang="en-US" sz="1380" dirty="0"/>
+            <a:endParaRPr lang="en-US" sz="1220" dirty="0"/>
           </a:p>
         </p:txBody>
       </p:sp>
@@ -9651,17 +9792,17 @@
         </p:nvSpPr>
         <p:spPr>
           <a:xfrm>
-            <a:off x="7799832" y="5001768"/>
-            <a:ext cx="3145536" cy="502920"/>
-          </a:xfrm>
-          <a:prstGeom prst="rect">
-            <a:avLst/>
-          </a:prstGeom>
-          <a:noFill/>
-          <a:ln/>
-        </p:spPr>
-        <p:txBody>
-          <a:bodyPr wrap="square" lIns="0" tIns="0" rIns="0" bIns="0" rtlCol="0" anchor="t">
+            <a:off x="7799832" y="4974336"/>
+            <a:ext cx="3145536" cy="576072"/>
+          </a:xfrm>
+          <a:prstGeom prst="rect">
+            <a:avLst/>
+          </a:prstGeom>
+          <a:noFill/>
+          <a:ln/>
+        </p:spPr>
+        <p:txBody>
+          <a:bodyPr wrap="square" lIns="254" tIns="254" rIns="254" bIns="254" rtlCol="0" anchor="t">
             <a:normAutofit/>
           </a:bodyPr>
           <a:lstStyle/>
@@ -9670,7 +9811,7 @@
               <a:buNone/>
             </a:pPr>
             <a:r>
-              <a:rPr lang="en-US" sz="1550" dirty="0">
+              <a:rPr lang="en-US" sz="1320" dirty="0">
                 <a:solidFill>
                   <a:srgbClr val="17364A"/>
                 </a:solidFill>
@@ -9678,9 +9819,9 @@
                 <a:ea typeface="Aptos" pitchFamily="34" charset="-122"/>
                 <a:cs typeface="Aptos" pitchFamily="34" charset="-120"/>
               </a:rPr>
-              <a:t>Use the assignment to test whether you can explain the concept, apply it to a realistic public health situation, and identify what would need review before the work moves forward.</a:t>
-            </a:r>
-            <a:endParaRPr lang="en-US" sz="1550" dirty="0"/>
+              <a:t>Use the assignment to test whether you can explain the concept, apply it to a realistic public health situation, and.</a:t>
+            </a:r>
+            <a:endParaRPr lang="en-US" sz="1320" dirty="0"/>
           </a:p>
         </p:txBody>
       </p:sp>
@@ -9981,49 +10122,58 @@
           <a:ln/>
         </p:spPr>
         <p:txBody>
-          <a:bodyPr wrap="square" lIns="635" tIns="635" rIns="635" bIns="635" rtlCol="0" anchor="t">
+          <a:bodyPr wrap="square" lIns="1016" tIns="1016" rIns="1016" bIns="1016" rtlCol="0" anchor="t">
             <a:normAutofit/>
           </a:bodyPr>
           <a:lstStyle/>
           <a:p>
+            <a:pPr indent="0" marL="0">
+              <a:buNone/>
+            </a:pPr>
             <a:r>
               <a:rPr lang="en-US" sz="2100" dirty="0">
                 <a:solidFill>
-                  <a:srgbClr val="17364A"/>
-                </a:solidFill>
-                <a:latin typeface="Aptos" pitchFamily="34" charset="0"/>
-                <a:ea typeface="Aptos" pitchFamily="34" charset="-122"/>
-                <a:cs typeface="Aptos" pitchFamily="34" charset="-120"/>
-              </a:rPr>
-              <a:t>AI governance can only work when decision rights are clear.</a:t>
+                  <a:srgbClr val="003A63"/>
+                </a:solidFill>
+                <a:latin typeface="Aptos" pitchFamily="34" charset="0"/>
+                <a:ea typeface="Aptos" pitchFamily="34" charset="-122"/>
+                <a:cs typeface="Aptos" pitchFamily="34" charset="-120"/>
+              </a:rPr>
+              <a:t>• AI governance can only work when decision rights are clear.</a:t>
             </a:r>
             <a:endParaRPr lang="en-US" sz="2100" dirty="0"/>
           </a:p>
           <a:p>
+            <a:pPr indent="0" marL="0">
+              <a:buNone/>
+            </a:pPr>
             <a:r>
               <a:rPr lang="en-US" sz="2100" dirty="0">
                 <a:solidFill>
-                  <a:srgbClr val="17364A"/>
-                </a:solidFill>
-                <a:latin typeface="Aptos" pitchFamily="34" charset="0"/>
-                <a:ea typeface="Aptos" pitchFamily="34" charset="-122"/>
-                <a:cs typeface="Aptos" pitchFamily="34" charset="-120"/>
-              </a:rPr>
-              <a:t>Leaders need to know who can approve a pilot, who can accept residual risk, who can authorize use of sensitive.</a:t>
+                  <a:srgbClr val="003A63"/>
+                </a:solidFill>
+                <a:latin typeface="Aptos" pitchFamily="34" charset="0"/>
+                <a:ea typeface="Aptos" pitchFamily="34" charset="-122"/>
+                <a:cs typeface="Aptos" pitchFamily="34" charset="-120"/>
+              </a:rPr>
+              <a:t>• Leaders need to know who can approve a pilot, who can accept residual risk, who can authorize.</a:t>
             </a:r>
             <a:endParaRPr lang="en-US" sz="2100" dirty="0"/>
           </a:p>
           <a:p>
+            <a:pPr indent="0" marL="0">
+              <a:buNone/>
+            </a:pPr>
             <a:r>
               <a:rPr lang="en-US" sz="2100" dirty="0">
                 <a:solidFill>
-                  <a:srgbClr val="17364A"/>
-                </a:solidFill>
-                <a:latin typeface="Aptos" pitchFamily="34" charset="0"/>
-                <a:ea typeface="Aptos" pitchFamily="34" charset="-122"/>
-                <a:cs typeface="Aptos" pitchFamily="34" charset="-120"/>
-              </a:rPr>
-              <a:t>Ambiguous accountability is especially risky in public health because AI outputs may influence investigations,.</a:t>
+                  <a:srgbClr val="003A63"/>
+                </a:solidFill>
+                <a:latin typeface="Aptos" pitchFamily="34" charset="0"/>
+                <a:ea typeface="Aptos" pitchFamily="34" charset="-122"/>
+                <a:cs typeface="Aptos" pitchFamily="34" charset="-120"/>
+              </a:rPr>
+              <a:t>• Ambiguous accountability is especially risky in public health because AI outputs may influence.</a:t>
             </a:r>
             <a:endParaRPr lang="en-US" sz="2100" dirty="0"/>
           </a:p>
@@ -10103,17 +10253,17 @@
         </p:nvSpPr>
         <p:spPr>
           <a:xfrm>
-            <a:off x="8074152" y="1920240"/>
-            <a:ext cx="2825496" cy="1280160"/>
-          </a:xfrm>
-          <a:prstGeom prst="rect">
-            <a:avLst/>
-          </a:prstGeom>
-          <a:noFill/>
-          <a:ln/>
-        </p:spPr>
-        <p:txBody>
-          <a:bodyPr wrap="square" lIns="0" tIns="0" rIns="0" bIns="0" rtlCol="0" anchor="t">
+            <a:off x="8074152" y="1892808"/>
+            <a:ext cx="2825496" cy="1353312"/>
+          </a:xfrm>
+          <a:prstGeom prst="rect">
+            <a:avLst/>
+          </a:prstGeom>
+          <a:noFill/>
+          <a:ln/>
+        </p:spPr>
+        <p:txBody>
+          <a:bodyPr wrap="square" lIns="254" tIns="254" rIns="254" bIns="254" rtlCol="0" anchor="t">
             <a:normAutofit/>
           </a:bodyPr>
           <a:lstStyle/>
@@ -10122,7 +10272,7 @@
               <a:buNone/>
             </a:pPr>
             <a:r>
-              <a:rPr lang="en-US" sz="1550" dirty="0">
+              <a:rPr lang="en-US" sz="1320" dirty="0">
                 <a:solidFill>
                   <a:srgbClr val="17364A"/>
                 </a:solidFill>
@@ -10130,43 +10280,9 @@
                 <a:ea typeface="Aptos" pitchFamily="34" charset="-122"/>
                 <a:cs typeface="Aptos" pitchFamily="34" charset="-120"/>
               </a:rPr>
-              <a:t>Level: advanced/leadership</a:t>
-            </a:r>
-            <a:endParaRPr lang="en-US" sz="1550" dirty="0"/>
-          </a:p>
-          <a:p>
-            <a:pPr indent="0" marL="0">
-              <a:buNone/>
-            </a:pPr>
-            <a:r>
-              <a:rPr lang="en-US" sz="1550" dirty="0">
-                <a:solidFill>
-                  <a:srgbClr val="17364A"/>
-                </a:solidFill>
-                <a:latin typeface="Aptos" pitchFamily="34" charset="0"/>
-                <a:ea typeface="Aptos" pitchFamily="34" charset="-122"/>
-                <a:cs typeface="Aptos" pitchFamily="34" charset="-120"/>
-              </a:rPr>
-              <a:t>Primary track: Public Health Executive Leadership Track</a:t>
-            </a:r>
-            <a:endParaRPr lang="en-US" sz="1550" dirty="0"/>
-          </a:p>
-          <a:p>
-            <a:pPr indent="0" marL="0">
-              <a:buNone/>
-            </a:pPr>
-            <a:r>
-              <a:rPr lang="en-US" sz="1550" dirty="0">
-                <a:solidFill>
-                  <a:srgbClr val="17364A"/>
-                </a:solidFill>
-                <a:latin typeface="Aptos" pitchFamily="34" charset="0"/>
-                <a:ea typeface="Aptos" pitchFamily="34" charset="-122"/>
-                <a:cs typeface="Aptos" pitchFamily="34" charset="-120"/>
-              </a:rPr>
-              <a:t>Appears in tracks: governance-security</a:t>
-            </a:r>
-            <a:endParaRPr lang="en-US" sz="1550" dirty="0"/>
+              <a:t>Level: advanced/leadership Primary track: Public Health Executive Leadership Track Appears in tracks: governance-security</a:t>
+            </a:r>
+            <a:endParaRPr lang="en-US" sz="1320" dirty="0"/>
           </a:p>
         </p:txBody>
       </p:sp>
@@ -10254,13 +10370,16 @@
           <a:ln/>
         </p:spPr>
         <p:txBody>
-          <a:bodyPr wrap="square" lIns="254" tIns="254" rIns="254" bIns="254" rtlCol="0" anchor="t">
+          <a:bodyPr wrap="square" lIns="508" tIns="508" rIns="508" bIns="508" rtlCol="0" anchor="t">
             <a:normAutofit/>
           </a:bodyPr>
           <a:lstStyle/>
           <a:p>
-            <a:r>
-              <a:rPr lang="en-US" sz="1380" dirty="0">
+            <a:pPr indent="0" marL="0">
+              <a:buNone/>
+            </a:pPr>
+            <a:r>
+              <a:rPr lang="en-US" sz="1220" dirty="0">
                 <a:solidFill>
                   <a:srgbClr val="17364A"/>
                 </a:solidFill>
@@ -10270,11 +10389,14 @@
               </a:rPr>
               <a:t>Read the module for shared vocabulary and context.</a:t>
             </a:r>
-            <a:endParaRPr lang="en-US" sz="1380" dirty="0"/>
-          </a:p>
-          <a:p>
-            <a:r>
-              <a:rPr lang="en-US" sz="1380" dirty="0">
+            <a:endParaRPr lang="en-US" sz="1220" dirty="0"/>
+          </a:p>
+          <a:p>
+            <a:pPr indent="0" marL="0">
+              <a:buNone/>
+            </a:pPr>
+            <a:r>
+              <a:rPr lang="en-US" sz="1220" dirty="0">
                 <a:solidFill>
                   <a:srgbClr val="17364A"/>
                 </a:solidFill>
@@ -10284,11 +10406,14 @@
               </a:rPr>
               <a:t>Complete the practical exercise to apply the concept.</a:t>
             </a:r>
-            <a:endParaRPr lang="en-US" sz="1380" dirty="0"/>
-          </a:p>
-          <a:p>
-            <a:r>
-              <a:rPr lang="en-US" sz="1380" dirty="0">
+            <a:endParaRPr lang="en-US" sz="1220" dirty="0"/>
+          </a:p>
+          <a:p>
+            <a:pPr indent="0" marL="0">
+              <a:buNone/>
+            </a:pPr>
+            <a:r>
+              <a:rPr lang="en-US" sz="1220" dirty="0">
                 <a:solidFill>
                   <a:srgbClr val="17364A"/>
                 </a:solidFill>
@@ -10298,7 +10423,7 @@
               </a:rPr>
               <a:t>Use the notes and references for deeper review.</a:t>
             </a:r>
-            <a:endParaRPr lang="en-US" sz="1380" dirty="0"/>
+            <a:endParaRPr lang="en-US" sz="1220" dirty="0"/>
           </a:p>
         </p:txBody>
       </p:sp>
@@ -10599,49 +10724,58 @@
           <a:ln/>
         </p:spPr>
         <p:txBody>
-          <a:bodyPr wrap="square" lIns="635" tIns="635" rIns="635" bIns="635" rtlCol="0" anchor="t">
+          <a:bodyPr wrap="square" lIns="1016" tIns="1016" rIns="1016" bIns="1016" rtlCol="0" anchor="t">
             <a:normAutofit/>
           </a:bodyPr>
           <a:lstStyle/>
           <a:p>
+            <a:pPr indent="0" marL="0">
+              <a:buNone/>
+            </a:pPr>
             <a:r>
               <a:rPr lang="en-US" sz="2100" dirty="0">
                 <a:solidFill>
-                  <a:srgbClr val="17364A"/>
-                </a:solidFill>
-                <a:latin typeface="Aptos" pitchFamily="34" charset="0"/>
-                <a:ea typeface="Aptos" pitchFamily="34" charset="-122"/>
-                <a:cs typeface="Aptos" pitchFamily="34" charset="-120"/>
-              </a:rPr>
-              <a:t>NIST Artificial Intelligence Risk Management Framework (AI RMF 1.0):.</a:t>
+                  <a:srgbClr val="003A63"/>
+                </a:solidFill>
+                <a:latin typeface="Aptos" pitchFamily="34" charset="0"/>
+                <a:ea typeface="Aptos" pitchFamily="34" charset="-122"/>
+                <a:cs typeface="Aptos" pitchFamily="34" charset="-120"/>
+              </a:rPr>
+              <a:t>• NIST Artificial Intelligence Risk Management Framework (AI RMF 1.0):.</a:t>
             </a:r>
             <a:endParaRPr lang="en-US" sz="2100" dirty="0"/>
           </a:p>
           <a:p>
+            <a:pPr indent="0" marL="0">
+              <a:buNone/>
+            </a:pPr>
             <a:r>
               <a:rPr lang="en-US" sz="2100" dirty="0">
                 <a:solidFill>
-                  <a:srgbClr val="17364A"/>
-                </a:solidFill>
-                <a:latin typeface="Aptos" pitchFamily="34" charset="0"/>
-                <a:ea typeface="Aptos" pitchFamily="34" charset="-122"/>
-                <a:cs typeface="Aptos" pitchFamily="34" charset="-120"/>
-              </a:rPr>
-              <a:t>NIST Generative AI Profile:.</a:t>
+                  <a:srgbClr val="003A63"/>
+                </a:solidFill>
+                <a:latin typeface="Aptos" pitchFamily="34" charset="0"/>
+                <a:ea typeface="Aptos" pitchFamily="34" charset="-122"/>
+                <a:cs typeface="Aptos" pitchFamily="34" charset="-120"/>
+              </a:rPr>
+              <a:t>• NIST Generative AI Profile:.</a:t>
             </a:r>
             <a:endParaRPr lang="en-US" sz="2100" dirty="0"/>
           </a:p>
           <a:p>
+            <a:pPr indent="0" marL="0">
+              <a:buNone/>
+            </a:pPr>
             <a:r>
               <a:rPr lang="en-US" sz="2100" dirty="0">
                 <a:solidFill>
-                  <a:srgbClr val="17364A"/>
-                </a:solidFill>
-                <a:latin typeface="Aptos" pitchFamily="34" charset="0"/>
-                <a:ea typeface="Aptos" pitchFamily="34" charset="-122"/>
-                <a:cs typeface="Aptos" pitchFamily="34" charset="-120"/>
-              </a:rPr>
-              <a:t>NIST Privacy Framework</a:t>
+                  <a:srgbClr val="003A63"/>
+                </a:solidFill>
+                <a:latin typeface="Aptos" pitchFamily="34" charset="0"/>
+                <a:ea typeface="Aptos" pitchFamily="34" charset="-122"/>
+                <a:cs typeface="Aptos" pitchFamily="34" charset="-120"/>
+              </a:rPr>
+              <a:t>• NIST Privacy Framework</a:t>
             </a:r>
             <a:endParaRPr lang="en-US" sz="2100" dirty="0"/>
           </a:p>
@@ -10721,17 +10855,17 @@
         </p:nvSpPr>
         <p:spPr>
           <a:xfrm>
-            <a:off x="7799832" y="1828800"/>
-            <a:ext cx="3145536" cy="685800"/>
-          </a:xfrm>
-          <a:prstGeom prst="rect">
-            <a:avLst/>
-          </a:prstGeom>
-          <a:noFill/>
-          <a:ln/>
-        </p:spPr>
-        <p:txBody>
-          <a:bodyPr wrap="square" lIns="0" tIns="0" rIns="0" bIns="0" rtlCol="0" anchor="t">
+            <a:off x="7799832" y="1801368"/>
+            <a:ext cx="3145536" cy="758952"/>
+          </a:xfrm>
+          <a:prstGeom prst="rect">
+            <a:avLst/>
+          </a:prstGeom>
+          <a:noFill/>
+          <a:ln/>
+        </p:spPr>
+        <p:txBody>
+          <a:bodyPr wrap="square" lIns="254" tIns="254" rIns="254" bIns="254" rtlCol="0" anchor="t">
             <a:normAutofit/>
           </a:bodyPr>
           <a:lstStyle/>
@@ -10740,7 +10874,7 @@
               <a:buNone/>
             </a:pPr>
             <a:r>
-              <a:rPr lang="en-US" sz="1550" dirty="0">
+              <a:rPr lang="en-US" sz="1320" dirty="0">
                 <a:solidFill>
                   <a:srgbClr val="17364A"/>
                 </a:solidFill>
@@ -10750,7 +10884,7 @@
               </a:rPr>
               <a:t>NIST Artificial Intelligence Risk Management Framework (AI RMF 1.0):.</a:t>
             </a:r>
-            <a:endParaRPr lang="en-US" sz="1550" dirty="0"/>
+            <a:endParaRPr lang="en-US" sz="1320" dirty="0"/>
           </a:p>
         </p:txBody>
       </p:sp>
@@ -10838,13 +10972,16 @@
           <a:ln/>
         </p:spPr>
         <p:txBody>
-          <a:bodyPr wrap="square" lIns="254" tIns="254" rIns="254" bIns="254" rtlCol="0" anchor="t">
+          <a:bodyPr wrap="square" lIns="508" tIns="508" rIns="508" bIns="508" rtlCol="0" anchor="t">
             <a:normAutofit/>
           </a:bodyPr>
           <a:lstStyle/>
           <a:p>
-            <a:r>
-              <a:rPr lang="en-US" sz="1380" dirty="0">
+            <a:pPr indent="0" marL="0">
+              <a:buNone/>
+            </a:pPr>
+            <a:r>
+              <a:rPr lang="en-US" sz="1220" dirty="0">
                 <a:solidFill>
                   <a:srgbClr val="17364A"/>
                 </a:solidFill>
@@ -10852,13 +10989,16 @@
                 <a:ea typeface="Aptos" pitchFamily="34" charset="-122"/>
                 <a:cs typeface="Aptos" pitchFamily="34" charset="-120"/>
               </a:rPr>
-              <a:t>NIST Artificial Intelligence Risk Management Framework (AI RMF 1.0):.</a:t>
-            </a:r>
-            <a:endParaRPr lang="en-US" sz="1380" dirty="0"/>
-          </a:p>
-          <a:p>
-            <a:r>
-              <a:rPr lang="en-US" sz="1380" dirty="0">
+              <a:t>NIST Artificial Intelligence Risk Management Framework (AI RMF.</a:t>
+            </a:r>
+            <a:endParaRPr lang="en-US" sz="1220" dirty="0"/>
+          </a:p>
+          <a:p>
+            <a:pPr indent="0" marL="0">
+              <a:buNone/>
+            </a:pPr>
+            <a:r>
+              <a:rPr lang="en-US" sz="1220" dirty="0">
                 <a:solidFill>
                   <a:srgbClr val="17364A"/>
                 </a:solidFill>
@@ -10868,11 +11008,14 @@
               </a:rPr>
               <a:t>CDC Public Health Data Strategy and Data Modernization resources:.</a:t>
             </a:r>
-            <a:endParaRPr lang="en-US" sz="1380" dirty="0"/>
-          </a:p>
-          <a:p>
-            <a:r>
-              <a:rPr lang="en-US" sz="1380" dirty="0">
+            <a:endParaRPr lang="en-US" sz="1220" dirty="0"/>
+          </a:p>
+          <a:p>
+            <a:pPr indent="0" marL="0">
+              <a:buNone/>
+            </a:pPr>
+            <a:r>
+              <a:rPr lang="en-US" sz="1220" dirty="0">
                 <a:solidFill>
                   <a:srgbClr val="17364A"/>
                 </a:solidFill>
@@ -10882,7 +11025,7 @@
               </a:rPr>
               <a:t>WHO Ethics and Governance of Artificial Intelligence for Health:.</a:t>
             </a:r>
-            <a:endParaRPr lang="en-US" sz="1380" dirty="0"/>
+            <a:endParaRPr lang="en-US" sz="1220" dirty="0"/>
           </a:p>
         </p:txBody>
       </p:sp>
@@ -10960,17 +11103,17 @@
         </p:nvSpPr>
         <p:spPr>
           <a:xfrm>
-            <a:off x="7799832" y="5001768"/>
-            <a:ext cx="3145536" cy="502920"/>
-          </a:xfrm>
-          <a:prstGeom prst="rect">
-            <a:avLst/>
-          </a:prstGeom>
-          <a:noFill/>
-          <a:ln/>
-        </p:spPr>
-        <p:txBody>
-          <a:bodyPr wrap="square" lIns="0" tIns="0" rIns="0" bIns="0" rtlCol="0" anchor="t">
+            <a:off x="7799832" y="4974336"/>
+            <a:ext cx="3145536" cy="576072"/>
+          </a:xfrm>
+          <a:prstGeom prst="rect">
+            <a:avLst/>
+          </a:prstGeom>
+          <a:noFill/>
+          <a:ln/>
+        </p:spPr>
+        <p:txBody>
+          <a:bodyPr wrap="square" lIns="254" tIns="254" rIns="254" bIns="254" rtlCol="0" anchor="t">
             <a:normAutofit/>
           </a:bodyPr>
           <a:lstStyle/>
@@ -10979,7 +11122,7 @@
               <a:buNone/>
             </a:pPr>
             <a:r>
-              <a:rPr lang="en-US" sz="1550" dirty="0">
+              <a:rPr lang="en-US" sz="1320" dirty="0">
                 <a:solidFill>
                   <a:srgbClr val="17364A"/>
                 </a:solidFill>
@@ -10987,9 +11130,9 @@
                 <a:ea typeface="Aptos" pitchFamily="34" charset="-122"/>
                 <a:cs typeface="Aptos" pitchFamily="34" charset="-120"/>
               </a:rPr>
-              <a:t>Connect the concept to public health purpose, responsible use, required safeguards, documentation, and the next action a department should take.</a:t>
-            </a:r>
-            <a:endParaRPr lang="en-US" sz="1550" dirty="0"/>
+              <a:t>Connect the concept to public health purpose, responsible use, required safeguards, documentation, and the next action a.</a:t>
+            </a:r>
+            <a:endParaRPr lang="en-US" sz="1320" dirty="0"/>
           </a:p>
         </p:txBody>
       </p:sp>
@@ -11290,35 +11433,41 @@
           <a:ln/>
         </p:spPr>
         <p:txBody>
-          <a:bodyPr wrap="square" lIns="635" tIns="635" rIns="635" bIns="635" rtlCol="0" anchor="t">
+          <a:bodyPr wrap="square" lIns="1016" tIns="1016" rIns="1016" bIns="1016" rtlCol="0" anchor="t">
             <a:normAutofit/>
           </a:bodyPr>
           <a:lstStyle/>
           <a:p>
+            <a:pPr indent="0" marL="0">
+              <a:buNone/>
+            </a:pPr>
             <a:r>
               <a:rPr lang="en-US" sz="2100" dirty="0">
                 <a:solidFill>
-                  <a:srgbClr val="17364A"/>
-                </a:solidFill>
-                <a:latin typeface="Aptos" pitchFamily="34" charset="0"/>
-                <a:ea typeface="Aptos" pitchFamily="34" charset="-122"/>
-                <a:cs typeface="Aptos" pitchFamily="34" charset="-120"/>
-              </a:rPr>
-              <a:t>OMB Memorandum M-24-10 on federal AI governance, risk management, and innovation, where relevant to.</a:t>
+                  <a:srgbClr val="003A63"/>
+                </a:solidFill>
+                <a:latin typeface="Aptos" pitchFamily="34" charset="0"/>
+                <a:ea typeface="Aptos" pitchFamily="34" charset="-122"/>
+                <a:cs typeface="Aptos" pitchFamily="34" charset="-120"/>
+              </a:rPr>
+              <a:t>• OMB Memorandum M-24-10 on federal AI governance, risk management, and innovation, where.</a:t>
             </a:r>
             <a:endParaRPr lang="en-US" sz="2100" dirty="0"/>
           </a:p>
           <a:p>
+            <a:pPr indent="0" marL="0">
+              <a:buNone/>
+            </a:pPr>
             <a:r>
               <a:rPr lang="en-US" sz="2100" dirty="0">
                 <a:solidFill>
-                  <a:srgbClr val="17364A"/>
-                </a:solidFill>
-                <a:latin typeface="Aptos" pitchFamily="34" charset="0"/>
-                <a:ea typeface="Aptos" pitchFamily="34" charset="-122"/>
-                <a:cs typeface="Aptos" pitchFamily="34" charset="-120"/>
-              </a:rPr>
-              <a:t>Agency strategic plans, procurement policies, privacy policies, cybersecurity policies, records.</a:t>
+                  <a:srgbClr val="003A63"/>
+                </a:solidFill>
+                <a:latin typeface="Aptos" pitchFamily="34" charset="0"/>
+                <a:ea typeface="Aptos" pitchFamily="34" charset="-122"/>
+                <a:cs typeface="Aptos" pitchFamily="34" charset="-120"/>
+              </a:rPr>
+              <a:t>• Agency strategic plans, procurement policies, privacy policies, cybersecurity policies, records.</a:t>
             </a:r>
             <a:endParaRPr lang="en-US" sz="2100" dirty="0"/>
           </a:p>
@@ -11398,17 +11547,17 @@
         </p:nvSpPr>
         <p:spPr>
           <a:xfrm>
-            <a:off x="7799832" y="1828800"/>
-            <a:ext cx="3145536" cy="685800"/>
-          </a:xfrm>
-          <a:prstGeom prst="rect">
-            <a:avLst/>
-          </a:prstGeom>
-          <a:noFill/>
-          <a:ln/>
-        </p:spPr>
-        <p:txBody>
-          <a:bodyPr wrap="square" lIns="0" tIns="0" rIns="0" bIns="0" rtlCol="0" anchor="t">
+            <a:off x="7799832" y="1801368"/>
+            <a:ext cx="3145536" cy="758952"/>
+          </a:xfrm>
+          <a:prstGeom prst="rect">
+            <a:avLst/>
+          </a:prstGeom>
+          <a:noFill/>
+          <a:ln/>
+        </p:spPr>
+        <p:txBody>
+          <a:bodyPr wrap="square" lIns="254" tIns="254" rIns="254" bIns="254" rtlCol="0" anchor="t">
             <a:normAutofit/>
           </a:bodyPr>
           <a:lstStyle/>
@@ -11417,7 +11566,7 @@
               <a:buNone/>
             </a:pPr>
             <a:r>
-              <a:rPr lang="en-US" sz="1550" dirty="0">
+              <a:rPr lang="en-US" sz="1320" dirty="0">
                 <a:solidFill>
                   <a:srgbClr val="17364A"/>
                 </a:solidFill>
@@ -11427,7 +11576,7 @@
               </a:rPr>
               <a:t>OMB Memorandum M-24-10 on federal AI governance, risk management, and innovation, where relevant to.</a:t>
             </a:r>
-            <a:endParaRPr lang="en-US" sz="1550" dirty="0"/>
+            <a:endParaRPr lang="en-US" sz="1320" dirty="0"/>
           </a:p>
         </p:txBody>
       </p:sp>
@@ -11515,13 +11664,16 @@
           <a:ln/>
         </p:spPr>
         <p:txBody>
-          <a:bodyPr wrap="square" lIns="254" tIns="254" rIns="254" bIns="254" rtlCol="0" anchor="t">
+          <a:bodyPr wrap="square" lIns="508" tIns="508" rIns="508" bIns="508" rtlCol="0" anchor="t">
             <a:normAutofit/>
           </a:bodyPr>
           <a:lstStyle/>
           <a:p>
-            <a:r>
-              <a:rPr lang="en-US" sz="1380" dirty="0">
+            <a:pPr indent="0" marL="0">
+              <a:buNone/>
+            </a:pPr>
+            <a:r>
+              <a:rPr lang="en-US" sz="1220" dirty="0">
                 <a:solidFill>
                   <a:srgbClr val="17364A"/>
                 </a:solidFill>
@@ -11529,13 +11681,16 @@
                 <a:ea typeface="Aptos" pitchFamily="34" charset="-122"/>
                 <a:cs typeface="Aptos" pitchFamily="34" charset="-120"/>
               </a:rPr>
-              <a:t>OMB Memorandum M-24-10 on federal AI governance, risk management, and innovation, where.</a:t>
-            </a:r>
-            <a:endParaRPr lang="en-US" sz="1380" dirty="0"/>
-          </a:p>
-          <a:p>
-            <a:r>
-              <a:rPr lang="en-US" sz="1380" dirty="0">
+              <a:t>OMB Memorandum M-24-10 on federal AI governance, risk management,.</a:t>
+            </a:r>
+            <a:endParaRPr lang="en-US" sz="1220" dirty="0"/>
+          </a:p>
+          <a:p>
+            <a:pPr indent="0" marL="0">
+              <a:buNone/>
+            </a:pPr>
+            <a:r>
+              <a:rPr lang="en-US" sz="1220" dirty="0">
                 <a:solidFill>
                   <a:srgbClr val="17364A"/>
                 </a:solidFill>
@@ -11543,9 +11698,9 @@
                 <a:ea typeface="Aptos" pitchFamily="34" charset="-122"/>
                 <a:cs typeface="Aptos" pitchFamily="34" charset="-120"/>
               </a:rPr>
-              <a:t>Agency strategic plans, procurement policies, privacy policies, cybersecurity policies,.</a:t>
-            </a:r>
-            <a:endParaRPr lang="en-US" sz="1380" dirty="0"/>
+              <a:t>Agency strategic plans, procurement policies, privacy policies,.</a:t>
+            </a:r>
+            <a:endParaRPr lang="en-US" sz="1220" dirty="0"/>
           </a:p>
         </p:txBody>
       </p:sp>
@@ -11623,17 +11778,17 @@
         </p:nvSpPr>
         <p:spPr>
           <a:xfrm>
-            <a:off x="7799832" y="5001768"/>
-            <a:ext cx="3145536" cy="502920"/>
-          </a:xfrm>
-          <a:prstGeom prst="rect">
-            <a:avLst/>
-          </a:prstGeom>
-          <a:noFill/>
-          <a:ln/>
-        </p:spPr>
-        <p:txBody>
-          <a:bodyPr wrap="square" lIns="0" tIns="0" rIns="0" bIns="0" rtlCol="0" anchor="t">
+            <a:off x="7799832" y="4974336"/>
+            <a:ext cx="3145536" cy="576072"/>
+          </a:xfrm>
+          <a:prstGeom prst="rect">
+            <a:avLst/>
+          </a:prstGeom>
+          <a:noFill/>
+          <a:ln/>
+        </p:spPr>
+        <p:txBody>
+          <a:bodyPr wrap="square" lIns="254" tIns="254" rIns="254" bIns="254" rtlCol="0" anchor="t">
             <a:normAutofit/>
           </a:bodyPr>
           <a:lstStyle/>
@@ -11642,7 +11797,7 @@
               <a:buNone/>
             </a:pPr>
             <a:r>
-              <a:rPr lang="en-US" sz="1550" dirty="0">
+              <a:rPr lang="en-US" sz="1320" dirty="0">
                 <a:solidFill>
                   <a:srgbClr val="17364A"/>
                 </a:solidFill>
@@ -11650,9 +11805,9 @@
                 <a:ea typeface="Aptos" pitchFamily="34" charset="-122"/>
                 <a:cs typeface="Aptos" pitchFamily="34" charset="-120"/>
               </a:rPr>
-              <a:t>Connect the concept to public health purpose, responsible use, required safeguards, documentation, and the next action a department should take.</a:t>
-            </a:r>
-            <a:endParaRPr lang="en-US" sz="1550" dirty="0"/>
+              <a:t>Connect the concept to public health purpose, responsible use, required safeguards, documentation, and the next action a.</a:t>
+            </a:r>
+            <a:endParaRPr lang="en-US" sz="1320" dirty="0"/>
           </a:p>
         </p:txBody>
       </p:sp>
@@ -11953,63 +12108,75 @@
           <a:ln/>
         </p:spPr>
         <p:txBody>
-          <a:bodyPr wrap="square" lIns="635" tIns="635" rIns="635" bIns="635" rtlCol="0" anchor="t">
+          <a:bodyPr wrap="square" lIns="1016" tIns="1016" rIns="1016" bIns="1016" rtlCol="0" anchor="t">
             <a:normAutofit/>
           </a:bodyPr>
           <a:lstStyle/>
           <a:p>
+            <a:pPr indent="0" marL="0">
+              <a:buNone/>
+            </a:pPr>
             <a:r>
               <a:rPr lang="en-US" sz="1900" dirty="0">
                 <a:solidFill>
-                  <a:srgbClr val="17364A"/>
-                </a:solidFill>
-                <a:latin typeface="Aptos" pitchFamily="34" charset="0"/>
-                <a:ea typeface="Aptos" pitchFamily="34" charset="-122"/>
-                <a:cs typeface="Aptos" pitchFamily="34" charset="-120"/>
-              </a:rPr>
-              <a:t>Play 11: Build and Deploy AI Solutions - This lesson informs Play 11 by helping learners connect the lesson.</a:t>
+                  <a:srgbClr val="003A63"/>
+                </a:solidFill>
+                <a:latin typeface="Aptos" pitchFamily="34" charset="0"/>
+                <a:ea typeface="Aptos" pitchFamily="34" charset="-122"/>
+                <a:cs typeface="Aptos" pitchFamily="34" charset="-120"/>
+              </a:rPr>
+              <a:t>• Play 11: Build and Deploy AI Solutions - This lesson informs Play 11 by helping learners.</a:t>
             </a:r>
             <a:endParaRPr lang="en-US" sz="1900" dirty="0"/>
           </a:p>
           <a:p>
+            <a:pPr indent="0" marL="0">
+              <a:buNone/>
+            </a:pPr>
             <a:r>
               <a:rPr lang="en-US" sz="1900" dirty="0">
                 <a:solidFill>
-                  <a:srgbClr val="17364A"/>
-                </a:solidFill>
-                <a:latin typeface="Aptos" pitchFamily="34" charset="0"/>
-                <a:ea typeface="Aptos" pitchFamily="34" charset="-122"/>
-                <a:cs typeface="Aptos" pitchFamily="34" charset="-120"/>
-              </a:rPr>
-              <a:t>Play 1: Vision &amp; Guardrails - This lesson informs Play 1 by helping learners connect the lesson topic to.</a:t>
+                  <a:srgbClr val="003A63"/>
+                </a:solidFill>
+                <a:latin typeface="Aptos" pitchFamily="34" charset="0"/>
+                <a:ea typeface="Aptos" pitchFamily="34" charset="-122"/>
+                <a:cs typeface="Aptos" pitchFamily="34" charset="-120"/>
+              </a:rPr>
+              <a:t>• Play 1: Vision &amp; Guardrails - This lesson informs Play 1 by helping learners connect the.</a:t>
             </a:r>
             <a:endParaRPr lang="en-US" sz="1900" dirty="0"/>
           </a:p>
           <a:p>
+            <a:pPr indent="0" marL="0">
+              <a:buNone/>
+            </a:pPr>
             <a:r>
               <a:rPr lang="en-US" sz="1900" dirty="0">
                 <a:solidFill>
-                  <a:srgbClr val="17364A"/>
-                </a:solidFill>
-                <a:latin typeface="Aptos" pitchFamily="34" charset="0"/>
-                <a:ea typeface="Aptos" pitchFamily="34" charset="-122"/>
-                <a:cs typeface="Aptos" pitchFamily="34" charset="-120"/>
-              </a:rPr>
-              <a:t>Play 3: Establish AI Governance - This lesson informs Play 3 by helping learners connect the lesson topic to.</a:t>
+                  <a:srgbClr val="003A63"/>
+                </a:solidFill>
+                <a:latin typeface="Aptos" pitchFamily="34" charset="0"/>
+                <a:ea typeface="Aptos" pitchFamily="34" charset="-122"/>
+                <a:cs typeface="Aptos" pitchFamily="34" charset="-120"/>
+              </a:rPr>
+              <a:t>• Play 3: Establish AI Governance - This lesson informs Play 3 by helping learners connect the.</a:t>
             </a:r>
             <a:endParaRPr lang="en-US" sz="1900" dirty="0"/>
           </a:p>
           <a:p>
+            <a:pPr indent="0" marL="0">
+              <a:buNone/>
+            </a:pPr>
             <a:r>
               <a:rPr lang="en-US" sz="1900" dirty="0">
                 <a:solidFill>
-                  <a:srgbClr val="17364A"/>
-                </a:solidFill>
-                <a:latin typeface="Aptos" pitchFamily="34" charset="0"/>
-                <a:ea typeface="Aptos" pitchFamily="34" charset="-122"/>
-                <a:cs typeface="Aptos" pitchFamily="34" charset="-120"/>
-              </a:rPr>
-              <a:t>Play 7: Prioritize Use Cases - This lesson informs Play 7 by helping learners connect the lesson topic to.</a:t>
+                  <a:srgbClr val="003A63"/>
+                </a:solidFill>
+                <a:latin typeface="Aptos" pitchFamily="34" charset="0"/>
+                <a:ea typeface="Aptos" pitchFamily="34" charset="-122"/>
+                <a:cs typeface="Aptos" pitchFamily="34" charset="-120"/>
+              </a:rPr>
+              <a:t>• Play 7: Prioritize Use Cases - This lesson informs Play 7 by helping learners connect the.</a:t>
             </a:r>
             <a:endParaRPr lang="en-US" sz="1900" dirty="0"/>
           </a:p>
@@ -12089,17 +12256,17 @@
         </p:nvSpPr>
         <p:spPr>
           <a:xfrm>
-            <a:off x="8211312" y="1920240"/>
-            <a:ext cx="2734056" cy="1463040"/>
-          </a:xfrm>
-          <a:prstGeom prst="rect">
-            <a:avLst/>
-          </a:prstGeom>
-          <a:noFill/>
-          <a:ln/>
-        </p:spPr>
-        <p:txBody>
-          <a:bodyPr wrap="square" lIns="0" tIns="0" rIns="0" bIns="0" rtlCol="0" anchor="t">
+            <a:off x="8211312" y="1892808"/>
+            <a:ext cx="2734056" cy="1536192"/>
+          </a:xfrm>
+          <a:prstGeom prst="rect">
+            <a:avLst/>
+          </a:prstGeom>
+          <a:noFill/>
+          <a:ln/>
+        </p:spPr>
+        <p:txBody>
+          <a:bodyPr wrap="square" lIns="254" tIns="254" rIns="254" bIns="254" rtlCol="0" anchor="t">
             <a:normAutofit/>
           </a:bodyPr>
           <a:lstStyle/>
@@ -12108,7 +12275,7 @@
               <a:buNone/>
             </a:pPr>
             <a:r>
-              <a:rPr lang="en-US" sz="1550" dirty="0">
+              <a:rPr lang="en-US" sz="1320" dirty="0">
                 <a:solidFill>
                   <a:srgbClr val="17364A"/>
                 </a:solidFill>
@@ -12116,9 +12283,9 @@
                 <a:ea typeface="Aptos" pitchFamily="34" charset="-122"/>
                 <a:cs typeface="Aptos" pitchFamily="34" charset="-120"/>
               </a:rPr>
-              <a:t>Use the related plays to identify decisions, participants, timing, approvals, and documentation needed for responsible implementation.</a:t>
-            </a:r>
-            <a:endParaRPr lang="en-US" sz="1550" dirty="0"/>
+              <a:t>Use the related plays to identify decisions, participants, timing, approvals, and documentation needed for responsible.</a:t>
+            </a:r>
+            <a:endParaRPr lang="en-US" sz="1320" dirty="0"/>
           </a:p>
         </p:txBody>
       </p:sp>
@@ -12206,13 +12373,16 @@
           <a:ln/>
         </p:spPr>
         <p:txBody>
-          <a:bodyPr wrap="square" lIns="254" tIns="254" rIns="254" bIns="254" rtlCol="0" anchor="t">
+          <a:bodyPr wrap="square" lIns="508" tIns="508" rIns="508" bIns="508" rtlCol="0" anchor="t">
             <a:normAutofit/>
           </a:bodyPr>
           <a:lstStyle/>
           <a:p>
-            <a:r>
-              <a:rPr lang="en-US" sz="1380" dirty="0">
+            <a:pPr indent="0" marL="0">
+              <a:buNone/>
+            </a:pPr>
+            <a:r>
+              <a:rPr lang="en-US" sz="1220" dirty="0">
                 <a:solidFill>
                   <a:srgbClr val="17364A"/>
                 </a:solidFill>
@@ -12222,11 +12392,14 @@
               </a:rPr>
               <a:t>Locate the decision point in the playbook sequence.</a:t>
             </a:r>
-            <a:endParaRPr lang="en-US" sz="1380" dirty="0"/>
-          </a:p>
-          <a:p>
-            <a:r>
-              <a:rPr lang="en-US" sz="1380" dirty="0">
+            <a:endParaRPr lang="en-US" sz="1220" dirty="0"/>
+          </a:p>
+          <a:p>
+            <a:pPr indent="0" marL="0">
+              <a:buNone/>
+            </a:pPr>
+            <a:r>
+              <a:rPr lang="en-US" sz="1220" dirty="0">
                 <a:solidFill>
                   <a:srgbClr val="17364A"/>
                 </a:solidFill>
@@ -12236,11 +12409,14 @@
               </a:rPr>
               <a:t>Identify who should participate in the work.</a:t>
             </a:r>
-            <a:endParaRPr lang="en-US" sz="1380" dirty="0"/>
-          </a:p>
-          <a:p>
-            <a:r>
-              <a:rPr lang="en-US" sz="1380" dirty="0">
+            <a:endParaRPr lang="en-US" sz="1220" dirty="0"/>
+          </a:p>
+          <a:p>
+            <a:pPr indent="0" marL="0">
+              <a:buNone/>
+            </a:pPr>
+            <a:r>
+              <a:rPr lang="en-US" sz="1220" dirty="0">
                 <a:solidFill>
                   <a:srgbClr val="17364A"/>
                 </a:solidFill>
@@ -12250,7 +12426,7 @@
               </a:rPr>
               <a:t>Document the review, approval, or implementation step.</a:t>
             </a:r>
-            <a:endParaRPr lang="en-US" sz="1380" dirty="0"/>
+            <a:endParaRPr lang="en-US" sz="1220" dirty="0"/>
           </a:p>
         </p:txBody>
       </p:sp>
@@ -12551,63 +12727,75 @@
           <a:ln/>
         </p:spPr>
         <p:txBody>
-          <a:bodyPr wrap="square" lIns="635" tIns="635" rIns="635" bIns="635" rtlCol="0" anchor="t">
+          <a:bodyPr wrap="square" lIns="1016" tIns="1016" rIns="1016" bIns="1016" rtlCol="0" anchor="t">
             <a:normAutofit/>
           </a:bodyPr>
           <a:lstStyle/>
           <a:p>
+            <a:pPr indent="0" marL="0">
+              <a:buNone/>
+            </a:pPr>
             <a:r>
               <a:rPr lang="en-US" sz="1850" dirty="0">
                 <a:solidFill>
-                  <a:srgbClr val="17364A"/>
-                </a:solidFill>
-                <a:latin typeface="Aptos" pitchFamily="34" charset="0"/>
-                <a:ea typeface="Aptos" pitchFamily="34" charset="-122"/>
-                <a:cs typeface="Aptos" pitchFamily="34" charset="-120"/>
-              </a:rPr>
-              <a:t>Tool 32: Vendor Evaluation Checklist (Checklist) - Use this tool to complete or strengthen the practical.</a:t>
+                  <a:srgbClr val="003A63"/>
+                </a:solidFill>
+                <a:latin typeface="Aptos" pitchFamily="34" charset="0"/>
+                <a:ea typeface="Aptos" pitchFamily="34" charset="-122"/>
+                <a:cs typeface="Aptos" pitchFamily="34" charset="-120"/>
+              </a:rPr>
+              <a:t>• Tool 32: Vendor Evaluation Checklist (Checklist) - Use this tool to complete or strengthen the.</a:t>
             </a:r>
             <a:endParaRPr lang="en-US" sz="1850" dirty="0"/>
           </a:p>
           <a:p>
+            <a:pPr indent="0" marL="0">
+              <a:buNone/>
+            </a:pPr>
             <a:r>
               <a:rPr lang="en-US" sz="1850" dirty="0">
                 <a:solidFill>
-                  <a:srgbClr val="17364A"/>
-                </a:solidFill>
-                <a:latin typeface="Aptos" pitchFamily="34" charset="0"/>
-                <a:ea typeface="Aptos" pitchFamily="34" charset="-122"/>
-                <a:cs typeface="Aptos" pitchFamily="34" charset="-120"/>
-              </a:rPr>
-              <a:t>Tool 34: STLT AI Procurement and Vendor Addendum (Checklist) - Use this tool to complete or strengthen the.</a:t>
+                  <a:srgbClr val="003A63"/>
+                </a:solidFill>
+                <a:latin typeface="Aptos" pitchFamily="34" charset="0"/>
+                <a:ea typeface="Aptos" pitchFamily="34" charset="-122"/>
+                <a:cs typeface="Aptos" pitchFamily="34" charset="-120"/>
+              </a:rPr>
+              <a:t>• Tool 34: STLT AI Procurement and Vendor Addendum (Checklist) - Use this tool to complete or.</a:t>
             </a:r>
             <a:endParaRPr lang="en-US" sz="1850" dirty="0"/>
           </a:p>
           <a:p>
+            <a:pPr indent="0" marL="0">
+              <a:buNone/>
+            </a:pPr>
             <a:r>
               <a:rPr lang="en-US" sz="1850" dirty="0">
                 <a:solidFill>
-                  <a:srgbClr val="17364A"/>
-                </a:solidFill>
-                <a:latin typeface="Aptos" pitchFamily="34" charset="0"/>
-                <a:ea typeface="Aptos" pitchFamily="34" charset="-122"/>
-                <a:cs typeface="Aptos" pitchFamily="34" charset="-120"/>
-              </a:rPr>
-              <a:t>Tool 3: Equity Impact Assessment Checklist (Checklist) - Use this tool to complete or strengthen the.</a:t>
+                  <a:srgbClr val="003A63"/>
+                </a:solidFill>
+                <a:latin typeface="Aptos" pitchFamily="34" charset="0"/>
+                <a:ea typeface="Aptos" pitchFamily="34" charset="-122"/>
+                <a:cs typeface="Aptos" pitchFamily="34" charset="-120"/>
+              </a:rPr>
+              <a:t>• Tool 3: Equity Impact Assessment Checklist (Checklist) - Use this tool to complete or.</a:t>
             </a:r>
             <a:endParaRPr lang="en-US" sz="1850" dirty="0"/>
           </a:p>
           <a:p>
+            <a:pPr indent="0" marL="0">
+              <a:buNone/>
+            </a:pPr>
             <a:r>
               <a:rPr lang="en-US" sz="1850" dirty="0">
                 <a:solidFill>
-                  <a:srgbClr val="17364A"/>
-                </a:solidFill>
-                <a:latin typeface="Aptos" pitchFamily="34" charset="0"/>
-                <a:ea typeface="Aptos" pitchFamily="34" charset="-122"/>
-                <a:cs typeface="Aptos" pitchFamily="34" charset="-120"/>
-              </a:rPr>
-              <a:t>Tool 4: AI Policy Landscape Scan (Worksheet) - Use AI Policy Landscape Scan to translate this lesson into a.</a:t>
+                  <a:srgbClr val="003A63"/>
+                </a:solidFill>
+                <a:latin typeface="Aptos" pitchFamily="34" charset="0"/>
+                <a:ea typeface="Aptos" pitchFamily="34" charset="-122"/>
+                <a:cs typeface="Aptos" pitchFamily="34" charset="-120"/>
+              </a:rPr>
+              <a:t>• Tool 4: AI Policy Landscape Scan (Worksheet) - Use AI Policy Landscape Scan to translate this.</a:t>
             </a:r>
             <a:endParaRPr lang="en-US" sz="1850" dirty="0"/>
           </a:p>
@@ -12687,17 +12875,17 @@
         </p:nvSpPr>
         <p:spPr>
           <a:xfrm>
-            <a:off x="8211312" y="1920240"/>
-            <a:ext cx="2734056" cy="1463040"/>
-          </a:xfrm>
-          <a:prstGeom prst="rect">
-            <a:avLst/>
-          </a:prstGeom>
-          <a:noFill/>
-          <a:ln/>
-        </p:spPr>
-        <p:txBody>
-          <a:bodyPr wrap="square" lIns="0" tIns="0" rIns="0" bIns="0" rtlCol="0" anchor="t">
+            <a:off x="8211312" y="1892808"/>
+            <a:ext cx="2734056" cy="1536192"/>
+          </a:xfrm>
+          <a:prstGeom prst="rect">
+            <a:avLst/>
+          </a:prstGeom>
+          <a:noFill/>
+          <a:ln/>
+        </p:spPr>
+        <p:txBody>
+          <a:bodyPr wrap="square" lIns="254" tIns="254" rIns="254" bIns="254" rtlCol="0" anchor="t">
             <a:normAutofit/>
           </a:bodyPr>
           <a:lstStyle/>
@@ -12706,7 +12894,7 @@
               <a:buNone/>
             </a:pPr>
             <a:r>
-              <a:rPr lang="en-US" sz="1550" dirty="0">
+              <a:rPr lang="en-US" sz="1320" dirty="0">
                 <a:solidFill>
                   <a:srgbClr val="17364A"/>
                 </a:solidFill>
@@ -12714,9 +12902,9 @@
                 <a:ea typeface="Aptos" pitchFamily="34" charset="-122"/>
                 <a:cs typeface="Aptos" pitchFamily="34" charset="-120"/>
               </a:rPr>
-              <a:t>Use linked tools when your department needs a structured worksheet, template, checklist, review process, or documentation artifact.</a:t>
-            </a:r>
-            <a:endParaRPr lang="en-US" sz="1550" dirty="0"/>
+              <a:t>Use linked tools when your department needs a structured worksheet, template, checklist, review process, or.</a:t>
+            </a:r>
+            <a:endParaRPr lang="en-US" sz="1320" dirty="0"/>
           </a:p>
         </p:txBody>
       </p:sp>
@@ -12804,13 +12992,16 @@
           <a:ln/>
         </p:spPr>
         <p:txBody>
-          <a:bodyPr wrap="square" lIns="254" tIns="254" rIns="254" bIns="254" rtlCol="0" anchor="t">
+          <a:bodyPr wrap="square" lIns="508" tIns="508" rIns="508" bIns="508" rtlCol="0" anchor="t">
             <a:normAutofit/>
           </a:bodyPr>
           <a:lstStyle/>
           <a:p>
-            <a:r>
-              <a:rPr lang="en-US" sz="1380" dirty="0">
+            <a:pPr indent="0" marL="0">
+              <a:buNone/>
+            </a:pPr>
+            <a:r>
+              <a:rPr lang="en-US" sz="1220" dirty="0">
                 <a:solidFill>
                   <a:srgbClr val="17364A"/>
                 </a:solidFill>
@@ -12820,11 +13011,14 @@
               </a:rPr>
               <a:t>Use a tool when no comparable local process exists.</a:t>
             </a:r>
-            <a:endParaRPr lang="en-US" sz="1380" dirty="0"/>
-          </a:p>
-          <a:p>
-            <a:r>
-              <a:rPr lang="en-US" sz="1380" dirty="0">
+            <a:endParaRPr lang="en-US" sz="1220" dirty="0"/>
+          </a:p>
+          <a:p>
+            <a:pPr indent="0" marL="0">
+              <a:buNone/>
+            </a:pPr>
+            <a:r>
+              <a:rPr lang="en-US" sz="1220" dirty="0">
                 <a:solidFill>
                   <a:srgbClr val="17364A"/>
                 </a:solidFill>
@@ -12832,13 +13026,16 @@
                 <a:ea typeface="Aptos" pitchFamily="34" charset="-122"/>
                 <a:cs typeface="Aptos" pitchFamily="34" charset="-120"/>
               </a:rPr>
-              <a:t>Adapt existing department templates when they already fit the purpose.</a:t>
-            </a:r>
-            <a:endParaRPr lang="en-US" sz="1380" dirty="0"/>
-          </a:p>
-          <a:p>
-            <a:r>
-              <a:rPr lang="en-US" sz="1380" dirty="0">
+              <a:t>Adapt existing department templates when they already fit the.</a:t>
+            </a:r>
+            <a:endParaRPr lang="en-US" sz="1220" dirty="0"/>
+          </a:p>
+          <a:p>
+            <a:pPr indent="0" marL="0">
+              <a:buNone/>
+            </a:pPr>
+            <a:r>
+              <a:rPr lang="en-US" sz="1220" dirty="0">
                 <a:solidFill>
                   <a:srgbClr val="17364A"/>
                 </a:solidFill>
@@ -12848,7 +13045,7 @@
               </a:rPr>
               <a:t>Save the completed artifact as evidence of the decision.</a:t>
             </a:r>
-            <a:endParaRPr lang="en-US" sz="1380" dirty="0"/>
+            <a:endParaRPr lang="en-US" sz="1220" dirty="0"/>
           </a:p>
         </p:txBody>
       </p:sp>
@@ -13149,49 +13346,58 @@
           <a:ln/>
         </p:spPr>
         <p:txBody>
-          <a:bodyPr wrap="square" lIns="635" tIns="635" rIns="635" bIns="635" rtlCol="0" anchor="t">
+          <a:bodyPr wrap="square" lIns="1016" tIns="1016" rIns="1016" bIns="1016" rtlCol="0" anchor="t">
             <a:normAutofit/>
           </a:bodyPr>
           <a:lstStyle/>
           <a:p>
+            <a:pPr indent="0" marL="0">
+              <a:buNone/>
+            </a:pPr>
             <a:r>
               <a:rPr lang="en-US" sz="2100" dirty="0">
                 <a:solidFill>
-                  <a:srgbClr val="17364A"/>
-                </a:solidFill>
-                <a:latin typeface="Aptos" pitchFamily="34" charset="0"/>
-                <a:ea typeface="Aptos" pitchFamily="34" charset="-122"/>
-                <a:cs typeface="Aptos" pitchFamily="34" charset="-120"/>
-              </a:rPr>
-              <a:t>Explain why AI accountability must be assigned to people and roles rather than to tools or vendors.</a:t>
+                  <a:srgbClr val="003A63"/>
+                </a:solidFill>
+                <a:latin typeface="Aptos" pitchFamily="34" charset="0"/>
+                <a:ea typeface="Aptos" pitchFamily="34" charset="-122"/>
+                <a:cs typeface="Aptos" pitchFamily="34" charset="-120"/>
+              </a:rPr>
+              <a:t>• Explain why AI accountability must be assigned to people and roles rather than to tools or.</a:t>
             </a:r>
             <a:endParaRPr lang="en-US" sz="2100" dirty="0"/>
           </a:p>
           <a:p>
+            <a:pPr indent="0" marL="0">
+              <a:buNone/>
+            </a:pPr>
             <a:r>
               <a:rPr lang="en-US" sz="2100" dirty="0">
                 <a:solidFill>
-                  <a:srgbClr val="17364A"/>
-                </a:solidFill>
-                <a:latin typeface="Aptos" pitchFamily="34" charset="0"/>
-                <a:ea typeface="Aptos" pitchFamily="34" charset="-122"/>
-                <a:cs typeface="Aptos" pitchFamily="34" charset="-120"/>
-              </a:rPr>
-              <a:t>Identify executive, program, technical, privacy, legal, security, and governance responsibilities for.</a:t>
+                  <a:srgbClr val="003A63"/>
+                </a:solidFill>
+                <a:latin typeface="Aptos" pitchFamily="34" charset="0"/>
+                <a:ea typeface="Aptos" pitchFamily="34" charset="-122"/>
+                <a:cs typeface="Aptos" pitchFamily="34" charset="-120"/>
+              </a:rPr>
+              <a:t>• Identify executive, program, technical, privacy, legal, security, and governance.</a:t>
             </a:r>
             <a:endParaRPr lang="en-US" sz="2100" dirty="0"/>
           </a:p>
           <a:p>
+            <a:pPr indent="0" marL="0">
+              <a:buNone/>
+            </a:pPr>
             <a:r>
               <a:rPr lang="en-US" sz="2100" dirty="0">
                 <a:solidFill>
-                  <a:srgbClr val="17364A"/>
-                </a:solidFill>
-                <a:latin typeface="Aptos" pitchFamily="34" charset="0"/>
-                <a:ea typeface="Aptos" pitchFamily="34" charset="-122"/>
-                <a:cs typeface="Aptos" pitchFamily="34" charset="-120"/>
-              </a:rPr>
-              <a:t>Create a decision-rights matrix for AI use case approval, risk acceptance, monitoring, escalation, and.</a:t>
+                  <a:srgbClr val="003A63"/>
+                </a:solidFill>
+                <a:latin typeface="Aptos" pitchFamily="34" charset="0"/>
+                <a:ea typeface="Aptos" pitchFamily="34" charset="-122"/>
+                <a:cs typeface="Aptos" pitchFamily="34" charset="-120"/>
+              </a:rPr>
+              <a:t>• Create a decision-rights matrix for AI use case approval, risk acceptance, monitoring,.</a:t>
             </a:r>
             <a:endParaRPr lang="en-US" sz="2100" dirty="0"/>
           </a:p>
@@ -13271,17 +13477,17 @@
         </p:nvSpPr>
         <p:spPr>
           <a:xfrm>
-            <a:off x="7799832" y="1828800"/>
-            <a:ext cx="3145536" cy="685800"/>
-          </a:xfrm>
-          <a:prstGeom prst="rect">
-            <a:avLst/>
-          </a:prstGeom>
-          <a:noFill/>
-          <a:ln/>
-        </p:spPr>
-        <p:txBody>
-          <a:bodyPr wrap="square" lIns="0" tIns="0" rIns="0" bIns="0" rtlCol="0" anchor="t">
+            <a:off x="7799832" y="1801368"/>
+            <a:ext cx="3145536" cy="758952"/>
+          </a:xfrm>
+          <a:prstGeom prst="rect">
+            <a:avLst/>
+          </a:prstGeom>
+          <a:noFill/>
+          <a:ln/>
+        </p:spPr>
+        <p:txBody>
+          <a:bodyPr wrap="square" lIns="254" tIns="254" rIns="254" bIns="254" rtlCol="0" anchor="t">
             <a:normAutofit/>
           </a:bodyPr>
           <a:lstStyle/>
@@ -13290,7 +13496,7 @@
               <a:buNone/>
             </a:pPr>
             <a:r>
-              <a:rPr lang="en-US" sz="1550" dirty="0">
+              <a:rPr lang="en-US" sz="1320" dirty="0">
                 <a:solidFill>
                   <a:srgbClr val="17364A"/>
                 </a:solidFill>
@@ -13300,7 +13506,7 @@
               </a:rPr>
               <a:t>Explain why AI accountability must be assigned to people and roles rather than to tools or vendors.</a:t>
             </a:r>
-            <a:endParaRPr lang="en-US" sz="1550" dirty="0"/>
+            <a:endParaRPr lang="en-US" sz="1320" dirty="0"/>
           </a:p>
         </p:txBody>
       </p:sp>
@@ -13388,13 +13594,16 @@
           <a:ln/>
         </p:spPr>
         <p:txBody>
-          <a:bodyPr wrap="square" lIns="254" tIns="254" rIns="254" bIns="254" rtlCol="0" anchor="t">
+          <a:bodyPr wrap="square" lIns="508" tIns="508" rIns="508" bIns="508" rtlCol="0" anchor="t">
             <a:normAutofit/>
           </a:bodyPr>
           <a:lstStyle/>
           <a:p>
-            <a:r>
-              <a:rPr lang="en-US" sz="1380" dirty="0">
+            <a:pPr indent="0" marL="0">
+              <a:buNone/>
+            </a:pPr>
+            <a:r>
+              <a:rPr lang="en-US" sz="1220" dirty="0">
                 <a:solidFill>
                   <a:srgbClr val="17364A"/>
                 </a:solidFill>
@@ -13402,13 +13611,16 @@
                 <a:ea typeface="Aptos" pitchFamily="34" charset="-122"/>
                 <a:cs typeface="Aptos" pitchFamily="34" charset="-120"/>
               </a:rPr>
-              <a:t>Identify executive, program, technical, privacy, legal, security, and governance.</a:t>
-            </a:r>
-            <a:endParaRPr lang="en-US" sz="1380" dirty="0"/>
-          </a:p>
-          <a:p>
-            <a:r>
-              <a:rPr lang="en-US" sz="1380" dirty="0">
+              <a:t>Identify executive, program, technical, privacy, legal, security,.</a:t>
+            </a:r>
+            <a:endParaRPr lang="en-US" sz="1220" dirty="0"/>
+          </a:p>
+          <a:p>
+            <a:pPr indent="0" marL="0">
+              <a:buNone/>
+            </a:pPr>
+            <a:r>
+              <a:rPr lang="en-US" sz="1220" dirty="0">
                 <a:solidFill>
                   <a:srgbClr val="17364A"/>
                 </a:solidFill>
@@ -13416,13 +13628,16 @@
                 <a:ea typeface="Aptos" pitchFamily="34" charset="-122"/>
                 <a:cs typeface="Aptos" pitchFamily="34" charset="-120"/>
               </a:rPr>
-              <a:t>Create a decision-rights matrix for AI use case approval, risk acceptance, monitoring,.</a:t>
-            </a:r>
-            <a:endParaRPr lang="en-US" sz="1380" dirty="0"/>
-          </a:p>
-          <a:p>
-            <a:r>
-              <a:rPr lang="en-US" sz="1380" dirty="0">
+              <a:t>Create a decision-rights matrix for AI use case approval, risk.</a:t>
+            </a:r>
+            <a:endParaRPr lang="en-US" sz="1220" dirty="0"/>
+          </a:p>
+          <a:p>
+            <a:pPr indent="0" marL="0">
+              <a:buNone/>
+            </a:pPr>
+            <a:r>
+              <a:rPr lang="en-US" sz="1220" dirty="0">
                 <a:solidFill>
                   <a:srgbClr val="17364A"/>
                 </a:solidFill>
@@ -13430,9 +13645,9 @@
                 <a:ea typeface="Aptos" pitchFamily="34" charset="-122"/>
                 <a:cs typeface="Aptos" pitchFamily="34" charset="-120"/>
               </a:rPr>
-              <a:t>Distinguish between consultative input, approval authority, and operational ownership.</a:t>
-            </a:r>
-            <a:endParaRPr lang="en-US" sz="1380" dirty="0"/>
+              <a:t>Distinguish between consultative input, approval authority, and.</a:t>
+            </a:r>
+            <a:endParaRPr lang="en-US" sz="1220" dirty="0"/>
           </a:p>
         </p:txBody>
       </p:sp>
@@ -13510,17 +13725,17 @@
         </p:nvSpPr>
         <p:spPr>
           <a:xfrm>
-            <a:off x="7799832" y="5001768"/>
-            <a:ext cx="3145536" cy="502920"/>
-          </a:xfrm>
-          <a:prstGeom prst="rect">
-            <a:avLst/>
-          </a:prstGeom>
-          <a:noFill/>
-          <a:ln/>
-        </p:spPr>
-        <p:txBody>
-          <a:bodyPr wrap="square" lIns="0" tIns="0" rIns="0" bIns="0" rtlCol="0" anchor="t">
+            <a:off x="7799832" y="4974336"/>
+            <a:ext cx="3145536" cy="576072"/>
+          </a:xfrm>
+          <a:prstGeom prst="rect">
+            <a:avLst/>
+          </a:prstGeom>
+          <a:noFill/>
+          <a:ln/>
+        </p:spPr>
+        <p:txBody>
+          <a:bodyPr wrap="square" lIns="254" tIns="254" rIns="254" bIns="254" rtlCol="0" anchor="t">
             <a:normAutofit/>
           </a:bodyPr>
           <a:lstStyle/>
@@ -13529,7 +13744,7 @@
               <a:buNone/>
             </a:pPr>
             <a:r>
-              <a:rPr lang="en-US" sz="1550" dirty="0">
+              <a:rPr lang="en-US" sz="1320" dirty="0">
                 <a:solidFill>
                   <a:srgbClr val="17364A"/>
                 </a:solidFill>
@@ -13537,9 +13752,9 @@
                 <a:ea typeface="Aptos" pitchFamily="34" charset="-122"/>
                 <a:cs typeface="Aptos" pitchFamily="34" charset="-120"/>
               </a:rPr>
-              <a:t>Use the assignment to test whether you can explain the concept, apply it to a realistic public health situation, and identify what would need review before the work moves forward.</a:t>
-            </a:r>
-            <a:endParaRPr lang="en-US" sz="1550" dirty="0"/>
+              <a:t>Use the assignment to test whether you can explain the concept, apply it to a realistic public health situation, and.</a:t>
+            </a:r>
+            <a:endParaRPr lang="en-US" sz="1320" dirty="0"/>
           </a:p>
         </p:txBody>
       </p:sp>
@@ -13840,49 +14055,58 @@
           <a:ln/>
         </p:spPr>
         <p:txBody>
-          <a:bodyPr wrap="square" lIns="635" tIns="635" rIns="635" bIns="635" rtlCol="0" anchor="t">
+          <a:bodyPr wrap="square" lIns="1016" tIns="1016" rIns="1016" bIns="1016" rtlCol="0" anchor="t">
             <a:normAutofit/>
           </a:bodyPr>
           <a:lstStyle/>
           <a:p>
+            <a:pPr indent="0" marL="0">
+              <a:buNone/>
+            </a:pPr>
             <a:r>
               <a:rPr lang="en-US" sz="2100" dirty="0">
                 <a:solidFill>
-                  <a:srgbClr val="17364A"/>
-                </a:solidFill>
-                <a:latin typeface="Aptos" pitchFamily="34" charset="0"/>
-                <a:ea typeface="Aptos" pitchFamily="34" charset="-122"/>
-                <a:cs typeface="Aptos" pitchFamily="34" charset="-120"/>
-              </a:rPr>
-              <a:t>AI governance can only work when decision rights are clear.</a:t>
+                  <a:srgbClr val="003A63"/>
+                </a:solidFill>
+                <a:latin typeface="Aptos" pitchFamily="34" charset="0"/>
+                <a:ea typeface="Aptos" pitchFamily="34" charset="-122"/>
+                <a:cs typeface="Aptos" pitchFamily="34" charset="-120"/>
+              </a:rPr>
+              <a:t>• AI governance can only work when decision rights are clear.</a:t>
             </a:r>
             <a:endParaRPr lang="en-US" sz="2100" dirty="0"/>
           </a:p>
           <a:p>
+            <a:pPr indent="0" marL="0">
+              <a:buNone/>
+            </a:pPr>
             <a:r>
               <a:rPr lang="en-US" sz="2100" dirty="0">
                 <a:solidFill>
-                  <a:srgbClr val="17364A"/>
-                </a:solidFill>
-                <a:latin typeface="Aptos" pitchFamily="34" charset="0"/>
-                <a:ea typeface="Aptos" pitchFamily="34" charset="-122"/>
-                <a:cs typeface="Aptos" pitchFamily="34" charset="-120"/>
-              </a:rPr>
-              <a:t>Leaders need to know who can approve a pilot, who can accept residual risk, who can authorize use of.</a:t>
+                  <a:srgbClr val="003A63"/>
+                </a:solidFill>
+                <a:latin typeface="Aptos" pitchFamily="34" charset="0"/>
+                <a:ea typeface="Aptos" pitchFamily="34" charset="-122"/>
+                <a:cs typeface="Aptos" pitchFamily="34" charset="-120"/>
+              </a:rPr>
+              <a:t>• Leaders need to know who can approve a pilot, who can accept residual risk, who can authorize.</a:t>
             </a:r>
             <a:endParaRPr lang="en-US" sz="2100" dirty="0"/>
           </a:p>
           <a:p>
+            <a:pPr indent="0" marL="0">
+              <a:buNone/>
+            </a:pPr>
             <a:r>
               <a:rPr lang="en-US" sz="2100" dirty="0">
                 <a:solidFill>
-                  <a:srgbClr val="17364A"/>
-                </a:solidFill>
-                <a:latin typeface="Aptos" pitchFamily="34" charset="0"/>
-                <a:ea typeface="Aptos" pitchFamily="34" charset="-122"/>
-                <a:cs typeface="Aptos" pitchFamily="34" charset="-120"/>
-              </a:rPr>
-              <a:t>Ambiguous accountability is especially risky in public health because AI outputs may influence.</a:t>
+                  <a:srgbClr val="003A63"/>
+                </a:solidFill>
+                <a:latin typeface="Aptos" pitchFamily="34" charset="0"/>
+                <a:ea typeface="Aptos" pitchFamily="34" charset="-122"/>
+                <a:cs typeface="Aptos" pitchFamily="34" charset="-120"/>
+              </a:rPr>
+              <a:t>• Ambiguous accountability is especially risky in public health because AI outputs may influence.</a:t>
             </a:r>
             <a:endParaRPr lang="en-US" sz="2100" dirty="0"/>
           </a:p>
@@ -13962,17 +14186,17 @@
         </p:nvSpPr>
         <p:spPr>
           <a:xfrm>
-            <a:off x="7799832" y="1828800"/>
-            <a:ext cx="3145536" cy="685800"/>
-          </a:xfrm>
-          <a:prstGeom prst="rect">
-            <a:avLst/>
-          </a:prstGeom>
-          <a:noFill/>
-          <a:ln/>
-        </p:spPr>
-        <p:txBody>
-          <a:bodyPr wrap="square" lIns="0" tIns="0" rIns="0" bIns="0" rtlCol="0" anchor="t">
+            <a:off x="7799832" y="1801368"/>
+            <a:ext cx="3145536" cy="758952"/>
+          </a:xfrm>
+          <a:prstGeom prst="rect">
+            <a:avLst/>
+          </a:prstGeom>
+          <a:noFill/>
+          <a:ln/>
+        </p:spPr>
+        <p:txBody>
+          <a:bodyPr wrap="square" lIns="254" tIns="254" rIns="254" bIns="254" rtlCol="0" anchor="t">
             <a:normAutofit/>
           </a:bodyPr>
           <a:lstStyle/>
@@ -13981,7 +14205,7 @@
               <a:buNone/>
             </a:pPr>
             <a:r>
-              <a:rPr lang="en-US" sz="1550" dirty="0">
+              <a:rPr lang="en-US" sz="1320" dirty="0">
                 <a:solidFill>
                   <a:srgbClr val="17364A"/>
                 </a:solidFill>
@@ -13991,7 +14215,7 @@
               </a:rPr>
               <a:t>AI governance can only work when decision rights are clear.</a:t>
             </a:r>
-            <a:endParaRPr lang="en-US" sz="1550" dirty="0"/>
+            <a:endParaRPr lang="en-US" sz="1320" dirty="0"/>
           </a:p>
         </p:txBody>
       </p:sp>
@@ -14079,13 +14303,16 @@
           <a:ln/>
         </p:spPr>
         <p:txBody>
-          <a:bodyPr wrap="square" lIns="254" tIns="254" rIns="254" bIns="254" rtlCol="0" anchor="t">
+          <a:bodyPr wrap="square" lIns="508" tIns="508" rIns="508" bIns="508" rtlCol="0" anchor="t">
             <a:normAutofit/>
           </a:bodyPr>
           <a:lstStyle/>
           <a:p>
-            <a:r>
-              <a:rPr lang="en-US" sz="1380" dirty="0">
+            <a:pPr indent="0" marL="0">
+              <a:buNone/>
+            </a:pPr>
+            <a:r>
+              <a:rPr lang="en-US" sz="1220" dirty="0">
                 <a:solidFill>
                   <a:srgbClr val="17364A"/>
                 </a:solidFill>
@@ -14093,13 +14320,16 @@
                 <a:ea typeface="Aptos" pitchFamily="34" charset="-122"/>
                 <a:cs typeface="Aptos" pitchFamily="34" charset="-120"/>
               </a:rPr>
-              <a:t>Leaders need to know who can approve a pilot, who can accept residual risk, who can.</a:t>
-            </a:r>
-            <a:endParaRPr lang="en-US" sz="1380" dirty="0"/>
-          </a:p>
-          <a:p>
-            <a:r>
-              <a:rPr lang="en-US" sz="1380" dirty="0">
+              <a:t>Leaders need to know who can approve a pilot, who can accept.</a:t>
+            </a:r>
+            <a:endParaRPr lang="en-US" sz="1220" dirty="0"/>
+          </a:p>
+          <a:p>
+            <a:pPr indent="0" marL="0">
+              <a:buNone/>
+            </a:pPr>
+            <a:r>
+              <a:rPr lang="en-US" sz="1220" dirty="0">
                 <a:solidFill>
                   <a:srgbClr val="17364A"/>
                 </a:solidFill>
@@ -14107,13 +14337,16 @@
                 <a:ea typeface="Aptos" pitchFamily="34" charset="-122"/>
                 <a:cs typeface="Aptos" pitchFamily="34" charset="-120"/>
               </a:rPr>
-              <a:t>Ambiguous accountability is especially risky in public health because AI outputs may.</a:t>
-            </a:r>
-            <a:endParaRPr lang="en-US" sz="1380" dirty="0"/>
-          </a:p>
-          <a:p>
-            <a:r>
-              <a:rPr lang="en-US" sz="1380" dirty="0">
+              <a:t>Ambiguous accountability is especially risky in public health.</a:t>
+            </a:r>
+            <a:endParaRPr lang="en-US" sz="1220" dirty="0"/>
+          </a:p>
+          <a:p>
+            <a:pPr indent="0" marL="0">
+              <a:buNone/>
+            </a:pPr>
+            <a:r>
+              <a:rPr lang="en-US" sz="1220" dirty="0">
                 <a:solidFill>
                   <a:srgbClr val="17364A"/>
                 </a:solidFill>
@@ -14121,9 +14354,9 @@
                 <a:ea typeface="Aptos" pitchFamily="34" charset="-122"/>
                 <a:cs typeface="Aptos" pitchFamily="34" charset="-120"/>
               </a:rPr>
-              <a:t>This module focuses on executive decision rights and accountability structures.</a:t>
-            </a:r>
-            <a:endParaRPr lang="en-US" sz="1380" dirty="0"/>
+              <a:t>This module focuses on executive decision rights and.</a:t>
+            </a:r>
+            <a:endParaRPr lang="en-US" sz="1220" dirty="0"/>
           </a:p>
         </p:txBody>
       </p:sp>
@@ -14201,17 +14434,17 @@
         </p:nvSpPr>
         <p:spPr>
           <a:xfrm>
-            <a:off x="7799832" y="5001768"/>
-            <a:ext cx="3145536" cy="502920"/>
-          </a:xfrm>
-          <a:prstGeom prst="rect">
-            <a:avLst/>
-          </a:prstGeom>
-          <a:noFill/>
-          <a:ln/>
-        </p:spPr>
-        <p:txBody>
-          <a:bodyPr wrap="square" lIns="0" tIns="0" rIns="0" bIns="0" rtlCol="0" anchor="t">
+            <a:off x="7799832" y="4974336"/>
+            <a:ext cx="3145536" cy="576072"/>
+          </a:xfrm>
+          <a:prstGeom prst="rect">
+            <a:avLst/>
+          </a:prstGeom>
+          <a:noFill/>
+          <a:ln/>
+        </p:spPr>
+        <p:txBody>
+          <a:bodyPr wrap="square" lIns="254" tIns="254" rIns="254" bIns="254" rtlCol="0" anchor="t">
             <a:normAutofit/>
           </a:bodyPr>
           <a:lstStyle/>
@@ -14220,7 +14453,7 @@
               <a:buNone/>
             </a:pPr>
             <a:r>
-              <a:rPr lang="en-US" sz="1550" dirty="0">
+              <a:rPr lang="en-US" sz="1320" dirty="0">
                 <a:solidFill>
                   <a:srgbClr val="17364A"/>
                 </a:solidFill>
@@ -14228,9 +14461,9 @@
                 <a:ea typeface="Aptos" pitchFamily="34" charset="-122"/>
                 <a:cs typeface="Aptos" pitchFamily="34" charset="-120"/>
               </a:rPr>
-              <a:t>Connect the concept to public health purpose, responsible use, required safeguards, documentation, and the next action a department should take.</a:t>
-            </a:r>
-            <a:endParaRPr lang="en-US" sz="1550" dirty="0"/>
+              <a:t>Connect the concept to public health purpose, responsible use, required safeguards, documentation, and the next action a.</a:t>
+            </a:r>
+            <a:endParaRPr lang="en-US" sz="1320" dirty="0"/>
           </a:p>
         </p:txBody>
       </p:sp>
@@ -14531,49 +14764,58 @@
           <a:ln/>
         </p:spPr>
         <p:txBody>
-          <a:bodyPr wrap="square" lIns="635" tIns="635" rIns="635" bIns="635" rtlCol="0" anchor="t">
+          <a:bodyPr wrap="square" lIns="1016" tIns="1016" rIns="1016" bIns="1016" rtlCol="0" anchor="t">
             <a:normAutofit/>
           </a:bodyPr>
           <a:lstStyle/>
           <a:p>
+            <a:pPr indent="0" marL="0">
+              <a:buNone/>
+            </a:pPr>
             <a:r>
               <a:rPr lang="en-US" sz="2100" dirty="0">
                 <a:solidFill>
-                  <a:srgbClr val="17364A"/>
-                </a:solidFill>
-                <a:latin typeface="Aptos" pitchFamily="34" charset="0"/>
-                <a:ea typeface="Aptos" pitchFamily="34" charset="-122"/>
-                <a:cs typeface="Aptos" pitchFamily="34" charset="-120"/>
-              </a:rPr>
-              <a:t>This module provides national-level training guidance for public health agencies and partners.</a:t>
+                  <a:srgbClr val="003A63"/>
+                </a:solidFill>
+                <a:latin typeface="Aptos" pitchFamily="34" charset="0"/>
+                <a:ea typeface="Aptos" pitchFamily="34" charset="-122"/>
+                <a:cs typeface="Aptos" pitchFamily="34" charset="-120"/>
+              </a:rPr>
+              <a:t>• This module provides national-level training guidance for public health agencies and partners.</a:t>
             </a:r>
             <a:endParaRPr lang="en-US" sz="2100" dirty="0"/>
           </a:p>
           <a:p>
+            <a:pPr indent="0" marL="0">
+              <a:buNone/>
+            </a:pPr>
             <a:r>
               <a:rPr lang="en-US" sz="2100" dirty="0">
                 <a:solidFill>
-                  <a:srgbClr val="17364A"/>
-                </a:solidFill>
-                <a:latin typeface="Aptos" pitchFamily="34" charset="0"/>
-                <a:ea typeface="Aptos" pitchFamily="34" charset="-122"/>
-                <a:cs typeface="Aptos" pitchFamily="34" charset="-120"/>
-              </a:rPr>
-              <a:t>It is not legal advice and does not replace review by agency legal counsel, privacy officers,.</a:t>
+                  <a:srgbClr val="003A63"/>
+                </a:solidFill>
+                <a:latin typeface="Aptos" pitchFamily="34" charset="0"/>
+                <a:ea typeface="Aptos" pitchFamily="34" charset="-122"/>
+                <a:cs typeface="Aptos" pitchFamily="34" charset="-120"/>
+              </a:rPr>
+              <a:t>• It is not legal advice and does not replace review by agency legal counsel, privacy officers,.</a:t>
             </a:r>
             <a:endParaRPr lang="en-US" sz="2100" dirty="0"/>
           </a:p>
           <a:p>
+            <a:pPr indent="0" marL="0">
+              <a:buNone/>
+            </a:pPr>
             <a:r>
               <a:rPr lang="en-US" sz="2100" dirty="0">
                 <a:solidFill>
-                  <a:srgbClr val="17364A"/>
-                </a:solidFill>
-                <a:latin typeface="Aptos" pitchFamily="34" charset="0"/>
-                <a:ea typeface="Aptos" pitchFamily="34" charset="-122"/>
-                <a:cs typeface="Aptos" pitchFamily="34" charset="-120"/>
-              </a:rPr>
-              <a:t>Requirements may vary by state, locality, territory, Tribe, agency, funding source, data-sharing.</a:t>
+                  <a:srgbClr val="003A63"/>
+                </a:solidFill>
+                <a:latin typeface="Aptos" pitchFamily="34" charset="0"/>
+                <a:ea typeface="Aptos" pitchFamily="34" charset="-122"/>
+                <a:cs typeface="Aptos" pitchFamily="34" charset="-120"/>
+              </a:rPr>
+              <a:t>• Requirements may vary by state, locality, territory, Tribe, agency, funding source,.</a:t>
             </a:r>
             <a:endParaRPr lang="en-US" sz="2100" dirty="0"/>
           </a:p>
@@ -14653,17 +14895,17 @@
         </p:nvSpPr>
         <p:spPr>
           <a:xfrm>
-            <a:off x="7799832" y="1828800"/>
-            <a:ext cx="3145536" cy="685800"/>
-          </a:xfrm>
-          <a:prstGeom prst="rect">
-            <a:avLst/>
-          </a:prstGeom>
-          <a:noFill/>
-          <a:ln/>
-        </p:spPr>
-        <p:txBody>
-          <a:bodyPr wrap="square" lIns="0" tIns="0" rIns="0" bIns="0" rtlCol="0" anchor="t">
+            <a:off x="7799832" y="1801368"/>
+            <a:ext cx="3145536" cy="758952"/>
+          </a:xfrm>
+          <a:prstGeom prst="rect">
+            <a:avLst/>
+          </a:prstGeom>
+          <a:noFill/>
+          <a:ln/>
+        </p:spPr>
+        <p:txBody>
+          <a:bodyPr wrap="square" lIns="254" tIns="254" rIns="254" bIns="254" rtlCol="0" anchor="t">
             <a:normAutofit/>
           </a:bodyPr>
           <a:lstStyle/>
@@ -14672,7 +14914,7 @@
               <a:buNone/>
             </a:pPr>
             <a:r>
-              <a:rPr lang="en-US" sz="1550" dirty="0">
+              <a:rPr lang="en-US" sz="1320" dirty="0">
                 <a:solidFill>
                   <a:srgbClr val="17364A"/>
                 </a:solidFill>
@@ -14682,7 +14924,7 @@
               </a:rPr>
               <a:t>This module provides national-level training guidance for public health agencies and partners.</a:t>
             </a:r>
-            <a:endParaRPr lang="en-US" sz="1550" dirty="0"/>
+            <a:endParaRPr lang="en-US" sz="1320" dirty="0"/>
           </a:p>
         </p:txBody>
       </p:sp>
@@ -14770,13 +15012,16 @@
           <a:ln/>
         </p:spPr>
         <p:txBody>
-          <a:bodyPr wrap="square" lIns="254" tIns="254" rIns="254" bIns="254" rtlCol="0" anchor="t">
+          <a:bodyPr wrap="square" lIns="508" tIns="508" rIns="508" bIns="508" rtlCol="0" anchor="t">
             <a:normAutofit/>
           </a:bodyPr>
           <a:lstStyle/>
           <a:p>
-            <a:r>
-              <a:rPr lang="en-US" sz="1380" dirty="0">
+            <a:pPr indent="0" marL="0">
+              <a:buNone/>
+            </a:pPr>
+            <a:r>
+              <a:rPr lang="en-US" sz="1220" dirty="0">
                 <a:solidFill>
                   <a:srgbClr val="17364A"/>
                 </a:solidFill>
@@ -14784,13 +15029,16 @@
                 <a:ea typeface="Aptos" pitchFamily="34" charset="-122"/>
                 <a:cs typeface="Aptos" pitchFamily="34" charset="-120"/>
               </a:rPr>
-              <a:t>It is not legal advice and does not replace review by agency legal counsel, privacy.</a:t>
-            </a:r>
-            <a:endParaRPr lang="en-US" sz="1380" dirty="0"/>
-          </a:p>
-          <a:p>
-            <a:r>
-              <a:rPr lang="en-US" sz="1380" dirty="0">
+              <a:t>It is not legal advice and does not replace review by agency legal.</a:t>
+            </a:r>
+            <a:endParaRPr lang="en-US" sz="1220" dirty="0"/>
+          </a:p>
+          <a:p>
+            <a:pPr indent="0" marL="0">
+              <a:buNone/>
+            </a:pPr>
+            <a:r>
+              <a:rPr lang="en-US" sz="1220" dirty="0">
                 <a:solidFill>
                   <a:srgbClr val="17364A"/>
                 </a:solidFill>
@@ -14798,13 +15046,16 @@
                 <a:ea typeface="Aptos" pitchFamily="34" charset="-122"/>
                 <a:cs typeface="Aptos" pitchFamily="34" charset="-120"/>
               </a:rPr>
-              <a:t>Requirements may vary by state, locality, territory, Tribe, agency, funding source,.</a:t>
-            </a:r>
-            <a:endParaRPr lang="en-US" sz="1380" dirty="0"/>
-          </a:p>
-          <a:p>
-            <a:r>
-              <a:rPr lang="en-US" sz="1380" dirty="0">
+              <a:t>Requirements may vary by state, locality, territory, Tribe,.</a:t>
+            </a:r>
+            <a:endParaRPr lang="en-US" sz="1220" dirty="0"/>
+          </a:p>
+          <a:p>
+            <a:pPr indent="0" marL="0">
+              <a:buNone/>
+            </a:pPr>
+            <a:r>
+              <a:rPr lang="en-US" sz="1220" dirty="0">
                 <a:solidFill>
                   <a:srgbClr val="17364A"/>
                 </a:solidFill>
@@ -14812,9 +15063,9 @@
                 <a:ea typeface="Aptos" pitchFamily="34" charset="-122"/>
                 <a:cs typeface="Aptos" pitchFamily="34" charset="-120"/>
               </a:rPr>
-              <a:t>Learners should use this module to identify the issues that require review and should.</a:t>
-            </a:r>
-            <a:endParaRPr lang="en-US" sz="1380" dirty="0"/>
+              <a:t>Learners should use this module to identify the issues that.</a:t>
+            </a:r>
+            <a:endParaRPr lang="en-US" sz="1220" dirty="0"/>
           </a:p>
         </p:txBody>
       </p:sp>
@@ -14892,17 +15143,17 @@
         </p:nvSpPr>
         <p:spPr>
           <a:xfrm>
-            <a:off x="7799832" y="5001768"/>
-            <a:ext cx="3145536" cy="502920"/>
-          </a:xfrm>
-          <a:prstGeom prst="rect">
-            <a:avLst/>
-          </a:prstGeom>
-          <a:noFill/>
-          <a:ln/>
-        </p:spPr>
-        <p:txBody>
-          <a:bodyPr wrap="square" lIns="0" tIns="0" rIns="0" bIns="0" rtlCol="0" anchor="t">
+            <a:off x="7799832" y="4974336"/>
+            <a:ext cx="3145536" cy="576072"/>
+          </a:xfrm>
+          <a:prstGeom prst="rect">
+            <a:avLst/>
+          </a:prstGeom>
+          <a:noFill/>
+          <a:ln/>
+        </p:spPr>
+        <p:txBody>
+          <a:bodyPr wrap="square" lIns="254" tIns="254" rIns="254" bIns="254" rtlCol="0" anchor="t">
             <a:normAutofit/>
           </a:bodyPr>
           <a:lstStyle/>
@@ -14911,7 +15162,7 @@
               <a:buNone/>
             </a:pPr>
             <a:r>
-              <a:rPr lang="en-US" sz="1550" dirty="0">
+              <a:rPr lang="en-US" sz="1320" dirty="0">
                 <a:solidFill>
                   <a:srgbClr val="17364A"/>
                 </a:solidFill>
@@ -14919,9 +15170,9 @@
                 <a:ea typeface="Aptos" pitchFamily="34" charset="-122"/>
                 <a:cs typeface="Aptos" pitchFamily="34" charset="-120"/>
               </a:rPr>
-              <a:t>Translate this concept into clear decision rights, review steps, documentation expectations, and escalation paths before an AI-supported workflow is approved.</a:t>
-            </a:r>
-            <a:endParaRPr lang="en-US" sz="1550" dirty="0"/>
+              <a:t>Translate this concept into clear decision rights, review steps, documentation expectations, and escalation paths before.</a:t>
+            </a:r>
+            <a:endParaRPr lang="en-US" sz="1320" dirty="0"/>
           </a:p>
         </p:txBody>
       </p:sp>
@@ -15222,49 +15473,58 @@
           <a:ln/>
         </p:spPr>
         <p:txBody>
-          <a:bodyPr wrap="square" lIns="635" tIns="635" rIns="635" bIns="635" rtlCol="0" anchor="t">
+          <a:bodyPr wrap="square" lIns="1016" tIns="1016" rIns="1016" bIns="1016" rtlCol="0" anchor="t">
             <a:normAutofit/>
           </a:bodyPr>
           <a:lstStyle/>
           <a:p>
+            <a:pPr indent="0" marL="0">
+              <a:buNone/>
+            </a:pPr>
             <a:r>
               <a:rPr lang="en-US" sz="2100" dirty="0">
                 <a:solidFill>
-                  <a:srgbClr val="17364A"/>
-                </a:solidFill>
-                <a:latin typeface="Aptos" pitchFamily="34" charset="0"/>
-                <a:ea typeface="Aptos" pitchFamily="34" charset="-122"/>
-                <a:cs typeface="Aptos" pitchFamily="34" charset="-120"/>
-              </a:rPr>
-              <a:t>AI systems can distribute responsibility across many actors.</a:t>
+                  <a:srgbClr val="003A63"/>
+                </a:solidFill>
+                <a:latin typeface="Aptos" pitchFamily="34" charset="0"/>
+                <a:ea typeface="Aptos" pitchFamily="34" charset="-122"/>
+                <a:cs typeface="Aptos" pitchFamily="34" charset="-120"/>
+              </a:rPr>
+              <a:t>• AI systems can distribute responsibility across many actors.</a:t>
             </a:r>
             <a:endParaRPr lang="en-US" sz="2100" dirty="0"/>
           </a:p>
           <a:p>
+            <a:pPr indent="0" marL="0">
+              <a:buNone/>
+            </a:pPr>
             <a:r>
               <a:rPr lang="en-US" sz="2100" dirty="0">
                 <a:solidFill>
-                  <a:srgbClr val="17364A"/>
-                </a:solidFill>
-                <a:latin typeface="Aptos" pitchFamily="34" charset="0"/>
-                <a:ea typeface="Aptos" pitchFamily="34" charset="-122"/>
-                <a:cs typeface="Aptos" pitchFamily="34" charset="-120"/>
-              </a:rPr>
-              <a:t>A vendor may provide the model, IT may manage access, a program may define the workflow, an.</a:t>
+                  <a:srgbClr val="003A63"/>
+                </a:solidFill>
+                <a:latin typeface="Aptos" pitchFamily="34" charset="0"/>
+                <a:ea typeface="Aptos" pitchFamily="34" charset="-122"/>
+                <a:cs typeface="Aptos" pitchFamily="34" charset="-120"/>
+              </a:rPr>
+              <a:t>• A vendor may provide the model, IT may manage access, a program may define the workflow, an.</a:t>
             </a:r>
             <a:endParaRPr lang="en-US" sz="2100" dirty="0"/>
           </a:p>
           <a:p>
+            <a:pPr indent="0" marL="0">
+              <a:buNone/>
+            </a:pPr>
             <a:r>
               <a:rPr lang="en-US" sz="2100" dirty="0">
                 <a:solidFill>
-                  <a:srgbClr val="17364A"/>
-                </a:solidFill>
-                <a:latin typeface="Aptos" pitchFamily="34" charset="0"/>
-                <a:ea typeface="Aptos" pitchFamily="34" charset="-122"/>
-                <a:cs typeface="Aptos" pitchFamily="34" charset="-120"/>
-              </a:rPr>
-              <a:t>Without a formal accountability model, each actor may assume that another party is responsible for.</a:t>
+                  <a:srgbClr val="003A63"/>
+                </a:solidFill>
+                <a:latin typeface="Aptos" pitchFamily="34" charset="0"/>
+                <a:ea typeface="Aptos" pitchFamily="34" charset="-122"/>
+                <a:cs typeface="Aptos" pitchFamily="34" charset="-120"/>
+              </a:rPr>
+              <a:t>• Without a formal accountability model, each actor may assume that another party is responsible.</a:t>
             </a:r>
             <a:endParaRPr lang="en-US" sz="2100" dirty="0"/>
           </a:p>
@@ -15344,17 +15604,17 @@
         </p:nvSpPr>
         <p:spPr>
           <a:xfrm>
-            <a:off x="7799832" y="1828800"/>
-            <a:ext cx="3145536" cy="685800"/>
-          </a:xfrm>
-          <a:prstGeom prst="rect">
-            <a:avLst/>
-          </a:prstGeom>
-          <a:noFill/>
-          <a:ln/>
-        </p:spPr>
-        <p:txBody>
-          <a:bodyPr wrap="square" lIns="0" tIns="0" rIns="0" bIns="0" rtlCol="0" anchor="t">
+            <a:off x="7799832" y="1801368"/>
+            <a:ext cx="3145536" cy="758952"/>
+          </a:xfrm>
+          <a:prstGeom prst="rect">
+            <a:avLst/>
+          </a:prstGeom>
+          <a:noFill/>
+          <a:ln/>
+        </p:spPr>
+        <p:txBody>
+          <a:bodyPr wrap="square" lIns="254" tIns="254" rIns="254" bIns="254" rtlCol="0" anchor="t">
             <a:normAutofit/>
           </a:bodyPr>
           <a:lstStyle/>
@@ -15363,7 +15623,7 @@
               <a:buNone/>
             </a:pPr>
             <a:r>
-              <a:rPr lang="en-US" sz="1550" dirty="0">
+              <a:rPr lang="en-US" sz="1320" dirty="0">
                 <a:solidFill>
                   <a:srgbClr val="17364A"/>
                 </a:solidFill>
@@ -15373,7 +15633,7 @@
               </a:rPr>
               <a:t>AI systems can distribute responsibility across many actors.</a:t>
             </a:r>
-            <a:endParaRPr lang="en-US" sz="1550" dirty="0"/>
+            <a:endParaRPr lang="en-US" sz="1320" dirty="0"/>
           </a:p>
         </p:txBody>
       </p:sp>
@@ -15461,13 +15721,16 @@
           <a:ln/>
         </p:spPr>
         <p:txBody>
-          <a:bodyPr wrap="square" lIns="254" tIns="254" rIns="254" bIns="254" rtlCol="0" anchor="t">
+          <a:bodyPr wrap="square" lIns="508" tIns="508" rIns="508" bIns="508" rtlCol="0" anchor="t">
             <a:normAutofit/>
           </a:bodyPr>
           <a:lstStyle/>
           <a:p>
-            <a:r>
-              <a:rPr lang="en-US" sz="1380" dirty="0">
+            <a:pPr indent="0" marL="0">
+              <a:buNone/>
+            </a:pPr>
+            <a:r>
+              <a:rPr lang="en-US" sz="1220" dirty="0">
                 <a:solidFill>
                   <a:srgbClr val="17364A"/>
                 </a:solidFill>
@@ -15475,13 +15738,16 @@
                 <a:ea typeface="Aptos" pitchFamily="34" charset="-122"/>
                 <a:cs typeface="Aptos" pitchFamily="34" charset="-120"/>
               </a:rPr>
-              <a:t>A vendor may provide the model, IT may manage access, a program may define the workflow,.</a:t>
-            </a:r>
-            <a:endParaRPr lang="en-US" sz="1380" dirty="0"/>
-          </a:p>
-          <a:p>
-            <a:r>
-              <a:rPr lang="en-US" sz="1380" dirty="0">
+              <a:t>A vendor may provide the model, IT may manage access, a program.</a:t>
+            </a:r>
+            <a:endParaRPr lang="en-US" sz="1220" dirty="0"/>
+          </a:p>
+          <a:p>
+            <a:pPr indent="0" marL="0">
+              <a:buNone/>
+            </a:pPr>
+            <a:r>
+              <a:rPr lang="en-US" sz="1220" dirty="0">
                 <a:solidFill>
                   <a:srgbClr val="17364A"/>
                 </a:solidFill>
@@ -15489,13 +15755,16 @@
                 <a:ea typeface="Aptos" pitchFamily="34" charset="-122"/>
                 <a:cs typeface="Aptos" pitchFamily="34" charset="-120"/>
               </a:rPr>
-              <a:t>Without a formal accountability model, each actor may assume that another party is.</a:t>
-            </a:r>
-            <a:endParaRPr lang="en-US" sz="1380" dirty="0"/>
-          </a:p>
-          <a:p>
-            <a:r>
-              <a:rPr lang="en-US" sz="1380" dirty="0">
+              <a:t>Without a formal accountability model, each actor may assume that.</a:t>
+            </a:r>
+            <a:endParaRPr lang="en-US" sz="1220" dirty="0"/>
+          </a:p>
+          <a:p>
+            <a:pPr indent="0" marL="0">
+              <a:buNone/>
+            </a:pPr>
+            <a:r>
+              <a:rPr lang="en-US" sz="1220" dirty="0">
                 <a:solidFill>
                   <a:srgbClr val="17364A"/>
                 </a:solidFill>
@@ -15505,7 +15774,7 @@
               </a:rPr>
               <a:t>Clear decision rights support trust and speed.</a:t>
             </a:r>
-            <a:endParaRPr lang="en-US" sz="1380" dirty="0"/>
+            <a:endParaRPr lang="en-US" sz="1220" dirty="0"/>
           </a:p>
         </p:txBody>
       </p:sp>
@@ -15583,17 +15852,17 @@
         </p:nvSpPr>
         <p:spPr>
           <a:xfrm>
-            <a:off x="7799832" y="5001768"/>
-            <a:ext cx="3145536" cy="502920"/>
-          </a:xfrm>
-          <a:prstGeom prst="rect">
-            <a:avLst/>
-          </a:prstGeom>
-          <a:noFill/>
-          <a:ln/>
-        </p:spPr>
-        <p:txBody>
-          <a:bodyPr wrap="square" lIns="0" tIns="0" rIns="0" bIns="0" rtlCol="0" anchor="t">
+            <a:off x="7799832" y="4974336"/>
+            <a:ext cx="3145536" cy="576072"/>
+          </a:xfrm>
+          <a:prstGeom prst="rect">
+            <a:avLst/>
+          </a:prstGeom>
+          <a:noFill/>
+          <a:ln/>
+        </p:spPr>
+        <p:txBody>
+          <a:bodyPr wrap="square" lIns="254" tIns="254" rIns="254" bIns="254" rtlCol="0" anchor="t">
             <a:normAutofit/>
           </a:bodyPr>
           <a:lstStyle/>
@@ -15602,7 +15871,7 @@
               <a:buNone/>
             </a:pPr>
             <a:r>
-              <a:rPr lang="en-US" sz="1550" dirty="0">
+              <a:rPr lang="en-US" sz="1320" dirty="0">
                 <a:solidFill>
                   <a:srgbClr val="17364A"/>
                 </a:solidFill>
@@ -15610,9 +15879,9 @@
                 <a:ea typeface="Aptos" pitchFamily="34" charset="-122"/>
                 <a:cs typeface="Aptos" pitchFamily="34" charset="-120"/>
               </a:rPr>
-              <a:t>Connect the concept to public health purpose, responsible use, required safeguards, documentation, and the next action a department should take.</a:t>
-            </a:r>
-            <a:endParaRPr lang="en-US" sz="1550" dirty="0"/>
+              <a:t>Connect the concept to public health purpose, responsible use, required safeguards, documentation, and the next action a.</a:t>
+            </a:r>
+            <a:endParaRPr lang="en-US" sz="1320" dirty="0"/>
           </a:p>
         </p:txBody>
       </p:sp>
@@ -15913,49 +16182,58 @@
           <a:ln/>
         </p:spPr>
         <p:txBody>
-          <a:bodyPr wrap="square" lIns="635" tIns="635" rIns="635" bIns="635" rtlCol="0" anchor="t">
+          <a:bodyPr wrap="square" lIns="1016" tIns="1016" rIns="1016" bIns="1016" rtlCol="0" anchor="t">
             <a:normAutofit/>
           </a:bodyPr>
           <a:lstStyle/>
           <a:p>
+            <a:pPr indent="0" marL="0">
+              <a:buNone/>
+            </a:pPr>
             <a:r>
               <a:rPr lang="en-US" sz="2100" dirty="0">
                 <a:solidFill>
-                  <a:srgbClr val="17364A"/>
-                </a:solidFill>
-                <a:latin typeface="Aptos" pitchFamily="34" charset="0"/>
-                <a:ea typeface="Aptos" pitchFamily="34" charset="-122"/>
-                <a:cs typeface="Aptos" pitchFamily="34" charset="-120"/>
-              </a:rPr>
-              <a:t>A local health department implements an AI-assisted tool to classify incoming environmental health.</a:t>
+                  <a:srgbClr val="003A63"/>
+                </a:solidFill>
+                <a:latin typeface="Aptos" pitchFamily="34" charset="0"/>
+                <a:ea typeface="Aptos" pitchFamily="34" charset="-122"/>
+                <a:cs typeface="Aptos" pitchFamily="34" charset="-120"/>
+              </a:rPr>
+              <a:t>• A local health department implements an AI-assisted tool to classify incoming environmental.</a:t>
             </a:r>
             <a:endParaRPr lang="en-US" sz="2100" dirty="0"/>
           </a:p>
           <a:p>
+            <a:pPr indent="0" marL="0">
+              <a:buNone/>
+            </a:pPr>
             <a:r>
               <a:rPr lang="en-US" sz="2100" dirty="0">
                 <a:solidFill>
-                  <a:srgbClr val="17364A"/>
-                </a:solidFill>
-                <a:latin typeface="Aptos" pitchFamily="34" charset="0"/>
-                <a:ea typeface="Aptos" pitchFamily="34" charset="-122"/>
-                <a:cs typeface="Aptos" pitchFamily="34" charset="-120"/>
-              </a:rPr>
-              <a:t>The vendor configured the model, IT manages access, environmental health staff review the queue, and.</a:t>
+                  <a:srgbClr val="003A63"/>
+                </a:solidFill>
+                <a:latin typeface="Aptos" pitchFamily="34" charset="0"/>
+                <a:ea typeface="Aptos" pitchFamily="34" charset="-122"/>
+                <a:cs typeface="Aptos" pitchFamily="34" charset="-120"/>
+              </a:rPr>
+              <a:t>• The vendor configured the model, IT manages access, environmental health staff review the.</a:t>
             </a:r>
             <a:endParaRPr lang="en-US" sz="2100" dirty="0"/>
           </a:p>
           <a:p>
+            <a:pPr indent="0" marL="0">
+              <a:buNone/>
+            </a:pPr>
             <a:r>
               <a:rPr lang="en-US" sz="2100" dirty="0">
                 <a:solidFill>
-                  <a:srgbClr val="17364A"/>
-                </a:solidFill>
-                <a:latin typeface="Aptos" pitchFamily="34" charset="0"/>
-                <a:ea typeface="Aptos" pitchFamily="34" charset="-122"/>
-                <a:cs typeface="Aptos" pitchFamily="34" charset="-120"/>
-              </a:rPr>
-              <a:t>A complaint is misclassified and a serious housing-related concern is not routed for timely follow-up.</a:t>
+                  <a:srgbClr val="003A63"/>
+                </a:solidFill>
+                <a:latin typeface="Aptos" pitchFamily="34" charset="0"/>
+                <a:ea typeface="Aptos" pitchFamily="34" charset="-122"/>
+                <a:cs typeface="Aptos" pitchFamily="34" charset="-120"/>
+              </a:rPr>
+              <a:t>• A complaint is misclassified and a serious housing-related concern is not routed for timely.</a:t>
             </a:r>
             <a:endParaRPr lang="en-US" sz="2100" dirty="0"/>
           </a:p>
@@ -16035,17 +16313,17 @@
         </p:nvSpPr>
         <p:spPr>
           <a:xfrm>
-            <a:off x="7799832" y="1828800"/>
-            <a:ext cx="3145536" cy="685800"/>
-          </a:xfrm>
-          <a:prstGeom prst="rect">
-            <a:avLst/>
-          </a:prstGeom>
-          <a:noFill/>
-          <a:ln/>
-        </p:spPr>
-        <p:txBody>
-          <a:bodyPr wrap="square" lIns="0" tIns="0" rIns="0" bIns="0" rtlCol="0" anchor="t">
+            <a:off x="7799832" y="1801368"/>
+            <a:ext cx="3145536" cy="758952"/>
+          </a:xfrm>
+          <a:prstGeom prst="rect">
+            <a:avLst/>
+          </a:prstGeom>
+          <a:noFill/>
+          <a:ln/>
+        </p:spPr>
+        <p:txBody>
+          <a:bodyPr wrap="square" lIns="254" tIns="254" rIns="254" bIns="254" rtlCol="0" anchor="t">
             <a:normAutofit/>
           </a:bodyPr>
           <a:lstStyle/>
@@ -16054,7 +16332,7 @@
               <a:buNone/>
             </a:pPr>
             <a:r>
-              <a:rPr lang="en-US" sz="1550" dirty="0">
+              <a:rPr lang="en-US" sz="1320" dirty="0">
                 <a:solidFill>
                   <a:srgbClr val="17364A"/>
                 </a:solidFill>
@@ -16064,7 +16342,7 @@
               </a:rPr>
               <a:t>A local health department implements an AI-assisted tool to classify incoming environmental health.</a:t>
             </a:r>
-            <a:endParaRPr lang="en-US" sz="1550" dirty="0"/>
+            <a:endParaRPr lang="en-US" sz="1320" dirty="0"/>
           </a:p>
         </p:txBody>
       </p:sp>
@@ -16152,13 +16430,16 @@
           <a:ln/>
         </p:spPr>
         <p:txBody>
-          <a:bodyPr wrap="square" lIns="254" tIns="254" rIns="254" bIns="254" rtlCol="0" anchor="t">
+          <a:bodyPr wrap="square" lIns="508" tIns="508" rIns="508" bIns="508" rtlCol="0" anchor="t">
             <a:normAutofit/>
           </a:bodyPr>
           <a:lstStyle/>
           <a:p>
-            <a:r>
-              <a:rPr lang="en-US" sz="1380" dirty="0">
+            <a:pPr indent="0" marL="0">
+              <a:buNone/>
+            </a:pPr>
+            <a:r>
+              <a:rPr lang="en-US" sz="1220" dirty="0">
                 <a:solidFill>
                   <a:srgbClr val="17364A"/>
                 </a:solidFill>
@@ -16166,13 +16447,16 @@
                 <a:ea typeface="Aptos" pitchFamily="34" charset="-122"/>
                 <a:cs typeface="Aptos" pitchFamily="34" charset="-120"/>
               </a:rPr>
-              <a:t>A local health department implements an AI-assisted tool to classify incoming.</a:t>
-            </a:r>
-            <a:endParaRPr lang="en-US" sz="1380" dirty="0"/>
-          </a:p>
-          <a:p>
-            <a:r>
-              <a:rPr lang="en-US" sz="1380" dirty="0">
+              <a:t>A local health department implements an AI-assisted tool to.</a:t>
+            </a:r>
+            <a:endParaRPr lang="en-US" sz="1220" dirty="0"/>
+          </a:p>
+          <a:p>
+            <a:pPr indent="0" marL="0">
+              <a:buNone/>
+            </a:pPr>
+            <a:r>
+              <a:rPr lang="en-US" sz="1220" dirty="0">
                 <a:solidFill>
                   <a:srgbClr val="17364A"/>
                 </a:solidFill>
@@ -16180,13 +16464,16 @@
                 <a:ea typeface="Aptos" pitchFamily="34" charset="-122"/>
                 <a:cs typeface="Aptos" pitchFamily="34" charset="-120"/>
               </a:rPr>
-              <a:t>The vendor configured the model, IT manages access, environmental health staff review the.</a:t>
-            </a:r>
-            <a:endParaRPr lang="en-US" sz="1380" dirty="0"/>
-          </a:p>
-          <a:p>
-            <a:r>
-              <a:rPr lang="en-US" sz="1380" dirty="0">
+              <a:t>The vendor configured the model, IT manages access, environmental.</a:t>
+            </a:r>
+            <a:endParaRPr lang="en-US" sz="1220" dirty="0"/>
+          </a:p>
+          <a:p>
+            <a:pPr indent="0" marL="0">
+              <a:buNone/>
+            </a:pPr>
+            <a:r>
+              <a:rPr lang="en-US" sz="1220" dirty="0">
                 <a:solidFill>
                   <a:srgbClr val="17364A"/>
                 </a:solidFill>
@@ -16196,7 +16483,7 @@
               </a:rPr>
               <a:t>A decision-rights matrix helps the agency respond.</a:t>
             </a:r>
-            <a:endParaRPr lang="en-US" sz="1380" dirty="0"/>
+            <a:endParaRPr lang="en-US" sz="1220" dirty="0"/>
           </a:p>
         </p:txBody>
       </p:sp>
@@ -16274,17 +16561,17 @@
         </p:nvSpPr>
         <p:spPr>
           <a:xfrm>
-            <a:off x="7799832" y="5001768"/>
-            <a:ext cx="3145536" cy="502920"/>
-          </a:xfrm>
-          <a:prstGeom prst="rect">
-            <a:avLst/>
-          </a:prstGeom>
-          <a:noFill/>
-          <a:ln/>
-        </p:spPr>
-        <p:txBody>
-          <a:bodyPr wrap="square" lIns="0" tIns="0" rIns="0" bIns="0" rtlCol="0" anchor="t">
+            <a:off x="7799832" y="4974336"/>
+            <a:ext cx="3145536" cy="576072"/>
+          </a:xfrm>
+          <a:prstGeom prst="rect">
+            <a:avLst/>
+          </a:prstGeom>
+          <a:noFill/>
+          <a:ln/>
+        </p:spPr>
+        <p:txBody>
+          <a:bodyPr wrap="square" lIns="254" tIns="254" rIns="254" bIns="254" rtlCol="0" anchor="t">
             <a:normAutofit/>
           </a:bodyPr>
           <a:lstStyle/>
@@ -16293,7 +16580,7 @@
               <a:buNone/>
             </a:pPr>
             <a:r>
-              <a:rPr lang="en-US" sz="1550" dirty="0">
+              <a:rPr lang="en-US" sz="1320" dirty="0">
                 <a:solidFill>
                   <a:srgbClr val="17364A"/>
                 </a:solidFill>
@@ -16301,9 +16588,9 @@
                 <a:ea typeface="Aptos" pitchFamily="34" charset="-122"/>
                 <a:cs typeface="Aptos" pitchFamily="34" charset="-120"/>
               </a:rPr>
-              <a:t>Connect the concept to public health purpose, responsible use, required safeguards, documentation, and the next action a department should take.</a:t>
-            </a:r>
-            <a:endParaRPr lang="en-US" sz="1550" dirty="0"/>
+              <a:t>Connect the concept to public health purpose, responsible use, required safeguards, documentation, and the next action a.</a:t>
+            </a:r>
+            <a:endParaRPr lang="en-US" sz="1320" dirty="0"/>
           </a:p>
         </p:txBody>
       </p:sp>

--- a/downloads/presentations/modules/exe-400.pptx
+++ b/downloads/presentations/modules/exe-400.pptx
@@ -3319,11 +3319,11 @@
         <p:spPr>
           <a:xfrm>
             <a:off x="7635240" y="1325880"/>
-            <a:ext cx="3474720" cy="1325880"/>
+            <a:ext cx="3474720" cy="1207008"/>
           </a:xfrm>
           <a:prstGeom prst="roundRect">
             <a:avLst>
-              <a:gd name="adj" fmla="val 8276"/>
+              <a:gd name="adj" fmla="val 9091"/>
             </a:avLst>
           </a:prstGeom>
           <a:solidFill>
@@ -3385,7 +3385,7 @@
         <p:spPr>
           <a:xfrm>
             <a:off x="7799832" y="1801368"/>
-            <a:ext cx="3145536" cy="758952"/>
+            <a:ext cx="3145536" cy="640080"/>
           </a:xfrm>
           <a:prstGeom prst="rect">
             <a:avLst/>
@@ -3425,12 +3425,12 @@
         </p:nvSpPr>
         <p:spPr>
           <a:xfrm>
-            <a:off x="7635240" y="2788920"/>
-            <a:ext cx="3474720" cy="1536192"/>
+            <a:off x="7635240" y="2670048"/>
+            <a:ext cx="3474720" cy="1377086"/>
           </a:xfrm>
           <a:prstGeom prst="roundRect">
             <a:avLst>
-              <a:gd name="adj" fmla="val 7143"/>
+              <a:gd name="adj" fmla="val 7968"/>
             </a:avLst>
           </a:prstGeom>
           <a:solidFill>
@@ -3452,7 +3452,7 @@
         </p:nvSpPr>
         <p:spPr>
           <a:xfrm>
-            <a:off x="7799832" y="2935224"/>
+            <a:off x="7799832" y="2816352"/>
             <a:ext cx="3145536" cy="256032"/>
           </a:xfrm>
           <a:prstGeom prst="rect">
@@ -3491,8 +3491,8 @@
         </p:nvSpPr>
         <p:spPr>
           <a:xfrm>
-            <a:off x="7818120" y="3300984"/>
-            <a:ext cx="3090672" cy="877824"/>
+            <a:off x="7818120" y="3182112"/>
+            <a:ext cx="3090672" cy="718718"/>
           </a:xfrm>
           <a:prstGeom prst="rect">
             <a:avLst/>
@@ -3566,12 +3566,12 @@
         </p:nvSpPr>
         <p:spPr>
           <a:xfrm>
-            <a:off x="7635240" y="4498848"/>
-            <a:ext cx="3474720" cy="1143000"/>
+            <a:off x="7635240" y="4184294"/>
+            <a:ext cx="3474720" cy="1466698"/>
           </a:xfrm>
           <a:prstGeom prst="roundRect">
             <a:avLst>
-              <a:gd name="adj" fmla="val 9600"/>
+              <a:gd name="adj" fmla="val 7481"/>
             </a:avLst>
           </a:prstGeom>
           <a:solidFill>
@@ -3593,7 +3593,7 @@
         </p:nvSpPr>
         <p:spPr>
           <a:xfrm>
-            <a:off x="7799832" y="4645152"/>
+            <a:off x="7799832" y="4330598"/>
             <a:ext cx="3145536" cy="256032"/>
           </a:xfrm>
           <a:prstGeom prst="rect">
@@ -3632,8 +3632,8 @@
         </p:nvSpPr>
         <p:spPr>
           <a:xfrm>
-            <a:off x="7799832" y="4974336"/>
-            <a:ext cx="3145536" cy="576072"/>
+            <a:off x="7799832" y="4659782"/>
+            <a:ext cx="3145536" cy="899770"/>
           </a:xfrm>
           <a:prstGeom prst="rect">
             <a:avLst/>
@@ -3659,7 +3659,7 @@
                 <a:ea typeface="Aptos" pitchFamily="34" charset="-122"/>
                 <a:cs typeface="Aptos" pitchFamily="34" charset="-120"/>
               </a:rPr>
-              <a:t>Translate this concept into clear decision rights, review steps, documentation expectations, and escalation paths before.</a:t>
+              <a:t>Translate this concept into clear decision rights, review steps, documentation expectations, and escalation paths before an AI-supported workflow is approved.</a:t>
             </a:r>
             <a:endParaRPr lang="en-US" sz="1320" dirty="0"/>
           </a:p>
@@ -4028,11 +4028,11 @@
         <p:spPr>
           <a:xfrm>
             <a:off x="7635240" y="1325880"/>
-            <a:ext cx="3474720" cy="1325880"/>
+            <a:ext cx="3474720" cy="1207008"/>
           </a:xfrm>
           <a:prstGeom prst="roundRect">
             <a:avLst>
-              <a:gd name="adj" fmla="val 8276"/>
+              <a:gd name="adj" fmla="val 9091"/>
             </a:avLst>
           </a:prstGeom>
           <a:solidFill>
@@ -4094,7 +4094,7 @@
         <p:spPr>
           <a:xfrm>
             <a:off x="7799832" y="1801368"/>
-            <a:ext cx="3145536" cy="758952"/>
+            <a:ext cx="3145536" cy="640080"/>
           </a:xfrm>
           <a:prstGeom prst="rect">
             <a:avLst/>
@@ -4134,7 +4134,7 @@
         </p:nvSpPr>
         <p:spPr>
           <a:xfrm>
-            <a:off x="7635240" y="2788920"/>
+            <a:off x="7635240" y="2670048"/>
             <a:ext cx="3474720" cy="1536192"/>
           </a:xfrm>
           <a:prstGeom prst="roundRect">
@@ -4161,7 +4161,7 @@
         </p:nvSpPr>
         <p:spPr>
           <a:xfrm>
-            <a:off x="7799832" y="2935224"/>
+            <a:off x="7799832" y="2816352"/>
             <a:ext cx="3145536" cy="256032"/>
           </a:xfrm>
           <a:prstGeom prst="rect">
@@ -4200,7 +4200,7 @@
         </p:nvSpPr>
         <p:spPr>
           <a:xfrm>
-            <a:off x="7818120" y="3300984"/>
+            <a:off x="7818120" y="3182112"/>
             <a:ext cx="3090672" cy="877824"/>
           </a:xfrm>
           <a:prstGeom prst="rect">
@@ -4275,12 +4275,12 @@
         </p:nvSpPr>
         <p:spPr>
           <a:xfrm>
-            <a:off x="7635240" y="4498848"/>
-            <a:ext cx="3474720" cy="1143000"/>
+            <a:off x="7635240" y="4343400"/>
+            <a:ext cx="3474720" cy="1255471"/>
           </a:xfrm>
           <a:prstGeom prst="roundRect">
             <a:avLst>
-              <a:gd name="adj" fmla="val 9600"/>
+              <a:gd name="adj" fmla="val 8740"/>
             </a:avLst>
           </a:prstGeom>
           <a:solidFill>
@@ -4302,7 +4302,7 @@
         </p:nvSpPr>
         <p:spPr>
           <a:xfrm>
-            <a:off x="7799832" y="4645152"/>
+            <a:off x="7799832" y="4489704"/>
             <a:ext cx="3145536" cy="256032"/>
           </a:xfrm>
           <a:prstGeom prst="rect">
@@ -4341,8 +4341,8 @@
         </p:nvSpPr>
         <p:spPr>
           <a:xfrm>
-            <a:off x="7799832" y="4974336"/>
-            <a:ext cx="3145536" cy="576072"/>
+            <a:off x="7799832" y="4818888"/>
+            <a:ext cx="3145536" cy="688543"/>
           </a:xfrm>
           <a:prstGeom prst="rect">
             <a:avLst/>
@@ -4368,7 +4368,7 @@
                 <a:ea typeface="Aptos" pitchFamily="34" charset="-122"/>
                 <a:cs typeface="Aptos" pitchFamily="34" charset="-120"/>
               </a:rPr>
-              <a:t>Identify what could go wrong, who could be affected, what safeguards are needed, and what evidence should be reviewed.</a:t>
+              <a:t>Identify what could go wrong, who could be affected, what safeguards are needed, and what evidence should be reviewed before use.</a:t>
             </a:r>
             <a:endParaRPr lang="en-US" sz="1320" dirty="0"/>
           </a:p>
@@ -4737,11 +4737,11 @@
         <p:spPr>
           <a:xfrm>
             <a:off x="7635240" y="1325880"/>
-            <a:ext cx="3474720" cy="1325880"/>
+            <a:ext cx="3474720" cy="1255471"/>
           </a:xfrm>
           <a:prstGeom prst="roundRect">
             <a:avLst>
-              <a:gd name="adj" fmla="val 8276"/>
+              <a:gd name="adj" fmla="val 8740"/>
             </a:avLst>
           </a:prstGeom>
           <a:solidFill>
@@ -4803,7 +4803,7 @@
         <p:spPr>
           <a:xfrm>
             <a:off x="7799832" y="1801368"/>
-            <a:ext cx="3145536" cy="758952"/>
+            <a:ext cx="3145536" cy="688543"/>
           </a:xfrm>
           <a:prstGeom prst="rect">
             <a:avLst/>
@@ -4843,12 +4843,12 @@
         </p:nvSpPr>
         <p:spPr>
           <a:xfrm>
-            <a:off x="7635240" y="2788920"/>
-            <a:ext cx="3474720" cy="1536192"/>
+            <a:off x="7635240" y="2718511"/>
+            <a:ext cx="3474720" cy="1328623"/>
           </a:xfrm>
           <a:prstGeom prst="roundRect">
             <a:avLst>
-              <a:gd name="adj" fmla="val 7143"/>
+              <a:gd name="adj" fmla="val 8259"/>
             </a:avLst>
           </a:prstGeom>
           <a:solidFill>
@@ -4870,7 +4870,7 @@
         </p:nvSpPr>
         <p:spPr>
           <a:xfrm>
-            <a:off x="7799832" y="2935224"/>
+            <a:off x="7799832" y="2864815"/>
             <a:ext cx="3145536" cy="256032"/>
           </a:xfrm>
           <a:prstGeom prst="rect">
@@ -4909,8 +4909,8 @@
         </p:nvSpPr>
         <p:spPr>
           <a:xfrm>
-            <a:off x="7818120" y="3300984"/>
-            <a:ext cx="3090672" cy="877824"/>
+            <a:off x="7818120" y="3230575"/>
+            <a:ext cx="3090672" cy="670255"/>
           </a:xfrm>
           <a:prstGeom prst="rect">
             <a:avLst/>
@@ -4984,12 +4984,12 @@
         </p:nvSpPr>
         <p:spPr>
           <a:xfrm>
-            <a:off x="7635240" y="4498848"/>
-            <a:ext cx="3474720" cy="1143000"/>
+            <a:off x="7635240" y="4184294"/>
+            <a:ext cx="3474720" cy="1466698"/>
           </a:xfrm>
           <a:prstGeom prst="roundRect">
             <a:avLst>
-              <a:gd name="adj" fmla="val 9600"/>
+              <a:gd name="adj" fmla="val 7481"/>
             </a:avLst>
           </a:prstGeom>
           <a:solidFill>
@@ -5011,7 +5011,7 @@
         </p:nvSpPr>
         <p:spPr>
           <a:xfrm>
-            <a:off x="7799832" y="4645152"/>
+            <a:off x="7799832" y="4330598"/>
             <a:ext cx="3145536" cy="256032"/>
           </a:xfrm>
           <a:prstGeom prst="rect">
@@ -5050,8 +5050,8 @@
         </p:nvSpPr>
         <p:spPr>
           <a:xfrm>
-            <a:off x="7799832" y="4974336"/>
-            <a:ext cx="3145536" cy="576072"/>
+            <a:off x="7799832" y="4659782"/>
+            <a:ext cx="3145536" cy="899770"/>
           </a:xfrm>
           <a:prstGeom prst="rect">
             <a:avLst/>
@@ -5077,7 +5077,7 @@
                 <a:ea typeface="Aptos" pitchFamily="34" charset="-122"/>
                 <a:cs typeface="Aptos" pitchFamily="34" charset="-120"/>
               </a:rPr>
-              <a:t>Use the concept to clarify workflow changes, dependencies, staffing, procurement requirements, training needs, and.</a:t>
+              <a:t>Use the concept to clarify workflow changes, dependencies, staffing, procurement requirements, training needs, and implementation checkpoints.</a:t>
             </a:r>
             <a:endParaRPr lang="en-US" sz="1320" dirty="0"/>
           </a:p>
@@ -5446,11 +5446,11 @@
         <p:spPr>
           <a:xfrm>
             <a:off x="7635240" y="1325880"/>
-            <a:ext cx="3474720" cy="1325880"/>
+            <a:ext cx="3474720" cy="1255471"/>
           </a:xfrm>
           <a:prstGeom prst="roundRect">
             <a:avLst>
-              <a:gd name="adj" fmla="val 8276"/>
+              <a:gd name="adj" fmla="val 8740"/>
             </a:avLst>
           </a:prstGeom>
           <a:solidFill>
@@ -5512,7 +5512,7 @@
         <p:spPr>
           <a:xfrm>
             <a:off x="7799832" y="1801368"/>
-            <a:ext cx="3145536" cy="758952"/>
+            <a:ext cx="3145536" cy="688543"/>
           </a:xfrm>
           <a:prstGeom prst="rect">
             <a:avLst/>
@@ -5552,12 +5552,12 @@
         </p:nvSpPr>
         <p:spPr>
           <a:xfrm>
-            <a:off x="7635240" y="2788920"/>
-            <a:ext cx="3474720" cy="1536192"/>
+            <a:off x="7635240" y="2718511"/>
+            <a:ext cx="3474720" cy="1328623"/>
           </a:xfrm>
           <a:prstGeom prst="roundRect">
             <a:avLst>
-              <a:gd name="adj" fmla="val 7143"/>
+              <a:gd name="adj" fmla="val 8259"/>
             </a:avLst>
           </a:prstGeom>
           <a:solidFill>
@@ -5579,7 +5579,7 @@
         </p:nvSpPr>
         <p:spPr>
           <a:xfrm>
-            <a:off x="7799832" y="2935224"/>
+            <a:off x="7799832" y="2864815"/>
             <a:ext cx="3145536" cy="256032"/>
           </a:xfrm>
           <a:prstGeom prst="rect">
@@ -5618,8 +5618,8 @@
         </p:nvSpPr>
         <p:spPr>
           <a:xfrm>
-            <a:off x="7818120" y="3300984"/>
-            <a:ext cx="3090672" cy="877824"/>
+            <a:off x="7818120" y="3230575"/>
+            <a:ext cx="3090672" cy="670255"/>
           </a:xfrm>
           <a:prstGeom prst="rect">
             <a:avLst/>
@@ -5693,12 +5693,12 @@
         </p:nvSpPr>
         <p:spPr>
           <a:xfrm>
-            <a:off x="7635240" y="4498848"/>
-            <a:ext cx="3474720" cy="1143000"/>
+            <a:off x="7635240" y="4184294"/>
+            <a:ext cx="3474720" cy="1466698"/>
           </a:xfrm>
           <a:prstGeom prst="roundRect">
             <a:avLst>
-              <a:gd name="adj" fmla="val 9600"/>
+              <a:gd name="adj" fmla="val 7481"/>
             </a:avLst>
           </a:prstGeom>
           <a:solidFill>
@@ -5720,7 +5720,7 @@
         </p:nvSpPr>
         <p:spPr>
           <a:xfrm>
-            <a:off x="7799832" y="4645152"/>
+            <a:off x="7799832" y="4330598"/>
             <a:ext cx="3145536" cy="256032"/>
           </a:xfrm>
           <a:prstGeom prst="rect">
@@ -5759,8 +5759,8 @@
         </p:nvSpPr>
         <p:spPr>
           <a:xfrm>
-            <a:off x="7799832" y="4974336"/>
-            <a:ext cx="3145536" cy="576072"/>
+            <a:off x="7799832" y="4659782"/>
+            <a:ext cx="3145536" cy="899770"/>
           </a:xfrm>
           <a:prstGeom prst="rect">
             <a:avLst/>
@@ -5786,7 +5786,7 @@
                 <a:ea typeface="Aptos" pitchFamily="34" charset="-122"/>
                 <a:cs typeface="Aptos" pitchFamily="34" charset="-120"/>
               </a:rPr>
-              <a:t>Connect the concept to public health purpose, responsible use, required safeguards, documentation, and the next action a.</a:t>
+              <a:t>Connect the concept to public health purpose, responsible use, required safeguards, documentation, and the next action a department should take.</a:t>
             </a:r>
             <a:endParaRPr lang="en-US" sz="1320" dirty="0"/>
           </a:p>
@@ -6138,11 +6138,11 @@
         <p:spPr>
           <a:xfrm>
             <a:off x="7635240" y="1325880"/>
-            <a:ext cx="3474720" cy="1325880"/>
+            <a:ext cx="3474720" cy="1207008"/>
           </a:xfrm>
           <a:prstGeom prst="roundRect">
             <a:avLst>
-              <a:gd name="adj" fmla="val 8276"/>
+              <a:gd name="adj" fmla="val 9091"/>
             </a:avLst>
           </a:prstGeom>
           <a:solidFill>
@@ -6204,7 +6204,7 @@
         <p:spPr>
           <a:xfrm>
             <a:off x="7799832" y="1801368"/>
-            <a:ext cx="3145536" cy="758952"/>
+            <a:ext cx="3145536" cy="640080"/>
           </a:xfrm>
           <a:prstGeom prst="rect">
             <a:avLst/>
@@ -6230,7 +6230,7 @@
                 <a:ea typeface="Aptos" pitchFamily="34" charset="-122"/>
                 <a:cs typeface="Aptos" pitchFamily="34" charset="-120"/>
               </a:rPr>
-              <a:t>Which staff, partners, or communities would be affected if this issue were handled poorly?</a:t>
+              <a:t>Which staff, partners, or communities would be affected if this issue were handled.</a:t>
             </a:r>
             <a:endParaRPr lang="en-US" sz="1320" dirty="0"/>
           </a:p>
@@ -6244,12 +6244,12 @@
         </p:nvSpPr>
         <p:spPr>
           <a:xfrm>
-            <a:off x="7635240" y="2788920"/>
-            <a:ext cx="3474720" cy="1536192"/>
+            <a:off x="7635240" y="2670048"/>
+            <a:ext cx="3474720" cy="1377086"/>
           </a:xfrm>
           <a:prstGeom prst="roundRect">
             <a:avLst>
-              <a:gd name="adj" fmla="val 7143"/>
+              <a:gd name="adj" fmla="val 7968"/>
             </a:avLst>
           </a:prstGeom>
           <a:solidFill>
@@ -6271,7 +6271,7 @@
         </p:nvSpPr>
         <p:spPr>
           <a:xfrm>
-            <a:off x="7799832" y="2935224"/>
+            <a:off x="7799832" y="2816352"/>
             <a:ext cx="3145536" cy="256032"/>
           </a:xfrm>
           <a:prstGeom prst="rect">
@@ -6310,8 +6310,8 @@
         </p:nvSpPr>
         <p:spPr>
           <a:xfrm>
-            <a:off x="7818120" y="3300984"/>
-            <a:ext cx="3090672" cy="877824"/>
+            <a:off x="7818120" y="3182112"/>
+            <a:ext cx="3090672" cy="718718"/>
           </a:xfrm>
           <a:prstGeom prst="rect">
             <a:avLst/>
@@ -6368,12 +6368,12 @@
         </p:nvSpPr>
         <p:spPr>
           <a:xfrm>
-            <a:off x="7635240" y="4498848"/>
-            <a:ext cx="3474720" cy="1143000"/>
+            <a:off x="7635240" y="4184294"/>
+            <a:ext cx="3474720" cy="1466698"/>
           </a:xfrm>
           <a:prstGeom prst="roundRect">
             <a:avLst>
-              <a:gd name="adj" fmla="val 9600"/>
+              <a:gd name="adj" fmla="val 7481"/>
             </a:avLst>
           </a:prstGeom>
           <a:solidFill>
@@ -6395,7 +6395,7 @@
         </p:nvSpPr>
         <p:spPr>
           <a:xfrm>
-            <a:off x="7799832" y="4645152"/>
+            <a:off x="7799832" y="4330598"/>
             <a:ext cx="3145536" cy="256032"/>
           </a:xfrm>
           <a:prstGeom prst="rect">
@@ -6434,8 +6434,8 @@
         </p:nvSpPr>
         <p:spPr>
           <a:xfrm>
-            <a:off x="7799832" y="4974336"/>
-            <a:ext cx="3145536" cy="576072"/>
+            <a:off x="7799832" y="4659782"/>
+            <a:ext cx="3145536" cy="899770"/>
           </a:xfrm>
           <a:prstGeom prst="rect">
             <a:avLst/>
@@ -6461,7 +6461,7 @@
                 <a:ea typeface="Aptos" pitchFamily="34" charset="-122"/>
                 <a:cs typeface="Aptos" pitchFamily="34" charset="-120"/>
               </a:rPr>
-              <a:t>Connect the concept to public health purpose, responsible use, required safeguards, documentation, and the next action a.</a:t>
+              <a:t>Connect the concept to public health purpose, responsible use, required safeguards, documentation, and the next action a department should take.</a:t>
             </a:r>
             <a:endParaRPr lang="en-US" sz="1320" dirty="0"/>
           </a:p>
@@ -6813,11 +6813,11 @@
         <p:spPr>
           <a:xfrm>
             <a:off x="7635240" y="1325880"/>
-            <a:ext cx="3474720" cy="1325880"/>
+            <a:ext cx="3474720" cy="1207008"/>
           </a:xfrm>
           <a:prstGeom prst="roundRect">
             <a:avLst>
-              <a:gd name="adj" fmla="val 8276"/>
+              <a:gd name="adj" fmla="val 9091"/>
             </a:avLst>
           </a:prstGeom>
           <a:solidFill>
@@ -6879,7 +6879,7 @@
         <p:spPr>
           <a:xfrm>
             <a:off x="7799832" y="1801368"/>
-            <a:ext cx="3145536" cy="758952"/>
+            <a:ext cx="3145536" cy="640080"/>
           </a:xfrm>
           <a:prstGeom prst="rect">
             <a:avLst/>
@@ -6919,12 +6919,12 @@
         </p:nvSpPr>
         <p:spPr>
           <a:xfrm>
-            <a:off x="7635240" y="2788920"/>
-            <a:ext cx="3474720" cy="1536192"/>
+            <a:off x="7635240" y="2670048"/>
+            <a:ext cx="3474720" cy="1377086"/>
           </a:xfrm>
           <a:prstGeom prst="roundRect">
             <a:avLst>
-              <a:gd name="adj" fmla="val 7143"/>
+              <a:gd name="adj" fmla="val 7968"/>
             </a:avLst>
           </a:prstGeom>
           <a:solidFill>
@@ -6946,7 +6946,7 @@
         </p:nvSpPr>
         <p:spPr>
           <a:xfrm>
-            <a:off x="7799832" y="2935224"/>
+            <a:off x="7799832" y="2816352"/>
             <a:ext cx="3145536" cy="256032"/>
           </a:xfrm>
           <a:prstGeom prst="rect">
@@ -6985,8 +6985,8 @@
         </p:nvSpPr>
         <p:spPr>
           <a:xfrm>
-            <a:off x="7818120" y="3300984"/>
-            <a:ext cx="3090672" cy="877824"/>
+            <a:off x="7818120" y="3182112"/>
+            <a:ext cx="3090672" cy="718718"/>
           </a:xfrm>
           <a:prstGeom prst="rect">
             <a:avLst/>
@@ -7043,12 +7043,12 @@
         </p:nvSpPr>
         <p:spPr>
           <a:xfrm>
-            <a:off x="7635240" y="4498848"/>
-            <a:ext cx="3474720" cy="1143000"/>
+            <a:off x="7635240" y="4184294"/>
+            <a:ext cx="3474720" cy="1466698"/>
           </a:xfrm>
           <a:prstGeom prst="roundRect">
             <a:avLst>
-              <a:gd name="adj" fmla="val 9600"/>
+              <a:gd name="adj" fmla="val 7481"/>
             </a:avLst>
           </a:prstGeom>
           <a:solidFill>
@@ -7070,7 +7070,7 @@
         </p:nvSpPr>
         <p:spPr>
           <a:xfrm>
-            <a:off x="7799832" y="4645152"/>
+            <a:off x="7799832" y="4330598"/>
             <a:ext cx="3145536" cy="256032"/>
           </a:xfrm>
           <a:prstGeom prst="rect">
@@ -7109,8 +7109,8 @@
         </p:nvSpPr>
         <p:spPr>
           <a:xfrm>
-            <a:off x="7799832" y="4974336"/>
-            <a:ext cx="3145536" cy="576072"/>
+            <a:off x="7799832" y="4659782"/>
+            <a:ext cx="3145536" cy="899770"/>
           </a:xfrm>
           <a:prstGeom prst="rect">
             <a:avLst/>
@@ -7136,7 +7136,7 @@
                 <a:ea typeface="Aptos" pitchFamily="34" charset="-122"/>
                 <a:cs typeface="Aptos" pitchFamily="34" charset="-120"/>
               </a:rPr>
-              <a:t>Use the assignment to test whether you can explain the concept, apply it to a realistic public health situation, and.</a:t>
+              <a:t>Use the assignment to test whether you can explain the concept, apply it to a realistic public health situation, and identify what would need review before the work moves forward.</a:t>
             </a:r>
             <a:endParaRPr lang="en-US" sz="1320" dirty="0"/>
           </a:p>
@@ -7505,11 +7505,11 @@
         <p:spPr>
           <a:xfrm>
             <a:off x="7635240" y="1325880"/>
-            <a:ext cx="3474720" cy="1325880"/>
+            <a:ext cx="3474720" cy="1207008"/>
           </a:xfrm>
           <a:prstGeom prst="roundRect">
             <a:avLst>
-              <a:gd name="adj" fmla="val 8276"/>
+              <a:gd name="adj" fmla="val 9091"/>
             </a:avLst>
           </a:prstGeom>
           <a:solidFill>
@@ -7571,7 +7571,7 @@
         <p:spPr>
           <a:xfrm>
             <a:off x="7799832" y="1801368"/>
-            <a:ext cx="3145536" cy="758952"/>
+            <a:ext cx="3145536" cy="640080"/>
           </a:xfrm>
           <a:prstGeom prst="rect">
             <a:avLst/>
@@ -7611,12 +7611,12 @@
         </p:nvSpPr>
         <p:spPr>
           <a:xfrm>
-            <a:off x="7635240" y="2788920"/>
-            <a:ext cx="3474720" cy="1536192"/>
+            <a:off x="7635240" y="2670048"/>
+            <a:ext cx="3474720" cy="1377086"/>
           </a:xfrm>
           <a:prstGeom prst="roundRect">
             <a:avLst>
-              <a:gd name="adj" fmla="val 7143"/>
+              <a:gd name="adj" fmla="val 7968"/>
             </a:avLst>
           </a:prstGeom>
           <a:solidFill>
@@ -7638,7 +7638,7 @@
         </p:nvSpPr>
         <p:spPr>
           <a:xfrm>
-            <a:off x="7799832" y="2935224"/>
+            <a:off x="7799832" y="2816352"/>
             <a:ext cx="3145536" cy="256032"/>
           </a:xfrm>
           <a:prstGeom prst="rect">
@@ -7677,8 +7677,8 @@
         </p:nvSpPr>
         <p:spPr>
           <a:xfrm>
-            <a:off x="7818120" y="3300984"/>
-            <a:ext cx="3090672" cy="877824"/>
+            <a:off x="7818120" y="3182112"/>
+            <a:ext cx="3090672" cy="718718"/>
           </a:xfrm>
           <a:prstGeom prst="rect">
             <a:avLst/>
@@ -7735,12 +7735,12 @@
         </p:nvSpPr>
         <p:spPr>
           <a:xfrm>
-            <a:off x="7635240" y="4498848"/>
-            <a:ext cx="3474720" cy="1143000"/>
+            <a:off x="7635240" y="4184294"/>
+            <a:ext cx="3474720" cy="1466698"/>
           </a:xfrm>
           <a:prstGeom prst="roundRect">
             <a:avLst>
-              <a:gd name="adj" fmla="val 9600"/>
+              <a:gd name="adj" fmla="val 7481"/>
             </a:avLst>
           </a:prstGeom>
           <a:solidFill>
@@ -7762,7 +7762,7 @@
         </p:nvSpPr>
         <p:spPr>
           <a:xfrm>
-            <a:off x="7799832" y="4645152"/>
+            <a:off x="7799832" y="4330598"/>
             <a:ext cx="3145536" cy="256032"/>
           </a:xfrm>
           <a:prstGeom prst="rect">
@@ -7801,8 +7801,8 @@
         </p:nvSpPr>
         <p:spPr>
           <a:xfrm>
-            <a:off x="7799832" y="4974336"/>
-            <a:ext cx="3145536" cy="576072"/>
+            <a:off x="7799832" y="4659782"/>
+            <a:ext cx="3145536" cy="899770"/>
           </a:xfrm>
           <a:prstGeom prst="rect">
             <a:avLst/>
@@ -7828,7 +7828,7 @@
                 <a:ea typeface="Aptos" pitchFamily="34" charset="-122"/>
                 <a:cs typeface="Aptos" pitchFamily="34" charset="-120"/>
               </a:rPr>
-              <a:t>Connect the concept to public health purpose, responsible use, required safeguards, documentation, and the next action a.</a:t>
+              <a:t>Connect the concept to public health purpose, responsible use, required safeguards, documentation, and the next action a department should take.</a:t>
             </a:r>
             <a:endParaRPr lang="en-US" sz="1320" dirty="0"/>
           </a:p>
@@ -8163,11 +8163,11 @@
         <p:spPr>
           <a:xfrm>
             <a:off x="7635240" y="1325880"/>
-            <a:ext cx="3474720" cy="1325880"/>
+            <a:ext cx="3474720" cy="1207008"/>
           </a:xfrm>
           <a:prstGeom prst="roundRect">
             <a:avLst>
-              <a:gd name="adj" fmla="val 8276"/>
+              <a:gd name="adj" fmla="val 9091"/>
             </a:avLst>
           </a:prstGeom>
           <a:solidFill>
@@ -8229,7 +8229,7 @@
         <p:spPr>
           <a:xfrm>
             <a:off x="7799832" y="1801368"/>
-            <a:ext cx="3145536" cy="758952"/>
+            <a:ext cx="3145536" cy="640080"/>
           </a:xfrm>
           <a:prstGeom prst="rect">
             <a:avLst/>
@@ -8255,7 +8255,7 @@
                 <a:ea typeface="Aptos" pitchFamily="34" charset="-122"/>
                 <a:cs typeface="Aptos" pitchFamily="34" charset="-120"/>
               </a:rPr>
-              <a:t>Decision-rights matrix; RACI table; risk acceptance thresholds; escalation authority list.</a:t>
+              <a:t>Decision-rights matrix; RACI table; risk acceptance thresholds; escalation authority.</a:t>
             </a:r>
             <a:endParaRPr lang="en-US" sz="1320" dirty="0"/>
           </a:p>
@@ -8269,12 +8269,12 @@
         </p:nvSpPr>
         <p:spPr>
           <a:xfrm>
-            <a:off x="7635240" y="2788920"/>
-            <a:ext cx="3474720" cy="1536192"/>
+            <a:off x="7635240" y="2670048"/>
+            <a:ext cx="3474720" cy="1377086"/>
           </a:xfrm>
           <a:prstGeom prst="roundRect">
             <a:avLst>
-              <a:gd name="adj" fmla="val 7143"/>
+              <a:gd name="adj" fmla="val 7968"/>
             </a:avLst>
           </a:prstGeom>
           <a:solidFill>
@@ -8296,7 +8296,7 @@
         </p:nvSpPr>
         <p:spPr>
           <a:xfrm>
-            <a:off x="7799832" y="2935224"/>
+            <a:off x="7799832" y="2816352"/>
             <a:ext cx="3145536" cy="256032"/>
           </a:xfrm>
           <a:prstGeom prst="rect">
@@ -8335,8 +8335,8 @@
         </p:nvSpPr>
         <p:spPr>
           <a:xfrm>
-            <a:off x="7818120" y="3300984"/>
-            <a:ext cx="3090672" cy="877824"/>
+            <a:off x="7818120" y="3182112"/>
+            <a:ext cx="3090672" cy="718718"/>
           </a:xfrm>
           <a:prstGeom prst="rect">
             <a:avLst/>
@@ -8376,12 +8376,12 @@
         </p:nvSpPr>
         <p:spPr>
           <a:xfrm>
-            <a:off x="7635240" y="4498848"/>
-            <a:ext cx="3474720" cy="1143000"/>
+            <a:off x="7635240" y="4184294"/>
+            <a:ext cx="3474720" cy="1466698"/>
           </a:xfrm>
           <a:prstGeom prst="roundRect">
             <a:avLst>
-              <a:gd name="adj" fmla="val 9600"/>
+              <a:gd name="adj" fmla="val 7481"/>
             </a:avLst>
           </a:prstGeom>
           <a:solidFill>
@@ -8403,7 +8403,7 @@
         </p:nvSpPr>
         <p:spPr>
           <a:xfrm>
-            <a:off x="7799832" y="4645152"/>
+            <a:off x="7799832" y="4330598"/>
             <a:ext cx="3145536" cy="256032"/>
           </a:xfrm>
           <a:prstGeom prst="rect">
@@ -8442,8 +8442,8 @@
         </p:nvSpPr>
         <p:spPr>
           <a:xfrm>
-            <a:off x="7799832" y="4974336"/>
-            <a:ext cx="3145536" cy="576072"/>
+            <a:off x="7799832" y="4659782"/>
+            <a:ext cx="3145536" cy="899770"/>
           </a:xfrm>
           <a:prstGeom prst="rect">
             <a:avLst/>
@@ -8469,7 +8469,7 @@
                 <a:ea typeface="Aptos" pitchFamily="34" charset="-122"/>
                 <a:cs typeface="Aptos" pitchFamily="34" charset="-120"/>
               </a:rPr>
-              <a:t>Connect the concept to public health purpose, responsible use, required safeguards, documentation, and the next action a.</a:t>
+              <a:t>Connect the concept to public health purpose, responsible use, required safeguards, documentation, and the next action a department should take.</a:t>
             </a:r>
             <a:endParaRPr lang="en-US" sz="1320" dirty="0"/>
           </a:p>
@@ -8804,11 +8804,11 @@
         <p:spPr>
           <a:xfrm>
             <a:off x="7635240" y="1325880"/>
-            <a:ext cx="3474720" cy="1325880"/>
+            <a:ext cx="3474720" cy="1207008"/>
           </a:xfrm>
           <a:prstGeom prst="roundRect">
             <a:avLst>
-              <a:gd name="adj" fmla="val 8276"/>
+              <a:gd name="adj" fmla="val 9091"/>
             </a:avLst>
           </a:prstGeom>
           <a:solidFill>
@@ -8870,7 +8870,7 @@
         <p:spPr>
           <a:xfrm>
             <a:off x="7799832" y="1801368"/>
-            <a:ext cx="3145536" cy="758952"/>
+            <a:ext cx="3145536" cy="640080"/>
           </a:xfrm>
           <a:prstGeom prst="rect">
             <a:avLst/>
@@ -8896,7 +8896,7 @@
                 <a:ea typeface="Aptos" pitchFamily="34" charset="-122"/>
                 <a:cs typeface="Aptos" pitchFamily="34" charset="-120"/>
               </a:rPr>
-              <a:t>Decision-rights matrix; RACI table; risk acceptance thresholds; escalation authority list.</a:t>
+              <a:t>Decision-rights matrix; RACI table; risk acceptance thresholds; escalation authority.</a:t>
             </a:r>
             <a:endParaRPr lang="en-US" sz="1320" dirty="0"/>
           </a:p>
@@ -8910,12 +8910,12 @@
         </p:nvSpPr>
         <p:spPr>
           <a:xfrm>
-            <a:off x="7635240" y="2788920"/>
-            <a:ext cx="3474720" cy="1536192"/>
+            <a:off x="7635240" y="2670048"/>
+            <a:ext cx="3474720" cy="1377086"/>
           </a:xfrm>
           <a:prstGeom prst="roundRect">
             <a:avLst>
-              <a:gd name="adj" fmla="val 7143"/>
+              <a:gd name="adj" fmla="val 7968"/>
             </a:avLst>
           </a:prstGeom>
           <a:solidFill>
@@ -8937,7 +8937,7 @@
         </p:nvSpPr>
         <p:spPr>
           <a:xfrm>
-            <a:off x="7799832" y="2935224"/>
+            <a:off x="7799832" y="2816352"/>
             <a:ext cx="3145536" cy="256032"/>
           </a:xfrm>
           <a:prstGeom prst="rect">
@@ -8976,8 +8976,8 @@
         </p:nvSpPr>
         <p:spPr>
           <a:xfrm>
-            <a:off x="7818120" y="3300984"/>
-            <a:ext cx="3090672" cy="877824"/>
+            <a:off x="7818120" y="3182112"/>
+            <a:ext cx="3090672" cy="718718"/>
           </a:xfrm>
           <a:prstGeom prst="rect">
             <a:avLst/>
@@ -9017,12 +9017,12 @@
         </p:nvSpPr>
         <p:spPr>
           <a:xfrm>
-            <a:off x="7635240" y="4498848"/>
-            <a:ext cx="3474720" cy="1143000"/>
+            <a:off x="7635240" y="4184294"/>
+            <a:ext cx="3474720" cy="1466698"/>
           </a:xfrm>
           <a:prstGeom prst="roundRect">
             <a:avLst>
-              <a:gd name="adj" fmla="val 9600"/>
+              <a:gd name="adj" fmla="val 7481"/>
             </a:avLst>
           </a:prstGeom>
           <a:solidFill>
@@ -9044,7 +9044,7 @@
         </p:nvSpPr>
         <p:spPr>
           <a:xfrm>
-            <a:off x="7799832" y="4645152"/>
+            <a:off x="7799832" y="4330598"/>
             <a:ext cx="3145536" cy="256032"/>
           </a:xfrm>
           <a:prstGeom prst="rect">
@@ -9083,8 +9083,8 @@
         </p:nvSpPr>
         <p:spPr>
           <a:xfrm>
-            <a:off x="7799832" y="4974336"/>
-            <a:ext cx="3145536" cy="576072"/>
+            <a:off x="7799832" y="4659782"/>
+            <a:ext cx="3145536" cy="899770"/>
           </a:xfrm>
           <a:prstGeom prst="rect">
             <a:avLst/>
@@ -9110,7 +9110,7 @@
                 <a:ea typeface="Aptos" pitchFamily="34" charset="-122"/>
                 <a:cs typeface="Aptos" pitchFamily="34" charset="-120"/>
               </a:rPr>
-              <a:t>Use the assignment to test whether you can explain the concept, apply it to a realistic public health situation, and.</a:t>
+              <a:t>Use the assignment to test whether you can explain the concept, apply it to a realistic public health situation, and identify what would need review before the work moves forward.</a:t>
             </a:r>
             <a:endParaRPr lang="en-US" sz="1320" dirty="0"/>
           </a:p>
@@ -9479,11 +9479,11 @@
         <p:spPr>
           <a:xfrm>
             <a:off x="7635240" y="1325880"/>
-            <a:ext cx="3474720" cy="1325880"/>
+            <a:ext cx="3474720" cy="1255471"/>
           </a:xfrm>
           <a:prstGeom prst="roundRect">
             <a:avLst>
-              <a:gd name="adj" fmla="val 8276"/>
+              <a:gd name="adj" fmla="val 8740"/>
             </a:avLst>
           </a:prstGeom>
           <a:solidFill>
@@ -9545,7 +9545,7 @@
         <p:spPr>
           <a:xfrm>
             <a:off x="7799832" y="1801368"/>
-            <a:ext cx="3145536" cy="758952"/>
+            <a:ext cx="3145536" cy="688543"/>
           </a:xfrm>
           <a:prstGeom prst="rect">
             <a:avLst/>
@@ -9585,12 +9585,12 @@
         </p:nvSpPr>
         <p:spPr>
           <a:xfrm>
-            <a:off x="7635240" y="2788920"/>
-            <a:ext cx="3474720" cy="1536192"/>
+            <a:off x="7635240" y="2718511"/>
+            <a:ext cx="3474720" cy="1328623"/>
           </a:xfrm>
           <a:prstGeom prst="roundRect">
             <a:avLst>
-              <a:gd name="adj" fmla="val 7143"/>
+              <a:gd name="adj" fmla="val 8259"/>
             </a:avLst>
           </a:prstGeom>
           <a:solidFill>
@@ -9612,7 +9612,7 @@
         </p:nvSpPr>
         <p:spPr>
           <a:xfrm>
-            <a:off x="7799832" y="2935224"/>
+            <a:off x="7799832" y="2864815"/>
             <a:ext cx="3145536" cy="256032"/>
           </a:xfrm>
           <a:prstGeom prst="rect">
@@ -9651,8 +9651,8 @@
         </p:nvSpPr>
         <p:spPr>
           <a:xfrm>
-            <a:off x="7818120" y="3300984"/>
-            <a:ext cx="3090672" cy="877824"/>
+            <a:off x="7818120" y="3230575"/>
+            <a:ext cx="3090672" cy="670255"/>
           </a:xfrm>
           <a:prstGeom prst="rect">
             <a:avLst/>
@@ -9726,12 +9726,12 @@
         </p:nvSpPr>
         <p:spPr>
           <a:xfrm>
-            <a:off x="7635240" y="4498848"/>
-            <a:ext cx="3474720" cy="1143000"/>
+            <a:off x="7635240" y="4184294"/>
+            <a:ext cx="3474720" cy="1466698"/>
           </a:xfrm>
           <a:prstGeom prst="roundRect">
             <a:avLst>
-              <a:gd name="adj" fmla="val 9600"/>
+              <a:gd name="adj" fmla="val 7481"/>
             </a:avLst>
           </a:prstGeom>
           <a:solidFill>
@@ -9753,7 +9753,7 @@
         </p:nvSpPr>
         <p:spPr>
           <a:xfrm>
-            <a:off x="7799832" y="4645152"/>
+            <a:off x="7799832" y="4330598"/>
             <a:ext cx="3145536" cy="256032"/>
           </a:xfrm>
           <a:prstGeom prst="rect">
@@ -9792,8 +9792,8 @@
         </p:nvSpPr>
         <p:spPr>
           <a:xfrm>
-            <a:off x="7799832" y="4974336"/>
-            <a:ext cx="3145536" cy="576072"/>
+            <a:off x="7799832" y="4659782"/>
+            <a:ext cx="3145536" cy="899770"/>
           </a:xfrm>
           <a:prstGeom prst="rect">
             <a:avLst/>
@@ -9819,7 +9819,7 @@
                 <a:ea typeface="Aptos" pitchFamily="34" charset="-122"/>
                 <a:cs typeface="Aptos" pitchFamily="34" charset="-120"/>
               </a:rPr>
-              <a:t>Use the assignment to test whether you can explain the concept, apply it to a realistic public health situation, and.</a:t>
+              <a:t>Use the assignment to test whether you can explain the concept, apply it to a realistic public health situation, and identify what would need review before the work moves forward.</a:t>
             </a:r>
             <a:endParaRPr lang="en-US" sz="1320" dirty="0"/>
           </a:p>
@@ -10790,11 +10790,11 @@
         <p:spPr>
           <a:xfrm>
             <a:off x="7635240" y="1325880"/>
-            <a:ext cx="3474720" cy="1325880"/>
+            <a:ext cx="3474720" cy="1207008"/>
           </a:xfrm>
           <a:prstGeom prst="roundRect">
             <a:avLst>
-              <a:gd name="adj" fmla="val 8276"/>
+              <a:gd name="adj" fmla="val 9091"/>
             </a:avLst>
           </a:prstGeom>
           <a:solidFill>
@@ -10856,7 +10856,7 @@
         <p:spPr>
           <a:xfrm>
             <a:off x="7799832" y="1801368"/>
-            <a:ext cx="3145536" cy="758952"/>
+            <a:ext cx="3145536" cy="640080"/>
           </a:xfrm>
           <a:prstGeom prst="rect">
             <a:avLst/>
@@ -10896,12 +10896,12 @@
         </p:nvSpPr>
         <p:spPr>
           <a:xfrm>
-            <a:off x="7635240" y="2788920"/>
-            <a:ext cx="3474720" cy="1536192"/>
+            <a:off x="7635240" y="2670048"/>
+            <a:ext cx="3474720" cy="1377086"/>
           </a:xfrm>
           <a:prstGeom prst="roundRect">
             <a:avLst>
-              <a:gd name="adj" fmla="val 7143"/>
+              <a:gd name="adj" fmla="val 7968"/>
             </a:avLst>
           </a:prstGeom>
           <a:solidFill>
@@ -10923,7 +10923,7 @@
         </p:nvSpPr>
         <p:spPr>
           <a:xfrm>
-            <a:off x="7799832" y="2935224"/>
+            <a:off x="7799832" y="2816352"/>
             <a:ext cx="3145536" cy="256032"/>
           </a:xfrm>
           <a:prstGeom prst="rect">
@@ -10962,8 +10962,8 @@
         </p:nvSpPr>
         <p:spPr>
           <a:xfrm>
-            <a:off x="7818120" y="3300984"/>
-            <a:ext cx="3090672" cy="877824"/>
+            <a:off x="7818120" y="3182112"/>
+            <a:ext cx="3090672" cy="718718"/>
           </a:xfrm>
           <a:prstGeom prst="rect">
             <a:avLst/>
@@ -11037,12 +11037,12 @@
         </p:nvSpPr>
         <p:spPr>
           <a:xfrm>
-            <a:off x="7635240" y="4498848"/>
-            <a:ext cx="3474720" cy="1143000"/>
+            <a:off x="7635240" y="4184294"/>
+            <a:ext cx="3474720" cy="1466698"/>
           </a:xfrm>
           <a:prstGeom prst="roundRect">
             <a:avLst>
-              <a:gd name="adj" fmla="val 9600"/>
+              <a:gd name="adj" fmla="val 7481"/>
             </a:avLst>
           </a:prstGeom>
           <a:solidFill>
@@ -11064,7 +11064,7 @@
         </p:nvSpPr>
         <p:spPr>
           <a:xfrm>
-            <a:off x="7799832" y="4645152"/>
+            <a:off x="7799832" y="4330598"/>
             <a:ext cx="3145536" cy="256032"/>
           </a:xfrm>
           <a:prstGeom prst="rect">
@@ -11103,8 +11103,8 @@
         </p:nvSpPr>
         <p:spPr>
           <a:xfrm>
-            <a:off x="7799832" y="4974336"/>
-            <a:ext cx="3145536" cy="576072"/>
+            <a:off x="7799832" y="4659782"/>
+            <a:ext cx="3145536" cy="899770"/>
           </a:xfrm>
           <a:prstGeom prst="rect">
             <a:avLst/>
@@ -11130,7 +11130,7 @@
                 <a:ea typeface="Aptos" pitchFamily="34" charset="-122"/>
                 <a:cs typeface="Aptos" pitchFamily="34" charset="-120"/>
               </a:rPr>
-              <a:t>Connect the concept to public health purpose, responsible use, required safeguards, documentation, and the next action a.</a:t>
+              <a:t>Connect the concept to public health purpose, responsible use, required safeguards, documentation, and the next action a department should take.</a:t>
             </a:r>
             <a:endParaRPr lang="en-US" sz="1320" dirty="0"/>
           </a:p>
@@ -11482,11 +11482,11 @@
         <p:spPr>
           <a:xfrm>
             <a:off x="7635240" y="1325880"/>
-            <a:ext cx="3474720" cy="1325880"/>
+            <a:ext cx="3474720" cy="1255471"/>
           </a:xfrm>
           <a:prstGeom prst="roundRect">
             <a:avLst>
-              <a:gd name="adj" fmla="val 8276"/>
+              <a:gd name="adj" fmla="val 8740"/>
             </a:avLst>
           </a:prstGeom>
           <a:solidFill>
@@ -11548,7 +11548,7 @@
         <p:spPr>
           <a:xfrm>
             <a:off x="7799832" y="1801368"/>
-            <a:ext cx="3145536" cy="758952"/>
+            <a:ext cx="3145536" cy="688543"/>
           </a:xfrm>
           <a:prstGeom prst="rect">
             <a:avLst/>
@@ -11588,12 +11588,12 @@
         </p:nvSpPr>
         <p:spPr>
           <a:xfrm>
-            <a:off x="7635240" y="2788920"/>
-            <a:ext cx="3474720" cy="1536192"/>
+            <a:off x="7635240" y="2718511"/>
+            <a:ext cx="3474720" cy="1328623"/>
           </a:xfrm>
           <a:prstGeom prst="roundRect">
             <a:avLst>
-              <a:gd name="adj" fmla="val 7143"/>
+              <a:gd name="adj" fmla="val 8259"/>
             </a:avLst>
           </a:prstGeom>
           <a:solidFill>
@@ -11615,7 +11615,7 @@
         </p:nvSpPr>
         <p:spPr>
           <a:xfrm>
-            <a:off x="7799832" y="2935224"/>
+            <a:off x="7799832" y="2864815"/>
             <a:ext cx="3145536" cy="256032"/>
           </a:xfrm>
           <a:prstGeom prst="rect">
@@ -11654,8 +11654,8 @@
         </p:nvSpPr>
         <p:spPr>
           <a:xfrm>
-            <a:off x="7818120" y="3300984"/>
-            <a:ext cx="3090672" cy="877824"/>
+            <a:off x="7818120" y="3230575"/>
+            <a:ext cx="3090672" cy="670255"/>
           </a:xfrm>
           <a:prstGeom prst="rect">
             <a:avLst/>
@@ -11712,12 +11712,12 @@
         </p:nvSpPr>
         <p:spPr>
           <a:xfrm>
-            <a:off x="7635240" y="4498848"/>
-            <a:ext cx="3474720" cy="1143000"/>
+            <a:off x="7635240" y="4184294"/>
+            <a:ext cx="3474720" cy="1466698"/>
           </a:xfrm>
           <a:prstGeom prst="roundRect">
             <a:avLst>
-              <a:gd name="adj" fmla="val 9600"/>
+              <a:gd name="adj" fmla="val 7481"/>
             </a:avLst>
           </a:prstGeom>
           <a:solidFill>
@@ -11739,7 +11739,7 @@
         </p:nvSpPr>
         <p:spPr>
           <a:xfrm>
-            <a:off x="7799832" y="4645152"/>
+            <a:off x="7799832" y="4330598"/>
             <a:ext cx="3145536" cy="256032"/>
           </a:xfrm>
           <a:prstGeom prst="rect">
@@ -11778,8 +11778,8 @@
         </p:nvSpPr>
         <p:spPr>
           <a:xfrm>
-            <a:off x="7799832" y="4974336"/>
-            <a:ext cx="3145536" cy="576072"/>
+            <a:off x="7799832" y="4659782"/>
+            <a:ext cx="3145536" cy="899770"/>
           </a:xfrm>
           <a:prstGeom prst="rect">
             <a:avLst/>
@@ -11805,7 +11805,7 @@
                 <a:ea typeface="Aptos" pitchFamily="34" charset="-122"/>
                 <a:cs typeface="Aptos" pitchFamily="34" charset="-120"/>
               </a:rPr>
-              <a:t>Connect the concept to public health purpose, responsible use, required safeguards, documentation, and the next action a.</a:t>
+              <a:t>Connect the concept to public health purpose, responsible use, required safeguards, documentation, and the next action a department should take.</a:t>
             </a:r>
             <a:endParaRPr lang="en-US" sz="1320" dirty="0"/>
           </a:p>
@@ -12283,7 +12283,7 @@
                 <a:ea typeface="Aptos" pitchFamily="34" charset="-122"/>
                 <a:cs typeface="Aptos" pitchFamily="34" charset="-120"/>
               </a:rPr>
-              <a:t>Use the related plays to identify decisions, participants, timing, approvals, and documentation needed for responsible.</a:t>
+              <a:t>Use the related plays to identify decisions, participants, timing, approvals, and documentation needed for responsible implementation.</a:t>
             </a:r>
             <a:endParaRPr lang="en-US" sz="1320" dirty="0"/>
           </a:p>
@@ -12902,7 +12902,7 @@
                 <a:ea typeface="Aptos" pitchFamily="34" charset="-122"/>
                 <a:cs typeface="Aptos" pitchFamily="34" charset="-120"/>
               </a:rPr>
-              <a:t>Use linked tools when your department needs a structured worksheet, template, checklist, review process, or.</a:t>
+              <a:t>Use linked tools when your department needs a structured worksheet, template, checklist, review process, or documentation artifact.</a:t>
             </a:r>
             <a:endParaRPr lang="en-US" sz="1320" dirty="0"/>
           </a:p>
@@ -13412,11 +13412,11 @@
         <p:spPr>
           <a:xfrm>
             <a:off x="7635240" y="1325880"/>
-            <a:ext cx="3474720" cy="1325880"/>
+            <a:ext cx="3474720" cy="1255471"/>
           </a:xfrm>
           <a:prstGeom prst="roundRect">
             <a:avLst>
-              <a:gd name="adj" fmla="val 8276"/>
+              <a:gd name="adj" fmla="val 8740"/>
             </a:avLst>
           </a:prstGeom>
           <a:solidFill>
@@ -13478,7 +13478,7 @@
         <p:spPr>
           <a:xfrm>
             <a:off x="7799832" y="1801368"/>
-            <a:ext cx="3145536" cy="758952"/>
+            <a:ext cx="3145536" cy="688543"/>
           </a:xfrm>
           <a:prstGeom prst="rect">
             <a:avLst/>
@@ -13518,12 +13518,12 @@
         </p:nvSpPr>
         <p:spPr>
           <a:xfrm>
-            <a:off x="7635240" y="2788920"/>
-            <a:ext cx="3474720" cy="1536192"/>
+            <a:off x="7635240" y="2718511"/>
+            <a:ext cx="3474720" cy="1328623"/>
           </a:xfrm>
           <a:prstGeom prst="roundRect">
             <a:avLst>
-              <a:gd name="adj" fmla="val 7143"/>
+              <a:gd name="adj" fmla="val 8259"/>
             </a:avLst>
           </a:prstGeom>
           <a:solidFill>
@@ -13545,7 +13545,7 @@
         </p:nvSpPr>
         <p:spPr>
           <a:xfrm>
-            <a:off x="7799832" y="2935224"/>
+            <a:off x="7799832" y="2864815"/>
             <a:ext cx="3145536" cy="256032"/>
           </a:xfrm>
           <a:prstGeom prst="rect">
@@ -13584,8 +13584,8 @@
         </p:nvSpPr>
         <p:spPr>
           <a:xfrm>
-            <a:off x="7818120" y="3300984"/>
-            <a:ext cx="3090672" cy="877824"/>
+            <a:off x="7818120" y="3230575"/>
+            <a:ext cx="3090672" cy="670255"/>
           </a:xfrm>
           <a:prstGeom prst="rect">
             <a:avLst/>
@@ -13659,12 +13659,12 @@
         </p:nvSpPr>
         <p:spPr>
           <a:xfrm>
-            <a:off x="7635240" y="4498848"/>
-            <a:ext cx="3474720" cy="1143000"/>
+            <a:off x="7635240" y="4184294"/>
+            <a:ext cx="3474720" cy="1466698"/>
           </a:xfrm>
           <a:prstGeom prst="roundRect">
             <a:avLst>
-              <a:gd name="adj" fmla="val 9600"/>
+              <a:gd name="adj" fmla="val 7481"/>
             </a:avLst>
           </a:prstGeom>
           <a:solidFill>
@@ -13686,7 +13686,7 @@
         </p:nvSpPr>
         <p:spPr>
           <a:xfrm>
-            <a:off x="7799832" y="4645152"/>
+            <a:off x="7799832" y="4330598"/>
             <a:ext cx="3145536" cy="256032"/>
           </a:xfrm>
           <a:prstGeom prst="rect">
@@ -13725,8 +13725,8 @@
         </p:nvSpPr>
         <p:spPr>
           <a:xfrm>
-            <a:off x="7799832" y="4974336"/>
-            <a:ext cx="3145536" cy="576072"/>
+            <a:off x="7799832" y="4659782"/>
+            <a:ext cx="3145536" cy="899770"/>
           </a:xfrm>
           <a:prstGeom prst="rect">
             <a:avLst/>
@@ -13752,7 +13752,7 @@
                 <a:ea typeface="Aptos" pitchFamily="34" charset="-122"/>
                 <a:cs typeface="Aptos" pitchFamily="34" charset="-120"/>
               </a:rPr>
-              <a:t>Use the assignment to test whether you can explain the concept, apply it to a realistic public health situation, and.</a:t>
+              <a:t>Use the assignment to test whether you can explain the concept, apply it to a realistic public health situation, and identify what would need review before the work moves forward.</a:t>
             </a:r>
             <a:endParaRPr lang="en-US" sz="1320" dirty="0"/>
           </a:p>
@@ -14121,11 +14121,11 @@
         <p:spPr>
           <a:xfrm>
             <a:off x="7635240" y="1325880"/>
-            <a:ext cx="3474720" cy="1325880"/>
+            <a:ext cx="3474720" cy="1207008"/>
           </a:xfrm>
           <a:prstGeom prst="roundRect">
             <a:avLst>
-              <a:gd name="adj" fmla="val 8276"/>
+              <a:gd name="adj" fmla="val 9091"/>
             </a:avLst>
           </a:prstGeom>
           <a:solidFill>
@@ -14187,7 +14187,7 @@
         <p:spPr>
           <a:xfrm>
             <a:off x="7799832" y="1801368"/>
-            <a:ext cx="3145536" cy="758952"/>
+            <a:ext cx="3145536" cy="640080"/>
           </a:xfrm>
           <a:prstGeom prst="rect">
             <a:avLst/>
@@ -14227,12 +14227,12 @@
         </p:nvSpPr>
         <p:spPr>
           <a:xfrm>
-            <a:off x="7635240" y="2788920"/>
-            <a:ext cx="3474720" cy="1536192"/>
+            <a:off x="7635240" y="2670048"/>
+            <a:ext cx="3474720" cy="1377086"/>
           </a:xfrm>
           <a:prstGeom prst="roundRect">
             <a:avLst>
-              <a:gd name="adj" fmla="val 7143"/>
+              <a:gd name="adj" fmla="val 7968"/>
             </a:avLst>
           </a:prstGeom>
           <a:solidFill>
@@ -14254,8 +14254,8 @@
         </p:nvSpPr>
         <p:spPr>
           <a:xfrm>
-            <a:off x="7799832" y="2935224"/>
-            <a:ext cx="3145536" cy="256032"/>
+            <a:off x="7799832" y="2798064"/>
+            <a:ext cx="3145536" cy="237744"/>
           </a:xfrm>
           <a:prstGeom prst="rect">
             <a:avLst/>
@@ -14271,7 +14271,7 @@
               <a:buNone/>
             </a:pPr>
             <a:r>
-              <a:rPr lang="en-US" sz="1300" b="1" dirty="0">
+              <a:rPr lang="en-US" sz="1250" b="1" dirty="0">
                 <a:solidFill>
                   <a:srgbClr val="0068B7"/>
                 </a:solidFill>
@@ -14279,101 +14279,317 @@
                 <a:ea typeface="Aptos" pitchFamily="34" charset="-122"/>
                 <a:cs typeface="Aptos" pitchFamily="34" charset="-120"/>
               </a:rPr>
-              <a:t>Concept checkpoints</a:t>
-            </a:r>
-            <a:endParaRPr lang="en-US" sz="1300" dirty="0"/>
-          </a:p>
-        </p:txBody>
-      </p:sp>
-      <p:sp>
-        <p:nvSpPr>
-          <p:cNvPr id="15" name="Text 13"/>
-          <p:cNvSpPr/>
-          <p:nvPr/>
-        </p:nvSpPr>
-        <p:spPr>
-          <a:xfrm>
-            <a:off x="7818120" y="3300984"/>
-            <a:ext cx="3090672" cy="877824"/>
-          </a:xfrm>
-          <a:prstGeom prst="rect">
-            <a:avLst/>
-          </a:prstGeom>
-          <a:noFill/>
-          <a:ln/>
-        </p:spPr>
-        <p:txBody>
-          <a:bodyPr wrap="square" lIns="508" tIns="508" rIns="508" bIns="508" rtlCol="0" anchor="t">
+              <a:t>Governance pathway</a:t>
+            </a:r>
+            <a:endParaRPr lang="en-US" sz="1250" dirty="0"/>
+          </a:p>
+        </p:txBody>
+      </p:sp>
+      <p:sp>
+        <p:nvSpPr>
+          <p:cNvPr id="15" name="Shape 13"/>
+          <p:cNvSpPr/>
+          <p:nvPr/>
+        </p:nvSpPr>
+        <p:spPr>
+          <a:xfrm>
+            <a:off x="8763000" y="3351276"/>
+            <a:ext cx="164592" cy="0"/>
+          </a:xfrm>
+          <a:prstGeom prst="line">
+            <a:avLst/>
+          </a:prstGeom>
+          <a:noFill/>
+          <a:ln w="15240">
+            <a:solidFill>
+              <a:srgbClr val="8ABBD8"/>
+            </a:solidFill>
+            <a:prstDash val="solid"/>
+          </a:ln>
+        </p:spPr>
+      </p:sp>
+      <p:sp>
+        <p:nvSpPr>
+          <p:cNvPr id="16" name="Shape 14"/>
+          <p:cNvSpPr/>
+          <p:nvPr/>
+        </p:nvSpPr>
+        <p:spPr>
+          <a:xfrm>
+            <a:off x="7872984" y="3200400"/>
+            <a:ext cx="890016" cy="301752"/>
+          </a:xfrm>
+          <a:prstGeom prst="roundRect">
+            <a:avLst>
+              <a:gd name="adj" fmla="val 24242"/>
+            </a:avLst>
+          </a:prstGeom>
+          <a:solidFill>
+            <a:srgbClr val="0068B7"/>
+          </a:solidFill>
+          <a:ln w="12700">
+            <a:solidFill>
+              <a:srgbClr val="0068B7"/>
+            </a:solidFill>
+            <a:prstDash val="solid"/>
+          </a:ln>
+        </p:spPr>
+      </p:sp>
+      <p:sp>
+        <p:nvSpPr>
+          <p:cNvPr id="17" name="Text 15"/>
+          <p:cNvSpPr/>
+          <p:nvPr/>
+        </p:nvSpPr>
+        <p:spPr>
+          <a:xfrm>
+            <a:off x="7909560" y="3273552"/>
+            <a:ext cx="816864" cy="146304"/>
+          </a:xfrm>
+          <a:prstGeom prst="rect">
+            <a:avLst/>
+          </a:prstGeom>
+          <a:noFill/>
+          <a:ln/>
+        </p:spPr>
+        <p:txBody>
+          <a:bodyPr wrap="square" lIns="0" tIns="0" rIns="0" bIns="0" rtlCol="0" anchor="ctr">
             <a:normAutofit/>
           </a:bodyPr>
           <a:lstStyle/>
           <a:p>
-            <a:pPr indent="0" marL="0">
-              <a:buNone/>
-            </a:pPr>
-            <a:r>
-              <a:rPr lang="en-US" sz="1220" dirty="0">
-                <a:solidFill>
-                  <a:srgbClr val="17364A"/>
-                </a:solidFill>
-                <a:latin typeface="Aptos" pitchFamily="34" charset="0"/>
-                <a:ea typeface="Aptos" pitchFamily="34" charset="-122"/>
-                <a:cs typeface="Aptos" pitchFamily="34" charset="-120"/>
-              </a:rPr>
-              <a:t>Leaders need to know who can approve a pilot, who can accept.</a:t>
-            </a:r>
-            <a:endParaRPr lang="en-US" sz="1220" dirty="0"/>
-          </a:p>
-          <a:p>
-            <a:pPr indent="0" marL="0">
-              <a:buNone/>
-            </a:pPr>
-            <a:r>
-              <a:rPr lang="en-US" sz="1220" dirty="0">
-                <a:solidFill>
-                  <a:srgbClr val="17364A"/>
-                </a:solidFill>
-                <a:latin typeface="Aptos" pitchFamily="34" charset="0"/>
-                <a:ea typeface="Aptos" pitchFamily="34" charset="-122"/>
-                <a:cs typeface="Aptos" pitchFamily="34" charset="-120"/>
-              </a:rPr>
-              <a:t>Ambiguous accountability is especially risky in public health.</a:t>
-            </a:r>
-            <a:endParaRPr lang="en-US" sz="1220" dirty="0"/>
-          </a:p>
-          <a:p>
-            <a:pPr indent="0" marL="0">
-              <a:buNone/>
-            </a:pPr>
-            <a:r>
-              <a:rPr lang="en-US" sz="1220" dirty="0">
-                <a:solidFill>
-                  <a:srgbClr val="17364A"/>
-                </a:solidFill>
-                <a:latin typeface="Aptos" pitchFamily="34" charset="0"/>
-                <a:ea typeface="Aptos" pitchFamily="34" charset="-122"/>
-                <a:cs typeface="Aptos" pitchFamily="34" charset="-120"/>
-              </a:rPr>
-              <a:t>This module focuses on executive decision rights and.</a:t>
-            </a:r>
-            <a:endParaRPr lang="en-US" sz="1220" dirty="0"/>
-          </a:p>
-        </p:txBody>
-      </p:sp>
-      <p:sp>
-        <p:nvSpPr>
-          <p:cNvPr id="16" name="Shape 14"/>
-          <p:cNvSpPr/>
-          <p:nvPr/>
-        </p:nvSpPr>
-        <p:spPr>
-          <a:xfrm>
-            <a:off x="7635240" y="4498848"/>
-            <a:ext cx="3474720" cy="1143000"/>
+            <a:pPr algn="ctr" indent="0" marL="0">
+              <a:buNone/>
+            </a:pPr>
+            <a:r>
+              <a:rPr lang="en-US" sz="880" b="1" dirty="0">
+                <a:solidFill>
+                  <a:srgbClr val="FFFFFF"/>
+                </a:solidFill>
+                <a:latin typeface="Aptos" pitchFamily="34" charset="0"/>
+                <a:ea typeface="Aptos" pitchFamily="34" charset="-122"/>
+                <a:cs typeface="Aptos" pitchFamily="34" charset="-120"/>
+              </a:rPr>
+              <a:t>Submit</a:t>
+            </a:r>
+            <a:endParaRPr lang="en-US" sz="880" dirty="0"/>
+          </a:p>
+        </p:txBody>
+      </p:sp>
+      <p:sp>
+        <p:nvSpPr>
+          <p:cNvPr id="18" name="Shape 16"/>
+          <p:cNvSpPr/>
+          <p:nvPr/>
+        </p:nvSpPr>
+        <p:spPr>
+          <a:xfrm>
+            <a:off x="9817608" y="3351276"/>
+            <a:ext cx="164592" cy="0"/>
+          </a:xfrm>
+          <a:prstGeom prst="line">
+            <a:avLst/>
+          </a:prstGeom>
+          <a:noFill/>
+          <a:ln w="15240">
+            <a:solidFill>
+              <a:srgbClr val="8ABBD8"/>
+            </a:solidFill>
+            <a:prstDash val="solid"/>
+          </a:ln>
+        </p:spPr>
+      </p:sp>
+      <p:sp>
+        <p:nvSpPr>
+          <p:cNvPr id="19" name="Shape 17"/>
+          <p:cNvSpPr/>
+          <p:nvPr/>
+        </p:nvSpPr>
+        <p:spPr>
+          <a:xfrm>
+            <a:off x="8927592" y="3200400"/>
+            <a:ext cx="890016" cy="301752"/>
           </a:xfrm>
           <a:prstGeom prst="roundRect">
             <a:avLst>
-              <a:gd name="adj" fmla="val 9600"/>
+              <a:gd name="adj" fmla="val 24242"/>
+            </a:avLst>
+          </a:prstGeom>
+          <a:solidFill>
+            <a:srgbClr val="2F8A28"/>
+          </a:solidFill>
+          <a:ln w="12700">
+            <a:solidFill>
+              <a:srgbClr val="2F8A28"/>
+            </a:solidFill>
+            <a:prstDash val="solid"/>
+          </a:ln>
+        </p:spPr>
+      </p:sp>
+      <p:sp>
+        <p:nvSpPr>
+          <p:cNvPr id="20" name="Text 18"/>
+          <p:cNvSpPr/>
+          <p:nvPr/>
+        </p:nvSpPr>
+        <p:spPr>
+          <a:xfrm>
+            <a:off x="8964168" y="3273552"/>
+            <a:ext cx="816864" cy="146304"/>
+          </a:xfrm>
+          <a:prstGeom prst="rect">
+            <a:avLst/>
+          </a:prstGeom>
+          <a:noFill/>
+          <a:ln/>
+        </p:spPr>
+        <p:txBody>
+          <a:bodyPr wrap="square" lIns="0" tIns="0" rIns="0" bIns="0" rtlCol="0" anchor="ctr">
+            <a:normAutofit/>
+          </a:bodyPr>
+          <a:lstStyle/>
+          <a:p>
+            <a:pPr algn="ctr" indent="0" marL="0">
+              <a:buNone/>
+            </a:pPr>
+            <a:r>
+              <a:rPr lang="en-US" sz="880" b="1" dirty="0">
+                <a:solidFill>
+                  <a:srgbClr val="FFFFFF"/>
+                </a:solidFill>
+                <a:latin typeface="Aptos" pitchFamily="34" charset="0"/>
+                <a:ea typeface="Aptos" pitchFamily="34" charset="-122"/>
+                <a:cs typeface="Aptos" pitchFamily="34" charset="-120"/>
+              </a:rPr>
+              <a:t>Review</a:t>
+            </a:r>
+            <a:endParaRPr lang="en-US" sz="880" dirty="0"/>
+          </a:p>
+        </p:txBody>
+      </p:sp>
+      <p:sp>
+        <p:nvSpPr>
+          <p:cNvPr id="21" name="Shape 19"/>
+          <p:cNvSpPr/>
+          <p:nvPr/>
+        </p:nvSpPr>
+        <p:spPr>
+          <a:xfrm>
+            <a:off x="9982200" y="3200400"/>
+            <a:ext cx="890016" cy="301752"/>
+          </a:xfrm>
+          <a:prstGeom prst="roundRect">
+            <a:avLst>
+              <a:gd name="adj" fmla="val 24242"/>
+            </a:avLst>
+          </a:prstGeom>
+          <a:solidFill>
+            <a:srgbClr val="6A4CA3"/>
+          </a:solidFill>
+          <a:ln w="12700">
+            <a:solidFill>
+              <a:srgbClr val="6A4CA3"/>
+            </a:solidFill>
+            <a:prstDash val="solid"/>
+          </a:ln>
+        </p:spPr>
+      </p:sp>
+      <p:sp>
+        <p:nvSpPr>
+          <p:cNvPr id="22" name="Text 20"/>
+          <p:cNvSpPr/>
+          <p:nvPr/>
+        </p:nvSpPr>
+        <p:spPr>
+          <a:xfrm>
+            <a:off x="10018776" y="3273552"/>
+            <a:ext cx="816864" cy="146304"/>
+          </a:xfrm>
+          <a:prstGeom prst="rect">
+            <a:avLst/>
+          </a:prstGeom>
+          <a:noFill/>
+          <a:ln/>
+        </p:spPr>
+        <p:txBody>
+          <a:bodyPr wrap="square" lIns="0" tIns="0" rIns="0" bIns="0" rtlCol="0" anchor="ctr">
+            <a:normAutofit/>
+          </a:bodyPr>
+          <a:lstStyle/>
+          <a:p>
+            <a:pPr algn="ctr" indent="0" marL="0">
+              <a:buNone/>
+            </a:pPr>
+            <a:r>
+              <a:rPr lang="en-US" sz="880" b="1" dirty="0">
+                <a:solidFill>
+                  <a:srgbClr val="FFFFFF"/>
+                </a:solidFill>
+                <a:latin typeface="Aptos" pitchFamily="34" charset="0"/>
+                <a:ea typeface="Aptos" pitchFamily="34" charset="-122"/>
+                <a:cs typeface="Aptos" pitchFamily="34" charset="-120"/>
+              </a:rPr>
+              <a:t>Oversee</a:t>
+            </a:r>
+            <a:endParaRPr lang="en-US" sz="880" dirty="0"/>
+          </a:p>
+        </p:txBody>
+      </p:sp>
+      <p:sp>
+        <p:nvSpPr>
+          <p:cNvPr id="23" name="Text 21"/>
+          <p:cNvSpPr/>
+          <p:nvPr/>
+        </p:nvSpPr>
+        <p:spPr>
+          <a:xfrm>
+            <a:off x="7854696" y="3694176"/>
+            <a:ext cx="3035808" cy="206654"/>
+          </a:xfrm>
+          <a:prstGeom prst="rect">
+            <a:avLst/>
+          </a:prstGeom>
+          <a:noFill/>
+          <a:ln/>
+        </p:spPr>
+        <p:txBody>
+          <a:bodyPr wrap="square" lIns="254" tIns="254" rIns="254" bIns="254" rtlCol="0" anchor="t">
+            <a:normAutofit/>
+          </a:bodyPr>
+          <a:lstStyle/>
+          <a:p>
+            <a:pPr indent="0" marL="0">
+              <a:buNone/>
+            </a:pPr>
+            <a:r>
+              <a:rPr lang="en-US" sz="1120" dirty="0">
+                <a:solidFill>
+                  <a:srgbClr val="17364A"/>
+                </a:solidFill>
+                <a:latin typeface="Aptos" pitchFamily="34" charset="0"/>
+                <a:ea typeface="Aptos" pitchFamily="34" charset="-122"/>
+                <a:cs typeface="Aptos" pitchFamily="34" charset="-120"/>
+              </a:rPr>
+              <a:t>A proposed AI use should move through documented review before it becomes an operational workflow.</a:t>
+            </a:r>
+            <a:endParaRPr lang="en-US" sz="1120" dirty="0"/>
+          </a:p>
+        </p:txBody>
+      </p:sp>
+      <p:sp>
+        <p:nvSpPr>
+          <p:cNvPr id="24" name="Shape 22"/>
+          <p:cNvSpPr/>
+          <p:nvPr/>
+        </p:nvSpPr>
+        <p:spPr>
+          <a:xfrm>
+            <a:off x="7635240" y="4184294"/>
+            <a:ext cx="3474720" cy="1466698"/>
+          </a:xfrm>
+          <a:prstGeom prst="roundRect">
+            <a:avLst>
+              <a:gd name="adj" fmla="val 7481"/>
             </a:avLst>
           </a:prstGeom>
           <a:solidFill>
@@ -14389,13 +14605,13 @@
       </p:sp>
       <p:sp>
         <p:nvSpPr>
-          <p:cNvPr id="17" name="Text 15"/>
-          <p:cNvSpPr/>
-          <p:nvPr/>
-        </p:nvSpPr>
-        <p:spPr>
-          <a:xfrm>
-            <a:off x="7799832" y="4645152"/>
+          <p:cNvPr id="25" name="Text 23"/>
+          <p:cNvSpPr/>
+          <p:nvPr/>
+        </p:nvSpPr>
+        <p:spPr>
+          <a:xfrm>
+            <a:off x="7799832" y="4330598"/>
             <a:ext cx="3145536" cy="256032"/>
           </a:xfrm>
           <a:prstGeom prst="rect">
@@ -14428,14 +14644,14 @@
       </p:sp>
       <p:sp>
         <p:nvSpPr>
-          <p:cNvPr id="18" name="Text 16"/>
-          <p:cNvSpPr/>
-          <p:nvPr/>
-        </p:nvSpPr>
-        <p:spPr>
-          <a:xfrm>
-            <a:off x="7799832" y="4974336"/>
-            <a:ext cx="3145536" cy="576072"/>
+          <p:cNvPr id="26" name="Text 24"/>
+          <p:cNvSpPr/>
+          <p:nvPr/>
+        </p:nvSpPr>
+        <p:spPr>
+          <a:xfrm>
+            <a:off x="7799832" y="4659782"/>
+            <a:ext cx="3145536" cy="899770"/>
           </a:xfrm>
           <a:prstGeom prst="rect">
             <a:avLst/>
@@ -14461,7 +14677,7 @@
                 <a:ea typeface="Aptos" pitchFamily="34" charset="-122"/>
                 <a:cs typeface="Aptos" pitchFamily="34" charset="-120"/>
               </a:rPr>
-              <a:t>Connect the concept to public health purpose, responsible use, required safeguards, documentation, and the next action a.</a:t>
+              <a:t>Connect the concept to public health purpose, responsible use, required safeguards, documentation, and the next action a department should take.</a:t>
             </a:r>
             <a:endParaRPr lang="en-US" sz="1320" dirty="0"/>
           </a:p>
@@ -14830,11 +15046,11 @@
         <p:spPr>
           <a:xfrm>
             <a:off x="7635240" y="1325880"/>
-            <a:ext cx="3474720" cy="1325880"/>
+            <a:ext cx="3474720" cy="1207008"/>
           </a:xfrm>
           <a:prstGeom prst="roundRect">
             <a:avLst>
-              <a:gd name="adj" fmla="val 8276"/>
+              <a:gd name="adj" fmla="val 9091"/>
             </a:avLst>
           </a:prstGeom>
           <a:solidFill>
@@ -14896,7 +15112,7 @@
         <p:spPr>
           <a:xfrm>
             <a:off x="7799832" y="1801368"/>
-            <a:ext cx="3145536" cy="758952"/>
+            <a:ext cx="3145536" cy="640080"/>
           </a:xfrm>
           <a:prstGeom prst="rect">
             <a:avLst/>
@@ -14922,7 +15138,7 @@
                 <a:ea typeface="Aptos" pitchFamily="34" charset="-122"/>
                 <a:cs typeface="Aptos" pitchFamily="34" charset="-120"/>
               </a:rPr>
-              <a:t>This module provides national-level training guidance for public health agencies and partners.</a:t>
+              <a:t>This module provides national-level training guidance for public health agencies and.</a:t>
             </a:r>
             <a:endParaRPr lang="en-US" sz="1320" dirty="0"/>
           </a:p>
@@ -14936,12 +15152,12 @@
         </p:nvSpPr>
         <p:spPr>
           <a:xfrm>
-            <a:off x="7635240" y="2788920"/>
-            <a:ext cx="3474720" cy="1536192"/>
+            <a:off x="7635240" y="2670048"/>
+            <a:ext cx="3474720" cy="1377086"/>
           </a:xfrm>
           <a:prstGeom prst="roundRect">
             <a:avLst>
-              <a:gd name="adj" fmla="val 7143"/>
+              <a:gd name="adj" fmla="val 7968"/>
             </a:avLst>
           </a:prstGeom>
           <a:solidFill>
@@ -14963,8 +15179,8 @@
         </p:nvSpPr>
         <p:spPr>
           <a:xfrm>
-            <a:off x="7799832" y="2935224"/>
-            <a:ext cx="3145536" cy="256032"/>
+            <a:off x="7799832" y="2798064"/>
+            <a:ext cx="3145536" cy="237744"/>
           </a:xfrm>
           <a:prstGeom prst="rect">
             <a:avLst/>
@@ -14980,7 +15196,7 @@
               <a:buNone/>
             </a:pPr>
             <a:r>
-              <a:rPr lang="en-US" sz="1300" b="1" dirty="0">
+              <a:rPr lang="en-US" sz="1250" b="1" dirty="0">
                 <a:solidFill>
                   <a:srgbClr val="0068B7"/>
                 </a:solidFill>
@@ -14988,101 +15204,317 @@
                 <a:ea typeface="Aptos" pitchFamily="34" charset="-122"/>
                 <a:cs typeface="Aptos" pitchFamily="34" charset="-120"/>
               </a:rPr>
-              <a:t>Concept checkpoints</a:t>
-            </a:r>
-            <a:endParaRPr lang="en-US" sz="1300" dirty="0"/>
-          </a:p>
-        </p:txBody>
-      </p:sp>
-      <p:sp>
-        <p:nvSpPr>
-          <p:cNvPr id="15" name="Text 13"/>
-          <p:cNvSpPr/>
-          <p:nvPr/>
-        </p:nvSpPr>
-        <p:spPr>
-          <a:xfrm>
-            <a:off x="7818120" y="3300984"/>
-            <a:ext cx="3090672" cy="877824"/>
-          </a:xfrm>
-          <a:prstGeom prst="rect">
-            <a:avLst/>
-          </a:prstGeom>
-          <a:noFill/>
-          <a:ln/>
-        </p:spPr>
-        <p:txBody>
-          <a:bodyPr wrap="square" lIns="508" tIns="508" rIns="508" bIns="508" rtlCol="0" anchor="t">
+              <a:t>Governance pathway</a:t>
+            </a:r>
+            <a:endParaRPr lang="en-US" sz="1250" dirty="0"/>
+          </a:p>
+        </p:txBody>
+      </p:sp>
+      <p:sp>
+        <p:nvSpPr>
+          <p:cNvPr id="15" name="Shape 13"/>
+          <p:cNvSpPr/>
+          <p:nvPr/>
+        </p:nvSpPr>
+        <p:spPr>
+          <a:xfrm>
+            <a:off x="8763000" y="3351276"/>
+            <a:ext cx="164592" cy="0"/>
+          </a:xfrm>
+          <a:prstGeom prst="line">
+            <a:avLst/>
+          </a:prstGeom>
+          <a:noFill/>
+          <a:ln w="15240">
+            <a:solidFill>
+              <a:srgbClr val="8ABBD8"/>
+            </a:solidFill>
+            <a:prstDash val="solid"/>
+          </a:ln>
+        </p:spPr>
+      </p:sp>
+      <p:sp>
+        <p:nvSpPr>
+          <p:cNvPr id="16" name="Shape 14"/>
+          <p:cNvSpPr/>
+          <p:nvPr/>
+        </p:nvSpPr>
+        <p:spPr>
+          <a:xfrm>
+            <a:off x="7872984" y="3200400"/>
+            <a:ext cx="890016" cy="301752"/>
+          </a:xfrm>
+          <a:prstGeom prst="roundRect">
+            <a:avLst>
+              <a:gd name="adj" fmla="val 24242"/>
+            </a:avLst>
+          </a:prstGeom>
+          <a:solidFill>
+            <a:srgbClr val="0068B7"/>
+          </a:solidFill>
+          <a:ln w="12700">
+            <a:solidFill>
+              <a:srgbClr val="0068B7"/>
+            </a:solidFill>
+            <a:prstDash val="solid"/>
+          </a:ln>
+        </p:spPr>
+      </p:sp>
+      <p:sp>
+        <p:nvSpPr>
+          <p:cNvPr id="17" name="Text 15"/>
+          <p:cNvSpPr/>
+          <p:nvPr/>
+        </p:nvSpPr>
+        <p:spPr>
+          <a:xfrm>
+            <a:off x="7909560" y="3273552"/>
+            <a:ext cx="816864" cy="146304"/>
+          </a:xfrm>
+          <a:prstGeom prst="rect">
+            <a:avLst/>
+          </a:prstGeom>
+          <a:noFill/>
+          <a:ln/>
+        </p:spPr>
+        <p:txBody>
+          <a:bodyPr wrap="square" lIns="0" tIns="0" rIns="0" bIns="0" rtlCol="0" anchor="ctr">
             <a:normAutofit/>
           </a:bodyPr>
           <a:lstStyle/>
           <a:p>
-            <a:pPr indent="0" marL="0">
-              <a:buNone/>
-            </a:pPr>
-            <a:r>
-              <a:rPr lang="en-US" sz="1220" dirty="0">
-                <a:solidFill>
-                  <a:srgbClr val="17364A"/>
-                </a:solidFill>
-                <a:latin typeface="Aptos" pitchFamily="34" charset="0"/>
-                <a:ea typeface="Aptos" pitchFamily="34" charset="-122"/>
-                <a:cs typeface="Aptos" pitchFamily="34" charset="-120"/>
-              </a:rPr>
-              <a:t>It is not legal advice and does not replace review by agency legal.</a:t>
-            </a:r>
-            <a:endParaRPr lang="en-US" sz="1220" dirty="0"/>
-          </a:p>
-          <a:p>
-            <a:pPr indent="0" marL="0">
-              <a:buNone/>
-            </a:pPr>
-            <a:r>
-              <a:rPr lang="en-US" sz="1220" dirty="0">
-                <a:solidFill>
-                  <a:srgbClr val="17364A"/>
-                </a:solidFill>
-                <a:latin typeface="Aptos" pitchFamily="34" charset="0"/>
-                <a:ea typeface="Aptos" pitchFamily="34" charset="-122"/>
-                <a:cs typeface="Aptos" pitchFamily="34" charset="-120"/>
-              </a:rPr>
-              <a:t>Requirements may vary by state, locality, territory, Tribe,.</a:t>
-            </a:r>
-            <a:endParaRPr lang="en-US" sz="1220" dirty="0"/>
-          </a:p>
-          <a:p>
-            <a:pPr indent="0" marL="0">
-              <a:buNone/>
-            </a:pPr>
-            <a:r>
-              <a:rPr lang="en-US" sz="1220" dirty="0">
-                <a:solidFill>
-                  <a:srgbClr val="17364A"/>
-                </a:solidFill>
-                <a:latin typeface="Aptos" pitchFamily="34" charset="0"/>
-                <a:ea typeface="Aptos" pitchFamily="34" charset="-122"/>
-                <a:cs typeface="Aptos" pitchFamily="34" charset="-120"/>
-              </a:rPr>
-              <a:t>Learners should use this module to identify the issues that.</a:t>
-            </a:r>
-            <a:endParaRPr lang="en-US" sz="1220" dirty="0"/>
-          </a:p>
-        </p:txBody>
-      </p:sp>
-      <p:sp>
-        <p:nvSpPr>
-          <p:cNvPr id="16" name="Shape 14"/>
-          <p:cNvSpPr/>
-          <p:nvPr/>
-        </p:nvSpPr>
-        <p:spPr>
-          <a:xfrm>
-            <a:off x="7635240" y="4498848"/>
-            <a:ext cx="3474720" cy="1143000"/>
+            <a:pPr algn="ctr" indent="0" marL="0">
+              <a:buNone/>
+            </a:pPr>
+            <a:r>
+              <a:rPr lang="en-US" sz="880" b="1" dirty="0">
+                <a:solidFill>
+                  <a:srgbClr val="FFFFFF"/>
+                </a:solidFill>
+                <a:latin typeface="Aptos" pitchFamily="34" charset="0"/>
+                <a:ea typeface="Aptos" pitchFamily="34" charset="-122"/>
+                <a:cs typeface="Aptos" pitchFamily="34" charset="-120"/>
+              </a:rPr>
+              <a:t>Submit</a:t>
+            </a:r>
+            <a:endParaRPr lang="en-US" sz="880" dirty="0"/>
+          </a:p>
+        </p:txBody>
+      </p:sp>
+      <p:sp>
+        <p:nvSpPr>
+          <p:cNvPr id="18" name="Shape 16"/>
+          <p:cNvSpPr/>
+          <p:nvPr/>
+        </p:nvSpPr>
+        <p:spPr>
+          <a:xfrm>
+            <a:off x="9817608" y="3351276"/>
+            <a:ext cx="164592" cy="0"/>
+          </a:xfrm>
+          <a:prstGeom prst="line">
+            <a:avLst/>
+          </a:prstGeom>
+          <a:noFill/>
+          <a:ln w="15240">
+            <a:solidFill>
+              <a:srgbClr val="8ABBD8"/>
+            </a:solidFill>
+            <a:prstDash val="solid"/>
+          </a:ln>
+        </p:spPr>
+      </p:sp>
+      <p:sp>
+        <p:nvSpPr>
+          <p:cNvPr id="19" name="Shape 17"/>
+          <p:cNvSpPr/>
+          <p:nvPr/>
+        </p:nvSpPr>
+        <p:spPr>
+          <a:xfrm>
+            <a:off x="8927592" y="3200400"/>
+            <a:ext cx="890016" cy="301752"/>
           </a:xfrm>
           <a:prstGeom prst="roundRect">
             <a:avLst>
-              <a:gd name="adj" fmla="val 9600"/>
+              <a:gd name="adj" fmla="val 24242"/>
+            </a:avLst>
+          </a:prstGeom>
+          <a:solidFill>
+            <a:srgbClr val="2F8A28"/>
+          </a:solidFill>
+          <a:ln w="12700">
+            <a:solidFill>
+              <a:srgbClr val="2F8A28"/>
+            </a:solidFill>
+            <a:prstDash val="solid"/>
+          </a:ln>
+        </p:spPr>
+      </p:sp>
+      <p:sp>
+        <p:nvSpPr>
+          <p:cNvPr id="20" name="Text 18"/>
+          <p:cNvSpPr/>
+          <p:nvPr/>
+        </p:nvSpPr>
+        <p:spPr>
+          <a:xfrm>
+            <a:off x="8964168" y="3273552"/>
+            <a:ext cx="816864" cy="146304"/>
+          </a:xfrm>
+          <a:prstGeom prst="rect">
+            <a:avLst/>
+          </a:prstGeom>
+          <a:noFill/>
+          <a:ln/>
+        </p:spPr>
+        <p:txBody>
+          <a:bodyPr wrap="square" lIns="0" tIns="0" rIns="0" bIns="0" rtlCol="0" anchor="ctr">
+            <a:normAutofit/>
+          </a:bodyPr>
+          <a:lstStyle/>
+          <a:p>
+            <a:pPr algn="ctr" indent="0" marL="0">
+              <a:buNone/>
+            </a:pPr>
+            <a:r>
+              <a:rPr lang="en-US" sz="880" b="1" dirty="0">
+                <a:solidFill>
+                  <a:srgbClr val="FFFFFF"/>
+                </a:solidFill>
+                <a:latin typeface="Aptos" pitchFamily="34" charset="0"/>
+                <a:ea typeface="Aptos" pitchFamily="34" charset="-122"/>
+                <a:cs typeface="Aptos" pitchFamily="34" charset="-120"/>
+              </a:rPr>
+              <a:t>Review</a:t>
+            </a:r>
+            <a:endParaRPr lang="en-US" sz="880" dirty="0"/>
+          </a:p>
+        </p:txBody>
+      </p:sp>
+      <p:sp>
+        <p:nvSpPr>
+          <p:cNvPr id="21" name="Shape 19"/>
+          <p:cNvSpPr/>
+          <p:nvPr/>
+        </p:nvSpPr>
+        <p:spPr>
+          <a:xfrm>
+            <a:off x="9982200" y="3200400"/>
+            <a:ext cx="890016" cy="301752"/>
+          </a:xfrm>
+          <a:prstGeom prst="roundRect">
+            <a:avLst>
+              <a:gd name="adj" fmla="val 24242"/>
+            </a:avLst>
+          </a:prstGeom>
+          <a:solidFill>
+            <a:srgbClr val="6A4CA3"/>
+          </a:solidFill>
+          <a:ln w="12700">
+            <a:solidFill>
+              <a:srgbClr val="6A4CA3"/>
+            </a:solidFill>
+            <a:prstDash val="solid"/>
+          </a:ln>
+        </p:spPr>
+      </p:sp>
+      <p:sp>
+        <p:nvSpPr>
+          <p:cNvPr id="22" name="Text 20"/>
+          <p:cNvSpPr/>
+          <p:nvPr/>
+        </p:nvSpPr>
+        <p:spPr>
+          <a:xfrm>
+            <a:off x="10018776" y="3273552"/>
+            <a:ext cx="816864" cy="146304"/>
+          </a:xfrm>
+          <a:prstGeom prst="rect">
+            <a:avLst/>
+          </a:prstGeom>
+          <a:noFill/>
+          <a:ln/>
+        </p:spPr>
+        <p:txBody>
+          <a:bodyPr wrap="square" lIns="0" tIns="0" rIns="0" bIns="0" rtlCol="0" anchor="ctr">
+            <a:normAutofit/>
+          </a:bodyPr>
+          <a:lstStyle/>
+          <a:p>
+            <a:pPr algn="ctr" indent="0" marL="0">
+              <a:buNone/>
+            </a:pPr>
+            <a:r>
+              <a:rPr lang="en-US" sz="880" b="1" dirty="0">
+                <a:solidFill>
+                  <a:srgbClr val="FFFFFF"/>
+                </a:solidFill>
+                <a:latin typeface="Aptos" pitchFamily="34" charset="0"/>
+                <a:ea typeface="Aptos" pitchFamily="34" charset="-122"/>
+                <a:cs typeface="Aptos" pitchFamily="34" charset="-120"/>
+              </a:rPr>
+              <a:t>Oversee</a:t>
+            </a:r>
+            <a:endParaRPr lang="en-US" sz="880" dirty="0"/>
+          </a:p>
+        </p:txBody>
+      </p:sp>
+      <p:sp>
+        <p:nvSpPr>
+          <p:cNvPr id="23" name="Text 21"/>
+          <p:cNvSpPr/>
+          <p:nvPr/>
+        </p:nvSpPr>
+        <p:spPr>
+          <a:xfrm>
+            <a:off x="7854696" y="3694176"/>
+            <a:ext cx="3035808" cy="206654"/>
+          </a:xfrm>
+          <a:prstGeom prst="rect">
+            <a:avLst/>
+          </a:prstGeom>
+          <a:noFill/>
+          <a:ln/>
+        </p:spPr>
+        <p:txBody>
+          <a:bodyPr wrap="square" lIns="254" tIns="254" rIns="254" bIns="254" rtlCol="0" anchor="t">
+            <a:normAutofit/>
+          </a:bodyPr>
+          <a:lstStyle/>
+          <a:p>
+            <a:pPr indent="0" marL="0">
+              <a:buNone/>
+            </a:pPr>
+            <a:r>
+              <a:rPr lang="en-US" sz="1120" dirty="0">
+                <a:solidFill>
+                  <a:srgbClr val="17364A"/>
+                </a:solidFill>
+                <a:latin typeface="Aptos" pitchFamily="34" charset="0"/>
+                <a:ea typeface="Aptos" pitchFamily="34" charset="-122"/>
+                <a:cs typeface="Aptos" pitchFamily="34" charset="-120"/>
+              </a:rPr>
+              <a:t>A proposed AI use should move through documented review before it becomes an operational workflow.</a:t>
+            </a:r>
+            <a:endParaRPr lang="en-US" sz="1120" dirty="0"/>
+          </a:p>
+        </p:txBody>
+      </p:sp>
+      <p:sp>
+        <p:nvSpPr>
+          <p:cNvPr id="24" name="Shape 22"/>
+          <p:cNvSpPr/>
+          <p:nvPr/>
+        </p:nvSpPr>
+        <p:spPr>
+          <a:xfrm>
+            <a:off x="7635240" y="4184294"/>
+            <a:ext cx="3474720" cy="1466698"/>
+          </a:xfrm>
+          <a:prstGeom prst="roundRect">
+            <a:avLst>
+              <a:gd name="adj" fmla="val 7481"/>
             </a:avLst>
           </a:prstGeom>
           <a:solidFill>
@@ -15098,13 +15530,13 @@
       </p:sp>
       <p:sp>
         <p:nvSpPr>
-          <p:cNvPr id="17" name="Text 15"/>
-          <p:cNvSpPr/>
-          <p:nvPr/>
-        </p:nvSpPr>
-        <p:spPr>
-          <a:xfrm>
-            <a:off x="7799832" y="4645152"/>
+          <p:cNvPr id="25" name="Text 23"/>
+          <p:cNvSpPr/>
+          <p:nvPr/>
+        </p:nvSpPr>
+        <p:spPr>
+          <a:xfrm>
+            <a:off x="7799832" y="4330598"/>
             <a:ext cx="3145536" cy="256032"/>
           </a:xfrm>
           <a:prstGeom prst="rect">
@@ -15137,14 +15569,14 @@
       </p:sp>
       <p:sp>
         <p:nvSpPr>
-          <p:cNvPr id="18" name="Text 16"/>
-          <p:cNvSpPr/>
-          <p:nvPr/>
-        </p:nvSpPr>
-        <p:spPr>
-          <a:xfrm>
-            <a:off x="7799832" y="4974336"/>
-            <a:ext cx="3145536" cy="576072"/>
+          <p:cNvPr id="26" name="Text 24"/>
+          <p:cNvSpPr/>
+          <p:nvPr/>
+        </p:nvSpPr>
+        <p:spPr>
+          <a:xfrm>
+            <a:off x="7799832" y="4659782"/>
+            <a:ext cx="3145536" cy="899770"/>
           </a:xfrm>
           <a:prstGeom prst="rect">
             <a:avLst/>
@@ -15170,7 +15602,7 @@
                 <a:ea typeface="Aptos" pitchFamily="34" charset="-122"/>
                 <a:cs typeface="Aptos" pitchFamily="34" charset="-120"/>
               </a:rPr>
-              <a:t>Translate this concept into clear decision rights, review steps, documentation expectations, and escalation paths before.</a:t>
+              <a:t>Translate this concept into clear decision rights, review steps, documentation expectations, and escalation paths before an AI-supported workflow is approved.</a:t>
             </a:r>
             <a:endParaRPr lang="en-US" sz="1320" dirty="0"/>
           </a:p>
@@ -15539,11 +15971,11 @@
         <p:spPr>
           <a:xfrm>
             <a:off x="7635240" y="1325880"/>
-            <a:ext cx="3474720" cy="1325880"/>
+            <a:ext cx="3474720" cy="1207008"/>
           </a:xfrm>
           <a:prstGeom prst="roundRect">
             <a:avLst>
-              <a:gd name="adj" fmla="val 8276"/>
+              <a:gd name="adj" fmla="val 9091"/>
             </a:avLst>
           </a:prstGeom>
           <a:solidFill>
@@ -15605,7 +16037,7 @@
         <p:spPr>
           <a:xfrm>
             <a:off x="7799832" y="1801368"/>
-            <a:ext cx="3145536" cy="758952"/>
+            <a:ext cx="3145536" cy="640080"/>
           </a:xfrm>
           <a:prstGeom prst="rect">
             <a:avLst/>
@@ -15645,12 +16077,12 @@
         </p:nvSpPr>
         <p:spPr>
           <a:xfrm>
-            <a:off x="7635240" y="2788920"/>
-            <a:ext cx="3474720" cy="1536192"/>
+            <a:off x="7635240" y="2670048"/>
+            <a:ext cx="3474720" cy="1377086"/>
           </a:xfrm>
           <a:prstGeom prst="roundRect">
             <a:avLst>
-              <a:gd name="adj" fmla="val 7143"/>
+              <a:gd name="adj" fmla="val 7968"/>
             </a:avLst>
           </a:prstGeom>
           <a:solidFill>
@@ -15672,8 +16104,8 @@
         </p:nvSpPr>
         <p:spPr>
           <a:xfrm>
-            <a:off x="7799832" y="2935224"/>
-            <a:ext cx="3145536" cy="256032"/>
+            <a:off x="7799832" y="2798064"/>
+            <a:ext cx="3145536" cy="237744"/>
           </a:xfrm>
           <a:prstGeom prst="rect">
             <a:avLst/>
@@ -15689,7 +16121,7 @@
               <a:buNone/>
             </a:pPr>
             <a:r>
-              <a:rPr lang="en-US" sz="1300" b="1" dirty="0">
+              <a:rPr lang="en-US" sz="1250" b="1" dirty="0">
                 <a:solidFill>
                   <a:srgbClr val="0068B7"/>
                 </a:solidFill>
@@ -15697,101 +16129,317 @@
                 <a:ea typeface="Aptos" pitchFamily="34" charset="-122"/>
                 <a:cs typeface="Aptos" pitchFamily="34" charset="-120"/>
               </a:rPr>
-              <a:t>Concept checkpoints</a:t>
-            </a:r>
-            <a:endParaRPr lang="en-US" sz="1300" dirty="0"/>
-          </a:p>
-        </p:txBody>
-      </p:sp>
-      <p:sp>
-        <p:nvSpPr>
-          <p:cNvPr id="15" name="Text 13"/>
-          <p:cNvSpPr/>
-          <p:nvPr/>
-        </p:nvSpPr>
-        <p:spPr>
-          <a:xfrm>
-            <a:off x="7818120" y="3300984"/>
-            <a:ext cx="3090672" cy="877824"/>
-          </a:xfrm>
-          <a:prstGeom prst="rect">
-            <a:avLst/>
-          </a:prstGeom>
-          <a:noFill/>
-          <a:ln/>
-        </p:spPr>
-        <p:txBody>
-          <a:bodyPr wrap="square" lIns="508" tIns="508" rIns="508" bIns="508" rtlCol="0" anchor="t">
+              <a:t>Governance pathway</a:t>
+            </a:r>
+            <a:endParaRPr lang="en-US" sz="1250" dirty="0"/>
+          </a:p>
+        </p:txBody>
+      </p:sp>
+      <p:sp>
+        <p:nvSpPr>
+          <p:cNvPr id="15" name="Shape 13"/>
+          <p:cNvSpPr/>
+          <p:nvPr/>
+        </p:nvSpPr>
+        <p:spPr>
+          <a:xfrm>
+            <a:off x="8763000" y="3351276"/>
+            <a:ext cx="164592" cy="0"/>
+          </a:xfrm>
+          <a:prstGeom prst="line">
+            <a:avLst/>
+          </a:prstGeom>
+          <a:noFill/>
+          <a:ln w="15240">
+            <a:solidFill>
+              <a:srgbClr val="8ABBD8"/>
+            </a:solidFill>
+            <a:prstDash val="solid"/>
+          </a:ln>
+        </p:spPr>
+      </p:sp>
+      <p:sp>
+        <p:nvSpPr>
+          <p:cNvPr id="16" name="Shape 14"/>
+          <p:cNvSpPr/>
+          <p:nvPr/>
+        </p:nvSpPr>
+        <p:spPr>
+          <a:xfrm>
+            <a:off x="7872984" y="3200400"/>
+            <a:ext cx="890016" cy="301752"/>
+          </a:xfrm>
+          <a:prstGeom prst="roundRect">
+            <a:avLst>
+              <a:gd name="adj" fmla="val 24242"/>
+            </a:avLst>
+          </a:prstGeom>
+          <a:solidFill>
+            <a:srgbClr val="0068B7"/>
+          </a:solidFill>
+          <a:ln w="12700">
+            <a:solidFill>
+              <a:srgbClr val="0068B7"/>
+            </a:solidFill>
+            <a:prstDash val="solid"/>
+          </a:ln>
+        </p:spPr>
+      </p:sp>
+      <p:sp>
+        <p:nvSpPr>
+          <p:cNvPr id="17" name="Text 15"/>
+          <p:cNvSpPr/>
+          <p:nvPr/>
+        </p:nvSpPr>
+        <p:spPr>
+          <a:xfrm>
+            <a:off x="7909560" y="3273552"/>
+            <a:ext cx="816864" cy="146304"/>
+          </a:xfrm>
+          <a:prstGeom prst="rect">
+            <a:avLst/>
+          </a:prstGeom>
+          <a:noFill/>
+          <a:ln/>
+        </p:spPr>
+        <p:txBody>
+          <a:bodyPr wrap="square" lIns="0" tIns="0" rIns="0" bIns="0" rtlCol="0" anchor="ctr">
             <a:normAutofit/>
           </a:bodyPr>
           <a:lstStyle/>
           <a:p>
-            <a:pPr indent="0" marL="0">
-              <a:buNone/>
-            </a:pPr>
-            <a:r>
-              <a:rPr lang="en-US" sz="1220" dirty="0">
-                <a:solidFill>
-                  <a:srgbClr val="17364A"/>
-                </a:solidFill>
-                <a:latin typeface="Aptos" pitchFamily="34" charset="0"/>
-                <a:ea typeface="Aptos" pitchFamily="34" charset="-122"/>
-                <a:cs typeface="Aptos" pitchFamily="34" charset="-120"/>
-              </a:rPr>
-              <a:t>A vendor may provide the model, IT may manage access, a program.</a:t>
-            </a:r>
-            <a:endParaRPr lang="en-US" sz="1220" dirty="0"/>
-          </a:p>
-          <a:p>
-            <a:pPr indent="0" marL="0">
-              <a:buNone/>
-            </a:pPr>
-            <a:r>
-              <a:rPr lang="en-US" sz="1220" dirty="0">
-                <a:solidFill>
-                  <a:srgbClr val="17364A"/>
-                </a:solidFill>
-                <a:latin typeface="Aptos" pitchFamily="34" charset="0"/>
-                <a:ea typeface="Aptos" pitchFamily="34" charset="-122"/>
-                <a:cs typeface="Aptos" pitchFamily="34" charset="-120"/>
-              </a:rPr>
-              <a:t>Without a formal accountability model, each actor may assume that.</a:t>
-            </a:r>
-            <a:endParaRPr lang="en-US" sz="1220" dirty="0"/>
-          </a:p>
-          <a:p>
-            <a:pPr indent="0" marL="0">
-              <a:buNone/>
-            </a:pPr>
-            <a:r>
-              <a:rPr lang="en-US" sz="1220" dirty="0">
-                <a:solidFill>
-                  <a:srgbClr val="17364A"/>
-                </a:solidFill>
-                <a:latin typeface="Aptos" pitchFamily="34" charset="0"/>
-                <a:ea typeface="Aptos" pitchFamily="34" charset="-122"/>
-                <a:cs typeface="Aptos" pitchFamily="34" charset="-120"/>
-              </a:rPr>
-              <a:t>Clear decision rights support trust and speed.</a:t>
-            </a:r>
-            <a:endParaRPr lang="en-US" sz="1220" dirty="0"/>
-          </a:p>
-        </p:txBody>
-      </p:sp>
-      <p:sp>
-        <p:nvSpPr>
-          <p:cNvPr id="16" name="Shape 14"/>
-          <p:cNvSpPr/>
-          <p:nvPr/>
-        </p:nvSpPr>
-        <p:spPr>
-          <a:xfrm>
-            <a:off x="7635240" y="4498848"/>
-            <a:ext cx="3474720" cy="1143000"/>
+            <a:pPr algn="ctr" indent="0" marL="0">
+              <a:buNone/>
+            </a:pPr>
+            <a:r>
+              <a:rPr lang="en-US" sz="880" b="1" dirty="0">
+                <a:solidFill>
+                  <a:srgbClr val="FFFFFF"/>
+                </a:solidFill>
+                <a:latin typeface="Aptos" pitchFamily="34" charset="0"/>
+                <a:ea typeface="Aptos" pitchFamily="34" charset="-122"/>
+                <a:cs typeface="Aptos" pitchFamily="34" charset="-120"/>
+              </a:rPr>
+              <a:t>Submit</a:t>
+            </a:r>
+            <a:endParaRPr lang="en-US" sz="880" dirty="0"/>
+          </a:p>
+        </p:txBody>
+      </p:sp>
+      <p:sp>
+        <p:nvSpPr>
+          <p:cNvPr id="18" name="Shape 16"/>
+          <p:cNvSpPr/>
+          <p:nvPr/>
+        </p:nvSpPr>
+        <p:spPr>
+          <a:xfrm>
+            <a:off x="9817608" y="3351276"/>
+            <a:ext cx="164592" cy="0"/>
+          </a:xfrm>
+          <a:prstGeom prst="line">
+            <a:avLst/>
+          </a:prstGeom>
+          <a:noFill/>
+          <a:ln w="15240">
+            <a:solidFill>
+              <a:srgbClr val="8ABBD8"/>
+            </a:solidFill>
+            <a:prstDash val="solid"/>
+          </a:ln>
+        </p:spPr>
+      </p:sp>
+      <p:sp>
+        <p:nvSpPr>
+          <p:cNvPr id="19" name="Shape 17"/>
+          <p:cNvSpPr/>
+          <p:nvPr/>
+        </p:nvSpPr>
+        <p:spPr>
+          <a:xfrm>
+            <a:off x="8927592" y="3200400"/>
+            <a:ext cx="890016" cy="301752"/>
           </a:xfrm>
           <a:prstGeom prst="roundRect">
             <a:avLst>
-              <a:gd name="adj" fmla="val 9600"/>
+              <a:gd name="adj" fmla="val 24242"/>
+            </a:avLst>
+          </a:prstGeom>
+          <a:solidFill>
+            <a:srgbClr val="2F8A28"/>
+          </a:solidFill>
+          <a:ln w="12700">
+            <a:solidFill>
+              <a:srgbClr val="2F8A28"/>
+            </a:solidFill>
+            <a:prstDash val="solid"/>
+          </a:ln>
+        </p:spPr>
+      </p:sp>
+      <p:sp>
+        <p:nvSpPr>
+          <p:cNvPr id="20" name="Text 18"/>
+          <p:cNvSpPr/>
+          <p:nvPr/>
+        </p:nvSpPr>
+        <p:spPr>
+          <a:xfrm>
+            <a:off x="8964168" y="3273552"/>
+            <a:ext cx="816864" cy="146304"/>
+          </a:xfrm>
+          <a:prstGeom prst="rect">
+            <a:avLst/>
+          </a:prstGeom>
+          <a:noFill/>
+          <a:ln/>
+        </p:spPr>
+        <p:txBody>
+          <a:bodyPr wrap="square" lIns="0" tIns="0" rIns="0" bIns="0" rtlCol="0" anchor="ctr">
+            <a:normAutofit/>
+          </a:bodyPr>
+          <a:lstStyle/>
+          <a:p>
+            <a:pPr algn="ctr" indent="0" marL="0">
+              <a:buNone/>
+            </a:pPr>
+            <a:r>
+              <a:rPr lang="en-US" sz="880" b="1" dirty="0">
+                <a:solidFill>
+                  <a:srgbClr val="FFFFFF"/>
+                </a:solidFill>
+                <a:latin typeface="Aptos" pitchFamily="34" charset="0"/>
+                <a:ea typeface="Aptos" pitchFamily="34" charset="-122"/>
+                <a:cs typeface="Aptos" pitchFamily="34" charset="-120"/>
+              </a:rPr>
+              <a:t>Review</a:t>
+            </a:r>
+            <a:endParaRPr lang="en-US" sz="880" dirty="0"/>
+          </a:p>
+        </p:txBody>
+      </p:sp>
+      <p:sp>
+        <p:nvSpPr>
+          <p:cNvPr id="21" name="Shape 19"/>
+          <p:cNvSpPr/>
+          <p:nvPr/>
+        </p:nvSpPr>
+        <p:spPr>
+          <a:xfrm>
+            <a:off x="9982200" y="3200400"/>
+            <a:ext cx="890016" cy="301752"/>
+          </a:xfrm>
+          <a:prstGeom prst="roundRect">
+            <a:avLst>
+              <a:gd name="adj" fmla="val 24242"/>
+            </a:avLst>
+          </a:prstGeom>
+          <a:solidFill>
+            <a:srgbClr val="6A4CA3"/>
+          </a:solidFill>
+          <a:ln w="12700">
+            <a:solidFill>
+              <a:srgbClr val="6A4CA3"/>
+            </a:solidFill>
+            <a:prstDash val="solid"/>
+          </a:ln>
+        </p:spPr>
+      </p:sp>
+      <p:sp>
+        <p:nvSpPr>
+          <p:cNvPr id="22" name="Text 20"/>
+          <p:cNvSpPr/>
+          <p:nvPr/>
+        </p:nvSpPr>
+        <p:spPr>
+          <a:xfrm>
+            <a:off x="10018776" y="3273552"/>
+            <a:ext cx="816864" cy="146304"/>
+          </a:xfrm>
+          <a:prstGeom prst="rect">
+            <a:avLst/>
+          </a:prstGeom>
+          <a:noFill/>
+          <a:ln/>
+        </p:spPr>
+        <p:txBody>
+          <a:bodyPr wrap="square" lIns="0" tIns="0" rIns="0" bIns="0" rtlCol="0" anchor="ctr">
+            <a:normAutofit/>
+          </a:bodyPr>
+          <a:lstStyle/>
+          <a:p>
+            <a:pPr algn="ctr" indent="0" marL="0">
+              <a:buNone/>
+            </a:pPr>
+            <a:r>
+              <a:rPr lang="en-US" sz="880" b="1" dirty="0">
+                <a:solidFill>
+                  <a:srgbClr val="FFFFFF"/>
+                </a:solidFill>
+                <a:latin typeface="Aptos" pitchFamily="34" charset="0"/>
+                <a:ea typeface="Aptos" pitchFamily="34" charset="-122"/>
+                <a:cs typeface="Aptos" pitchFamily="34" charset="-120"/>
+              </a:rPr>
+              <a:t>Oversee</a:t>
+            </a:r>
+            <a:endParaRPr lang="en-US" sz="880" dirty="0"/>
+          </a:p>
+        </p:txBody>
+      </p:sp>
+      <p:sp>
+        <p:nvSpPr>
+          <p:cNvPr id="23" name="Text 21"/>
+          <p:cNvSpPr/>
+          <p:nvPr/>
+        </p:nvSpPr>
+        <p:spPr>
+          <a:xfrm>
+            <a:off x="7854696" y="3694176"/>
+            <a:ext cx="3035808" cy="206654"/>
+          </a:xfrm>
+          <a:prstGeom prst="rect">
+            <a:avLst/>
+          </a:prstGeom>
+          <a:noFill/>
+          <a:ln/>
+        </p:spPr>
+        <p:txBody>
+          <a:bodyPr wrap="square" lIns="254" tIns="254" rIns="254" bIns="254" rtlCol="0" anchor="t">
+            <a:normAutofit/>
+          </a:bodyPr>
+          <a:lstStyle/>
+          <a:p>
+            <a:pPr indent="0" marL="0">
+              <a:buNone/>
+            </a:pPr>
+            <a:r>
+              <a:rPr lang="en-US" sz="1120" dirty="0">
+                <a:solidFill>
+                  <a:srgbClr val="17364A"/>
+                </a:solidFill>
+                <a:latin typeface="Aptos" pitchFamily="34" charset="0"/>
+                <a:ea typeface="Aptos" pitchFamily="34" charset="-122"/>
+                <a:cs typeface="Aptos" pitchFamily="34" charset="-120"/>
+              </a:rPr>
+              <a:t>A proposed AI use should move through documented review before it becomes an operational workflow.</a:t>
+            </a:r>
+            <a:endParaRPr lang="en-US" sz="1120" dirty="0"/>
+          </a:p>
+        </p:txBody>
+      </p:sp>
+      <p:sp>
+        <p:nvSpPr>
+          <p:cNvPr id="24" name="Shape 22"/>
+          <p:cNvSpPr/>
+          <p:nvPr/>
+        </p:nvSpPr>
+        <p:spPr>
+          <a:xfrm>
+            <a:off x="7635240" y="4184294"/>
+            <a:ext cx="3474720" cy="1466698"/>
+          </a:xfrm>
+          <a:prstGeom prst="roundRect">
+            <a:avLst>
+              <a:gd name="adj" fmla="val 7481"/>
             </a:avLst>
           </a:prstGeom>
           <a:solidFill>
@@ -15807,13 +16455,13 @@
       </p:sp>
       <p:sp>
         <p:nvSpPr>
-          <p:cNvPr id="17" name="Text 15"/>
-          <p:cNvSpPr/>
-          <p:nvPr/>
-        </p:nvSpPr>
-        <p:spPr>
-          <a:xfrm>
-            <a:off x="7799832" y="4645152"/>
+          <p:cNvPr id="25" name="Text 23"/>
+          <p:cNvSpPr/>
+          <p:nvPr/>
+        </p:nvSpPr>
+        <p:spPr>
+          <a:xfrm>
+            <a:off x="7799832" y="4330598"/>
             <a:ext cx="3145536" cy="256032"/>
           </a:xfrm>
           <a:prstGeom prst="rect">
@@ -15846,14 +16494,14 @@
       </p:sp>
       <p:sp>
         <p:nvSpPr>
-          <p:cNvPr id="18" name="Text 16"/>
-          <p:cNvSpPr/>
-          <p:nvPr/>
-        </p:nvSpPr>
-        <p:spPr>
-          <a:xfrm>
-            <a:off x="7799832" y="4974336"/>
-            <a:ext cx="3145536" cy="576072"/>
+          <p:cNvPr id="26" name="Text 24"/>
+          <p:cNvSpPr/>
+          <p:nvPr/>
+        </p:nvSpPr>
+        <p:spPr>
+          <a:xfrm>
+            <a:off x="7799832" y="4659782"/>
+            <a:ext cx="3145536" cy="899770"/>
           </a:xfrm>
           <a:prstGeom prst="rect">
             <a:avLst/>
@@ -15879,7 +16527,7 @@
                 <a:ea typeface="Aptos" pitchFamily="34" charset="-122"/>
                 <a:cs typeface="Aptos" pitchFamily="34" charset="-120"/>
               </a:rPr>
-              <a:t>Connect the concept to public health purpose, responsible use, required safeguards, documentation, and the next action a.</a:t>
+              <a:t>Connect the concept to public health purpose, responsible use, required safeguards, documentation, and the next action a department should take.</a:t>
             </a:r>
             <a:endParaRPr lang="en-US" sz="1320" dirty="0"/>
           </a:p>
@@ -16248,11 +16896,11 @@
         <p:spPr>
           <a:xfrm>
             <a:off x="7635240" y="1325880"/>
-            <a:ext cx="3474720" cy="1325880"/>
+            <a:ext cx="3474720" cy="1255471"/>
           </a:xfrm>
           <a:prstGeom prst="roundRect">
             <a:avLst>
-              <a:gd name="adj" fmla="val 8276"/>
+              <a:gd name="adj" fmla="val 8740"/>
             </a:avLst>
           </a:prstGeom>
           <a:solidFill>
@@ -16314,7 +16962,7 @@
         <p:spPr>
           <a:xfrm>
             <a:off x="7799832" y="1801368"/>
-            <a:ext cx="3145536" cy="758952"/>
+            <a:ext cx="3145536" cy="688543"/>
           </a:xfrm>
           <a:prstGeom prst="rect">
             <a:avLst/>
@@ -16354,12 +17002,12 @@
         </p:nvSpPr>
         <p:spPr>
           <a:xfrm>
-            <a:off x="7635240" y="2788920"/>
-            <a:ext cx="3474720" cy="1536192"/>
+            <a:off x="7635240" y="2718511"/>
+            <a:ext cx="3474720" cy="1328623"/>
           </a:xfrm>
           <a:prstGeom prst="roundRect">
             <a:avLst>
-              <a:gd name="adj" fmla="val 7143"/>
+              <a:gd name="adj" fmla="val 8259"/>
             </a:avLst>
           </a:prstGeom>
           <a:solidFill>
@@ -16381,7 +17029,7 @@
         </p:nvSpPr>
         <p:spPr>
           <a:xfrm>
-            <a:off x="7799832" y="2935224"/>
+            <a:off x="7799832" y="2864815"/>
             <a:ext cx="3145536" cy="256032"/>
           </a:xfrm>
           <a:prstGeom prst="rect">
@@ -16420,8 +17068,8 @@
         </p:nvSpPr>
         <p:spPr>
           <a:xfrm>
-            <a:off x="7818120" y="3300984"/>
-            <a:ext cx="3090672" cy="877824"/>
+            <a:off x="7818120" y="3230575"/>
+            <a:ext cx="3090672" cy="670255"/>
           </a:xfrm>
           <a:prstGeom prst="rect">
             <a:avLst/>
@@ -16495,12 +17143,12 @@
         </p:nvSpPr>
         <p:spPr>
           <a:xfrm>
-            <a:off x="7635240" y="4498848"/>
-            <a:ext cx="3474720" cy="1143000"/>
+            <a:off x="7635240" y="4184294"/>
+            <a:ext cx="3474720" cy="1466698"/>
           </a:xfrm>
           <a:prstGeom prst="roundRect">
             <a:avLst>
-              <a:gd name="adj" fmla="val 9600"/>
+              <a:gd name="adj" fmla="val 7481"/>
             </a:avLst>
           </a:prstGeom>
           <a:solidFill>
@@ -16522,7 +17170,7 @@
         </p:nvSpPr>
         <p:spPr>
           <a:xfrm>
-            <a:off x="7799832" y="4645152"/>
+            <a:off x="7799832" y="4330598"/>
             <a:ext cx="3145536" cy="256032"/>
           </a:xfrm>
           <a:prstGeom prst="rect">
@@ -16561,8 +17209,8 @@
         </p:nvSpPr>
         <p:spPr>
           <a:xfrm>
-            <a:off x="7799832" y="4974336"/>
-            <a:ext cx="3145536" cy="576072"/>
+            <a:off x="7799832" y="4659782"/>
+            <a:ext cx="3145536" cy="899770"/>
           </a:xfrm>
           <a:prstGeom prst="rect">
             <a:avLst/>
@@ -16588,7 +17236,7 @@
                 <a:ea typeface="Aptos" pitchFamily="34" charset="-122"/>
                 <a:cs typeface="Aptos" pitchFamily="34" charset="-120"/>
               </a:rPr>
-              <a:t>Connect the concept to public health purpose, responsible use, required safeguards, documentation, and the next action a.</a:t>
+              <a:t>Connect the concept to public health purpose, responsible use, required safeguards, documentation, and the next action a department should take.</a:t>
             </a:r>
             <a:endParaRPr lang="en-US" sz="1320" dirty="0"/>
           </a:p>

--- a/downloads/presentations/modules/exe-400.pptx
+++ b/downloads/presentations/modules/exe-400.pptx
@@ -3243,8 +3243,8 @@
         </p:nvSpPr>
         <p:spPr>
           <a:xfrm>
-            <a:off x="868680" y="1508760"/>
-            <a:ext cx="6309360" cy="4160520"/>
+            <a:off x="822960" y="1463040"/>
+            <a:ext cx="6565392" cy="4343400"/>
           </a:xfrm>
           <a:prstGeom prst="rect">
             <a:avLst/>
@@ -3262,7 +3262,7 @@
               <a:buNone/>
             </a:pPr>
             <a:r>
-              <a:rPr lang="en-US" sz="2100" dirty="0">
+              <a:rPr lang="en-US" sz="1920" dirty="0">
                 <a:solidFill>
                   <a:srgbClr val="003A63"/>
                 </a:solidFill>
@@ -3272,14 +3272,14 @@
               </a:rPr>
               <a:t>• Decision rights should be defined across the full AI lifecycle.</a:t>
             </a:r>
-            <a:endParaRPr lang="en-US" sz="2100" dirty="0"/>
-          </a:p>
-          <a:p>
-            <a:pPr indent="0" marL="0">
-              <a:buNone/>
-            </a:pPr>
-            <a:r>
-              <a:rPr lang="en-US" sz="2100" dirty="0">
+            <a:endParaRPr lang="en-US" sz="1920" dirty="0"/>
+          </a:p>
+          <a:p>
+            <a:pPr indent="0" marL="0">
+              <a:buNone/>
+            </a:pPr>
+            <a:r>
+              <a:rPr lang="en-US" sz="1920" dirty="0">
                 <a:solidFill>
                   <a:srgbClr val="003A63"/>
                 </a:solidFill>
@@ -3287,16 +3287,16 @@
                 <a:ea typeface="Aptos" pitchFamily="34" charset="-122"/>
                 <a:cs typeface="Aptos" pitchFamily="34" charset="-120"/>
               </a:rPr>
-              <a:t>• During ideation, leadership may decide whether a use case aligns with agency priorities.</a:t>
-            </a:r>
-            <a:endParaRPr lang="en-US" sz="2100" dirty="0"/>
-          </a:p>
-          <a:p>
-            <a:pPr indent="0" marL="0">
-              <a:buNone/>
-            </a:pPr>
-            <a:r>
-              <a:rPr lang="en-US" sz="2100" dirty="0">
+              <a:t>• During ideation, leadership may decide whether a use case aligns with agency.</a:t>
+            </a:r>
+            <a:endParaRPr lang="en-US" sz="1920" dirty="0"/>
+          </a:p>
+          <a:p>
+            <a:pPr indent="0" marL="0">
+              <a:buNone/>
+            </a:pPr>
+            <a:r>
+              <a:rPr lang="en-US" sz="1920" dirty="0">
                 <a:solidFill>
                   <a:srgbClr val="003A63"/>
                 </a:solidFill>
@@ -3304,9 +3304,9 @@
                 <a:ea typeface="Aptos" pitchFamily="34" charset="-122"/>
                 <a:cs typeface="Aptos" pitchFamily="34" charset="-120"/>
               </a:rPr>
-              <a:t>• During review, governance may decide whether the use case is low, moderate, or high risk.</a:t>
-            </a:r>
-            <a:endParaRPr lang="en-US" sz="2100" dirty="0"/>
+              <a:t>• During review, governance may decide whether the use case is low, moderate,.</a:t>
+            </a:r>
+            <a:endParaRPr lang="en-US" sz="1920" dirty="0"/>
           </a:p>
         </p:txBody>
       </p:sp>
@@ -3318,12 +3318,12 @@
         </p:nvSpPr>
         <p:spPr>
           <a:xfrm>
-            <a:off x="7635240" y="1325880"/>
-            <a:ext cx="3474720" cy="1207008"/>
+            <a:off x="7543800" y="1325880"/>
+            <a:ext cx="3611880" cy="1261872"/>
           </a:xfrm>
           <a:prstGeom prst="roundRect">
             <a:avLst>
-              <a:gd name="adj" fmla="val 9091"/>
+              <a:gd name="adj" fmla="val 8696"/>
             </a:avLst>
           </a:prstGeom>
           <a:solidFill>
@@ -3345,8 +3345,8 @@
         </p:nvSpPr>
         <p:spPr>
           <a:xfrm>
-            <a:off x="7799832" y="1472184"/>
-            <a:ext cx="3145536" cy="256032"/>
+            <a:off x="7708392" y="1453896"/>
+            <a:ext cx="3282696" cy="228600"/>
           </a:xfrm>
           <a:prstGeom prst="rect">
             <a:avLst/>
@@ -3362,7 +3362,7 @@
               <a:buNone/>
             </a:pPr>
             <a:r>
-              <a:rPr lang="en-US" sz="1300" b="1" dirty="0">
+              <a:rPr lang="en-US" sz="1220" b="1" dirty="0">
                 <a:solidFill>
                   <a:srgbClr val="0068B7"/>
                 </a:solidFill>
@@ -3372,7 +3372,7 @@
               </a:rPr>
               <a:t>Governance lens</a:t>
             </a:r>
-            <a:endParaRPr lang="en-US" sz="1300" dirty="0"/>
+            <a:endParaRPr lang="en-US" sz="1220" dirty="0"/>
           </a:p>
         </p:txBody>
       </p:sp>
@@ -3384,8 +3384,8 @@
         </p:nvSpPr>
         <p:spPr>
           <a:xfrm>
-            <a:off x="7799832" y="1801368"/>
-            <a:ext cx="3145536" cy="640080"/>
+            <a:off x="7708392" y="1764792"/>
+            <a:ext cx="3282696" cy="749808"/>
           </a:xfrm>
           <a:prstGeom prst="rect">
             <a:avLst/>
@@ -3403,7 +3403,7 @@
               <a:buNone/>
             </a:pPr>
             <a:r>
-              <a:rPr lang="en-US" sz="1320" dirty="0">
+              <a:rPr lang="en-US" sz="1220" dirty="0">
                 <a:solidFill>
                   <a:srgbClr val="17364A"/>
                 </a:solidFill>
@@ -3413,7 +3413,7 @@
               </a:rPr>
               <a:t>Decision rights should be defined across the full AI lifecycle.</a:t>
             </a:r>
-            <a:endParaRPr lang="en-US" sz="1320" dirty="0"/>
+            <a:endParaRPr lang="en-US" sz="1220" dirty="0"/>
           </a:p>
         </p:txBody>
       </p:sp>
@@ -3425,12 +3425,12 @@
         </p:nvSpPr>
         <p:spPr>
           <a:xfrm>
-            <a:off x="7635240" y="2670048"/>
-            <a:ext cx="3474720" cy="1377086"/>
+            <a:off x="7543800" y="2724912"/>
+            <a:ext cx="3611880" cy="1527048"/>
           </a:xfrm>
           <a:prstGeom prst="roundRect">
             <a:avLst>
-              <a:gd name="adj" fmla="val 7968"/>
+              <a:gd name="adj" fmla="val 7186"/>
             </a:avLst>
           </a:prstGeom>
           <a:solidFill>
@@ -3452,8 +3452,8 @@
         </p:nvSpPr>
         <p:spPr>
           <a:xfrm>
-            <a:off x="7799832" y="2816352"/>
-            <a:ext cx="3145536" cy="256032"/>
+            <a:off x="7708392" y="2852928"/>
+            <a:ext cx="3282696" cy="228600"/>
           </a:xfrm>
           <a:prstGeom prst="rect">
             <a:avLst/>
@@ -3469,7 +3469,7 @@
               <a:buNone/>
             </a:pPr>
             <a:r>
-              <a:rPr lang="en-US" sz="1300" b="1" dirty="0">
+              <a:rPr lang="en-US" sz="1220" b="1" dirty="0">
                 <a:solidFill>
                   <a:srgbClr val="0068B7"/>
                 </a:solidFill>
@@ -3479,7 +3479,7 @@
               </a:rPr>
               <a:t>Concept checkpoints</a:t>
             </a:r>
-            <a:endParaRPr lang="en-US" sz="1300" dirty="0"/>
+            <a:endParaRPr lang="en-US" sz="1220" dirty="0"/>
           </a:p>
         </p:txBody>
       </p:sp>
@@ -3491,8 +3491,8 @@
         </p:nvSpPr>
         <p:spPr>
           <a:xfrm>
-            <a:off x="7818120" y="3182112"/>
-            <a:ext cx="3090672" cy="718718"/>
+            <a:off x="7726680" y="3182112"/>
+            <a:ext cx="3227832" cy="960120"/>
           </a:xfrm>
           <a:prstGeom prst="rect">
             <a:avLst/>
@@ -3510,7 +3510,7 @@
               <a:buNone/>
             </a:pPr>
             <a:r>
-              <a:rPr lang="en-US" sz="1220" dirty="0">
+              <a:rPr lang="en-US" sz="1140" dirty="0">
                 <a:solidFill>
                   <a:srgbClr val="17364A"/>
                 </a:solidFill>
@@ -3518,16 +3518,16 @@
                 <a:ea typeface="Aptos" pitchFamily="34" charset="-122"/>
                 <a:cs typeface="Aptos" pitchFamily="34" charset="-120"/>
               </a:rPr>
-              <a:t>During procurement, authorized officials decide whether vendor.</a:t>
-            </a:r>
-            <a:endParaRPr lang="en-US" sz="1220" dirty="0"/>
-          </a:p>
-          <a:p>
-            <a:pPr indent="0" marL="0">
-              <a:buNone/>
-            </a:pPr>
-            <a:r>
-              <a:rPr lang="en-US" sz="1220" dirty="0">
+              <a:t>During procurement, authorized officials decide.</a:t>
+            </a:r>
+            <a:endParaRPr lang="en-US" sz="1140" dirty="0"/>
+          </a:p>
+          <a:p>
+            <a:pPr indent="0" marL="0">
+              <a:buNone/>
+            </a:pPr>
+            <a:r>
+              <a:rPr lang="en-US" sz="1140" dirty="0">
                 <a:solidFill>
                   <a:srgbClr val="17364A"/>
                 </a:solidFill>
@@ -3535,16 +3535,16 @@
                 <a:ea typeface="Aptos" pitchFamily="34" charset="-122"/>
                 <a:cs typeface="Aptos" pitchFamily="34" charset="-120"/>
               </a:rPr>
-              <a:t>During implementation, program and technical owners decide whether.</a:t>
-            </a:r>
-            <a:endParaRPr lang="en-US" sz="1220" dirty="0"/>
-          </a:p>
-          <a:p>
-            <a:pPr indent="0" marL="0">
-              <a:buNone/>
-            </a:pPr>
-            <a:r>
-              <a:rPr lang="en-US" sz="1220" dirty="0">
+              <a:t>During implementation, program and technical.</a:t>
+            </a:r>
+            <a:endParaRPr lang="en-US" sz="1140" dirty="0"/>
+          </a:p>
+          <a:p>
+            <a:pPr indent="0" marL="0">
+              <a:buNone/>
+            </a:pPr>
+            <a:r>
+              <a:rPr lang="en-US" sz="1140" dirty="0">
                 <a:solidFill>
                   <a:srgbClr val="17364A"/>
                 </a:solidFill>
@@ -3552,9 +3552,9 @@
                 <a:ea typeface="Aptos" pitchFamily="34" charset="-122"/>
                 <a:cs typeface="Aptos" pitchFamily="34" charset="-120"/>
               </a:rPr>
-              <a:t>During operations, defined owners decide whether monitoring.</a:t>
-            </a:r>
-            <a:endParaRPr lang="en-US" sz="1220" dirty="0"/>
+              <a:t>During operations, defined owners decide whether.</a:t>
+            </a:r>
+            <a:endParaRPr lang="en-US" sz="1140" dirty="0"/>
           </a:p>
         </p:txBody>
       </p:sp>
@@ -3566,12 +3566,12 @@
         </p:nvSpPr>
         <p:spPr>
           <a:xfrm>
-            <a:off x="7635240" y="4184294"/>
-            <a:ext cx="3474720" cy="1466698"/>
+            <a:off x="7543800" y="4389120"/>
+            <a:ext cx="3611880" cy="1261872"/>
           </a:xfrm>
           <a:prstGeom prst="roundRect">
             <a:avLst>
-              <a:gd name="adj" fmla="val 7481"/>
+              <a:gd name="adj" fmla="val 8696"/>
             </a:avLst>
           </a:prstGeom>
           <a:solidFill>
@@ -3593,8 +3593,8 @@
         </p:nvSpPr>
         <p:spPr>
           <a:xfrm>
-            <a:off x="7799832" y="4330598"/>
-            <a:ext cx="3145536" cy="256032"/>
+            <a:off x="7708392" y="4517136"/>
+            <a:ext cx="3282696" cy="228600"/>
           </a:xfrm>
           <a:prstGeom prst="rect">
             <a:avLst/>
@@ -3610,7 +3610,7 @@
               <a:buNone/>
             </a:pPr>
             <a:r>
-              <a:rPr lang="en-US" sz="1300" b="1" dirty="0">
+              <a:rPr lang="en-US" sz="1220" b="1" dirty="0">
                 <a:solidFill>
                   <a:srgbClr val="0068B7"/>
                 </a:solidFill>
@@ -3620,7 +3620,7 @@
               </a:rPr>
               <a:t>What to document</a:t>
             </a:r>
-            <a:endParaRPr lang="en-US" sz="1300" dirty="0"/>
+            <a:endParaRPr lang="en-US" sz="1220" dirty="0"/>
           </a:p>
         </p:txBody>
       </p:sp>
@@ -3632,8 +3632,8 @@
         </p:nvSpPr>
         <p:spPr>
           <a:xfrm>
-            <a:off x="7799832" y="4659782"/>
-            <a:ext cx="3145536" cy="899770"/>
+            <a:off x="7708392" y="4828032"/>
+            <a:ext cx="3282696" cy="749808"/>
           </a:xfrm>
           <a:prstGeom prst="rect">
             <a:avLst/>
@@ -3651,7 +3651,7 @@
               <a:buNone/>
             </a:pPr>
             <a:r>
-              <a:rPr lang="en-US" sz="1320" dirty="0">
+              <a:rPr lang="en-US" sz="1220" dirty="0">
                 <a:solidFill>
                   <a:srgbClr val="17364A"/>
                 </a:solidFill>
@@ -3659,9 +3659,9 @@
                 <a:ea typeface="Aptos" pitchFamily="34" charset="-122"/>
                 <a:cs typeface="Aptos" pitchFamily="34" charset="-120"/>
               </a:rPr>
-              <a:t>Translate this concept into clear decision rights, review steps, documentation expectations, and escalation paths before an AI-supported workflow is approved.</a:t>
-            </a:r>
-            <a:endParaRPr lang="en-US" sz="1320" dirty="0"/>
+              <a:t>Translate this concept into clear decision rights, review steps, documentation.</a:t>
+            </a:r>
+            <a:endParaRPr lang="en-US" sz="1220" dirty="0"/>
           </a:p>
         </p:txBody>
       </p:sp>
@@ -3952,8 +3952,8 @@
         </p:nvSpPr>
         <p:spPr>
           <a:xfrm>
-            <a:off x="868680" y="1508760"/>
-            <a:ext cx="6309360" cy="4160520"/>
+            <a:off x="822960" y="1463040"/>
+            <a:ext cx="6565392" cy="4343400"/>
           </a:xfrm>
           <a:prstGeom prst="rect">
             <a:avLst/>
@@ -3971,7 +3971,7 @@
               <a:buNone/>
             </a:pPr>
             <a:r>
-              <a:rPr lang="en-US" sz="2100" dirty="0">
+              <a:rPr lang="en-US" sz="1920" dirty="0">
                 <a:solidFill>
                   <a:srgbClr val="003A63"/>
                 </a:solidFill>
@@ -3981,14 +3981,14 @@
               </a:rPr>
               <a:t>• One risk is accountability diffusion.</a:t>
             </a:r>
-            <a:endParaRPr lang="en-US" sz="2100" dirty="0"/>
-          </a:p>
-          <a:p>
-            <a:pPr indent="0" marL="0">
-              <a:buNone/>
-            </a:pPr>
-            <a:r>
-              <a:rPr lang="en-US" sz="2100" dirty="0">
+            <a:endParaRPr lang="en-US" sz="1920" dirty="0"/>
+          </a:p>
+          <a:p>
+            <a:pPr indent="0" marL="0">
+              <a:buNone/>
+            </a:pPr>
+            <a:r>
+              <a:rPr lang="en-US" sz="1920" dirty="0">
                 <a:solidFill>
                   <a:srgbClr val="003A63"/>
                 </a:solidFill>
@@ -3996,16 +3996,16 @@
                 <a:ea typeface="Aptos" pitchFamily="34" charset="-122"/>
                 <a:cs typeface="Aptos" pitchFamily="34" charset="-120"/>
               </a:rPr>
-              <a:t>• When everyone is involved but no one is accountable, important concerns may go unresolved.</a:t>
-            </a:r>
-            <a:endParaRPr lang="en-US" sz="2100" dirty="0"/>
-          </a:p>
-          <a:p>
-            <a:pPr indent="0" marL="0">
-              <a:buNone/>
-            </a:pPr>
-            <a:r>
-              <a:rPr lang="en-US" sz="2100" dirty="0">
+              <a:t>• When everyone is involved but no one is accountable, important concerns may.</a:t>
+            </a:r>
+            <a:endParaRPr lang="en-US" sz="1920" dirty="0"/>
+          </a:p>
+          <a:p>
+            <a:pPr indent="0" marL="0">
+              <a:buNone/>
+            </a:pPr>
+            <a:r>
+              <a:rPr lang="en-US" sz="1920" dirty="0">
                 <a:solidFill>
                   <a:srgbClr val="003A63"/>
                 </a:solidFill>
@@ -4013,9 +4013,9 @@
                 <a:ea typeface="Aptos" pitchFamily="34" charset="-122"/>
                 <a:cs typeface="Aptos" pitchFamily="34" charset="-120"/>
               </a:rPr>
-              <a:t>• A guardrail is to assign a named program owner and governance owner for every AI use case.</a:t>
-            </a:r>
-            <a:endParaRPr lang="en-US" sz="2100" dirty="0"/>
+              <a:t>• A guardrail is to assign a named program owner and governance owner for.</a:t>
+            </a:r>
+            <a:endParaRPr lang="en-US" sz="1920" dirty="0"/>
           </a:p>
         </p:txBody>
       </p:sp>
@@ -4027,12 +4027,12 @@
         </p:nvSpPr>
         <p:spPr>
           <a:xfrm>
-            <a:off x="7635240" y="1325880"/>
-            <a:ext cx="3474720" cy="1207008"/>
+            <a:off x="7543800" y="1325880"/>
+            <a:ext cx="3611880" cy="1261872"/>
           </a:xfrm>
           <a:prstGeom prst="roundRect">
             <a:avLst>
-              <a:gd name="adj" fmla="val 9091"/>
+              <a:gd name="adj" fmla="val 8696"/>
             </a:avLst>
           </a:prstGeom>
           <a:solidFill>
@@ -4054,8 +4054,8 @@
         </p:nvSpPr>
         <p:spPr>
           <a:xfrm>
-            <a:off x="7799832" y="1472184"/>
-            <a:ext cx="3145536" cy="256032"/>
+            <a:off x="7708392" y="1453896"/>
+            <a:ext cx="3282696" cy="228600"/>
           </a:xfrm>
           <a:prstGeom prst="rect">
             <a:avLst/>
@@ -4071,7 +4071,7 @@
               <a:buNone/>
             </a:pPr>
             <a:r>
-              <a:rPr lang="en-US" sz="1300" b="1" dirty="0">
+              <a:rPr lang="en-US" sz="1220" b="1" dirty="0">
                 <a:solidFill>
                   <a:srgbClr val="0068B7"/>
                 </a:solidFill>
@@ -4081,7 +4081,7 @@
               </a:rPr>
               <a:t>Governance lens</a:t>
             </a:r>
-            <a:endParaRPr lang="en-US" sz="1300" dirty="0"/>
+            <a:endParaRPr lang="en-US" sz="1220" dirty="0"/>
           </a:p>
         </p:txBody>
       </p:sp>
@@ -4093,8 +4093,8 @@
         </p:nvSpPr>
         <p:spPr>
           <a:xfrm>
-            <a:off x="7799832" y="1801368"/>
-            <a:ext cx="3145536" cy="640080"/>
+            <a:off x="7708392" y="1764792"/>
+            <a:ext cx="3282696" cy="749808"/>
           </a:xfrm>
           <a:prstGeom prst="rect">
             <a:avLst/>
@@ -4112,7 +4112,7 @@
               <a:buNone/>
             </a:pPr>
             <a:r>
-              <a:rPr lang="en-US" sz="1320" dirty="0">
+              <a:rPr lang="en-US" sz="1220" dirty="0">
                 <a:solidFill>
                   <a:srgbClr val="17364A"/>
                 </a:solidFill>
@@ -4122,7 +4122,7 @@
               </a:rPr>
               <a:t>One risk is accountability diffusion.</a:t>
             </a:r>
-            <a:endParaRPr lang="en-US" sz="1320" dirty="0"/>
+            <a:endParaRPr lang="en-US" sz="1220" dirty="0"/>
           </a:p>
         </p:txBody>
       </p:sp>
@@ -4134,12 +4134,12 @@
         </p:nvSpPr>
         <p:spPr>
           <a:xfrm>
-            <a:off x="7635240" y="2670048"/>
-            <a:ext cx="3474720" cy="1536192"/>
+            <a:off x="7543800" y="2724912"/>
+            <a:ext cx="3611880" cy="1527048"/>
           </a:xfrm>
           <a:prstGeom prst="roundRect">
             <a:avLst>
-              <a:gd name="adj" fmla="val 7143"/>
+              <a:gd name="adj" fmla="val 7186"/>
             </a:avLst>
           </a:prstGeom>
           <a:solidFill>
@@ -4161,8 +4161,8 @@
         </p:nvSpPr>
         <p:spPr>
           <a:xfrm>
-            <a:off x="7799832" y="2816352"/>
-            <a:ext cx="3145536" cy="256032"/>
+            <a:off x="7708392" y="2852928"/>
+            <a:ext cx="3282696" cy="228600"/>
           </a:xfrm>
           <a:prstGeom prst="rect">
             <a:avLst/>
@@ -4178,7 +4178,7 @@
               <a:buNone/>
             </a:pPr>
             <a:r>
-              <a:rPr lang="en-US" sz="1300" b="1" dirty="0">
+              <a:rPr lang="en-US" sz="1220" b="1" dirty="0">
                 <a:solidFill>
                   <a:srgbClr val="0068B7"/>
                 </a:solidFill>
@@ -4188,7 +4188,7 @@
               </a:rPr>
               <a:t>Concept checkpoints</a:t>
             </a:r>
-            <a:endParaRPr lang="en-US" sz="1300" dirty="0"/>
+            <a:endParaRPr lang="en-US" sz="1220" dirty="0"/>
           </a:p>
         </p:txBody>
       </p:sp>
@@ -4200,8 +4200,8 @@
         </p:nvSpPr>
         <p:spPr>
           <a:xfrm>
-            <a:off x="7818120" y="3182112"/>
-            <a:ext cx="3090672" cy="877824"/>
+            <a:off x="7726680" y="3182112"/>
+            <a:ext cx="3227832" cy="960120"/>
           </a:xfrm>
           <a:prstGeom prst="rect">
             <a:avLst/>
@@ -4219,7 +4219,7 @@
               <a:buNone/>
             </a:pPr>
             <a:r>
-              <a:rPr lang="en-US" sz="1220" dirty="0">
+              <a:rPr lang="en-US" sz="1140" dirty="0">
                 <a:solidFill>
                   <a:srgbClr val="17364A"/>
                 </a:solidFill>
@@ -4227,16 +4227,16 @@
                 <a:ea typeface="Aptos" pitchFamily="34" charset="-122"/>
                 <a:cs typeface="Aptos" pitchFamily="34" charset="-120"/>
               </a:rPr>
-              <a:t>Another risk is inappropriate risk acceptance by staff who lack.</a:t>
-            </a:r>
-            <a:endParaRPr lang="en-US" sz="1220" dirty="0"/>
-          </a:p>
-          <a:p>
-            <a:pPr indent="0" marL="0">
-              <a:buNone/>
-            </a:pPr>
-            <a:r>
-              <a:rPr lang="en-US" sz="1220" dirty="0">
+              <a:t>Another risk is inappropriate risk acceptance by.</a:t>
+            </a:r>
+            <a:endParaRPr lang="en-US" sz="1140" dirty="0"/>
+          </a:p>
+          <a:p>
+            <a:pPr indent="0" marL="0">
+              <a:buNone/>
+            </a:pPr>
+            <a:r>
+              <a:rPr lang="en-US" sz="1140" dirty="0">
                 <a:solidFill>
                   <a:srgbClr val="17364A"/>
                 </a:solidFill>
@@ -4244,16 +4244,16 @@
                 <a:ea typeface="Aptos" pitchFamily="34" charset="-122"/>
                 <a:cs typeface="Aptos" pitchFamily="34" charset="-120"/>
               </a:rPr>
-              <a:t>A frontline supervisor may feel pressure to continue a tool.</a:t>
-            </a:r>
-            <a:endParaRPr lang="en-US" sz="1220" dirty="0"/>
-          </a:p>
-          <a:p>
-            <a:pPr indent="0" marL="0">
-              <a:buNone/>
-            </a:pPr>
-            <a:r>
-              <a:rPr lang="en-US" sz="1220" dirty="0">
+              <a:t>A frontline supervisor may feel pressure to.</a:t>
+            </a:r>
+            <a:endParaRPr lang="en-US" sz="1140" dirty="0"/>
+          </a:p>
+          <a:p>
+            <a:pPr indent="0" marL="0">
+              <a:buNone/>
+            </a:pPr>
+            <a:r>
+              <a:rPr lang="en-US" sz="1140" dirty="0">
                 <a:solidFill>
                   <a:srgbClr val="17364A"/>
                 </a:solidFill>
@@ -4261,9 +4261,9 @@
                 <a:ea typeface="Aptos" pitchFamily="34" charset="-122"/>
                 <a:cs typeface="Aptos" pitchFamily="34" charset="-120"/>
               </a:rPr>
-              <a:t>A guardrail is to define which risks can be accepted at the.</a:t>
-            </a:r>
-            <a:endParaRPr lang="en-US" sz="1220" dirty="0"/>
+              <a:t>A guardrail is to define which risks can be.</a:t>
+            </a:r>
+            <a:endParaRPr lang="en-US" sz="1140" dirty="0"/>
           </a:p>
         </p:txBody>
       </p:sp>
@@ -4275,12 +4275,12 @@
         </p:nvSpPr>
         <p:spPr>
           <a:xfrm>
-            <a:off x="7635240" y="4343400"/>
-            <a:ext cx="3474720" cy="1255471"/>
+            <a:off x="7543800" y="4389120"/>
+            <a:ext cx="3611880" cy="1261872"/>
           </a:xfrm>
           <a:prstGeom prst="roundRect">
             <a:avLst>
-              <a:gd name="adj" fmla="val 8740"/>
+              <a:gd name="adj" fmla="val 8696"/>
             </a:avLst>
           </a:prstGeom>
           <a:solidFill>
@@ -4302,8 +4302,8 @@
         </p:nvSpPr>
         <p:spPr>
           <a:xfrm>
-            <a:off x="7799832" y="4489704"/>
-            <a:ext cx="3145536" cy="256032"/>
+            <a:off x="7708392" y="4517136"/>
+            <a:ext cx="3282696" cy="228600"/>
           </a:xfrm>
           <a:prstGeom prst="rect">
             <a:avLst/>
@@ -4319,7 +4319,7 @@
               <a:buNone/>
             </a:pPr>
             <a:r>
-              <a:rPr lang="en-US" sz="1300" b="1" dirty="0">
+              <a:rPr lang="en-US" sz="1220" b="1" dirty="0">
                 <a:solidFill>
                   <a:srgbClr val="0068B7"/>
                 </a:solidFill>
@@ -4329,7 +4329,7 @@
               </a:rPr>
               <a:t>What to document</a:t>
             </a:r>
-            <a:endParaRPr lang="en-US" sz="1300" dirty="0"/>
+            <a:endParaRPr lang="en-US" sz="1220" dirty="0"/>
           </a:p>
         </p:txBody>
       </p:sp>
@@ -4341,8 +4341,8 @@
         </p:nvSpPr>
         <p:spPr>
           <a:xfrm>
-            <a:off x="7799832" y="4818888"/>
-            <a:ext cx="3145536" cy="688543"/>
+            <a:off x="7708392" y="4828032"/>
+            <a:ext cx="3282696" cy="749808"/>
           </a:xfrm>
           <a:prstGeom prst="rect">
             <a:avLst/>
@@ -4360,7 +4360,7 @@
               <a:buNone/>
             </a:pPr>
             <a:r>
-              <a:rPr lang="en-US" sz="1320" dirty="0">
+              <a:rPr lang="en-US" sz="1220" dirty="0">
                 <a:solidFill>
                   <a:srgbClr val="17364A"/>
                 </a:solidFill>
@@ -4368,9 +4368,9 @@
                 <a:ea typeface="Aptos" pitchFamily="34" charset="-122"/>
                 <a:cs typeface="Aptos" pitchFamily="34" charset="-120"/>
               </a:rPr>
-              <a:t>Identify what could go wrong, who could be affected, what safeguards are needed, and what evidence should be reviewed before use.</a:t>
-            </a:r>
-            <a:endParaRPr lang="en-US" sz="1320" dirty="0"/>
+              <a:t>Identify what could go wrong, who could be affected, what safeguards are needed,.</a:t>
+            </a:r>
+            <a:endParaRPr lang="en-US" sz="1220" dirty="0"/>
           </a:p>
         </p:txBody>
       </p:sp>
@@ -4661,8 +4661,8 @@
         </p:nvSpPr>
         <p:spPr>
           <a:xfrm>
-            <a:off x="868680" y="1508760"/>
-            <a:ext cx="6309360" cy="4160520"/>
+            <a:off x="822960" y="1463040"/>
+            <a:ext cx="6565392" cy="4343400"/>
           </a:xfrm>
           <a:prstGeom prst="rect">
             <a:avLst/>
@@ -4680,7 +4680,7 @@
               <a:buNone/>
             </a:pPr>
             <a:r>
-              <a:rPr lang="en-US" sz="2100" dirty="0">
+              <a:rPr lang="en-US" sz="1920" dirty="0">
                 <a:solidFill>
                   <a:srgbClr val="003A63"/>
                 </a:solidFill>
@@ -4688,16 +4688,16 @@
                 <a:ea typeface="Aptos" pitchFamily="34" charset="-122"/>
                 <a:cs typeface="Aptos" pitchFamily="34" charset="-120"/>
               </a:rPr>
-              <a:t>• For generative AI, decision rights should clarify who approves public release of AI-assisted.</a:t>
-            </a:r>
-            <a:endParaRPr lang="en-US" sz="2100" dirty="0"/>
-          </a:p>
-          <a:p>
-            <a:pPr indent="0" marL="0">
-              <a:buNone/>
-            </a:pPr>
-            <a:r>
-              <a:rPr lang="en-US" sz="2100" dirty="0">
+              <a:t>• For generative AI, decision rights should clarify who approves public.</a:t>
+            </a:r>
+            <a:endParaRPr lang="en-US" sz="1920" dirty="0"/>
+          </a:p>
+          <a:p>
+            <a:pPr indent="0" marL="0">
+              <a:buNone/>
+            </a:pPr>
+            <a:r>
+              <a:rPr lang="en-US" sz="1920" dirty="0">
                 <a:solidFill>
                   <a:srgbClr val="003A63"/>
                 </a:solidFill>
@@ -4705,16 +4705,16 @@
                 <a:ea typeface="Aptos" pitchFamily="34" charset="-122"/>
                 <a:cs typeface="Aptos" pitchFamily="34" charset="-120"/>
               </a:rPr>
-              <a:t>• For predictive analytics, leaders should decide whether the score may inform resource.</a:t>
-            </a:r>
-            <a:endParaRPr lang="en-US" sz="2100" dirty="0"/>
-          </a:p>
-          <a:p>
-            <a:pPr indent="0" marL="0">
-              <a:buNone/>
-            </a:pPr>
-            <a:r>
-              <a:rPr lang="en-US" sz="2100" dirty="0">
+              <a:t>• For predictive analytics, leaders should decide whether the score may inform.</a:t>
+            </a:r>
+            <a:endParaRPr lang="en-US" sz="1920" dirty="0"/>
+          </a:p>
+          <a:p>
+            <a:pPr indent="0" marL="0">
+              <a:buNone/>
+            </a:pPr>
+            <a:r>
+              <a:rPr lang="en-US" sz="1920" dirty="0">
                 <a:solidFill>
                   <a:srgbClr val="003A63"/>
                 </a:solidFill>
@@ -4722,9 +4722,9 @@
                 <a:ea typeface="Aptos" pitchFamily="34" charset="-122"/>
                 <a:cs typeface="Aptos" pitchFamily="34" charset="-120"/>
               </a:rPr>
-              <a:t>• For agentic AI, decision rights should define who authorizes system actions, rollback.</a:t>
-            </a:r>
-            <a:endParaRPr lang="en-US" sz="2100" dirty="0"/>
+              <a:t>• For agentic AI, decision rights should define who authorizes system actions,.</a:t>
+            </a:r>
+            <a:endParaRPr lang="en-US" sz="1920" dirty="0"/>
           </a:p>
         </p:txBody>
       </p:sp>
@@ -4736,12 +4736,12 @@
         </p:nvSpPr>
         <p:spPr>
           <a:xfrm>
-            <a:off x="7635240" y="1325880"/>
-            <a:ext cx="3474720" cy="1255471"/>
+            <a:off x="7543800" y="1325880"/>
+            <a:ext cx="3611880" cy="1261872"/>
           </a:xfrm>
           <a:prstGeom prst="roundRect">
             <a:avLst>
-              <a:gd name="adj" fmla="val 8740"/>
+              <a:gd name="adj" fmla="val 8696"/>
             </a:avLst>
           </a:prstGeom>
           <a:solidFill>
@@ -4763,8 +4763,8 @@
         </p:nvSpPr>
         <p:spPr>
           <a:xfrm>
-            <a:off x="7799832" y="1472184"/>
-            <a:ext cx="3145536" cy="256032"/>
+            <a:off x="7708392" y="1453896"/>
+            <a:ext cx="3282696" cy="228600"/>
           </a:xfrm>
           <a:prstGeom prst="rect">
             <a:avLst/>
@@ -4780,7 +4780,7 @@
               <a:buNone/>
             </a:pPr>
             <a:r>
-              <a:rPr lang="en-US" sz="1300" b="1" dirty="0">
+              <a:rPr lang="en-US" sz="1220" b="1" dirty="0">
                 <a:solidFill>
                   <a:srgbClr val="0068B7"/>
                 </a:solidFill>
@@ -4790,7 +4790,7 @@
               </a:rPr>
               <a:t>Governance lens</a:t>
             </a:r>
-            <a:endParaRPr lang="en-US" sz="1300" dirty="0"/>
+            <a:endParaRPr lang="en-US" sz="1220" dirty="0"/>
           </a:p>
         </p:txBody>
       </p:sp>
@@ -4802,8 +4802,8 @@
         </p:nvSpPr>
         <p:spPr>
           <a:xfrm>
-            <a:off x="7799832" y="1801368"/>
-            <a:ext cx="3145536" cy="688543"/>
+            <a:off x="7708392" y="1764792"/>
+            <a:ext cx="3282696" cy="749808"/>
           </a:xfrm>
           <a:prstGeom prst="rect">
             <a:avLst/>
@@ -4821,7 +4821,7 @@
               <a:buNone/>
             </a:pPr>
             <a:r>
-              <a:rPr lang="en-US" sz="1320" dirty="0">
+              <a:rPr lang="en-US" sz="1220" dirty="0">
                 <a:solidFill>
                   <a:srgbClr val="17364A"/>
                 </a:solidFill>
@@ -4829,9 +4829,9 @@
                 <a:ea typeface="Aptos" pitchFamily="34" charset="-122"/>
                 <a:cs typeface="Aptos" pitchFamily="34" charset="-120"/>
               </a:rPr>
-              <a:t>For generative AI, decision rights should clarify who approves public release of AI-assisted content.</a:t>
-            </a:r>
-            <a:endParaRPr lang="en-US" sz="1320" dirty="0"/>
+              <a:t>For generative AI, decision rights should clarify who approves public release of.</a:t>
+            </a:r>
+            <a:endParaRPr lang="en-US" sz="1220" dirty="0"/>
           </a:p>
         </p:txBody>
       </p:sp>
@@ -4843,12 +4843,12 @@
         </p:nvSpPr>
         <p:spPr>
           <a:xfrm>
-            <a:off x="7635240" y="2718511"/>
-            <a:ext cx="3474720" cy="1328623"/>
+            <a:off x="7543800" y="2724912"/>
+            <a:ext cx="3611880" cy="1527048"/>
           </a:xfrm>
           <a:prstGeom prst="roundRect">
             <a:avLst>
-              <a:gd name="adj" fmla="val 8259"/>
+              <a:gd name="adj" fmla="val 7186"/>
             </a:avLst>
           </a:prstGeom>
           <a:solidFill>
@@ -4870,8 +4870,8 @@
         </p:nvSpPr>
         <p:spPr>
           <a:xfrm>
-            <a:off x="7799832" y="2864815"/>
-            <a:ext cx="3145536" cy="256032"/>
+            <a:off x="7708392" y="2852928"/>
+            <a:ext cx="3282696" cy="228600"/>
           </a:xfrm>
           <a:prstGeom prst="rect">
             <a:avLst/>
@@ -4887,7 +4887,7 @@
               <a:buNone/>
             </a:pPr>
             <a:r>
-              <a:rPr lang="en-US" sz="1300" b="1" dirty="0">
+              <a:rPr lang="en-US" sz="1220" b="1" dirty="0">
                 <a:solidFill>
                   <a:srgbClr val="0068B7"/>
                 </a:solidFill>
@@ -4897,7 +4897,7 @@
               </a:rPr>
               <a:t>Concept checkpoints</a:t>
             </a:r>
-            <a:endParaRPr lang="en-US" sz="1300" dirty="0"/>
+            <a:endParaRPr lang="en-US" sz="1220" dirty="0"/>
           </a:p>
         </p:txBody>
       </p:sp>
@@ -4909,8 +4909,8 @@
         </p:nvSpPr>
         <p:spPr>
           <a:xfrm>
-            <a:off x="7818120" y="3230575"/>
-            <a:ext cx="3090672" cy="670255"/>
+            <a:off x="7726680" y="3182112"/>
+            <a:ext cx="3227832" cy="960120"/>
           </a:xfrm>
           <a:prstGeom prst="rect">
             <a:avLst/>
@@ -4928,7 +4928,7 @@
               <a:buNone/>
             </a:pPr>
             <a:r>
-              <a:rPr lang="en-US" sz="1220" dirty="0">
+              <a:rPr lang="en-US" sz="1140" dirty="0">
                 <a:solidFill>
                   <a:srgbClr val="17364A"/>
                 </a:solidFill>
@@ -4936,16 +4936,16 @@
                 <a:ea typeface="Aptos" pitchFamily="34" charset="-122"/>
                 <a:cs typeface="Aptos" pitchFamily="34" charset="-120"/>
               </a:rPr>
-              <a:t>For predictive analytics, leaders should decide whether the score.</a:t>
-            </a:r>
-            <a:endParaRPr lang="en-US" sz="1220" dirty="0"/>
-          </a:p>
-          <a:p>
-            <a:pPr indent="0" marL="0">
-              <a:buNone/>
-            </a:pPr>
-            <a:r>
-              <a:rPr lang="en-US" sz="1220" dirty="0">
+              <a:t>For predictive analytics, leaders should decide.</a:t>
+            </a:r>
+            <a:endParaRPr lang="en-US" sz="1140" dirty="0"/>
+          </a:p>
+          <a:p>
+            <a:pPr indent="0" marL="0">
+              <a:buNone/>
+            </a:pPr>
+            <a:r>
+              <a:rPr lang="en-US" sz="1140" dirty="0">
                 <a:solidFill>
                   <a:srgbClr val="17364A"/>
                 </a:solidFill>
@@ -4953,16 +4953,16 @@
                 <a:ea typeface="Aptos" pitchFamily="34" charset="-122"/>
                 <a:cs typeface="Aptos" pitchFamily="34" charset="-120"/>
               </a:rPr>
-              <a:t>For agentic AI, decision rights should define who authorizes.</a:t>
-            </a:r>
-            <a:endParaRPr lang="en-US" sz="1220" dirty="0"/>
-          </a:p>
-          <a:p>
-            <a:pPr indent="0" marL="0">
-              <a:buNone/>
-            </a:pPr>
-            <a:r>
-              <a:rPr lang="en-US" sz="1220" dirty="0">
+              <a:t>For agentic AI, decision rights should define who.</a:t>
+            </a:r>
+            <a:endParaRPr lang="en-US" sz="1140" dirty="0"/>
+          </a:p>
+          <a:p>
+            <a:pPr indent="0" marL="0">
+              <a:buNone/>
+            </a:pPr>
+            <a:r>
+              <a:rPr lang="en-US" sz="1140" dirty="0">
                 <a:solidFill>
                   <a:srgbClr val="17364A"/>
                 </a:solidFill>
@@ -4970,9 +4970,9 @@
                 <a:ea typeface="Aptos" pitchFamily="34" charset="-122"/>
                 <a:cs typeface="Aptos" pitchFamily="34" charset="-120"/>
               </a:rPr>
-              <a:t>Accountability should remain tied to public health roles and legal.</a:t>
-            </a:r>
-            <a:endParaRPr lang="en-US" sz="1220" dirty="0"/>
+              <a:t>Accountability should remain tied to public health.</a:t>
+            </a:r>
+            <a:endParaRPr lang="en-US" sz="1140" dirty="0"/>
           </a:p>
         </p:txBody>
       </p:sp>
@@ -4984,12 +4984,12 @@
         </p:nvSpPr>
         <p:spPr>
           <a:xfrm>
-            <a:off x="7635240" y="4184294"/>
-            <a:ext cx="3474720" cy="1466698"/>
+            <a:off x="7543800" y="4389120"/>
+            <a:ext cx="3611880" cy="1261872"/>
           </a:xfrm>
           <a:prstGeom prst="roundRect">
             <a:avLst>
-              <a:gd name="adj" fmla="val 7481"/>
+              <a:gd name="adj" fmla="val 8696"/>
             </a:avLst>
           </a:prstGeom>
           <a:solidFill>
@@ -5011,8 +5011,8 @@
         </p:nvSpPr>
         <p:spPr>
           <a:xfrm>
-            <a:off x="7799832" y="4330598"/>
-            <a:ext cx="3145536" cy="256032"/>
+            <a:off x="7708392" y="4517136"/>
+            <a:ext cx="3282696" cy="228600"/>
           </a:xfrm>
           <a:prstGeom prst="rect">
             <a:avLst/>
@@ -5028,7 +5028,7 @@
               <a:buNone/>
             </a:pPr>
             <a:r>
-              <a:rPr lang="en-US" sz="1300" b="1" dirty="0">
+              <a:rPr lang="en-US" sz="1220" b="1" dirty="0">
                 <a:solidFill>
                   <a:srgbClr val="0068B7"/>
                 </a:solidFill>
@@ -5038,7 +5038,7 @@
               </a:rPr>
               <a:t>What to document</a:t>
             </a:r>
-            <a:endParaRPr lang="en-US" sz="1300" dirty="0"/>
+            <a:endParaRPr lang="en-US" sz="1220" dirty="0"/>
           </a:p>
         </p:txBody>
       </p:sp>
@@ -5050,8 +5050,8 @@
         </p:nvSpPr>
         <p:spPr>
           <a:xfrm>
-            <a:off x="7799832" y="4659782"/>
-            <a:ext cx="3145536" cy="899770"/>
+            <a:off x="7708392" y="4828032"/>
+            <a:ext cx="3282696" cy="749808"/>
           </a:xfrm>
           <a:prstGeom prst="rect">
             <a:avLst/>
@@ -5069,7 +5069,7 @@
               <a:buNone/>
             </a:pPr>
             <a:r>
-              <a:rPr lang="en-US" sz="1320" dirty="0">
+              <a:rPr lang="en-US" sz="1220" dirty="0">
                 <a:solidFill>
                   <a:srgbClr val="17364A"/>
                 </a:solidFill>
@@ -5077,9 +5077,9 @@
                 <a:ea typeface="Aptos" pitchFamily="34" charset="-122"/>
                 <a:cs typeface="Aptos" pitchFamily="34" charset="-120"/>
               </a:rPr>
-              <a:t>Use the concept to clarify workflow changes, dependencies, staffing, procurement requirements, training needs, and implementation checkpoints.</a:t>
-            </a:r>
-            <a:endParaRPr lang="en-US" sz="1320" dirty="0"/>
+              <a:t>Use the concept to clarify workflow changes, dependencies, staffing, procurement.</a:t>
+            </a:r>
+            <a:endParaRPr lang="en-US" sz="1220" dirty="0"/>
           </a:p>
         </p:txBody>
       </p:sp>
@@ -5370,8 +5370,8 @@
         </p:nvSpPr>
         <p:spPr>
           <a:xfrm>
-            <a:off x="868680" y="1508760"/>
-            <a:ext cx="6309360" cy="4160520"/>
+            <a:off x="822960" y="1463040"/>
+            <a:ext cx="6565392" cy="4343400"/>
           </a:xfrm>
           <a:prstGeom prst="rect">
             <a:avLst/>
@@ -5389,7 +5389,7 @@
               <a:buNone/>
             </a:pPr>
             <a:r>
-              <a:rPr lang="en-US" sz="2100" dirty="0">
+              <a:rPr lang="en-US" sz="1920" dirty="0">
                 <a:solidFill>
                   <a:srgbClr val="003A63"/>
                 </a:solidFill>
@@ -5397,16 +5397,16 @@
                 <a:ea typeface="Aptos" pitchFamily="34" charset="-122"/>
                 <a:cs typeface="Aptos" pitchFamily="34" charset="-120"/>
               </a:rPr>
-              <a:t>• Which current or proposed AI use case in your agency raises this leadership or governance.</a:t>
-            </a:r>
-            <a:endParaRPr lang="en-US" sz="2100" dirty="0"/>
-          </a:p>
-          <a:p>
-            <a:pPr indent="0" marL="0">
-              <a:buNone/>
-            </a:pPr>
-            <a:r>
-              <a:rPr lang="en-US" sz="2100" dirty="0">
+              <a:t>• Which current or proposed AI use case in your agency raises this leadership.</a:t>
+            </a:r>
+            <a:endParaRPr lang="en-US" sz="1920" dirty="0"/>
+          </a:p>
+          <a:p>
+            <a:pPr indent="0" marL="0">
+              <a:buNone/>
+            </a:pPr>
+            <a:r>
+              <a:rPr lang="en-US" sz="1920" dirty="0">
                 <a:solidFill>
                   <a:srgbClr val="003A63"/>
                 </a:solidFill>
@@ -5414,16 +5414,16 @@
                 <a:ea typeface="Aptos" pitchFamily="34" charset="-122"/>
                 <a:cs typeface="Aptos" pitchFamily="34" charset="-120"/>
               </a:rPr>
-              <a:t>• Who currently has authority to make decisions about this issue, and is that authority.</a:t>
-            </a:r>
-            <a:endParaRPr lang="en-US" sz="2100" dirty="0"/>
-          </a:p>
-          <a:p>
-            <a:pPr indent="0" marL="0">
-              <a:buNone/>
-            </a:pPr>
-            <a:r>
-              <a:rPr lang="en-US" sz="2100" dirty="0">
+              <a:t>• Who currently has authority to make decisions about this issue, and is that.</a:t>
+            </a:r>
+            <a:endParaRPr lang="en-US" sz="1920" dirty="0"/>
+          </a:p>
+          <a:p>
+            <a:pPr indent="0" marL="0">
+              <a:buNone/>
+            </a:pPr>
+            <a:r>
+              <a:rPr lang="en-US" sz="1920" dirty="0">
                 <a:solidFill>
                   <a:srgbClr val="003A63"/>
                 </a:solidFill>
@@ -5431,9 +5431,9 @@
                 <a:ea typeface="Aptos" pitchFamily="34" charset="-122"/>
                 <a:cs typeface="Aptos" pitchFamily="34" charset="-120"/>
               </a:rPr>
-              <a:t>• What evidence would governance or leadership need before approving the use case?</a:t>
-            </a:r>
-            <a:endParaRPr lang="en-US" sz="2100" dirty="0"/>
+              <a:t>• What evidence would governance or leadership need before approving the use.</a:t>
+            </a:r>
+            <a:endParaRPr lang="en-US" sz="1920" dirty="0"/>
           </a:p>
         </p:txBody>
       </p:sp>
@@ -5445,12 +5445,12 @@
         </p:nvSpPr>
         <p:spPr>
           <a:xfrm>
-            <a:off x="7635240" y="1325880"/>
-            <a:ext cx="3474720" cy="1255471"/>
+            <a:off x="7543800" y="1325880"/>
+            <a:ext cx="3611880" cy="1261872"/>
           </a:xfrm>
           <a:prstGeom prst="roundRect">
             <a:avLst>
-              <a:gd name="adj" fmla="val 8740"/>
+              <a:gd name="adj" fmla="val 8696"/>
             </a:avLst>
           </a:prstGeom>
           <a:solidFill>
@@ -5472,8 +5472,8 @@
         </p:nvSpPr>
         <p:spPr>
           <a:xfrm>
-            <a:off x="7799832" y="1472184"/>
-            <a:ext cx="3145536" cy="256032"/>
+            <a:off x="7708392" y="1453896"/>
+            <a:ext cx="3282696" cy="228600"/>
           </a:xfrm>
           <a:prstGeom prst="rect">
             <a:avLst/>
@@ -5489,7 +5489,7 @@
               <a:buNone/>
             </a:pPr>
             <a:r>
-              <a:rPr lang="en-US" sz="1300" b="1" dirty="0">
+              <a:rPr lang="en-US" sz="1220" b="1" dirty="0">
                 <a:solidFill>
                   <a:srgbClr val="0068B7"/>
                 </a:solidFill>
@@ -5499,7 +5499,7 @@
               </a:rPr>
               <a:t>Governance lens</a:t>
             </a:r>
-            <a:endParaRPr lang="en-US" sz="1300" dirty="0"/>
+            <a:endParaRPr lang="en-US" sz="1220" dirty="0"/>
           </a:p>
         </p:txBody>
       </p:sp>
@@ -5511,8 +5511,8 @@
         </p:nvSpPr>
         <p:spPr>
           <a:xfrm>
-            <a:off x="7799832" y="1801368"/>
-            <a:ext cx="3145536" cy="688543"/>
+            <a:off x="7708392" y="1764792"/>
+            <a:ext cx="3282696" cy="749808"/>
           </a:xfrm>
           <a:prstGeom prst="rect">
             <a:avLst/>
@@ -5530,7 +5530,7 @@
               <a:buNone/>
             </a:pPr>
             <a:r>
-              <a:rPr lang="en-US" sz="1320" dirty="0">
+              <a:rPr lang="en-US" sz="1220" dirty="0">
                 <a:solidFill>
                   <a:srgbClr val="17364A"/>
                 </a:solidFill>
@@ -5538,9 +5538,9 @@
                 <a:ea typeface="Aptos" pitchFamily="34" charset="-122"/>
                 <a:cs typeface="Aptos" pitchFamily="34" charset="-120"/>
               </a:rPr>
-              <a:t>Which current or proposed AI use case in your agency raises this leadership or governance issue most.</a:t>
-            </a:r>
-            <a:endParaRPr lang="en-US" sz="1320" dirty="0"/>
+              <a:t>Which current or proposed AI use case in your agency raises this leadership or.</a:t>
+            </a:r>
+            <a:endParaRPr lang="en-US" sz="1220" dirty="0"/>
           </a:p>
         </p:txBody>
       </p:sp>
@@ -5552,12 +5552,12 @@
         </p:nvSpPr>
         <p:spPr>
           <a:xfrm>
-            <a:off x="7635240" y="2718511"/>
-            <a:ext cx="3474720" cy="1328623"/>
+            <a:off x="7543800" y="2724912"/>
+            <a:ext cx="3611880" cy="1527048"/>
           </a:xfrm>
           <a:prstGeom prst="roundRect">
             <a:avLst>
-              <a:gd name="adj" fmla="val 8259"/>
+              <a:gd name="adj" fmla="val 7186"/>
             </a:avLst>
           </a:prstGeom>
           <a:solidFill>
@@ -5579,8 +5579,8 @@
         </p:nvSpPr>
         <p:spPr>
           <a:xfrm>
-            <a:off x="7799832" y="2864815"/>
-            <a:ext cx="3145536" cy="256032"/>
+            <a:off x="7708392" y="2852928"/>
+            <a:ext cx="3282696" cy="228600"/>
           </a:xfrm>
           <a:prstGeom prst="rect">
             <a:avLst/>
@@ -5596,7 +5596,7 @@
               <a:buNone/>
             </a:pPr>
             <a:r>
-              <a:rPr lang="en-US" sz="1300" b="1" dirty="0">
+              <a:rPr lang="en-US" sz="1220" b="1" dirty="0">
                 <a:solidFill>
                   <a:srgbClr val="0068B7"/>
                 </a:solidFill>
@@ -5606,7 +5606,7 @@
               </a:rPr>
               <a:t>Concept checkpoints</a:t>
             </a:r>
-            <a:endParaRPr lang="en-US" sz="1300" dirty="0"/>
+            <a:endParaRPr lang="en-US" sz="1220" dirty="0"/>
           </a:p>
         </p:txBody>
       </p:sp>
@@ -5618,8 +5618,8 @@
         </p:nvSpPr>
         <p:spPr>
           <a:xfrm>
-            <a:off x="7818120" y="3230575"/>
-            <a:ext cx="3090672" cy="670255"/>
+            <a:off x="7726680" y="3182112"/>
+            <a:ext cx="3227832" cy="960120"/>
           </a:xfrm>
           <a:prstGeom prst="rect">
             <a:avLst/>
@@ -5637,7 +5637,7 @@
               <a:buNone/>
             </a:pPr>
             <a:r>
-              <a:rPr lang="en-US" sz="1220" dirty="0">
+              <a:rPr lang="en-US" sz="1140" dirty="0">
                 <a:solidFill>
                   <a:srgbClr val="17364A"/>
                 </a:solidFill>
@@ -5645,16 +5645,16 @@
                 <a:ea typeface="Aptos" pitchFamily="34" charset="-122"/>
                 <a:cs typeface="Aptos" pitchFamily="34" charset="-120"/>
               </a:rPr>
-              <a:t>Which current or proposed AI use case in your agency raises this.</a:t>
-            </a:r>
-            <a:endParaRPr lang="en-US" sz="1220" dirty="0"/>
-          </a:p>
-          <a:p>
-            <a:pPr indent="0" marL="0">
-              <a:buNone/>
-            </a:pPr>
-            <a:r>
-              <a:rPr lang="en-US" sz="1220" dirty="0">
+              <a:t>Which current or proposed AI use case in your.</a:t>
+            </a:r>
+            <a:endParaRPr lang="en-US" sz="1140" dirty="0"/>
+          </a:p>
+          <a:p>
+            <a:pPr indent="0" marL="0">
+              <a:buNone/>
+            </a:pPr>
+            <a:r>
+              <a:rPr lang="en-US" sz="1140" dirty="0">
                 <a:solidFill>
                   <a:srgbClr val="17364A"/>
                 </a:solidFill>
@@ -5662,16 +5662,16 @@
                 <a:ea typeface="Aptos" pitchFamily="34" charset="-122"/>
                 <a:cs typeface="Aptos" pitchFamily="34" charset="-120"/>
               </a:rPr>
-              <a:t>Who currently has authority to make decisions about this issue,.</a:t>
-            </a:r>
-            <a:endParaRPr lang="en-US" sz="1220" dirty="0"/>
-          </a:p>
-          <a:p>
-            <a:pPr indent="0" marL="0">
-              <a:buNone/>
-            </a:pPr>
-            <a:r>
-              <a:rPr lang="en-US" sz="1220" dirty="0">
+              <a:t>Who currently has authority to make decisions.</a:t>
+            </a:r>
+            <a:endParaRPr lang="en-US" sz="1140" dirty="0"/>
+          </a:p>
+          <a:p>
+            <a:pPr indent="0" marL="0">
+              <a:buNone/>
+            </a:pPr>
+            <a:r>
+              <a:rPr lang="en-US" sz="1140" dirty="0">
                 <a:solidFill>
                   <a:srgbClr val="17364A"/>
                 </a:solidFill>
@@ -5679,9 +5679,9 @@
                 <a:ea typeface="Aptos" pitchFamily="34" charset="-122"/>
                 <a:cs typeface="Aptos" pitchFamily="34" charset="-120"/>
               </a:rPr>
-              <a:t>What evidence would governance or leadership need before approving.</a:t>
-            </a:r>
-            <a:endParaRPr lang="en-US" sz="1220" dirty="0"/>
+              <a:t>What evidence would governance or leadership need.</a:t>
+            </a:r>
+            <a:endParaRPr lang="en-US" sz="1140" dirty="0"/>
           </a:p>
         </p:txBody>
       </p:sp>
@@ -5693,12 +5693,12 @@
         </p:nvSpPr>
         <p:spPr>
           <a:xfrm>
-            <a:off x="7635240" y="4184294"/>
-            <a:ext cx="3474720" cy="1466698"/>
+            <a:off x="7543800" y="4389120"/>
+            <a:ext cx="3611880" cy="1261872"/>
           </a:xfrm>
           <a:prstGeom prst="roundRect">
             <a:avLst>
-              <a:gd name="adj" fmla="val 7481"/>
+              <a:gd name="adj" fmla="val 8696"/>
             </a:avLst>
           </a:prstGeom>
           <a:solidFill>
@@ -5720,8 +5720,8 @@
         </p:nvSpPr>
         <p:spPr>
           <a:xfrm>
-            <a:off x="7799832" y="4330598"/>
-            <a:ext cx="3145536" cy="256032"/>
+            <a:off x="7708392" y="4517136"/>
+            <a:ext cx="3282696" cy="228600"/>
           </a:xfrm>
           <a:prstGeom prst="rect">
             <a:avLst/>
@@ -5737,7 +5737,7 @@
               <a:buNone/>
             </a:pPr>
             <a:r>
-              <a:rPr lang="en-US" sz="1300" b="1" dirty="0">
+              <a:rPr lang="en-US" sz="1220" b="1" dirty="0">
                 <a:solidFill>
                   <a:srgbClr val="0068B7"/>
                 </a:solidFill>
@@ -5747,7 +5747,7 @@
               </a:rPr>
               <a:t>What to document</a:t>
             </a:r>
-            <a:endParaRPr lang="en-US" sz="1300" dirty="0"/>
+            <a:endParaRPr lang="en-US" sz="1220" dirty="0"/>
           </a:p>
         </p:txBody>
       </p:sp>
@@ -5759,8 +5759,8 @@
         </p:nvSpPr>
         <p:spPr>
           <a:xfrm>
-            <a:off x="7799832" y="4659782"/>
-            <a:ext cx="3145536" cy="899770"/>
+            <a:off x="7708392" y="4828032"/>
+            <a:ext cx="3282696" cy="749808"/>
           </a:xfrm>
           <a:prstGeom prst="rect">
             <a:avLst/>
@@ -5778,7 +5778,7 @@
               <a:buNone/>
             </a:pPr>
             <a:r>
-              <a:rPr lang="en-US" sz="1320" dirty="0">
+              <a:rPr lang="en-US" sz="1220" dirty="0">
                 <a:solidFill>
                   <a:srgbClr val="17364A"/>
                 </a:solidFill>
@@ -5786,9 +5786,9 @@
                 <a:ea typeface="Aptos" pitchFamily="34" charset="-122"/>
                 <a:cs typeface="Aptos" pitchFamily="34" charset="-120"/>
               </a:rPr>
-              <a:t>Connect the concept to public health purpose, responsible use, required safeguards, documentation, and the next action a department should take.</a:t>
-            </a:r>
-            <a:endParaRPr lang="en-US" sz="1320" dirty="0"/>
+              <a:t>Connect the concept to public health purpose, responsible use, required.</a:t>
+            </a:r>
+            <a:endParaRPr lang="en-US" sz="1220" dirty="0"/>
           </a:p>
         </p:txBody>
       </p:sp>
@@ -6079,8 +6079,8 @@
         </p:nvSpPr>
         <p:spPr>
           <a:xfrm>
-            <a:off x="868680" y="1508760"/>
-            <a:ext cx="6309360" cy="4160520"/>
+            <a:off x="822960" y="1463040"/>
+            <a:ext cx="6565392" cy="4343400"/>
           </a:xfrm>
           <a:prstGeom prst="rect">
             <a:avLst/>
@@ -6098,7 +6098,7 @@
               <a:buNone/>
             </a:pPr>
             <a:r>
-              <a:rPr lang="en-US" sz="2100" dirty="0">
+              <a:rPr lang="en-US" sz="1920" dirty="0">
                 <a:solidFill>
                   <a:srgbClr val="003A63"/>
                 </a:solidFill>
@@ -6106,16 +6106,16 @@
                 <a:ea typeface="Aptos" pitchFamily="34" charset="-122"/>
                 <a:cs typeface="Aptos" pitchFamily="34" charset="-120"/>
               </a:rPr>
-              <a:t>• Which staff, partners, or communities would be affected if this issue were handled poorly?</a:t>
-            </a:r>
-            <a:endParaRPr lang="en-US" sz="2100" dirty="0"/>
-          </a:p>
-          <a:p>
-            <a:pPr indent="0" marL="0">
-              <a:buNone/>
-            </a:pPr>
-            <a:r>
-              <a:rPr lang="en-US" sz="2100" dirty="0">
+              <a:t>• Which staff, partners, or communities would be affected if this issue were.</a:t>
+            </a:r>
+            <a:endParaRPr lang="en-US" sz="1920" dirty="0"/>
+          </a:p>
+          <a:p>
+            <a:pPr indent="0" marL="0">
+              <a:buNone/>
+            </a:pPr>
+            <a:r>
+              <a:rPr lang="en-US" sz="1920" dirty="0">
                 <a:solidFill>
                   <a:srgbClr val="003A63"/>
                 </a:solidFill>
@@ -6123,9 +6123,9 @@
                 <a:ea typeface="Aptos" pitchFamily="34" charset="-122"/>
                 <a:cs typeface="Aptos" pitchFamily="34" charset="-120"/>
               </a:rPr>
-              <a:t>• What policy, process, or artifact should be created or updated after this module?</a:t>
-            </a:r>
-            <a:endParaRPr lang="en-US" sz="2100" dirty="0"/>
+              <a:t>• What policy, process, or artifact should be created or updated after this.</a:t>
+            </a:r>
+            <a:endParaRPr lang="en-US" sz="1920" dirty="0"/>
           </a:p>
         </p:txBody>
       </p:sp>
@@ -6137,12 +6137,12 @@
         </p:nvSpPr>
         <p:spPr>
           <a:xfrm>
-            <a:off x="7635240" y="1325880"/>
-            <a:ext cx="3474720" cy="1207008"/>
+            <a:off x="7543800" y="1325880"/>
+            <a:ext cx="3611880" cy="1261872"/>
           </a:xfrm>
           <a:prstGeom prst="roundRect">
             <a:avLst>
-              <a:gd name="adj" fmla="val 9091"/>
+              <a:gd name="adj" fmla="val 8696"/>
             </a:avLst>
           </a:prstGeom>
           <a:solidFill>
@@ -6164,8 +6164,8 @@
         </p:nvSpPr>
         <p:spPr>
           <a:xfrm>
-            <a:off x="7799832" y="1472184"/>
-            <a:ext cx="3145536" cy="256032"/>
+            <a:off x="7708392" y="1453896"/>
+            <a:ext cx="3282696" cy="228600"/>
           </a:xfrm>
           <a:prstGeom prst="rect">
             <a:avLst/>
@@ -6181,7 +6181,7 @@
               <a:buNone/>
             </a:pPr>
             <a:r>
-              <a:rPr lang="en-US" sz="1300" b="1" dirty="0">
+              <a:rPr lang="en-US" sz="1220" b="1" dirty="0">
                 <a:solidFill>
                   <a:srgbClr val="0068B7"/>
                 </a:solidFill>
@@ -6191,7 +6191,7 @@
               </a:rPr>
               <a:t>Governance lens</a:t>
             </a:r>
-            <a:endParaRPr lang="en-US" sz="1300" dirty="0"/>
+            <a:endParaRPr lang="en-US" sz="1220" dirty="0"/>
           </a:p>
         </p:txBody>
       </p:sp>
@@ -6203,8 +6203,8 @@
         </p:nvSpPr>
         <p:spPr>
           <a:xfrm>
-            <a:off x="7799832" y="1801368"/>
-            <a:ext cx="3145536" cy="640080"/>
+            <a:off x="7708392" y="1764792"/>
+            <a:ext cx="3282696" cy="749808"/>
           </a:xfrm>
           <a:prstGeom prst="rect">
             <a:avLst/>
@@ -6222,7 +6222,7 @@
               <a:buNone/>
             </a:pPr>
             <a:r>
-              <a:rPr lang="en-US" sz="1320" dirty="0">
+              <a:rPr lang="en-US" sz="1220" dirty="0">
                 <a:solidFill>
                   <a:srgbClr val="17364A"/>
                 </a:solidFill>
@@ -6230,9 +6230,9 @@
                 <a:ea typeface="Aptos" pitchFamily="34" charset="-122"/>
                 <a:cs typeface="Aptos" pitchFamily="34" charset="-120"/>
               </a:rPr>
-              <a:t>Which staff, partners, or communities would be affected if this issue were handled.</a:t>
-            </a:r>
-            <a:endParaRPr lang="en-US" sz="1320" dirty="0"/>
+              <a:t>Which staff, partners, or communities would be affected if this issue were.</a:t>
+            </a:r>
+            <a:endParaRPr lang="en-US" sz="1220" dirty="0"/>
           </a:p>
         </p:txBody>
       </p:sp>
@@ -6244,12 +6244,12 @@
         </p:nvSpPr>
         <p:spPr>
           <a:xfrm>
-            <a:off x="7635240" y="2670048"/>
-            <a:ext cx="3474720" cy="1377086"/>
+            <a:off x="7543800" y="2724912"/>
+            <a:ext cx="3611880" cy="1527048"/>
           </a:xfrm>
           <a:prstGeom prst="roundRect">
             <a:avLst>
-              <a:gd name="adj" fmla="val 7968"/>
+              <a:gd name="adj" fmla="val 7186"/>
             </a:avLst>
           </a:prstGeom>
           <a:solidFill>
@@ -6271,8 +6271,8 @@
         </p:nvSpPr>
         <p:spPr>
           <a:xfrm>
-            <a:off x="7799832" y="2816352"/>
-            <a:ext cx="3145536" cy="256032"/>
+            <a:off x="7708392" y="2852928"/>
+            <a:ext cx="3282696" cy="228600"/>
           </a:xfrm>
           <a:prstGeom prst="rect">
             <a:avLst/>
@@ -6288,7 +6288,7 @@
               <a:buNone/>
             </a:pPr>
             <a:r>
-              <a:rPr lang="en-US" sz="1300" b="1" dirty="0">
+              <a:rPr lang="en-US" sz="1220" b="1" dirty="0">
                 <a:solidFill>
                   <a:srgbClr val="0068B7"/>
                 </a:solidFill>
@@ -6298,7 +6298,7 @@
               </a:rPr>
               <a:t>Concept checkpoints</a:t>
             </a:r>
-            <a:endParaRPr lang="en-US" sz="1300" dirty="0"/>
+            <a:endParaRPr lang="en-US" sz="1220" dirty="0"/>
           </a:p>
         </p:txBody>
       </p:sp>
@@ -6310,8 +6310,8 @@
         </p:nvSpPr>
         <p:spPr>
           <a:xfrm>
-            <a:off x="7818120" y="3182112"/>
-            <a:ext cx="3090672" cy="718718"/>
+            <a:off x="7726680" y="3182112"/>
+            <a:ext cx="3227832" cy="960120"/>
           </a:xfrm>
           <a:prstGeom prst="rect">
             <a:avLst/>
@@ -6329,7 +6329,7 @@
               <a:buNone/>
             </a:pPr>
             <a:r>
-              <a:rPr lang="en-US" sz="1220" dirty="0">
+              <a:rPr lang="en-US" sz="1140" dirty="0">
                 <a:solidFill>
                   <a:srgbClr val="17364A"/>
                 </a:solidFill>
@@ -6337,16 +6337,16 @@
                 <a:ea typeface="Aptos" pitchFamily="34" charset="-122"/>
                 <a:cs typeface="Aptos" pitchFamily="34" charset="-120"/>
               </a:rPr>
-              <a:t>Which staff, partners, or communities would be affected if this.</a:t>
-            </a:r>
-            <a:endParaRPr lang="en-US" sz="1220" dirty="0"/>
-          </a:p>
-          <a:p>
-            <a:pPr indent="0" marL="0">
-              <a:buNone/>
-            </a:pPr>
-            <a:r>
-              <a:rPr lang="en-US" sz="1220" dirty="0">
+              <a:t>Which staff, partners, or communities would be.</a:t>
+            </a:r>
+            <a:endParaRPr lang="en-US" sz="1140" dirty="0"/>
+          </a:p>
+          <a:p>
+            <a:pPr indent="0" marL="0">
+              <a:buNone/>
+            </a:pPr>
+            <a:r>
+              <a:rPr lang="en-US" sz="1140" dirty="0">
                 <a:solidFill>
                   <a:srgbClr val="17364A"/>
                 </a:solidFill>
@@ -6354,9 +6354,9 @@
                 <a:ea typeface="Aptos" pitchFamily="34" charset="-122"/>
                 <a:cs typeface="Aptos" pitchFamily="34" charset="-120"/>
               </a:rPr>
-              <a:t>What policy, process, or artifact should be created or updated.</a:t>
-            </a:r>
-            <a:endParaRPr lang="en-US" sz="1220" dirty="0"/>
+              <a:t>What policy, process, or artifact should be.</a:t>
+            </a:r>
+            <a:endParaRPr lang="en-US" sz="1140" dirty="0"/>
           </a:p>
         </p:txBody>
       </p:sp>
@@ -6368,12 +6368,12 @@
         </p:nvSpPr>
         <p:spPr>
           <a:xfrm>
-            <a:off x="7635240" y="4184294"/>
-            <a:ext cx="3474720" cy="1466698"/>
+            <a:off x="7543800" y="4389120"/>
+            <a:ext cx="3611880" cy="1261872"/>
           </a:xfrm>
           <a:prstGeom prst="roundRect">
             <a:avLst>
-              <a:gd name="adj" fmla="val 7481"/>
+              <a:gd name="adj" fmla="val 8696"/>
             </a:avLst>
           </a:prstGeom>
           <a:solidFill>
@@ -6395,8 +6395,8 @@
         </p:nvSpPr>
         <p:spPr>
           <a:xfrm>
-            <a:off x="7799832" y="4330598"/>
-            <a:ext cx="3145536" cy="256032"/>
+            <a:off x="7708392" y="4517136"/>
+            <a:ext cx="3282696" cy="228600"/>
           </a:xfrm>
           <a:prstGeom prst="rect">
             <a:avLst/>
@@ -6412,7 +6412,7 @@
               <a:buNone/>
             </a:pPr>
             <a:r>
-              <a:rPr lang="en-US" sz="1300" b="1" dirty="0">
+              <a:rPr lang="en-US" sz="1220" b="1" dirty="0">
                 <a:solidFill>
                   <a:srgbClr val="0068B7"/>
                 </a:solidFill>
@@ -6422,7 +6422,7 @@
               </a:rPr>
               <a:t>What to document</a:t>
             </a:r>
-            <a:endParaRPr lang="en-US" sz="1300" dirty="0"/>
+            <a:endParaRPr lang="en-US" sz="1220" dirty="0"/>
           </a:p>
         </p:txBody>
       </p:sp>
@@ -6434,8 +6434,8 @@
         </p:nvSpPr>
         <p:spPr>
           <a:xfrm>
-            <a:off x="7799832" y="4659782"/>
-            <a:ext cx="3145536" cy="899770"/>
+            <a:off x="7708392" y="4828032"/>
+            <a:ext cx="3282696" cy="749808"/>
           </a:xfrm>
           <a:prstGeom prst="rect">
             <a:avLst/>
@@ -6453,7 +6453,7 @@
               <a:buNone/>
             </a:pPr>
             <a:r>
-              <a:rPr lang="en-US" sz="1320" dirty="0">
+              <a:rPr lang="en-US" sz="1220" dirty="0">
                 <a:solidFill>
                   <a:srgbClr val="17364A"/>
                 </a:solidFill>
@@ -6461,9 +6461,9 @@
                 <a:ea typeface="Aptos" pitchFamily="34" charset="-122"/>
                 <a:cs typeface="Aptos" pitchFamily="34" charset="-120"/>
               </a:rPr>
-              <a:t>Connect the concept to public health purpose, responsible use, required safeguards, documentation, and the next action a department should take.</a:t>
-            </a:r>
-            <a:endParaRPr lang="en-US" sz="1320" dirty="0"/>
+              <a:t>Connect the concept to public health purpose, responsible use, required.</a:t>
+            </a:r>
+            <a:endParaRPr lang="en-US" sz="1220" dirty="0"/>
           </a:p>
         </p:txBody>
       </p:sp>
@@ -6754,8 +6754,8 @@
         </p:nvSpPr>
         <p:spPr>
           <a:xfrm>
-            <a:off x="868680" y="1508760"/>
-            <a:ext cx="6309360" cy="4160520"/>
+            <a:off x="822960" y="1463040"/>
+            <a:ext cx="6565392" cy="4343400"/>
           </a:xfrm>
           <a:prstGeom prst="rect">
             <a:avLst/>
@@ -6773,7 +6773,7 @@
               <a:buNone/>
             </a:pPr>
             <a:r>
-              <a:rPr lang="en-US" sz="2100" dirty="0">
+              <a:rPr lang="en-US" sz="1920" dirty="0">
                 <a:solidFill>
                   <a:srgbClr val="003A63"/>
                 </a:solidFill>
@@ -6783,14 +6783,14 @@
               </a:rPr>
               <a:t>• Create a decision-rights matrix for one AI use case.</a:t>
             </a:r>
-            <a:endParaRPr lang="en-US" sz="2100" dirty="0"/>
-          </a:p>
-          <a:p>
-            <a:pPr indent="0" marL="0">
-              <a:buNone/>
-            </a:pPr>
-            <a:r>
-              <a:rPr lang="en-US" sz="2100" dirty="0">
+            <a:endParaRPr lang="en-US" sz="1920" dirty="0"/>
+          </a:p>
+          <a:p>
+            <a:pPr indent="0" marL="0">
+              <a:buNone/>
+            </a:pPr>
+            <a:r>
+              <a:rPr lang="en-US" sz="1920" dirty="0">
                 <a:solidFill>
                   <a:srgbClr val="003A63"/>
                 </a:solidFill>
@@ -6798,9 +6798,9 @@
                 <a:ea typeface="Aptos" pitchFamily="34" charset="-122"/>
                 <a:cs typeface="Aptos" pitchFamily="34" charset="-120"/>
               </a:rPr>
-              <a:t>• Include approval, data access, validation, launch, monitoring, incident escalation, risk.</a:t>
-            </a:r>
-            <a:endParaRPr lang="en-US" sz="2100" dirty="0"/>
+              <a:t>• Include approval, data access, validation, launch, monitoring, incident.</a:t>
+            </a:r>
+            <a:endParaRPr lang="en-US" sz="1920" dirty="0"/>
           </a:p>
         </p:txBody>
       </p:sp>
@@ -6812,12 +6812,12 @@
         </p:nvSpPr>
         <p:spPr>
           <a:xfrm>
-            <a:off x="7635240" y="1325880"/>
-            <a:ext cx="3474720" cy="1207008"/>
+            <a:off x="7543800" y="1325880"/>
+            <a:ext cx="3611880" cy="1261872"/>
           </a:xfrm>
           <a:prstGeom prst="roundRect">
             <a:avLst>
-              <a:gd name="adj" fmla="val 9091"/>
+              <a:gd name="adj" fmla="val 8696"/>
             </a:avLst>
           </a:prstGeom>
           <a:solidFill>
@@ -6839,8 +6839,8 @@
         </p:nvSpPr>
         <p:spPr>
           <a:xfrm>
-            <a:off x="7799832" y="1472184"/>
-            <a:ext cx="3145536" cy="256032"/>
+            <a:off x="7708392" y="1453896"/>
+            <a:ext cx="3282696" cy="228600"/>
           </a:xfrm>
           <a:prstGeom prst="rect">
             <a:avLst/>
@@ -6856,7 +6856,7 @@
               <a:buNone/>
             </a:pPr>
             <a:r>
-              <a:rPr lang="en-US" sz="1300" b="1" dirty="0">
+              <a:rPr lang="en-US" sz="1220" b="1" dirty="0">
                 <a:solidFill>
                   <a:srgbClr val="0068B7"/>
                 </a:solidFill>
@@ -6866,7 +6866,7 @@
               </a:rPr>
               <a:t>Governance lens</a:t>
             </a:r>
-            <a:endParaRPr lang="en-US" sz="1300" dirty="0"/>
+            <a:endParaRPr lang="en-US" sz="1220" dirty="0"/>
           </a:p>
         </p:txBody>
       </p:sp>
@@ -6878,8 +6878,8 @@
         </p:nvSpPr>
         <p:spPr>
           <a:xfrm>
-            <a:off x="7799832" y="1801368"/>
-            <a:ext cx="3145536" cy="640080"/>
+            <a:off x="7708392" y="1764792"/>
+            <a:ext cx="3282696" cy="749808"/>
           </a:xfrm>
           <a:prstGeom prst="rect">
             <a:avLst/>
@@ -6897,7 +6897,7 @@
               <a:buNone/>
             </a:pPr>
             <a:r>
-              <a:rPr lang="en-US" sz="1320" dirty="0">
+              <a:rPr lang="en-US" sz="1220" dirty="0">
                 <a:solidFill>
                   <a:srgbClr val="17364A"/>
                 </a:solidFill>
@@ -6907,7 +6907,7 @@
               </a:rPr>
               <a:t>Create a decision-rights matrix for one AI use case.</a:t>
             </a:r>
-            <a:endParaRPr lang="en-US" sz="1320" dirty="0"/>
+            <a:endParaRPr lang="en-US" sz="1220" dirty="0"/>
           </a:p>
         </p:txBody>
       </p:sp>
@@ -6919,12 +6919,12 @@
         </p:nvSpPr>
         <p:spPr>
           <a:xfrm>
-            <a:off x="7635240" y="2670048"/>
-            <a:ext cx="3474720" cy="1377086"/>
+            <a:off x="7543800" y="2724912"/>
+            <a:ext cx="3611880" cy="1527048"/>
           </a:xfrm>
           <a:prstGeom prst="roundRect">
             <a:avLst>
-              <a:gd name="adj" fmla="val 7968"/>
+              <a:gd name="adj" fmla="val 7186"/>
             </a:avLst>
           </a:prstGeom>
           <a:solidFill>
@@ -6946,8 +6946,8 @@
         </p:nvSpPr>
         <p:spPr>
           <a:xfrm>
-            <a:off x="7799832" y="2816352"/>
-            <a:ext cx="3145536" cy="256032"/>
+            <a:off x="7708392" y="2852928"/>
+            <a:ext cx="3282696" cy="228600"/>
           </a:xfrm>
           <a:prstGeom prst="rect">
             <a:avLst/>
@@ -6963,7 +6963,7 @@
               <a:buNone/>
             </a:pPr>
             <a:r>
-              <a:rPr lang="en-US" sz="1300" b="1" dirty="0">
+              <a:rPr lang="en-US" sz="1220" b="1" dirty="0">
                 <a:solidFill>
                   <a:srgbClr val="0068B7"/>
                 </a:solidFill>
@@ -6973,7 +6973,7 @@
               </a:rPr>
               <a:t>Concept checkpoints</a:t>
             </a:r>
-            <a:endParaRPr lang="en-US" sz="1300" dirty="0"/>
+            <a:endParaRPr lang="en-US" sz="1220" dirty="0"/>
           </a:p>
         </p:txBody>
       </p:sp>
@@ -6985,8 +6985,8 @@
         </p:nvSpPr>
         <p:spPr>
           <a:xfrm>
-            <a:off x="7818120" y="3182112"/>
-            <a:ext cx="3090672" cy="718718"/>
+            <a:off x="7726680" y="3182112"/>
+            <a:ext cx="3227832" cy="960120"/>
           </a:xfrm>
           <a:prstGeom prst="rect">
             <a:avLst/>
@@ -7004,7 +7004,7 @@
               <a:buNone/>
             </a:pPr>
             <a:r>
-              <a:rPr lang="en-US" sz="1220" dirty="0">
+              <a:rPr lang="en-US" sz="1140" dirty="0">
                 <a:solidFill>
                   <a:srgbClr val="17364A"/>
                 </a:solidFill>
@@ -7014,14 +7014,14 @@
               </a:rPr>
               <a:t>Create a decision-rights matrix for one AI use case.</a:t>
             </a:r>
-            <a:endParaRPr lang="en-US" sz="1220" dirty="0"/>
-          </a:p>
-          <a:p>
-            <a:pPr indent="0" marL="0">
-              <a:buNone/>
-            </a:pPr>
-            <a:r>
-              <a:rPr lang="en-US" sz="1220" dirty="0">
+            <a:endParaRPr lang="en-US" sz="1140" dirty="0"/>
+          </a:p>
+          <a:p>
+            <a:pPr indent="0" marL="0">
+              <a:buNone/>
+            </a:pPr>
+            <a:r>
+              <a:rPr lang="en-US" sz="1140" dirty="0">
                 <a:solidFill>
                   <a:srgbClr val="17364A"/>
                 </a:solidFill>
@@ -7029,9 +7029,9 @@
                 <a:ea typeface="Aptos" pitchFamily="34" charset="-122"/>
                 <a:cs typeface="Aptos" pitchFamily="34" charset="-120"/>
               </a:rPr>
-              <a:t>Include approval, data access, validation, launch, monitoring,.</a:t>
-            </a:r>
-            <a:endParaRPr lang="en-US" sz="1220" dirty="0"/>
+              <a:t>Include approval, data access, validation, launch,.</a:t>
+            </a:r>
+            <a:endParaRPr lang="en-US" sz="1140" dirty="0"/>
           </a:p>
         </p:txBody>
       </p:sp>
@@ -7043,12 +7043,12 @@
         </p:nvSpPr>
         <p:spPr>
           <a:xfrm>
-            <a:off x="7635240" y="4184294"/>
-            <a:ext cx="3474720" cy="1466698"/>
+            <a:off x="7543800" y="4389120"/>
+            <a:ext cx="3611880" cy="1261872"/>
           </a:xfrm>
           <a:prstGeom prst="roundRect">
             <a:avLst>
-              <a:gd name="adj" fmla="val 7481"/>
+              <a:gd name="adj" fmla="val 8696"/>
             </a:avLst>
           </a:prstGeom>
           <a:solidFill>
@@ -7070,8 +7070,8 @@
         </p:nvSpPr>
         <p:spPr>
           <a:xfrm>
-            <a:off x="7799832" y="4330598"/>
-            <a:ext cx="3145536" cy="256032"/>
+            <a:off x="7708392" y="4517136"/>
+            <a:ext cx="3282696" cy="228600"/>
           </a:xfrm>
           <a:prstGeom prst="rect">
             <a:avLst/>
@@ -7087,7 +7087,7 @@
               <a:buNone/>
             </a:pPr>
             <a:r>
-              <a:rPr lang="en-US" sz="1300" b="1" dirty="0">
+              <a:rPr lang="en-US" sz="1220" b="1" dirty="0">
                 <a:solidFill>
                   <a:srgbClr val="0068B7"/>
                 </a:solidFill>
@@ -7097,7 +7097,7 @@
               </a:rPr>
               <a:t>What to document</a:t>
             </a:r>
-            <a:endParaRPr lang="en-US" sz="1300" dirty="0"/>
+            <a:endParaRPr lang="en-US" sz="1220" dirty="0"/>
           </a:p>
         </p:txBody>
       </p:sp>
@@ -7109,8 +7109,8 @@
         </p:nvSpPr>
         <p:spPr>
           <a:xfrm>
-            <a:off x="7799832" y="4659782"/>
-            <a:ext cx="3145536" cy="899770"/>
+            <a:off x="7708392" y="4828032"/>
+            <a:ext cx="3282696" cy="749808"/>
           </a:xfrm>
           <a:prstGeom prst="rect">
             <a:avLst/>
@@ -7128,7 +7128,7 @@
               <a:buNone/>
             </a:pPr>
             <a:r>
-              <a:rPr lang="en-US" sz="1320" dirty="0">
+              <a:rPr lang="en-US" sz="1220" dirty="0">
                 <a:solidFill>
                   <a:srgbClr val="17364A"/>
                 </a:solidFill>
@@ -7136,9 +7136,9 @@
                 <a:ea typeface="Aptos" pitchFamily="34" charset="-122"/>
                 <a:cs typeface="Aptos" pitchFamily="34" charset="-120"/>
               </a:rPr>
-              <a:t>Use the assignment to test whether you can explain the concept, apply it to a realistic public health situation, and identify what would need review before the work moves forward.</a:t>
-            </a:r>
-            <a:endParaRPr lang="en-US" sz="1320" dirty="0"/>
+              <a:t>Use the assignment to test whether you can explain the concept, apply it to a.</a:t>
+            </a:r>
+            <a:endParaRPr lang="en-US" sz="1220" dirty="0"/>
           </a:p>
         </p:txBody>
       </p:sp>
@@ -7429,8 +7429,8 @@
         </p:nvSpPr>
         <p:spPr>
           <a:xfrm>
-            <a:off x="868680" y="1508760"/>
-            <a:ext cx="6309360" cy="4160520"/>
+            <a:off x="822960" y="1463040"/>
+            <a:ext cx="6565392" cy="4343400"/>
           </a:xfrm>
           <a:prstGeom prst="rect">
             <a:avLst/>
@@ -7448,7 +7448,7 @@
               <a:buNone/>
             </a:pPr>
             <a:r>
-              <a:rPr lang="en-US" sz="2100" dirty="0">
+              <a:rPr lang="en-US" sz="1920" dirty="0">
                 <a:solidFill>
                   <a:srgbClr val="003A63"/>
                 </a:solidFill>
@@ -7458,14 +7458,14 @@
               </a:rPr>
               <a:t>• Choose a real or realistic public health AI use case.</a:t>
             </a:r>
-            <a:endParaRPr lang="en-US" sz="2100" dirty="0"/>
-          </a:p>
-          <a:p>
-            <a:pPr indent="0" marL="0">
-              <a:buNone/>
-            </a:pPr>
-            <a:r>
-              <a:rPr lang="en-US" sz="2100" dirty="0">
+            <a:endParaRPr lang="en-US" sz="1920" dirty="0"/>
+          </a:p>
+          <a:p>
+            <a:pPr indent="0" marL="0">
+              <a:buNone/>
+            </a:pPr>
+            <a:r>
+              <a:rPr lang="en-US" sz="1920" dirty="0">
                 <a:solidFill>
                   <a:srgbClr val="003A63"/>
                 </a:solidFill>
@@ -7473,16 +7473,16 @@
                 <a:ea typeface="Aptos" pitchFamily="34" charset="-122"/>
                 <a:cs typeface="Aptos" pitchFamily="34" charset="-120"/>
               </a:rPr>
-              <a:t>• Document assumptions, unresolved questions, and which agency roles would need to review the.</a:t>
-            </a:r>
-            <a:endParaRPr lang="en-US" sz="2100" dirty="0"/>
-          </a:p>
-          <a:p>
-            <a:pPr indent="0" marL="0">
-              <a:buNone/>
-            </a:pPr>
-            <a:r>
-              <a:rPr lang="en-US" sz="2100" dirty="0">
+              <a:t>• Document assumptions, unresolved questions, and which agency roles would.</a:t>
+            </a:r>
+            <a:endParaRPr lang="en-US" sz="1920" dirty="0"/>
+          </a:p>
+          <a:p>
+            <a:pPr indent="0" marL="0">
+              <a:buNone/>
+            </a:pPr>
+            <a:r>
+              <a:rPr lang="en-US" sz="1920" dirty="0">
                 <a:solidFill>
                   <a:srgbClr val="003A63"/>
                 </a:solidFill>
@@ -7490,9 +7490,9 @@
                 <a:ea typeface="Aptos" pitchFamily="34" charset="-122"/>
                 <a:cs typeface="Aptos" pitchFamily="34" charset="-120"/>
               </a:rPr>
-              <a:t>• The exercise should produce a work product that could support governance review, leadership.</a:t>
-            </a:r>
-            <a:endParaRPr lang="en-US" sz="2100" dirty="0"/>
+              <a:t>• The exercise should produce a work product that could support governance.</a:t>
+            </a:r>
+            <a:endParaRPr lang="en-US" sz="1920" dirty="0"/>
           </a:p>
         </p:txBody>
       </p:sp>
@@ -7504,12 +7504,12 @@
         </p:nvSpPr>
         <p:spPr>
           <a:xfrm>
-            <a:off x="7635240" y="1325880"/>
-            <a:ext cx="3474720" cy="1207008"/>
+            <a:off x="7543800" y="1325880"/>
+            <a:ext cx="3611880" cy="1261872"/>
           </a:xfrm>
           <a:prstGeom prst="roundRect">
             <a:avLst>
-              <a:gd name="adj" fmla="val 9091"/>
+              <a:gd name="adj" fmla="val 8696"/>
             </a:avLst>
           </a:prstGeom>
           <a:solidFill>
@@ -7531,8 +7531,8 @@
         </p:nvSpPr>
         <p:spPr>
           <a:xfrm>
-            <a:off x="7799832" y="1472184"/>
-            <a:ext cx="3145536" cy="256032"/>
+            <a:off x="7708392" y="1453896"/>
+            <a:ext cx="3282696" cy="228600"/>
           </a:xfrm>
           <a:prstGeom prst="rect">
             <a:avLst/>
@@ -7548,7 +7548,7 @@
               <a:buNone/>
             </a:pPr>
             <a:r>
-              <a:rPr lang="en-US" sz="1300" b="1" dirty="0">
+              <a:rPr lang="en-US" sz="1220" b="1" dirty="0">
                 <a:solidFill>
                   <a:srgbClr val="0068B7"/>
                 </a:solidFill>
@@ -7558,7 +7558,7 @@
               </a:rPr>
               <a:t>Governance lens</a:t>
             </a:r>
-            <a:endParaRPr lang="en-US" sz="1300" dirty="0"/>
+            <a:endParaRPr lang="en-US" sz="1220" dirty="0"/>
           </a:p>
         </p:txBody>
       </p:sp>
@@ -7570,8 +7570,8 @@
         </p:nvSpPr>
         <p:spPr>
           <a:xfrm>
-            <a:off x="7799832" y="1801368"/>
-            <a:ext cx="3145536" cy="640080"/>
+            <a:off x="7708392" y="1764792"/>
+            <a:ext cx="3282696" cy="749808"/>
           </a:xfrm>
           <a:prstGeom prst="rect">
             <a:avLst/>
@@ -7589,7 +7589,7 @@
               <a:buNone/>
             </a:pPr>
             <a:r>
-              <a:rPr lang="en-US" sz="1320" dirty="0">
+              <a:rPr lang="en-US" sz="1220" dirty="0">
                 <a:solidFill>
                   <a:srgbClr val="17364A"/>
                 </a:solidFill>
@@ -7599,7 +7599,7 @@
               </a:rPr>
               <a:t>Choose a real or realistic public health AI use case.</a:t>
             </a:r>
-            <a:endParaRPr lang="en-US" sz="1320" dirty="0"/>
+            <a:endParaRPr lang="en-US" sz="1220" dirty="0"/>
           </a:p>
         </p:txBody>
       </p:sp>
@@ -7611,12 +7611,12 @@
         </p:nvSpPr>
         <p:spPr>
           <a:xfrm>
-            <a:off x="7635240" y="2670048"/>
-            <a:ext cx="3474720" cy="1377086"/>
+            <a:off x="7543800" y="2724912"/>
+            <a:ext cx="3611880" cy="1527048"/>
           </a:xfrm>
           <a:prstGeom prst="roundRect">
             <a:avLst>
-              <a:gd name="adj" fmla="val 7968"/>
+              <a:gd name="adj" fmla="val 7186"/>
             </a:avLst>
           </a:prstGeom>
           <a:solidFill>
@@ -7638,8 +7638,8 @@
         </p:nvSpPr>
         <p:spPr>
           <a:xfrm>
-            <a:off x="7799832" y="2816352"/>
-            <a:ext cx="3145536" cy="256032"/>
+            <a:off x="7708392" y="2852928"/>
+            <a:ext cx="3282696" cy="228600"/>
           </a:xfrm>
           <a:prstGeom prst="rect">
             <a:avLst/>
@@ -7655,7 +7655,7 @@
               <a:buNone/>
             </a:pPr>
             <a:r>
-              <a:rPr lang="en-US" sz="1300" b="1" dirty="0">
+              <a:rPr lang="en-US" sz="1220" b="1" dirty="0">
                 <a:solidFill>
                   <a:srgbClr val="0068B7"/>
                 </a:solidFill>
@@ -7665,7 +7665,7 @@
               </a:rPr>
               <a:t>Concept checkpoints</a:t>
             </a:r>
-            <a:endParaRPr lang="en-US" sz="1300" dirty="0"/>
+            <a:endParaRPr lang="en-US" sz="1220" dirty="0"/>
           </a:p>
         </p:txBody>
       </p:sp>
@@ -7677,8 +7677,8 @@
         </p:nvSpPr>
         <p:spPr>
           <a:xfrm>
-            <a:off x="7818120" y="3182112"/>
-            <a:ext cx="3090672" cy="718718"/>
+            <a:off x="7726680" y="3182112"/>
+            <a:ext cx="3227832" cy="960120"/>
           </a:xfrm>
           <a:prstGeom prst="rect">
             <a:avLst/>
@@ -7696,7 +7696,7 @@
               <a:buNone/>
             </a:pPr>
             <a:r>
-              <a:rPr lang="en-US" sz="1220" dirty="0">
+              <a:rPr lang="en-US" sz="1140" dirty="0">
                 <a:solidFill>
                   <a:srgbClr val="17364A"/>
                 </a:solidFill>
@@ -7704,16 +7704,16 @@
                 <a:ea typeface="Aptos" pitchFamily="34" charset="-122"/>
                 <a:cs typeface="Aptos" pitchFamily="34" charset="-120"/>
               </a:rPr>
-              <a:t>Document assumptions, unresolved questions, and which agency roles.</a:t>
-            </a:r>
-            <a:endParaRPr lang="en-US" sz="1220" dirty="0"/>
-          </a:p>
-          <a:p>
-            <a:pPr indent="0" marL="0">
-              <a:buNone/>
-            </a:pPr>
-            <a:r>
-              <a:rPr lang="en-US" sz="1220" dirty="0">
+              <a:t>Document assumptions, unresolved questions, and.</a:t>
+            </a:r>
+            <a:endParaRPr lang="en-US" sz="1140" dirty="0"/>
+          </a:p>
+          <a:p>
+            <a:pPr indent="0" marL="0">
+              <a:buNone/>
+            </a:pPr>
+            <a:r>
+              <a:rPr lang="en-US" sz="1140" dirty="0">
                 <a:solidFill>
                   <a:srgbClr val="17364A"/>
                 </a:solidFill>
@@ -7721,9 +7721,9 @@
                 <a:ea typeface="Aptos" pitchFamily="34" charset="-122"/>
                 <a:cs typeface="Aptos" pitchFamily="34" charset="-120"/>
               </a:rPr>
-              <a:t>The exercise should produce a work product that could support.</a:t>
-            </a:r>
-            <a:endParaRPr lang="en-US" sz="1220" dirty="0"/>
+              <a:t>The exercise should produce a work product that.</a:t>
+            </a:r>
+            <a:endParaRPr lang="en-US" sz="1140" dirty="0"/>
           </a:p>
         </p:txBody>
       </p:sp>
@@ -7735,12 +7735,12 @@
         </p:nvSpPr>
         <p:spPr>
           <a:xfrm>
-            <a:off x="7635240" y="4184294"/>
-            <a:ext cx="3474720" cy="1466698"/>
+            <a:off x="7543800" y="4389120"/>
+            <a:ext cx="3611880" cy="1261872"/>
           </a:xfrm>
           <a:prstGeom prst="roundRect">
             <a:avLst>
-              <a:gd name="adj" fmla="val 7481"/>
+              <a:gd name="adj" fmla="val 8696"/>
             </a:avLst>
           </a:prstGeom>
           <a:solidFill>
@@ -7762,8 +7762,8 @@
         </p:nvSpPr>
         <p:spPr>
           <a:xfrm>
-            <a:off x="7799832" y="4330598"/>
-            <a:ext cx="3145536" cy="256032"/>
+            <a:off x="7708392" y="4517136"/>
+            <a:ext cx="3282696" cy="228600"/>
           </a:xfrm>
           <a:prstGeom prst="rect">
             <a:avLst/>
@@ -7779,7 +7779,7 @@
               <a:buNone/>
             </a:pPr>
             <a:r>
-              <a:rPr lang="en-US" sz="1300" b="1" dirty="0">
+              <a:rPr lang="en-US" sz="1220" b="1" dirty="0">
                 <a:solidFill>
                   <a:srgbClr val="0068B7"/>
                 </a:solidFill>
@@ -7789,7 +7789,7 @@
               </a:rPr>
               <a:t>What to document</a:t>
             </a:r>
-            <a:endParaRPr lang="en-US" sz="1300" dirty="0"/>
+            <a:endParaRPr lang="en-US" sz="1220" dirty="0"/>
           </a:p>
         </p:txBody>
       </p:sp>
@@ -7801,8 +7801,8 @@
         </p:nvSpPr>
         <p:spPr>
           <a:xfrm>
-            <a:off x="7799832" y="4659782"/>
-            <a:ext cx="3145536" cy="899770"/>
+            <a:off x="7708392" y="4828032"/>
+            <a:ext cx="3282696" cy="749808"/>
           </a:xfrm>
           <a:prstGeom prst="rect">
             <a:avLst/>
@@ -7820,7 +7820,7 @@
               <a:buNone/>
             </a:pPr>
             <a:r>
-              <a:rPr lang="en-US" sz="1320" dirty="0">
+              <a:rPr lang="en-US" sz="1220" dirty="0">
                 <a:solidFill>
                   <a:srgbClr val="17364A"/>
                 </a:solidFill>
@@ -7828,9 +7828,9 @@
                 <a:ea typeface="Aptos" pitchFamily="34" charset="-122"/>
                 <a:cs typeface="Aptos" pitchFamily="34" charset="-120"/>
               </a:rPr>
-              <a:t>Connect the concept to public health purpose, responsible use, required safeguards, documentation, and the next action a department should take.</a:t>
-            </a:r>
-            <a:endParaRPr lang="en-US" sz="1320" dirty="0"/>
+              <a:t>Connect the concept to public health purpose, responsible use, required.</a:t>
+            </a:r>
+            <a:endParaRPr lang="en-US" sz="1220" dirty="0"/>
           </a:p>
         </p:txBody>
       </p:sp>
@@ -8121,8 +8121,8 @@
         </p:nvSpPr>
         <p:spPr>
           <a:xfrm>
-            <a:off x="868680" y="1508760"/>
-            <a:ext cx="6309360" cy="4160520"/>
+            <a:off x="822960" y="1463040"/>
+            <a:ext cx="6565392" cy="4343400"/>
           </a:xfrm>
           <a:prstGeom prst="rect">
             <a:avLst/>
@@ -8140,7 +8140,7 @@
               <a:buNone/>
             </a:pPr>
             <a:r>
-              <a:rPr lang="en-US" sz="2100" dirty="0">
+              <a:rPr lang="en-US" sz="1920" dirty="0">
                 <a:solidFill>
                   <a:srgbClr val="003A63"/>
                 </a:solidFill>
@@ -8148,9 +8148,9 @@
                 <a:ea typeface="Aptos" pitchFamily="34" charset="-122"/>
                 <a:cs typeface="Aptos" pitchFamily="34" charset="-120"/>
               </a:rPr>
-              <a:t>• Decision-rights matrix; RACI table; risk acceptance thresholds; escalation authority list.</a:t>
-            </a:r>
-            <a:endParaRPr lang="en-US" sz="2100" dirty="0"/>
+              <a:t>• Decision-rights matrix; RACI table; risk acceptance thresholds; escalation.</a:t>
+            </a:r>
+            <a:endParaRPr lang="en-US" sz="1920" dirty="0"/>
           </a:p>
         </p:txBody>
       </p:sp>
@@ -8162,12 +8162,12 @@
         </p:nvSpPr>
         <p:spPr>
           <a:xfrm>
-            <a:off x="7635240" y="1325880"/>
-            <a:ext cx="3474720" cy="1207008"/>
+            <a:off x="7543800" y="1325880"/>
+            <a:ext cx="3611880" cy="1261872"/>
           </a:xfrm>
           <a:prstGeom prst="roundRect">
             <a:avLst>
-              <a:gd name="adj" fmla="val 9091"/>
+              <a:gd name="adj" fmla="val 8696"/>
             </a:avLst>
           </a:prstGeom>
           <a:solidFill>
@@ -8189,8 +8189,8 @@
         </p:nvSpPr>
         <p:spPr>
           <a:xfrm>
-            <a:off x="7799832" y="1472184"/>
-            <a:ext cx="3145536" cy="256032"/>
+            <a:off x="7708392" y="1453896"/>
+            <a:ext cx="3282696" cy="228600"/>
           </a:xfrm>
           <a:prstGeom prst="rect">
             <a:avLst/>
@@ -8206,7 +8206,7 @@
               <a:buNone/>
             </a:pPr>
             <a:r>
-              <a:rPr lang="en-US" sz="1300" b="1" dirty="0">
+              <a:rPr lang="en-US" sz="1220" b="1" dirty="0">
                 <a:solidFill>
                   <a:srgbClr val="0068B7"/>
                 </a:solidFill>
@@ -8216,7 +8216,7 @@
               </a:rPr>
               <a:t>Governance lens</a:t>
             </a:r>
-            <a:endParaRPr lang="en-US" sz="1300" dirty="0"/>
+            <a:endParaRPr lang="en-US" sz="1220" dirty="0"/>
           </a:p>
         </p:txBody>
       </p:sp>
@@ -8228,8 +8228,8 @@
         </p:nvSpPr>
         <p:spPr>
           <a:xfrm>
-            <a:off x="7799832" y="1801368"/>
-            <a:ext cx="3145536" cy="640080"/>
+            <a:off x="7708392" y="1764792"/>
+            <a:ext cx="3282696" cy="749808"/>
           </a:xfrm>
           <a:prstGeom prst="rect">
             <a:avLst/>
@@ -8247,7 +8247,7 @@
               <a:buNone/>
             </a:pPr>
             <a:r>
-              <a:rPr lang="en-US" sz="1320" dirty="0">
+              <a:rPr lang="en-US" sz="1220" dirty="0">
                 <a:solidFill>
                   <a:srgbClr val="17364A"/>
                 </a:solidFill>
@@ -8255,9 +8255,9 @@
                 <a:ea typeface="Aptos" pitchFamily="34" charset="-122"/>
                 <a:cs typeface="Aptos" pitchFamily="34" charset="-120"/>
               </a:rPr>
-              <a:t>Decision-rights matrix; RACI table; risk acceptance thresholds; escalation authority.</a:t>
-            </a:r>
-            <a:endParaRPr lang="en-US" sz="1320" dirty="0"/>
+              <a:t>Decision-rights matrix; RACI table; risk acceptance thresholds; escalation.</a:t>
+            </a:r>
+            <a:endParaRPr lang="en-US" sz="1220" dirty="0"/>
           </a:p>
         </p:txBody>
       </p:sp>
@@ -8269,12 +8269,12 @@
         </p:nvSpPr>
         <p:spPr>
           <a:xfrm>
-            <a:off x="7635240" y="2670048"/>
-            <a:ext cx="3474720" cy="1377086"/>
+            <a:off x="7543800" y="2724912"/>
+            <a:ext cx="3611880" cy="1527048"/>
           </a:xfrm>
           <a:prstGeom prst="roundRect">
             <a:avLst>
-              <a:gd name="adj" fmla="val 7968"/>
+              <a:gd name="adj" fmla="val 7186"/>
             </a:avLst>
           </a:prstGeom>
           <a:solidFill>
@@ -8296,8 +8296,8 @@
         </p:nvSpPr>
         <p:spPr>
           <a:xfrm>
-            <a:off x="7799832" y="2816352"/>
-            <a:ext cx="3145536" cy="256032"/>
+            <a:off x="7708392" y="2852928"/>
+            <a:ext cx="3282696" cy="228600"/>
           </a:xfrm>
           <a:prstGeom prst="rect">
             <a:avLst/>
@@ -8313,7 +8313,7 @@
               <a:buNone/>
             </a:pPr>
             <a:r>
-              <a:rPr lang="en-US" sz="1300" b="1" dirty="0">
+              <a:rPr lang="en-US" sz="1220" b="1" dirty="0">
                 <a:solidFill>
                   <a:srgbClr val="0068B7"/>
                 </a:solidFill>
@@ -8323,7 +8323,7 @@
               </a:rPr>
               <a:t>Concept checkpoints</a:t>
             </a:r>
-            <a:endParaRPr lang="en-US" sz="1300" dirty="0"/>
+            <a:endParaRPr lang="en-US" sz="1220" dirty="0"/>
           </a:p>
         </p:txBody>
       </p:sp>
@@ -8335,8 +8335,8 @@
         </p:nvSpPr>
         <p:spPr>
           <a:xfrm>
-            <a:off x="7818120" y="3182112"/>
-            <a:ext cx="3090672" cy="718718"/>
+            <a:off x="7726680" y="3182112"/>
+            <a:ext cx="3227832" cy="960120"/>
           </a:xfrm>
           <a:prstGeom prst="rect">
             <a:avLst/>
@@ -8354,7 +8354,7 @@
               <a:buNone/>
             </a:pPr>
             <a:r>
-              <a:rPr lang="en-US" sz="1220" dirty="0">
+              <a:rPr lang="en-US" sz="1140" dirty="0">
                 <a:solidFill>
                   <a:srgbClr val="17364A"/>
                 </a:solidFill>
@@ -8362,9 +8362,9 @@
                 <a:ea typeface="Aptos" pitchFamily="34" charset="-122"/>
                 <a:cs typeface="Aptos" pitchFamily="34" charset="-120"/>
               </a:rPr>
-              <a:t>Decision-rights matrix; RACI table; risk acceptance thresholds;.</a:t>
-            </a:r>
-            <a:endParaRPr lang="en-US" sz="1220" dirty="0"/>
+              <a:t>Decision-rights matrix; RACI table; risk.</a:t>
+            </a:r>
+            <a:endParaRPr lang="en-US" sz="1140" dirty="0"/>
           </a:p>
         </p:txBody>
       </p:sp>
@@ -8376,12 +8376,12 @@
         </p:nvSpPr>
         <p:spPr>
           <a:xfrm>
-            <a:off x="7635240" y="4184294"/>
-            <a:ext cx="3474720" cy="1466698"/>
+            <a:off x="7543800" y="4389120"/>
+            <a:ext cx="3611880" cy="1261872"/>
           </a:xfrm>
           <a:prstGeom prst="roundRect">
             <a:avLst>
-              <a:gd name="adj" fmla="val 7481"/>
+              <a:gd name="adj" fmla="val 8696"/>
             </a:avLst>
           </a:prstGeom>
           <a:solidFill>
@@ -8403,8 +8403,8 @@
         </p:nvSpPr>
         <p:spPr>
           <a:xfrm>
-            <a:off x="7799832" y="4330598"/>
-            <a:ext cx="3145536" cy="256032"/>
+            <a:off x="7708392" y="4517136"/>
+            <a:ext cx="3282696" cy="228600"/>
           </a:xfrm>
           <a:prstGeom prst="rect">
             <a:avLst/>
@@ -8420,7 +8420,7 @@
               <a:buNone/>
             </a:pPr>
             <a:r>
-              <a:rPr lang="en-US" sz="1300" b="1" dirty="0">
+              <a:rPr lang="en-US" sz="1220" b="1" dirty="0">
                 <a:solidFill>
                   <a:srgbClr val="0068B7"/>
                 </a:solidFill>
@@ -8430,7 +8430,7 @@
               </a:rPr>
               <a:t>What to document</a:t>
             </a:r>
-            <a:endParaRPr lang="en-US" sz="1300" dirty="0"/>
+            <a:endParaRPr lang="en-US" sz="1220" dirty="0"/>
           </a:p>
         </p:txBody>
       </p:sp>
@@ -8442,8 +8442,8 @@
         </p:nvSpPr>
         <p:spPr>
           <a:xfrm>
-            <a:off x="7799832" y="4659782"/>
-            <a:ext cx="3145536" cy="899770"/>
+            <a:off x="7708392" y="4828032"/>
+            <a:ext cx="3282696" cy="749808"/>
           </a:xfrm>
           <a:prstGeom prst="rect">
             <a:avLst/>
@@ -8461,7 +8461,7 @@
               <a:buNone/>
             </a:pPr>
             <a:r>
-              <a:rPr lang="en-US" sz="1320" dirty="0">
+              <a:rPr lang="en-US" sz="1220" dirty="0">
                 <a:solidFill>
                   <a:srgbClr val="17364A"/>
                 </a:solidFill>
@@ -8469,9 +8469,9 @@
                 <a:ea typeface="Aptos" pitchFamily="34" charset="-122"/>
                 <a:cs typeface="Aptos" pitchFamily="34" charset="-120"/>
               </a:rPr>
-              <a:t>Connect the concept to public health purpose, responsible use, required safeguards, documentation, and the next action a department should take.</a:t>
-            </a:r>
-            <a:endParaRPr lang="en-US" sz="1320" dirty="0"/>
+              <a:t>Connect the concept to public health purpose, responsible use, required.</a:t>
+            </a:r>
+            <a:endParaRPr lang="en-US" sz="1220" dirty="0"/>
           </a:p>
         </p:txBody>
       </p:sp>
@@ -8762,8 +8762,8 @@
         </p:nvSpPr>
         <p:spPr>
           <a:xfrm>
-            <a:off x="868680" y="1508760"/>
-            <a:ext cx="6309360" cy="4160520"/>
+            <a:off x="822960" y="1463040"/>
+            <a:ext cx="6565392" cy="4343400"/>
           </a:xfrm>
           <a:prstGeom prst="rect">
             <a:avLst/>
@@ -8781,7 +8781,7 @@
               <a:buNone/>
             </a:pPr>
             <a:r>
-              <a:rPr lang="en-US" sz="2100" dirty="0">
+              <a:rPr lang="en-US" sz="1920" dirty="0">
                 <a:solidFill>
                   <a:srgbClr val="003A63"/>
                 </a:solidFill>
@@ -8789,9 +8789,9 @@
                 <a:ea typeface="Aptos" pitchFamily="34" charset="-122"/>
                 <a:cs typeface="Aptos" pitchFamily="34" charset="-120"/>
               </a:rPr>
-              <a:t>• Decision-rights matrix; RACI table; risk acceptance thresholds; escalation authority list.</a:t>
-            </a:r>
-            <a:endParaRPr lang="en-US" sz="2100" dirty="0"/>
+              <a:t>• Decision-rights matrix; RACI table; risk acceptance thresholds; escalation.</a:t>
+            </a:r>
+            <a:endParaRPr lang="en-US" sz="1920" dirty="0"/>
           </a:p>
         </p:txBody>
       </p:sp>
@@ -8803,12 +8803,12 @@
         </p:nvSpPr>
         <p:spPr>
           <a:xfrm>
-            <a:off x="7635240" y="1325880"/>
-            <a:ext cx="3474720" cy="1207008"/>
+            <a:off x="7543800" y="1325880"/>
+            <a:ext cx="3611880" cy="1261872"/>
           </a:xfrm>
           <a:prstGeom prst="roundRect">
             <a:avLst>
-              <a:gd name="adj" fmla="val 9091"/>
+              <a:gd name="adj" fmla="val 8696"/>
             </a:avLst>
           </a:prstGeom>
           <a:solidFill>
@@ -8830,8 +8830,8 @@
         </p:nvSpPr>
         <p:spPr>
           <a:xfrm>
-            <a:off x="7799832" y="1472184"/>
-            <a:ext cx="3145536" cy="256032"/>
+            <a:off x="7708392" y="1453896"/>
+            <a:ext cx="3282696" cy="228600"/>
           </a:xfrm>
           <a:prstGeom prst="rect">
             <a:avLst/>
@@ -8847,7 +8847,7 @@
               <a:buNone/>
             </a:pPr>
             <a:r>
-              <a:rPr lang="en-US" sz="1300" b="1" dirty="0">
+              <a:rPr lang="en-US" sz="1220" b="1" dirty="0">
                 <a:solidFill>
                   <a:srgbClr val="0068B7"/>
                 </a:solidFill>
@@ -8857,7 +8857,7 @@
               </a:rPr>
               <a:t>Governance lens</a:t>
             </a:r>
-            <a:endParaRPr lang="en-US" sz="1300" dirty="0"/>
+            <a:endParaRPr lang="en-US" sz="1220" dirty="0"/>
           </a:p>
         </p:txBody>
       </p:sp>
@@ -8869,8 +8869,8 @@
         </p:nvSpPr>
         <p:spPr>
           <a:xfrm>
-            <a:off x="7799832" y="1801368"/>
-            <a:ext cx="3145536" cy="640080"/>
+            <a:off x="7708392" y="1764792"/>
+            <a:ext cx="3282696" cy="749808"/>
           </a:xfrm>
           <a:prstGeom prst="rect">
             <a:avLst/>
@@ -8888,7 +8888,7 @@
               <a:buNone/>
             </a:pPr>
             <a:r>
-              <a:rPr lang="en-US" sz="1320" dirty="0">
+              <a:rPr lang="en-US" sz="1220" dirty="0">
                 <a:solidFill>
                   <a:srgbClr val="17364A"/>
                 </a:solidFill>
@@ -8896,9 +8896,9 @@
                 <a:ea typeface="Aptos" pitchFamily="34" charset="-122"/>
                 <a:cs typeface="Aptos" pitchFamily="34" charset="-120"/>
               </a:rPr>
-              <a:t>Decision-rights matrix; RACI table; risk acceptance thresholds; escalation authority.</a:t>
-            </a:r>
-            <a:endParaRPr lang="en-US" sz="1320" dirty="0"/>
+              <a:t>Decision-rights matrix; RACI table; risk acceptance thresholds; escalation.</a:t>
+            </a:r>
+            <a:endParaRPr lang="en-US" sz="1220" dirty="0"/>
           </a:p>
         </p:txBody>
       </p:sp>
@@ -8910,12 +8910,12 @@
         </p:nvSpPr>
         <p:spPr>
           <a:xfrm>
-            <a:off x="7635240" y="2670048"/>
-            <a:ext cx="3474720" cy="1377086"/>
+            <a:off x="7543800" y="2724912"/>
+            <a:ext cx="3611880" cy="1527048"/>
           </a:xfrm>
           <a:prstGeom prst="roundRect">
             <a:avLst>
-              <a:gd name="adj" fmla="val 7968"/>
+              <a:gd name="adj" fmla="val 7186"/>
             </a:avLst>
           </a:prstGeom>
           <a:solidFill>
@@ -8937,8 +8937,8 @@
         </p:nvSpPr>
         <p:spPr>
           <a:xfrm>
-            <a:off x="7799832" y="2816352"/>
-            <a:ext cx="3145536" cy="256032"/>
+            <a:off x="7708392" y="2852928"/>
+            <a:ext cx="3282696" cy="228600"/>
           </a:xfrm>
           <a:prstGeom prst="rect">
             <a:avLst/>
@@ -8954,7 +8954,7 @@
               <a:buNone/>
             </a:pPr>
             <a:r>
-              <a:rPr lang="en-US" sz="1300" b="1" dirty="0">
+              <a:rPr lang="en-US" sz="1220" b="1" dirty="0">
                 <a:solidFill>
                   <a:srgbClr val="0068B7"/>
                 </a:solidFill>
@@ -8964,7 +8964,7 @@
               </a:rPr>
               <a:t>Concept checkpoints</a:t>
             </a:r>
-            <a:endParaRPr lang="en-US" sz="1300" dirty="0"/>
+            <a:endParaRPr lang="en-US" sz="1220" dirty="0"/>
           </a:p>
         </p:txBody>
       </p:sp>
@@ -8976,8 +8976,8 @@
         </p:nvSpPr>
         <p:spPr>
           <a:xfrm>
-            <a:off x="7818120" y="3182112"/>
-            <a:ext cx="3090672" cy="718718"/>
+            <a:off x="7726680" y="3182112"/>
+            <a:ext cx="3227832" cy="960120"/>
           </a:xfrm>
           <a:prstGeom prst="rect">
             <a:avLst/>
@@ -8995,7 +8995,7 @@
               <a:buNone/>
             </a:pPr>
             <a:r>
-              <a:rPr lang="en-US" sz="1220" dirty="0">
+              <a:rPr lang="en-US" sz="1140" dirty="0">
                 <a:solidFill>
                   <a:srgbClr val="17364A"/>
                 </a:solidFill>
@@ -9003,9 +9003,9 @@
                 <a:ea typeface="Aptos" pitchFamily="34" charset="-122"/>
                 <a:cs typeface="Aptos" pitchFamily="34" charset="-120"/>
               </a:rPr>
-              <a:t>Decision-rights matrix; RACI table; risk acceptance thresholds;.</a:t>
-            </a:r>
-            <a:endParaRPr lang="en-US" sz="1220" dirty="0"/>
+              <a:t>Decision-rights matrix; RACI table; risk.</a:t>
+            </a:r>
+            <a:endParaRPr lang="en-US" sz="1140" dirty="0"/>
           </a:p>
         </p:txBody>
       </p:sp>
@@ -9017,12 +9017,12 @@
         </p:nvSpPr>
         <p:spPr>
           <a:xfrm>
-            <a:off x="7635240" y="4184294"/>
-            <a:ext cx="3474720" cy="1466698"/>
+            <a:off x="7543800" y="4389120"/>
+            <a:ext cx="3611880" cy="1261872"/>
           </a:xfrm>
           <a:prstGeom prst="roundRect">
             <a:avLst>
-              <a:gd name="adj" fmla="val 7481"/>
+              <a:gd name="adj" fmla="val 8696"/>
             </a:avLst>
           </a:prstGeom>
           <a:solidFill>
@@ -9044,8 +9044,8 @@
         </p:nvSpPr>
         <p:spPr>
           <a:xfrm>
-            <a:off x="7799832" y="4330598"/>
-            <a:ext cx="3145536" cy="256032"/>
+            <a:off x="7708392" y="4517136"/>
+            <a:ext cx="3282696" cy="228600"/>
           </a:xfrm>
           <a:prstGeom prst="rect">
             <a:avLst/>
@@ -9061,7 +9061,7 @@
               <a:buNone/>
             </a:pPr>
             <a:r>
-              <a:rPr lang="en-US" sz="1300" b="1" dirty="0">
+              <a:rPr lang="en-US" sz="1220" b="1" dirty="0">
                 <a:solidFill>
                   <a:srgbClr val="0068B7"/>
                 </a:solidFill>
@@ -9071,7 +9071,7 @@
               </a:rPr>
               <a:t>What to document</a:t>
             </a:r>
-            <a:endParaRPr lang="en-US" sz="1300" dirty="0"/>
+            <a:endParaRPr lang="en-US" sz="1220" dirty="0"/>
           </a:p>
         </p:txBody>
       </p:sp>
@@ -9083,8 +9083,8 @@
         </p:nvSpPr>
         <p:spPr>
           <a:xfrm>
-            <a:off x="7799832" y="4659782"/>
-            <a:ext cx="3145536" cy="899770"/>
+            <a:off x="7708392" y="4828032"/>
+            <a:ext cx="3282696" cy="749808"/>
           </a:xfrm>
           <a:prstGeom prst="rect">
             <a:avLst/>
@@ -9102,7 +9102,7 @@
               <a:buNone/>
             </a:pPr>
             <a:r>
-              <a:rPr lang="en-US" sz="1320" dirty="0">
+              <a:rPr lang="en-US" sz="1220" dirty="0">
                 <a:solidFill>
                   <a:srgbClr val="17364A"/>
                 </a:solidFill>
@@ -9110,9 +9110,9 @@
                 <a:ea typeface="Aptos" pitchFamily="34" charset="-122"/>
                 <a:cs typeface="Aptos" pitchFamily="34" charset="-120"/>
               </a:rPr>
-              <a:t>Use the assignment to test whether you can explain the concept, apply it to a realistic public health situation, and identify what would need review before the work moves forward.</a:t>
-            </a:r>
-            <a:endParaRPr lang="en-US" sz="1320" dirty="0"/>
+              <a:t>Use the assignment to test whether you can explain the concept, apply it to a.</a:t>
+            </a:r>
+            <a:endParaRPr lang="en-US" sz="1220" dirty="0"/>
           </a:p>
         </p:txBody>
       </p:sp>
@@ -9403,8 +9403,8 @@
         </p:nvSpPr>
         <p:spPr>
           <a:xfrm>
-            <a:off x="868680" y="1508760"/>
-            <a:ext cx="6309360" cy="4160520"/>
+            <a:off x="822960" y="1463040"/>
+            <a:ext cx="6565392" cy="4343400"/>
           </a:xfrm>
           <a:prstGeom prst="rect">
             <a:avLst/>
@@ -9422,7 +9422,7 @@
               <a:buNone/>
             </a:pPr>
             <a:r>
-              <a:rPr lang="en-US" sz="2100" dirty="0">
+              <a:rPr lang="en-US" sz="1920" dirty="0">
                 <a:solidFill>
                   <a:srgbClr val="003A63"/>
                 </a:solidFill>
@@ -9430,16 +9430,16 @@
                 <a:ea typeface="Aptos" pitchFamily="34" charset="-122"/>
                 <a:cs typeface="Aptos" pitchFamily="34" charset="-120"/>
               </a:rPr>
-              <a:t>• 1. What is the strongest reason this module topic belongs in AI leadership and governance.</a:t>
-            </a:r>
-            <a:endParaRPr lang="en-US" sz="2100" dirty="0"/>
-          </a:p>
-          <a:p>
-            <a:pPr indent="0" marL="0">
-              <a:buNone/>
-            </a:pPr>
-            <a:r>
-              <a:rPr lang="en-US" sz="2100" dirty="0">
+              <a:t>• 1. What is the strongest reason this module topic belongs in AI leadership.</a:t>
+            </a:r>
+            <a:endParaRPr lang="en-US" sz="1920" dirty="0"/>
+          </a:p>
+          <a:p>
+            <a:pPr indent="0" marL="0">
+              <a:buNone/>
+            </a:pPr>
+            <a:r>
+              <a:rPr lang="en-US" sz="1920" dirty="0">
                 <a:solidFill>
                   <a:srgbClr val="003A63"/>
                 </a:solidFill>
@@ -9449,14 +9449,14 @@
               </a:rPr>
               <a:t>• 2. Which practice best supports accountable public health AI governance?</a:t>
             </a:r>
-            <a:endParaRPr lang="en-US" sz="2100" dirty="0"/>
-          </a:p>
-          <a:p>
-            <a:pPr indent="0" marL="0">
-              <a:buNone/>
-            </a:pPr>
-            <a:r>
-              <a:rPr lang="en-US" sz="2100" dirty="0">
+            <a:endParaRPr lang="en-US" sz="1920" dirty="0"/>
+          </a:p>
+          <a:p>
+            <a:pPr indent="0" marL="0">
+              <a:buNone/>
+            </a:pPr>
+            <a:r>
+              <a:rPr lang="en-US" sz="1920" dirty="0">
                 <a:solidFill>
                   <a:srgbClr val="003A63"/>
                 </a:solidFill>
@@ -9464,9 +9464,9 @@
                 <a:ea typeface="Aptos" pitchFamily="34" charset="-122"/>
                 <a:cs typeface="Aptos" pitchFamily="34" charset="-120"/>
               </a:rPr>
-              <a:t>• 3. When should an AI use case be escalated for leadership or governance review?</a:t>
-            </a:r>
-            <a:endParaRPr lang="en-US" sz="2100" dirty="0"/>
+              <a:t>• 3. When should an AI use case be escalated for leadership or governance.</a:t>
+            </a:r>
+            <a:endParaRPr lang="en-US" sz="1920" dirty="0"/>
           </a:p>
         </p:txBody>
       </p:sp>
@@ -9478,12 +9478,12 @@
         </p:nvSpPr>
         <p:spPr>
           <a:xfrm>
-            <a:off x="7635240" y="1325880"/>
-            <a:ext cx="3474720" cy="1255471"/>
+            <a:off x="7543800" y="1325880"/>
+            <a:ext cx="3611880" cy="1261872"/>
           </a:xfrm>
           <a:prstGeom prst="roundRect">
             <a:avLst>
-              <a:gd name="adj" fmla="val 8740"/>
+              <a:gd name="adj" fmla="val 8696"/>
             </a:avLst>
           </a:prstGeom>
           <a:solidFill>
@@ -9505,8 +9505,8 @@
         </p:nvSpPr>
         <p:spPr>
           <a:xfrm>
-            <a:off x="7799832" y="1472184"/>
-            <a:ext cx="3145536" cy="256032"/>
+            <a:off x="7708392" y="1453896"/>
+            <a:ext cx="3282696" cy="228600"/>
           </a:xfrm>
           <a:prstGeom prst="rect">
             <a:avLst/>
@@ -9522,7 +9522,7 @@
               <a:buNone/>
             </a:pPr>
             <a:r>
-              <a:rPr lang="en-US" sz="1300" b="1" dirty="0">
+              <a:rPr lang="en-US" sz="1220" b="1" dirty="0">
                 <a:solidFill>
                   <a:srgbClr val="0068B7"/>
                 </a:solidFill>
@@ -9532,7 +9532,7 @@
               </a:rPr>
               <a:t>Governance lens</a:t>
             </a:r>
-            <a:endParaRPr lang="en-US" sz="1300" dirty="0"/>
+            <a:endParaRPr lang="en-US" sz="1220" dirty="0"/>
           </a:p>
         </p:txBody>
       </p:sp>
@@ -9544,8 +9544,8 @@
         </p:nvSpPr>
         <p:spPr>
           <a:xfrm>
-            <a:off x="7799832" y="1801368"/>
-            <a:ext cx="3145536" cy="688543"/>
+            <a:off x="7708392" y="1764792"/>
+            <a:ext cx="3282696" cy="749808"/>
           </a:xfrm>
           <a:prstGeom prst="rect">
             <a:avLst/>
@@ -9563,7 +9563,7 @@
               <a:buNone/>
             </a:pPr>
             <a:r>
-              <a:rPr lang="en-US" sz="1320" dirty="0">
+              <a:rPr lang="en-US" sz="1220" dirty="0">
                 <a:solidFill>
                   <a:srgbClr val="17364A"/>
                 </a:solidFill>
@@ -9571,9 +9571,9 @@
                 <a:ea typeface="Aptos" pitchFamily="34" charset="-122"/>
                 <a:cs typeface="Aptos" pitchFamily="34" charset="-120"/>
               </a:rPr>
-              <a:t>1. What is the strongest reason this module topic belongs in AI leadership and governance training?</a:t>
-            </a:r>
-            <a:endParaRPr lang="en-US" sz="1320" dirty="0"/>
+              <a:t>1. What is the strongest reason this module topic belongs in AI leadership and.</a:t>
+            </a:r>
+            <a:endParaRPr lang="en-US" sz="1220" dirty="0"/>
           </a:p>
         </p:txBody>
       </p:sp>
@@ -9585,12 +9585,12 @@
         </p:nvSpPr>
         <p:spPr>
           <a:xfrm>
-            <a:off x="7635240" y="2718511"/>
-            <a:ext cx="3474720" cy="1328623"/>
+            <a:off x="7543800" y="2724912"/>
+            <a:ext cx="3611880" cy="1527048"/>
           </a:xfrm>
           <a:prstGeom prst="roundRect">
             <a:avLst>
-              <a:gd name="adj" fmla="val 8259"/>
+              <a:gd name="adj" fmla="val 7186"/>
             </a:avLst>
           </a:prstGeom>
           <a:solidFill>
@@ -9612,8 +9612,8 @@
         </p:nvSpPr>
         <p:spPr>
           <a:xfrm>
-            <a:off x="7799832" y="2864815"/>
-            <a:ext cx="3145536" cy="256032"/>
+            <a:off x="7708392" y="2852928"/>
+            <a:ext cx="3282696" cy="228600"/>
           </a:xfrm>
           <a:prstGeom prst="rect">
             <a:avLst/>
@@ -9629,7 +9629,7 @@
               <a:buNone/>
             </a:pPr>
             <a:r>
-              <a:rPr lang="en-US" sz="1300" b="1" dirty="0">
+              <a:rPr lang="en-US" sz="1220" b="1" dirty="0">
                 <a:solidFill>
                   <a:srgbClr val="0068B7"/>
                 </a:solidFill>
@@ -9639,7 +9639,7 @@
               </a:rPr>
               <a:t>Concept checkpoints</a:t>
             </a:r>
-            <a:endParaRPr lang="en-US" sz="1300" dirty="0"/>
+            <a:endParaRPr lang="en-US" sz="1220" dirty="0"/>
           </a:p>
         </p:txBody>
       </p:sp>
@@ -9651,8 +9651,8 @@
         </p:nvSpPr>
         <p:spPr>
           <a:xfrm>
-            <a:off x="7818120" y="3230575"/>
-            <a:ext cx="3090672" cy="670255"/>
+            <a:off x="7726680" y="3182112"/>
+            <a:ext cx="3227832" cy="960120"/>
           </a:xfrm>
           <a:prstGeom prst="rect">
             <a:avLst/>
@@ -9670,7 +9670,7 @@
               <a:buNone/>
             </a:pPr>
             <a:r>
-              <a:rPr lang="en-US" sz="1220" dirty="0">
+              <a:rPr lang="en-US" sz="1140" dirty="0">
                 <a:solidFill>
                   <a:srgbClr val="17364A"/>
                 </a:solidFill>
@@ -9680,14 +9680,14 @@
               </a:rPr>
               <a:t>1.</a:t>
             </a:r>
-            <a:endParaRPr lang="en-US" sz="1220" dirty="0"/>
-          </a:p>
-          <a:p>
-            <a:pPr indent="0" marL="0">
-              <a:buNone/>
-            </a:pPr>
-            <a:r>
-              <a:rPr lang="en-US" sz="1220" dirty="0">
+            <a:endParaRPr lang="en-US" sz="1140" dirty="0"/>
+          </a:p>
+          <a:p>
+            <a:pPr indent="0" marL="0">
+              <a:buNone/>
+            </a:pPr>
+            <a:r>
+              <a:rPr lang="en-US" sz="1140" dirty="0">
                 <a:solidFill>
                   <a:srgbClr val="17364A"/>
                 </a:solidFill>
@@ -9695,16 +9695,16 @@
                 <a:ea typeface="Aptos" pitchFamily="34" charset="-122"/>
                 <a:cs typeface="Aptos" pitchFamily="34" charset="-120"/>
               </a:rPr>
-              <a:t>What is the strongest reason this module topic belongs in AI.</a:t>
-            </a:r>
-            <a:endParaRPr lang="en-US" sz="1220" dirty="0"/>
-          </a:p>
-          <a:p>
-            <a:pPr indent="0" marL="0">
-              <a:buNone/>
-            </a:pPr>
-            <a:r>
-              <a:rPr lang="en-US" sz="1220" dirty="0">
+              <a:t>What is the strongest reason this module topic.</a:t>
+            </a:r>
+            <a:endParaRPr lang="en-US" sz="1140" dirty="0"/>
+          </a:p>
+          <a:p>
+            <a:pPr indent="0" marL="0">
+              <a:buNone/>
+            </a:pPr>
+            <a:r>
+              <a:rPr lang="en-US" sz="1140" dirty="0">
                 <a:solidFill>
                   <a:srgbClr val="17364A"/>
                 </a:solidFill>
@@ -9714,7 +9714,7 @@
               </a:rPr>
               <a:t>2.</a:t>
             </a:r>
-            <a:endParaRPr lang="en-US" sz="1220" dirty="0"/>
+            <a:endParaRPr lang="en-US" sz="1140" dirty="0"/>
           </a:p>
         </p:txBody>
       </p:sp>
@@ -9726,12 +9726,12 @@
         </p:nvSpPr>
         <p:spPr>
           <a:xfrm>
-            <a:off x="7635240" y="4184294"/>
-            <a:ext cx="3474720" cy="1466698"/>
+            <a:off x="7543800" y="4389120"/>
+            <a:ext cx="3611880" cy="1261872"/>
           </a:xfrm>
           <a:prstGeom prst="roundRect">
             <a:avLst>
-              <a:gd name="adj" fmla="val 7481"/>
+              <a:gd name="adj" fmla="val 8696"/>
             </a:avLst>
           </a:prstGeom>
           <a:solidFill>
@@ -9753,8 +9753,8 @@
         </p:nvSpPr>
         <p:spPr>
           <a:xfrm>
-            <a:off x="7799832" y="4330598"/>
-            <a:ext cx="3145536" cy="256032"/>
+            <a:off x="7708392" y="4517136"/>
+            <a:ext cx="3282696" cy="228600"/>
           </a:xfrm>
           <a:prstGeom prst="rect">
             <a:avLst/>
@@ -9770,7 +9770,7 @@
               <a:buNone/>
             </a:pPr>
             <a:r>
-              <a:rPr lang="en-US" sz="1300" b="1" dirty="0">
+              <a:rPr lang="en-US" sz="1220" b="1" dirty="0">
                 <a:solidFill>
                   <a:srgbClr val="0068B7"/>
                 </a:solidFill>
@@ -9780,7 +9780,7 @@
               </a:rPr>
               <a:t>What to document</a:t>
             </a:r>
-            <a:endParaRPr lang="en-US" sz="1300" dirty="0"/>
+            <a:endParaRPr lang="en-US" sz="1220" dirty="0"/>
           </a:p>
         </p:txBody>
       </p:sp>
@@ -9792,8 +9792,8 @@
         </p:nvSpPr>
         <p:spPr>
           <a:xfrm>
-            <a:off x="7799832" y="4659782"/>
-            <a:ext cx="3145536" cy="899770"/>
+            <a:off x="7708392" y="4828032"/>
+            <a:ext cx="3282696" cy="749808"/>
           </a:xfrm>
           <a:prstGeom prst="rect">
             <a:avLst/>
@@ -9811,7 +9811,7 @@
               <a:buNone/>
             </a:pPr>
             <a:r>
-              <a:rPr lang="en-US" sz="1320" dirty="0">
+              <a:rPr lang="en-US" sz="1220" dirty="0">
                 <a:solidFill>
                   <a:srgbClr val="17364A"/>
                 </a:solidFill>
@@ -9819,9 +9819,9 @@
                 <a:ea typeface="Aptos" pitchFamily="34" charset="-122"/>
                 <a:cs typeface="Aptos" pitchFamily="34" charset="-120"/>
               </a:rPr>
-              <a:t>Use the assignment to test whether you can explain the concept, apply it to a realistic public health situation, and identify what would need review before the work moves forward.</a:t>
-            </a:r>
-            <a:endParaRPr lang="en-US" sz="1320" dirty="0"/>
+              <a:t>Use the assignment to test whether you can explain the concept, apply it to a.</a:t>
+            </a:r>
+            <a:endParaRPr lang="en-US" sz="1220" dirty="0"/>
           </a:p>
         </p:txBody>
       </p:sp>
@@ -10156,7 +10156,7 @@
                 <a:ea typeface="Aptos" pitchFamily="34" charset="-122"/>
                 <a:cs typeface="Aptos" pitchFamily="34" charset="-120"/>
               </a:rPr>
-              <a:t>• Leaders need to know who can approve a pilot, who can accept residual risk, who can authorize.</a:t>
+              <a:t>• Leaders need to know who can approve a pilot, who can accept residual risk,.</a:t>
             </a:r>
             <a:endParaRPr lang="en-US" sz="2100" dirty="0"/>
           </a:p>
@@ -10173,7 +10173,7 @@
                 <a:ea typeface="Aptos" pitchFamily="34" charset="-122"/>
                 <a:cs typeface="Aptos" pitchFamily="34" charset="-120"/>
               </a:rPr>
-              <a:t>• Ambiguous accountability is especially risky in public health because AI outputs may influence.</a:t>
+              <a:t>• Ambiguous accountability is especially risky in public health because AI.</a:t>
             </a:r>
             <a:endParaRPr lang="en-US" sz="2100" dirty="0"/>
           </a:p>
@@ -10214,8 +10214,8 @@
         </p:nvSpPr>
         <p:spPr>
           <a:xfrm>
-            <a:off x="8074152" y="1563624"/>
-            <a:ext cx="2825496" cy="256032"/>
+            <a:off x="8074152" y="1545336"/>
+            <a:ext cx="2825496" cy="228600"/>
           </a:xfrm>
           <a:prstGeom prst="rect">
             <a:avLst/>
@@ -10231,7 +10231,7 @@
               <a:buNone/>
             </a:pPr>
             <a:r>
-              <a:rPr lang="en-US" sz="1300" b="1" dirty="0">
+              <a:rPr lang="en-US" sz="1220" b="1" dirty="0">
                 <a:solidFill>
                   <a:srgbClr val="0068B7"/>
                 </a:solidFill>
@@ -10241,7 +10241,7 @@
               </a:rPr>
               <a:t>Module details</a:t>
             </a:r>
-            <a:endParaRPr lang="en-US" sz="1300" dirty="0"/>
+            <a:endParaRPr lang="en-US" sz="1220" dirty="0"/>
           </a:p>
         </p:txBody>
       </p:sp>
@@ -10253,8 +10253,8 @@
         </p:nvSpPr>
         <p:spPr>
           <a:xfrm>
-            <a:off x="8074152" y="1892808"/>
-            <a:ext cx="2825496" cy="1353312"/>
+            <a:off x="8074152" y="1856232"/>
+            <a:ext cx="2825496" cy="1408176"/>
           </a:xfrm>
           <a:prstGeom prst="rect">
             <a:avLst/>
@@ -10272,7 +10272,7 @@
               <a:buNone/>
             </a:pPr>
             <a:r>
-              <a:rPr lang="en-US" sz="1320" dirty="0">
+              <a:rPr lang="en-US" sz="1220" dirty="0">
                 <a:solidFill>
                   <a:srgbClr val="17364A"/>
                 </a:solidFill>
@@ -10280,9 +10280,9 @@
                 <a:ea typeface="Aptos" pitchFamily="34" charset="-122"/>
                 <a:cs typeface="Aptos" pitchFamily="34" charset="-120"/>
               </a:rPr>
-              <a:t>Level: advanced/leadership Primary track: Public Health Executive Leadership Track Appears in tracks: governance-security</a:t>
-            </a:r>
-            <a:endParaRPr lang="en-US" sz="1320" dirty="0"/>
+              <a:t>Level: advanced/leadership Primary track: Public Health Executive Leadership.</a:t>
+            </a:r>
+            <a:endParaRPr lang="en-US" sz="1220" dirty="0"/>
           </a:p>
         </p:txBody>
       </p:sp>
@@ -10321,8 +10321,8 @@
         </p:nvSpPr>
         <p:spPr>
           <a:xfrm>
-            <a:off x="8074152" y="3822192"/>
-            <a:ext cx="2825496" cy="256032"/>
+            <a:off x="8074152" y="3803904"/>
+            <a:ext cx="2825496" cy="228600"/>
           </a:xfrm>
           <a:prstGeom prst="rect">
             <a:avLst/>
@@ -10338,7 +10338,7 @@
               <a:buNone/>
             </a:pPr>
             <a:r>
-              <a:rPr lang="en-US" sz="1300" b="1" dirty="0">
+              <a:rPr lang="en-US" sz="1220" b="1" dirty="0">
                 <a:solidFill>
                   <a:srgbClr val="0068B7"/>
                 </a:solidFill>
@@ -10348,7 +10348,7 @@
               </a:rPr>
               <a:t>Learning sequence</a:t>
             </a:r>
-            <a:endParaRPr lang="en-US" sz="1300" dirty="0"/>
+            <a:endParaRPr lang="en-US" sz="1220" dirty="0"/>
           </a:p>
         </p:txBody>
       </p:sp>
@@ -10360,8 +10360,8 @@
         </p:nvSpPr>
         <p:spPr>
           <a:xfrm>
-            <a:off x="8092440" y="4187952"/>
-            <a:ext cx="2770632" cy="1033272"/>
+            <a:off x="8092440" y="4133088"/>
+            <a:ext cx="2770632" cy="1124712"/>
           </a:xfrm>
           <a:prstGeom prst="rect">
             <a:avLst/>
@@ -10379,7 +10379,7 @@
               <a:buNone/>
             </a:pPr>
             <a:r>
-              <a:rPr lang="en-US" sz="1220" dirty="0">
+              <a:rPr lang="en-US" sz="1140" dirty="0">
                 <a:solidFill>
                   <a:srgbClr val="17364A"/>
                 </a:solidFill>
@@ -10389,14 +10389,14 @@
               </a:rPr>
               <a:t>Read the module for shared vocabulary and context.</a:t>
             </a:r>
-            <a:endParaRPr lang="en-US" sz="1220" dirty="0"/>
-          </a:p>
-          <a:p>
-            <a:pPr indent="0" marL="0">
-              <a:buNone/>
-            </a:pPr>
-            <a:r>
-              <a:rPr lang="en-US" sz="1220" dirty="0">
+            <a:endParaRPr lang="en-US" sz="1140" dirty="0"/>
+          </a:p>
+          <a:p>
+            <a:pPr indent="0" marL="0">
+              <a:buNone/>
+            </a:pPr>
+            <a:r>
+              <a:rPr lang="en-US" sz="1140" dirty="0">
                 <a:solidFill>
                   <a:srgbClr val="17364A"/>
                 </a:solidFill>
@@ -10404,16 +10404,16 @@
                 <a:ea typeface="Aptos" pitchFamily="34" charset="-122"/>
                 <a:cs typeface="Aptos" pitchFamily="34" charset="-120"/>
               </a:rPr>
-              <a:t>Complete the practical exercise to apply the concept.</a:t>
-            </a:r>
-            <a:endParaRPr lang="en-US" sz="1220" dirty="0"/>
-          </a:p>
-          <a:p>
-            <a:pPr indent="0" marL="0">
-              <a:buNone/>
-            </a:pPr>
-            <a:r>
-              <a:rPr lang="en-US" sz="1220" dirty="0">
+              <a:t>Complete the practical exercise to apply the.</a:t>
+            </a:r>
+            <a:endParaRPr lang="en-US" sz="1140" dirty="0"/>
+          </a:p>
+          <a:p>
+            <a:pPr indent="0" marL="0">
+              <a:buNone/>
+            </a:pPr>
+            <a:r>
+              <a:rPr lang="en-US" sz="1140" dirty="0">
                 <a:solidFill>
                   <a:srgbClr val="17364A"/>
                 </a:solidFill>
@@ -10423,7 +10423,7 @@
               </a:rPr>
               <a:t>Use the notes and references for deeper review.</a:t>
             </a:r>
-            <a:endParaRPr lang="en-US" sz="1220" dirty="0"/>
+            <a:endParaRPr lang="en-US" sz="1140" dirty="0"/>
           </a:p>
         </p:txBody>
       </p:sp>
@@ -10714,8 +10714,8 @@
         </p:nvSpPr>
         <p:spPr>
           <a:xfrm>
-            <a:off x="868680" y="1508760"/>
-            <a:ext cx="6309360" cy="4160520"/>
+            <a:off x="822960" y="1463040"/>
+            <a:ext cx="6565392" cy="4343400"/>
           </a:xfrm>
           <a:prstGeom prst="rect">
             <a:avLst/>
@@ -10733,7 +10733,7 @@
               <a:buNone/>
             </a:pPr>
             <a:r>
-              <a:rPr lang="en-US" sz="2100" dirty="0">
+              <a:rPr lang="en-US" sz="1920" dirty="0">
                 <a:solidFill>
                   <a:srgbClr val="003A63"/>
                 </a:solidFill>
@@ -10743,14 +10743,14 @@
               </a:rPr>
               <a:t>• NIST Artificial Intelligence Risk Management Framework (AI RMF 1.0):.</a:t>
             </a:r>
-            <a:endParaRPr lang="en-US" sz="2100" dirty="0"/>
-          </a:p>
-          <a:p>
-            <a:pPr indent="0" marL="0">
-              <a:buNone/>
-            </a:pPr>
-            <a:r>
-              <a:rPr lang="en-US" sz="2100" dirty="0">
+            <a:endParaRPr lang="en-US" sz="1920" dirty="0"/>
+          </a:p>
+          <a:p>
+            <a:pPr indent="0" marL="0">
+              <a:buNone/>
+            </a:pPr>
+            <a:r>
+              <a:rPr lang="en-US" sz="1920" dirty="0">
                 <a:solidFill>
                   <a:srgbClr val="003A63"/>
                 </a:solidFill>
@@ -10760,14 +10760,14 @@
               </a:rPr>
               <a:t>• NIST Generative AI Profile:.</a:t>
             </a:r>
-            <a:endParaRPr lang="en-US" sz="2100" dirty="0"/>
-          </a:p>
-          <a:p>
-            <a:pPr indent="0" marL="0">
-              <a:buNone/>
-            </a:pPr>
-            <a:r>
-              <a:rPr lang="en-US" sz="2100" dirty="0">
+            <a:endParaRPr lang="en-US" sz="1920" dirty="0"/>
+          </a:p>
+          <a:p>
+            <a:pPr indent="0" marL="0">
+              <a:buNone/>
+            </a:pPr>
+            <a:r>
+              <a:rPr lang="en-US" sz="1920" dirty="0">
                 <a:solidFill>
                   <a:srgbClr val="003A63"/>
                 </a:solidFill>
@@ -10777,7 +10777,7 @@
               </a:rPr>
               <a:t>• NIST Privacy Framework</a:t>
             </a:r>
-            <a:endParaRPr lang="en-US" sz="2100" dirty="0"/>
+            <a:endParaRPr lang="en-US" sz="1920" dirty="0"/>
           </a:p>
         </p:txBody>
       </p:sp>
@@ -10789,12 +10789,12 @@
         </p:nvSpPr>
         <p:spPr>
           <a:xfrm>
-            <a:off x="7635240" y="1325880"/>
-            <a:ext cx="3474720" cy="1207008"/>
+            <a:off x="7543800" y="1325880"/>
+            <a:ext cx="3611880" cy="1261872"/>
           </a:xfrm>
           <a:prstGeom prst="roundRect">
             <a:avLst>
-              <a:gd name="adj" fmla="val 9091"/>
+              <a:gd name="adj" fmla="val 8696"/>
             </a:avLst>
           </a:prstGeom>
           <a:solidFill>
@@ -10816,8 +10816,8 @@
         </p:nvSpPr>
         <p:spPr>
           <a:xfrm>
-            <a:off x="7799832" y="1472184"/>
-            <a:ext cx="3145536" cy="256032"/>
+            <a:off x="7708392" y="1453896"/>
+            <a:ext cx="3282696" cy="228600"/>
           </a:xfrm>
           <a:prstGeom prst="rect">
             <a:avLst/>
@@ -10833,7 +10833,7 @@
               <a:buNone/>
             </a:pPr>
             <a:r>
-              <a:rPr lang="en-US" sz="1300" b="1" dirty="0">
+              <a:rPr lang="en-US" sz="1220" b="1" dirty="0">
                 <a:solidFill>
                   <a:srgbClr val="0068B7"/>
                 </a:solidFill>
@@ -10843,7 +10843,7 @@
               </a:rPr>
               <a:t>Governance lens</a:t>
             </a:r>
-            <a:endParaRPr lang="en-US" sz="1300" dirty="0"/>
+            <a:endParaRPr lang="en-US" sz="1220" dirty="0"/>
           </a:p>
         </p:txBody>
       </p:sp>
@@ -10855,8 +10855,8 @@
         </p:nvSpPr>
         <p:spPr>
           <a:xfrm>
-            <a:off x="7799832" y="1801368"/>
-            <a:ext cx="3145536" cy="640080"/>
+            <a:off x="7708392" y="1764792"/>
+            <a:ext cx="3282696" cy="749808"/>
           </a:xfrm>
           <a:prstGeom prst="rect">
             <a:avLst/>
@@ -10874,7 +10874,7 @@
               <a:buNone/>
             </a:pPr>
             <a:r>
-              <a:rPr lang="en-US" sz="1320" dirty="0">
+              <a:rPr lang="en-US" sz="1220" dirty="0">
                 <a:solidFill>
                   <a:srgbClr val="17364A"/>
                 </a:solidFill>
@@ -10884,7 +10884,7 @@
               </a:rPr>
               <a:t>NIST Artificial Intelligence Risk Management Framework (AI RMF 1.0):.</a:t>
             </a:r>
-            <a:endParaRPr lang="en-US" sz="1320" dirty="0"/>
+            <a:endParaRPr lang="en-US" sz="1220" dirty="0"/>
           </a:p>
         </p:txBody>
       </p:sp>
@@ -10896,12 +10896,12 @@
         </p:nvSpPr>
         <p:spPr>
           <a:xfrm>
-            <a:off x="7635240" y="2670048"/>
-            <a:ext cx="3474720" cy="1377086"/>
+            <a:off x="7543800" y="2724912"/>
+            <a:ext cx="3611880" cy="1527048"/>
           </a:xfrm>
           <a:prstGeom prst="roundRect">
             <a:avLst>
-              <a:gd name="adj" fmla="val 7968"/>
+              <a:gd name="adj" fmla="val 7186"/>
             </a:avLst>
           </a:prstGeom>
           <a:solidFill>
@@ -10923,8 +10923,8 @@
         </p:nvSpPr>
         <p:spPr>
           <a:xfrm>
-            <a:off x="7799832" y="2816352"/>
-            <a:ext cx="3145536" cy="256032"/>
+            <a:off x="7708392" y="2852928"/>
+            <a:ext cx="3282696" cy="228600"/>
           </a:xfrm>
           <a:prstGeom prst="rect">
             <a:avLst/>
@@ -10940,7 +10940,7 @@
               <a:buNone/>
             </a:pPr>
             <a:r>
-              <a:rPr lang="en-US" sz="1300" b="1" dirty="0">
+              <a:rPr lang="en-US" sz="1220" b="1" dirty="0">
                 <a:solidFill>
                   <a:srgbClr val="0068B7"/>
                 </a:solidFill>
@@ -10950,7 +10950,7 @@
               </a:rPr>
               <a:t>Concept checkpoints</a:t>
             </a:r>
-            <a:endParaRPr lang="en-US" sz="1300" dirty="0"/>
+            <a:endParaRPr lang="en-US" sz="1220" dirty="0"/>
           </a:p>
         </p:txBody>
       </p:sp>
@@ -10962,8 +10962,8 @@
         </p:nvSpPr>
         <p:spPr>
           <a:xfrm>
-            <a:off x="7818120" y="3182112"/>
-            <a:ext cx="3090672" cy="718718"/>
+            <a:off x="7726680" y="3182112"/>
+            <a:ext cx="3227832" cy="960120"/>
           </a:xfrm>
           <a:prstGeom prst="rect">
             <a:avLst/>
@@ -10981,7 +10981,7 @@
               <a:buNone/>
             </a:pPr>
             <a:r>
-              <a:rPr lang="en-US" sz="1220" dirty="0">
+              <a:rPr lang="en-US" sz="1140" dirty="0">
                 <a:solidFill>
                   <a:srgbClr val="17364A"/>
                 </a:solidFill>
@@ -10989,16 +10989,16 @@
                 <a:ea typeface="Aptos" pitchFamily="34" charset="-122"/>
                 <a:cs typeface="Aptos" pitchFamily="34" charset="-120"/>
               </a:rPr>
-              <a:t>NIST Artificial Intelligence Risk Management Framework (AI RMF.</a:t>
-            </a:r>
-            <a:endParaRPr lang="en-US" sz="1220" dirty="0"/>
-          </a:p>
-          <a:p>
-            <a:pPr indent="0" marL="0">
-              <a:buNone/>
-            </a:pPr>
-            <a:r>
-              <a:rPr lang="en-US" sz="1220" dirty="0">
+              <a:t>NIST Artificial Intelligence Risk Management.</a:t>
+            </a:r>
+            <a:endParaRPr lang="en-US" sz="1140" dirty="0"/>
+          </a:p>
+          <a:p>
+            <a:pPr indent="0" marL="0">
+              <a:buNone/>
+            </a:pPr>
+            <a:r>
+              <a:rPr lang="en-US" sz="1140" dirty="0">
                 <a:solidFill>
                   <a:srgbClr val="17364A"/>
                 </a:solidFill>
@@ -11006,16 +11006,16 @@
                 <a:ea typeface="Aptos" pitchFamily="34" charset="-122"/>
                 <a:cs typeface="Aptos" pitchFamily="34" charset="-120"/>
               </a:rPr>
-              <a:t>CDC Public Health Data Strategy and Data Modernization resources:.</a:t>
-            </a:r>
-            <a:endParaRPr lang="en-US" sz="1220" dirty="0"/>
-          </a:p>
-          <a:p>
-            <a:pPr indent="0" marL="0">
-              <a:buNone/>
-            </a:pPr>
-            <a:r>
-              <a:rPr lang="en-US" sz="1220" dirty="0">
+              <a:t>CDC Public Health Data Strategy and Data.</a:t>
+            </a:r>
+            <a:endParaRPr lang="en-US" sz="1140" dirty="0"/>
+          </a:p>
+          <a:p>
+            <a:pPr indent="0" marL="0">
+              <a:buNone/>
+            </a:pPr>
+            <a:r>
+              <a:rPr lang="en-US" sz="1140" dirty="0">
                 <a:solidFill>
                   <a:srgbClr val="17364A"/>
                 </a:solidFill>
@@ -11023,9 +11023,9 @@
                 <a:ea typeface="Aptos" pitchFamily="34" charset="-122"/>
                 <a:cs typeface="Aptos" pitchFamily="34" charset="-120"/>
               </a:rPr>
-              <a:t>WHO Ethics and Governance of Artificial Intelligence for Health:.</a:t>
-            </a:r>
-            <a:endParaRPr lang="en-US" sz="1220" dirty="0"/>
+              <a:t>WHO Ethics and Governance of Artificial.</a:t>
+            </a:r>
+            <a:endParaRPr lang="en-US" sz="1140" dirty="0"/>
           </a:p>
         </p:txBody>
       </p:sp>
@@ -11037,12 +11037,12 @@
         </p:nvSpPr>
         <p:spPr>
           <a:xfrm>
-            <a:off x="7635240" y="4184294"/>
-            <a:ext cx="3474720" cy="1466698"/>
+            <a:off x="7543800" y="4389120"/>
+            <a:ext cx="3611880" cy="1261872"/>
           </a:xfrm>
           <a:prstGeom prst="roundRect">
             <a:avLst>
-              <a:gd name="adj" fmla="val 7481"/>
+              <a:gd name="adj" fmla="val 8696"/>
             </a:avLst>
           </a:prstGeom>
           <a:solidFill>
@@ -11064,8 +11064,8 @@
         </p:nvSpPr>
         <p:spPr>
           <a:xfrm>
-            <a:off x="7799832" y="4330598"/>
-            <a:ext cx="3145536" cy="256032"/>
+            <a:off x="7708392" y="4517136"/>
+            <a:ext cx="3282696" cy="228600"/>
           </a:xfrm>
           <a:prstGeom prst="rect">
             <a:avLst/>
@@ -11081,7 +11081,7 @@
               <a:buNone/>
             </a:pPr>
             <a:r>
-              <a:rPr lang="en-US" sz="1300" b="1" dirty="0">
+              <a:rPr lang="en-US" sz="1220" b="1" dirty="0">
                 <a:solidFill>
                   <a:srgbClr val="0068B7"/>
                 </a:solidFill>
@@ -11091,7 +11091,7 @@
               </a:rPr>
               <a:t>What to document</a:t>
             </a:r>
-            <a:endParaRPr lang="en-US" sz="1300" dirty="0"/>
+            <a:endParaRPr lang="en-US" sz="1220" dirty="0"/>
           </a:p>
         </p:txBody>
       </p:sp>
@@ -11103,8 +11103,8 @@
         </p:nvSpPr>
         <p:spPr>
           <a:xfrm>
-            <a:off x="7799832" y="4659782"/>
-            <a:ext cx="3145536" cy="899770"/>
+            <a:off x="7708392" y="4828032"/>
+            <a:ext cx="3282696" cy="749808"/>
           </a:xfrm>
           <a:prstGeom prst="rect">
             <a:avLst/>
@@ -11122,7 +11122,7 @@
               <a:buNone/>
             </a:pPr>
             <a:r>
-              <a:rPr lang="en-US" sz="1320" dirty="0">
+              <a:rPr lang="en-US" sz="1220" dirty="0">
                 <a:solidFill>
                   <a:srgbClr val="17364A"/>
                 </a:solidFill>
@@ -11130,9 +11130,9 @@
                 <a:ea typeface="Aptos" pitchFamily="34" charset="-122"/>
                 <a:cs typeface="Aptos" pitchFamily="34" charset="-120"/>
               </a:rPr>
-              <a:t>Connect the concept to public health purpose, responsible use, required safeguards, documentation, and the next action a department should take.</a:t>
-            </a:r>
-            <a:endParaRPr lang="en-US" sz="1320" dirty="0"/>
+              <a:t>Connect the concept to public health purpose, responsible use, required.</a:t>
+            </a:r>
+            <a:endParaRPr lang="en-US" sz="1220" dirty="0"/>
           </a:p>
         </p:txBody>
       </p:sp>
@@ -11423,8 +11423,8 @@
         </p:nvSpPr>
         <p:spPr>
           <a:xfrm>
-            <a:off x="868680" y="1508760"/>
-            <a:ext cx="6309360" cy="4160520"/>
+            <a:off x="822960" y="1463040"/>
+            <a:ext cx="6565392" cy="4343400"/>
           </a:xfrm>
           <a:prstGeom prst="rect">
             <a:avLst/>
@@ -11442,7 +11442,7 @@
               <a:buNone/>
             </a:pPr>
             <a:r>
-              <a:rPr lang="en-US" sz="2100" dirty="0">
+              <a:rPr lang="en-US" sz="1920" dirty="0">
                 <a:solidFill>
                   <a:srgbClr val="003A63"/>
                 </a:solidFill>
@@ -11450,16 +11450,16 @@
                 <a:ea typeface="Aptos" pitchFamily="34" charset="-122"/>
                 <a:cs typeface="Aptos" pitchFamily="34" charset="-120"/>
               </a:rPr>
-              <a:t>• OMB Memorandum M-24-10 on federal AI governance, risk management, and innovation, where.</a:t>
-            </a:r>
-            <a:endParaRPr lang="en-US" sz="2100" dirty="0"/>
-          </a:p>
-          <a:p>
-            <a:pPr indent="0" marL="0">
-              <a:buNone/>
-            </a:pPr>
-            <a:r>
-              <a:rPr lang="en-US" sz="2100" dirty="0">
+              <a:t>• OMB Memorandum M-24-10 on federal AI governance, risk management, and.</a:t>
+            </a:r>
+            <a:endParaRPr lang="en-US" sz="1920" dirty="0"/>
+          </a:p>
+          <a:p>
+            <a:pPr indent="0" marL="0">
+              <a:buNone/>
+            </a:pPr>
+            <a:r>
+              <a:rPr lang="en-US" sz="1920" dirty="0">
                 <a:solidFill>
                   <a:srgbClr val="003A63"/>
                 </a:solidFill>
@@ -11467,9 +11467,9 @@
                 <a:ea typeface="Aptos" pitchFamily="34" charset="-122"/>
                 <a:cs typeface="Aptos" pitchFamily="34" charset="-120"/>
               </a:rPr>
-              <a:t>• Agency strategic plans, procurement policies, privacy policies, cybersecurity policies, records.</a:t>
-            </a:r>
-            <a:endParaRPr lang="en-US" sz="2100" dirty="0"/>
+              <a:t>• Agency strategic plans, procurement policies, privacy policies,.</a:t>
+            </a:r>
+            <a:endParaRPr lang="en-US" sz="1920" dirty="0"/>
           </a:p>
         </p:txBody>
       </p:sp>
@@ -11481,12 +11481,12 @@
         </p:nvSpPr>
         <p:spPr>
           <a:xfrm>
-            <a:off x="7635240" y="1325880"/>
-            <a:ext cx="3474720" cy="1255471"/>
+            <a:off x="7543800" y="1325880"/>
+            <a:ext cx="3611880" cy="1261872"/>
           </a:xfrm>
           <a:prstGeom prst="roundRect">
             <a:avLst>
-              <a:gd name="adj" fmla="val 8740"/>
+              <a:gd name="adj" fmla="val 8696"/>
             </a:avLst>
           </a:prstGeom>
           <a:solidFill>
@@ -11508,8 +11508,8 @@
         </p:nvSpPr>
         <p:spPr>
           <a:xfrm>
-            <a:off x="7799832" y="1472184"/>
-            <a:ext cx="3145536" cy="256032"/>
+            <a:off x="7708392" y="1453896"/>
+            <a:ext cx="3282696" cy="228600"/>
           </a:xfrm>
           <a:prstGeom prst="rect">
             <a:avLst/>
@@ -11525,7 +11525,7 @@
               <a:buNone/>
             </a:pPr>
             <a:r>
-              <a:rPr lang="en-US" sz="1300" b="1" dirty="0">
+              <a:rPr lang="en-US" sz="1220" b="1" dirty="0">
                 <a:solidFill>
                   <a:srgbClr val="0068B7"/>
                 </a:solidFill>
@@ -11535,7 +11535,7 @@
               </a:rPr>
               <a:t>Governance lens</a:t>
             </a:r>
-            <a:endParaRPr lang="en-US" sz="1300" dirty="0"/>
+            <a:endParaRPr lang="en-US" sz="1220" dirty="0"/>
           </a:p>
         </p:txBody>
       </p:sp>
@@ -11547,8 +11547,8 @@
         </p:nvSpPr>
         <p:spPr>
           <a:xfrm>
-            <a:off x="7799832" y="1801368"/>
-            <a:ext cx="3145536" cy="688543"/>
+            <a:off x="7708392" y="1764792"/>
+            <a:ext cx="3282696" cy="749808"/>
           </a:xfrm>
           <a:prstGeom prst="rect">
             <a:avLst/>
@@ -11566,7 +11566,7 @@
               <a:buNone/>
             </a:pPr>
             <a:r>
-              <a:rPr lang="en-US" sz="1320" dirty="0">
+              <a:rPr lang="en-US" sz="1220" dirty="0">
                 <a:solidFill>
                   <a:srgbClr val="17364A"/>
                 </a:solidFill>
@@ -11574,9 +11574,9 @@
                 <a:ea typeface="Aptos" pitchFamily="34" charset="-122"/>
                 <a:cs typeface="Aptos" pitchFamily="34" charset="-120"/>
               </a:rPr>
-              <a:t>OMB Memorandum M-24-10 on federal AI governance, risk management, and innovation, where relevant to.</a:t>
-            </a:r>
-            <a:endParaRPr lang="en-US" sz="1320" dirty="0"/>
+              <a:t>OMB Memorandum M-24-10 on federal AI governance, risk management, and.</a:t>
+            </a:r>
+            <a:endParaRPr lang="en-US" sz="1220" dirty="0"/>
           </a:p>
         </p:txBody>
       </p:sp>
@@ -11588,12 +11588,12 @@
         </p:nvSpPr>
         <p:spPr>
           <a:xfrm>
-            <a:off x="7635240" y="2718511"/>
-            <a:ext cx="3474720" cy="1328623"/>
+            <a:off x="7543800" y="2724912"/>
+            <a:ext cx="3611880" cy="1527048"/>
           </a:xfrm>
           <a:prstGeom prst="roundRect">
             <a:avLst>
-              <a:gd name="adj" fmla="val 8259"/>
+              <a:gd name="adj" fmla="val 7186"/>
             </a:avLst>
           </a:prstGeom>
           <a:solidFill>
@@ -11615,8 +11615,8 @@
         </p:nvSpPr>
         <p:spPr>
           <a:xfrm>
-            <a:off x="7799832" y="2864815"/>
-            <a:ext cx="3145536" cy="256032"/>
+            <a:off x="7708392" y="2852928"/>
+            <a:ext cx="3282696" cy="228600"/>
           </a:xfrm>
           <a:prstGeom prst="rect">
             <a:avLst/>
@@ -11632,7 +11632,7 @@
               <a:buNone/>
             </a:pPr>
             <a:r>
-              <a:rPr lang="en-US" sz="1300" b="1" dirty="0">
+              <a:rPr lang="en-US" sz="1220" b="1" dirty="0">
                 <a:solidFill>
                   <a:srgbClr val="0068B7"/>
                 </a:solidFill>
@@ -11642,7 +11642,7 @@
               </a:rPr>
               <a:t>Concept checkpoints</a:t>
             </a:r>
-            <a:endParaRPr lang="en-US" sz="1300" dirty="0"/>
+            <a:endParaRPr lang="en-US" sz="1220" dirty="0"/>
           </a:p>
         </p:txBody>
       </p:sp>
@@ -11654,8 +11654,8 @@
         </p:nvSpPr>
         <p:spPr>
           <a:xfrm>
-            <a:off x="7818120" y="3230575"/>
-            <a:ext cx="3090672" cy="670255"/>
+            <a:off x="7726680" y="3182112"/>
+            <a:ext cx="3227832" cy="960120"/>
           </a:xfrm>
           <a:prstGeom prst="rect">
             <a:avLst/>
@@ -11673,7 +11673,7 @@
               <a:buNone/>
             </a:pPr>
             <a:r>
-              <a:rPr lang="en-US" sz="1220" dirty="0">
+              <a:rPr lang="en-US" sz="1140" dirty="0">
                 <a:solidFill>
                   <a:srgbClr val="17364A"/>
                 </a:solidFill>
@@ -11681,16 +11681,16 @@
                 <a:ea typeface="Aptos" pitchFamily="34" charset="-122"/>
                 <a:cs typeface="Aptos" pitchFamily="34" charset="-120"/>
               </a:rPr>
-              <a:t>OMB Memorandum M-24-10 on federal AI governance, risk management,.</a:t>
-            </a:r>
-            <a:endParaRPr lang="en-US" sz="1220" dirty="0"/>
-          </a:p>
-          <a:p>
-            <a:pPr indent="0" marL="0">
-              <a:buNone/>
-            </a:pPr>
-            <a:r>
-              <a:rPr lang="en-US" sz="1220" dirty="0">
+              <a:t>OMB Memorandum M-24-10 on federal AI governance,.</a:t>
+            </a:r>
+            <a:endParaRPr lang="en-US" sz="1140" dirty="0"/>
+          </a:p>
+          <a:p>
+            <a:pPr indent="0" marL="0">
+              <a:buNone/>
+            </a:pPr>
+            <a:r>
+              <a:rPr lang="en-US" sz="1140" dirty="0">
                 <a:solidFill>
                   <a:srgbClr val="17364A"/>
                 </a:solidFill>
@@ -11698,9 +11698,9 @@
                 <a:ea typeface="Aptos" pitchFamily="34" charset="-122"/>
                 <a:cs typeface="Aptos" pitchFamily="34" charset="-120"/>
               </a:rPr>
-              <a:t>Agency strategic plans, procurement policies, privacy policies,.</a:t>
-            </a:r>
-            <a:endParaRPr lang="en-US" sz="1220" dirty="0"/>
+              <a:t>Agency strategic plans, procurement policies,.</a:t>
+            </a:r>
+            <a:endParaRPr lang="en-US" sz="1140" dirty="0"/>
           </a:p>
         </p:txBody>
       </p:sp>
@@ -11712,12 +11712,12 @@
         </p:nvSpPr>
         <p:spPr>
           <a:xfrm>
-            <a:off x="7635240" y="4184294"/>
-            <a:ext cx="3474720" cy="1466698"/>
+            <a:off x="7543800" y="4389120"/>
+            <a:ext cx="3611880" cy="1261872"/>
           </a:xfrm>
           <a:prstGeom prst="roundRect">
             <a:avLst>
-              <a:gd name="adj" fmla="val 7481"/>
+              <a:gd name="adj" fmla="val 8696"/>
             </a:avLst>
           </a:prstGeom>
           <a:solidFill>
@@ -11739,8 +11739,8 @@
         </p:nvSpPr>
         <p:spPr>
           <a:xfrm>
-            <a:off x="7799832" y="4330598"/>
-            <a:ext cx="3145536" cy="256032"/>
+            <a:off x="7708392" y="4517136"/>
+            <a:ext cx="3282696" cy="228600"/>
           </a:xfrm>
           <a:prstGeom prst="rect">
             <a:avLst/>
@@ -11756,7 +11756,7 @@
               <a:buNone/>
             </a:pPr>
             <a:r>
-              <a:rPr lang="en-US" sz="1300" b="1" dirty="0">
+              <a:rPr lang="en-US" sz="1220" b="1" dirty="0">
                 <a:solidFill>
                   <a:srgbClr val="0068B7"/>
                 </a:solidFill>
@@ -11766,7 +11766,7 @@
               </a:rPr>
               <a:t>What to document</a:t>
             </a:r>
-            <a:endParaRPr lang="en-US" sz="1300" dirty="0"/>
+            <a:endParaRPr lang="en-US" sz="1220" dirty="0"/>
           </a:p>
         </p:txBody>
       </p:sp>
@@ -11778,8 +11778,8 @@
         </p:nvSpPr>
         <p:spPr>
           <a:xfrm>
-            <a:off x="7799832" y="4659782"/>
-            <a:ext cx="3145536" cy="899770"/>
+            <a:off x="7708392" y="4828032"/>
+            <a:ext cx="3282696" cy="749808"/>
           </a:xfrm>
           <a:prstGeom prst="rect">
             <a:avLst/>
@@ -11797,7 +11797,7 @@
               <a:buNone/>
             </a:pPr>
             <a:r>
-              <a:rPr lang="en-US" sz="1320" dirty="0">
+              <a:rPr lang="en-US" sz="1220" dirty="0">
                 <a:solidFill>
                   <a:srgbClr val="17364A"/>
                 </a:solidFill>
@@ -11805,9 +11805,9 @@
                 <a:ea typeface="Aptos" pitchFamily="34" charset="-122"/>
                 <a:cs typeface="Aptos" pitchFamily="34" charset="-120"/>
               </a:rPr>
-              <a:t>Connect the concept to public health purpose, responsible use, required safeguards, documentation, and the next action a department should take.</a:t>
-            </a:r>
-            <a:endParaRPr lang="en-US" sz="1320" dirty="0"/>
+              <a:t>Connect the concept to public health purpose, responsible use, required.</a:t>
+            </a:r>
+            <a:endParaRPr lang="en-US" sz="1220" dirty="0"/>
           </a:p>
         </p:txBody>
       </p:sp>
@@ -12125,7 +12125,7 @@
                 <a:ea typeface="Aptos" pitchFamily="34" charset="-122"/>
                 <a:cs typeface="Aptos" pitchFamily="34" charset="-120"/>
               </a:rPr>
-              <a:t>• Play 11: Build and Deploy AI Solutions - This lesson informs Play 11 by helping learners.</a:t>
+              <a:t>• Play 11: Build and Deploy AI Solutions - This lesson informs Play 11 by.</a:t>
             </a:r>
             <a:endParaRPr lang="en-US" sz="1900" dirty="0"/>
           </a:p>
@@ -12142,7 +12142,7 @@
                 <a:ea typeface="Aptos" pitchFamily="34" charset="-122"/>
                 <a:cs typeface="Aptos" pitchFamily="34" charset="-120"/>
               </a:rPr>
-              <a:t>• Play 1: Vision &amp; Guardrails - This lesson informs Play 1 by helping learners connect the.</a:t>
+              <a:t>• Play 1: Vision &amp; Guardrails - This lesson informs Play 1 by helping learners.</a:t>
             </a:r>
             <a:endParaRPr lang="en-US" sz="1900" dirty="0"/>
           </a:p>
@@ -12159,7 +12159,7 @@
                 <a:ea typeface="Aptos" pitchFamily="34" charset="-122"/>
                 <a:cs typeface="Aptos" pitchFamily="34" charset="-120"/>
               </a:rPr>
-              <a:t>• Play 3: Establish AI Governance - This lesson informs Play 3 by helping learners connect the.</a:t>
+              <a:t>• Play 3: Establish AI Governance - This lesson informs Play 3 by helping.</a:t>
             </a:r>
             <a:endParaRPr lang="en-US" sz="1900" dirty="0"/>
           </a:p>
@@ -12176,7 +12176,7 @@
                 <a:ea typeface="Aptos" pitchFamily="34" charset="-122"/>
                 <a:cs typeface="Aptos" pitchFamily="34" charset="-120"/>
               </a:rPr>
-              <a:t>• Play 7: Prioritize Use Cases - This lesson informs Play 7 by helping learners connect the.</a:t>
+              <a:t>• Play 7: Prioritize Use Cases - This lesson informs Play 7 by helping.</a:t>
             </a:r>
             <a:endParaRPr lang="en-US" sz="1900" dirty="0"/>
           </a:p>
@@ -12217,8 +12217,8 @@
         </p:nvSpPr>
         <p:spPr>
           <a:xfrm>
-            <a:off x="8211312" y="1563624"/>
-            <a:ext cx="2734056" cy="256032"/>
+            <a:off x="8211312" y="1545336"/>
+            <a:ext cx="2734056" cy="228600"/>
           </a:xfrm>
           <a:prstGeom prst="rect">
             <a:avLst/>
@@ -12234,7 +12234,7 @@
               <a:buNone/>
             </a:pPr>
             <a:r>
-              <a:rPr lang="en-US" sz="1300" b="1" dirty="0">
+              <a:rPr lang="en-US" sz="1220" b="1" dirty="0">
                 <a:solidFill>
                   <a:srgbClr val="0068B7"/>
                 </a:solidFill>
@@ -12244,7 +12244,7 @@
               </a:rPr>
               <a:t>Apply the lesson</a:t>
             </a:r>
-            <a:endParaRPr lang="en-US" sz="1300" dirty="0"/>
+            <a:endParaRPr lang="en-US" sz="1220" dirty="0"/>
           </a:p>
         </p:txBody>
       </p:sp>
@@ -12256,8 +12256,8 @@
         </p:nvSpPr>
         <p:spPr>
           <a:xfrm>
-            <a:off x="8211312" y="1892808"/>
-            <a:ext cx="2734056" cy="1536192"/>
+            <a:off x="8211312" y="1856232"/>
+            <a:ext cx="2734056" cy="1591056"/>
           </a:xfrm>
           <a:prstGeom prst="rect">
             <a:avLst/>
@@ -12275,7 +12275,7 @@
               <a:buNone/>
             </a:pPr>
             <a:r>
-              <a:rPr lang="en-US" sz="1320" dirty="0">
+              <a:rPr lang="en-US" sz="1220" dirty="0">
                 <a:solidFill>
                   <a:srgbClr val="17364A"/>
                 </a:solidFill>
@@ -12283,9 +12283,9 @@
                 <a:ea typeface="Aptos" pitchFamily="34" charset="-122"/>
                 <a:cs typeface="Aptos" pitchFamily="34" charset="-120"/>
               </a:rPr>
-              <a:t>Use the related plays to identify decisions, participants, timing, approvals, and documentation needed for responsible implementation.</a:t>
-            </a:r>
-            <a:endParaRPr lang="en-US" sz="1320" dirty="0"/>
+              <a:t>Use the related plays to identify decisions, participants, timing, approvals,.</a:t>
+            </a:r>
+            <a:endParaRPr lang="en-US" sz="1220" dirty="0"/>
           </a:p>
         </p:txBody>
       </p:sp>
@@ -12324,8 +12324,8 @@
         </p:nvSpPr>
         <p:spPr>
           <a:xfrm>
-            <a:off x="8211312" y="3941064"/>
-            <a:ext cx="2734056" cy="256032"/>
+            <a:off x="8211312" y="3922776"/>
+            <a:ext cx="2734056" cy="228600"/>
           </a:xfrm>
           <a:prstGeom prst="rect">
             <a:avLst/>
@@ -12341,7 +12341,7 @@
               <a:buNone/>
             </a:pPr>
             <a:r>
-              <a:rPr lang="en-US" sz="1300" b="1" dirty="0">
+              <a:rPr lang="en-US" sz="1220" b="1" dirty="0">
                 <a:solidFill>
                   <a:srgbClr val="0068B7"/>
                 </a:solidFill>
@@ -12351,7 +12351,7 @@
               </a:rPr>
               <a:t>Use the play links to</a:t>
             </a:r>
-            <a:endParaRPr lang="en-US" sz="1300" dirty="0"/>
+            <a:endParaRPr lang="en-US" sz="1220" dirty="0"/>
           </a:p>
         </p:txBody>
       </p:sp>
@@ -12363,8 +12363,8 @@
         </p:nvSpPr>
         <p:spPr>
           <a:xfrm>
-            <a:off x="8229600" y="4306824"/>
-            <a:ext cx="2679192" cy="941832"/>
+            <a:off x="8229600" y="4251960"/>
+            <a:ext cx="2679192" cy="1033272"/>
           </a:xfrm>
           <a:prstGeom prst="rect">
             <a:avLst/>
@@ -12382,7 +12382,7 @@
               <a:buNone/>
             </a:pPr>
             <a:r>
-              <a:rPr lang="en-US" sz="1220" dirty="0">
+              <a:rPr lang="en-US" sz="1140" dirty="0">
                 <a:solidFill>
                   <a:srgbClr val="17364A"/>
                 </a:solidFill>
@@ -12392,14 +12392,14 @@
               </a:rPr>
               <a:t>Locate the decision point in the playbook sequence.</a:t>
             </a:r>
-            <a:endParaRPr lang="en-US" sz="1220" dirty="0"/>
-          </a:p>
-          <a:p>
-            <a:pPr indent="0" marL="0">
-              <a:buNone/>
-            </a:pPr>
-            <a:r>
-              <a:rPr lang="en-US" sz="1220" dirty="0">
+            <a:endParaRPr lang="en-US" sz="1140" dirty="0"/>
+          </a:p>
+          <a:p>
+            <a:pPr indent="0" marL="0">
+              <a:buNone/>
+            </a:pPr>
+            <a:r>
+              <a:rPr lang="en-US" sz="1140" dirty="0">
                 <a:solidFill>
                   <a:srgbClr val="17364A"/>
                 </a:solidFill>
@@ -12409,14 +12409,14 @@
               </a:rPr>
               <a:t>Identify who should participate in the work.</a:t>
             </a:r>
-            <a:endParaRPr lang="en-US" sz="1220" dirty="0"/>
-          </a:p>
-          <a:p>
-            <a:pPr indent="0" marL="0">
-              <a:buNone/>
-            </a:pPr>
-            <a:r>
-              <a:rPr lang="en-US" sz="1220" dirty="0">
+            <a:endParaRPr lang="en-US" sz="1140" dirty="0"/>
+          </a:p>
+          <a:p>
+            <a:pPr indent="0" marL="0">
+              <a:buNone/>
+            </a:pPr>
+            <a:r>
+              <a:rPr lang="en-US" sz="1140" dirty="0">
                 <a:solidFill>
                   <a:srgbClr val="17364A"/>
                 </a:solidFill>
@@ -12424,9 +12424,9 @@
                 <a:ea typeface="Aptos" pitchFamily="34" charset="-122"/>
                 <a:cs typeface="Aptos" pitchFamily="34" charset="-120"/>
               </a:rPr>
-              <a:t>Document the review, approval, or implementation step.</a:t>
-            </a:r>
-            <a:endParaRPr lang="en-US" sz="1220" dirty="0"/>
+              <a:t>Document the review, approval, or implementation.</a:t>
+            </a:r>
+            <a:endParaRPr lang="en-US" sz="1140" dirty="0"/>
           </a:p>
         </p:txBody>
       </p:sp>
@@ -12744,7 +12744,7 @@
                 <a:ea typeface="Aptos" pitchFamily="34" charset="-122"/>
                 <a:cs typeface="Aptos" pitchFamily="34" charset="-120"/>
               </a:rPr>
-              <a:t>• Tool 32: Vendor Evaluation Checklist (Checklist) - Use this tool to complete or strengthen the.</a:t>
+              <a:t>• Tool 32: Vendor Evaluation Checklist (Checklist) - Use this tool to complete.</a:t>
             </a:r>
             <a:endParaRPr lang="en-US" sz="1850" dirty="0"/>
           </a:p>
@@ -12761,7 +12761,7 @@
                 <a:ea typeface="Aptos" pitchFamily="34" charset="-122"/>
                 <a:cs typeface="Aptos" pitchFamily="34" charset="-120"/>
               </a:rPr>
-              <a:t>• Tool 34: STLT AI Procurement and Vendor Addendum (Checklist) - Use this tool to complete or.</a:t>
+              <a:t>• Tool 34: STLT AI Procurement and Vendor Addendum (Checklist) - Use this tool.</a:t>
             </a:r>
             <a:endParaRPr lang="en-US" sz="1850" dirty="0"/>
           </a:p>
@@ -12778,7 +12778,7 @@
                 <a:ea typeface="Aptos" pitchFamily="34" charset="-122"/>
                 <a:cs typeface="Aptos" pitchFamily="34" charset="-120"/>
               </a:rPr>
-              <a:t>• Tool 3: Equity Impact Assessment Checklist (Checklist) - Use this tool to complete or.</a:t>
+              <a:t>• Tool 3: Equity Impact Assessment Checklist (Checklist) - Use this tool to.</a:t>
             </a:r>
             <a:endParaRPr lang="en-US" sz="1850" dirty="0"/>
           </a:p>
@@ -12795,7 +12795,7 @@
                 <a:ea typeface="Aptos" pitchFamily="34" charset="-122"/>
                 <a:cs typeface="Aptos" pitchFamily="34" charset="-120"/>
               </a:rPr>
-              <a:t>• Tool 4: AI Policy Landscape Scan (Worksheet) - Use AI Policy Landscape Scan to translate this.</a:t>
+              <a:t>• Tool 4: AI Policy Landscape Scan (Worksheet) - Use AI Policy Landscape Scan.</a:t>
             </a:r>
             <a:endParaRPr lang="en-US" sz="1850" dirty="0"/>
           </a:p>
@@ -12836,8 +12836,8 @@
         </p:nvSpPr>
         <p:spPr>
           <a:xfrm>
-            <a:off x="8211312" y="1563624"/>
-            <a:ext cx="2734056" cy="256032"/>
+            <a:off x="8211312" y="1545336"/>
+            <a:ext cx="2734056" cy="228600"/>
           </a:xfrm>
           <a:prstGeom prst="rect">
             <a:avLst/>
@@ -12853,7 +12853,7 @@
               <a:buNone/>
             </a:pPr>
             <a:r>
-              <a:rPr lang="en-US" sz="1300" b="1" dirty="0">
+              <a:rPr lang="en-US" sz="1220" b="1" dirty="0">
                 <a:solidFill>
                   <a:srgbClr val="0068B7"/>
                 </a:solidFill>
@@ -12863,7 +12863,7 @@
               </a:rPr>
               <a:t>Use the tools</a:t>
             </a:r>
-            <a:endParaRPr lang="en-US" sz="1300" dirty="0"/>
+            <a:endParaRPr lang="en-US" sz="1220" dirty="0"/>
           </a:p>
         </p:txBody>
       </p:sp>
@@ -12875,8 +12875,8 @@
         </p:nvSpPr>
         <p:spPr>
           <a:xfrm>
-            <a:off x="8211312" y="1892808"/>
-            <a:ext cx="2734056" cy="1536192"/>
+            <a:off x="8211312" y="1856232"/>
+            <a:ext cx="2734056" cy="1591056"/>
           </a:xfrm>
           <a:prstGeom prst="rect">
             <a:avLst/>
@@ -12894,7 +12894,7 @@
               <a:buNone/>
             </a:pPr>
             <a:r>
-              <a:rPr lang="en-US" sz="1320" dirty="0">
+              <a:rPr lang="en-US" sz="1220" dirty="0">
                 <a:solidFill>
                   <a:srgbClr val="17364A"/>
                 </a:solidFill>
@@ -12902,9 +12902,9 @@
                 <a:ea typeface="Aptos" pitchFamily="34" charset="-122"/>
                 <a:cs typeface="Aptos" pitchFamily="34" charset="-120"/>
               </a:rPr>
-              <a:t>Use linked tools when your department needs a structured worksheet, template, checklist, review process, or documentation artifact.</a:t>
-            </a:r>
-            <a:endParaRPr lang="en-US" sz="1320" dirty="0"/>
+              <a:t>Use linked tools when your department needs a structured worksheet, template,.</a:t>
+            </a:r>
+            <a:endParaRPr lang="en-US" sz="1220" dirty="0"/>
           </a:p>
         </p:txBody>
       </p:sp>
@@ -12943,8 +12943,8 @@
         </p:nvSpPr>
         <p:spPr>
           <a:xfrm>
-            <a:off x="8211312" y="3941064"/>
-            <a:ext cx="2734056" cy="256032"/>
+            <a:off x="8211312" y="3922776"/>
+            <a:ext cx="2734056" cy="228600"/>
           </a:xfrm>
           <a:prstGeom prst="rect">
             <a:avLst/>
@@ -12960,7 +12960,7 @@
               <a:buNone/>
             </a:pPr>
             <a:r>
-              <a:rPr lang="en-US" sz="1300" b="1" dirty="0">
+              <a:rPr lang="en-US" sz="1220" b="1" dirty="0">
                 <a:solidFill>
                   <a:srgbClr val="0068B7"/>
                 </a:solidFill>
@@ -12970,7 +12970,7 @@
               </a:rPr>
               <a:t>Tool selection cues</a:t>
             </a:r>
-            <a:endParaRPr lang="en-US" sz="1300" dirty="0"/>
+            <a:endParaRPr lang="en-US" sz="1220" dirty="0"/>
           </a:p>
         </p:txBody>
       </p:sp>
@@ -12982,8 +12982,8 @@
         </p:nvSpPr>
         <p:spPr>
           <a:xfrm>
-            <a:off x="8229600" y="4306824"/>
-            <a:ext cx="2679192" cy="941832"/>
+            <a:off x="8229600" y="4251960"/>
+            <a:ext cx="2679192" cy="1033272"/>
           </a:xfrm>
           <a:prstGeom prst="rect">
             <a:avLst/>
@@ -13001,7 +13001,7 @@
               <a:buNone/>
             </a:pPr>
             <a:r>
-              <a:rPr lang="en-US" sz="1220" dirty="0">
+              <a:rPr lang="en-US" sz="1140" dirty="0">
                 <a:solidFill>
                   <a:srgbClr val="17364A"/>
                 </a:solidFill>
@@ -13011,14 +13011,14 @@
               </a:rPr>
               <a:t>Use a tool when no comparable local process exists.</a:t>
             </a:r>
-            <a:endParaRPr lang="en-US" sz="1220" dirty="0"/>
-          </a:p>
-          <a:p>
-            <a:pPr indent="0" marL="0">
-              <a:buNone/>
-            </a:pPr>
-            <a:r>
-              <a:rPr lang="en-US" sz="1220" dirty="0">
+            <a:endParaRPr lang="en-US" sz="1140" dirty="0"/>
+          </a:p>
+          <a:p>
+            <a:pPr indent="0" marL="0">
+              <a:buNone/>
+            </a:pPr>
+            <a:r>
+              <a:rPr lang="en-US" sz="1140" dirty="0">
                 <a:solidFill>
                   <a:srgbClr val="17364A"/>
                 </a:solidFill>
@@ -13026,16 +13026,16 @@
                 <a:ea typeface="Aptos" pitchFamily="34" charset="-122"/>
                 <a:cs typeface="Aptos" pitchFamily="34" charset="-120"/>
               </a:rPr>
-              <a:t>Adapt existing department templates when they already fit the.</a:t>
-            </a:r>
-            <a:endParaRPr lang="en-US" sz="1220" dirty="0"/>
-          </a:p>
-          <a:p>
-            <a:pPr indent="0" marL="0">
-              <a:buNone/>
-            </a:pPr>
-            <a:r>
-              <a:rPr lang="en-US" sz="1220" dirty="0">
+              <a:t>Adapt existing department templates when they.</a:t>
+            </a:r>
+            <a:endParaRPr lang="en-US" sz="1140" dirty="0"/>
+          </a:p>
+          <a:p>
+            <a:pPr indent="0" marL="0">
+              <a:buNone/>
+            </a:pPr>
+            <a:r>
+              <a:rPr lang="en-US" sz="1140" dirty="0">
                 <a:solidFill>
                   <a:srgbClr val="17364A"/>
                 </a:solidFill>
@@ -13043,9 +13043,9 @@
                 <a:ea typeface="Aptos" pitchFamily="34" charset="-122"/>
                 <a:cs typeface="Aptos" pitchFamily="34" charset="-120"/>
               </a:rPr>
-              <a:t>Save the completed artifact as evidence of the decision.</a:t>
-            </a:r>
-            <a:endParaRPr lang="en-US" sz="1220" dirty="0"/>
+              <a:t>Save the completed artifact as evidence of the.</a:t>
+            </a:r>
+            <a:endParaRPr lang="en-US" sz="1140" dirty="0"/>
           </a:p>
         </p:txBody>
       </p:sp>
@@ -13336,8 +13336,8 @@
         </p:nvSpPr>
         <p:spPr>
           <a:xfrm>
-            <a:off x="868680" y="1508760"/>
-            <a:ext cx="6309360" cy="4160520"/>
+            <a:off x="822960" y="1463040"/>
+            <a:ext cx="6565392" cy="4343400"/>
           </a:xfrm>
           <a:prstGeom prst="rect">
             <a:avLst/>
@@ -13355,7 +13355,7 @@
               <a:buNone/>
             </a:pPr>
             <a:r>
-              <a:rPr lang="en-US" sz="2100" dirty="0">
+              <a:rPr lang="en-US" sz="1920" dirty="0">
                 <a:solidFill>
                   <a:srgbClr val="003A63"/>
                 </a:solidFill>
@@ -13363,16 +13363,16 @@
                 <a:ea typeface="Aptos" pitchFamily="34" charset="-122"/>
                 <a:cs typeface="Aptos" pitchFamily="34" charset="-120"/>
               </a:rPr>
-              <a:t>• Explain why AI accountability must be assigned to people and roles rather than to tools or.</a:t>
-            </a:r>
-            <a:endParaRPr lang="en-US" sz="2100" dirty="0"/>
-          </a:p>
-          <a:p>
-            <a:pPr indent="0" marL="0">
-              <a:buNone/>
-            </a:pPr>
-            <a:r>
-              <a:rPr lang="en-US" sz="2100" dirty="0">
+              <a:t>• Explain why AI accountability must be assigned to people and roles rather.</a:t>
+            </a:r>
+            <a:endParaRPr lang="en-US" sz="1920" dirty="0"/>
+          </a:p>
+          <a:p>
+            <a:pPr indent="0" marL="0">
+              <a:buNone/>
+            </a:pPr>
+            <a:r>
+              <a:rPr lang="en-US" sz="1920" dirty="0">
                 <a:solidFill>
                   <a:srgbClr val="003A63"/>
                 </a:solidFill>
@@ -13380,16 +13380,16 @@
                 <a:ea typeface="Aptos" pitchFamily="34" charset="-122"/>
                 <a:cs typeface="Aptos" pitchFamily="34" charset="-120"/>
               </a:rPr>
-              <a:t>• Identify executive, program, technical, privacy, legal, security, and governance.</a:t>
-            </a:r>
-            <a:endParaRPr lang="en-US" sz="2100" dirty="0"/>
-          </a:p>
-          <a:p>
-            <a:pPr indent="0" marL="0">
-              <a:buNone/>
-            </a:pPr>
-            <a:r>
-              <a:rPr lang="en-US" sz="2100" dirty="0">
+              <a:t>• Identify executive, program, technical, privacy, legal, security, and.</a:t>
+            </a:r>
+            <a:endParaRPr lang="en-US" sz="1920" dirty="0"/>
+          </a:p>
+          <a:p>
+            <a:pPr indent="0" marL="0">
+              <a:buNone/>
+            </a:pPr>
+            <a:r>
+              <a:rPr lang="en-US" sz="1920" dirty="0">
                 <a:solidFill>
                   <a:srgbClr val="003A63"/>
                 </a:solidFill>
@@ -13397,9 +13397,9 @@
                 <a:ea typeface="Aptos" pitchFamily="34" charset="-122"/>
                 <a:cs typeface="Aptos" pitchFamily="34" charset="-120"/>
               </a:rPr>
-              <a:t>• Create a decision-rights matrix for AI use case approval, risk acceptance, monitoring,.</a:t>
-            </a:r>
-            <a:endParaRPr lang="en-US" sz="2100" dirty="0"/>
+              <a:t>• Create a decision-rights matrix for AI use case approval, risk acceptance,.</a:t>
+            </a:r>
+            <a:endParaRPr lang="en-US" sz="1920" dirty="0"/>
           </a:p>
         </p:txBody>
       </p:sp>
@@ -13411,12 +13411,12 @@
         </p:nvSpPr>
         <p:spPr>
           <a:xfrm>
-            <a:off x="7635240" y="1325880"/>
-            <a:ext cx="3474720" cy="1255471"/>
+            <a:off x="7543800" y="1325880"/>
+            <a:ext cx="3611880" cy="1261872"/>
           </a:xfrm>
           <a:prstGeom prst="roundRect">
             <a:avLst>
-              <a:gd name="adj" fmla="val 8740"/>
+              <a:gd name="adj" fmla="val 8696"/>
             </a:avLst>
           </a:prstGeom>
           <a:solidFill>
@@ -13438,8 +13438,8 @@
         </p:nvSpPr>
         <p:spPr>
           <a:xfrm>
-            <a:off x="7799832" y="1472184"/>
-            <a:ext cx="3145536" cy="256032"/>
+            <a:off x="7708392" y="1453896"/>
+            <a:ext cx="3282696" cy="228600"/>
           </a:xfrm>
           <a:prstGeom prst="rect">
             <a:avLst/>
@@ -13455,7 +13455,7 @@
               <a:buNone/>
             </a:pPr>
             <a:r>
-              <a:rPr lang="en-US" sz="1300" b="1" dirty="0">
+              <a:rPr lang="en-US" sz="1220" b="1" dirty="0">
                 <a:solidFill>
                   <a:srgbClr val="0068B7"/>
                 </a:solidFill>
@@ -13465,7 +13465,7 @@
               </a:rPr>
               <a:t>Governance lens</a:t>
             </a:r>
-            <a:endParaRPr lang="en-US" sz="1300" dirty="0"/>
+            <a:endParaRPr lang="en-US" sz="1220" dirty="0"/>
           </a:p>
         </p:txBody>
       </p:sp>
@@ -13477,8 +13477,8 @@
         </p:nvSpPr>
         <p:spPr>
           <a:xfrm>
-            <a:off x="7799832" y="1801368"/>
-            <a:ext cx="3145536" cy="688543"/>
+            <a:off x="7708392" y="1764792"/>
+            <a:ext cx="3282696" cy="749808"/>
           </a:xfrm>
           <a:prstGeom prst="rect">
             <a:avLst/>
@@ -13496,7 +13496,7 @@
               <a:buNone/>
             </a:pPr>
             <a:r>
-              <a:rPr lang="en-US" sz="1320" dirty="0">
+              <a:rPr lang="en-US" sz="1220" dirty="0">
                 <a:solidFill>
                   <a:srgbClr val="17364A"/>
                 </a:solidFill>
@@ -13504,9 +13504,9 @@
                 <a:ea typeface="Aptos" pitchFamily="34" charset="-122"/>
                 <a:cs typeface="Aptos" pitchFamily="34" charset="-120"/>
               </a:rPr>
-              <a:t>Explain why AI accountability must be assigned to people and roles rather than to tools or vendors.</a:t>
-            </a:r>
-            <a:endParaRPr lang="en-US" sz="1320" dirty="0"/>
+              <a:t>Explain why AI accountability must be assigned to people and roles rather than.</a:t>
+            </a:r>
+            <a:endParaRPr lang="en-US" sz="1220" dirty="0"/>
           </a:p>
         </p:txBody>
       </p:sp>
@@ -13518,12 +13518,12 @@
         </p:nvSpPr>
         <p:spPr>
           <a:xfrm>
-            <a:off x="7635240" y="2718511"/>
-            <a:ext cx="3474720" cy="1328623"/>
+            <a:off x="7543800" y="2724912"/>
+            <a:ext cx="3611880" cy="1527048"/>
           </a:xfrm>
           <a:prstGeom prst="roundRect">
             <a:avLst>
-              <a:gd name="adj" fmla="val 8259"/>
+              <a:gd name="adj" fmla="val 7186"/>
             </a:avLst>
           </a:prstGeom>
           <a:solidFill>
@@ -13545,8 +13545,8 @@
         </p:nvSpPr>
         <p:spPr>
           <a:xfrm>
-            <a:off x="7799832" y="2864815"/>
-            <a:ext cx="3145536" cy="256032"/>
+            <a:off x="7708392" y="2852928"/>
+            <a:ext cx="3282696" cy="228600"/>
           </a:xfrm>
           <a:prstGeom prst="rect">
             <a:avLst/>
@@ -13562,7 +13562,7 @@
               <a:buNone/>
             </a:pPr>
             <a:r>
-              <a:rPr lang="en-US" sz="1300" b="1" dirty="0">
+              <a:rPr lang="en-US" sz="1220" b="1" dirty="0">
                 <a:solidFill>
                   <a:srgbClr val="0068B7"/>
                 </a:solidFill>
@@ -13572,7 +13572,7 @@
               </a:rPr>
               <a:t>Concept checkpoints</a:t>
             </a:r>
-            <a:endParaRPr lang="en-US" sz="1300" dirty="0"/>
+            <a:endParaRPr lang="en-US" sz="1220" dirty="0"/>
           </a:p>
         </p:txBody>
       </p:sp>
@@ -13584,8 +13584,8 @@
         </p:nvSpPr>
         <p:spPr>
           <a:xfrm>
-            <a:off x="7818120" y="3230575"/>
-            <a:ext cx="3090672" cy="670255"/>
+            <a:off x="7726680" y="3182112"/>
+            <a:ext cx="3227832" cy="960120"/>
           </a:xfrm>
           <a:prstGeom prst="rect">
             <a:avLst/>
@@ -13603,7 +13603,7 @@
               <a:buNone/>
             </a:pPr>
             <a:r>
-              <a:rPr lang="en-US" sz="1220" dirty="0">
+              <a:rPr lang="en-US" sz="1140" dirty="0">
                 <a:solidFill>
                   <a:srgbClr val="17364A"/>
                 </a:solidFill>
@@ -13611,16 +13611,16 @@
                 <a:ea typeface="Aptos" pitchFamily="34" charset="-122"/>
                 <a:cs typeface="Aptos" pitchFamily="34" charset="-120"/>
               </a:rPr>
-              <a:t>Identify executive, program, technical, privacy, legal, security,.</a:t>
-            </a:r>
-            <a:endParaRPr lang="en-US" sz="1220" dirty="0"/>
-          </a:p>
-          <a:p>
-            <a:pPr indent="0" marL="0">
-              <a:buNone/>
-            </a:pPr>
-            <a:r>
-              <a:rPr lang="en-US" sz="1220" dirty="0">
+              <a:t>Identify executive, program, technical, privacy,.</a:t>
+            </a:r>
+            <a:endParaRPr lang="en-US" sz="1140" dirty="0"/>
+          </a:p>
+          <a:p>
+            <a:pPr indent="0" marL="0">
+              <a:buNone/>
+            </a:pPr>
+            <a:r>
+              <a:rPr lang="en-US" sz="1140" dirty="0">
                 <a:solidFill>
                   <a:srgbClr val="17364A"/>
                 </a:solidFill>
@@ -13628,16 +13628,16 @@
                 <a:ea typeface="Aptos" pitchFamily="34" charset="-122"/>
                 <a:cs typeface="Aptos" pitchFamily="34" charset="-120"/>
               </a:rPr>
-              <a:t>Create a decision-rights matrix for AI use case approval, risk.</a:t>
-            </a:r>
-            <a:endParaRPr lang="en-US" sz="1220" dirty="0"/>
-          </a:p>
-          <a:p>
-            <a:pPr indent="0" marL="0">
-              <a:buNone/>
-            </a:pPr>
-            <a:r>
-              <a:rPr lang="en-US" sz="1220" dirty="0">
+              <a:t>Create a decision-rights matrix for AI use case.</a:t>
+            </a:r>
+            <a:endParaRPr lang="en-US" sz="1140" dirty="0"/>
+          </a:p>
+          <a:p>
+            <a:pPr indent="0" marL="0">
+              <a:buNone/>
+            </a:pPr>
+            <a:r>
+              <a:rPr lang="en-US" sz="1140" dirty="0">
                 <a:solidFill>
                   <a:srgbClr val="17364A"/>
                 </a:solidFill>
@@ -13645,9 +13645,9 @@
                 <a:ea typeface="Aptos" pitchFamily="34" charset="-122"/>
                 <a:cs typeface="Aptos" pitchFamily="34" charset="-120"/>
               </a:rPr>
-              <a:t>Distinguish between consultative input, approval authority, and.</a:t>
-            </a:r>
-            <a:endParaRPr lang="en-US" sz="1220" dirty="0"/>
+              <a:t>Distinguish between consultative input, approval.</a:t>
+            </a:r>
+            <a:endParaRPr lang="en-US" sz="1140" dirty="0"/>
           </a:p>
         </p:txBody>
       </p:sp>
@@ -13659,12 +13659,12 @@
         </p:nvSpPr>
         <p:spPr>
           <a:xfrm>
-            <a:off x="7635240" y="4184294"/>
-            <a:ext cx="3474720" cy="1466698"/>
+            <a:off x="7543800" y="4389120"/>
+            <a:ext cx="3611880" cy="1261872"/>
           </a:xfrm>
           <a:prstGeom prst="roundRect">
             <a:avLst>
-              <a:gd name="adj" fmla="val 7481"/>
+              <a:gd name="adj" fmla="val 8696"/>
             </a:avLst>
           </a:prstGeom>
           <a:solidFill>
@@ -13686,8 +13686,8 @@
         </p:nvSpPr>
         <p:spPr>
           <a:xfrm>
-            <a:off x="7799832" y="4330598"/>
-            <a:ext cx="3145536" cy="256032"/>
+            <a:off x="7708392" y="4517136"/>
+            <a:ext cx="3282696" cy="228600"/>
           </a:xfrm>
           <a:prstGeom prst="rect">
             <a:avLst/>
@@ -13703,7 +13703,7 @@
               <a:buNone/>
             </a:pPr>
             <a:r>
-              <a:rPr lang="en-US" sz="1300" b="1" dirty="0">
+              <a:rPr lang="en-US" sz="1220" b="1" dirty="0">
                 <a:solidFill>
                   <a:srgbClr val="0068B7"/>
                 </a:solidFill>
@@ -13713,7 +13713,7 @@
               </a:rPr>
               <a:t>What to document</a:t>
             </a:r>
-            <a:endParaRPr lang="en-US" sz="1300" dirty="0"/>
+            <a:endParaRPr lang="en-US" sz="1220" dirty="0"/>
           </a:p>
         </p:txBody>
       </p:sp>
@@ -13725,8 +13725,8 @@
         </p:nvSpPr>
         <p:spPr>
           <a:xfrm>
-            <a:off x="7799832" y="4659782"/>
-            <a:ext cx="3145536" cy="899770"/>
+            <a:off x="7708392" y="4828032"/>
+            <a:ext cx="3282696" cy="749808"/>
           </a:xfrm>
           <a:prstGeom prst="rect">
             <a:avLst/>
@@ -13744,7 +13744,7 @@
               <a:buNone/>
             </a:pPr>
             <a:r>
-              <a:rPr lang="en-US" sz="1320" dirty="0">
+              <a:rPr lang="en-US" sz="1220" dirty="0">
                 <a:solidFill>
                   <a:srgbClr val="17364A"/>
                 </a:solidFill>
@@ -13752,9 +13752,9 @@
                 <a:ea typeface="Aptos" pitchFamily="34" charset="-122"/>
                 <a:cs typeface="Aptos" pitchFamily="34" charset="-120"/>
               </a:rPr>
-              <a:t>Use the assignment to test whether you can explain the concept, apply it to a realistic public health situation, and identify what would need review before the work moves forward.</a:t>
-            </a:r>
-            <a:endParaRPr lang="en-US" sz="1320" dirty="0"/>
+              <a:t>Use the assignment to test whether you can explain the concept, apply it to a.</a:t>
+            </a:r>
+            <a:endParaRPr lang="en-US" sz="1220" dirty="0"/>
           </a:p>
         </p:txBody>
       </p:sp>
@@ -14045,8 +14045,8 @@
         </p:nvSpPr>
         <p:spPr>
           <a:xfrm>
-            <a:off x="868680" y="1508760"/>
-            <a:ext cx="6309360" cy="4160520"/>
+            <a:off x="822960" y="1463040"/>
+            <a:ext cx="6565392" cy="4343400"/>
           </a:xfrm>
           <a:prstGeom prst="rect">
             <a:avLst/>
@@ -14064,7 +14064,7 @@
               <a:buNone/>
             </a:pPr>
             <a:r>
-              <a:rPr lang="en-US" sz="2100" dirty="0">
+              <a:rPr lang="en-US" sz="1920" dirty="0">
                 <a:solidFill>
                   <a:srgbClr val="003A63"/>
                 </a:solidFill>
@@ -14074,14 +14074,14 @@
               </a:rPr>
               <a:t>• AI governance can only work when decision rights are clear.</a:t>
             </a:r>
-            <a:endParaRPr lang="en-US" sz="2100" dirty="0"/>
-          </a:p>
-          <a:p>
-            <a:pPr indent="0" marL="0">
-              <a:buNone/>
-            </a:pPr>
-            <a:r>
-              <a:rPr lang="en-US" sz="2100" dirty="0">
+            <a:endParaRPr lang="en-US" sz="1920" dirty="0"/>
+          </a:p>
+          <a:p>
+            <a:pPr indent="0" marL="0">
+              <a:buNone/>
+            </a:pPr>
+            <a:r>
+              <a:rPr lang="en-US" sz="1920" dirty="0">
                 <a:solidFill>
                   <a:srgbClr val="003A63"/>
                 </a:solidFill>
@@ -14089,16 +14089,16 @@
                 <a:ea typeface="Aptos" pitchFamily="34" charset="-122"/>
                 <a:cs typeface="Aptos" pitchFamily="34" charset="-120"/>
               </a:rPr>
-              <a:t>• Leaders need to know who can approve a pilot, who can accept residual risk, who can authorize.</a:t>
-            </a:r>
-            <a:endParaRPr lang="en-US" sz="2100" dirty="0"/>
-          </a:p>
-          <a:p>
-            <a:pPr indent="0" marL="0">
-              <a:buNone/>
-            </a:pPr>
-            <a:r>
-              <a:rPr lang="en-US" sz="2100" dirty="0">
+              <a:t>• Leaders need to know who can approve a pilot, who can accept residual risk,.</a:t>
+            </a:r>
+            <a:endParaRPr lang="en-US" sz="1920" dirty="0"/>
+          </a:p>
+          <a:p>
+            <a:pPr indent="0" marL="0">
+              <a:buNone/>
+            </a:pPr>
+            <a:r>
+              <a:rPr lang="en-US" sz="1920" dirty="0">
                 <a:solidFill>
                   <a:srgbClr val="003A63"/>
                 </a:solidFill>
@@ -14106,9 +14106,9 @@
                 <a:ea typeface="Aptos" pitchFamily="34" charset="-122"/>
                 <a:cs typeface="Aptos" pitchFamily="34" charset="-120"/>
               </a:rPr>
-              <a:t>• Ambiguous accountability is especially risky in public health because AI outputs may influence.</a:t>
-            </a:r>
-            <a:endParaRPr lang="en-US" sz="2100" dirty="0"/>
+              <a:t>• Ambiguous accountability is especially risky in public health because AI.</a:t>
+            </a:r>
+            <a:endParaRPr lang="en-US" sz="1920" dirty="0"/>
           </a:p>
         </p:txBody>
       </p:sp>
@@ -14120,12 +14120,12 @@
         </p:nvSpPr>
         <p:spPr>
           <a:xfrm>
-            <a:off x="7635240" y="1325880"/>
-            <a:ext cx="3474720" cy="1207008"/>
+            <a:off x="7543800" y="1325880"/>
+            <a:ext cx="3611880" cy="1261872"/>
           </a:xfrm>
           <a:prstGeom prst="roundRect">
             <a:avLst>
-              <a:gd name="adj" fmla="val 9091"/>
+              <a:gd name="adj" fmla="val 8696"/>
             </a:avLst>
           </a:prstGeom>
           <a:solidFill>
@@ -14147,8 +14147,8 @@
         </p:nvSpPr>
         <p:spPr>
           <a:xfrm>
-            <a:off x="7799832" y="1472184"/>
-            <a:ext cx="3145536" cy="256032"/>
+            <a:off x="7708392" y="1453896"/>
+            <a:ext cx="3282696" cy="228600"/>
           </a:xfrm>
           <a:prstGeom prst="rect">
             <a:avLst/>
@@ -14164,7 +14164,7 @@
               <a:buNone/>
             </a:pPr>
             <a:r>
-              <a:rPr lang="en-US" sz="1300" b="1" dirty="0">
+              <a:rPr lang="en-US" sz="1220" b="1" dirty="0">
                 <a:solidFill>
                   <a:srgbClr val="0068B7"/>
                 </a:solidFill>
@@ -14174,7 +14174,7 @@
               </a:rPr>
               <a:t>Governance lens</a:t>
             </a:r>
-            <a:endParaRPr lang="en-US" sz="1300" dirty="0"/>
+            <a:endParaRPr lang="en-US" sz="1220" dirty="0"/>
           </a:p>
         </p:txBody>
       </p:sp>
@@ -14186,8 +14186,8 @@
         </p:nvSpPr>
         <p:spPr>
           <a:xfrm>
-            <a:off x="7799832" y="1801368"/>
-            <a:ext cx="3145536" cy="640080"/>
+            <a:off x="7708392" y="1764792"/>
+            <a:ext cx="3282696" cy="749808"/>
           </a:xfrm>
           <a:prstGeom prst="rect">
             <a:avLst/>
@@ -14205,7 +14205,7 @@
               <a:buNone/>
             </a:pPr>
             <a:r>
-              <a:rPr lang="en-US" sz="1320" dirty="0">
+              <a:rPr lang="en-US" sz="1220" dirty="0">
                 <a:solidFill>
                   <a:srgbClr val="17364A"/>
                 </a:solidFill>
@@ -14215,7 +14215,7 @@
               </a:rPr>
               <a:t>AI governance can only work when decision rights are clear.</a:t>
             </a:r>
-            <a:endParaRPr lang="en-US" sz="1320" dirty="0"/>
+            <a:endParaRPr lang="en-US" sz="1220" dirty="0"/>
           </a:p>
         </p:txBody>
       </p:sp>
@@ -14227,12 +14227,12 @@
         </p:nvSpPr>
         <p:spPr>
           <a:xfrm>
-            <a:off x="7635240" y="2670048"/>
-            <a:ext cx="3474720" cy="1377086"/>
+            <a:off x="7543800" y="2724912"/>
+            <a:ext cx="3611880" cy="1527048"/>
           </a:xfrm>
           <a:prstGeom prst="roundRect">
             <a:avLst>
-              <a:gd name="adj" fmla="val 7968"/>
+              <a:gd name="adj" fmla="val 7186"/>
             </a:avLst>
           </a:prstGeom>
           <a:solidFill>
@@ -14254,24 +14254,26 @@
         </p:nvSpPr>
         <p:spPr>
           <a:xfrm>
-            <a:off x="7799832" y="2798064"/>
-            <a:ext cx="3145536" cy="237744"/>
-          </a:xfrm>
-          <a:prstGeom prst="rect">
-            <a:avLst/>
-          </a:prstGeom>
-          <a:noFill/>
-          <a:ln/>
-        </p:spPr>
-        <p:txBody>
-          <a:bodyPr wrap="square" lIns="0" tIns="0" rIns="0" bIns="0" rtlCol="0" anchor="ctr"/>
-          <a:lstStyle/>
-          <a:p>
-            <a:pPr indent="0" marL="0">
-              <a:buNone/>
-            </a:pPr>
-            <a:r>
-              <a:rPr lang="en-US" sz="1250" b="1" dirty="0">
+            <a:off x="7708392" y="2852928"/>
+            <a:ext cx="3282696" cy="219456"/>
+          </a:xfrm>
+          <a:prstGeom prst="rect">
+            <a:avLst/>
+          </a:prstGeom>
+          <a:noFill/>
+          <a:ln/>
+        </p:spPr>
+        <p:txBody>
+          <a:bodyPr wrap="square" lIns="0" tIns="0" rIns="0" bIns="0" rtlCol="0" anchor="ctr">
+            <a:normAutofit/>
+          </a:bodyPr>
+          <a:lstStyle/>
+          <a:p>
+            <a:pPr indent="0" marL="0">
+              <a:buNone/>
+            </a:pPr>
+            <a:r>
+              <a:rPr lang="en-US" sz="1160" b="1" dirty="0">
                 <a:solidFill>
                   <a:srgbClr val="0068B7"/>
                 </a:solidFill>
@@ -14281,7 +14283,7 @@
               </a:rPr>
               <a:t>Governance pathway</a:t>
             </a:r>
-            <a:endParaRPr lang="en-US" sz="1250" dirty="0"/>
+            <a:endParaRPr lang="en-US" sz="1160" dirty="0"/>
           </a:p>
         </p:txBody>
       </p:sp>
@@ -14293,7 +14295,7 @@
         </p:nvSpPr>
         <p:spPr>
           <a:xfrm>
-            <a:off x="8763000" y="3351276"/>
+            <a:off x="8717280" y="3406140"/>
             <a:ext cx="164592" cy="0"/>
           </a:xfrm>
           <a:prstGeom prst="line">
@@ -14316,8 +14318,8 @@
         </p:nvSpPr>
         <p:spPr>
           <a:xfrm>
-            <a:off x="7872984" y="3200400"/>
-            <a:ext cx="890016" cy="301752"/>
+            <a:off x="7781544" y="3255264"/>
+            <a:ext cx="935736" cy="301752"/>
           </a:xfrm>
           <a:prstGeom prst="roundRect">
             <a:avLst>
@@ -14343,8 +14345,8 @@
         </p:nvSpPr>
         <p:spPr>
           <a:xfrm>
-            <a:off x="7909560" y="3273552"/>
-            <a:ext cx="816864" cy="146304"/>
+            <a:off x="7818120" y="3328416"/>
+            <a:ext cx="862584" cy="146304"/>
           </a:xfrm>
           <a:prstGeom prst="rect">
             <a:avLst/>
@@ -14384,7 +14386,7 @@
         </p:nvSpPr>
         <p:spPr>
           <a:xfrm>
-            <a:off x="9817608" y="3351276"/>
+            <a:off x="9817608" y="3406140"/>
             <a:ext cx="164592" cy="0"/>
           </a:xfrm>
           <a:prstGeom prst="line">
@@ -14407,8 +14409,8 @@
         </p:nvSpPr>
         <p:spPr>
           <a:xfrm>
-            <a:off x="8927592" y="3200400"/>
-            <a:ext cx="890016" cy="301752"/>
+            <a:off x="8881872" y="3255264"/>
+            <a:ext cx="935736" cy="301752"/>
           </a:xfrm>
           <a:prstGeom prst="roundRect">
             <a:avLst>
@@ -14434,8 +14436,8 @@
         </p:nvSpPr>
         <p:spPr>
           <a:xfrm>
-            <a:off x="8964168" y="3273552"/>
-            <a:ext cx="816864" cy="146304"/>
+            <a:off x="8918448" y="3328416"/>
+            <a:ext cx="862584" cy="146304"/>
           </a:xfrm>
           <a:prstGeom prst="rect">
             <a:avLst/>
@@ -14475,8 +14477,8 @@
         </p:nvSpPr>
         <p:spPr>
           <a:xfrm>
-            <a:off x="9982200" y="3200400"/>
-            <a:ext cx="890016" cy="301752"/>
+            <a:off x="9982200" y="3255264"/>
+            <a:ext cx="935736" cy="301752"/>
           </a:xfrm>
           <a:prstGeom prst="roundRect">
             <a:avLst>
@@ -14502,8 +14504,8 @@
         </p:nvSpPr>
         <p:spPr>
           <a:xfrm>
-            <a:off x="10018776" y="3273552"/>
-            <a:ext cx="816864" cy="146304"/>
+            <a:off x="10018776" y="3328416"/>
+            <a:ext cx="862584" cy="146304"/>
           </a:xfrm>
           <a:prstGeom prst="rect">
             <a:avLst/>
@@ -14543,8 +14545,8 @@
         </p:nvSpPr>
         <p:spPr>
           <a:xfrm>
-            <a:off x="7854696" y="3694176"/>
-            <a:ext cx="3035808" cy="206654"/>
+            <a:off x="7763256" y="3749040"/>
+            <a:ext cx="3172968" cy="356616"/>
           </a:xfrm>
           <a:prstGeom prst="rect">
             <a:avLst/>
@@ -14562,7 +14564,7 @@
               <a:buNone/>
             </a:pPr>
             <a:r>
-              <a:rPr lang="en-US" sz="1120" dirty="0">
+              <a:rPr lang="en-US" sz="1040" dirty="0">
                 <a:solidFill>
                   <a:srgbClr val="17364A"/>
                 </a:solidFill>
@@ -14570,9 +14572,9 @@
                 <a:ea typeface="Aptos" pitchFamily="34" charset="-122"/>
                 <a:cs typeface="Aptos" pitchFamily="34" charset="-120"/>
               </a:rPr>
-              <a:t>A proposed AI use should move through documented review before it becomes an operational workflow.</a:t>
-            </a:r>
-            <a:endParaRPr lang="en-US" sz="1120" dirty="0"/>
+              <a:t>A proposed AI use should move through documented review before it.</a:t>
+            </a:r>
+            <a:endParaRPr lang="en-US" sz="1040" dirty="0"/>
           </a:p>
         </p:txBody>
       </p:sp>
@@ -14584,12 +14586,12 @@
         </p:nvSpPr>
         <p:spPr>
           <a:xfrm>
-            <a:off x="7635240" y="4184294"/>
-            <a:ext cx="3474720" cy="1466698"/>
+            <a:off x="7543800" y="4389120"/>
+            <a:ext cx="3611880" cy="1261872"/>
           </a:xfrm>
           <a:prstGeom prst="roundRect">
             <a:avLst>
-              <a:gd name="adj" fmla="val 7481"/>
+              <a:gd name="adj" fmla="val 8696"/>
             </a:avLst>
           </a:prstGeom>
           <a:solidFill>
@@ -14611,8 +14613,8 @@
         </p:nvSpPr>
         <p:spPr>
           <a:xfrm>
-            <a:off x="7799832" y="4330598"/>
-            <a:ext cx="3145536" cy="256032"/>
+            <a:off x="7708392" y="4517136"/>
+            <a:ext cx="3282696" cy="228600"/>
           </a:xfrm>
           <a:prstGeom prst="rect">
             <a:avLst/>
@@ -14628,7 +14630,7 @@
               <a:buNone/>
             </a:pPr>
             <a:r>
-              <a:rPr lang="en-US" sz="1300" b="1" dirty="0">
+              <a:rPr lang="en-US" sz="1220" b="1" dirty="0">
                 <a:solidFill>
                   <a:srgbClr val="0068B7"/>
                 </a:solidFill>
@@ -14638,7 +14640,7 @@
               </a:rPr>
               <a:t>What to document</a:t>
             </a:r>
-            <a:endParaRPr lang="en-US" sz="1300" dirty="0"/>
+            <a:endParaRPr lang="en-US" sz="1220" dirty="0"/>
           </a:p>
         </p:txBody>
       </p:sp>
@@ -14650,8 +14652,8 @@
         </p:nvSpPr>
         <p:spPr>
           <a:xfrm>
-            <a:off x="7799832" y="4659782"/>
-            <a:ext cx="3145536" cy="899770"/>
+            <a:off x="7708392" y="4828032"/>
+            <a:ext cx="3282696" cy="749808"/>
           </a:xfrm>
           <a:prstGeom prst="rect">
             <a:avLst/>
@@ -14669,7 +14671,7 @@
               <a:buNone/>
             </a:pPr>
             <a:r>
-              <a:rPr lang="en-US" sz="1320" dirty="0">
+              <a:rPr lang="en-US" sz="1220" dirty="0">
                 <a:solidFill>
                   <a:srgbClr val="17364A"/>
                 </a:solidFill>
@@ -14677,9 +14679,9 @@
                 <a:ea typeface="Aptos" pitchFamily="34" charset="-122"/>
                 <a:cs typeface="Aptos" pitchFamily="34" charset="-120"/>
               </a:rPr>
-              <a:t>Connect the concept to public health purpose, responsible use, required safeguards, documentation, and the next action a department should take.</a:t>
-            </a:r>
-            <a:endParaRPr lang="en-US" sz="1320" dirty="0"/>
+              <a:t>Connect the concept to public health purpose, responsible use, required.</a:t>
+            </a:r>
+            <a:endParaRPr lang="en-US" sz="1220" dirty="0"/>
           </a:p>
         </p:txBody>
       </p:sp>
@@ -14970,8 +14972,8 @@
         </p:nvSpPr>
         <p:spPr>
           <a:xfrm>
-            <a:off x="868680" y="1508760"/>
-            <a:ext cx="6309360" cy="4160520"/>
+            <a:off x="822960" y="1463040"/>
+            <a:ext cx="6565392" cy="4343400"/>
           </a:xfrm>
           <a:prstGeom prst="rect">
             <a:avLst/>
@@ -14989,7 +14991,7 @@
               <a:buNone/>
             </a:pPr>
             <a:r>
-              <a:rPr lang="en-US" sz="2100" dirty="0">
+              <a:rPr lang="en-US" sz="1920" dirty="0">
                 <a:solidFill>
                   <a:srgbClr val="003A63"/>
                 </a:solidFill>
@@ -14997,16 +14999,16 @@
                 <a:ea typeface="Aptos" pitchFamily="34" charset="-122"/>
                 <a:cs typeface="Aptos" pitchFamily="34" charset="-120"/>
               </a:rPr>
-              <a:t>• This module provides national-level training guidance for public health agencies and partners.</a:t>
-            </a:r>
-            <a:endParaRPr lang="en-US" sz="2100" dirty="0"/>
-          </a:p>
-          <a:p>
-            <a:pPr indent="0" marL="0">
-              <a:buNone/>
-            </a:pPr>
-            <a:r>
-              <a:rPr lang="en-US" sz="2100" dirty="0">
+              <a:t>• This module provides national-level training guidance for public health.</a:t>
+            </a:r>
+            <a:endParaRPr lang="en-US" sz="1920" dirty="0"/>
+          </a:p>
+          <a:p>
+            <a:pPr indent="0" marL="0">
+              <a:buNone/>
+            </a:pPr>
+            <a:r>
+              <a:rPr lang="en-US" sz="1920" dirty="0">
                 <a:solidFill>
                   <a:srgbClr val="003A63"/>
                 </a:solidFill>
@@ -15014,16 +15016,16 @@
                 <a:ea typeface="Aptos" pitchFamily="34" charset="-122"/>
                 <a:cs typeface="Aptos" pitchFamily="34" charset="-120"/>
               </a:rPr>
-              <a:t>• It is not legal advice and does not replace review by agency legal counsel, privacy officers,.</a:t>
-            </a:r>
-            <a:endParaRPr lang="en-US" sz="2100" dirty="0"/>
-          </a:p>
-          <a:p>
-            <a:pPr indent="0" marL="0">
-              <a:buNone/>
-            </a:pPr>
-            <a:r>
-              <a:rPr lang="en-US" sz="2100" dirty="0">
+              <a:t>• It is not legal advice and does not replace review by agency legal counsel,.</a:t>
+            </a:r>
+            <a:endParaRPr lang="en-US" sz="1920" dirty="0"/>
+          </a:p>
+          <a:p>
+            <a:pPr indent="0" marL="0">
+              <a:buNone/>
+            </a:pPr>
+            <a:r>
+              <a:rPr lang="en-US" sz="1920" dirty="0">
                 <a:solidFill>
                   <a:srgbClr val="003A63"/>
                 </a:solidFill>
@@ -15031,9 +15033,9 @@
                 <a:ea typeface="Aptos" pitchFamily="34" charset="-122"/>
                 <a:cs typeface="Aptos" pitchFamily="34" charset="-120"/>
               </a:rPr>
-              <a:t>• Requirements may vary by state, locality, territory, Tribe, agency, funding source,.</a:t>
-            </a:r>
-            <a:endParaRPr lang="en-US" sz="2100" dirty="0"/>
+              <a:t>• Requirements may vary by state, locality, territory, Tribe, agency, funding.</a:t>
+            </a:r>
+            <a:endParaRPr lang="en-US" sz="1920" dirty="0"/>
           </a:p>
         </p:txBody>
       </p:sp>
@@ -15045,12 +15047,12 @@
         </p:nvSpPr>
         <p:spPr>
           <a:xfrm>
-            <a:off x="7635240" y="1325880"/>
-            <a:ext cx="3474720" cy="1207008"/>
+            <a:off x="7543800" y="1325880"/>
+            <a:ext cx="3611880" cy="1261872"/>
           </a:xfrm>
           <a:prstGeom prst="roundRect">
             <a:avLst>
-              <a:gd name="adj" fmla="val 9091"/>
+              <a:gd name="adj" fmla="val 8696"/>
             </a:avLst>
           </a:prstGeom>
           <a:solidFill>
@@ -15072,8 +15074,8 @@
         </p:nvSpPr>
         <p:spPr>
           <a:xfrm>
-            <a:off x="7799832" y="1472184"/>
-            <a:ext cx="3145536" cy="256032"/>
+            <a:off x="7708392" y="1453896"/>
+            <a:ext cx="3282696" cy="228600"/>
           </a:xfrm>
           <a:prstGeom prst="rect">
             <a:avLst/>
@@ -15089,7 +15091,7 @@
               <a:buNone/>
             </a:pPr>
             <a:r>
-              <a:rPr lang="en-US" sz="1300" b="1" dirty="0">
+              <a:rPr lang="en-US" sz="1220" b="1" dirty="0">
                 <a:solidFill>
                   <a:srgbClr val="0068B7"/>
                 </a:solidFill>
@@ -15099,7 +15101,7 @@
               </a:rPr>
               <a:t>Governance lens</a:t>
             </a:r>
-            <a:endParaRPr lang="en-US" sz="1300" dirty="0"/>
+            <a:endParaRPr lang="en-US" sz="1220" dirty="0"/>
           </a:p>
         </p:txBody>
       </p:sp>
@@ -15111,8 +15113,8 @@
         </p:nvSpPr>
         <p:spPr>
           <a:xfrm>
-            <a:off x="7799832" y="1801368"/>
-            <a:ext cx="3145536" cy="640080"/>
+            <a:off x="7708392" y="1764792"/>
+            <a:ext cx="3282696" cy="749808"/>
           </a:xfrm>
           <a:prstGeom prst="rect">
             <a:avLst/>
@@ -15130,7 +15132,7 @@
               <a:buNone/>
             </a:pPr>
             <a:r>
-              <a:rPr lang="en-US" sz="1320" dirty="0">
+              <a:rPr lang="en-US" sz="1220" dirty="0">
                 <a:solidFill>
                   <a:srgbClr val="17364A"/>
                 </a:solidFill>
@@ -15138,9 +15140,9 @@
                 <a:ea typeface="Aptos" pitchFamily="34" charset="-122"/>
                 <a:cs typeface="Aptos" pitchFamily="34" charset="-120"/>
               </a:rPr>
-              <a:t>This module provides national-level training guidance for public health agencies and.</a:t>
-            </a:r>
-            <a:endParaRPr lang="en-US" sz="1320" dirty="0"/>
+              <a:t>This module provides national-level training guidance for public health agencies.</a:t>
+            </a:r>
+            <a:endParaRPr lang="en-US" sz="1220" dirty="0"/>
           </a:p>
         </p:txBody>
       </p:sp>
@@ -15152,12 +15154,12 @@
         </p:nvSpPr>
         <p:spPr>
           <a:xfrm>
-            <a:off x="7635240" y="2670048"/>
-            <a:ext cx="3474720" cy="1377086"/>
+            <a:off x="7543800" y="2724912"/>
+            <a:ext cx="3611880" cy="1527048"/>
           </a:xfrm>
           <a:prstGeom prst="roundRect">
             <a:avLst>
-              <a:gd name="adj" fmla="val 7968"/>
+              <a:gd name="adj" fmla="val 7186"/>
             </a:avLst>
           </a:prstGeom>
           <a:solidFill>
@@ -15179,24 +15181,26 @@
         </p:nvSpPr>
         <p:spPr>
           <a:xfrm>
-            <a:off x="7799832" y="2798064"/>
-            <a:ext cx="3145536" cy="237744"/>
-          </a:xfrm>
-          <a:prstGeom prst="rect">
-            <a:avLst/>
-          </a:prstGeom>
-          <a:noFill/>
-          <a:ln/>
-        </p:spPr>
-        <p:txBody>
-          <a:bodyPr wrap="square" lIns="0" tIns="0" rIns="0" bIns="0" rtlCol="0" anchor="ctr"/>
-          <a:lstStyle/>
-          <a:p>
-            <a:pPr indent="0" marL="0">
-              <a:buNone/>
-            </a:pPr>
-            <a:r>
-              <a:rPr lang="en-US" sz="1250" b="1" dirty="0">
+            <a:off x="7708392" y="2852928"/>
+            <a:ext cx="3282696" cy="219456"/>
+          </a:xfrm>
+          <a:prstGeom prst="rect">
+            <a:avLst/>
+          </a:prstGeom>
+          <a:noFill/>
+          <a:ln/>
+        </p:spPr>
+        <p:txBody>
+          <a:bodyPr wrap="square" lIns="0" tIns="0" rIns="0" bIns="0" rtlCol="0" anchor="ctr">
+            <a:normAutofit/>
+          </a:bodyPr>
+          <a:lstStyle/>
+          <a:p>
+            <a:pPr indent="0" marL="0">
+              <a:buNone/>
+            </a:pPr>
+            <a:r>
+              <a:rPr lang="en-US" sz="1160" b="1" dirty="0">
                 <a:solidFill>
                   <a:srgbClr val="0068B7"/>
                 </a:solidFill>
@@ -15206,7 +15210,7 @@
               </a:rPr>
               <a:t>Governance pathway</a:t>
             </a:r>
-            <a:endParaRPr lang="en-US" sz="1250" dirty="0"/>
+            <a:endParaRPr lang="en-US" sz="1160" dirty="0"/>
           </a:p>
         </p:txBody>
       </p:sp>
@@ -15218,7 +15222,7 @@
         </p:nvSpPr>
         <p:spPr>
           <a:xfrm>
-            <a:off x="8763000" y="3351276"/>
+            <a:off x="8717280" y="3406140"/>
             <a:ext cx="164592" cy="0"/>
           </a:xfrm>
           <a:prstGeom prst="line">
@@ -15241,8 +15245,8 @@
         </p:nvSpPr>
         <p:spPr>
           <a:xfrm>
-            <a:off x="7872984" y="3200400"/>
-            <a:ext cx="890016" cy="301752"/>
+            <a:off x="7781544" y="3255264"/>
+            <a:ext cx="935736" cy="301752"/>
           </a:xfrm>
           <a:prstGeom prst="roundRect">
             <a:avLst>
@@ -15268,8 +15272,8 @@
         </p:nvSpPr>
         <p:spPr>
           <a:xfrm>
-            <a:off x="7909560" y="3273552"/>
-            <a:ext cx="816864" cy="146304"/>
+            <a:off x="7818120" y="3328416"/>
+            <a:ext cx="862584" cy="146304"/>
           </a:xfrm>
           <a:prstGeom prst="rect">
             <a:avLst/>
@@ -15309,7 +15313,7 @@
         </p:nvSpPr>
         <p:spPr>
           <a:xfrm>
-            <a:off x="9817608" y="3351276"/>
+            <a:off x="9817608" y="3406140"/>
             <a:ext cx="164592" cy="0"/>
           </a:xfrm>
           <a:prstGeom prst="line">
@@ -15332,8 +15336,8 @@
         </p:nvSpPr>
         <p:spPr>
           <a:xfrm>
-            <a:off x="8927592" y="3200400"/>
-            <a:ext cx="890016" cy="301752"/>
+            <a:off x="8881872" y="3255264"/>
+            <a:ext cx="935736" cy="301752"/>
           </a:xfrm>
           <a:prstGeom prst="roundRect">
             <a:avLst>
@@ -15359,8 +15363,8 @@
         </p:nvSpPr>
         <p:spPr>
           <a:xfrm>
-            <a:off x="8964168" y="3273552"/>
-            <a:ext cx="816864" cy="146304"/>
+            <a:off x="8918448" y="3328416"/>
+            <a:ext cx="862584" cy="146304"/>
           </a:xfrm>
           <a:prstGeom prst="rect">
             <a:avLst/>
@@ -15400,8 +15404,8 @@
         </p:nvSpPr>
         <p:spPr>
           <a:xfrm>
-            <a:off x="9982200" y="3200400"/>
-            <a:ext cx="890016" cy="301752"/>
+            <a:off x="9982200" y="3255264"/>
+            <a:ext cx="935736" cy="301752"/>
           </a:xfrm>
           <a:prstGeom prst="roundRect">
             <a:avLst>
@@ -15427,8 +15431,8 @@
         </p:nvSpPr>
         <p:spPr>
           <a:xfrm>
-            <a:off x="10018776" y="3273552"/>
-            <a:ext cx="816864" cy="146304"/>
+            <a:off x="10018776" y="3328416"/>
+            <a:ext cx="862584" cy="146304"/>
           </a:xfrm>
           <a:prstGeom prst="rect">
             <a:avLst/>
@@ -15468,8 +15472,8 @@
         </p:nvSpPr>
         <p:spPr>
           <a:xfrm>
-            <a:off x="7854696" y="3694176"/>
-            <a:ext cx="3035808" cy="206654"/>
+            <a:off x="7763256" y="3749040"/>
+            <a:ext cx="3172968" cy="356616"/>
           </a:xfrm>
           <a:prstGeom prst="rect">
             <a:avLst/>
@@ -15487,7 +15491,7 @@
               <a:buNone/>
             </a:pPr>
             <a:r>
-              <a:rPr lang="en-US" sz="1120" dirty="0">
+              <a:rPr lang="en-US" sz="1040" dirty="0">
                 <a:solidFill>
                   <a:srgbClr val="17364A"/>
                 </a:solidFill>
@@ -15495,9 +15499,9 @@
                 <a:ea typeface="Aptos" pitchFamily="34" charset="-122"/>
                 <a:cs typeface="Aptos" pitchFamily="34" charset="-120"/>
               </a:rPr>
-              <a:t>A proposed AI use should move through documented review before it becomes an operational workflow.</a:t>
-            </a:r>
-            <a:endParaRPr lang="en-US" sz="1120" dirty="0"/>
+              <a:t>A proposed AI use should move through documented review before it.</a:t>
+            </a:r>
+            <a:endParaRPr lang="en-US" sz="1040" dirty="0"/>
           </a:p>
         </p:txBody>
       </p:sp>
@@ -15509,12 +15513,12 @@
         </p:nvSpPr>
         <p:spPr>
           <a:xfrm>
-            <a:off x="7635240" y="4184294"/>
-            <a:ext cx="3474720" cy="1466698"/>
+            <a:off x="7543800" y="4389120"/>
+            <a:ext cx="3611880" cy="1261872"/>
           </a:xfrm>
           <a:prstGeom prst="roundRect">
             <a:avLst>
-              <a:gd name="adj" fmla="val 7481"/>
+              <a:gd name="adj" fmla="val 8696"/>
             </a:avLst>
           </a:prstGeom>
           <a:solidFill>
@@ -15536,8 +15540,8 @@
         </p:nvSpPr>
         <p:spPr>
           <a:xfrm>
-            <a:off x="7799832" y="4330598"/>
-            <a:ext cx="3145536" cy="256032"/>
+            <a:off x="7708392" y="4517136"/>
+            <a:ext cx="3282696" cy="228600"/>
           </a:xfrm>
           <a:prstGeom prst="rect">
             <a:avLst/>
@@ -15553,7 +15557,7 @@
               <a:buNone/>
             </a:pPr>
             <a:r>
-              <a:rPr lang="en-US" sz="1300" b="1" dirty="0">
+              <a:rPr lang="en-US" sz="1220" b="1" dirty="0">
                 <a:solidFill>
                   <a:srgbClr val="0068B7"/>
                 </a:solidFill>
@@ -15563,7 +15567,7 @@
               </a:rPr>
               <a:t>What to document</a:t>
             </a:r>
-            <a:endParaRPr lang="en-US" sz="1300" dirty="0"/>
+            <a:endParaRPr lang="en-US" sz="1220" dirty="0"/>
           </a:p>
         </p:txBody>
       </p:sp>
@@ -15575,8 +15579,8 @@
         </p:nvSpPr>
         <p:spPr>
           <a:xfrm>
-            <a:off x="7799832" y="4659782"/>
-            <a:ext cx="3145536" cy="899770"/>
+            <a:off x="7708392" y="4828032"/>
+            <a:ext cx="3282696" cy="749808"/>
           </a:xfrm>
           <a:prstGeom prst="rect">
             <a:avLst/>
@@ -15594,7 +15598,7 @@
               <a:buNone/>
             </a:pPr>
             <a:r>
-              <a:rPr lang="en-US" sz="1320" dirty="0">
+              <a:rPr lang="en-US" sz="1220" dirty="0">
                 <a:solidFill>
                   <a:srgbClr val="17364A"/>
                 </a:solidFill>
@@ -15602,9 +15606,9 @@
                 <a:ea typeface="Aptos" pitchFamily="34" charset="-122"/>
                 <a:cs typeface="Aptos" pitchFamily="34" charset="-120"/>
               </a:rPr>
-              <a:t>Translate this concept into clear decision rights, review steps, documentation expectations, and escalation paths before an AI-supported workflow is approved.</a:t>
-            </a:r>
-            <a:endParaRPr lang="en-US" sz="1320" dirty="0"/>
+              <a:t>Translate this concept into clear decision rights, review steps, documentation.</a:t>
+            </a:r>
+            <a:endParaRPr lang="en-US" sz="1220" dirty="0"/>
           </a:p>
         </p:txBody>
       </p:sp>
@@ -15895,8 +15899,8 @@
         </p:nvSpPr>
         <p:spPr>
           <a:xfrm>
-            <a:off x="868680" y="1508760"/>
-            <a:ext cx="6309360" cy="4160520"/>
+            <a:off x="822960" y="1463040"/>
+            <a:ext cx="6565392" cy="4343400"/>
           </a:xfrm>
           <a:prstGeom prst="rect">
             <a:avLst/>
@@ -15914,7 +15918,7 @@
               <a:buNone/>
             </a:pPr>
             <a:r>
-              <a:rPr lang="en-US" sz="2100" dirty="0">
+              <a:rPr lang="en-US" sz="1920" dirty="0">
                 <a:solidFill>
                   <a:srgbClr val="003A63"/>
                 </a:solidFill>
@@ -15924,14 +15928,14 @@
               </a:rPr>
               <a:t>• AI systems can distribute responsibility across many actors.</a:t>
             </a:r>
-            <a:endParaRPr lang="en-US" sz="2100" dirty="0"/>
-          </a:p>
-          <a:p>
-            <a:pPr indent="0" marL="0">
-              <a:buNone/>
-            </a:pPr>
-            <a:r>
-              <a:rPr lang="en-US" sz="2100" dirty="0">
+            <a:endParaRPr lang="en-US" sz="1920" dirty="0"/>
+          </a:p>
+          <a:p>
+            <a:pPr indent="0" marL="0">
+              <a:buNone/>
+            </a:pPr>
+            <a:r>
+              <a:rPr lang="en-US" sz="1920" dirty="0">
                 <a:solidFill>
                   <a:srgbClr val="003A63"/>
                 </a:solidFill>
@@ -15939,16 +15943,16 @@
                 <a:ea typeface="Aptos" pitchFamily="34" charset="-122"/>
                 <a:cs typeface="Aptos" pitchFamily="34" charset="-120"/>
               </a:rPr>
-              <a:t>• A vendor may provide the model, IT may manage access, a program may define the workflow, an.</a:t>
-            </a:r>
-            <a:endParaRPr lang="en-US" sz="2100" dirty="0"/>
-          </a:p>
-          <a:p>
-            <a:pPr indent="0" marL="0">
-              <a:buNone/>
-            </a:pPr>
-            <a:r>
-              <a:rPr lang="en-US" sz="2100" dirty="0">
+              <a:t>• A vendor may provide the model, IT may manage access, a program may define.</a:t>
+            </a:r>
+            <a:endParaRPr lang="en-US" sz="1920" dirty="0"/>
+          </a:p>
+          <a:p>
+            <a:pPr indent="0" marL="0">
+              <a:buNone/>
+            </a:pPr>
+            <a:r>
+              <a:rPr lang="en-US" sz="1920" dirty="0">
                 <a:solidFill>
                   <a:srgbClr val="003A63"/>
                 </a:solidFill>
@@ -15956,9 +15960,9 @@
                 <a:ea typeface="Aptos" pitchFamily="34" charset="-122"/>
                 <a:cs typeface="Aptos" pitchFamily="34" charset="-120"/>
               </a:rPr>
-              <a:t>• Without a formal accountability model, each actor may assume that another party is responsible.</a:t>
-            </a:r>
-            <a:endParaRPr lang="en-US" sz="2100" dirty="0"/>
+              <a:t>• Without a formal accountability model, each actor may assume that another.</a:t>
+            </a:r>
+            <a:endParaRPr lang="en-US" sz="1920" dirty="0"/>
           </a:p>
         </p:txBody>
       </p:sp>
@@ -15970,12 +15974,12 @@
         </p:nvSpPr>
         <p:spPr>
           <a:xfrm>
-            <a:off x="7635240" y="1325880"/>
-            <a:ext cx="3474720" cy="1207008"/>
+            <a:off x="7543800" y="1325880"/>
+            <a:ext cx="3611880" cy="1261872"/>
           </a:xfrm>
           <a:prstGeom prst="roundRect">
             <a:avLst>
-              <a:gd name="adj" fmla="val 9091"/>
+              <a:gd name="adj" fmla="val 8696"/>
             </a:avLst>
           </a:prstGeom>
           <a:solidFill>
@@ -15997,8 +16001,8 @@
         </p:nvSpPr>
         <p:spPr>
           <a:xfrm>
-            <a:off x="7799832" y="1472184"/>
-            <a:ext cx="3145536" cy="256032"/>
+            <a:off x="7708392" y="1453896"/>
+            <a:ext cx="3282696" cy="228600"/>
           </a:xfrm>
           <a:prstGeom prst="rect">
             <a:avLst/>
@@ -16014,7 +16018,7 @@
               <a:buNone/>
             </a:pPr>
             <a:r>
-              <a:rPr lang="en-US" sz="1300" b="1" dirty="0">
+              <a:rPr lang="en-US" sz="1220" b="1" dirty="0">
                 <a:solidFill>
                   <a:srgbClr val="0068B7"/>
                 </a:solidFill>
@@ -16024,7 +16028,7 @@
               </a:rPr>
               <a:t>Governance lens</a:t>
             </a:r>
-            <a:endParaRPr lang="en-US" sz="1300" dirty="0"/>
+            <a:endParaRPr lang="en-US" sz="1220" dirty="0"/>
           </a:p>
         </p:txBody>
       </p:sp>
@@ -16036,8 +16040,8 @@
         </p:nvSpPr>
         <p:spPr>
           <a:xfrm>
-            <a:off x="7799832" y="1801368"/>
-            <a:ext cx="3145536" cy="640080"/>
+            <a:off x="7708392" y="1764792"/>
+            <a:ext cx="3282696" cy="749808"/>
           </a:xfrm>
           <a:prstGeom prst="rect">
             <a:avLst/>
@@ -16055,7 +16059,7 @@
               <a:buNone/>
             </a:pPr>
             <a:r>
-              <a:rPr lang="en-US" sz="1320" dirty="0">
+              <a:rPr lang="en-US" sz="1220" dirty="0">
                 <a:solidFill>
                   <a:srgbClr val="17364A"/>
                 </a:solidFill>
@@ -16065,7 +16069,7 @@
               </a:rPr>
               <a:t>AI systems can distribute responsibility across many actors.</a:t>
             </a:r>
-            <a:endParaRPr lang="en-US" sz="1320" dirty="0"/>
+            <a:endParaRPr lang="en-US" sz="1220" dirty="0"/>
           </a:p>
         </p:txBody>
       </p:sp>
@@ -16077,12 +16081,12 @@
         </p:nvSpPr>
         <p:spPr>
           <a:xfrm>
-            <a:off x="7635240" y="2670048"/>
-            <a:ext cx="3474720" cy="1377086"/>
+            <a:off x="7543800" y="2724912"/>
+            <a:ext cx="3611880" cy="1527048"/>
           </a:xfrm>
           <a:prstGeom prst="roundRect">
             <a:avLst>
-              <a:gd name="adj" fmla="val 7968"/>
+              <a:gd name="adj" fmla="val 7186"/>
             </a:avLst>
           </a:prstGeom>
           <a:solidFill>
@@ -16104,24 +16108,26 @@
         </p:nvSpPr>
         <p:spPr>
           <a:xfrm>
-            <a:off x="7799832" y="2798064"/>
-            <a:ext cx="3145536" cy="237744"/>
-          </a:xfrm>
-          <a:prstGeom prst="rect">
-            <a:avLst/>
-          </a:prstGeom>
-          <a:noFill/>
-          <a:ln/>
-        </p:spPr>
-        <p:txBody>
-          <a:bodyPr wrap="square" lIns="0" tIns="0" rIns="0" bIns="0" rtlCol="0" anchor="ctr"/>
-          <a:lstStyle/>
-          <a:p>
-            <a:pPr indent="0" marL="0">
-              <a:buNone/>
-            </a:pPr>
-            <a:r>
-              <a:rPr lang="en-US" sz="1250" b="1" dirty="0">
+            <a:off x="7708392" y="2852928"/>
+            <a:ext cx="3282696" cy="219456"/>
+          </a:xfrm>
+          <a:prstGeom prst="rect">
+            <a:avLst/>
+          </a:prstGeom>
+          <a:noFill/>
+          <a:ln/>
+        </p:spPr>
+        <p:txBody>
+          <a:bodyPr wrap="square" lIns="0" tIns="0" rIns="0" bIns="0" rtlCol="0" anchor="ctr">
+            <a:normAutofit/>
+          </a:bodyPr>
+          <a:lstStyle/>
+          <a:p>
+            <a:pPr indent="0" marL="0">
+              <a:buNone/>
+            </a:pPr>
+            <a:r>
+              <a:rPr lang="en-US" sz="1160" b="1" dirty="0">
                 <a:solidFill>
                   <a:srgbClr val="0068B7"/>
                 </a:solidFill>
@@ -16131,7 +16137,7 @@
               </a:rPr>
               <a:t>Governance pathway</a:t>
             </a:r>
-            <a:endParaRPr lang="en-US" sz="1250" dirty="0"/>
+            <a:endParaRPr lang="en-US" sz="1160" dirty="0"/>
           </a:p>
         </p:txBody>
       </p:sp>
@@ -16143,7 +16149,7 @@
         </p:nvSpPr>
         <p:spPr>
           <a:xfrm>
-            <a:off x="8763000" y="3351276"/>
+            <a:off x="8717280" y="3406140"/>
             <a:ext cx="164592" cy="0"/>
           </a:xfrm>
           <a:prstGeom prst="line">
@@ -16166,8 +16172,8 @@
         </p:nvSpPr>
         <p:spPr>
           <a:xfrm>
-            <a:off x="7872984" y="3200400"/>
-            <a:ext cx="890016" cy="301752"/>
+            <a:off x="7781544" y="3255264"/>
+            <a:ext cx="935736" cy="301752"/>
           </a:xfrm>
           <a:prstGeom prst="roundRect">
             <a:avLst>
@@ -16193,8 +16199,8 @@
         </p:nvSpPr>
         <p:spPr>
           <a:xfrm>
-            <a:off x="7909560" y="3273552"/>
-            <a:ext cx="816864" cy="146304"/>
+            <a:off x="7818120" y="3328416"/>
+            <a:ext cx="862584" cy="146304"/>
           </a:xfrm>
           <a:prstGeom prst="rect">
             <a:avLst/>
@@ -16234,7 +16240,7 @@
         </p:nvSpPr>
         <p:spPr>
           <a:xfrm>
-            <a:off x="9817608" y="3351276"/>
+            <a:off x="9817608" y="3406140"/>
             <a:ext cx="164592" cy="0"/>
           </a:xfrm>
           <a:prstGeom prst="line">
@@ -16257,8 +16263,8 @@
         </p:nvSpPr>
         <p:spPr>
           <a:xfrm>
-            <a:off x="8927592" y="3200400"/>
-            <a:ext cx="890016" cy="301752"/>
+            <a:off x="8881872" y="3255264"/>
+            <a:ext cx="935736" cy="301752"/>
           </a:xfrm>
           <a:prstGeom prst="roundRect">
             <a:avLst>
@@ -16284,8 +16290,8 @@
         </p:nvSpPr>
         <p:spPr>
           <a:xfrm>
-            <a:off x="8964168" y="3273552"/>
-            <a:ext cx="816864" cy="146304"/>
+            <a:off x="8918448" y="3328416"/>
+            <a:ext cx="862584" cy="146304"/>
           </a:xfrm>
           <a:prstGeom prst="rect">
             <a:avLst/>
@@ -16325,8 +16331,8 @@
         </p:nvSpPr>
         <p:spPr>
           <a:xfrm>
-            <a:off x="9982200" y="3200400"/>
-            <a:ext cx="890016" cy="301752"/>
+            <a:off x="9982200" y="3255264"/>
+            <a:ext cx="935736" cy="301752"/>
           </a:xfrm>
           <a:prstGeom prst="roundRect">
             <a:avLst>
@@ -16352,8 +16358,8 @@
         </p:nvSpPr>
         <p:spPr>
           <a:xfrm>
-            <a:off x="10018776" y="3273552"/>
-            <a:ext cx="816864" cy="146304"/>
+            <a:off x="10018776" y="3328416"/>
+            <a:ext cx="862584" cy="146304"/>
           </a:xfrm>
           <a:prstGeom prst="rect">
             <a:avLst/>
@@ -16393,8 +16399,8 @@
         </p:nvSpPr>
         <p:spPr>
           <a:xfrm>
-            <a:off x="7854696" y="3694176"/>
-            <a:ext cx="3035808" cy="206654"/>
+            <a:off x="7763256" y="3749040"/>
+            <a:ext cx="3172968" cy="356616"/>
           </a:xfrm>
           <a:prstGeom prst="rect">
             <a:avLst/>
@@ -16412,7 +16418,7 @@
               <a:buNone/>
             </a:pPr>
             <a:r>
-              <a:rPr lang="en-US" sz="1120" dirty="0">
+              <a:rPr lang="en-US" sz="1040" dirty="0">
                 <a:solidFill>
                   <a:srgbClr val="17364A"/>
                 </a:solidFill>
@@ -16420,9 +16426,9 @@
                 <a:ea typeface="Aptos" pitchFamily="34" charset="-122"/>
                 <a:cs typeface="Aptos" pitchFamily="34" charset="-120"/>
               </a:rPr>
-              <a:t>A proposed AI use should move through documented review before it becomes an operational workflow.</a:t>
-            </a:r>
-            <a:endParaRPr lang="en-US" sz="1120" dirty="0"/>
+              <a:t>A proposed AI use should move through documented review before it.</a:t>
+            </a:r>
+            <a:endParaRPr lang="en-US" sz="1040" dirty="0"/>
           </a:p>
         </p:txBody>
       </p:sp>
@@ -16434,12 +16440,12 @@
         </p:nvSpPr>
         <p:spPr>
           <a:xfrm>
-            <a:off x="7635240" y="4184294"/>
-            <a:ext cx="3474720" cy="1466698"/>
+            <a:off x="7543800" y="4389120"/>
+            <a:ext cx="3611880" cy="1261872"/>
           </a:xfrm>
           <a:prstGeom prst="roundRect">
             <a:avLst>
-              <a:gd name="adj" fmla="val 7481"/>
+              <a:gd name="adj" fmla="val 8696"/>
             </a:avLst>
           </a:prstGeom>
           <a:solidFill>
@@ -16461,8 +16467,8 @@
         </p:nvSpPr>
         <p:spPr>
           <a:xfrm>
-            <a:off x="7799832" y="4330598"/>
-            <a:ext cx="3145536" cy="256032"/>
+            <a:off x="7708392" y="4517136"/>
+            <a:ext cx="3282696" cy="228600"/>
           </a:xfrm>
           <a:prstGeom prst="rect">
             <a:avLst/>
@@ -16478,7 +16484,7 @@
               <a:buNone/>
             </a:pPr>
             <a:r>
-              <a:rPr lang="en-US" sz="1300" b="1" dirty="0">
+              <a:rPr lang="en-US" sz="1220" b="1" dirty="0">
                 <a:solidFill>
                   <a:srgbClr val="0068B7"/>
                 </a:solidFill>
@@ -16488,7 +16494,7 @@
               </a:rPr>
               <a:t>What to document</a:t>
             </a:r>
-            <a:endParaRPr lang="en-US" sz="1300" dirty="0"/>
+            <a:endParaRPr lang="en-US" sz="1220" dirty="0"/>
           </a:p>
         </p:txBody>
       </p:sp>
@@ -16500,8 +16506,8 @@
         </p:nvSpPr>
         <p:spPr>
           <a:xfrm>
-            <a:off x="7799832" y="4659782"/>
-            <a:ext cx="3145536" cy="899770"/>
+            <a:off x="7708392" y="4828032"/>
+            <a:ext cx="3282696" cy="749808"/>
           </a:xfrm>
           <a:prstGeom prst="rect">
             <a:avLst/>
@@ -16519,7 +16525,7 @@
               <a:buNone/>
             </a:pPr>
             <a:r>
-              <a:rPr lang="en-US" sz="1320" dirty="0">
+              <a:rPr lang="en-US" sz="1220" dirty="0">
                 <a:solidFill>
                   <a:srgbClr val="17364A"/>
                 </a:solidFill>
@@ -16527,9 +16533,9 @@
                 <a:ea typeface="Aptos" pitchFamily="34" charset="-122"/>
                 <a:cs typeface="Aptos" pitchFamily="34" charset="-120"/>
               </a:rPr>
-              <a:t>Connect the concept to public health purpose, responsible use, required safeguards, documentation, and the next action a department should take.</a:t>
-            </a:r>
-            <a:endParaRPr lang="en-US" sz="1320" dirty="0"/>
+              <a:t>Connect the concept to public health purpose, responsible use, required.</a:t>
+            </a:r>
+            <a:endParaRPr lang="en-US" sz="1220" dirty="0"/>
           </a:p>
         </p:txBody>
       </p:sp>
@@ -16820,8 +16826,8 @@
         </p:nvSpPr>
         <p:spPr>
           <a:xfrm>
-            <a:off x="868680" y="1508760"/>
-            <a:ext cx="6309360" cy="4160520"/>
+            <a:off x="822960" y="1463040"/>
+            <a:ext cx="6565392" cy="4343400"/>
           </a:xfrm>
           <a:prstGeom prst="rect">
             <a:avLst/>
@@ -16839,7 +16845,7 @@
               <a:buNone/>
             </a:pPr>
             <a:r>
-              <a:rPr lang="en-US" sz="2100" dirty="0">
+              <a:rPr lang="en-US" sz="1920" dirty="0">
                 <a:solidFill>
                   <a:srgbClr val="003A63"/>
                 </a:solidFill>
@@ -16847,16 +16853,16 @@
                 <a:ea typeface="Aptos" pitchFamily="34" charset="-122"/>
                 <a:cs typeface="Aptos" pitchFamily="34" charset="-120"/>
               </a:rPr>
-              <a:t>• A local health department implements an AI-assisted tool to classify incoming environmental.</a:t>
-            </a:r>
-            <a:endParaRPr lang="en-US" sz="2100" dirty="0"/>
-          </a:p>
-          <a:p>
-            <a:pPr indent="0" marL="0">
-              <a:buNone/>
-            </a:pPr>
-            <a:r>
-              <a:rPr lang="en-US" sz="2100" dirty="0">
+              <a:t>• A local health department implements an AI-assisted tool to classify.</a:t>
+            </a:r>
+            <a:endParaRPr lang="en-US" sz="1920" dirty="0"/>
+          </a:p>
+          <a:p>
+            <a:pPr indent="0" marL="0">
+              <a:buNone/>
+            </a:pPr>
+            <a:r>
+              <a:rPr lang="en-US" sz="1920" dirty="0">
                 <a:solidFill>
                   <a:srgbClr val="003A63"/>
                 </a:solidFill>
@@ -16864,16 +16870,16 @@
                 <a:ea typeface="Aptos" pitchFamily="34" charset="-122"/>
                 <a:cs typeface="Aptos" pitchFamily="34" charset="-120"/>
               </a:rPr>
-              <a:t>• The vendor configured the model, IT manages access, environmental health staff review the.</a:t>
-            </a:r>
-            <a:endParaRPr lang="en-US" sz="2100" dirty="0"/>
-          </a:p>
-          <a:p>
-            <a:pPr indent="0" marL="0">
-              <a:buNone/>
-            </a:pPr>
-            <a:r>
-              <a:rPr lang="en-US" sz="2100" dirty="0">
+              <a:t>• The vendor configured the model, IT manages access, environmental health.</a:t>
+            </a:r>
+            <a:endParaRPr lang="en-US" sz="1920" dirty="0"/>
+          </a:p>
+          <a:p>
+            <a:pPr indent="0" marL="0">
+              <a:buNone/>
+            </a:pPr>
+            <a:r>
+              <a:rPr lang="en-US" sz="1920" dirty="0">
                 <a:solidFill>
                   <a:srgbClr val="003A63"/>
                 </a:solidFill>
@@ -16881,9 +16887,9 @@
                 <a:ea typeface="Aptos" pitchFamily="34" charset="-122"/>
                 <a:cs typeface="Aptos" pitchFamily="34" charset="-120"/>
               </a:rPr>
-              <a:t>• A complaint is misclassified and a serious housing-related concern is not routed for timely.</a:t>
-            </a:r>
-            <a:endParaRPr lang="en-US" sz="2100" dirty="0"/>
+              <a:t>• A complaint is misclassified and a serious housing-related concern is not.</a:t>
+            </a:r>
+            <a:endParaRPr lang="en-US" sz="1920" dirty="0"/>
           </a:p>
         </p:txBody>
       </p:sp>
@@ -16895,12 +16901,12 @@
         </p:nvSpPr>
         <p:spPr>
           <a:xfrm>
-            <a:off x="7635240" y="1325880"/>
-            <a:ext cx="3474720" cy="1255471"/>
+            <a:off x="7543800" y="1325880"/>
+            <a:ext cx="3611880" cy="1261872"/>
           </a:xfrm>
           <a:prstGeom prst="roundRect">
             <a:avLst>
-              <a:gd name="adj" fmla="val 8740"/>
+              <a:gd name="adj" fmla="val 8696"/>
             </a:avLst>
           </a:prstGeom>
           <a:solidFill>
@@ -16922,8 +16928,8 @@
         </p:nvSpPr>
         <p:spPr>
           <a:xfrm>
-            <a:off x="7799832" y="1472184"/>
-            <a:ext cx="3145536" cy="256032"/>
+            <a:off x="7708392" y="1453896"/>
+            <a:ext cx="3282696" cy="228600"/>
           </a:xfrm>
           <a:prstGeom prst="rect">
             <a:avLst/>
@@ -16939,7 +16945,7 @@
               <a:buNone/>
             </a:pPr>
             <a:r>
-              <a:rPr lang="en-US" sz="1300" b="1" dirty="0">
+              <a:rPr lang="en-US" sz="1220" b="1" dirty="0">
                 <a:solidFill>
                   <a:srgbClr val="0068B7"/>
                 </a:solidFill>
@@ -16949,7 +16955,7 @@
               </a:rPr>
               <a:t>Governance lens</a:t>
             </a:r>
-            <a:endParaRPr lang="en-US" sz="1300" dirty="0"/>
+            <a:endParaRPr lang="en-US" sz="1220" dirty="0"/>
           </a:p>
         </p:txBody>
       </p:sp>
@@ -16961,8 +16967,8 @@
         </p:nvSpPr>
         <p:spPr>
           <a:xfrm>
-            <a:off x="7799832" y="1801368"/>
-            <a:ext cx="3145536" cy="688543"/>
+            <a:off x="7708392" y="1764792"/>
+            <a:ext cx="3282696" cy="749808"/>
           </a:xfrm>
           <a:prstGeom prst="rect">
             <a:avLst/>
@@ -16980,7 +16986,7 @@
               <a:buNone/>
             </a:pPr>
             <a:r>
-              <a:rPr lang="en-US" sz="1320" dirty="0">
+              <a:rPr lang="en-US" sz="1220" dirty="0">
                 <a:solidFill>
                   <a:srgbClr val="17364A"/>
                 </a:solidFill>
@@ -16988,9 +16994,9 @@
                 <a:ea typeface="Aptos" pitchFamily="34" charset="-122"/>
                 <a:cs typeface="Aptos" pitchFamily="34" charset="-120"/>
               </a:rPr>
-              <a:t>A local health department implements an AI-assisted tool to classify incoming environmental health.</a:t>
-            </a:r>
-            <a:endParaRPr lang="en-US" sz="1320" dirty="0"/>
+              <a:t>A local health department implements an AI-assisted tool to classify incoming.</a:t>
+            </a:r>
+            <a:endParaRPr lang="en-US" sz="1220" dirty="0"/>
           </a:p>
         </p:txBody>
       </p:sp>
@@ -17002,12 +17008,12 @@
         </p:nvSpPr>
         <p:spPr>
           <a:xfrm>
-            <a:off x="7635240" y="2718511"/>
-            <a:ext cx="3474720" cy="1328623"/>
+            <a:off x="7543800" y="2724912"/>
+            <a:ext cx="3611880" cy="1527048"/>
           </a:xfrm>
           <a:prstGeom prst="roundRect">
             <a:avLst>
-              <a:gd name="adj" fmla="val 8259"/>
+              <a:gd name="adj" fmla="val 7186"/>
             </a:avLst>
           </a:prstGeom>
           <a:solidFill>
@@ -17029,8 +17035,8 @@
         </p:nvSpPr>
         <p:spPr>
           <a:xfrm>
-            <a:off x="7799832" y="2864815"/>
-            <a:ext cx="3145536" cy="256032"/>
+            <a:off x="7708392" y="2852928"/>
+            <a:ext cx="3282696" cy="228600"/>
           </a:xfrm>
           <a:prstGeom prst="rect">
             <a:avLst/>
@@ -17046,7 +17052,7 @@
               <a:buNone/>
             </a:pPr>
             <a:r>
-              <a:rPr lang="en-US" sz="1300" b="1" dirty="0">
+              <a:rPr lang="en-US" sz="1220" b="1" dirty="0">
                 <a:solidFill>
                   <a:srgbClr val="0068B7"/>
                 </a:solidFill>
@@ -17056,7 +17062,7 @@
               </a:rPr>
               <a:t>Concept checkpoints</a:t>
             </a:r>
-            <a:endParaRPr lang="en-US" sz="1300" dirty="0"/>
+            <a:endParaRPr lang="en-US" sz="1220" dirty="0"/>
           </a:p>
         </p:txBody>
       </p:sp>
@@ -17068,8 +17074,8 @@
         </p:nvSpPr>
         <p:spPr>
           <a:xfrm>
-            <a:off x="7818120" y="3230575"/>
-            <a:ext cx="3090672" cy="670255"/>
+            <a:off x="7726680" y="3182112"/>
+            <a:ext cx="3227832" cy="960120"/>
           </a:xfrm>
           <a:prstGeom prst="rect">
             <a:avLst/>
@@ -17087,7 +17093,7 @@
               <a:buNone/>
             </a:pPr>
             <a:r>
-              <a:rPr lang="en-US" sz="1220" dirty="0">
+              <a:rPr lang="en-US" sz="1140" dirty="0">
                 <a:solidFill>
                   <a:srgbClr val="17364A"/>
                 </a:solidFill>
@@ -17095,16 +17101,16 @@
                 <a:ea typeface="Aptos" pitchFamily="34" charset="-122"/>
                 <a:cs typeface="Aptos" pitchFamily="34" charset="-120"/>
               </a:rPr>
-              <a:t>A local health department implements an AI-assisted tool to.</a:t>
-            </a:r>
-            <a:endParaRPr lang="en-US" sz="1220" dirty="0"/>
-          </a:p>
-          <a:p>
-            <a:pPr indent="0" marL="0">
-              <a:buNone/>
-            </a:pPr>
-            <a:r>
-              <a:rPr lang="en-US" sz="1220" dirty="0">
+              <a:t>A local health department implements an.</a:t>
+            </a:r>
+            <a:endParaRPr lang="en-US" sz="1140" dirty="0"/>
+          </a:p>
+          <a:p>
+            <a:pPr indent="0" marL="0">
+              <a:buNone/>
+            </a:pPr>
+            <a:r>
+              <a:rPr lang="en-US" sz="1140" dirty="0">
                 <a:solidFill>
                   <a:srgbClr val="17364A"/>
                 </a:solidFill>
@@ -17112,16 +17118,16 @@
                 <a:ea typeface="Aptos" pitchFamily="34" charset="-122"/>
                 <a:cs typeface="Aptos" pitchFamily="34" charset="-120"/>
               </a:rPr>
-              <a:t>The vendor configured the model, IT manages access, environmental.</a:t>
-            </a:r>
-            <a:endParaRPr lang="en-US" sz="1220" dirty="0"/>
-          </a:p>
-          <a:p>
-            <a:pPr indent="0" marL="0">
-              <a:buNone/>
-            </a:pPr>
-            <a:r>
-              <a:rPr lang="en-US" sz="1220" dirty="0">
+              <a:t>The vendor configured the model, IT manages.</a:t>
+            </a:r>
+            <a:endParaRPr lang="en-US" sz="1140" dirty="0"/>
+          </a:p>
+          <a:p>
+            <a:pPr indent="0" marL="0">
+              <a:buNone/>
+            </a:pPr>
+            <a:r>
+              <a:rPr lang="en-US" sz="1140" dirty="0">
                 <a:solidFill>
                   <a:srgbClr val="17364A"/>
                 </a:solidFill>
@@ -17131,7 +17137,7 @@
               </a:rPr>
               <a:t>A decision-rights matrix helps the agency respond.</a:t>
             </a:r>
-            <a:endParaRPr lang="en-US" sz="1220" dirty="0"/>
+            <a:endParaRPr lang="en-US" sz="1140" dirty="0"/>
           </a:p>
         </p:txBody>
       </p:sp>
@@ -17143,12 +17149,12 @@
         </p:nvSpPr>
         <p:spPr>
           <a:xfrm>
-            <a:off x="7635240" y="4184294"/>
-            <a:ext cx="3474720" cy="1466698"/>
+            <a:off x="7543800" y="4389120"/>
+            <a:ext cx="3611880" cy="1261872"/>
           </a:xfrm>
           <a:prstGeom prst="roundRect">
             <a:avLst>
-              <a:gd name="adj" fmla="val 7481"/>
+              <a:gd name="adj" fmla="val 8696"/>
             </a:avLst>
           </a:prstGeom>
           <a:solidFill>
@@ -17170,8 +17176,8 @@
         </p:nvSpPr>
         <p:spPr>
           <a:xfrm>
-            <a:off x="7799832" y="4330598"/>
-            <a:ext cx="3145536" cy="256032"/>
+            <a:off x="7708392" y="4517136"/>
+            <a:ext cx="3282696" cy="228600"/>
           </a:xfrm>
           <a:prstGeom prst="rect">
             <a:avLst/>
@@ -17187,7 +17193,7 @@
               <a:buNone/>
             </a:pPr>
             <a:r>
-              <a:rPr lang="en-US" sz="1300" b="1" dirty="0">
+              <a:rPr lang="en-US" sz="1220" b="1" dirty="0">
                 <a:solidFill>
                   <a:srgbClr val="0068B7"/>
                 </a:solidFill>
@@ -17197,7 +17203,7 @@
               </a:rPr>
               <a:t>What to document</a:t>
             </a:r>
-            <a:endParaRPr lang="en-US" sz="1300" dirty="0"/>
+            <a:endParaRPr lang="en-US" sz="1220" dirty="0"/>
           </a:p>
         </p:txBody>
       </p:sp>
@@ -17209,8 +17215,8 @@
         </p:nvSpPr>
         <p:spPr>
           <a:xfrm>
-            <a:off x="7799832" y="4659782"/>
-            <a:ext cx="3145536" cy="899770"/>
+            <a:off x="7708392" y="4828032"/>
+            <a:ext cx="3282696" cy="749808"/>
           </a:xfrm>
           <a:prstGeom prst="rect">
             <a:avLst/>
@@ -17228,7 +17234,7 @@
               <a:buNone/>
             </a:pPr>
             <a:r>
-              <a:rPr lang="en-US" sz="1320" dirty="0">
+              <a:rPr lang="en-US" sz="1220" dirty="0">
                 <a:solidFill>
                   <a:srgbClr val="17364A"/>
                 </a:solidFill>
@@ -17236,9 +17242,9 @@
                 <a:ea typeface="Aptos" pitchFamily="34" charset="-122"/>
                 <a:cs typeface="Aptos" pitchFamily="34" charset="-120"/>
               </a:rPr>
-              <a:t>Connect the concept to public health purpose, responsible use, required safeguards, documentation, and the next action a department should take.</a:t>
-            </a:r>
-            <a:endParaRPr lang="en-US" sz="1320" dirty="0"/>
+              <a:t>Connect the concept to public health purpose, responsible use, required.</a:t>
+            </a:r>
+            <a:endParaRPr lang="en-US" sz="1220" dirty="0"/>
           </a:p>
         </p:txBody>
       </p:sp>

--- a/downloads/presentations/modules/exe-400.pptx
+++ b/downloads/presentations/modules/exe-400.pptx
@@ -9430,7 +9430,7 @@
                 <a:ea typeface="Aptos" pitchFamily="34" charset="-122"/>
                 <a:cs typeface="Aptos" pitchFamily="34" charset="-120"/>
               </a:rPr>
-              <a:t>• 1. What is the strongest reason this module topic belongs in AI leadership.</a:t>
+              <a:t>1. What is the strongest reason this module topic belongs in AI leadership.</a:t>
             </a:r>
             <a:endParaRPr lang="en-US" sz="1920" dirty="0"/>
           </a:p>
@@ -9447,7 +9447,7 @@
                 <a:ea typeface="Aptos" pitchFamily="34" charset="-122"/>
                 <a:cs typeface="Aptos" pitchFamily="34" charset="-120"/>
               </a:rPr>
-              <a:t>• 2. Which practice best supports accountable public health AI governance?</a:t>
+              <a:t>2. Which practice best supports accountable public health AI governance?</a:t>
             </a:r>
             <a:endParaRPr lang="en-US" sz="1920" dirty="0"/>
           </a:p>
@@ -9464,7 +9464,7 @@
                 <a:ea typeface="Aptos" pitchFamily="34" charset="-122"/>
                 <a:cs typeface="Aptos" pitchFamily="34" charset="-120"/>
               </a:rPr>
-              <a:t>• 3. When should an AI use case be escalated for leadership or governance.</a:t>
+              <a:t>3. When should an AI use case be escalated for leadership or governance.</a:t>
             </a:r>
             <a:endParaRPr lang="en-US" sz="1920" dirty="0"/>
           </a:p>
@@ -9571,7 +9571,7 @@
                 <a:ea typeface="Aptos" pitchFamily="34" charset="-122"/>
                 <a:cs typeface="Aptos" pitchFamily="34" charset="-120"/>
               </a:rPr>
-              <a:t>1. What is the strongest reason this module topic belongs in AI leadership and.</a:t>
+              <a:t>What is the strongest reason this module topic belongs in AI leadership and.</a:t>
             </a:r>
             <a:endParaRPr lang="en-US" sz="1220" dirty="0"/>
           </a:p>
@@ -9678,41 +9678,7 @@
                 <a:ea typeface="Aptos" pitchFamily="34" charset="-122"/>
                 <a:cs typeface="Aptos" pitchFamily="34" charset="-120"/>
               </a:rPr>
-              <a:t>1.</a:t>
-            </a:r>
-            <a:endParaRPr lang="en-US" sz="1140" dirty="0"/>
-          </a:p>
-          <a:p>
-            <a:pPr indent="0" marL="0">
-              <a:buNone/>
-            </a:pPr>
-            <a:r>
-              <a:rPr lang="en-US" sz="1140" dirty="0">
-                <a:solidFill>
-                  <a:srgbClr val="17364A"/>
-                </a:solidFill>
-                <a:latin typeface="Aptos" pitchFamily="34" charset="0"/>
-                <a:ea typeface="Aptos" pitchFamily="34" charset="-122"/>
-                <a:cs typeface="Aptos" pitchFamily="34" charset="-120"/>
-              </a:rPr>
               <a:t>What is the strongest reason this module topic.</a:t>
-            </a:r>
-            <a:endParaRPr lang="en-US" sz="1140" dirty="0"/>
-          </a:p>
-          <a:p>
-            <a:pPr indent="0" marL="0">
-              <a:buNone/>
-            </a:pPr>
-            <a:r>
-              <a:rPr lang="en-US" sz="1140" dirty="0">
-                <a:solidFill>
-                  <a:srgbClr val="17364A"/>
-                </a:solidFill>
-                <a:latin typeface="Aptos" pitchFamily="34" charset="0"/>
-                <a:ea typeface="Aptos" pitchFamily="34" charset="-122"/>
-                <a:cs typeface="Aptos" pitchFamily="34" charset="-120"/>
-              </a:rPr>
-              <a:t>2.</a:t>
             </a:r>
             <a:endParaRPr lang="en-US" sz="1140" dirty="0"/>
           </a:p>
